--- a/PRIO_Top_CAPEX_OPEX_Despriorizados_2027.pptx
+++ b/PRIO_Top_CAPEX_OPEX_Despriorizados_2027.pptx
@@ -3959,7 +3959,7 @@
                 <a:ea typeface="Cambria" pitchFamily="34" charset="-122"/>
                 <a:cs typeface="Cambria" pitchFamily="34" charset="-120"/>
               </a:rPr>
-              <a:t>Top 10 CAPEX por Área Requisitante</a:t>
+              <a:t>Top 10 CAPEX por Escopo</a:t>
             </a:r>
             <a:endParaRPr lang="en-US" sz="2400" dirty="0"/>
           </a:p>
@@ -3998,7 +3998,7 @@
                 <a:ea typeface="Calibri" pitchFamily="34" charset="-122"/>
                 <a:cs typeface="Calibri" pitchFamily="34" charset="-120"/>
               </a:rPr>
-              <a:t>Ano 2027 · soma do CAPEX de todos os ativos, por área · exclui Desenvolvimento de Produção</a:t>
+              <a:t>Ano 2027 · maiores escopos individuais de CAPEX (status 'Contar' + 'TA'), por ativo</a:t>
             </a:r>
             <a:endParaRPr lang="en-US" sz="1250" dirty="0"/>
           </a:p>
@@ -4020,19 +4020,21 @@
         </p:nvGraphicFramePr>
         <p:xfrm>
           <a:off x="457200" y="1188720"/>
-          <a:ext cx="10332720" cy="914400"/>
+          <a:ext cx="11247120" cy="914400"/>
         </p:xfrm>
         <a:graphic>
           <a:graphicData uri="http://schemas.openxmlformats.org/drawingml/2006/table">
             <a:tbl>
               <a:tblPr/>
               <a:tblGrid>
-                <a:gridCol w="619963"/>
-                <a:gridCol w="5166360"/>
-                <a:gridCol w="2686507"/>
-                <a:gridCol w="1859890"/>
+                <a:gridCol w="562356"/>
+                <a:gridCol w="3374136"/>
+                <a:gridCol w="1574597"/>
+                <a:gridCol w="2136953"/>
+                <a:gridCol w="2024482"/>
+                <a:gridCol w="1574597"/>
               </a:tblGrid>
-              <a:tr h="374904">
+              <a:tr h="420624">
                 <a:tc>
                   <a:txBody>
                     <a:bodyPr/>
@@ -4118,8 +4120,280 @@
                           <a:ea typeface="Calibri" pitchFamily="34" charset="-122"/>
                           <a:cs typeface="Calibri" pitchFamily="34" charset="-120"/>
                         </a:rPr>
+                        <a:t>DESCRIÇÃO DO ESCOPO</a:t>
+                      </a:r>
+                      <a:endParaRPr lang="en-US" sz="1000" dirty="0">
+                        <a:latin typeface="Calibri" charset="0"/>
+                        <a:ea typeface="Calibri" charset="0"/>
+                        <a:cs typeface="Calibri" charset="0"/>
+                      </a:endParaRPr>
+                    </a:p>
+                  </a:txBody>
+                  <a:tcPr marL="91440" marR="91440" marT="45720" marB="45720" anchor="ctr">
+                    <a:lnL w="6350" cap="flat" cmpd="sng" algn="ctr">
+                      <a:solidFill>
+                        <a:srgbClr val="E3E8E9"/>
+                      </a:solidFill>
+                      <a:prstDash val="solid"/>
+                      <a:round/>
+                      <a:headEnd type="none" w="med" len="med"/>
+                      <a:tailEnd type="none" w="med" len="med"/>
+                    </a:lnL>
+                    <a:lnR w="6350" cap="flat" cmpd="sng" algn="ctr">
+                      <a:solidFill>
+                        <a:srgbClr val="E3E8E9"/>
+                      </a:solidFill>
+                      <a:prstDash val="solid"/>
+                      <a:round/>
+                      <a:headEnd type="none" w="med" len="med"/>
+                      <a:tailEnd type="none" w="med" len="med"/>
+                    </a:lnR>
+                    <a:lnT w="6350" cap="flat" cmpd="sng" algn="ctr">
+                      <a:solidFill>
+                        <a:srgbClr val="E3E8E9"/>
+                      </a:solidFill>
+                      <a:prstDash val="solid"/>
+                      <a:round/>
+                      <a:headEnd type="none" w="med" len="med"/>
+                      <a:tailEnd type="none" w="med" len="med"/>
+                    </a:lnT>
+                    <a:lnB w="6350" cap="flat" cmpd="sng" algn="ctr">
+                      <a:solidFill>
+                        <a:srgbClr val="E3E8E9"/>
+                      </a:solidFill>
+                      <a:prstDash val="solid"/>
+                      <a:round/>
+                      <a:headEnd type="none" w="med" len="med"/>
+                      <a:tailEnd type="none" w="med" len="med"/>
+                    </a:lnB>
+                    <a:solidFill>
+                      <a:srgbClr val="0B2A3D"/>
+                    </a:solidFill>
+                  </a:tcPr>
+                </a:tc>
+                <a:tc>
+                  <a:txBody>
+                    <a:bodyPr/>
+                    <a:lstStyle/>
+                    <a:p>
+                      <a:pPr indent="0" marL="0">
+                        <a:buNone/>
+                      </a:pPr>
+                      <a:r>
+                        <a:rPr lang="en-US" sz="1000" b="1" dirty="0">
+                          <a:solidFill>
+                            <a:srgbClr val="FFFFFF"/>
+                          </a:solidFill>
+                          <a:latin typeface="Calibri" pitchFamily="34" charset="0"/>
+                          <a:ea typeface="Calibri" pitchFamily="34" charset="-122"/>
+                          <a:cs typeface="Calibri" pitchFamily="34" charset="-120"/>
+                        </a:rPr>
+                        <a:t>ATIVO</a:t>
+                      </a:r>
+                      <a:endParaRPr lang="en-US" sz="1000" dirty="0">
+                        <a:latin typeface="Calibri" charset="0"/>
+                        <a:ea typeface="Calibri" charset="0"/>
+                        <a:cs typeface="Calibri" charset="0"/>
+                      </a:endParaRPr>
+                    </a:p>
+                  </a:txBody>
+                  <a:tcPr marL="91440" marR="91440" marT="45720" marB="45720" anchor="ctr">
+                    <a:lnL w="6350" cap="flat" cmpd="sng" algn="ctr">
+                      <a:solidFill>
+                        <a:srgbClr val="E3E8E9"/>
+                      </a:solidFill>
+                      <a:prstDash val="solid"/>
+                      <a:round/>
+                      <a:headEnd type="none" w="med" len="med"/>
+                      <a:tailEnd type="none" w="med" len="med"/>
+                    </a:lnL>
+                    <a:lnR w="6350" cap="flat" cmpd="sng" algn="ctr">
+                      <a:solidFill>
+                        <a:srgbClr val="E3E8E9"/>
+                      </a:solidFill>
+                      <a:prstDash val="solid"/>
+                      <a:round/>
+                      <a:headEnd type="none" w="med" len="med"/>
+                      <a:tailEnd type="none" w="med" len="med"/>
+                    </a:lnR>
+                    <a:lnT w="6350" cap="flat" cmpd="sng" algn="ctr">
+                      <a:solidFill>
+                        <a:srgbClr val="E3E8E9"/>
+                      </a:solidFill>
+                      <a:prstDash val="solid"/>
+                      <a:round/>
+                      <a:headEnd type="none" w="med" len="med"/>
+                      <a:tailEnd type="none" w="med" len="med"/>
+                    </a:lnT>
+                    <a:lnB w="6350" cap="flat" cmpd="sng" algn="ctr">
+                      <a:solidFill>
+                        <a:srgbClr val="E3E8E9"/>
+                      </a:solidFill>
+                      <a:prstDash val="solid"/>
+                      <a:round/>
+                      <a:headEnd type="none" w="med" len="med"/>
+                      <a:tailEnd type="none" w="med" len="med"/>
+                    </a:lnB>
+                    <a:solidFill>
+                      <a:srgbClr val="0B2A3D"/>
+                    </a:solidFill>
+                  </a:tcPr>
+                </a:tc>
+                <a:tc>
+                  <a:txBody>
+                    <a:bodyPr/>
+                    <a:lstStyle/>
+                    <a:p>
+                      <a:pPr indent="0" marL="0">
+                        <a:buNone/>
+                      </a:pPr>
+                      <a:r>
+                        <a:rPr lang="en-US" sz="950" b="1" dirty="0">
+                          <a:solidFill>
+                            <a:srgbClr val="FFFFFF"/>
+                          </a:solidFill>
+                          <a:latin typeface="Calibri" pitchFamily="34" charset="0"/>
+                          <a:ea typeface="Calibri" pitchFamily="34" charset="-122"/>
+                          <a:cs typeface="Calibri" pitchFamily="34" charset="-120"/>
+                        </a:rPr>
                         <a:t>ÁREA REQUISITANTE</a:t>
                       </a:r>
+                      <a:endParaRPr lang="en-US" sz="950" dirty="0">
+                        <a:latin typeface="Calibri" charset="0"/>
+                        <a:ea typeface="Calibri" charset="0"/>
+                        <a:cs typeface="Calibri" charset="0"/>
+                      </a:endParaRPr>
+                    </a:p>
+                  </a:txBody>
+                  <a:tcPr marL="91440" marR="91440" marT="45720" marB="45720" anchor="ctr">
+                    <a:lnL w="6350" cap="flat" cmpd="sng" algn="ctr">
+                      <a:solidFill>
+                        <a:srgbClr val="E3E8E9"/>
+                      </a:solidFill>
+                      <a:prstDash val="solid"/>
+                      <a:round/>
+                      <a:headEnd type="none" w="med" len="med"/>
+                      <a:tailEnd type="none" w="med" len="med"/>
+                    </a:lnL>
+                    <a:lnR w="6350" cap="flat" cmpd="sng" algn="ctr">
+                      <a:solidFill>
+                        <a:srgbClr val="E3E8E9"/>
+                      </a:solidFill>
+                      <a:prstDash val="solid"/>
+                      <a:round/>
+                      <a:headEnd type="none" w="med" len="med"/>
+                      <a:tailEnd type="none" w="med" len="med"/>
+                    </a:lnR>
+                    <a:lnT w="6350" cap="flat" cmpd="sng" algn="ctr">
+                      <a:solidFill>
+                        <a:srgbClr val="E3E8E9"/>
+                      </a:solidFill>
+                      <a:prstDash val="solid"/>
+                      <a:round/>
+                      <a:headEnd type="none" w="med" len="med"/>
+                      <a:tailEnd type="none" w="med" len="med"/>
+                    </a:lnT>
+                    <a:lnB w="6350" cap="flat" cmpd="sng" algn="ctr">
+                      <a:solidFill>
+                        <a:srgbClr val="E3E8E9"/>
+                      </a:solidFill>
+                      <a:prstDash val="solid"/>
+                      <a:round/>
+                      <a:headEnd type="none" w="med" len="med"/>
+                      <a:tailEnd type="none" w="med" len="med"/>
+                    </a:lnB>
+                    <a:solidFill>
+                      <a:srgbClr val="0B2A3D"/>
+                    </a:solidFill>
+                  </a:tcPr>
+                </a:tc>
+                <a:tc>
+                  <a:txBody>
+                    <a:bodyPr/>
+                    <a:lstStyle/>
+                    <a:p>
+                      <a:pPr indent="0" marL="0">
+                        <a:buNone/>
+                      </a:pPr>
+                      <a:r>
+                        <a:rPr lang="en-US" sz="950" b="1" dirty="0">
+                          <a:solidFill>
+                            <a:srgbClr val="FFFFFF"/>
+                          </a:solidFill>
+                          <a:latin typeface="Calibri" pitchFamily="34" charset="0"/>
+                          <a:ea typeface="Calibri" pitchFamily="34" charset="-122"/>
+                          <a:cs typeface="Calibri" pitchFamily="34" charset="-120"/>
+                        </a:rPr>
+                        <a:t>CATEGORIA</a:t>
+                      </a:r>
+                      <a:endParaRPr lang="en-US" sz="950" dirty="0">
+                        <a:latin typeface="Calibri" charset="0"/>
+                        <a:ea typeface="Calibri" charset="0"/>
+                        <a:cs typeface="Calibri" charset="0"/>
+                      </a:endParaRPr>
+                    </a:p>
+                  </a:txBody>
+                  <a:tcPr marL="91440" marR="91440" marT="45720" marB="45720" anchor="ctr">
+                    <a:lnL w="6350" cap="flat" cmpd="sng" algn="ctr">
+                      <a:solidFill>
+                        <a:srgbClr val="E3E8E9"/>
+                      </a:solidFill>
+                      <a:prstDash val="solid"/>
+                      <a:round/>
+                      <a:headEnd type="none" w="med" len="med"/>
+                      <a:tailEnd type="none" w="med" len="med"/>
+                    </a:lnL>
+                    <a:lnR w="6350" cap="flat" cmpd="sng" algn="ctr">
+                      <a:solidFill>
+                        <a:srgbClr val="E3E8E9"/>
+                      </a:solidFill>
+                      <a:prstDash val="solid"/>
+                      <a:round/>
+                      <a:headEnd type="none" w="med" len="med"/>
+                      <a:tailEnd type="none" w="med" len="med"/>
+                    </a:lnR>
+                    <a:lnT w="6350" cap="flat" cmpd="sng" algn="ctr">
+                      <a:solidFill>
+                        <a:srgbClr val="E3E8E9"/>
+                      </a:solidFill>
+                      <a:prstDash val="solid"/>
+                      <a:round/>
+                      <a:headEnd type="none" w="med" len="med"/>
+                      <a:tailEnd type="none" w="med" len="med"/>
+                    </a:lnT>
+                    <a:lnB w="6350" cap="flat" cmpd="sng" algn="ctr">
+                      <a:solidFill>
+                        <a:srgbClr val="E3E8E9"/>
+                      </a:solidFill>
+                      <a:prstDash val="solid"/>
+                      <a:round/>
+                      <a:headEnd type="none" w="med" len="med"/>
+                      <a:tailEnd type="none" w="med" len="med"/>
+                    </a:lnB>
+                    <a:solidFill>
+                      <a:srgbClr val="0B2A3D"/>
+                    </a:solidFill>
+                  </a:tcPr>
+                </a:tc>
+                <a:tc>
+                  <a:txBody>
+                    <a:bodyPr/>
+                    <a:lstStyle/>
+                    <a:p>
+                      <a:pPr algn="r" indent="0" marL="0">
+                        <a:buNone/>
+                      </a:pPr>
+                      <a:r>
+                        <a:rPr lang="en-US" sz="1000" b="1" dirty="0">
+                          <a:solidFill>
+                            <a:srgbClr val="FFFFFF"/>
+                          </a:solidFill>
+                          <a:latin typeface="Calibri" pitchFamily="34" charset="0"/>
+                          <a:ea typeface="Calibri" pitchFamily="34" charset="-122"/>
+                          <a:cs typeface="Calibri" pitchFamily="34" charset="-120"/>
+                        </a:rPr>
+                        <a:t>VALOR TOTAL</a:t>
+                      </a:r>
                       <a:endParaRPr lang="en-US" sz="1000" dirty="0">
                         <a:latin typeface="Calibri" charset="0"/>
                         <a:ea typeface="Calibri" charset="0"/>
@@ -4169,6 +4443,348 @@
                     </a:solidFill>
                   </a:tcPr>
                 </a:tc>
+              </a:tr>
+              <a:tr h="420624">
+                <a:tc>
+                  <a:txBody>
+                    <a:bodyPr/>
+                    <a:lstStyle/>
+                    <a:p>
+                      <a:pPr algn="ctr" indent="0" marL="0">
+                        <a:buNone/>
+                      </a:pPr>
+                      <a:r>
+                        <a:rPr lang="en-US" sz="1000" dirty="0">
+                          <a:solidFill>
+                            <a:srgbClr val="5B6B73"/>
+                          </a:solidFill>
+                          <a:latin typeface="Calibri" pitchFamily="34" charset="0"/>
+                          <a:ea typeface="Calibri" pitchFamily="34" charset="-122"/>
+                          <a:cs typeface="Calibri" pitchFamily="34" charset="-120"/>
+                        </a:rPr>
+                        <a:t>1</a:t>
+                      </a:r>
+                      <a:endParaRPr lang="en-US" sz="1000" dirty="0">
+                        <a:latin typeface="Calibri" charset="0"/>
+                        <a:ea typeface="Calibri" charset="0"/>
+                        <a:cs typeface="Calibri" charset="0"/>
+                      </a:endParaRPr>
+                    </a:p>
+                  </a:txBody>
+                  <a:tcPr marL="91440" marR="91440" marT="45720" marB="45720" anchor="ctr">
+                    <a:lnL w="6350" cap="flat" cmpd="sng" algn="ctr">
+                      <a:solidFill>
+                        <a:srgbClr val="E3E8E9"/>
+                      </a:solidFill>
+                      <a:prstDash val="solid"/>
+                      <a:round/>
+                      <a:headEnd type="none" w="med" len="med"/>
+                      <a:tailEnd type="none" w="med" len="med"/>
+                    </a:lnL>
+                    <a:lnR w="6350" cap="flat" cmpd="sng" algn="ctr">
+                      <a:solidFill>
+                        <a:srgbClr val="E3E8E9"/>
+                      </a:solidFill>
+                      <a:prstDash val="solid"/>
+                      <a:round/>
+                      <a:headEnd type="none" w="med" len="med"/>
+                      <a:tailEnd type="none" w="med" len="med"/>
+                    </a:lnR>
+                    <a:lnT w="6350" cap="flat" cmpd="sng" algn="ctr">
+                      <a:solidFill>
+                        <a:srgbClr val="E3E8E9"/>
+                      </a:solidFill>
+                      <a:prstDash val="solid"/>
+                      <a:round/>
+                      <a:headEnd type="none" w="med" len="med"/>
+                      <a:tailEnd type="none" w="med" len="med"/>
+                    </a:lnT>
+                    <a:lnB w="6350" cap="flat" cmpd="sng" algn="ctr">
+                      <a:solidFill>
+                        <a:srgbClr val="E3E8E9"/>
+                      </a:solidFill>
+                      <a:prstDash val="solid"/>
+                      <a:round/>
+                      <a:headEnd type="none" w="med" len="med"/>
+                      <a:tailEnd type="none" w="med" len="med"/>
+                    </a:lnB>
+                    <a:solidFill>
+                      <a:srgbClr val="FFFFFF"/>
+                    </a:solidFill>
+                  </a:tcPr>
+                </a:tc>
+                <a:tc>
+                  <a:txBody>
+                    <a:bodyPr/>
+                    <a:lstStyle/>
+                    <a:p>
+                      <a:pPr indent="0" marL="0">
+                        <a:buNone/>
+                      </a:pPr>
+                      <a:r>
+                        <a:rPr lang="en-US" sz="1000" dirty="0">
+                          <a:solidFill>
+                            <a:srgbClr val="1C2B33"/>
+                          </a:solidFill>
+                          <a:latin typeface="Calibri" pitchFamily="34" charset="0"/>
+                          <a:ea typeface="Calibri" pitchFamily="34" charset="-122"/>
+                          <a:cs typeface="Calibri" pitchFamily="34" charset="-120"/>
+                        </a:rPr>
+                        <a:t>SUBSTITUIÇÃO DOS BOOGIES DO TURRET</a:t>
+                      </a:r>
+                      <a:endParaRPr lang="en-US" sz="1000" dirty="0">
+                        <a:latin typeface="Calibri" charset="0"/>
+                        <a:ea typeface="Calibri" charset="0"/>
+                        <a:cs typeface="Calibri" charset="0"/>
+                      </a:endParaRPr>
+                    </a:p>
+                  </a:txBody>
+                  <a:tcPr marL="91440" marR="91440" marT="45720" marB="45720" anchor="ctr">
+                    <a:lnL w="6350" cap="flat" cmpd="sng" algn="ctr">
+                      <a:solidFill>
+                        <a:srgbClr val="E3E8E9"/>
+                      </a:solidFill>
+                      <a:prstDash val="solid"/>
+                      <a:round/>
+                      <a:headEnd type="none" w="med" len="med"/>
+                      <a:tailEnd type="none" w="med" len="med"/>
+                    </a:lnL>
+                    <a:lnR w="6350" cap="flat" cmpd="sng" algn="ctr">
+                      <a:solidFill>
+                        <a:srgbClr val="E3E8E9"/>
+                      </a:solidFill>
+                      <a:prstDash val="solid"/>
+                      <a:round/>
+                      <a:headEnd type="none" w="med" len="med"/>
+                      <a:tailEnd type="none" w="med" len="med"/>
+                    </a:lnR>
+                    <a:lnT w="6350" cap="flat" cmpd="sng" algn="ctr">
+                      <a:solidFill>
+                        <a:srgbClr val="E3E8E9"/>
+                      </a:solidFill>
+                      <a:prstDash val="solid"/>
+                      <a:round/>
+                      <a:headEnd type="none" w="med" len="med"/>
+                      <a:tailEnd type="none" w="med" len="med"/>
+                    </a:lnT>
+                    <a:lnB w="6350" cap="flat" cmpd="sng" algn="ctr">
+                      <a:solidFill>
+                        <a:srgbClr val="E3E8E9"/>
+                      </a:solidFill>
+                      <a:prstDash val="solid"/>
+                      <a:round/>
+                      <a:headEnd type="none" w="med" len="med"/>
+                      <a:tailEnd type="none" w="med" len="med"/>
+                    </a:lnB>
+                    <a:solidFill>
+                      <a:srgbClr val="FFFFFF"/>
+                    </a:solidFill>
+                  </a:tcPr>
+                </a:tc>
+                <a:tc>
+                  <a:txBody>
+                    <a:bodyPr/>
+                    <a:lstStyle/>
+                    <a:p>
+                      <a:pPr indent="0" marL="0">
+                        <a:buNone/>
+                      </a:pPr>
+                      <a:r>
+                        <a:rPr lang="en-US" sz="950" dirty="0">
+                          <a:solidFill>
+                            <a:srgbClr val="5B6B73"/>
+                          </a:solidFill>
+                          <a:latin typeface="Calibri" pitchFamily="34" charset="0"/>
+                          <a:ea typeface="Calibri" pitchFamily="34" charset="-122"/>
+                          <a:cs typeface="Calibri" pitchFamily="34" charset="-120"/>
+                        </a:rPr>
+                        <a:t>FPSO Frade</a:t>
+                      </a:r>
+                      <a:endParaRPr lang="en-US" sz="950" dirty="0">
+                        <a:latin typeface="Calibri" charset="0"/>
+                        <a:ea typeface="Calibri" charset="0"/>
+                        <a:cs typeface="Calibri" charset="0"/>
+                      </a:endParaRPr>
+                    </a:p>
+                  </a:txBody>
+                  <a:tcPr marL="91440" marR="91440" marT="45720" marB="45720" anchor="ctr">
+                    <a:lnL w="6350" cap="flat" cmpd="sng" algn="ctr">
+                      <a:solidFill>
+                        <a:srgbClr val="E3E8E9"/>
+                      </a:solidFill>
+                      <a:prstDash val="solid"/>
+                      <a:round/>
+                      <a:headEnd type="none" w="med" len="med"/>
+                      <a:tailEnd type="none" w="med" len="med"/>
+                    </a:lnL>
+                    <a:lnR w="6350" cap="flat" cmpd="sng" algn="ctr">
+                      <a:solidFill>
+                        <a:srgbClr val="E3E8E9"/>
+                      </a:solidFill>
+                      <a:prstDash val="solid"/>
+                      <a:round/>
+                      <a:headEnd type="none" w="med" len="med"/>
+                      <a:tailEnd type="none" w="med" len="med"/>
+                    </a:lnR>
+                    <a:lnT w="6350" cap="flat" cmpd="sng" algn="ctr">
+                      <a:solidFill>
+                        <a:srgbClr val="E3E8E9"/>
+                      </a:solidFill>
+                      <a:prstDash val="solid"/>
+                      <a:round/>
+                      <a:headEnd type="none" w="med" len="med"/>
+                      <a:tailEnd type="none" w="med" len="med"/>
+                    </a:lnT>
+                    <a:lnB w="6350" cap="flat" cmpd="sng" algn="ctr">
+                      <a:solidFill>
+                        <a:srgbClr val="E3E8E9"/>
+                      </a:solidFill>
+                      <a:prstDash val="solid"/>
+                      <a:round/>
+                      <a:headEnd type="none" w="med" len="med"/>
+                      <a:tailEnd type="none" w="med" len="med"/>
+                    </a:lnB>
+                    <a:solidFill>
+                      <a:srgbClr val="FFFFFF"/>
+                    </a:solidFill>
+                  </a:tcPr>
+                </a:tc>
+                <a:tc>
+                  <a:txBody>
+                    <a:bodyPr/>
+                    <a:lstStyle/>
+                    <a:p>
+                      <a:pPr indent="0" marL="0">
+                        <a:buNone/>
+                      </a:pPr>
+                      <a:r>
+                        <a:rPr lang="en-US" sz="900" dirty="0">
+                          <a:solidFill>
+                            <a:srgbClr val="5B6B73"/>
+                          </a:solidFill>
+                          <a:latin typeface="Calibri" pitchFamily="34" charset="0"/>
+                          <a:ea typeface="Calibri" pitchFamily="34" charset="-122"/>
+                          <a:cs typeface="Calibri" pitchFamily="34" charset="-120"/>
+                        </a:rPr>
+                        <a:t>NAV - Naval</a:t>
+                      </a:r>
+                      <a:endParaRPr lang="en-US" sz="900" dirty="0">
+                        <a:latin typeface="Calibri" charset="0"/>
+                        <a:ea typeface="Calibri" charset="0"/>
+                        <a:cs typeface="Calibri" charset="0"/>
+                      </a:endParaRPr>
+                    </a:p>
+                  </a:txBody>
+                  <a:tcPr marL="91440" marR="91440" marT="45720" marB="45720" anchor="ctr">
+                    <a:lnL w="6350" cap="flat" cmpd="sng" algn="ctr">
+                      <a:solidFill>
+                        <a:srgbClr val="E3E8E9"/>
+                      </a:solidFill>
+                      <a:prstDash val="solid"/>
+                      <a:round/>
+                      <a:headEnd type="none" w="med" len="med"/>
+                      <a:tailEnd type="none" w="med" len="med"/>
+                    </a:lnL>
+                    <a:lnR w="6350" cap="flat" cmpd="sng" algn="ctr">
+                      <a:solidFill>
+                        <a:srgbClr val="E3E8E9"/>
+                      </a:solidFill>
+                      <a:prstDash val="solid"/>
+                      <a:round/>
+                      <a:headEnd type="none" w="med" len="med"/>
+                      <a:tailEnd type="none" w="med" len="med"/>
+                    </a:lnR>
+                    <a:lnT w="6350" cap="flat" cmpd="sng" algn="ctr">
+                      <a:solidFill>
+                        <a:srgbClr val="E3E8E9"/>
+                      </a:solidFill>
+                      <a:prstDash val="solid"/>
+                      <a:round/>
+                      <a:headEnd type="none" w="med" len="med"/>
+                      <a:tailEnd type="none" w="med" len="med"/>
+                    </a:lnT>
+                    <a:lnB w="6350" cap="flat" cmpd="sng" algn="ctr">
+                      <a:solidFill>
+                        <a:srgbClr val="E3E8E9"/>
+                      </a:solidFill>
+                      <a:prstDash val="solid"/>
+                      <a:round/>
+                      <a:headEnd type="none" w="med" len="med"/>
+                      <a:tailEnd type="none" w="med" len="med"/>
+                    </a:lnB>
+                    <a:solidFill>
+                      <a:srgbClr val="FFFFFF"/>
+                    </a:solidFill>
+                  </a:tcPr>
+                </a:tc>
+                <a:tc>
+                  <a:txBody>
+                    <a:bodyPr/>
+                    <a:lstStyle/>
+                    <a:p>
+                      <a:pPr indent="0" marL="0">
+                        <a:buNone/>
+                      </a:pPr>
+                      <a:r>
+                        <a:rPr lang="en-US" sz="900" dirty="0">
+                          <a:solidFill>
+                            <a:srgbClr val="5B6B73"/>
+                          </a:solidFill>
+                          <a:latin typeface="Calibri" pitchFamily="34" charset="0"/>
+                          <a:ea typeface="Calibri" pitchFamily="34" charset="-122"/>
+                          <a:cs typeface="Calibri" pitchFamily="34" charset="-120"/>
+                        </a:rPr>
+                        <a:t>Integridade e Regulatório</a:t>
+                      </a:r>
+                      <a:endParaRPr lang="en-US" sz="900" dirty="0">
+                        <a:latin typeface="Calibri" charset="0"/>
+                        <a:ea typeface="Calibri" charset="0"/>
+                        <a:cs typeface="Calibri" charset="0"/>
+                      </a:endParaRPr>
+                    </a:p>
+                  </a:txBody>
+                  <a:tcPr marL="91440" marR="91440" marT="45720" marB="45720" anchor="ctr">
+                    <a:lnL w="6350" cap="flat" cmpd="sng" algn="ctr">
+                      <a:solidFill>
+                        <a:srgbClr val="E3E8E9"/>
+                      </a:solidFill>
+                      <a:prstDash val="solid"/>
+                      <a:round/>
+                      <a:headEnd type="none" w="med" len="med"/>
+                      <a:tailEnd type="none" w="med" len="med"/>
+                    </a:lnL>
+                    <a:lnR w="6350" cap="flat" cmpd="sng" algn="ctr">
+                      <a:solidFill>
+                        <a:srgbClr val="E3E8E9"/>
+                      </a:solidFill>
+                      <a:prstDash val="solid"/>
+                      <a:round/>
+                      <a:headEnd type="none" w="med" len="med"/>
+                      <a:tailEnd type="none" w="med" len="med"/>
+                    </a:lnR>
+                    <a:lnT w="6350" cap="flat" cmpd="sng" algn="ctr">
+                      <a:solidFill>
+                        <a:srgbClr val="E3E8E9"/>
+                      </a:solidFill>
+                      <a:prstDash val="solid"/>
+                      <a:round/>
+                      <a:headEnd type="none" w="med" len="med"/>
+                      <a:tailEnd type="none" w="med" len="med"/>
+                    </a:lnT>
+                    <a:lnB w="6350" cap="flat" cmpd="sng" algn="ctr">
+                      <a:solidFill>
+                        <a:srgbClr val="E3E8E9"/>
+                      </a:solidFill>
+                      <a:prstDash val="solid"/>
+                      <a:round/>
+                      <a:headEnd type="none" w="med" len="med"/>
+                      <a:tailEnd type="none" w="med" len="med"/>
+                    </a:lnB>
+                    <a:solidFill>
+                      <a:srgbClr val="FFFFFF"/>
+                    </a:solidFill>
+                  </a:tcPr>
+                </a:tc>
                 <a:tc>
                   <a:txBody>
                     <a:bodyPr/>
@@ -4180,13 +4796,13 @@
                       <a:r>
                         <a:rPr lang="en-US" sz="1000" b="1" dirty="0">
                           <a:solidFill>
-                            <a:srgbClr val="FFFFFF"/>
-                          </a:solidFill>
-                          <a:latin typeface="Calibri" pitchFamily="34" charset="0"/>
-                          <a:ea typeface="Calibri" pitchFamily="34" charset="-122"/>
-                          <a:cs typeface="Calibri" pitchFamily="34" charset="-120"/>
-                        </a:rPr>
-                        <a:t>CAPEX TOTAL</a:t>
+                            <a:srgbClr val="0B2A3D"/>
+                          </a:solidFill>
+                          <a:latin typeface="Calibri" pitchFamily="34" charset="0"/>
+                          <a:ea typeface="Calibri" pitchFamily="34" charset="-122"/>
+                          <a:cs typeface="Calibri" pitchFamily="34" charset="-120"/>
+                        </a:rPr>
+                        <a:t>US$ 11,4 mi</a:t>
                       </a:r>
                       <a:endParaRPr lang="en-US" sz="1000" dirty="0">
                         <a:latin typeface="Calibri" charset="0"/>
@@ -4233,7 +4849,349 @@
                       <a:tailEnd type="none" w="med" len="med"/>
                     </a:lnB>
                     <a:solidFill>
-                      <a:srgbClr val="0B2A3D"/>
+                      <a:srgbClr val="FFFFFF"/>
+                    </a:solidFill>
+                  </a:tcPr>
+                </a:tc>
+              </a:tr>
+              <a:tr h="420624">
+                <a:tc>
+                  <a:txBody>
+                    <a:bodyPr/>
+                    <a:lstStyle/>
+                    <a:p>
+                      <a:pPr algn="ctr" indent="0" marL="0">
+                        <a:buNone/>
+                      </a:pPr>
+                      <a:r>
+                        <a:rPr lang="en-US" sz="1000" dirty="0">
+                          <a:solidFill>
+                            <a:srgbClr val="5B6B73"/>
+                          </a:solidFill>
+                          <a:latin typeface="Calibri" pitchFamily="34" charset="0"/>
+                          <a:ea typeface="Calibri" pitchFamily="34" charset="-122"/>
+                          <a:cs typeface="Calibri" pitchFamily="34" charset="-120"/>
+                        </a:rPr>
+                        <a:t>2</a:t>
+                      </a:r>
+                      <a:endParaRPr lang="en-US" sz="1000" dirty="0">
+                        <a:latin typeface="Calibri" charset="0"/>
+                        <a:ea typeface="Calibri" charset="0"/>
+                        <a:cs typeface="Calibri" charset="0"/>
+                      </a:endParaRPr>
+                    </a:p>
+                  </a:txBody>
+                  <a:tcPr marL="91440" marR="91440" marT="45720" marB="45720" anchor="ctr">
+                    <a:lnL w="6350" cap="flat" cmpd="sng" algn="ctr">
+                      <a:solidFill>
+                        <a:srgbClr val="E3E8E9"/>
+                      </a:solidFill>
+                      <a:prstDash val="solid"/>
+                      <a:round/>
+                      <a:headEnd type="none" w="med" len="med"/>
+                      <a:tailEnd type="none" w="med" len="med"/>
+                    </a:lnL>
+                    <a:lnR w="6350" cap="flat" cmpd="sng" algn="ctr">
+                      <a:solidFill>
+                        <a:srgbClr val="E3E8E9"/>
+                      </a:solidFill>
+                      <a:prstDash val="solid"/>
+                      <a:round/>
+                      <a:headEnd type="none" w="med" len="med"/>
+                      <a:tailEnd type="none" w="med" len="med"/>
+                    </a:lnR>
+                    <a:lnT w="6350" cap="flat" cmpd="sng" algn="ctr">
+                      <a:solidFill>
+                        <a:srgbClr val="E3E8E9"/>
+                      </a:solidFill>
+                      <a:prstDash val="solid"/>
+                      <a:round/>
+                      <a:headEnd type="none" w="med" len="med"/>
+                      <a:tailEnd type="none" w="med" len="med"/>
+                    </a:lnT>
+                    <a:lnB w="6350" cap="flat" cmpd="sng" algn="ctr">
+                      <a:solidFill>
+                        <a:srgbClr val="E3E8E9"/>
+                      </a:solidFill>
+                      <a:prstDash val="solid"/>
+                      <a:round/>
+                      <a:headEnd type="none" w="med" len="med"/>
+                      <a:tailEnd type="none" w="med" len="med"/>
+                    </a:lnB>
+                    <a:solidFill>
+                      <a:srgbClr val="F0F4F5"/>
+                    </a:solidFill>
+                  </a:tcPr>
+                </a:tc>
+                <a:tc>
+                  <a:txBody>
+                    <a:bodyPr/>
+                    <a:lstStyle/>
+                    <a:p>
+                      <a:pPr indent="0" marL="0">
+                        <a:buNone/>
+                      </a:pPr>
+                      <a:r>
+                        <a:rPr lang="en-US" sz="1000" dirty="0">
+                          <a:solidFill>
+                            <a:srgbClr val="1C2B33"/>
+                          </a:solidFill>
+                          <a:latin typeface="Calibri" pitchFamily="34" charset="0"/>
+                          <a:ea typeface="Calibri" pitchFamily="34" charset="-122"/>
+                          <a:cs typeface="Calibri" pitchFamily="34" charset="-120"/>
+                        </a:rPr>
+                        <a:t>Guincho de Pull In + Reforma do Turret</a:t>
+                      </a:r>
+                      <a:endParaRPr lang="en-US" sz="1000" dirty="0">
+                        <a:latin typeface="Calibri" charset="0"/>
+                        <a:ea typeface="Calibri" charset="0"/>
+                        <a:cs typeface="Calibri" charset="0"/>
+                      </a:endParaRPr>
+                    </a:p>
+                  </a:txBody>
+                  <a:tcPr marL="91440" marR="91440" marT="45720" marB="45720" anchor="ctr">
+                    <a:lnL w="6350" cap="flat" cmpd="sng" algn="ctr">
+                      <a:solidFill>
+                        <a:srgbClr val="E3E8E9"/>
+                      </a:solidFill>
+                      <a:prstDash val="solid"/>
+                      <a:round/>
+                      <a:headEnd type="none" w="med" len="med"/>
+                      <a:tailEnd type="none" w="med" len="med"/>
+                    </a:lnL>
+                    <a:lnR w="6350" cap="flat" cmpd="sng" algn="ctr">
+                      <a:solidFill>
+                        <a:srgbClr val="E3E8E9"/>
+                      </a:solidFill>
+                      <a:prstDash val="solid"/>
+                      <a:round/>
+                      <a:headEnd type="none" w="med" len="med"/>
+                      <a:tailEnd type="none" w="med" len="med"/>
+                    </a:lnR>
+                    <a:lnT w="6350" cap="flat" cmpd="sng" algn="ctr">
+                      <a:solidFill>
+                        <a:srgbClr val="E3E8E9"/>
+                      </a:solidFill>
+                      <a:prstDash val="solid"/>
+                      <a:round/>
+                      <a:headEnd type="none" w="med" len="med"/>
+                      <a:tailEnd type="none" w="med" len="med"/>
+                    </a:lnT>
+                    <a:lnB w="6350" cap="flat" cmpd="sng" algn="ctr">
+                      <a:solidFill>
+                        <a:srgbClr val="E3E8E9"/>
+                      </a:solidFill>
+                      <a:prstDash val="solid"/>
+                      <a:round/>
+                      <a:headEnd type="none" w="med" len="med"/>
+                      <a:tailEnd type="none" w="med" len="med"/>
+                    </a:lnB>
+                    <a:solidFill>
+                      <a:srgbClr val="F0F4F5"/>
+                    </a:solidFill>
+                  </a:tcPr>
+                </a:tc>
+                <a:tc>
+                  <a:txBody>
+                    <a:bodyPr/>
+                    <a:lstStyle/>
+                    <a:p>
+                      <a:pPr indent="0" marL="0">
+                        <a:buNone/>
+                      </a:pPr>
+                      <a:r>
+                        <a:rPr lang="en-US" sz="950" dirty="0">
+                          <a:solidFill>
+                            <a:srgbClr val="5B6B73"/>
+                          </a:solidFill>
+                          <a:latin typeface="Calibri" pitchFamily="34" charset="0"/>
+                          <a:ea typeface="Calibri" pitchFamily="34" charset="-122"/>
+                          <a:cs typeface="Calibri" pitchFamily="34" charset="-120"/>
+                        </a:rPr>
+                        <a:t>FPSO Frade</a:t>
+                      </a:r>
+                      <a:endParaRPr lang="en-US" sz="950" dirty="0">
+                        <a:latin typeface="Calibri" charset="0"/>
+                        <a:ea typeface="Calibri" charset="0"/>
+                        <a:cs typeface="Calibri" charset="0"/>
+                      </a:endParaRPr>
+                    </a:p>
+                  </a:txBody>
+                  <a:tcPr marL="91440" marR="91440" marT="45720" marB="45720" anchor="ctr">
+                    <a:lnL w="6350" cap="flat" cmpd="sng" algn="ctr">
+                      <a:solidFill>
+                        <a:srgbClr val="E3E8E9"/>
+                      </a:solidFill>
+                      <a:prstDash val="solid"/>
+                      <a:round/>
+                      <a:headEnd type="none" w="med" len="med"/>
+                      <a:tailEnd type="none" w="med" len="med"/>
+                    </a:lnL>
+                    <a:lnR w="6350" cap="flat" cmpd="sng" algn="ctr">
+                      <a:solidFill>
+                        <a:srgbClr val="E3E8E9"/>
+                      </a:solidFill>
+                      <a:prstDash val="solid"/>
+                      <a:round/>
+                      <a:headEnd type="none" w="med" len="med"/>
+                      <a:tailEnd type="none" w="med" len="med"/>
+                    </a:lnR>
+                    <a:lnT w="6350" cap="flat" cmpd="sng" algn="ctr">
+                      <a:solidFill>
+                        <a:srgbClr val="E3E8E9"/>
+                      </a:solidFill>
+                      <a:prstDash val="solid"/>
+                      <a:round/>
+                      <a:headEnd type="none" w="med" len="med"/>
+                      <a:tailEnd type="none" w="med" len="med"/>
+                    </a:lnT>
+                    <a:lnB w="6350" cap="flat" cmpd="sng" algn="ctr">
+                      <a:solidFill>
+                        <a:srgbClr val="E3E8E9"/>
+                      </a:solidFill>
+                      <a:prstDash val="solid"/>
+                      <a:round/>
+                      <a:headEnd type="none" w="med" len="med"/>
+                      <a:tailEnd type="none" w="med" len="med"/>
+                    </a:lnB>
+                    <a:solidFill>
+                      <a:srgbClr val="F0F4F5"/>
+                    </a:solidFill>
+                  </a:tcPr>
+                </a:tc>
+                <a:tc>
+                  <a:txBody>
+                    <a:bodyPr/>
+                    <a:lstStyle/>
+                    <a:p>
+                      <a:pPr indent="0" marL="0">
+                        <a:buNone/>
+                      </a:pPr>
+                      <a:r>
+                        <a:rPr lang="en-US" sz="900" dirty="0">
+                          <a:solidFill>
+                            <a:srgbClr val="5B6B73"/>
+                          </a:solidFill>
+                          <a:latin typeface="Calibri" pitchFamily="34" charset="0"/>
+                          <a:ea typeface="Calibri" pitchFamily="34" charset="-122"/>
+                          <a:cs typeface="Calibri" pitchFamily="34" charset="-120"/>
+                        </a:rPr>
+                        <a:t>Projetos</a:t>
+                      </a:r>
+                      <a:endParaRPr lang="en-US" sz="900" dirty="0">
+                        <a:latin typeface="Calibri" charset="0"/>
+                        <a:ea typeface="Calibri" charset="0"/>
+                        <a:cs typeface="Calibri" charset="0"/>
+                      </a:endParaRPr>
+                    </a:p>
+                  </a:txBody>
+                  <a:tcPr marL="91440" marR="91440" marT="45720" marB="45720" anchor="ctr">
+                    <a:lnL w="6350" cap="flat" cmpd="sng" algn="ctr">
+                      <a:solidFill>
+                        <a:srgbClr val="E3E8E9"/>
+                      </a:solidFill>
+                      <a:prstDash val="solid"/>
+                      <a:round/>
+                      <a:headEnd type="none" w="med" len="med"/>
+                      <a:tailEnd type="none" w="med" len="med"/>
+                    </a:lnL>
+                    <a:lnR w="6350" cap="flat" cmpd="sng" algn="ctr">
+                      <a:solidFill>
+                        <a:srgbClr val="E3E8E9"/>
+                      </a:solidFill>
+                      <a:prstDash val="solid"/>
+                      <a:round/>
+                      <a:headEnd type="none" w="med" len="med"/>
+                      <a:tailEnd type="none" w="med" len="med"/>
+                    </a:lnR>
+                    <a:lnT w="6350" cap="flat" cmpd="sng" algn="ctr">
+                      <a:solidFill>
+                        <a:srgbClr val="E3E8E9"/>
+                      </a:solidFill>
+                      <a:prstDash val="solid"/>
+                      <a:round/>
+                      <a:headEnd type="none" w="med" len="med"/>
+                      <a:tailEnd type="none" w="med" len="med"/>
+                    </a:lnT>
+                    <a:lnB w="6350" cap="flat" cmpd="sng" algn="ctr">
+                      <a:solidFill>
+                        <a:srgbClr val="E3E8E9"/>
+                      </a:solidFill>
+                      <a:prstDash val="solid"/>
+                      <a:round/>
+                      <a:headEnd type="none" w="med" len="med"/>
+                      <a:tailEnd type="none" w="med" len="med"/>
+                    </a:lnB>
+                    <a:solidFill>
+                      <a:srgbClr val="F0F4F5"/>
+                    </a:solidFill>
+                  </a:tcPr>
+                </a:tc>
+                <a:tc>
+                  <a:txBody>
+                    <a:bodyPr/>
+                    <a:lstStyle/>
+                    <a:p>
+                      <a:pPr indent="0" marL="0">
+                        <a:buNone/>
+                      </a:pPr>
+                      <a:r>
+                        <a:rPr lang="en-US" sz="900" dirty="0">
+                          <a:solidFill>
+                            <a:srgbClr val="5B6B73"/>
+                          </a:solidFill>
+                          <a:latin typeface="Calibri" pitchFamily="34" charset="0"/>
+                          <a:ea typeface="Calibri" pitchFamily="34" charset="-122"/>
+                          <a:cs typeface="Calibri" pitchFamily="34" charset="-120"/>
+                        </a:rPr>
+                        <a:t>Bem Estar/Segurança</a:t>
+                      </a:r>
+                      <a:endParaRPr lang="en-US" sz="900" dirty="0">
+                        <a:latin typeface="Calibri" charset="0"/>
+                        <a:ea typeface="Calibri" charset="0"/>
+                        <a:cs typeface="Calibri" charset="0"/>
+                      </a:endParaRPr>
+                    </a:p>
+                  </a:txBody>
+                  <a:tcPr marL="91440" marR="91440" marT="45720" marB="45720" anchor="ctr">
+                    <a:lnL w="6350" cap="flat" cmpd="sng" algn="ctr">
+                      <a:solidFill>
+                        <a:srgbClr val="E3E8E9"/>
+                      </a:solidFill>
+                      <a:prstDash val="solid"/>
+                      <a:round/>
+                      <a:headEnd type="none" w="med" len="med"/>
+                      <a:tailEnd type="none" w="med" len="med"/>
+                    </a:lnL>
+                    <a:lnR w="6350" cap="flat" cmpd="sng" algn="ctr">
+                      <a:solidFill>
+                        <a:srgbClr val="E3E8E9"/>
+                      </a:solidFill>
+                      <a:prstDash val="solid"/>
+                      <a:round/>
+                      <a:headEnd type="none" w="med" len="med"/>
+                      <a:tailEnd type="none" w="med" len="med"/>
+                    </a:lnR>
+                    <a:lnT w="6350" cap="flat" cmpd="sng" algn="ctr">
+                      <a:solidFill>
+                        <a:srgbClr val="E3E8E9"/>
+                      </a:solidFill>
+                      <a:prstDash val="solid"/>
+                      <a:round/>
+                      <a:headEnd type="none" w="med" len="med"/>
+                      <a:tailEnd type="none" w="med" len="med"/>
+                    </a:lnT>
+                    <a:lnB w="6350" cap="flat" cmpd="sng" algn="ctr">
+                      <a:solidFill>
+                        <a:srgbClr val="E3E8E9"/>
+                      </a:solidFill>
+                      <a:prstDash val="solid"/>
+                      <a:round/>
+                      <a:headEnd type="none" w="med" len="med"/>
+                      <a:tailEnd type="none" w="med" len="med"/>
+                    </a:lnB>
+                    <a:solidFill>
+                      <a:srgbClr val="F0F4F5"/>
                     </a:solidFill>
                   </a:tcPr>
                 </a:tc>
@@ -4248,13 +5206,13 @@
                       <a:r>
                         <a:rPr lang="en-US" sz="1000" b="1" dirty="0">
                           <a:solidFill>
-                            <a:srgbClr val="FFFFFF"/>
-                          </a:solidFill>
-                          <a:latin typeface="Calibri" pitchFamily="34" charset="0"/>
-                          <a:ea typeface="Calibri" pitchFamily="34" charset="-122"/>
-                          <a:cs typeface="Calibri" pitchFamily="34" charset="-120"/>
-                        </a:rPr>
-                        <a:t>% DO TOTAL</a:t>
+                            <a:srgbClr val="0B2A3D"/>
+                          </a:solidFill>
+                          <a:latin typeface="Calibri" pitchFamily="34" charset="0"/>
+                          <a:ea typeface="Calibri" pitchFamily="34" charset="-122"/>
+                          <a:cs typeface="Calibri" pitchFamily="34" charset="-120"/>
+                        </a:rPr>
+                        <a:t>US$ 8,7 mi</a:t>
                       </a:r>
                       <a:endParaRPr lang="en-US" sz="1000" dirty="0">
                         <a:latin typeface="Calibri" charset="0"/>
@@ -4301,12 +5259,12 @@
                       <a:tailEnd type="none" w="med" len="med"/>
                     </a:lnB>
                     <a:solidFill>
-                      <a:srgbClr val="0B2A3D"/>
+                      <a:srgbClr val="F0F4F5"/>
                     </a:solidFill>
                   </a:tcPr>
                 </a:tc>
               </a:tr>
-              <a:tr h="374904">
+              <a:tr h="420624">
                 <a:tc>
                   <a:txBody>
                     <a:bodyPr/>
@@ -4324,7 +5282,7 @@
                           <a:ea typeface="Calibri" pitchFamily="34" charset="-122"/>
                           <a:cs typeface="Calibri" pitchFamily="34" charset="-120"/>
                         </a:rPr>
-                        <a:t>1</a:t>
+                        <a:t>3</a:t>
                       </a:r>
                       <a:endParaRPr lang="en-US" sz="1000" dirty="0">
                         <a:latin typeface="Calibri" charset="0"/>
@@ -4384,7 +5342,7 @@
                         <a:buNone/>
                       </a:pPr>
                       <a:r>
-                        <a:rPr lang="en-US" sz="1050" dirty="0">
+                        <a:rPr lang="en-US" sz="1000" dirty="0">
                           <a:solidFill>
                             <a:srgbClr val="1C2B33"/>
                           </a:solidFill>
@@ -4392,9 +5350,761 @@
                           <a:ea typeface="Calibri" pitchFamily="34" charset="-122"/>
                           <a:cs typeface="Calibri" pitchFamily="34" charset="-120"/>
                         </a:rPr>
+                        <a:t>L3 - TURBINA</a:t>
+                      </a:r>
+                      <a:endParaRPr lang="en-US" sz="1000" dirty="0">
+                        <a:latin typeface="Calibri" charset="0"/>
+                        <a:ea typeface="Calibri" charset="0"/>
+                        <a:cs typeface="Calibri" charset="0"/>
+                      </a:endParaRPr>
+                    </a:p>
+                  </a:txBody>
+                  <a:tcPr marL="91440" marR="91440" marT="45720" marB="45720" anchor="ctr">
+                    <a:lnL w="6350" cap="flat" cmpd="sng" algn="ctr">
+                      <a:solidFill>
+                        <a:srgbClr val="E3E8E9"/>
+                      </a:solidFill>
+                      <a:prstDash val="solid"/>
+                      <a:round/>
+                      <a:headEnd type="none" w="med" len="med"/>
+                      <a:tailEnd type="none" w="med" len="med"/>
+                    </a:lnL>
+                    <a:lnR w="6350" cap="flat" cmpd="sng" algn="ctr">
+                      <a:solidFill>
+                        <a:srgbClr val="E3E8E9"/>
+                      </a:solidFill>
+                      <a:prstDash val="solid"/>
+                      <a:round/>
+                      <a:headEnd type="none" w="med" len="med"/>
+                      <a:tailEnd type="none" w="med" len="med"/>
+                    </a:lnR>
+                    <a:lnT w="6350" cap="flat" cmpd="sng" algn="ctr">
+                      <a:solidFill>
+                        <a:srgbClr val="E3E8E9"/>
+                      </a:solidFill>
+                      <a:prstDash val="solid"/>
+                      <a:round/>
+                      <a:headEnd type="none" w="med" len="med"/>
+                      <a:tailEnd type="none" w="med" len="med"/>
+                    </a:lnT>
+                    <a:lnB w="6350" cap="flat" cmpd="sng" algn="ctr">
+                      <a:solidFill>
+                        <a:srgbClr val="E3E8E9"/>
+                      </a:solidFill>
+                      <a:prstDash val="solid"/>
+                      <a:round/>
+                      <a:headEnd type="none" w="med" len="med"/>
+                      <a:tailEnd type="none" w="med" len="med"/>
+                    </a:lnB>
+                    <a:solidFill>
+                      <a:srgbClr val="FFFFFF"/>
+                    </a:solidFill>
+                  </a:tcPr>
+                </a:tc>
+                <a:tc>
+                  <a:txBody>
+                    <a:bodyPr/>
+                    <a:lstStyle/>
+                    <a:p>
+                      <a:pPr indent="0" marL="0">
+                        <a:buNone/>
+                      </a:pPr>
+                      <a:r>
+                        <a:rPr lang="en-US" sz="950" dirty="0">
+                          <a:solidFill>
+                            <a:srgbClr val="5B6B73"/>
+                          </a:solidFill>
+                          <a:latin typeface="Calibri" pitchFamily="34" charset="0"/>
+                          <a:ea typeface="Calibri" pitchFamily="34" charset="-122"/>
+                          <a:cs typeface="Calibri" pitchFamily="34" charset="-120"/>
+                        </a:rPr>
+                        <a:t>FPSO Frade</a:t>
+                      </a:r>
+                      <a:endParaRPr lang="en-US" sz="950" dirty="0">
+                        <a:latin typeface="Calibri" charset="0"/>
+                        <a:ea typeface="Calibri" charset="0"/>
+                        <a:cs typeface="Calibri" charset="0"/>
+                      </a:endParaRPr>
+                    </a:p>
+                  </a:txBody>
+                  <a:tcPr marL="91440" marR="91440" marT="45720" marB="45720" anchor="ctr">
+                    <a:lnL w="6350" cap="flat" cmpd="sng" algn="ctr">
+                      <a:solidFill>
+                        <a:srgbClr val="E3E8E9"/>
+                      </a:solidFill>
+                      <a:prstDash val="solid"/>
+                      <a:round/>
+                      <a:headEnd type="none" w="med" len="med"/>
+                      <a:tailEnd type="none" w="med" len="med"/>
+                    </a:lnL>
+                    <a:lnR w="6350" cap="flat" cmpd="sng" algn="ctr">
+                      <a:solidFill>
+                        <a:srgbClr val="E3E8E9"/>
+                      </a:solidFill>
+                      <a:prstDash val="solid"/>
+                      <a:round/>
+                      <a:headEnd type="none" w="med" len="med"/>
+                      <a:tailEnd type="none" w="med" len="med"/>
+                    </a:lnR>
+                    <a:lnT w="6350" cap="flat" cmpd="sng" algn="ctr">
+                      <a:solidFill>
+                        <a:srgbClr val="E3E8E9"/>
+                      </a:solidFill>
+                      <a:prstDash val="solid"/>
+                      <a:round/>
+                      <a:headEnd type="none" w="med" len="med"/>
+                      <a:tailEnd type="none" w="med" len="med"/>
+                    </a:lnT>
+                    <a:lnB w="6350" cap="flat" cmpd="sng" algn="ctr">
+                      <a:solidFill>
+                        <a:srgbClr val="E3E8E9"/>
+                      </a:solidFill>
+                      <a:prstDash val="solid"/>
+                      <a:round/>
+                      <a:headEnd type="none" w="med" len="med"/>
+                      <a:tailEnd type="none" w="med" len="med"/>
+                    </a:lnB>
+                    <a:solidFill>
+                      <a:srgbClr val="FFFFFF"/>
+                    </a:solidFill>
+                  </a:tcPr>
+                </a:tc>
+                <a:tc>
+                  <a:txBody>
+                    <a:bodyPr/>
+                    <a:lstStyle/>
+                    <a:p>
+                      <a:pPr indent="0" marL="0">
+                        <a:buNone/>
+                      </a:pPr>
+                      <a:r>
+                        <a:rPr lang="en-US" sz="900" dirty="0">
+                          <a:solidFill>
+                            <a:srgbClr val="5B6B73"/>
+                          </a:solidFill>
+                          <a:latin typeface="Calibri" pitchFamily="34" charset="0"/>
+                          <a:ea typeface="Calibri" pitchFamily="34" charset="-122"/>
+                          <a:cs typeface="Calibri" pitchFamily="34" charset="-120"/>
+                        </a:rPr>
+                        <a:t>MNT – Manutenção</a:t>
+                      </a:r>
+                      <a:endParaRPr lang="en-US" sz="900" dirty="0">
+                        <a:latin typeface="Calibri" charset="0"/>
+                        <a:ea typeface="Calibri" charset="0"/>
+                        <a:cs typeface="Calibri" charset="0"/>
+                      </a:endParaRPr>
+                    </a:p>
+                  </a:txBody>
+                  <a:tcPr marL="91440" marR="91440" marT="45720" marB="45720" anchor="ctr">
+                    <a:lnL w="6350" cap="flat" cmpd="sng" algn="ctr">
+                      <a:solidFill>
+                        <a:srgbClr val="E3E8E9"/>
+                      </a:solidFill>
+                      <a:prstDash val="solid"/>
+                      <a:round/>
+                      <a:headEnd type="none" w="med" len="med"/>
+                      <a:tailEnd type="none" w="med" len="med"/>
+                    </a:lnL>
+                    <a:lnR w="6350" cap="flat" cmpd="sng" algn="ctr">
+                      <a:solidFill>
+                        <a:srgbClr val="E3E8E9"/>
+                      </a:solidFill>
+                      <a:prstDash val="solid"/>
+                      <a:round/>
+                      <a:headEnd type="none" w="med" len="med"/>
+                      <a:tailEnd type="none" w="med" len="med"/>
+                    </a:lnR>
+                    <a:lnT w="6350" cap="flat" cmpd="sng" algn="ctr">
+                      <a:solidFill>
+                        <a:srgbClr val="E3E8E9"/>
+                      </a:solidFill>
+                      <a:prstDash val="solid"/>
+                      <a:round/>
+                      <a:headEnd type="none" w="med" len="med"/>
+                      <a:tailEnd type="none" w="med" len="med"/>
+                    </a:lnT>
+                    <a:lnB w="6350" cap="flat" cmpd="sng" algn="ctr">
+                      <a:solidFill>
+                        <a:srgbClr val="E3E8E9"/>
+                      </a:solidFill>
+                      <a:prstDash val="solid"/>
+                      <a:round/>
+                      <a:headEnd type="none" w="med" len="med"/>
+                      <a:tailEnd type="none" w="med" len="med"/>
+                    </a:lnB>
+                    <a:solidFill>
+                      <a:srgbClr val="FFFFFF"/>
+                    </a:solidFill>
+                  </a:tcPr>
+                </a:tc>
+                <a:tc>
+                  <a:txBody>
+                    <a:bodyPr/>
+                    <a:lstStyle/>
+                    <a:p>
+                      <a:pPr indent="0" marL="0">
+                        <a:buNone/>
+                      </a:pPr>
+                      <a:r>
+                        <a:rPr lang="en-US" sz="900" dirty="0">
+                          <a:solidFill>
+                            <a:srgbClr val="5B6B73"/>
+                          </a:solidFill>
+                          <a:latin typeface="Calibri" pitchFamily="34" charset="0"/>
+                          <a:ea typeface="Calibri" pitchFamily="34" charset="-122"/>
+                          <a:cs typeface="Calibri" pitchFamily="34" charset="-120"/>
+                        </a:rPr>
+                        <a:t>Rotina Operacional</a:t>
+                      </a:r>
+                      <a:endParaRPr lang="en-US" sz="900" dirty="0">
+                        <a:latin typeface="Calibri" charset="0"/>
+                        <a:ea typeface="Calibri" charset="0"/>
+                        <a:cs typeface="Calibri" charset="0"/>
+                      </a:endParaRPr>
+                    </a:p>
+                  </a:txBody>
+                  <a:tcPr marL="91440" marR="91440" marT="45720" marB="45720" anchor="ctr">
+                    <a:lnL w="6350" cap="flat" cmpd="sng" algn="ctr">
+                      <a:solidFill>
+                        <a:srgbClr val="E3E8E9"/>
+                      </a:solidFill>
+                      <a:prstDash val="solid"/>
+                      <a:round/>
+                      <a:headEnd type="none" w="med" len="med"/>
+                      <a:tailEnd type="none" w="med" len="med"/>
+                    </a:lnL>
+                    <a:lnR w="6350" cap="flat" cmpd="sng" algn="ctr">
+                      <a:solidFill>
+                        <a:srgbClr val="E3E8E9"/>
+                      </a:solidFill>
+                      <a:prstDash val="solid"/>
+                      <a:round/>
+                      <a:headEnd type="none" w="med" len="med"/>
+                      <a:tailEnd type="none" w="med" len="med"/>
+                    </a:lnR>
+                    <a:lnT w="6350" cap="flat" cmpd="sng" algn="ctr">
+                      <a:solidFill>
+                        <a:srgbClr val="E3E8E9"/>
+                      </a:solidFill>
+                      <a:prstDash val="solid"/>
+                      <a:round/>
+                      <a:headEnd type="none" w="med" len="med"/>
+                      <a:tailEnd type="none" w="med" len="med"/>
+                    </a:lnT>
+                    <a:lnB w="6350" cap="flat" cmpd="sng" algn="ctr">
+                      <a:solidFill>
+                        <a:srgbClr val="E3E8E9"/>
+                      </a:solidFill>
+                      <a:prstDash val="solid"/>
+                      <a:round/>
+                      <a:headEnd type="none" w="med" len="med"/>
+                      <a:tailEnd type="none" w="med" len="med"/>
+                    </a:lnB>
+                    <a:solidFill>
+                      <a:srgbClr val="FFFFFF"/>
+                    </a:solidFill>
+                  </a:tcPr>
+                </a:tc>
+                <a:tc>
+                  <a:txBody>
+                    <a:bodyPr/>
+                    <a:lstStyle/>
+                    <a:p>
+                      <a:pPr algn="r" indent="0" marL="0">
+                        <a:buNone/>
+                      </a:pPr>
+                      <a:r>
+                        <a:rPr lang="en-US" sz="1000" b="1" dirty="0">
+                          <a:solidFill>
+                            <a:srgbClr val="0B2A3D"/>
+                          </a:solidFill>
+                          <a:latin typeface="Calibri" pitchFamily="34" charset="0"/>
+                          <a:ea typeface="Calibri" pitchFamily="34" charset="-122"/>
+                          <a:cs typeface="Calibri" pitchFamily="34" charset="-120"/>
+                        </a:rPr>
+                        <a:t>US$ 6,0 mi</a:t>
+                      </a:r>
+                      <a:endParaRPr lang="en-US" sz="1000" dirty="0">
+                        <a:latin typeface="Calibri" charset="0"/>
+                        <a:ea typeface="Calibri" charset="0"/>
+                        <a:cs typeface="Calibri" charset="0"/>
+                      </a:endParaRPr>
+                    </a:p>
+                  </a:txBody>
+                  <a:tcPr marL="91440" marR="91440" marT="45720" marB="45720" anchor="ctr">
+                    <a:lnL w="6350" cap="flat" cmpd="sng" algn="ctr">
+                      <a:solidFill>
+                        <a:srgbClr val="E3E8E9"/>
+                      </a:solidFill>
+                      <a:prstDash val="solid"/>
+                      <a:round/>
+                      <a:headEnd type="none" w="med" len="med"/>
+                      <a:tailEnd type="none" w="med" len="med"/>
+                    </a:lnL>
+                    <a:lnR w="6350" cap="flat" cmpd="sng" algn="ctr">
+                      <a:solidFill>
+                        <a:srgbClr val="E3E8E9"/>
+                      </a:solidFill>
+                      <a:prstDash val="solid"/>
+                      <a:round/>
+                      <a:headEnd type="none" w="med" len="med"/>
+                      <a:tailEnd type="none" w="med" len="med"/>
+                    </a:lnR>
+                    <a:lnT w="6350" cap="flat" cmpd="sng" algn="ctr">
+                      <a:solidFill>
+                        <a:srgbClr val="E3E8E9"/>
+                      </a:solidFill>
+                      <a:prstDash val="solid"/>
+                      <a:round/>
+                      <a:headEnd type="none" w="med" len="med"/>
+                      <a:tailEnd type="none" w="med" len="med"/>
+                    </a:lnT>
+                    <a:lnB w="6350" cap="flat" cmpd="sng" algn="ctr">
+                      <a:solidFill>
+                        <a:srgbClr val="E3E8E9"/>
+                      </a:solidFill>
+                      <a:prstDash val="solid"/>
+                      <a:round/>
+                      <a:headEnd type="none" w="med" len="med"/>
+                      <a:tailEnd type="none" w="med" len="med"/>
+                    </a:lnB>
+                    <a:solidFill>
+                      <a:srgbClr val="FFFFFF"/>
+                    </a:solidFill>
+                  </a:tcPr>
+                </a:tc>
+              </a:tr>
+              <a:tr h="420624">
+                <a:tc>
+                  <a:txBody>
+                    <a:bodyPr/>
+                    <a:lstStyle/>
+                    <a:p>
+                      <a:pPr algn="ctr" indent="0" marL="0">
+                        <a:buNone/>
+                      </a:pPr>
+                      <a:r>
+                        <a:rPr lang="en-US" sz="1000" dirty="0">
+                          <a:solidFill>
+                            <a:srgbClr val="5B6B73"/>
+                          </a:solidFill>
+                          <a:latin typeface="Calibri" pitchFamily="34" charset="0"/>
+                          <a:ea typeface="Calibri" pitchFamily="34" charset="-122"/>
+                          <a:cs typeface="Calibri" pitchFamily="34" charset="-120"/>
+                        </a:rPr>
+                        <a:t>4</a:t>
+                      </a:r>
+                      <a:endParaRPr lang="en-US" sz="1000" dirty="0">
+                        <a:latin typeface="Calibri" charset="0"/>
+                        <a:ea typeface="Calibri" charset="0"/>
+                        <a:cs typeface="Calibri" charset="0"/>
+                      </a:endParaRPr>
+                    </a:p>
+                  </a:txBody>
+                  <a:tcPr marL="91440" marR="91440" marT="45720" marB="45720" anchor="ctr">
+                    <a:lnL w="6350" cap="flat" cmpd="sng" algn="ctr">
+                      <a:solidFill>
+                        <a:srgbClr val="E3E8E9"/>
+                      </a:solidFill>
+                      <a:prstDash val="solid"/>
+                      <a:round/>
+                      <a:headEnd type="none" w="med" len="med"/>
+                      <a:tailEnd type="none" w="med" len="med"/>
+                    </a:lnL>
+                    <a:lnR w="6350" cap="flat" cmpd="sng" algn="ctr">
+                      <a:solidFill>
+                        <a:srgbClr val="E3E8E9"/>
+                      </a:solidFill>
+                      <a:prstDash val="solid"/>
+                      <a:round/>
+                      <a:headEnd type="none" w="med" len="med"/>
+                      <a:tailEnd type="none" w="med" len="med"/>
+                    </a:lnR>
+                    <a:lnT w="6350" cap="flat" cmpd="sng" algn="ctr">
+                      <a:solidFill>
+                        <a:srgbClr val="E3E8E9"/>
+                      </a:solidFill>
+                      <a:prstDash val="solid"/>
+                      <a:round/>
+                      <a:headEnd type="none" w="med" len="med"/>
+                      <a:tailEnd type="none" w="med" len="med"/>
+                    </a:lnT>
+                    <a:lnB w="6350" cap="flat" cmpd="sng" algn="ctr">
+                      <a:solidFill>
+                        <a:srgbClr val="E3E8E9"/>
+                      </a:solidFill>
+                      <a:prstDash val="solid"/>
+                      <a:round/>
+                      <a:headEnd type="none" w="med" len="med"/>
+                      <a:tailEnd type="none" w="med" len="med"/>
+                    </a:lnB>
+                    <a:solidFill>
+                      <a:srgbClr val="F0F4F5"/>
+                    </a:solidFill>
+                  </a:tcPr>
+                </a:tc>
+                <a:tc>
+                  <a:txBody>
+                    <a:bodyPr/>
+                    <a:lstStyle/>
+                    <a:p>
+                      <a:pPr indent="0" marL="0">
+                        <a:buNone/>
+                      </a:pPr>
+                      <a:r>
+                        <a:rPr lang="en-US" sz="1000" dirty="0">
+                          <a:solidFill>
+                            <a:srgbClr val="1C2B33"/>
+                          </a:solidFill>
+                          <a:latin typeface="Calibri" pitchFamily="34" charset="0"/>
+                          <a:ea typeface="Calibri" pitchFamily="34" charset="-122"/>
+                          <a:cs typeface="Calibri" pitchFamily="34" charset="-120"/>
+                        </a:rPr>
+                        <a:t>Frade 100K (Fase 2)</a:t>
+                      </a:r>
+                      <a:endParaRPr lang="en-US" sz="1000" dirty="0">
+                        <a:latin typeface="Calibri" charset="0"/>
+                        <a:ea typeface="Calibri" charset="0"/>
+                        <a:cs typeface="Calibri" charset="0"/>
+                      </a:endParaRPr>
+                    </a:p>
+                  </a:txBody>
+                  <a:tcPr marL="91440" marR="91440" marT="45720" marB="45720" anchor="ctr">
+                    <a:lnL w="6350" cap="flat" cmpd="sng" algn="ctr">
+                      <a:solidFill>
+                        <a:srgbClr val="E3E8E9"/>
+                      </a:solidFill>
+                      <a:prstDash val="solid"/>
+                      <a:round/>
+                      <a:headEnd type="none" w="med" len="med"/>
+                      <a:tailEnd type="none" w="med" len="med"/>
+                    </a:lnL>
+                    <a:lnR w="6350" cap="flat" cmpd="sng" algn="ctr">
+                      <a:solidFill>
+                        <a:srgbClr val="E3E8E9"/>
+                      </a:solidFill>
+                      <a:prstDash val="solid"/>
+                      <a:round/>
+                      <a:headEnd type="none" w="med" len="med"/>
+                      <a:tailEnd type="none" w="med" len="med"/>
+                    </a:lnR>
+                    <a:lnT w="6350" cap="flat" cmpd="sng" algn="ctr">
+                      <a:solidFill>
+                        <a:srgbClr val="E3E8E9"/>
+                      </a:solidFill>
+                      <a:prstDash val="solid"/>
+                      <a:round/>
+                      <a:headEnd type="none" w="med" len="med"/>
+                      <a:tailEnd type="none" w="med" len="med"/>
+                    </a:lnT>
+                    <a:lnB w="6350" cap="flat" cmpd="sng" algn="ctr">
+                      <a:solidFill>
+                        <a:srgbClr val="E3E8E9"/>
+                      </a:solidFill>
+                      <a:prstDash val="solid"/>
+                      <a:round/>
+                      <a:headEnd type="none" w="med" len="med"/>
+                      <a:tailEnd type="none" w="med" len="med"/>
+                    </a:lnB>
+                    <a:solidFill>
+                      <a:srgbClr val="F0F4F5"/>
+                    </a:solidFill>
+                  </a:tcPr>
+                </a:tc>
+                <a:tc>
+                  <a:txBody>
+                    <a:bodyPr/>
+                    <a:lstStyle/>
+                    <a:p>
+                      <a:pPr indent="0" marL="0">
+                        <a:buNone/>
+                      </a:pPr>
+                      <a:r>
+                        <a:rPr lang="en-US" sz="950" dirty="0">
+                          <a:solidFill>
+                            <a:srgbClr val="5B6B73"/>
+                          </a:solidFill>
+                          <a:latin typeface="Calibri" pitchFamily="34" charset="0"/>
+                          <a:ea typeface="Calibri" pitchFamily="34" charset="-122"/>
+                          <a:cs typeface="Calibri" pitchFamily="34" charset="-120"/>
+                        </a:rPr>
+                        <a:t>FPSO Frade</a:t>
+                      </a:r>
+                      <a:endParaRPr lang="en-US" sz="950" dirty="0">
+                        <a:latin typeface="Calibri" charset="0"/>
+                        <a:ea typeface="Calibri" charset="0"/>
+                        <a:cs typeface="Calibri" charset="0"/>
+                      </a:endParaRPr>
+                    </a:p>
+                  </a:txBody>
+                  <a:tcPr marL="91440" marR="91440" marT="45720" marB="45720" anchor="ctr">
+                    <a:lnL w="6350" cap="flat" cmpd="sng" algn="ctr">
+                      <a:solidFill>
+                        <a:srgbClr val="E3E8E9"/>
+                      </a:solidFill>
+                      <a:prstDash val="solid"/>
+                      <a:round/>
+                      <a:headEnd type="none" w="med" len="med"/>
+                      <a:tailEnd type="none" w="med" len="med"/>
+                    </a:lnL>
+                    <a:lnR w="6350" cap="flat" cmpd="sng" algn="ctr">
+                      <a:solidFill>
+                        <a:srgbClr val="E3E8E9"/>
+                      </a:solidFill>
+                      <a:prstDash val="solid"/>
+                      <a:round/>
+                      <a:headEnd type="none" w="med" len="med"/>
+                      <a:tailEnd type="none" w="med" len="med"/>
+                    </a:lnR>
+                    <a:lnT w="6350" cap="flat" cmpd="sng" algn="ctr">
+                      <a:solidFill>
+                        <a:srgbClr val="E3E8E9"/>
+                      </a:solidFill>
+                      <a:prstDash val="solid"/>
+                      <a:round/>
+                      <a:headEnd type="none" w="med" len="med"/>
+                      <a:tailEnd type="none" w="med" len="med"/>
+                    </a:lnT>
+                    <a:lnB w="6350" cap="flat" cmpd="sng" algn="ctr">
+                      <a:solidFill>
+                        <a:srgbClr val="E3E8E9"/>
+                      </a:solidFill>
+                      <a:prstDash val="solid"/>
+                      <a:round/>
+                      <a:headEnd type="none" w="med" len="med"/>
+                      <a:tailEnd type="none" w="med" len="med"/>
+                    </a:lnB>
+                    <a:solidFill>
+                      <a:srgbClr val="F0F4F5"/>
+                    </a:solidFill>
+                  </a:tcPr>
+                </a:tc>
+                <a:tc>
+                  <a:txBody>
+                    <a:bodyPr/>
+                    <a:lstStyle/>
+                    <a:p>
+                      <a:pPr indent="0" marL="0">
+                        <a:buNone/>
+                      </a:pPr>
+                      <a:r>
+                        <a:rPr lang="en-US" sz="900" dirty="0">
+                          <a:solidFill>
+                            <a:srgbClr val="5B6B73"/>
+                          </a:solidFill>
+                          <a:latin typeface="Calibri" pitchFamily="34" charset="0"/>
+                          <a:ea typeface="Calibri" pitchFamily="34" charset="-122"/>
+                          <a:cs typeface="Calibri" pitchFamily="34" charset="-120"/>
+                        </a:rPr>
                         <a:t>Projetos</a:t>
                       </a:r>
-                      <a:endParaRPr lang="en-US" sz="1050" dirty="0">
+                      <a:endParaRPr lang="en-US" sz="900" dirty="0">
+                        <a:latin typeface="Calibri" charset="0"/>
+                        <a:ea typeface="Calibri" charset="0"/>
+                        <a:cs typeface="Calibri" charset="0"/>
+                      </a:endParaRPr>
+                    </a:p>
+                  </a:txBody>
+                  <a:tcPr marL="91440" marR="91440" marT="45720" marB="45720" anchor="ctr">
+                    <a:lnL w="6350" cap="flat" cmpd="sng" algn="ctr">
+                      <a:solidFill>
+                        <a:srgbClr val="E3E8E9"/>
+                      </a:solidFill>
+                      <a:prstDash val="solid"/>
+                      <a:round/>
+                      <a:headEnd type="none" w="med" len="med"/>
+                      <a:tailEnd type="none" w="med" len="med"/>
+                    </a:lnL>
+                    <a:lnR w="6350" cap="flat" cmpd="sng" algn="ctr">
+                      <a:solidFill>
+                        <a:srgbClr val="E3E8E9"/>
+                      </a:solidFill>
+                      <a:prstDash val="solid"/>
+                      <a:round/>
+                      <a:headEnd type="none" w="med" len="med"/>
+                      <a:tailEnd type="none" w="med" len="med"/>
+                    </a:lnR>
+                    <a:lnT w="6350" cap="flat" cmpd="sng" algn="ctr">
+                      <a:solidFill>
+                        <a:srgbClr val="E3E8E9"/>
+                      </a:solidFill>
+                      <a:prstDash val="solid"/>
+                      <a:round/>
+                      <a:headEnd type="none" w="med" len="med"/>
+                      <a:tailEnd type="none" w="med" len="med"/>
+                    </a:lnT>
+                    <a:lnB w="6350" cap="flat" cmpd="sng" algn="ctr">
+                      <a:solidFill>
+                        <a:srgbClr val="E3E8E9"/>
+                      </a:solidFill>
+                      <a:prstDash val="solid"/>
+                      <a:round/>
+                      <a:headEnd type="none" w="med" len="med"/>
+                      <a:tailEnd type="none" w="med" len="med"/>
+                    </a:lnB>
+                    <a:solidFill>
+                      <a:srgbClr val="F0F4F5"/>
+                    </a:solidFill>
+                  </a:tcPr>
+                </a:tc>
+                <a:tc>
+                  <a:txBody>
+                    <a:bodyPr/>
+                    <a:lstStyle/>
+                    <a:p>
+                      <a:pPr indent="0" marL="0">
+                        <a:buNone/>
+                      </a:pPr>
+                      <a:r>
+                        <a:rPr lang="en-US" sz="900" dirty="0">
+                          <a:solidFill>
+                            <a:srgbClr val="5B6B73"/>
+                          </a:solidFill>
+                          <a:latin typeface="Calibri" pitchFamily="34" charset="0"/>
+                          <a:ea typeface="Calibri" pitchFamily="34" charset="-122"/>
+                          <a:cs typeface="Calibri" pitchFamily="34" charset="-120"/>
+                        </a:rPr>
+                        <a:t>Eficiência de Produção</a:t>
+                      </a:r>
+                      <a:endParaRPr lang="en-US" sz="900" dirty="0">
+                        <a:latin typeface="Calibri" charset="0"/>
+                        <a:ea typeface="Calibri" charset="0"/>
+                        <a:cs typeface="Calibri" charset="0"/>
+                      </a:endParaRPr>
+                    </a:p>
+                  </a:txBody>
+                  <a:tcPr marL="91440" marR="91440" marT="45720" marB="45720" anchor="ctr">
+                    <a:lnL w="6350" cap="flat" cmpd="sng" algn="ctr">
+                      <a:solidFill>
+                        <a:srgbClr val="E3E8E9"/>
+                      </a:solidFill>
+                      <a:prstDash val="solid"/>
+                      <a:round/>
+                      <a:headEnd type="none" w="med" len="med"/>
+                      <a:tailEnd type="none" w="med" len="med"/>
+                    </a:lnL>
+                    <a:lnR w="6350" cap="flat" cmpd="sng" algn="ctr">
+                      <a:solidFill>
+                        <a:srgbClr val="E3E8E9"/>
+                      </a:solidFill>
+                      <a:prstDash val="solid"/>
+                      <a:round/>
+                      <a:headEnd type="none" w="med" len="med"/>
+                      <a:tailEnd type="none" w="med" len="med"/>
+                    </a:lnR>
+                    <a:lnT w="6350" cap="flat" cmpd="sng" algn="ctr">
+                      <a:solidFill>
+                        <a:srgbClr val="E3E8E9"/>
+                      </a:solidFill>
+                      <a:prstDash val="solid"/>
+                      <a:round/>
+                      <a:headEnd type="none" w="med" len="med"/>
+                      <a:tailEnd type="none" w="med" len="med"/>
+                    </a:lnT>
+                    <a:lnB w="6350" cap="flat" cmpd="sng" algn="ctr">
+                      <a:solidFill>
+                        <a:srgbClr val="E3E8E9"/>
+                      </a:solidFill>
+                      <a:prstDash val="solid"/>
+                      <a:round/>
+                      <a:headEnd type="none" w="med" len="med"/>
+                      <a:tailEnd type="none" w="med" len="med"/>
+                    </a:lnB>
+                    <a:solidFill>
+                      <a:srgbClr val="F0F4F5"/>
+                    </a:solidFill>
+                  </a:tcPr>
+                </a:tc>
+                <a:tc>
+                  <a:txBody>
+                    <a:bodyPr/>
+                    <a:lstStyle/>
+                    <a:p>
+                      <a:pPr algn="r" indent="0" marL="0">
+                        <a:buNone/>
+                      </a:pPr>
+                      <a:r>
+                        <a:rPr lang="en-US" sz="1000" b="1" dirty="0">
+                          <a:solidFill>
+                            <a:srgbClr val="0B2A3D"/>
+                          </a:solidFill>
+                          <a:latin typeface="Calibri" pitchFamily="34" charset="0"/>
+                          <a:ea typeface="Calibri" pitchFamily="34" charset="-122"/>
+                          <a:cs typeface="Calibri" pitchFamily="34" charset="-120"/>
+                        </a:rPr>
+                        <a:t>US$ 5,4 mi</a:t>
+                      </a:r>
+                      <a:endParaRPr lang="en-US" sz="1000" dirty="0">
+                        <a:latin typeface="Calibri" charset="0"/>
+                        <a:ea typeface="Calibri" charset="0"/>
+                        <a:cs typeface="Calibri" charset="0"/>
+                      </a:endParaRPr>
+                    </a:p>
+                  </a:txBody>
+                  <a:tcPr marL="91440" marR="91440" marT="45720" marB="45720" anchor="ctr">
+                    <a:lnL w="6350" cap="flat" cmpd="sng" algn="ctr">
+                      <a:solidFill>
+                        <a:srgbClr val="E3E8E9"/>
+                      </a:solidFill>
+                      <a:prstDash val="solid"/>
+                      <a:round/>
+                      <a:headEnd type="none" w="med" len="med"/>
+                      <a:tailEnd type="none" w="med" len="med"/>
+                    </a:lnL>
+                    <a:lnR w="6350" cap="flat" cmpd="sng" algn="ctr">
+                      <a:solidFill>
+                        <a:srgbClr val="E3E8E9"/>
+                      </a:solidFill>
+                      <a:prstDash val="solid"/>
+                      <a:round/>
+                      <a:headEnd type="none" w="med" len="med"/>
+                      <a:tailEnd type="none" w="med" len="med"/>
+                    </a:lnR>
+                    <a:lnT w="6350" cap="flat" cmpd="sng" algn="ctr">
+                      <a:solidFill>
+                        <a:srgbClr val="E3E8E9"/>
+                      </a:solidFill>
+                      <a:prstDash val="solid"/>
+                      <a:round/>
+                      <a:headEnd type="none" w="med" len="med"/>
+                      <a:tailEnd type="none" w="med" len="med"/>
+                    </a:lnT>
+                    <a:lnB w="6350" cap="flat" cmpd="sng" algn="ctr">
+                      <a:solidFill>
+                        <a:srgbClr val="E3E8E9"/>
+                      </a:solidFill>
+                      <a:prstDash val="solid"/>
+                      <a:round/>
+                      <a:headEnd type="none" w="med" len="med"/>
+                      <a:tailEnd type="none" w="med" len="med"/>
+                    </a:lnB>
+                    <a:solidFill>
+                      <a:srgbClr val="F0F4F5"/>
+                    </a:solidFill>
+                  </a:tcPr>
+                </a:tc>
+              </a:tr>
+              <a:tr h="420624">
+                <a:tc>
+                  <a:txBody>
+                    <a:bodyPr/>
+                    <a:lstStyle/>
+                    <a:p>
+                      <a:pPr algn="ctr" indent="0" marL="0">
+                        <a:buNone/>
+                      </a:pPr>
+                      <a:r>
+                        <a:rPr lang="en-US" sz="1000" dirty="0">
+                          <a:solidFill>
+                            <a:srgbClr val="5B6B73"/>
+                          </a:solidFill>
+                          <a:latin typeface="Calibri" pitchFamily="34" charset="0"/>
+                          <a:ea typeface="Calibri" pitchFamily="34" charset="-122"/>
+                          <a:cs typeface="Calibri" pitchFamily="34" charset="-120"/>
+                        </a:rPr>
+                        <a:t>5</a:t>
+                      </a:r>
+                      <a:endParaRPr lang="en-US" sz="1000" dirty="0">
                         <a:latin typeface="Calibri" charset="0"/>
                         <a:ea typeface="Calibri" charset="0"/>
                         <a:cs typeface="Calibri" charset="0"/>
@@ -4448,11 +6158,283 @@
                     <a:bodyPr/>
                     <a:lstStyle/>
                     <a:p>
+                      <a:pPr indent="0" marL="0">
+                        <a:buNone/>
+                      </a:pPr>
+                      <a:r>
+                        <a:rPr lang="en-US" sz="1000" dirty="0">
+                          <a:solidFill>
+                            <a:srgbClr val="1C2B33"/>
+                          </a:solidFill>
+                          <a:latin typeface="Calibri" pitchFamily="34" charset="0"/>
+                          <a:ea typeface="Calibri" pitchFamily="34" charset="-122"/>
+                          <a:cs typeface="Calibri" pitchFamily="34" charset="-120"/>
+                        </a:rPr>
+                        <a:t>L3 GTG B + MANUTENÇÃO GERADOR 25KH GTG B</a:t>
+                      </a:r>
+                      <a:endParaRPr lang="en-US" sz="1000" dirty="0">
+                        <a:latin typeface="Calibri" charset="0"/>
+                        <a:ea typeface="Calibri" charset="0"/>
+                        <a:cs typeface="Calibri" charset="0"/>
+                      </a:endParaRPr>
+                    </a:p>
+                  </a:txBody>
+                  <a:tcPr marL="91440" marR="91440" marT="45720" marB="45720" anchor="ctr">
+                    <a:lnL w="6350" cap="flat" cmpd="sng" algn="ctr">
+                      <a:solidFill>
+                        <a:srgbClr val="E3E8E9"/>
+                      </a:solidFill>
+                      <a:prstDash val="solid"/>
+                      <a:round/>
+                      <a:headEnd type="none" w="med" len="med"/>
+                      <a:tailEnd type="none" w="med" len="med"/>
+                    </a:lnL>
+                    <a:lnR w="6350" cap="flat" cmpd="sng" algn="ctr">
+                      <a:solidFill>
+                        <a:srgbClr val="E3E8E9"/>
+                      </a:solidFill>
+                      <a:prstDash val="solid"/>
+                      <a:round/>
+                      <a:headEnd type="none" w="med" len="med"/>
+                      <a:tailEnd type="none" w="med" len="med"/>
+                    </a:lnR>
+                    <a:lnT w="6350" cap="flat" cmpd="sng" algn="ctr">
+                      <a:solidFill>
+                        <a:srgbClr val="E3E8E9"/>
+                      </a:solidFill>
+                      <a:prstDash val="solid"/>
+                      <a:round/>
+                      <a:headEnd type="none" w="med" len="med"/>
+                      <a:tailEnd type="none" w="med" len="med"/>
+                    </a:lnT>
+                    <a:lnB w="6350" cap="flat" cmpd="sng" algn="ctr">
+                      <a:solidFill>
+                        <a:srgbClr val="E3E8E9"/>
+                      </a:solidFill>
+                      <a:prstDash val="solid"/>
+                      <a:round/>
+                      <a:headEnd type="none" w="med" len="med"/>
+                      <a:tailEnd type="none" w="med" len="med"/>
+                    </a:lnB>
+                    <a:solidFill>
+                      <a:srgbClr val="FFFFFF"/>
+                    </a:solidFill>
+                  </a:tcPr>
+                </a:tc>
+                <a:tc>
+                  <a:txBody>
+                    <a:bodyPr/>
+                    <a:lstStyle/>
+                    <a:p>
+                      <a:pPr indent="0" marL="0">
+                        <a:buNone/>
+                      </a:pPr>
+                      <a:r>
+                        <a:rPr lang="en-US" sz="950" dirty="0">
+                          <a:solidFill>
+                            <a:srgbClr val="5B6B73"/>
+                          </a:solidFill>
+                          <a:latin typeface="Calibri" pitchFamily="34" charset="0"/>
+                          <a:ea typeface="Calibri" pitchFamily="34" charset="-122"/>
+                          <a:cs typeface="Calibri" pitchFamily="34" charset="-120"/>
+                        </a:rPr>
+                        <a:t>FPSO Bravo</a:t>
+                      </a:r>
+                      <a:endParaRPr lang="en-US" sz="950" dirty="0">
+                        <a:latin typeface="Calibri" charset="0"/>
+                        <a:ea typeface="Calibri" charset="0"/>
+                        <a:cs typeface="Calibri" charset="0"/>
+                      </a:endParaRPr>
+                    </a:p>
+                  </a:txBody>
+                  <a:tcPr marL="91440" marR="91440" marT="45720" marB="45720" anchor="ctr">
+                    <a:lnL w="6350" cap="flat" cmpd="sng" algn="ctr">
+                      <a:solidFill>
+                        <a:srgbClr val="E3E8E9"/>
+                      </a:solidFill>
+                      <a:prstDash val="solid"/>
+                      <a:round/>
+                      <a:headEnd type="none" w="med" len="med"/>
+                      <a:tailEnd type="none" w="med" len="med"/>
+                    </a:lnL>
+                    <a:lnR w="6350" cap="flat" cmpd="sng" algn="ctr">
+                      <a:solidFill>
+                        <a:srgbClr val="E3E8E9"/>
+                      </a:solidFill>
+                      <a:prstDash val="solid"/>
+                      <a:round/>
+                      <a:headEnd type="none" w="med" len="med"/>
+                      <a:tailEnd type="none" w="med" len="med"/>
+                    </a:lnR>
+                    <a:lnT w="6350" cap="flat" cmpd="sng" algn="ctr">
+                      <a:solidFill>
+                        <a:srgbClr val="E3E8E9"/>
+                      </a:solidFill>
+                      <a:prstDash val="solid"/>
+                      <a:round/>
+                      <a:headEnd type="none" w="med" len="med"/>
+                      <a:tailEnd type="none" w="med" len="med"/>
+                    </a:lnT>
+                    <a:lnB w="6350" cap="flat" cmpd="sng" algn="ctr">
+                      <a:solidFill>
+                        <a:srgbClr val="E3E8E9"/>
+                      </a:solidFill>
+                      <a:prstDash val="solid"/>
+                      <a:round/>
+                      <a:headEnd type="none" w="med" len="med"/>
+                      <a:tailEnd type="none" w="med" len="med"/>
+                    </a:lnB>
+                    <a:solidFill>
+                      <a:srgbClr val="FFFFFF"/>
+                    </a:solidFill>
+                  </a:tcPr>
+                </a:tc>
+                <a:tc>
+                  <a:txBody>
+                    <a:bodyPr/>
+                    <a:lstStyle/>
+                    <a:p>
+                      <a:pPr indent="0" marL="0">
+                        <a:buNone/>
+                      </a:pPr>
+                      <a:r>
+                        <a:rPr lang="en-US" sz="900" dirty="0">
+                          <a:solidFill>
+                            <a:srgbClr val="5B6B73"/>
+                          </a:solidFill>
+                          <a:latin typeface="Calibri" pitchFamily="34" charset="0"/>
+                          <a:ea typeface="Calibri" pitchFamily="34" charset="-122"/>
+                          <a:cs typeface="Calibri" pitchFamily="34" charset="-120"/>
+                        </a:rPr>
+                        <a:t>EIM - Manutenção &amp; Integridade</a:t>
+                      </a:r>
+                      <a:endParaRPr lang="en-US" sz="900" dirty="0">
+                        <a:latin typeface="Calibri" charset="0"/>
+                        <a:ea typeface="Calibri" charset="0"/>
+                        <a:cs typeface="Calibri" charset="0"/>
+                      </a:endParaRPr>
+                    </a:p>
+                  </a:txBody>
+                  <a:tcPr marL="91440" marR="91440" marT="45720" marB="45720" anchor="ctr">
+                    <a:lnL w="6350" cap="flat" cmpd="sng" algn="ctr">
+                      <a:solidFill>
+                        <a:srgbClr val="E3E8E9"/>
+                      </a:solidFill>
+                      <a:prstDash val="solid"/>
+                      <a:round/>
+                      <a:headEnd type="none" w="med" len="med"/>
+                      <a:tailEnd type="none" w="med" len="med"/>
+                    </a:lnL>
+                    <a:lnR w="6350" cap="flat" cmpd="sng" algn="ctr">
+                      <a:solidFill>
+                        <a:srgbClr val="E3E8E9"/>
+                      </a:solidFill>
+                      <a:prstDash val="solid"/>
+                      <a:round/>
+                      <a:headEnd type="none" w="med" len="med"/>
+                      <a:tailEnd type="none" w="med" len="med"/>
+                    </a:lnR>
+                    <a:lnT w="6350" cap="flat" cmpd="sng" algn="ctr">
+                      <a:solidFill>
+                        <a:srgbClr val="E3E8E9"/>
+                      </a:solidFill>
+                      <a:prstDash val="solid"/>
+                      <a:round/>
+                      <a:headEnd type="none" w="med" len="med"/>
+                      <a:tailEnd type="none" w="med" len="med"/>
+                    </a:lnT>
+                    <a:lnB w="6350" cap="flat" cmpd="sng" algn="ctr">
+                      <a:solidFill>
+                        <a:srgbClr val="E3E8E9"/>
+                      </a:solidFill>
+                      <a:prstDash val="solid"/>
+                      <a:round/>
+                      <a:headEnd type="none" w="med" len="med"/>
+                      <a:tailEnd type="none" w="med" len="med"/>
+                    </a:lnB>
+                    <a:solidFill>
+                      <a:srgbClr val="FFFFFF"/>
+                    </a:solidFill>
+                  </a:tcPr>
+                </a:tc>
+                <a:tc>
+                  <a:txBody>
+                    <a:bodyPr/>
+                    <a:lstStyle/>
+                    <a:p>
+                      <a:pPr indent="0" marL="0">
+                        <a:buNone/>
+                      </a:pPr>
+                      <a:r>
+                        <a:rPr lang="en-US" sz="900" dirty="0">
+                          <a:solidFill>
+                            <a:srgbClr val="5B6B73"/>
+                          </a:solidFill>
+                          <a:latin typeface="Calibri" pitchFamily="34" charset="0"/>
+                          <a:ea typeface="Calibri" pitchFamily="34" charset="-122"/>
+                          <a:cs typeface="Calibri" pitchFamily="34" charset="-120"/>
+                        </a:rPr>
+                        <a:t>Rotina Operacional</a:t>
+                      </a:r>
+                      <a:endParaRPr lang="en-US" sz="900" dirty="0">
+                        <a:latin typeface="Calibri" charset="0"/>
+                        <a:ea typeface="Calibri" charset="0"/>
+                        <a:cs typeface="Calibri" charset="0"/>
+                      </a:endParaRPr>
+                    </a:p>
+                  </a:txBody>
+                  <a:tcPr marL="91440" marR="91440" marT="45720" marB="45720" anchor="ctr">
+                    <a:lnL w="6350" cap="flat" cmpd="sng" algn="ctr">
+                      <a:solidFill>
+                        <a:srgbClr val="E3E8E9"/>
+                      </a:solidFill>
+                      <a:prstDash val="solid"/>
+                      <a:round/>
+                      <a:headEnd type="none" w="med" len="med"/>
+                      <a:tailEnd type="none" w="med" len="med"/>
+                    </a:lnL>
+                    <a:lnR w="6350" cap="flat" cmpd="sng" algn="ctr">
+                      <a:solidFill>
+                        <a:srgbClr val="E3E8E9"/>
+                      </a:solidFill>
+                      <a:prstDash val="solid"/>
+                      <a:round/>
+                      <a:headEnd type="none" w="med" len="med"/>
+                      <a:tailEnd type="none" w="med" len="med"/>
+                    </a:lnR>
+                    <a:lnT w="6350" cap="flat" cmpd="sng" algn="ctr">
+                      <a:solidFill>
+                        <a:srgbClr val="E3E8E9"/>
+                      </a:solidFill>
+                      <a:prstDash val="solid"/>
+                      <a:round/>
+                      <a:headEnd type="none" w="med" len="med"/>
+                      <a:tailEnd type="none" w="med" len="med"/>
+                    </a:lnT>
+                    <a:lnB w="6350" cap="flat" cmpd="sng" algn="ctr">
+                      <a:solidFill>
+                        <a:srgbClr val="E3E8E9"/>
+                      </a:solidFill>
+                      <a:prstDash val="solid"/>
+                      <a:round/>
+                      <a:headEnd type="none" w="med" len="med"/>
+                      <a:tailEnd type="none" w="med" len="med"/>
+                    </a:lnB>
+                    <a:solidFill>
+                      <a:srgbClr val="FFFFFF"/>
+                    </a:solidFill>
+                  </a:tcPr>
+                </a:tc>
+                <a:tc>
+                  <a:txBody>
+                    <a:bodyPr/>
+                    <a:lstStyle/>
+                    <a:p>
                       <a:pPr algn="r" indent="0" marL="0">
                         <a:buNone/>
                       </a:pPr>
                       <a:r>
-                        <a:rPr lang="en-US" sz="1050" b="1" dirty="0">
+                        <a:rPr lang="en-US" sz="1000" b="1" dirty="0">
                           <a:solidFill>
                             <a:srgbClr val="0B2A3D"/>
                           </a:solidFill>
@@ -4460,9 +6442,9 @@
                           <a:ea typeface="Calibri" pitchFamily="34" charset="-122"/>
                           <a:cs typeface="Calibri" pitchFamily="34" charset="-120"/>
                         </a:rPr>
-                        <a:t>US$ 38,2 mi</a:t>
-                      </a:r>
-                      <a:endParaRPr lang="en-US" sz="1050" dirty="0">
+                        <a:t>US$ 4,8 mi</a:t>
+                      </a:r>
+                      <a:endParaRPr lang="en-US" sz="1000" dirty="0">
                         <a:latin typeface="Calibri" charset="0"/>
                         <a:ea typeface="Calibri" charset="0"/>
                         <a:cs typeface="Calibri" charset="0"/>
@@ -4511,6 +6493,348 @@
                     </a:solidFill>
                   </a:tcPr>
                 </a:tc>
+              </a:tr>
+              <a:tr h="420624">
+                <a:tc>
+                  <a:txBody>
+                    <a:bodyPr/>
+                    <a:lstStyle/>
+                    <a:p>
+                      <a:pPr algn="ctr" indent="0" marL="0">
+                        <a:buNone/>
+                      </a:pPr>
+                      <a:r>
+                        <a:rPr lang="en-US" sz="1000" dirty="0">
+                          <a:solidFill>
+                            <a:srgbClr val="5B6B73"/>
+                          </a:solidFill>
+                          <a:latin typeface="Calibri" pitchFamily="34" charset="0"/>
+                          <a:ea typeface="Calibri" pitchFamily="34" charset="-122"/>
+                          <a:cs typeface="Calibri" pitchFamily="34" charset="-120"/>
+                        </a:rPr>
+                        <a:t>6</a:t>
+                      </a:r>
+                      <a:endParaRPr lang="en-US" sz="1000" dirty="0">
+                        <a:latin typeface="Calibri" charset="0"/>
+                        <a:ea typeface="Calibri" charset="0"/>
+                        <a:cs typeface="Calibri" charset="0"/>
+                      </a:endParaRPr>
+                    </a:p>
+                  </a:txBody>
+                  <a:tcPr marL="91440" marR="91440" marT="45720" marB="45720" anchor="ctr">
+                    <a:lnL w="6350" cap="flat" cmpd="sng" algn="ctr">
+                      <a:solidFill>
+                        <a:srgbClr val="E3E8E9"/>
+                      </a:solidFill>
+                      <a:prstDash val="solid"/>
+                      <a:round/>
+                      <a:headEnd type="none" w="med" len="med"/>
+                      <a:tailEnd type="none" w="med" len="med"/>
+                    </a:lnL>
+                    <a:lnR w="6350" cap="flat" cmpd="sng" algn="ctr">
+                      <a:solidFill>
+                        <a:srgbClr val="E3E8E9"/>
+                      </a:solidFill>
+                      <a:prstDash val="solid"/>
+                      <a:round/>
+                      <a:headEnd type="none" w="med" len="med"/>
+                      <a:tailEnd type="none" w="med" len="med"/>
+                    </a:lnR>
+                    <a:lnT w="6350" cap="flat" cmpd="sng" algn="ctr">
+                      <a:solidFill>
+                        <a:srgbClr val="E3E8E9"/>
+                      </a:solidFill>
+                      <a:prstDash val="solid"/>
+                      <a:round/>
+                      <a:headEnd type="none" w="med" len="med"/>
+                      <a:tailEnd type="none" w="med" len="med"/>
+                    </a:lnT>
+                    <a:lnB w="6350" cap="flat" cmpd="sng" algn="ctr">
+                      <a:solidFill>
+                        <a:srgbClr val="E3E8E9"/>
+                      </a:solidFill>
+                      <a:prstDash val="solid"/>
+                      <a:round/>
+                      <a:headEnd type="none" w="med" len="med"/>
+                      <a:tailEnd type="none" w="med" len="med"/>
+                    </a:lnB>
+                    <a:solidFill>
+                      <a:srgbClr val="F0F4F5"/>
+                    </a:solidFill>
+                  </a:tcPr>
+                </a:tc>
+                <a:tc>
+                  <a:txBody>
+                    <a:bodyPr/>
+                    <a:lstStyle/>
+                    <a:p>
+                      <a:pPr indent="0" marL="0">
+                        <a:buNone/>
+                      </a:pPr>
+                      <a:r>
+                        <a:rPr lang="en-US" sz="1000" dirty="0">
+                          <a:solidFill>
+                            <a:srgbClr val="1C2B33"/>
+                          </a:solidFill>
+                          <a:latin typeface="Calibri" pitchFamily="34" charset="0"/>
+                          <a:ea typeface="Calibri" pitchFamily="34" charset="-122"/>
+                          <a:cs typeface="Calibri" pitchFamily="34" charset="-120"/>
+                        </a:rPr>
+                        <a:t>Troca da lança do Guindaste Oeste</a:t>
+                      </a:r>
+                      <a:endParaRPr lang="en-US" sz="1000" dirty="0">
+                        <a:latin typeface="Calibri" charset="0"/>
+                        <a:ea typeface="Calibri" charset="0"/>
+                        <a:cs typeface="Calibri" charset="0"/>
+                      </a:endParaRPr>
+                    </a:p>
+                  </a:txBody>
+                  <a:tcPr marL="91440" marR="91440" marT="45720" marB="45720" anchor="ctr">
+                    <a:lnL w="6350" cap="flat" cmpd="sng" algn="ctr">
+                      <a:solidFill>
+                        <a:srgbClr val="E3E8E9"/>
+                      </a:solidFill>
+                      <a:prstDash val="solid"/>
+                      <a:round/>
+                      <a:headEnd type="none" w="med" len="med"/>
+                      <a:tailEnd type="none" w="med" len="med"/>
+                    </a:lnL>
+                    <a:lnR w="6350" cap="flat" cmpd="sng" algn="ctr">
+                      <a:solidFill>
+                        <a:srgbClr val="E3E8E9"/>
+                      </a:solidFill>
+                      <a:prstDash val="solid"/>
+                      <a:round/>
+                      <a:headEnd type="none" w="med" len="med"/>
+                      <a:tailEnd type="none" w="med" len="med"/>
+                    </a:lnR>
+                    <a:lnT w="6350" cap="flat" cmpd="sng" algn="ctr">
+                      <a:solidFill>
+                        <a:srgbClr val="E3E8E9"/>
+                      </a:solidFill>
+                      <a:prstDash val="solid"/>
+                      <a:round/>
+                      <a:headEnd type="none" w="med" len="med"/>
+                      <a:tailEnd type="none" w="med" len="med"/>
+                    </a:lnT>
+                    <a:lnB w="6350" cap="flat" cmpd="sng" algn="ctr">
+                      <a:solidFill>
+                        <a:srgbClr val="E3E8E9"/>
+                      </a:solidFill>
+                      <a:prstDash val="solid"/>
+                      <a:round/>
+                      <a:headEnd type="none" w="med" len="med"/>
+                      <a:tailEnd type="none" w="med" len="med"/>
+                    </a:lnB>
+                    <a:solidFill>
+                      <a:srgbClr val="F0F4F5"/>
+                    </a:solidFill>
+                  </a:tcPr>
+                </a:tc>
+                <a:tc>
+                  <a:txBody>
+                    <a:bodyPr/>
+                    <a:lstStyle/>
+                    <a:p>
+                      <a:pPr indent="0" marL="0">
+                        <a:buNone/>
+                      </a:pPr>
+                      <a:r>
+                        <a:rPr lang="en-US" sz="950" dirty="0">
+                          <a:solidFill>
+                            <a:srgbClr val="5B6B73"/>
+                          </a:solidFill>
+                          <a:latin typeface="Calibri" pitchFamily="34" charset="0"/>
+                          <a:ea typeface="Calibri" pitchFamily="34" charset="-122"/>
+                          <a:cs typeface="Calibri" pitchFamily="34" charset="-120"/>
+                        </a:rPr>
+                        <a:t>PLAT A</a:t>
+                      </a:r>
+                      <a:endParaRPr lang="en-US" sz="950" dirty="0">
+                        <a:latin typeface="Calibri" charset="0"/>
+                        <a:ea typeface="Calibri" charset="0"/>
+                        <a:cs typeface="Calibri" charset="0"/>
+                      </a:endParaRPr>
+                    </a:p>
+                  </a:txBody>
+                  <a:tcPr marL="91440" marR="91440" marT="45720" marB="45720" anchor="ctr">
+                    <a:lnL w="6350" cap="flat" cmpd="sng" algn="ctr">
+                      <a:solidFill>
+                        <a:srgbClr val="E3E8E9"/>
+                      </a:solidFill>
+                      <a:prstDash val="solid"/>
+                      <a:round/>
+                      <a:headEnd type="none" w="med" len="med"/>
+                      <a:tailEnd type="none" w="med" len="med"/>
+                    </a:lnL>
+                    <a:lnR w="6350" cap="flat" cmpd="sng" algn="ctr">
+                      <a:solidFill>
+                        <a:srgbClr val="E3E8E9"/>
+                      </a:solidFill>
+                      <a:prstDash val="solid"/>
+                      <a:round/>
+                      <a:headEnd type="none" w="med" len="med"/>
+                      <a:tailEnd type="none" w="med" len="med"/>
+                    </a:lnR>
+                    <a:lnT w="6350" cap="flat" cmpd="sng" algn="ctr">
+                      <a:solidFill>
+                        <a:srgbClr val="E3E8E9"/>
+                      </a:solidFill>
+                      <a:prstDash val="solid"/>
+                      <a:round/>
+                      <a:headEnd type="none" w="med" len="med"/>
+                      <a:tailEnd type="none" w="med" len="med"/>
+                    </a:lnT>
+                    <a:lnB w="6350" cap="flat" cmpd="sng" algn="ctr">
+                      <a:solidFill>
+                        <a:srgbClr val="E3E8E9"/>
+                      </a:solidFill>
+                      <a:prstDash val="solid"/>
+                      <a:round/>
+                      <a:headEnd type="none" w="med" len="med"/>
+                      <a:tailEnd type="none" w="med" len="med"/>
+                    </a:lnB>
+                    <a:solidFill>
+                      <a:srgbClr val="F0F4F5"/>
+                    </a:solidFill>
+                  </a:tcPr>
+                </a:tc>
+                <a:tc>
+                  <a:txBody>
+                    <a:bodyPr/>
+                    <a:lstStyle/>
+                    <a:p>
+                      <a:pPr indent="0" marL="0">
+                        <a:buNone/>
+                      </a:pPr>
+                      <a:r>
+                        <a:rPr lang="en-US" sz="900" dirty="0">
+                          <a:solidFill>
+                            <a:srgbClr val="5B6B73"/>
+                          </a:solidFill>
+                          <a:latin typeface="Calibri" pitchFamily="34" charset="0"/>
+                          <a:ea typeface="Calibri" pitchFamily="34" charset="-122"/>
+                          <a:cs typeface="Calibri" pitchFamily="34" charset="-120"/>
+                        </a:rPr>
+                        <a:t>MNT – Manutenção</a:t>
+                      </a:r>
+                      <a:endParaRPr lang="en-US" sz="900" dirty="0">
+                        <a:latin typeface="Calibri" charset="0"/>
+                        <a:ea typeface="Calibri" charset="0"/>
+                        <a:cs typeface="Calibri" charset="0"/>
+                      </a:endParaRPr>
+                    </a:p>
+                  </a:txBody>
+                  <a:tcPr marL="91440" marR="91440" marT="45720" marB="45720" anchor="ctr">
+                    <a:lnL w="6350" cap="flat" cmpd="sng" algn="ctr">
+                      <a:solidFill>
+                        <a:srgbClr val="E3E8E9"/>
+                      </a:solidFill>
+                      <a:prstDash val="solid"/>
+                      <a:round/>
+                      <a:headEnd type="none" w="med" len="med"/>
+                      <a:tailEnd type="none" w="med" len="med"/>
+                    </a:lnL>
+                    <a:lnR w="6350" cap="flat" cmpd="sng" algn="ctr">
+                      <a:solidFill>
+                        <a:srgbClr val="E3E8E9"/>
+                      </a:solidFill>
+                      <a:prstDash val="solid"/>
+                      <a:round/>
+                      <a:headEnd type="none" w="med" len="med"/>
+                      <a:tailEnd type="none" w="med" len="med"/>
+                    </a:lnR>
+                    <a:lnT w="6350" cap="flat" cmpd="sng" algn="ctr">
+                      <a:solidFill>
+                        <a:srgbClr val="E3E8E9"/>
+                      </a:solidFill>
+                      <a:prstDash val="solid"/>
+                      <a:round/>
+                      <a:headEnd type="none" w="med" len="med"/>
+                      <a:tailEnd type="none" w="med" len="med"/>
+                    </a:lnT>
+                    <a:lnB w="6350" cap="flat" cmpd="sng" algn="ctr">
+                      <a:solidFill>
+                        <a:srgbClr val="E3E8E9"/>
+                      </a:solidFill>
+                      <a:prstDash val="solid"/>
+                      <a:round/>
+                      <a:headEnd type="none" w="med" len="med"/>
+                      <a:tailEnd type="none" w="med" len="med"/>
+                    </a:lnB>
+                    <a:solidFill>
+                      <a:srgbClr val="F0F4F5"/>
+                    </a:solidFill>
+                  </a:tcPr>
+                </a:tc>
+                <a:tc>
+                  <a:txBody>
+                    <a:bodyPr/>
+                    <a:lstStyle/>
+                    <a:p>
+                      <a:pPr indent="0" marL="0">
+                        <a:buNone/>
+                      </a:pPr>
+                      <a:r>
+                        <a:rPr lang="en-US" sz="900" dirty="0">
+                          <a:solidFill>
+                            <a:srgbClr val="5B6B73"/>
+                          </a:solidFill>
+                          <a:latin typeface="Calibri" pitchFamily="34" charset="0"/>
+                          <a:ea typeface="Calibri" pitchFamily="34" charset="-122"/>
+                          <a:cs typeface="Calibri" pitchFamily="34" charset="-120"/>
+                        </a:rPr>
+                        <a:t>Integridade e Regulatório</a:t>
+                      </a:r>
+                      <a:endParaRPr lang="en-US" sz="900" dirty="0">
+                        <a:latin typeface="Calibri" charset="0"/>
+                        <a:ea typeface="Calibri" charset="0"/>
+                        <a:cs typeface="Calibri" charset="0"/>
+                      </a:endParaRPr>
+                    </a:p>
+                  </a:txBody>
+                  <a:tcPr marL="91440" marR="91440" marT="45720" marB="45720" anchor="ctr">
+                    <a:lnL w="6350" cap="flat" cmpd="sng" algn="ctr">
+                      <a:solidFill>
+                        <a:srgbClr val="E3E8E9"/>
+                      </a:solidFill>
+                      <a:prstDash val="solid"/>
+                      <a:round/>
+                      <a:headEnd type="none" w="med" len="med"/>
+                      <a:tailEnd type="none" w="med" len="med"/>
+                    </a:lnL>
+                    <a:lnR w="6350" cap="flat" cmpd="sng" algn="ctr">
+                      <a:solidFill>
+                        <a:srgbClr val="E3E8E9"/>
+                      </a:solidFill>
+                      <a:prstDash val="solid"/>
+                      <a:round/>
+                      <a:headEnd type="none" w="med" len="med"/>
+                      <a:tailEnd type="none" w="med" len="med"/>
+                    </a:lnR>
+                    <a:lnT w="6350" cap="flat" cmpd="sng" algn="ctr">
+                      <a:solidFill>
+                        <a:srgbClr val="E3E8E9"/>
+                      </a:solidFill>
+                      <a:prstDash val="solid"/>
+                      <a:round/>
+                      <a:headEnd type="none" w="med" len="med"/>
+                      <a:tailEnd type="none" w="med" len="med"/>
+                    </a:lnT>
+                    <a:lnB w="6350" cap="flat" cmpd="sng" algn="ctr">
+                      <a:solidFill>
+                        <a:srgbClr val="E3E8E9"/>
+                      </a:solidFill>
+                      <a:prstDash val="solid"/>
+                      <a:round/>
+                      <a:headEnd type="none" w="med" len="med"/>
+                      <a:tailEnd type="none" w="med" len="med"/>
+                    </a:lnB>
+                    <a:solidFill>
+                      <a:srgbClr val="F0F4F5"/>
+                    </a:solidFill>
+                  </a:tcPr>
+                </a:tc>
                 <a:tc>
                   <a:txBody>
                     <a:bodyPr/>
@@ -4520,6 +6844,76 @@
                         <a:buNone/>
                       </a:pPr>
                       <a:r>
+                        <a:rPr lang="en-US" sz="1000" b="1" dirty="0">
+                          <a:solidFill>
+                            <a:srgbClr val="0B2A3D"/>
+                          </a:solidFill>
+                          <a:latin typeface="Calibri" pitchFamily="34" charset="0"/>
+                          <a:ea typeface="Calibri" pitchFamily="34" charset="-122"/>
+                          <a:cs typeface="Calibri" pitchFamily="34" charset="-120"/>
+                        </a:rPr>
+                        <a:t>US$ 3,5 mi</a:t>
+                      </a:r>
+                      <a:endParaRPr lang="en-US" sz="1000" dirty="0">
+                        <a:latin typeface="Calibri" charset="0"/>
+                        <a:ea typeface="Calibri" charset="0"/>
+                        <a:cs typeface="Calibri" charset="0"/>
+                      </a:endParaRPr>
+                    </a:p>
+                  </a:txBody>
+                  <a:tcPr marL="91440" marR="91440" marT="45720" marB="45720" anchor="ctr">
+                    <a:lnL w="6350" cap="flat" cmpd="sng" algn="ctr">
+                      <a:solidFill>
+                        <a:srgbClr val="E3E8E9"/>
+                      </a:solidFill>
+                      <a:prstDash val="solid"/>
+                      <a:round/>
+                      <a:headEnd type="none" w="med" len="med"/>
+                      <a:tailEnd type="none" w="med" len="med"/>
+                    </a:lnL>
+                    <a:lnR w="6350" cap="flat" cmpd="sng" algn="ctr">
+                      <a:solidFill>
+                        <a:srgbClr val="E3E8E9"/>
+                      </a:solidFill>
+                      <a:prstDash val="solid"/>
+                      <a:round/>
+                      <a:headEnd type="none" w="med" len="med"/>
+                      <a:tailEnd type="none" w="med" len="med"/>
+                    </a:lnR>
+                    <a:lnT w="6350" cap="flat" cmpd="sng" algn="ctr">
+                      <a:solidFill>
+                        <a:srgbClr val="E3E8E9"/>
+                      </a:solidFill>
+                      <a:prstDash val="solid"/>
+                      <a:round/>
+                      <a:headEnd type="none" w="med" len="med"/>
+                      <a:tailEnd type="none" w="med" len="med"/>
+                    </a:lnT>
+                    <a:lnB w="6350" cap="flat" cmpd="sng" algn="ctr">
+                      <a:solidFill>
+                        <a:srgbClr val="E3E8E9"/>
+                      </a:solidFill>
+                      <a:prstDash val="solid"/>
+                      <a:round/>
+                      <a:headEnd type="none" w="med" len="med"/>
+                      <a:tailEnd type="none" w="med" len="med"/>
+                    </a:lnB>
+                    <a:solidFill>
+                      <a:srgbClr val="F0F4F5"/>
+                    </a:solidFill>
+                  </a:tcPr>
+                </a:tc>
+              </a:tr>
+              <a:tr h="420624">
+                <a:tc>
+                  <a:txBody>
+                    <a:bodyPr/>
+                    <a:lstStyle/>
+                    <a:p>
+                      <a:pPr algn="ctr" indent="0" marL="0">
+                        <a:buNone/>
+                      </a:pPr>
+                      <a:r>
                         <a:rPr lang="en-US" sz="1000" dirty="0">
                           <a:solidFill>
                             <a:srgbClr val="5B6B73"/>
@@ -4528,7 +6922,7 @@
                           <a:ea typeface="Calibri" pitchFamily="34" charset="-122"/>
                           <a:cs typeface="Calibri" pitchFamily="34" charset="-120"/>
                         </a:rPr>
-                        <a:t>29,9%</a:t>
+                        <a:t>7</a:t>
                       </a:r>
                       <a:endParaRPr lang="en-US" sz="1000" dirty="0">
                         <a:latin typeface="Calibri" charset="0"/>
@@ -4579,8 +6973,348 @@
                     </a:solidFill>
                   </a:tcPr>
                 </a:tc>
+                <a:tc>
+                  <a:txBody>
+                    <a:bodyPr/>
+                    <a:lstStyle/>
+                    <a:p>
+                      <a:pPr indent="0" marL="0">
+                        <a:buNone/>
+                      </a:pPr>
+                      <a:r>
+                        <a:rPr lang="en-US" sz="1000" dirty="0">
+                          <a:solidFill>
+                            <a:srgbClr val="1C2B33"/>
+                          </a:solidFill>
+                          <a:latin typeface="Calibri" pitchFamily="34" charset="0"/>
+                          <a:ea typeface="Calibri" pitchFamily="34" charset="-122"/>
+                          <a:cs typeface="Calibri" pitchFamily="34" charset="-120"/>
+                        </a:rPr>
+                        <a:t>SPARE PARTS RECONDICIONAMENTO DOS BOOGIES</a:t>
+                      </a:r>
+                      <a:endParaRPr lang="en-US" sz="1000" dirty="0">
+                        <a:latin typeface="Calibri" charset="0"/>
+                        <a:ea typeface="Calibri" charset="0"/>
+                        <a:cs typeface="Calibri" charset="0"/>
+                      </a:endParaRPr>
+                    </a:p>
+                  </a:txBody>
+                  <a:tcPr marL="91440" marR="91440" marT="45720" marB="45720" anchor="ctr">
+                    <a:lnL w="6350" cap="flat" cmpd="sng" algn="ctr">
+                      <a:solidFill>
+                        <a:srgbClr val="E3E8E9"/>
+                      </a:solidFill>
+                      <a:prstDash val="solid"/>
+                      <a:round/>
+                      <a:headEnd type="none" w="med" len="med"/>
+                      <a:tailEnd type="none" w="med" len="med"/>
+                    </a:lnL>
+                    <a:lnR w="6350" cap="flat" cmpd="sng" algn="ctr">
+                      <a:solidFill>
+                        <a:srgbClr val="E3E8E9"/>
+                      </a:solidFill>
+                      <a:prstDash val="solid"/>
+                      <a:round/>
+                      <a:headEnd type="none" w="med" len="med"/>
+                      <a:tailEnd type="none" w="med" len="med"/>
+                    </a:lnR>
+                    <a:lnT w="6350" cap="flat" cmpd="sng" algn="ctr">
+                      <a:solidFill>
+                        <a:srgbClr val="E3E8E9"/>
+                      </a:solidFill>
+                      <a:prstDash val="solid"/>
+                      <a:round/>
+                      <a:headEnd type="none" w="med" len="med"/>
+                      <a:tailEnd type="none" w="med" len="med"/>
+                    </a:lnT>
+                    <a:lnB w="6350" cap="flat" cmpd="sng" algn="ctr">
+                      <a:solidFill>
+                        <a:srgbClr val="E3E8E9"/>
+                      </a:solidFill>
+                      <a:prstDash val="solid"/>
+                      <a:round/>
+                      <a:headEnd type="none" w="med" len="med"/>
+                      <a:tailEnd type="none" w="med" len="med"/>
+                    </a:lnB>
+                    <a:solidFill>
+                      <a:srgbClr val="FFFFFF"/>
+                    </a:solidFill>
+                  </a:tcPr>
+                </a:tc>
+                <a:tc>
+                  <a:txBody>
+                    <a:bodyPr/>
+                    <a:lstStyle/>
+                    <a:p>
+                      <a:pPr indent="0" marL="0">
+                        <a:buNone/>
+                      </a:pPr>
+                      <a:r>
+                        <a:rPr lang="en-US" sz="950" dirty="0">
+                          <a:solidFill>
+                            <a:srgbClr val="5B6B73"/>
+                          </a:solidFill>
+                          <a:latin typeface="Calibri" pitchFamily="34" charset="0"/>
+                          <a:ea typeface="Calibri" pitchFamily="34" charset="-122"/>
+                          <a:cs typeface="Calibri" pitchFamily="34" charset="-120"/>
+                        </a:rPr>
+                        <a:t>FPSO Frade</a:t>
+                      </a:r>
+                      <a:endParaRPr lang="en-US" sz="950" dirty="0">
+                        <a:latin typeface="Calibri" charset="0"/>
+                        <a:ea typeface="Calibri" charset="0"/>
+                        <a:cs typeface="Calibri" charset="0"/>
+                      </a:endParaRPr>
+                    </a:p>
+                  </a:txBody>
+                  <a:tcPr marL="91440" marR="91440" marT="45720" marB="45720" anchor="ctr">
+                    <a:lnL w="6350" cap="flat" cmpd="sng" algn="ctr">
+                      <a:solidFill>
+                        <a:srgbClr val="E3E8E9"/>
+                      </a:solidFill>
+                      <a:prstDash val="solid"/>
+                      <a:round/>
+                      <a:headEnd type="none" w="med" len="med"/>
+                      <a:tailEnd type="none" w="med" len="med"/>
+                    </a:lnL>
+                    <a:lnR w="6350" cap="flat" cmpd="sng" algn="ctr">
+                      <a:solidFill>
+                        <a:srgbClr val="E3E8E9"/>
+                      </a:solidFill>
+                      <a:prstDash val="solid"/>
+                      <a:round/>
+                      <a:headEnd type="none" w="med" len="med"/>
+                      <a:tailEnd type="none" w="med" len="med"/>
+                    </a:lnR>
+                    <a:lnT w="6350" cap="flat" cmpd="sng" algn="ctr">
+                      <a:solidFill>
+                        <a:srgbClr val="E3E8E9"/>
+                      </a:solidFill>
+                      <a:prstDash val="solid"/>
+                      <a:round/>
+                      <a:headEnd type="none" w="med" len="med"/>
+                      <a:tailEnd type="none" w="med" len="med"/>
+                    </a:lnT>
+                    <a:lnB w="6350" cap="flat" cmpd="sng" algn="ctr">
+                      <a:solidFill>
+                        <a:srgbClr val="E3E8E9"/>
+                      </a:solidFill>
+                      <a:prstDash val="solid"/>
+                      <a:round/>
+                      <a:headEnd type="none" w="med" len="med"/>
+                      <a:tailEnd type="none" w="med" len="med"/>
+                    </a:lnB>
+                    <a:solidFill>
+                      <a:srgbClr val="FFFFFF"/>
+                    </a:solidFill>
+                  </a:tcPr>
+                </a:tc>
+                <a:tc>
+                  <a:txBody>
+                    <a:bodyPr/>
+                    <a:lstStyle/>
+                    <a:p>
+                      <a:pPr indent="0" marL="0">
+                        <a:buNone/>
+                      </a:pPr>
+                      <a:r>
+                        <a:rPr lang="en-US" sz="900" dirty="0">
+                          <a:solidFill>
+                            <a:srgbClr val="5B6B73"/>
+                          </a:solidFill>
+                          <a:latin typeface="Calibri" pitchFamily="34" charset="0"/>
+                          <a:ea typeface="Calibri" pitchFamily="34" charset="-122"/>
+                          <a:cs typeface="Calibri" pitchFamily="34" charset="-120"/>
+                        </a:rPr>
+                        <a:t>NAV - Naval</a:t>
+                      </a:r>
+                      <a:endParaRPr lang="en-US" sz="900" dirty="0">
+                        <a:latin typeface="Calibri" charset="0"/>
+                        <a:ea typeface="Calibri" charset="0"/>
+                        <a:cs typeface="Calibri" charset="0"/>
+                      </a:endParaRPr>
+                    </a:p>
+                  </a:txBody>
+                  <a:tcPr marL="91440" marR="91440" marT="45720" marB="45720" anchor="ctr">
+                    <a:lnL w="6350" cap="flat" cmpd="sng" algn="ctr">
+                      <a:solidFill>
+                        <a:srgbClr val="E3E8E9"/>
+                      </a:solidFill>
+                      <a:prstDash val="solid"/>
+                      <a:round/>
+                      <a:headEnd type="none" w="med" len="med"/>
+                      <a:tailEnd type="none" w="med" len="med"/>
+                    </a:lnL>
+                    <a:lnR w="6350" cap="flat" cmpd="sng" algn="ctr">
+                      <a:solidFill>
+                        <a:srgbClr val="E3E8E9"/>
+                      </a:solidFill>
+                      <a:prstDash val="solid"/>
+                      <a:round/>
+                      <a:headEnd type="none" w="med" len="med"/>
+                      <a:tailEnd type="none" w="med" len="med"/>
+                    </a:lnR>
+                    <a:lnT w="6350" cap="flat" cmpd="sng" algn="ctr">
+                      <a:solidFill>
+                        <a:srgbClr val="E3E8E9"/>
+                      </a:solidFill>
+                      <a:prstDash val="solid"/>
+                      <a:round/>
+                      <a:headEnd type="none" w="med" len="med"/>
+                      <a:tailEnd type="none" w="med" len="med"/>
+                    </a:lnT>
+                    <a:lnB w="6350" cap="flat" cmpd="sng" algn="ctr">
+                      <a:solidFill>
+                        <a:srgbClr val="E3E8E9"/>
+                      </a:solidFill>
+                      <a:prstDash val="solid"/>
+                      <a:round/>
+                      <a:headEnd type="none" w="med" len="med"/>
+                      <a:tailEnd type="none" w="med" len="med"/>
+                    </a:lnB>
+                    <a:solidFill>
+                      <a:srgbClr val="FFFFFF"/>
+                    </a:solidFill>
+                  </a:tcPr>
+                </a:tc>
+                <a:tc>
+                  <a:txBody>
+                    <a:bodyPr/>
+                    <a:lstStyle/>
+                    <a:p>
+                      <a:pPr indent="0" marL="0">
+                        <a:buNone/>
+                      </a:pPr>
+                      <a:r>
+                        <a:rPr lang="en-US" sz="900" dirty="0">
+                          <a:solidFill>
+                            <a:srgbClr val="5B6B73"/>
+                          </a:solidFill>
+                          <a:latin typeface="Calibri" pitchFamily="34" charset="0"/>
+                          <a:ea typeface="Calibri" pitchFamily="34" charset="-122"/>
+                          <a:cs typeface="Calibri" pitchFamily="34" charset="-120"/>
+                        </a:rPr>
+                        <a:t>Rotina Operacional</a:t>
+                      </a:r>
+                      <a:endParaRPr lang="en-US" sz="900" dirty="0">
+                        <a:latin typeface="Calibri" charset="0"/>
+                        <a:ea typeface="Calibri" charset="0"/>
+                        <a:cs typeface="Calibri" charset="0"/>
+                      </a:endParaRPr>
+                    </a:p>
+                  </a:txBody>
+                  <a:tcPr marL="91440" marR="91440" marT="45720" marB="45720" anchor="ctr">
+                    <a:lnL w="6350" cap="flat" cmpd="sng" algn="ctr">
+                      <a:solidFill>
+                        <a:srgbClr val="E3E8E9"/>
+                      </a:solidFill>
+                      <a:prstDash val="solid"/>
+                      <a:round/>
+                      <a:headEnd type="none" w="med" len="med"/>
+                      <a:tailEnd type="none" w="med" len="med"/>
+                    </a:lnL>
+                    <a:lnR w="6350" cap="flat" cmpd="sng" algn="ctr">
+                      <a:solidFill>
+                        <a:srgbClr val="E3E8E9"/>
+                      </a:solidFill>
+                      <a:prstDash val="solid"/>
+                      <a:round/>
+                      <a:headEnd type="none" w="med" len="med"/>
+                      <a:tailEnd type="none" w="med" len="med"/>
+                    </a:lnR>
+                    <a:lnT w="6350" cap="flat" cmpd="sng" algn="ctr">
+                      <a:solidFill>
+                        <a:srgbClr val="E3E8E9"/>
+                      </a:solidFill>
+                      <a:prstDash val="solid"/>
+                      <a:round/>
+                      <a:headEnd type="none" w="med" len="med"/>
+                      <a:tailEnd type="none" w="med" len="med"/>
+                    </a:lnT>
+                    <a:lnB w="6350" cap="flat" cmpd="sng" algn="ctr">
+                      <a:solidFill>
+                        <a:srgbClr val="E3E8E9"/>
+                      </a:solidFill>
+                      <a:prstDash val="solid"/>
+                      <a:round/>
+                      <a:headEnd type="none" w="med" len="med"/>
+                      <a:tailEnd type="none" w="med" len="med"/>
+                    </a:lnB>
+                    <a:solidFill>
+                      <a:srgbClr val="FFFFFF"/>
+                    </a:solidFill>
+                  </a:tcPr>
+                </a:tc>
+                <a:tc>
+                  <a:txBody>
+                    <a:bodyPr/>
+                    <a:lstStyle/>
+                    <a:p>
+                      <a:pPr algn="r" indent="0" marL="0">
+                        <a:buNone/>
+                      </a:pPr>
+                      <a:r>
+                        <a:rPr lang="en-US" sz="1000" b="1" dirty="0">
+                          <a:solidFill>
+                            <a:srgbClr val="0B2A3D"/>
+                          </a:solidFill>
+                          <a:latin typeface="Calibri" pitchFamily="34" charset="0"/>
+                          <a:ea typeface="Calibri" pitchFamily="34" charset="-122"/>
+                          <a:cs typeface="Calibri" pitchFamily="34" charset="-120"/>
+                        </a:rPr>
+                        <a:t>US$ 3,2 mi</a:t>
+                      </a:r>
+                      <a:endParaRPr lang="en-US" sz="1000" dirty="0">
+                        <a:latin typeface="Calibri" charset="0"/>
+                        <a:ea typeface="Calibri" charset="0"/>
+                        <a:cs typeface="Calibri" charset="0"/>
+                      </a:endParaRPr>
+                    </a:p>
+                  </a:txBody>
+                  <a:tcPr marL="91440" marR="91440" marT="45720" marB="45720" anchor="ctr">
+                    <a:lnL w="6350" cap="flat" cmpd="sng" algn="ctr">
+                      <a:solidFill>
+                        <a:srgbClr val="E3E8E9"/>
+                      </a:solidFill>
+                      <a:prstDash val="solid"/>
+                      <a:round/>
+                      <a:headEnd type="none" w="med" len="med"/>
+                      <a:tailEnd type="none" w="med" len="med"/>
+                    </a:lnL>
+                    <a:lnR w="6350" cap="flat" cmpd="sng" algn="ctr">
+                      <a:solidFill>
+                        <a:srgbClr val="E3E8E9"/>
+                      </a:solidFill>
+                      <a:prstDash val="solid"/>
+                      <a:round/>
+                      <a:headEnd type="none" w="med" len="med"/>
+                      <a:tailEnd type="none" w="med" len="med"/>
+                    </a:lnR>
+                    <a:lnT w="6350" cap="flat" cmpd="sng" algn="ctr">
+                      <a:solidFill>
+                        <a:srgbClr val="E3E8E9"/>
+                      </a:solidFill>
+                      <a:prstDash val="solid"/>
+                      <a:round/>
+                      <a:headEnd type="none" w="med" len="med"/>
+                      <a:tailEnd type="none" w="med" len="med"/>
+                    </a:lnT>
+                    <a:lnB w="6350" cap="flat" cmpd="sng" algn="ctr">
+                      <a:solidFill>
+                        <a:srgbClr val="E3E8E9"/>
+                      </a:solidFill>
+                      <a:prstDash val="solid"/>
+                      <a:round/>
+                      <a:headEnd type="none" w="med" len="med"/>
+                      <a:tailEnd type="none" w="med" len="med"/>
+                    </a:lnB>
+                    <a:solidFill>
+                      <a:srgbClr val="FFFFFF"/>
+                    </a:solidFill>
+                  </a:tcPr>
+                </a:tc>
               </a:tr>
-              <a:tr h="374904">
+              <a:tr h="420624">
                 <a:tc>
                   <a:txBody>
                     <a:bodyPr/>
@@ -4598,7 +7332,7 @@
                           <a:ea typeface="Calibri" pitchFamily="34" charset="-122"/>
                           <a:cs typeface="Calibri" pitchFamily="34" charset="-120"/>
                         </a:rPr>
-                        <a:t>2</a:t>
+                        <a:t>8</a:t>
                       </a:r>
                       <a:endParaRPr lang="en-US" sz="1000" dirty="0">
                         <a:latin typeface="Calibri" charset="0"/>
@@ -4658,7 +7392,7 @@
                         <a:buNone/>
                       </a:pPr>
                       <a:r>
-                        <a:rPr lang="en-US" sz="1050" dirty="0">
+                        <a:rPr lang="en-US" sz="1000" dirty="0">
                           <a:solidFill>
                             <a:srgbClr val="1C2B33"/>
                           </a:solidFill>
@@ -4666,9 +7400,9 @@
                           <a:ea typeface="Calibri" pitchFamily="34" charset="-122"/>
                           <a:cs typeface="Calibri" pitchFamily="34" charset="-120"/>
                         </a:rPr>
-                        <a:t>TA - Parada Programada</a:t>
-                      </a:r>
-                      <a:endParaRPr lang="en-US" sz="1050" dirty="0">
+                        <a:t>Atualização PLC das Turbinas</a:t>
+                      </a:r>
+                      <a:endParaRPr lang="en-US" sz="1000" dirty="0">
                         <a:latin typeface="Calibri" charset="0"/>
                         <a:ea typeface="Calibri" charset="0"/>
                         <a:cs typeface="Calibri" charset="0"/>
@@ -4722,11 +7456,215 @@
                     <a:bodyPr/>
                     <a:lstStyle/>
                     <a:p>
+                      <a:pPr indent="0" marL="0">
+                        <a:buNone/>
+                      </a:pPr>
+                      <a:r>
+                        <a:rPr lang="en-US" sz="950" dirty="0">
+                          <a:solidFill>
+                            <a:srgbClr val="5B6B73"/>
+                          </a:solidFill>
+                          <a:latin typeface="Calibri" pitchFamily="34" charset="0"/>
+                          <a:ea typeface="Calibri" pitchFamily="34" charset="-122"/>
+                          <a:cs typeface="Calibri" pitchFamily="34" charset="-120"/>
+                        </a:rPr>
+                        <a:t>FPSO Peregrino</a:t>
+                      </a:r>
+                      <a:endParaRPr lang="en-US" sz="950" dirty="0">
+                        <a:latin typeface="Calibri" charset="0"/>
+                        <a:ea typeface="Calibri" charset="0"/>
+                        <a:cs typeface="Calibri" charset="0"/>
+                      </a:endParaRPr>
+                    </a:p>
+                  </a:txBody>
+                  <a:tcPr marL="91440" marR="91440" marT="45720" marB="45720" anchor="ctr">
+                    <a:lnL w="6350" cap="flat" cmpd="sng" algn="ctr">
+                      <a:solidFill>
+                        <a:srgbClr val="E3E8E9"/>
+                      </a:solidFill>
+                      <a:prstDash val="solid"/>
+                      <a:round/>
+                      <a:headEnd type="none" w="med" len="med"/>
+                      <a:tailEnd type="none" w="med" len="med"/>
+                    </a:lnL>
+                    <a:lnR w="6350" cap="flat" cmpd="sng" algn="ctr">
+                      <a:solidFill>
+                        <a:srgbClr val="E3E8E9"/>
+                      </a:solidFill>
+                      <a:prstDash val="solid"/>
+                      <a:round/>
+                      <a:headEnd type="none" w="med" len="med"/>
+                      <a:tailEnd type="none" w="med" len="med"/>
+                    </a:lnR>
+                    <a:lnT w="6350" cap="flat" cmpd="sng" algn="ctr">
+                      <a:solidFill>
+                        <a:srgbClr val="E3E8E9"/>
+                      </a:solidFill>
+                      <a:prstDash val="solid"/>
+                      <a:round/>
+                      <a:headEnd type="none" w="med" len="med"/>
+                      <a:tailEnd type="none" w="med" len="med"/>
+                    </a:lnT>
+                    <a:lnB w="6350" cap="flat" cmpd="sng" algn="ctr">
+                      <a:solidFill>
+                        <a:srgbClr val="E3E8E9"/>
+                      </a:solidFill>
+                      <a:prstDash val="solid"/>
+                      <a:round/>
+                      <a:headEnd type="none" w="med" len="med"/>
+                      <a:tailEnd type="none" w="med" len="med"/>
+                    </a:lnB>
+                    <a:solidFill>
+                      <a:srgbClr val="F0F4F5"/>
+                    </a:solidFill>
+                  </a:tcPr>
+                </a:tc>
+                <a:tc>
+                  <a:txBody>
+                    <a:bodyPr/>
+                    <a:lstStyle/>
+                    <a:p>
+                      <a:pPr indent="0" marL="0">
+                        <a:buNone/>
+                      </a:pPr>
+                      <a:r>
+                        <a:rPr lang="en-US" sz="900" dirty="0">
+                          <a:solidFill>
+                            <a:srgbClr val="5B6B73"/>
+                          </a:solidFill>
+                          <a:latin typeface="Calibri" pitchFamily="34" charset="0"/>
+                          <a:ea typeface="Calibri" pitchFamily="34" charset="-122"/>
+                          <a:cs typeface="Calibri" pitchFamily="34" charset="-120"/>
+                        </a:rPr>
+                        <a:t>Projetos</a:t>
+                      </a:r>
+                      <a:endParaRPr lang="en-US" sz="900" dirty="0">
+                        <a:latin typeface="Calibri" charset="0"/>
+                        <a:ea typeface="Calibri" charset="0"/>
+                        <a:cs typeface="Calibri" charset="0"/>
+                      </a:endParaRPr>
+                    </a:p>
+                  </a:txBody>
+                  <a:tcPr marL="91440" marR="91440" marT="45720" marB="45720" anchor="ctr">
+                    <a:lnL w="6350" cap="flat" cmpd="sng" algn="ctr">
+                      <a:solidFill>
+                        <a:srgbClr val="E3E8E9"/>
+                      </a:solidFill>
+                      <a:prstDash val="solid"/>
+                      <a:round/>
+                      <a:headEnd type="none" w="med" len="med"/>
+                      <a:tailEnd type="none" w="med" len="med"/>
+                    </a:lnL>
+                    <a:lnR w="6350" cap="flat" cmpd="sng" algn="ctr">
+                      <a:solidFill>
+                        <a:srgbClr val="E3E8E9"/>
+                      </a:solidFill>
+                      <a:prstDash val="solid"/>
+                      <a:round/>
+                      <a:headEnd type="none" w="med" len="med"/>
+                      <a:tailEnd type="none" w="med" len="med"/>
+                    </a:lnR>
+                    <a:lnT w="6350" cap="flat" cmpd="sng" algn="ctr">
+                      <a:solidFill>
+                        <a:srgbClr val="E3E8E9"/>
+                      </a:solidFill>
+                      <a:prstDash val="solid"/>
+                      <a:round/>
+                      <a:headEnd type="none" w="med" len="med"/>
+                      <a:tailEnd type="none" w="med" len="med"/>
+                    </a:lnT>
+                    <a:lnB w="6350" cap="flat" cmpd="sng" algn="ctr">
+                      <a:solidFill>
+                        <a:srgbClr val="E3E8E9"/>
+                      </a:solidFill>
+                      <a:prstDash val="solid"/>
+                      <a:round/>
+                      <a:headEnd type="none" w="med" len="med"/>
+                      <a:tailEnd type="none" w="med" len="med"/>
+                    </a:lnB>
+                    <a:solidFill>
+                      <a:srgbClr val="F0F4F5"/>
+                    </a:solidFill>
+                  </a:tcPr>
+                </a:tc>
+                <a:tc>
+                  <a:txBody>
+                    <a:bodyPr/>
+                    <a:lstStyle/>
+                    <a:p>
+                      <a:pPr indent="0" marL="0">
+                        <a:buNone/>
+                      </a:pPr>
+                      <a:r>
+                        <a:rPr lang="en-US" sz="900" dirty="0">
+                          <a:solidFill>
+                            <a:srgbClr val="5B6B73"/>
+                          </a:solidFill>
+                          <a:latin typeface="Calibri" pitchFamily="34" charset="0"/>
+                          <a:ea typeface="Calibri" pitchFamily="34" charset="-122"/>
+                          <a:cs typeface="Calibri" pitchFamily="34" charset="-120"/>
+                        </a:rPr>
+                        <a:t>Integridade e Regulatório</a:t>
+                      </a:r>
+                      <a:endParaRPr lang="en-US" sz="900" dirty="0">
+                        <a:latin typeface="Calibri" charset="0"/>
+                        <a:ea typeface="Calibri" charset="0"/>
+                        <a:cs typeface="Calibri" charset="0"/>
+                      </a:endParaRPr>
+                    </a:p>
+                  </a:txBody>
+                  <a:tcPr marL="91440" marR="91440" marT="45720" marB="45720" anchor="ctr">
+                    <a:lnL w="6350" cap="flat" cmpd="sng" algn="ctr">
+                      <a:solidFill>
+                        <a:srgbClr val="E3E8E9"/>
+                      </a:solidFill>
+                      <a:prstDash val="solid"/>
+                      <a:round/>
+                      <a:headEnd type="none" w="med" len="med"/>
+                      <a:tailEnd type="none" w="med" len="med"/>
+                    </a:lnL>
+                    <a:lnR w="6350" cap="flat" cmpd="sng" algn="ctr">
+                      <a:solidFill>
+                        <a:srgbClr val="E3E8E9"/>
+                      </a:solidFill>
+                      <a:prstDash val="solid"/>
+                      <a:round/>
+                      <a:headEnd type="none" w="med" len="med"/>
+                      <a:tailEnd type="none" w="med" len="med"/>
+                    </a:lnR>
+                    <a:lnT w="6350" cap="flat" cmpd="sng" algn="ctr">
+                      <a:solidFill>
+                        <a:srgbClr val="E3E8E9"/>
+                      </a:solidFill>
+                      <a:prstDash val="solid"/>
+                      <a:round/>
+                      <a:headEnd type="none" w="med" len="med"/>
+                      <a:tailEnd type="none" w="med" len="med"/>
+                    </a:lnT>
+                    <a:lnB w="6350" cap="flat" cmpd="sng" algn="ctr">
+                      <a:solidFill>
+                        <a:srgbClr val="E3E8E9"/>
+                      </a:solidFill>
+                      <a:prstDash val="solid"/>
+                      <a:round/>
+                      <a:headEnd type="none" w="med" len="med"/>
+                      <a:tailEnd type="none" w="med" len="med"/>
+                    </a:lnB>
+                    <a:solidFill>
+                      <a:srgbClr val="F0F4F5"/>
+                    </a:solidFill>
+                  </a:tcPr>
+                </a:tc>
+                <a:tc>
+                  <a:txBody>
+                    <a:bodyPr/>
+                    <a:lstStyle/>
+                    <a:p>
                       <a:pPr algn="r" indent="0" marL="0">
                         <a:buNone/>
                       </a:pPr>
                       <a:r>
-                        <a:rPr lang="en-US" sz="1050" b="1" dirty="0">
+                        <a:rPr lang="en-US" sz="1000" b="1" dirty="0">
                           <a:solidFill>
                             <a:srgbClr val="0B2A3D"/>
                           </a:solidFill>
@@ -4734,9 +7672,9 @@
                           <a:ea typeface="Calibri" pitchFamily="34" charset="-122"/>
                           <a:cs typeface="Calibri" pitchFamily="34" charset="-120"/>
                         </a:rPr>
-                        <a:t>US$ 21,2 mi</a:t>
-                      </a:r>
-                      <a:endParaRPr lang="en-US" sz="1050" dirty="0">
+                        <a:t>US$ 3,1 mi</a:t>
+                      </a:r>
+                      <a:endParaRPr lang="en-US" sz="1000" dirty="0">
                         <a:latin typeface="Calibri" charset="0"/>
                         <a:ea typeface="Calibri" charset="0"/>
                         <a:cs typeface="Calibri" charset="0"/>
@@ -4785,6 +7723,348 @@
                     </a:solidFill>
                   </a:tcPr>
                 </a:tc>
+              </a:tr>
+              <a:tr h="420624">
+                <a:tc>
+                  <a:txBody>
+                    <a:bodyPr/>
+                    <a:lstStyle/>
+                    <a:p>
+                      <a:pPr algn="ctr" indent="0" marL="0">
+                        <a:buNone/>
+                      </a:pPr>
+                      <a:r>
+                        <a:rPr lang="en-US" sz="1000" dirty="0">
+                          <a:solidFill>
+                            <a:srgbClr val="5B6B73"/>
+                          </a:solidFill>
+                          <a:latin typeface="Calibri" pitchFamily="34" charset="0"/>
+                          <a:ea typeface="Calibri" pitchFamily="34" charset="-122"/>
+                          <a:cs typeface="Calibri" pitchFamily="34" charset="-120"/>
+                        </a:rPr>
+                        <a:t>9</a:t>
+                      </a:r>
+                      <a:endParaRPr lang="en-US" sz="1000" dirty="0">
+                        <a:latin typeface="Calibri" charset="0"/>
+                        <a:ea typeface="Calibri" charset="0"/>
+                        <a:cs typeface="Calibri" charset="0"/>
+                      </a:endParaRPr>
+                    </a:p>
+                  </a:txBody>
+                  <a:tcPr marL="91440" marR="91440" marT="45720" marB="45720" anchor="ctr">
+                    <a:lnL w="6350" cap="flat" cmpd="sng" algn="ctr">
+                      <a:solidFill>
+                        <a:srgbClr val="E3E8E9"/>
+                      </a:solidFill>
+                      <a:prstDash val="solid"/>
+                      <a:round/>
+                      <a:headEnd type="none" w="med" len="med"/>
+                      <a:tailEnd type="none" w="med" len="med"/>
+                    </a:lnL>
+                    <a:lnR w="6350" cap="flat" cmpd="sng" algn="ctr">
+                      <a:solidFill>
+                        <a:srgbClr val="E3E8E9"/>
+                      </a:solidFill>
+                      <a:prstDash val="solid"/>
+                      <a:round/>
+                      <a:headEnd type="none" w="med" len="med"/>
+                      <a:tailEnd type="none" w="med" len="med"/>
+                    </a:lnR>
+                    <a:lnT w="6350" cap="flat" cmpd="sng" algn="ctr">
+                      <a:solidFill>
+                        <a:srgbClr val="E3E8E9"/>
+                      </a:solidFill>
+                      <a:prstDash val="solid"/>
+                      <a:round/>
+                      <a:headEnd type="none" w="med" len="med"/>
+                      <a:tailEnd type="none" w="med" len="med"/>
+                    </a:lnT>
+                    <a:lnB w="6350" cap="flat" cmpd="sng" algn="ctr">
+                      <a:solidFill>
+                        <a:srgbClr val="E3E8E9"/>
+                      </a:solidFill>
+                      <a:prstDash val="solid"/>
+                      <a:round/>
+                      <a:headEnd type="none" w="med" len="med"/>
+                      <a:tailEnd type="none" w="med" len="med"/>
+                    </a:lnB>
+                    <a:solidFill>
+                      <a:srgbClr val="FFFFFF"/>
+                    </a:solidFill>
+                  </a:tcPr>
+                </a:tc>
+                <a:tc>
+                  <a:txBody>
+                    <a:bodyPr/>
+                    <a:lstStyle/>
+                    <a:p>
+                      <a:pPr indent="0" marL="0">
+                        <a:buNone/>
+                      </a:pPr>
+                      <a:r>
+                        <a:rPr lang="en-US" sz="1000" dirty="0">
+                          <a:solidFill>
+                            <a:srgbClr val="1C2B33"/>
+                          </a:solidFill>
+                          <a:latin typeface="Calibri" pitchFamily="34" charset="0"/>
+                          <a:ea typeface="Calibri" pitchFamily="34" charset="-122"/>
+                          <a:cs typeface="Calibri" pitchFamily="34" charset="-120"/>
+                        </a:rPr>
+                        <a:t>Reforma do Casario - Acomodação</a:t>
+                      </a:r>
+                      <a:endParaRPr lang="en-US" sz="1000" dirty="0">
+                        <a:latin typeface="Calibri" charset="0"/>
+                        <a:ea typeface="Calibri" charset="0"/>
+                        <a:cs typeface="Calibri" charset="0"/>
+                      </a:endParaRPr>
+                    </a:p>
+                  </a:txBody>
+                  <a:tcPr marL="91440" marR="91440" marT="45720" marB="45720" anchor="ctr">
+                    <a:lnL w="6350" cap="flat" cmpd="sng" algn="ctr">
+                      <a:solidFill>
+                        <a:srgbClr val="E3E8E9"/>
+                      </a:solidFill>
+                      <a:prstDash val="solid"/>
+                      <a:round/>
+                      <a:headEnd type="none" w="med" len="med"/>
+                      <a:tailEnd type="none" w="med" len="med"/>
+                    </a:lnL>
+                    <a:lnR w="6350" cap="flat" cmpd="sng" algn="ctr">
+                      <a:solidFill>
+                        <a:srgbClr val="E3E8E9"/>
+                      </a:solidFill>
+                      <a:prstDash val="solid"/>
+                      <a:round/>
+                      <a:headEnd type="none" w="med" len="med"/>
+                      <a:tailEnd type="none" w="med" len="med"/>
+                    </a:lnR>
+                    <a:lnT w="6350" cap="flat" cmpd="sng" algn="ctr">
+                      <a:solidFill>
+                        <a:srgbClr val="E3E8E9"/>
+                      </a:solidFill>
+                      <a:prstDash val="solid"/>
+                      <a:round/>
+                      <a:headEnd type="none" w="med" len="med"/>
+                      <a:tailEnd type="none" w="med" len="med"/>
+                    </a:lnT>
+                    <a:lnB w="6350" cap="flat" cmpd="sng" algn="ctr">
+                      <a:solidFill>
+                        <a:srgbClr val="E3E8E9"/>
+                      </a:solidFill>
+                      <a:prstDash val="solid"/>
+                      <a:round/>
+                      <a:headEnd type="none" w="med" len="med"/>
+                      <a:tailEnd type="none" w="med" len="med"/>
+                    </a:lnB>
+                    <a:solidFill>
+                      <a:srgbClr val="FFFFFF"/>
+                    </a:solidFill>
+                  </a:tcPr>
+                </a:tc>
+                <a:tc>
+                  <a:txBody>
+                    <a:bodyPr/>
+                    <a:lstStyle/>
+                    <a:p>
+                      <a:pPr indent="0" marL="0">
+                        <a:buNone/>
+                      </a:pPr>
+                      <a:r>
+                        <a:rPr lang="en-US" sz="950" dirty="0">
+                          <a:solidFill>
+                            <a:srgbClr val="5B6B73"/>
+                          </a:solidFill>
+                          <a:latin typeface="Calibri" pitchFamily="34" charset="0"/>
+                          <a:ea typeface="Calibri" pitchFamily="34" charset="-122"/>
+                          <a:cs typeface="Calibri" pitchFamily="34" charset="-120"/>
+                        </a:rPr>
+                        <a:t>FPSO Frade</a:t>
+                      </a:r>
+                      <a:endParaRPr lang="en-US" sz="950" dirty="0">
+                        <a:latin typeface="Calibri" charset="0"/>
+                        <a:ea typeface="Calibri" charset="0"/>
+                        <a:cs typeface="Calibri" charset="0"/>
+                      </a:endParaRPr>
+                    </a:p>
+                  </a:txBody>
+                  <a:tcPr marL="91440" marR="91440" marT="45720" marB="45720" anchor="ctr">
+                    <a:lnL w="6350" cap="flat" cmpd="sng" algn="ctr">
+                      <a:solidFill>
+                        <a:srgbClr val="E3E8E9"/>
+                      </a:solidFill>
+                      <a:prstDash val="solid"/>
+                      <a:round/>
+                      <a:headEnd type="none" w="med" len="med"/>
+                      <a:tailEnd type="none" w="med" len="med"/>
+                    </a:lnL>
+                    <a:lnR w="6350" cap="flat" cmpd="sng" algn="ctr">
+                      <a:solidFill>
+                        <a:srgbClr val="E3E8E9"/>
+                      </a:solidFill>
+                      <a:prstDash val="solid"/>
+                      <a:round/>
+                      <a:headEnd type="none" w="med" len="med"/>
+                      <a:tailEnd type="none" w="med" len="med"/>
+                    </a:lnR>
+                    <a:lnT w="6350" cap="flat" cmpd="sng" algn="ctr">
+                      <a:solidFill>
+                        <a:srgbClr val="E3E8E9"/>
+                      </a:solidFill>
+                      <a:prstDash val="solid"/>
+                      <a:round/>
+                      <a:headEnd type="none" w="med" len="med"/>
+                      <a:tailEnd type="none" w="med" len="med"/>
+                    </a:lnT>
+                    <a:lnB w="6350" cap="flat" cmpd="sng" algn="ctr">
+                      <a:solidFill>
+                        <a:srgbClr val="E3E8E9"/>
+                      </a:solidFill>
+                      <a:prstDash val="solid"/>
+                      <a:round/>
+                      <a:headEnd type="none" w="med" len="med"/>
+                      <a:tailEnd type="none" w="med" len="med"/>
+                    </a:lnB>
+                    <a:solidFill>
+                      <a:srgbClr val="FFFFFF"/>
+                    </a:solidFill>
+                  </a:tcPr>
+                </a:tc>
+                <a:tc>
+                  <a:txBody>
+                    <a:bodyPr/>
+                    <a:lstStyle/>
+                    <a:p>
+                      <a:pPr indent="0" marL="0">
+                        <a:buNone/>
+                      </a:pPr>
+                      <a:r>
+                        <a:rPr lang="en-US" sz="900" dirty="0">
+                          <a:solidFill>
+                            <a:srgbClr val="5B6B73"/>
+                          </a:solidFill>
+                          <a:latin typeface="Calibri" pitchFamily="34" charset="0"/>
+                          <a:ea typeface="Calibri" pitchFamily="34" charset="-122"/>
+                          <a:cs typeface="Calibri" pitchFamily="34" charset="-120"/>
+                        </a:rPr>
+                        <a:t>ADM - Administrativo</a:t>
+                      </a:r>
+                      <a:endParaRPr lang="en-US" sz="900" dirty="0">
+                        <a:latin typeface="Calibri" charset="0"/>
+                        <a:ea typeface="Calibri" charset="0"/>
+                        <a:cs typeface="Calibri" charset="0"/>
+                      </a:endParaRPr>
+                    </a:p>
+                  </a:txBody>
+                  <a:tcPr marL="91440" marR="91440" marT="45720" marB="45720" anchor="ctr">
+                    <a:lnL w="6350" cap="flat" cmpd="sng" algn="ctr">
+                      <a:solidFill>
+                        <a:srgbClr val="E3E8E9"/>
+                      </a:solidFill>
+                      <a:prstDash val="solid"/>
+                      <a:round/>
+                      <a:headEnd type="none" w="med" len="med"/>
+                      <a:tailEnd type="none" w="med" len="med"/>
+                    </a:lnL>
+                    <a:lnR w="6350" cap="flat" cmpd="sng" algn="ctr">
+                      <a:solidFill>
+                        <a:srgbClr val="E3E8E9"/>
+                      </a:solidFill>
+                      <a:prstDash val="solid"/>
+                      <a:round/>
+                      <a:headEnd type="none" w="med" len="med"/>
+                      <a:tailEnd type="none" w="med" len="med"/>
+                    </a:lnR>
+                    <a:lnT w="6350" cap="flat" cmpd="sng" algn="ctr">
+                      <a:solidFill>
+                        <a:srgbClr val="E3E8E9"/>
+                      </a:solidFill>
+                      <a:prstDash val="solid"/>
+                      <a:round/>
+                      <a:headEnd type="none" w="med" len="med"/>
+                      <a:tailEnd type="none" w="med" len="med"/>
+                    </a:lnT>
+                    <a:lnB w="6350" cap="flat" cmpd="sng" algn="ctr">
+                      <a:solidFill>
+                        <a:srgbClr val="E3E8E9"/>
+                      </a:solidFill>
+                      <a:prstDash val="solid"/>
+                      <a:round/>
+                      <a:headEnd type="none" w="med" len="med"/>
+                      <a:tailEnd type="none" w="med" len="med"/>
+                    </a:lnB>
+                    <a:solidFill>
+                      <a:srgbClr val="FFFFFF"/>
+                    </a:solidFill>
+                  </a:tcPr>
+                </a:tc>
+                <a:tc>
+                  <a:txBody>
+                    <a:bodyPr/>
+                    <a:lstStyle/>
+                    <a:p>
+                      <a:pPr indent="0" marL="0">
+                        <a:buNone/>
+                      </a:pPr>
+                      <a:r>
+                        <a:rPr lang="en-US" sz="900" dirty="0">
+                          <a:solidFill>
+                            <a:srgbClr val="5B6B73"/>
+                          </a:solidFill>
+                          <a:latin typeface="Calibri" pitchFamily="34" charset="0"/>
+                          <a:ea typeface="Calibri" pitchFamily="34" charset="-122"/>
+                          <a:cs typeface="Calibri" pitchFamily="34" charset="-120"/>
+                        </a:rPr>
+                        <a:t>Bem Estar/Segurança</a:t>
+                      </a:r>
+                      <a:endParaRPr lang="en-US" sz="900" dirty="0">
+                        <a:latin typeface="Calibri" charset="0"/>
+                        <a:ea typeface="Calibri" charset="0"/>
+                        <a:cs typeface="Calibri" charset="0"/>
+                      </a:endParaRPr>
+                    </a:p>
+                  </a:txBody>
+                  <a:tcPr marL="91440" marR="91440" marT="45720" marB="45720" anchor="ctr">
+                    <a:lnL w="6350" cap="flat" cmpd="sng" algn="ctr">
+                      <a:solidFill>
+                        <a:srgbClr val="E3E8E9"/>
+                      </a:solidFill>
+                      <a:prstDash val="solid"/>
+                      <a:round/>
+                      <a:headEnd type="none" w="med" len="med"/>
+                      <a:tailEnd type="none" w="med" len="med"/>
+                    </a:lnL>
+                    <a:lnR w="6350" cap="flat" cmpd="sng" algn="ctr">
+                      <a:solidFill>
+                        <a:srgbClr val="E3E8E9"/>
+                      </a:solidFill>
+                      <a:prstDash val="solid"/>
+                      <a:round/>
+                      <a:headEnd type="none" w="med" len="med"/>
+                      <a:tailEnd type="none" w="med" len="med"/>
+                    </a:lnR>
+                    <a:lnT w="6350" cap="flat" cmpd="sng" algn="ctr">
+                      <a:solidFill>
+                        <a:srgbClr val="E3E8E9"/>
+                      </a:solidFill>
+                      <a:prstDash val="solid"/>
+                      <a:round/>
+                      <a:headEnd type="none" w="med" len="med"/>
+                      <a:tailEnd type="none" w="med" len="med"/>
+                    </a:lnT>
+                    <a:lnB w="6350" cap="flat" cmpd="sng" algn="ctr">
+                      <a:solidFill>
+                        <a:srgbClr val="E3E8E9"/>
+                      </a:solidFill>
+                      <a:prstDash val="solid"/>
+                      <a:round/>
+                      <a:headEnd type="none" w="med" len="med"/>
+                      <a:tailEnd type="none" w="med" len="med"/>
+                    </a:lnB>
+                    <a:solidFill>
+                      <a:srgbClr val="FFFFFF"/>
+                    </a:solidFill>
+                  </a:tcPr>
+                </a:tc>
                 <a:tc>
                   <a:txBody>
                     <a:bodyPr/>
@@ -4794,6 +8074,76 @@
                         <a:buNone/>
                       </a:pPr>
                       <a:r>
+                        <a:rPr lang="en-US" sz="1000" b="1" dirty="0">
+                          <a:solidFill>
+                            <a:srgbClr val="0B2A3D"/>
+                          </a:solidFill>
+                          <a:latin typeface="Calibri" pitchFamily="34" charset="0"/>
+                          <a:ea typeface="Calibri" pitchFamily="34" charset="-122"/>
+                          <a:cs typeface="Calibri" pitchFamily="34" charset="-120"/>
+                        </a:rPr>
+                        <a:t>US$ 2,1 mi</a:t>
+                      </a:r>
+                      <a:endParaRPr lang="en-US" sz="1000" dirty="0">
+                        <a:latin typeface="Calibri" charset="0"/>
+                        <a:ea typeface="Calibri" charset="0"/>
+                        <a:cs typeface="Calibri" charset="0"/>
+                      </a:endParaRPr>
+                    </a:p>
+                  </a:txBody>
+                  <a:tcPr marL="91440" marR="91440" marT="45720" marB="45720" anchor="ctr">
+                    <a:lnL w="6350" cap="flat" cmpd="sng" algn="ctr">
+                      <a:solidFill>
+                        <a:srgbClr val="E3E8E9"/>
+                      </a:solidFill>
+                      <a:prstDash val="solid"/>
+                      <a:round/>
+                      <a:headEnd type="none" w="med" len="med"/>
+                      <a:tailEnd type="none" w="med" len="med"/>
+                    </a:lnL>
+                    <a:lnR w="6350" cap="flat" cmpd="sng" algn="ctr">
+                      <a:solidFill>
+                        <a:srgbClr val="E3E8E9"/>
+                      </a:solidFill>
+                      <a:prstDash val="solid"/>
+                      <a:round/>
+                      <a:headEnd type="none" w="med" len="med"/>
+                      <a:tailEnd type="none" w="med" len="med"/>
+                    </a:lnR>
+                    <a:lnT w="6350" cap="flat" cmpd="sng" algn="ctr">
+                      <a:solidFill>
+                        <a:srgbClr val="E3E8E9"/>
+                      </a:solidFill>
+                      <a:prstDash val="solid"/>
+                      <a:round/>
+                      <a:headEnd type="none" w="med" len="med"/>
+                      <a:tailEnd type="none" w="med" len="med"/>
+                    </a:lnT>
+                    <a:lnB w="6350" cap="flat" cmpd="sng" algn="ctr">
+                      <a:solidFill>
+                        <a:srgbClr val="E3E8E9"/>
+                      </a:solidFill>
+                      <a:prstDash val="solid"/>
+                      <a:round/>
+                      <a:headEnd type="none" w="med" len="med"/>
+                      <a:tailEnd type="none" w="med" len="med"/>
+                    </a:lnB>
+                    <a:solidFill>
+                      <a:srgbClr val="FFFFFF"/>
+                    </a:solidFill>
+                  </a:tcPr>
+                </a:tc>
+              </a:tr>
+              <a:tr h="420624">
+                <a:tc>
+                  <a:txBody>
+                    <a:bodyPr/>
+                    <a:lstStyle/>
+                    <a:p>
+                      <a:pPr algn="ctr" indent="0" marL="0">
+                        <a:buNone/>
+                      </a:pPr>
+                      <a:r>
                         <a:rPr lang="en-US" sz="1000" dirty="0">
                           <a:solidFill>
                             <a:srgbClr val="5B6B73"/>
@@ -4802,7 +8152,7 @@
                           <a:ea typeface="Calibri" pitchFamily="34" charset="-122"/>
                           <a:cs typeface="Calibri" pitchFamily="34" charset="-120"/>
                         </a:rPr>
-                        <a:t>16,6%</a:t>
+                        <a:t>10</a:t>
                       </a:r>
                       <a:endParaRPr lang="en-US" sz="1000" dirty="0">
                         <a:latin typeface="Calibri" charset="0"/>
@@ -4853,26 +8203,296 @@
                     </a:solidFill>
                   </a:tcPr>
                 </a:tc>
-              </a:tr>
-              <a:tr h="374904">
-                <a:tc>
-                  <a:txBody>
-                    <a:bodyPr/>
-                    <a:lstStyle/>
-                    <a:p>
-                      <a:pPr algn="ctr" indent="0" marL="0">
+                <a:tc>
+                  <a:txBody>
+                    <a:bodyPr/>
+                    <a:lstStyle/>
+                    <a:p>
+                      <a:pPr indent="0" marL="0">
                         <a:buNone/>
                       </a:pPr>
                       <a:r>
                         <a:rPr lang="en-US" sz="1000" dirty="0">
                           <a:solidFill>
+                            <a:srgbClr val="1C2B33"/>
+                          </a:solidFill>
+                          <a:latin typeface="Calibri" pitchFamily="34" charset="0"/>
+                          <a:ea typeface="Calibri" pitchFamily="34" charset="-122"/>
+                          <a:cs typeface="Calibri" pitchFamily="34" charset="-120"/>
+                        </a:rPr>
+                        <a:t>Substituição de Internos do Coalescer (TAR)</a:t>
+                      </a:r>
+                      <a:endParaRPr lang="en-US" sz="1000" dirty="0">
+                        <a:latin typeface="Calibri" charset="0"/>
+                        <a:ea typeface="Calibri" charset="0"/>
+                        <a:cs typeface="Calibri" charset="0"/>
+                      </a:endParaRPr>
+                    </a:p>
+                  </a:txBody>
+                  <a:tcPr marL="91440" marR="91440" marT="45720" marB="45720" anchor="ctr">
+                    <a:lnL w="6350" cap="flat" cmpd="sng" algn="ctr">
+                      <a:solidFill>
+                        <a:srgbClr val="E3E8E9"/>
+                      </a:solidFill>
+                      <a:prstDash val="solid"/>
+                      <a:round/>
+                      <a:headEnd type="none" w="med" len="med"/>
+                      <a:tailEnd type="none" w="med" len="med"/>
+                    </a:lnL>
+                    <a:lnR w="6350" cap="flat" cmpd="sng" algn="ctr">
+                      <a:solidFill>
+                        <a:srgbClr val="E3E8E9"/>
+                      </a:solidFill>
+                      <a:prstDash val="solid"/>
+                      <a:round/>
+                      <a:headEnd type="none" w="med" len="med"/>
+                      <a:tailEnd type="none" w="med" len="med"/>
+                    </a:lnR>
+                    <a:lnT w="6350" cap="flat" cmpd="sng" algn="ctr">
+                      <a:solidFill>
+                        <a:srgbClr val="E3E8E9"/>
+                      </a:solidFill>
+                      <a:prstDash val="solid"/>
+                      <a:round/>
+                      <a:headEnd type="none" w="med" len="med"/>
+                      <a:tailEnd type="none" w="med" len="med"/>
+                    </a:lnT>
+                    <a:lnB w="6350" cap="flat" cmpd="sng" algn="ctr">
+                      <a:solidFill>
+                        <a:srgbClr val="E3E8E9"/>
+                      </a:solidFill>
+                      <a:prstDash val="solid"/>
+                      <a:round/>
+                      <a:headEnd type="none" w="med" len="med"/>
+                      <a:tailEnd type="none" w="med" len="med"/>
+                    </a:lnB>
+                    <a:solidFill>
+                      <a:srgbClr val="F0F4F5"/>
+                    </a:solidFill>
+                  </a:tcPr>
+                </a:tc>
+                <a:tc>
+                  <a:txBody>
+                    <a:bodyPr/>
+                    <a:lstStyle/>
+                    <a:p>
+                      <a:pPr indent="0" marL="0">
+                        <a:buNone/>
+                      </a:pPr>
+                      <a:r>
+                        <a:rPr lang="en-US" sz="950" dirty="0">
+                          <a:solidFill>
                             <a:srgbClr val="5B6B73"/>
                           </a:solidFill>
                           <a:latin typeface="Calibri" pitchFamily="34" charset="0"/>
                           <a:ea typeface="Calibri" pitchFamily="34" charset="-122"/>
                           <a:cs typeface="Calibri" pitchFamily="34" charset="-120"/>
                         </a:rPr>
-                        <a:t>3</a:t>
+                        <a:t>FPSO Peregrino</a:t>
+                      </a:r>
+                      <a:endParaRPr lang="en-US" sz="950" dirty="0">
+                        <a:latin typeface="Calibri" charset="0"/>
+                        <a:ea typeface="Calibri" charset="0"/>
+                        <a:cs typeface="Calibri" charset="0"/>
+                      </a:endParaRPr>
+                    </a:p>
+                  </a:txBody>
+                  <a:tcPr marL="91440" marR="91440" marT="45720" marB="45720" anchor="ctr">
+                    <a:lnL w="6350" cap="flat" cmpd="sng" algn="ctr">
+                      <a:solidFill>
+                        <a:srgbClr val="E3E8E9"/>
+                      </a:solidFill>
+                      <a:prstDash val="solid"/>
+                      <a:round/>
+                      <a:headEnd type="none" w="med" len="med"/>
+                      <a:tailEnd type="none" w="med" len="med"/>
+                    </a:lnL>
+                    <a:lnR w="6350" cap="flat" cmpd="sng" algn="ctr">
+                      <a:solidFill>
+                        <a:srgbClr val="E3E8E9"/>
+                      </a:solidFill>
+                      <a:prstDash val="solid"/>
+                      <a:round/>
+                      <a:headEnd type="none" w="med" len="med"/>
+                      <a:tailEnd type="none" w="med" len="med"/>
+                    </a:lnR>
+                    <a:lnT w="6350" cap="flat" cmpd="sng" algn="ctr">
+                      <a:solidFill>
+                        <a:srgbClr val="E3E8E9"/>
+                      </a:solidFill>
+                      <a:prstDash val="solid"/>
+                      <a:round/>
+                      <a:headEnd type="none" w="med" len="med"/>
+                      <a:tailEnd type="none" w="med" len="med"/>
+                    </a:lnT>
+                    <a:lnB w="6350" cap="flat" cmpd="sng" algn="ctr">
+                      <a:solidFill>
+                        <a:srgbClr val="E3E8E9"/>
+                      </a:solidFill>
+                      <a:prstDash val="solid"/>
+                      <a:round/>
+                      <a:headEnd type="none" w="med" len="med"/>
+                      <a:tailEnd type="none" w="med" len="med"/>
+                    </a:lnB>
+                    <a:solidFill>
+                      <a:srgbClr val="F0F4F5"/>
+                    </a:solidFill>
+                  </a:tcPr>
+                </a:tc>
+                <a:tc>
+                  <a:txBody>
+                    <a:bodyPr/>
+                    <a:lstStyle/>
+                    <a:p>
+                      <a:pPr indent="0" marL="0">
+                        <a:buNone/>
+                      </a:pPr>
+                      <a:r>
+                        <a:rPr lang="en-US" sz="900" dirty="0">
+                          <a:solidFill>
+                            <a:srgbClr val="5B6B73"/>
+                          </a:solidFill>
+                          <a:latin typeface="Calibri" pitchFamily="34" charset="0"/>
+                          <a:ea typeface="Calibri" pitchFamily="34" charset="-122"/>
+                          <a:cs typeface="Calibri" pitchFamily="34" charset="-120"/>
+                        </a:rPr>
+                        <a:t>P&amp;Q - Processos</a:t>
+                      </a:r>
+                      <a:endParaRPr lang="en-US" sz="900" dirty="0">
+                        <a:latin typeface="Calibri" charset="0"/>
+                        <a:ea typeface="Calibri" charset="0"/>
+                        <a:cs typeface="Calibri" charset="0"/>
+                      </a:endParaRPr>
+                    </a:p>
+                  </a:txBody>
+                  <a:tcPr marL="91440" marR="91440" marT="45720" marB="45720" anchor="ctr">
+                    <a:lnL w="6350" cap="flat" cmpd="sng" algn="ctr">
+                      <a:solidFill>
+                        <a:srgbClr val="E3E8E9"/>
+                      </a:solidFill>
+                      <a:prstDash val="solid"/>
+                      <a:round/>
+                      <a:headEnd type="none" w="med" len="med"/>
+                      <a:tailEnd type="none" w="med" len="med"/>
+                    </a:lnL>
+                    <a:lnR w="6350" cap="flat" cmpd="sng" algn="ctr">
+                      <a:solidFill>
+                        <a:srgbClr val="E3E8E9"/>
+                      </a:solidFill>
+                      <a:prstDash val="solid"/>
+                      <a:round/>
+                      <a:headEnd type="none" w="med" len="med"/>
+                      <a:tailEnd type="none" w="med" len="med"/>
+                    </a:lnR>
+                    <a:lnT w="6350" cap="flat" cmpd="sng" algn="ctr">
+                      <a:solidFill>
+                        <a:srgbClr val="E3E8E9"/>
+                      </a:solidFill>
+                      <a:prstDash val="solid"/>
+                      <a:round/>
+                      <a:headEnd type="none" w="med" len="med"/>
+                      <a:tailEnd type="none" w="med" len="med"/>
+                    </a:lnT>
+                    <a:lnB w="6350" cap="flat" cmpd="sng" algn="ctr">
+                      <a:solidFill>
+                        <a:srgbClr val="E3E8E9"/>
+                      </a:solidFill>
+                      <a:prstDash val="solid"/>
+                      <a:round/>
+                      <a:headEnd type="none" w="med" len="med"/>
+                      <a:tailEnd type="none" w="med" len="med"/>
+                    </a:lnB>
+                    <a:solidFill>
+                      <a:srgbClr val="F0F4F5"/>
+                    </a:solidFill>
+                  </a:tcPr>
+                </a:tc>
+                <a:tc>
+                  <a:txBody>
+                    <a:bodyPr/>
+                    <a:lstStyle/>
+                    <a:p>
+                      <a:pPr indent="0" marL="0">
+                        <a:buNone/>
+                      </a:pPr>
+                      <a:r>
+                        <a:rPr lang="en-US" sz="900" dirty="0">
+                          <a:solidFill>
+                            <a:srgbClr val="5B6B73"/>
+                          </a:solidFill>
+                          <a:latin typeface="Calibri" pitchFamily="34" charset="0"/>
+                          <a:ea typeface="Calibri" pitchFamily="34" charset="-122"/>
+                          <a:cs typeface="Calibri" pitchFamily="34" charset="-120"/>
+                        </a:rPr>
+                        <a:t>Eficiência de Produção</a:t>
+                      </a:r>
+                      <a:endParaRPr lang="en-US" sz="900" dirty="0">
+                        <a:latin typeface="Calibri" charset="0"/>
+                        <a:ea typeface="Calibri" charset="0"/>
+                        <a:cs typeface="Calibri" charset="0"/>
+                      </a:endParaRPr>
+                    </a:p>
+                  </a:txBody>
+                  <a:tcPr marL="91440" marR="91440" marT="45720" marB="45720" anchor="ctr">
+                    <a:lnL w="6350" cap="flat" cmpd="sng" algn="ctr">
+                      <a:solidFill>
+                        <a:srgbClr val="E3E8E9"/>
+                      </a:solidFill>
+                      <a:prstDash val="solid"/>
+                      <a:round/>
+                      <a:headEnd type="none" w="med" len="med"/>
+                      <a:tailEnd type="none" w="med" len="med"/>
+                    </a:lnL>
+                    <a:lnR w="6350" cap="flat" cmpd="sng" algn="ctr">
+                      <a:solidFill>
+                        <a:srgbClr val="E3E8E9"/>
+                      </a:solidFill>
+                      <a:prstDash val="solid"/>
+                      <a:round/>
+                      <a:headEnd type="none" w="med" len="med"/>
+                      <a:tailEnd type="none" w="med" len="med"/>
+                    </a:lnR>
+                    <a:lnT w="6350" cap="flat" cmpd="sng" algn="ctr">
+                      <a:solidFill>
+                        <a:srgbClr val="E3E8E9"/>
+                      </a:solidFill>
+                      <a:prstDash val="solid"/>
+                      <a:round/>
+                      <a:headEnd type="none" w="med" len="med"/>
+                      <a:tailEnd type="none" w="med" len="med"/>
+                    </a:lnT>
+                    <a:lnB w="6350" cap="flat" cmpd="sng" algn="ctr">
+                      <a:solidFill>
+                        <a:srgbClr val="E3E8E9"/>
+                      </a:solidFill>
+                      <a:prstDash val="solid"/>
+                      <a:round/>
+                      <a:headEnd type="none" w="med" len="med"/>
+                      <a:tailEnd type="none" w="med" len="med"/>
+                    </a:lnB>
+                    <a:solidFill>
+                      <a:srgbClr val="F0F4F5"/>
+                    </a:solidFill>
+                  </a:tcPr>
+                </a:tc>
+                <a:tc>
+                  <a:txBody>
+                    <a:bodyPr/>
+                    <a:lstStyle/>
+                    <a:p>
+                      <a:pPr algn="r" indent="0" marL="0">
+                        <a:buNone/>
+                      </a:pPr>
+                      <a:r>
+                        <a:rPr lang="en-US" sz="1000" b="1" dirty="0">
+                          <a:solidFill>
+                            <a:srgbClr val="0B2A3D"/>
+                          </a:solidFill>
+                          <a:latin typeface="Calibri" pitchFamily="34" charset="0"/>
+                          <a:ea typeface="Calibri" pitchFamily="34" charset="-122"/>
+                          <a:cs typeface="Calibri" pitchFamily="34" charset="-120"/>
+                        </a:rPr>
+                        <a:t>US$ 2,0 mi</a:t>
                       </a:r>
                       <a:endParaRPr lang="en-US" sz="1000" dirty="0">
                         <a:latin typeface="Calibri" charset="0"/>
@@ -4919,2392 +8539,7 @@
                       <a:tailEnd type="none" w="med" len="med"/>
                     </a:lnB>
                     <a:solidFill>
-                      <a:srgbClr val="FFFFFF"/>
-                    </a:solidFill>
-                  </a:tcPr>
-                </a:tc>
-                <a:tc>
-                  <a:txBody>
-                    <a:bodyPr/>
-                    <a:lstStyle/>
-                    <a:p>
-                      <a:pPr indent="0" marL="0">
-                        <a:buNone/>
-                      </a:pPr>
-                      <a:r>
-                        <a:rPr lang="en-US" sz="1050" dirty="0">
-                          <a:solidFill>
-                            <a:srgbClr val="1C2B33"/>
-                          </a:solidFill>
-                          <a:latin typeface="Calibri" pitchFamily="34" charset="0"/>
-                          <a:ea typeface="Calibri" pitchFamily="34" charset="-122"/>
-                          <a:cs typeface="Calibri" pitchFamily="34" charset="-120"/>
-                        </a:rPr>
-                        <a:t>MNT – Manutenção</a:t>
-                      </a:r>
-                      <a:endParaRPr lang="en-US" sz="1050" dirty="0">
-                        <a:latin typeface="Calibri" charset="0"/>
-                        <a:ea typeface="Calibri" charset="0"/>
-                        <a:cs typeface="Calibri" charset="0"/>
-                      </a:endParaRPr>
-                    </a:p>
-                  </a:txBody>
-                  <a:tcPr marL="91440" marR="91440" marT="45720" marB="45720" anchor="ctr">
-                    <a:lnL w="6350" cap="flat" cmpd="sng" algn="ctr">
-                      <a:solidFill>
-                        <a:srgbClr val="E3E8E9"/>
-                      </a:solidFill>
-                      <a:prstDash val="solid"/>
-                      <a:round/>
-                      <a:headEnd type="none" w="med" len="med"/>
-                      <a:tailEnd type="none" w="med" len="med"/>
-                    </a:lnL>
-                    <a:lnR w="6350" cap="flat" cmpd="sng" algn="ctr">
-                      <a:solidFill>
-                        <a:srgbClr val="E3E8E9"/>
-                      </a:solidFill>
-                      <a:prstDash val="solid"/>
-                      <a:round/>
-                      <a:headEnd type="none" w="med" len="med"/>
-                      <a:tailEnd type="none" w="med" len="med"/>
-                    </a:lnR>
-                    <a:lnT w="6350" cap="flat" cmpd="sng" algn="ctr">
-                      <a:solidFill>
-                        <a:srgbClr val="E3E8E9"/>
-                      </a:solidFill>
-                      <a:prstDash val="solid"/>
-                      <a:round/>
-                      <a:headEnd type="none" w="med" len="med"/>
-                      <a:tailEnd type="none" w="med" len="med"/>
-                    </a:lnT>
-                    <a:lnB w="6350" cap="flat" cmpd="sng" algn="ctr">
-                      <a:solidFill>
-                        <a:srgbClr val="E3E8E9"/>
-                      </a:solidFill>
-                      <a:prstDash val="solid"/>
-                      <a:round/>
-                      <a:headEnd type="none" w="med" len="med"/>
-                      <a:tailEnd type="none" w="med" len="med"/>
-                    </a:lnB>
-                    <a:solidFill>
-                      <a:srgbClr val="FFFFFF"/>
-                    </a:solidFill>
-                  </a:tcPr>
-                </a:tc>
-                <a:tc>
-                  <a:txBody>
-                    <a:bodyPr/>
-                    <a:lstStyle/>
-                    <a:p>
-                      <a:pPr algn="r" indent="0" marL="0">
-                        <a:buNone/>
-                      </a:pPr>
-                      <a:r>
-                        <a:rPr lang="en-US" sz="1050" b="1" dirty="0">
-                          <a:solidFill>
-                            <a:srgbClr val="0B2A3D"/>
-                          </a:solidFill>
-                          <a:latin typeface="Calibri" pitchFamily="34" charset="0"/>
-                          <a:ea typeface="Calibri" pitchFamily="34" charset="-122"/>
-                          <a:cs typeface="Calibri" pitchFamily="34" charset="-120"/>
-                        </a:rPr>
-                        <a:t>US$ 19,8 mi</a:t>
-                      </a:r>
-                      <a:endParaRPr lang="en-US" sz="1050" dirty="0">
-                        <a:latin typeface="Calibri" charset="0"/>
-                        <a:ea typeface="Calibri" charset="0"/>
-                        <a:cs typeface="Calibri" charset="0"/>
-                      </a:endParaRPr>
-                    </a:p>
-                  </a:txBody>
-                  <a:tcPr marL="91440" marR="91440" marT="45720" marB="45720" anchor="ctr">
-                    <a:lnL w="6350" cap="flat" cmpd="sng" algn="ctr">
-                      <a:solidFill>
-                        <a:srgbClr val="E3E8E9"/>
-                      </a:solidFill>
-                      <a:prstDash val="solid"/>
-                      <a:round/>
-                      <a:headEnd type="none" w="med" len="med"/>
-                      <a:tailEnd type="none" w="med" len="med"/>
-                    </a:lnL>
-                    <a:lnR w="6350" cap="flat" cmpd="sng" algn="ctr">
-                      <a:solidFill>
-                        <a:srgbClr val="E3E8E9"/>
-                      </a:solidFill>
-                      <a:prstDash val="solid"/>
-                      <a:round/>
-                      <a:headEnd type="none" w="med" len="med"/>
-                      <a:tailEnd type="none" w="med" len="med"/>
-                    </a:lnR>
-                    <a:lnT w="6350" cap="flat" cmpd="sng" algn="ctr">
-                      <a:solidFill>
-                        <a:srgbClr val="E3E8E9"/>
-                      </a:solidFill>
-                      <a:prstDash val="solid"/>
-                      <a:round/>
-                      <a:headEnd type="none" w="med" len="med"/>
-                      <a:tailEnd type="none" w="med" len="med"/>
-                    </a:lnT>
-                    <a:lnB w="6350" cap="flat" cmpd="sng" algn="ctr">
-                      <a:solidFill>
-                        <a:srgbClr val="E3E8E9"/>
-                      </a:solidFill>
-                      <a:prstDash val="solid"/>
-                      <a:round/>
-                      <a:headEnd type="none" w="med" len="med"/>
-                      <a:tailEnd type="none" w="med" len="med"/>
-                    </a:lnB>
-                    <a:solidFill>
-                      <a:srgbClr val="FFFFFF"/>
-                    </a:solidFill>
-                  </a:tcPr>
-                </a:tc>
-                <a:tc>
-                  <a:txBody>
-                    <a:bodyPr/>
-                    <a:lstStyle/>
-                    <a:p>
-                      <a:pPr algn="r" indent="0" marL="0">
-                        <a:buNone/>
-                      </a:pPr>
-                      <a:r>
-                        <a:rPr lang="en-US" sz="1000" dirty="0">
-                          <a:solidFill>
-                            <a:srgbClr val="5B6B73"/>
-                          </a:solidFill>
-                          <a:latin typeface="Calibri" pitchFamily="34" charset="0"/>
-                          <a:ea typeface="Calibri" pitchFamily="34" charset="-122"/>
-                          <a:cs typeface="Calibri" pitchFamily="34" charset="-120"/>
-                        </a:rPr>
-                        <a:t>15,5%</a:t>
-                      </a:r>
-                      <a:endParaRPr lang="en-US" sz="1000" dirty="0">
-                        <a:latin typeface="Calibri" charset="0"/>
-                        <a:ea typeface="Calibri" charset="0"/>
-                        <a:cs typeface="Calibri" charset="0"/>
-                      </a:endParaRPr>
-                    </a:p>
-                  </a:txBody>
-                  <a:tcPr marL="91440" marR="91440" marT="45720" marB="45720" anchor="ctr">
-                    <a:lnL w="6350" cap="flat" cmpd="sng" algn="ctr">
-                      <a:solidFill>
-                        <a:srgbClr val="E3E8E9"/>
-                      </a:solidFill>
-                      <a:prstDash val="solid"/>
-                      <a:round/>
-                      <a:headEnd type="none" w="med" len="med"/>
-                      <a:tailEnd type="none" w="med" len="med"/>
-                    </a:lnL>
-                    <a:lnR w="6350" cap="flat" cmpd="sng" algn="ctr">
-                      <a:solidFill>
-                        <a:srgbClr val="E3E8E9"/>
-                      </a:solidFill>
-                      <a:prstDash val="solid"/>
-                      <a:round/>
-                      <a:headEnd type="none" w="med" len="med"/>
-                      <a:tailEnd type="none" w="med" len="med"/>
-                    </a:lnR>
-                    <a:lnT w="6350" cap="flat" cmpd="sng" algn="ctr">
-                      <a:solidFill>
-                        <a:srgbClr val="E3E8E9"/>
-                      </a:solidFill>
-                      <a:prstDash val="solid"/>
-                      <a:round/>
-                      <a:headEnd type="none" w="med" len="med"/>
-                      <a:tailEnd type="none" w="med" len="med"/>
-                    </a:lnT>
-                    <a:lnB w="6350" cap="flat" cmpd="sng" algn="ctr">
-                      <a:solidFill>
-                        <a:srgbClr val="E3E8E9"/>
-                      </a:solidFill>
-                      <a:prstDash val="solid"/>
-                      <a:round/>
-                      <a:headEnd type="none" w="med" len="med"/>
-                      <a:tailEnd type="none" w="med" len="med"/>
-                    </a:lnB>
-                    <a:solidFill>
-                      <a:srgbClr val="FFFFFF"/>
-                    </a:solidFill>
-                  </a:tcPr>
-                </a:tc>
-              </a:tr>
-              <a:tr h="374904">
-                <a:tc>
-                  <a:txBody>
-                    <a:bodyPr/>
-                    <a:lstStyle/>
-                    <a:p>
-                      <a:pPr algn="ctr" indent="0" marL="0">
-                        <a:buNone/>
-                      </a:pPr>
-                      <a:r>
-                        <a:rPr lang="en-US" sz="1000" dirty="0">
-                          <a:solidFill>
-                            <a:srgbClr val="5B6B73"/>
-                          </a:solidFill>
-                          <a:latin typeface="Calibri" pitchFamily="34" charset="0"/>
-                          <a:ea typeface="Calibri" pitchFamily="34" charset="-122"/>
-                          <a:cs typeface="Calibri" pitchFamily="34" charset="-120"/>
-                        </a:rPr>
-                        <a:t>4</a:t>
-                      </a:r>
-                      <a:endParaRPr lang="en-US" sz="1000" dirty="0">
-                        <a:latin typeface="Calibri" charset="0"/>
-                        <a:ea typeface="Calibri" charset="0"/>
-                        <a:cs typeface="Calibri" charset="0"/>
-                      </a:endParaRPr>
-                    </a:p>
-                  </a:txBody>
-                  <a:tcPr marL="91440" marR="91440" marT="45720" marB="45720" anchor="ctr">
-                    <a:lnL w="6350" cap="flat" cmpd="sng" algn="ctr">
-                      <a:solidFill>
-                        <a:srgbClr val="E3E8E9"/>
-                      </a:solidFill>
-                      <a:prstDash val="solid"/>
-                      <a:round/>
-                      <a:headEnd type="none" w="med" len="med"/>
-                      <a:tailEnd type="none" w="med" len="med"/>
-                    </a:lnL>
-                    <a:lnR w="6350" cap="flat" cmpd="sng" algn="ctr">
-                      <a:solidFill>
-                        <a:srgbClr val="E3E8E9"/>
-                      </a:solidFill>
-                      <a:prstDash val="solid"/>
-                      <a:round/>
-                      <a:headEnd type="none" w="med" len="med"/>
-                      <a:tailEnd type="none" w="med" len="med"/>
-                    </a:lnR>
-                    <a:lnT w="6350" cap="flat" cmpd="sng" algn="ctr">
-                      <a:solidFill>
-                        <a:srgbClr val="E3E8E9"/>
-                      </a:solidFill>
-                      <a:prstDash val="solid"/>
-                      <a:round/>
-                      <a:headEnd type="none" w="med" len="med"/>
-                      <a:tailEnd type="none" w="med" len="med"/>
-                    </a:lnT>
-                    <a:lnB w="6350" cap="flat" cmpd="sng" algn="ctr">
-                      <a:solidFill>
-                        <a:srgbClr val="E3E8E9"/>
-                      </a:solidFill>
-                      <a:prstDash val="solid"/>
-                      <a:round/>
-                      <a:headEnd type="none" w="med" len="med"/>
-                      <a:tailEnd type="none" w="med" len="med"/>
-                    </a:lnB>
-                    <a:solidFill>
                       <a:srgbClr val="F0F4F5"/>
-                    </a:solidFill>
-                  </a:tcPr>
-                </a:tc>
-                <a:tc>
-                  <a:txBody>
-                    <a:bodyPr/>
-                    <a:lstStyle/>
-                    <a:p>
-                      <a:pPr indent="0" marL="0">
-                        <a:buNone/>
-                      </a:pPr>
-                      <a:r>
-                        <a:rPr lang="en-US" sz="1050" dirty="0">
-                          <a:solidFill>
-                            <a:srgbClr val="1C2B33"/>
-                          </a:solidFill>
-                          <a:latin typeface="Calibri" pitchFamily="34" charset="0"/>
-                          <a:ea typeface="Calibri" pitchFamily="34" charset="-122"/>
-                          <a:cs typeface="Calibri" pitchFamily="34" charset="-120"/>
-                        </a:rPr>
-                        <a:t>NAV - Naval</a:t>
-                      </a:r>
-                      <a:endParaRPr lang="en-US" sz="1050" dirty="0">
-                        <a:latin typeface="Calibri" charset="0"/>
-                        <a:ea typeface="Calibri" charset="0"/>
-                        <a:cs typeface="Calibri" charset="0"/>
-                      </a:endParaRPr>
-                    </a:p>
-                  </a:txBody>
-                  <a:tcPr marL="91440" marR="91440" marT="45720" marB="45720" anchor="ctr">
-                    <a:lnL w="6350" cap="flat" cmpd="sng" algn="ctr">
-                      <a:solidFill>
-                        <a:srgbClr val="E3E8E9"/>
-                      </a:solidFill>
-                      <a:prstDash val="solid"/>
-                      <a:round/>
-                      <a:headEnd type="none" w="med" len="med"/>
-                      <a:tailEnd type="none" w="med" len="med"/>
-                    </a:lnL>
-                    <a:lnR w="6350" cap="flat" cmpd="sng" algn="ctr">
-                      <a:solidFill>
-                        <a:srgbClr val="E3E8E9"/>
-                      </a:solidFill>
-                      <a:prstDash val="solid"/>
-                      <a:round/>
-                      <a:headEnd type="none" w="med" len="med"/>
-                      <a:tailEnd type="none" w="med" len="med"/>
-                    </a:lnR>
-                    <a:lnT w="6350" cap="flat" cmpd="sng" algn="ctr">
-                      <a:solidFill>
-                        <a:srgbClr val="E3E8E9"/>
-                      </a:solidFill>
-                      <a:prstDash val="solid"/>
-                      <a:round/>
-                      <a:headEnd type="none" w="med" len="med"/>
-                      <a:tailEnd type="none" w="med" len="med"/>
-                    </a:lnT>
-                    <a:lnB w="6350" cap="flat" cmpd="sng" algn="ctr">
-                      <a:solidFill>
-                        <a:srgbClr val="E3E8E9"/>
-                      </a:solidFill>
-                      <a:prstDash val="solid"/>
-                      <a:round/>
-                      <a:headEnd type="none" w="med" len="med"/>
-                      <a:tailEnd type="none" w="med" len="med"/>
-                    </a:lnB>
-                    <a:solidFill>
-                      <a:srgbClr val="F0F4F5"/>
-                    </a:solidFill>
-                  </a:tcPr>
-                </a:tc>
-                <a:tc>
-                  <a:txBody>
-                    <a:bodyPr/>
-                    <a:lstStyle/>
-                    <a:p>
-                      <a:pPr algn="r" indent="0" marL="0">
-                        <a:buNone/>
-                      </a:pPr>
-                      <a:r>
-                        <a:rPr lang="en-US" sz="1050" b="1" dirty="0">
-                          <a:solidFill>
-                            <a:srgbClr val="0B2A3D"/>
-                          </a:solidFill>
-                          <a:latin typeface="Calibri" pitchFamily="34" charset="0"/>
-                          <a:ea typeface="Calibri" pitchFamily="34" charset="-122"/>
-                          <a:cs typeface="Calibri" pitchFamily="34" charset="-120"/>
-                        </a:rPr>
-                        <a:t>US$ 16,3 mi</a:t>
-                      </a:r>
-                      <a:endParaRPr lang="en-US" sz="1050" dirty="0">
-                        <a:latin typeface="Calibri" charset="0"/>
-                        <a:ea typeface="Calibri" charset="0"/>
-                        <a:cs typeface="Calibri" charset="0"/>
-                      </a:endParaRPr>
-                    </a:p>
-                  </a:txBody>
-                  <a:tcPr marL="91440" marR="91440" marT="45720" marB="45720" anchor="ctr">
-                    <a:lnL w="6350" cap="flat" cmpd="sng" algn="ctr">
-                      <a:solidFill>
-                        <a:srgbClr val="E3E8E9"/>
-                      </a:solidFill>
-                      <a:prstDash val="solid"/>
-                      <a:round/>
-                      <a:headEnd type="none" w="med" len="med"/>
-                      <a:tailEnd type="none" w="med" len="med"/>
-                    </a:lnL>
-                    <a:lnR w="6350" cap="flat" cmpd="sng" algn="ctr">
-                      <a:solidFill>
-                        <a:srgbClr val="E3E8E9"/>
-                      </a:solidFill>
-                      <a:prstDash val="solid"/>
-                      <a:round/>
-                      <a:headEnd type="none" w="med" len="med"/>
-                      <a:tailEnd type="none" w="med" len="med"/>
-                    </a:lnR>
-                    <a:lnT w="6350" cap="flat" cmpd="sng" algn="ctr">
-                      <a:solidFill>
-                        <a:srgbClr val="E3E8E9"/>
-                      </a:solidFill>
-                      <a:prstDash val="solid"/>
-                      <a:round/>
-                      <a:headEnd type="none" w="med" len="med"/>
-                      <a:tailEnd type="none" w="med" len="med"/>
-                    </a:lnT>
-                    <a:lnB w="6350" cap="flat" cmpd="sng" algn="ctr">
-                      <a:solidFill>
-                        <a:srgbClr val="E3E8E9"/>
-                      </a:solidFill>
-                      <a:prstDash val="solid"/>
-                      <a:round/>
-                      <a:headEnd type="none" w="med" len="med"/>
-                      <a:tailEnd type="none" w="med" len="med"/>
-                    </a:lnB>
-                    <a:solidFill>
-                      <a:srgbClr val="F0F4F5"/>
-                    </a:solidFill>
-                  </a:tcPr>
-                </a:tc>
-                <a:tc>
-                  <a:txBody>
-                    <a:bodyPr/>
-                    <a:lstStyle/>
-                    <a:p>
-                      <a:pPr algn="r" indent="0" marL="0">
-                        <a:buNone/>
-                      </a:pPr>
-                      <a:r>
-                        <a:rPr lang="en-US" sz="1000" dirty="0">
-                          <a:solidFill>
-                            <a:srgbClr val="5B6B73"/>
-                          </a:solidFill>
-                          <a:latin typeface="Calibri" pitchFamily="34" charset="0"/>
-                          <a:ea typeface="Calibri" pitchFamily="34" charset="-122"/>
-                          <a:cs typeface="Calibri" pitchFamily="34" charset="-120"/>
-                        </a:rPr>
-                        <a:t>12,8%</a:t>
-                      </a:r>
-                      <a:endParaRPr lang="en-US" sz="1000" dirty="0">
-                        <a:latin typeface="Calibri" charset="0"/>
-                        <a:ea typeface="Calibri" charset="0"/>
-                        <a:cs typeface="Calibri" charset="0"/>
-                      </a:endParaRPr>
-                    </a:p>
-                  </a:txBody>
-                  <a:tcPr marL="91440" marR="91440" marT="45720" marB="45720" anchor="ctr">
-                    <a:lnL w="6350" cap="flat" cmpd="sng" algn="ctr">
-                      <a:solidFill>
-                        <a:srgbClr val="E3E8E9"/>
-                      </a:solidFill>
-                      <a:prstDash val="solid"/>
-                      <a:round/>
-                      <a:headEnd type="none" w="med" len="med"/>
-                      <a:tailEnd type="none" w="med" len="med"/>
-                    </a:lnL>
-                    <a:lnR w="6350" cap="flat" cmpd="sng" algn="ctr">
-                      <a:solidFill>
-                        <a:srgbClr val="E3E8E9"/>
-                      </a:solidFill>
-                      <a:prstDash val="solid"/>
-                      <a:round/>
-                      <a:headEnd type="none" w="med" len="med"/>
-                      <a:tailEnd type="none" w="med" len="med"/>
-                    </a:lnR>
-                    <a:lnT w="6350" cap="flat" cmpd="sng" algn="ctr">
-                      <a:solidFill>
-                        <a:srgbClr val="E3E8E9"/>
-                      </a:solidFill>
-                      <a:prstDash val="solid"/>
-                      <a:round/>
-                      <a:headEnd type="none" w="med" len="med"/>
-                      <a:tailEnd type="none" w="med" len="med"/>
-                    </a:lnT>
-                    <a:lnB w="6350" cap="flat" cmpd="sng" algn="ctr">
-                      <a:solidFill>
-                        <a:srgbClr val="E3E8E9"/>
-                      </a:solidFill>
-                      <a:prstDash val="solid"/>
-                      <a:round/>
-                      <a:headEnd type="none" w="med" len="med"/>
-                      <a:tailEnd type="none" w="med" len="med"/>
-                    </a:lnB>
-                    <a:solidFill>
-                      <a:srgbClr val="F0F4F5"/>
-                    </a:solidFill>
-                  </a:tcPr>
-                </a:tc>
-              </a:tr>
-              <a:tr h="374904">
-                <a:tc>
-                  <a:txBody>
-                    <a:bodyPr/>
-                    <a:lstStyle/>
-                    <a:p>
-                      <a:pPr algn="ctr" indent="0" marL="0">
-                        <a:buNone/>
-                      </a:pPr>
-                      <a:r>
-                        <a:rPr lang="en-US" sz="1000" dirty="0">
-                          <a:solidFill>
-                            <a:srgbClr val="5B6B73"/>
-                          </a:solidFill>
-                          <a:latin typeface="Calibri" pitchFamily="34" charset="0"/>
-                          <a:ea typeface="Calibri" pitchFamily="34" charset="-122"/>
-                          <a:cs typeface="Calibri" pitchFamily="34" charset="-120"/>
-                        </a:rPr>
-                        <a:t>5</a:t>
-                      </a:r>
-                      <a:endParaRPr lang="en-US" sz="1000" dirty="0">
-                        <a:latin typeface="Calibri" charset="0"/>
-                        <a:ea typeface="Calibri" charset="0"/>
-                        <a:cs typeface="Calibri" charset="0"/>
-                      </a:endParaRPr>
-                    </a:p>
-                  </a:txBody>
-                  <a:tcPr marL="91440" marR="91440" marT="45720" marB="45720" anchor="ctr">
-                    <a:lnL w="6350" cap="flat" cmpd="sng" algn="ctr">
-                      <a:solidFill>
-                        <a:srgbClr val="E3E8E9"/>
-                      </a:solidFill>
-                      <a:prstDash val="solid"/>
-                      <a:round/>
-                      <a:headEnd type="none" w="med" len="med"/>
-                      <a:tailEnd type="none" w="med" len="med"/>
-                    </a:lnL>
-                    <a:lnR w="6350" cap="flat" cmpd="sng" algn="ctr">
-                      <a:solidFill>
-                        <a:srgbClr val="E3E8E9"/>
-                      </a:solidFill>
-                      <a:prstDash val="solid"/>
-                      <a:round/>
-                      <a:headEnd type="none" w="med" len="med"/>
-                      <a:tailEnd type="none" w="med" len="med"/>
-                    </a:lnR>
-                    <a:lnT w="6350" cap="flat" cmpd="sng" algn="ctr">
-                      <a:solidFill>
-                        <a:srgbClr val="E3E8E9"/>
-                      </a:solidFill>
-                      <a:prstDash val="solid"/>
-                      <a:round/>
-                      <a:headEnd type="none" w="med" len="med"/>
-                      <a:tailEnd type="none" w="med" len="med"/>
-                    </a:lnT>
-                    <a:lnB w="6350" cap="flat" cmpd="sng" algn="ctr">
-                      <a:solidFill>
-                        <a:srgbClr val="E3E8E9"/>
-                      </a:solidFill>
-                      <a:prstDash val="solid"/>
-                      <a:round/>
-                      <a:headEnd type="none" w="med" len="med"/>
-                      <a:tailEnd type="none" w="med" len="med"/>
-                    </a:lnB>
-                    <a:solidFill>
-                      <a:srgbClr val="FFFFFF"/>
-                    </a:solidFill>
-                  </a:tcPr>
-                </a:tc>
-                <a:tc>
-                  <a:txBody>
-                    <a:bodyPr/>
-                    <a:lstStyle/>
-                    <a:p>
-                      <a:pPr indent="0" marL="0">
-                        <a:buNone/>
-                      </a:pPr>
-                      <a:r>
-                        <a:rPr lang="en-US" sz="1050" dirty="0">
-                          <a:solidFill>
-                            <a:srgbClr val="1C2B33"/>
-                          </a:solidFill>
-                          <a:latin typeface="Calibri" pitchFamily="34" charset="0"/>
-                          <a:ea typeface="Calibri" pitchFamily="34" charset="-122"/>
-                          <a:cs typeface="Calibri" pitchFamily="34" charset="-120"/>
-                        </a:rPr>
-                        <a:t>P&amp;Q - Processos</a:t>
-                      </a:r>
-                      <a:endParaRPr lang="en-US" sz="1050" dirty="0">
-                        <a:latin typeface="Calibri" charset="0"/>
-                        <a:ea typeface="Calibri" charset="0"/>
-                        <a:cs typeface="Calibri" charset="0"/>
-                      </a:endParaRPr>
-                    </a:p>
-                  </a:txBody>
-                  <a:tcPr marL="91440" marR="91440" marT="45720" marB="45720" anchor="ctr">
-                    <a:lnL w="6350" cap="flat" cmpd="sng" algn="ctr">
-                      <a:solidFill>
-                        <a:srgbClr val="E3E8E9"/>
-                      </a:solidFill>
-                      <a:prstDash val="solid"/>
-                      <a:round/>
-                      <a:headEnd type="none" w="med" len="med"/>
-                      <a:tailEnd type="none" w="med" len="med"/>
-                    </a:lnL>
-                    <a:lnR w="6350" cap="flat" cmpd="sng" algn="ctr">
-                      <a:solidFill>
-                        <a:srgbClr val="E3E8E9"/>
-                      </a:solidFill>
-                      <a:prstDash val="solid"/>
-                      <a:round/>
-                      <a:headEnd type="none" w="med" len="med"/>
-                      <a:tailEnd type="none" w="med" len="med"/>
-                    </a:lnR>
-                    <a:lnT w="6350" cap="flat" cmpd="sng" algn="ctr">
-                      <a:solidFill>
-                        <a:srgbClr val="E3E8E9"/>
-                      </a:solidFill>
-                      <a:prstDash val="solid"/>
-                      <a:round/>
-                      <a:headEnd type="none" w="med" len="med"/>
-                      <a:tailEnd type="none" w="med" len="med"/>
-                    </a:lnT>
-                    <a:lnB w="6350" cap="flat" cmpd="sng" algn="ctr">
-                      <a:solidFill>
-                        <a:srgbClr val="E3E8E9"/>
-                      </a:solidFill>
-                      <a:prstDash val="solid"/>
-                      <a:round/>
-                      <a:headEnd type="none" w="med" len="med"/>
-                      <a:tailEnd type="none" w="med" len="med"/>
-                    </a:lnB>
-                    <a:solidFill>
-                      <a:srgbClr val="FFFFFF"/>
-                    </a:solidFill>
-                  </a:tcPr>
-                </a:tc>
-                <a:tc>
-                  <a:txBody>
-                    <a:bodyPr/>
-                    <a:lstStyle/>
-                    <a:p>
-                      <a:pPr algn="r" indent="0" marL="0">
-                        <a:buNone/>
-                      </a:pPr>
-                      <a:r>
-                        <a:rPr lang="en-US" sz="1050" b="1" dirty="0">
-                          <a:solidFill>
-                            <a:srgbClr val="0B2A3D"/>
-                          </a:solidFill>
-                          <a:latin typeface="Calibri" pitchFamily="34" charset="0"/>
-                          <a:ea typeface="Calibri" pitchFamily="34" charset="-122"/>
-                          <a:cs typeface="Calibri" pitchFamily="34" charset="-120"/>
-                        </a:rPr>
-                        <a:t>US$ 8,3 mi</a:t>
-                      </a:r>
-                      <a:endParaRPr lang="en-US" sz="1050" dirty="0">
-                        <a:latin typeface="Calibri" charset="0"/>
-                        <a:ea typeface="Calibri" charset="0"/>
-                        <a:cs typeface="Calibri" charset="0"/>
-                      </a:endParaRPr>
-                    </a:p>
-                  </a:txBody>
-                  <a:tcPr marL="91440" marR="91440" marT="45720" marB="45720" anchor="ctr">
-                    <a:lnL w="6350" cap="flat" cmpd="sng" algn="ctr">
-                      <a:solidFill>
-                        <a:srgbClr val="E3E8E9"/>
-                      </a:solidFill>
-                      <a:prstDash val="solid"/>
-                      <a:round/>
-                      <a:headEnd type="none" w="med" len="med"/>
-                      <a:tailEnd type="none" w="med" len="med"/>
-                    </a:lnL>
-                    <a:lnR w="6350" cap="flat" cmpd="sng" algn="ctr">
-                      <a:solidFill>
-                        <a:srgbClr val="E3E8E9"/>
-                      </a:solidFill>
-                      <a:prstDash val="solid"/>
-                      <a:round/>
-                      <a:headEnd type="none" w="med" len="med"/>
-                      <a:tailEnd type="none" w="med" len="med"/>
-                    </a:lnR>
-                    <a:lnT w="6350" cap="flat" cmpd="sng" algn="ctr">
-                      <a:solidFill>
-                        <a:srgbClr val="E3E8E9"/>
-                      </a:solidFill>
-                      <a:prstDash val="solid"/>
-                      <a:round/>
-                      <a:headEnd type="none" w="med" len="med"/>
-                      <a:tailEnd type="none" w="med" len="med"/>
-                    </a:lnT>
-                    <a:lnB w="6350" cap="flat" cmpd="sng" algn="ctr">
-                      <a:solidFill>
-                        <a:srgbClr val="E3E8E9"/>
-                      </a:solidFill>
-                      <a:prstDash val="solid"/>
-                      <a:round/>
-                      <a:headEnd type="none" w="med" len="med"/>
-                      <a:tailEnd type="none" w="med" len="med"/>
-                    </a:lnB>
-                    <a:solidFill>
-                      <a:srgbClr val="FFFFFF"/>
-                    </a:solidFill>
-                  </a:tcPr>
-                </a:tc>
-                <a:tc>
-                  <a:txBody>
-                    <a:bodyPr/>
-                    <a:lstStyle/>
-                    <a:p>
-                      <a:pPr algn="r" indent="0" marL="0">
-                        <a:buNone/>
-                      </a:pPr>
-                      <a:r>
-                        <a:rPr lang="en-US" sz="1000" dirty="0">
-                          <a:solidFill>
-                            <a:srgbClr val="5B6B73"/>
-                          </a:solidFill>
-                          <a:latin typeface="Calibri" pitchFamily="34" charset="0"/>
-                          <a:ea typeface="Calibri" pitchFamily="34" charset="-122"/>
-                          <a:cs typeface="Calibri" pitchFamily="34" charset="-120"/>
-                        </a:rPr>
-                        <a:t>6,5%</a:t>
-                      </a:r>
-                      <a:endParaRPr lang="en-US" sz="1000" dirty="0">
-                        <a:latin typeface="Calibri" charset="0"/>
-                        <a:ea typeface="Calibri" charset="0"/>
-                        <a:cs typeface="Calibri" charset="0"/>
-                      </a:endParaRPr>
-                    </a:p>
-                  </a:txBody>
-                  <a:tcPr marL="91440" marR="91440" marT="45720" marB="45720" anchor="ctr">
-                    <a:lnL w="6350" cap="flat" cmpd="sng" algn="ctr">
-                      <a:solidFill>
-                        <a:srgbClr val="E3E8E9"/>
-                      </a:solidFill>
-                      <a:prstDash val="solid"/>
-                      <a:round/>
-                      <a:headEnd type="none" w="med" len="med"/>
-                      <a:tailEnd type="none" w="med" len="med"/>
-                    </a:lnL>
-                    <a:lnR w="6350" cap="flat" cmpd="sng" algn="ctr">
-                      <a:solidFill>
-                        <a:srgbClr val="E3E8E9"/>
-                      </a:solidFill>
-                      <a:prstDash val="solid"/>
-                      <a:round/>
-                      <a:headEnd type="none" w="med" len="med"/>
-                      <a:tailEnd type="none" w="med" len="med"/>
-                    </a:lnR>
-                    <a:lnT w="6350" cap="flat" cmpd="sng" algn="ctr">
-                      <a:solidFill>
-                        <a:srgbClr val="E3E8E9"/>
-                      </a:solidFill>
-                      <a:prstDash val="solid"/>
-                      <a:round/>
-                      <a:headEnd type="none" w="med" len="med"/>
-                      <a:tailEnd type="none" w="med" len="med"/>
-                    </a:lnT>
-                    <a:lnB w="6350" cap="flat" cmpd="sng" algn="ctr">
-                      <a:solidFill>
-                        <a:srgbClr val="E3E8E9"/>
-                      </a:solidFill>
-                      <a:prstDash val="solid"/>
-                      <a:round/>
-                      <a:headEnd type="none" w="med" len="med"/>
-                      <a:tailEnd type="none" w="med" len="med"/>
-                    </a:lnB>
-                    <a:solidFill>
-                      <a:srgbClr val="FFFFFF"/>
-                    </a:solidFill>
-                  </a:tcPr>
-                </a:tc>
-              </a:tr>
-              <a:tr h="374904">
-                <a:tc>
-                  <a:txBody>
-                    <a:bodyPr/>
-                    <a:lstStyle/>
-                    <a:p>
-                      <a:pPr algn="ctr" indent="0" marL="0">
-                        <a:buNone/>
-                      </a:pPr>
-                      <a:r>
-                        <a:rPr lang="en-US" sz="1000" dirty="0">
-                          <a:solidFill>
-                            <a:srgbClr val="5B6B73"/>
-                          </a:solidFill>
-                          <a:latin typeface="Calibri" pitchFamily="34" charset="0"/>
-                          <a:ea typeface="Calibri" pitchFamily="34" charset="-122"/>
-                          <a:cs typeface="Calibri" pitchFamily="34" charset="-120"/>
-                        </a:rPr>
-                        <a:t>6</a:t>
-                      </a:r>
-                      <a:endParaRPr lang="en-US" sz="1000" dirty="0">
-                        <a:latin typeface="Calibri" charset="0"/>
-                        <a:ea typeface="Calibri" charset="0"/>
-                        <a:cs typeface="Calibri" charset="0"/>
-                      </a:endParaRPr>
-                    </a:p>
-                  </a:txBody>
-                  <a:tcPr marL="91440" marR="91440" marT="45720" marB="45720" anchor="ctr">
-                    <a:lnL w="6350" cap="flat" cmpd="sng" algn="ctr">
-                      <a:solidFill>
-                        <a:srgbClr val="E3E8E9"/>
-                      </a:solidFill>
-                      <a:prstDash val="solid"/>
-                      <a:round/>
-                      <a:headEnd type="none" w="med" len="med"/>
-                      <a:tailEnd type="none" w="med" len="med"/>
-                    </a:lnL>
-                    <a:lnR w="6350" cap="flat" cmpd="sng" algn="ctr">
-                      <a:solidFill>
-                        <a:srgbClr val="E3E8E9"/>
-                      </a:solidFill>
-                      <a:prstDash val="solid"/>
-                      <a:round/>
-                      <a:headEnd type="none" w="med" len="med"/>
-                      <a:tailEnd type="none" w="med" len="med"/>
-                    </a:lnR>
-                    <a:lnT w="6350" cap="flat" cmpd="sng" algn="ctr">
-                      <a:solidFill>
-                        <a:srgbClr val="E3E8E9"/>
-                      </a:solidFill>
-                      <a:prstDash val="solid"/>
-                      <a:round/>
-                      <a:headEnd type="none" w="med" len="med"/>
-                      <a:tailEnd type="none" w="med" len="med"/>
-                    </a:lnT>
-                    <a:lnB w="6350" cap="flat" cmpd="sng" algn="ctr">
-                      <a:solidFill>
-                        <a:srgbClr val="E3E8E9"/>
-                      </a:solidFill>
-                      <a:prstDash val="solid"/>
-                      <a:round/>
-                      <a:headEnd type="none" w="med" len="med"/>
-                      <a:tailEnd type="none" w="med" len="med"/>
-                    </a:lnB>
-                    <a:solidFill>
-                      <a:srgbClr val="F0F4F5"/>
-                    </a:solidFill>
-                  </a:tcPr>
-                </a:tc>
-                <a:tc>
-                  <a:txBody>
-                    <a:bodyPr/>
-                    <a:lstStyle/>
-                    <a:p>
-                      <a:pPr indent="0" marL="0">
-                        <a:buNone/>
-                      </a:pPr>
-                      <a:r>
-                        <a:rPr lang="en-US" sz="1050" dirty="0">
-                          <a:solidFill>
-                            <a:srgbClr val="1C2B33"/>
-                          </a:solidFill>
-                          <a:latin typeface="Calibri" pitchFamily="34" charset="0"/>
-                          <a:ea typeface="Calibri" pitchFamily="34" charset="-122"/>
-                          <a:cs typeface="Calibri" pitchFamily="34" charset="-120"/>
-                        </a:rPr>
-                        <a:t>EIM - Manutenção &amp; Integridade</a:t>
-                      </a:r>
-                      <a:endParaRPr lang="en-US" sz="1050" dirty="0">
-                        <a:latin typeface="Calibri" charset="0"/>
-                        <a:ea typeface="Calibri" charset="0"/>
-                        <a:cs typeface="Calibri" charset="0"/>
-                      </a:endParaRPr>
-                    </a:p>
-                  </a:txBody>
-                  <a:tcPr marL="91440" marR="91440" marT="45720" marB="45720" anchor="ctr">
-                    <a:lnL w="6350" cap="flat" cmpd="sng" algn="ctr">
-                      <a:solidFill>
-                        <a:srgbClr val="E3E8E9"/>
-                      </a:solidFill>
-                      <a:prstDash val="solid"/>
-                      <a:round/>
-                      <a:headEnd type="none" w="med" len="med"/>
-                      <a:tailEnd type="none" w="med" len="med"/>
-                    </a:lnL>
-                    <a:lnR w="6350" cap="flat" cmpd="sng" algn="ctr">
-                      <a:solidFill>
-                        <a:srgbClr val="E3E8E9"/>
-                      </a:solidFill>
-                      <a:prstDash val="solid"/>
-                      <a:round/>
-                      <a:headEnd type="none" w="med" len="med"/>
-                      <a:tailEnd type="none" w="med" len="med"/>
-                    </a:lnR>
-                    <a:lnT w="6350" cap="flat" cmpd="sng" algn="ctr">
-                      <a:solidFill>
-                        <a:srgbClr val="E3E8E9"/>
-                      </a:solidFill>
-                      <a:prstDash val="solid"/>
-                      <a:round/>
-                      <a:headEnd type="none" w="med" len="med"/>
-                      <a:tailEnd type="none" w="med" len="med"/>
-                    </a:lnT>
-                    <a:lnB w="6350" cap="flat" cmpd="sng" algn="ctr">
-                      <a:solidFill>
-                        <a:srgbClr val="E3E8E9"/>
-                      </a:solidFill>
-                      <a:prstDash val="solid"/>
-                      <a:round/>
-                      <a:headEnd type="none" w="med" len="med"/>
-                      <a:tailEnd type="none" w="med" len="med"/>
-                    </a:lnB>
-                    <a:solidFill>
-                      <a:srgbClr val="F0F4F5"/>
-                    </a:solidFill>
-                  </a:tcPr>
-                </a:tc>
-                <a:tc>
-                  <a:txBody>
-                    <a:bodyPr/>
-                    <a:lstStyle/>
-                    <a:p>
-                      <a:pPr algn="r" indent="0" marL="0">
-                        <a:buNone/>
-                      </a:pPr>
-                      <a:r>
-                        <a:rPr lang="en-US" sz="1050" b="1" dirty="0">
-                          <a:solidFill>
-                            <a:srgbClr val="0B2A3D"/>
-                          </a:solidFill>
-                          <a:latin typeface="Calibri" pitchFamily="34" charset="0"/>
-                          <a:ea typeface="Calibri" pitchFamily="34" charset="-122"/>
-                          <a:cs typeface="Calibri" pitchFamily="34" charset="-120"/>
-                        </a:rPr>
-                        <a:t>US$ 7,5 mi</a:t>
-                      </a:r>
-                      <a:endParaRPr lang="en-US" sz="1050" dirty="0">
-                        <a:latin typeface="Calibri" charset="0"/>
-                        <a:ea typeface="Calibri" charset="0"/>
-                        <a:cs typeface="Calibri" charset="0"/>
-                      </a:endParaRPr>
-                    </a:p>
-                  </a:txBody>
-                  <a:tcPr marL="91440" marR="91440" marT="45720" marB="45720" anchor="ctr">
-                    <a:lnL w="6350" cap="flat" cmpd="sng" algn="ctr">
-                      <a:solidFill>
-                        <a:srgbClr val="E3E8E9"/>
-                      </a:solidFill>
-                      <a:prstDash val="solid"/>
-                      <a:round/>
-                      <a:headEnd type="none" w="med" len="med"/>
-                      <a:tailEnd type="none" w="med" len="med"/>
-                    </a:lnL>
-                    <a:lnR w="6350" cap="flat" cmpd="sng" algn="ctr">
-                      <a:solidFill>
-                        <a:srgbClr val="E3E8E9"/>
-                      </a:solidFill>
-                      <a:prstDash val="solid"/>
-                      <a:round/>
-                      <a:headEnd type="none" w="med" len="med"/>
-                      <a:tailEnd type="none" w="med" len="med"/>
-                    </a:lnR>
-                    <a:lnT w="6350" cap="flat" cmpd="sng" algn="ctr">
-                      <a:solidFill>
-                        <a:srgbClr val="E3E8E9"/>
-                      </a:solidFill>
-                      <a:prstDash val="solid"/>
-                      <a:round/>
-                      <a:headEnd type="none" w="med" len="med"/>
-                      <a:tailEnd type="none" w="med" len="med"/>
-                    </a:lnT>
-                    <a:lnB w="6350" cap="flat" cmpd="sng" algn="ctr">
-                      <a:solidFill>
-                        <a:srgbClr val="E3E8E9"/>
-                      </a:solidFill>
-                      <a:prstDash val="solid"/>
-                      <a:round/>
-                      <a:headEnd type="none" w="med" len="med"/>
-                      <a:tailEnd type="none" w="med" len="med"/>
-                    </a:lnB>
-                    <a:solidFill>
-                      <a:srgbClr val="F0F4F5"/>
-                    </a:solidFill>
-                  </a:tcPr>
-                </a:tc>
-                <a:tc>
-                  <a:txBody>
-                    <a:bodyPr/>
-                    <a:lstStyle/>
-                    <a:p>
-                      <a:pPr algn="r" indent="0" marL="0">
-                        <a:buNone/>
-                      </a:pPr>
-                      <a:r>
-                        <a:rPr lang="en-US" sz="1000" dirty="0">
-                          <a:solidFill>
-                            <a:srgbClr val="5B6B73"/>
-                          </a:solidFill>
-                          <a:latin typeface="Calibri" pitchFamily="34" charset="0"/>
-                          <a:ea typeface="Calibri" pitchFamily="34" charset="-122"/>
-                          <a:cs typeface="Calibri" pitchFamily="34" charset="-120"/>
-                        </a:rPr>
-                        <a:t>5,9%</a:t>
-                      </a:r>
-                      <a:endParaRPr lang="en-US" sz="1000" dirty="0">
-                        <a:latin typeface="Calibri" charset="0"/>
-                        <a:ea typeface="Calibri" charset="0"/>
-                        <a:cs typeface="Calibri" charset="0"/>
-                      </a:endParaRPr>
-                    </a:p>
-                  </a:txBody>
-                  <a:tcPr marL="91440" marR="91440" marT="45720" marB="45720" anchor="ctr">
-                    <a:lnL w="6350" cap="flat" cmpd="sng" algn="ctr">
-                      <a:solidFill>
-                        <a:srgbClr val="E3E8E9"/>
-                      </a:solidFill>
-                      <a:prstDash val="solid"/>
-                      <a:round/>
-                      <a:headEnd type="none" w="med" len="med"/>
-                      <a:tailEnd type="none" w="med" len="med"/>
-                    </a:lnL>
-                    <a:lnR w="6350" cap="flat" cmpd="sng" algn="ctr">
-                      <a:solidFill>
-                        <a:srgbClr val="E3E8E9"/>
-                      </a:solidFill>
-                      <a:prstDash val="solid"/>
-                      <a:round/>
-                      <a:headEnd type="none" w="med" len="med"/>
-                      <a:tailEnd type="none" w="med" len="med"/>
-                    </a:lnR>
-                    <a:lnT w="6350" cap="flat" cmpd="sng" algn="ctr">
-                      <a:solidFill>
-                        <a:srgbClr val="E3E8E9"/>
-                      </a:solidFill>
-                      <a:prstDash val="solid"/>
-                      <a:round/>
-                      <a:headEnd type="none" w="med" len="med"/>
-                      <a:tailEnd type="none" w="med" len="med"/>
-                    </a:lnT>
-                    <a:lnB w="6350" cap="flat" cmpd="sng" algn="ctr">
-                      <a:solidFill>
-                        <a:srgbClr val="E3E8E9"/>
-                      </a:solidFill>
-                      <a:prstDash val="solid"/>
-                      <a:round/>
-                      <a:headEnd type="none" w="med" len="med"/>
-                      <a:tailEnd type="none" w="med" len="med"/>
-                    </a:lnB>
-                    <a:solidFill>
-                      <a:srgbClr val="F0F4F5"/>
-                    </a:solidFill>
-                  </a:tcPr>
-                </a:tc>
-              </a:tr>
-              <a:tr h="374904">
-                <a:tc>
-                  <a:txBody>
-                    <a:bodyPr/>
-                    <a:lstStyle/>
-                    <a:p>
-                      <a:pPr algn="ctr" indent="0" marL="0">
-                        <a:buNone/>
-                      </a:pPr>
-                      <a:r>
-                        <a:rPr lang="en-US" sz="1000" dirty="0">
-                          <a:solidFill>
-                            <a:srgbClr val="5B6B73"/>
-                          </a:solidFill>
-                          <a:latin typeface="Calibri" pitchFamily="34" charset="0"/>
-                          <a:ea typeface="Calibri" pitchFamily="34" charset="-122"/>
-                          <a:cs typeface="Calibri" pitchFamily="34" charset="-120"/>
-                        </a:rPr>
-                        <a:t>7</a:t>
-                      </a:r>
-                      <a:endParaRPr lang="en-US" sz="1000" dirty="0">
-                        <a:latin typeface="Calibri" charset="0"/>
-                        <a:ea typeface="Calibri" charset="0"/>
-                        <a:cs typeface="Calibri" charset="0"/>
-                      </a:endParaRPr>
-                    </a:p>
-                  </a:txBody>
-                  <a:tcPr marL="91440" marR="91440" marT="45720" marB="45720" anchor="ctr">
-                    <a:lnL w="6350" cap="flat" cmpd="sng" algn="ctr">
-                      <a:solidFill>
-                        <a:srgbClr val="E3E8E9"/>
-                      </a:solidFill>
-                      <a:prstDash val="solid"/>
-                      <a:round/>
-                      <a:headEnd type="none" w="med" len="med"/>
-                      <a:tailEnd type="none" w="med" len="med"/>
-                    </a:lnL>
-                    <a:lnR w="6350" cap="flat" cmpd="sng" algn="ctr">
-                      <a:solidFill>
-                        <a:srgbClr val="E3E8E9"/>
-                      </a:solidFill>
-                      <a:prstDash val="solid"/>
-                      <a:round/>
-                      <a:headEnd type="none" w="med" len="med"/>
-                      <a:tailEnd type="none" w="med" len="med"/>
-                    </a:lnR>
-                    <a:lnT w="6350" cap="flat" cmpd="sng" algn="ctr">
-                      <a:solidFill>
-                        <a:srgbClr val="E3E8E9"/>
-                      </a:solidFill>
-                      <a:prstDash val="solid"/>
-                      <a:round/>
-                      <a:headEnd type="none" w="med" len="med"/>
-                      <a:tailEnd type="none" w="med" len="med"/>
-                    </a:lnT>
-                    <a:lnB w="6350" cap="flat" cmpd="sng" algn="ctr">
-                      <a:solidFill>
-                        <a:srgbClr val="E3E8E9"/>
-                      </a:solidFill>
-                      <a:prstDash val="solid"/>
-                      <a:round/>
-                      <a:headEnd type="none" w="med" len="med"/>
-                      <a:tailEnd type="none" w="med" len="med"/>
-                    </a:lnB>
-                    <a:solidFill>
-                      <a:srgbClr val="FFFFFF"/>
-                    </a:solidFill>
-                  </a:tcPr>
-                </a:tc>
-                <a:tc>
-                  <a:txBody>
-                    <a:bodyPr/>
-                    <a:lstStyle/>
-                    <a:p>
-                      <a:pPr indent="0" marL="0">
-                        <a:buNone/>
-                      </a:pPr>
-                      <a:r>
-                        <a:rPr lang="en-US" sz="1050" dirty="0">
-                          <a:solidFill>
-                            <a:srgbClr val="1C2B33"/>
-                          </a:solidFill>
-                          <a:latin typeface="Calibri" pitchFamily="34" charset="0"/>
-                          <a:ea typeface="Calibri" pitchFamily="34" charset="-122"/>
-                          <a:cs typeface="Calibri" pitchFamily="34" charset="-120"/>
-                        </a:rPr>
-                        <a:t>Suporte Técnico</a:t>
-                      </a:r>
-                      <a:endParaRPr lang="en-US" sz="1050" dirty="0">
-                        <a:latin typeface="Calibri" charset="0"/>
-                        <a:ea typeface="Calibri" charset="0"/>
-                        <a:cs typeface="Calibri" charset="0"/>
-                      </a:endParaRPr>
-                    </a:p>
-                  </a:txBody>
-                  <a:tcPr marL="91440" marR="91440" marT="45720" marB="45720" anchor="ctr">
-                    <a:lnL w="6350" cap="flat" cmpd="sng" algn="ctr">
-                      <a:solidFill>
-                        <a:srgbClr val="E3E8E9"/>
-                      </a:solidFill>
-                      <a:prstDash val="solid"/>
-                      <a:round/>
-                      <a:headEnd type="none" w="med" len="med"/>
-                      <a:tailEnd type="none" w="med" len="med"/>
-                    </a:lnL>
-                    <a:lnR w="6350" cap="flat" cmpd="sng" algn="ctr">
-                      <a:solidFill>
-                        <a:srgbClr val="E3E8E9"/>
-                      </a:solidFill>
-                      <a:prstDash val="solid"/>
-                      <a:round/>
-                      <a:headEnd type="none" w="med" len="med"/>
-                      <a:tailEnd type="none" w="med" len="med"/>
-                    </a:lnR>
-                    <a:lnT w="6350" cap="flat" cmpd="sng" algn="ctr">
-                      <a:solidFill>
-                        <a:srgbClr val="E3E8E9"/>
-                      </a:solidFill>
-                      <a:prstDash val="solid"/>
-                      <a:round/>
-                      <a:headEnd type="none" w="med" len="med"/>
-                      <a:tailEnd type="none" w="med" len="med"/>
-                    </a:lnT>
-                    <a:lnB w="6350" cap="flat" cmpd="sng" algn="ctr">
-                      <a:solidFill>
-                        <a:srgbClr val="E3E8E9"/>
-                      </a:solidFill>
-                      <a:prstDash val="solid"/>
-                      <a:round/>
-                      <a:headEnd type="none" w="med" len="med"/>
-                      <a:tailEnd type="none" w="med" len="med"/>
-                    </a:lnB>
-                    <a:solidFill>
-                      <a:srgbClr val="FFFFFF"/>
-                    </a:solidFill>
-                  </a:tcPr>
-                </a:tc>
-                <a:tc>
-                  <a:txBody>
-                    <a:bodyPr/>
-                    <a:lstStyle/>
-                    <a:p>
-                      <a:pPr algn="r" indent="0" marL="0">
-                        <a:buNone/>
-                      </a:pPr>
-                      <a:r>
-                        <a:rPr lang="en-US" sz="1050" b="1" dirty="0">
-                          <a:solidFill>
-                            <a:srgbClr val="0B2A3D"/>
-                          </a:solidFill>
-                          <a:latin typeface="Calibri" pitchFamily="34" charset="0"/>
-                          <a:ea typeface="Calibri" pitchFamily="34" charset="-122"/>
-                          <a:cs typeface="Calibri" pitchFamily="34" charset="-120"/>
-                        </a:rPr>
-                        <a:t>US$ 4,0 mi</a:t>
-                      </a:r>
-                      <a:endParaRPr lang="en-US" sz="1050" dirty="0">
-                        <a:latin typeface="Calibri" charset="0"/>
-                        <a:ea typeface="Calibri" charset="0"/>
-                        <a:cs typeface="Calibri" charset="0"/>
-                      </a:endParaRPr>
-                    </a:p>
-                  </a:txBody>
-                  <a:tcPr marL="91440" marR="91440" marT="45720" marB="45720" anchor="ctr">
-                    <a:lnL w="6350" cap="flat" cmpd="sng" algn="ctr">
-                      <a:solidFill>
-                        <a:srgbClr val="E3E8E9"/>
-                      </a:solidFill>
-                      <a:prstDash val="solid"/>
-                      <a:round/>
-                      <a:headEnd type="none" w="med" len="med"/>
-                      <a:tailEnd type="none" w="med" len="med"/>
-                    </a:lnL>
-                    <a:lnR w="6350" cap="flat" cmpd="sng" algn="ctr">
-                      <a:solidFill>
-                        <a:srgbClr val="E3E8E9"/>
-                      </a:solidFill>
-                      <a:prstDash val="solid"/>
-                      <a:round/>
-                      <a:headEnd type="none" w="med" len="med"/>
-                      <a:tailEnd type="none" w="med" len="med"/>
-                    </a:lnR>
-                    <a:lnT w="6350" cap="flat" cmpd="sng" algn="ctr">
-                      <a:solidFill>
-                        <a:srgbClr val="E3E8E9"/>
-                      </a:solidFill>
-                      <a:prstDash val="solid"/>
-                      <a:round/>
-                      <a:headEnd type="none" w="med" len="med"/>
-                      <a:tailEnd type="none" w="med" len="med"/>
-                    </a:lnT>
-                    <a:lnB w="6350" cap="flat" cmpd="sng" algn="ctr">
-                      <a:solidFill>
-                        <a:srgbClr val="E3E8E9"/>
-                      </a:solidFill>
-                      <a:prstDash val="solid"/>
-                      <a:round/>
-                      <a:headEnd type="none" w="med" len="med"/>
-                      <a:tailEnd type="none" w="med" len="med"/>
-                    </a:lnB>
-                    <a:solidFill>
-                      <a:srgbClr val="FFFFFF"/>
-                    </a:solidFill>
-                  </a:tcPr>
-                </a:tc>
-                <a:tc>
-                  <a:txBody>
-                    <a:bodyPr/>
-                    <a:lstStyle/>
-                    <a:p>
-                      <a:pPr algn="r" indent="0" marL="0">
-                        <a:buNone/>
-                      </a:pPr>
-                      <a:r>
-                        <a:rPr lang="en-US" sz="1000" dirty="0">
-                          <a:solidFill>
-                            <a:srgbClr val="5B6B73"/>
-                          </a:solidFill>
-                          <a:latin typeface="Calibri" pitchFamily="34" charset="0"/>
-                          <a:ea typeface="Calibri" pitchFamily="34" charset="-122"/>
-                          <a:cs typeface="Calibri" pitchFamily="34" charset="-120"/>
-                        </a:rPr>
-                        <a:t>3,1%</a:t>
-                      </a:r>
-                      <a:endParaRPr lang="en-US" sz="1000" dirty="0">
-                        <a:latin typeface="Calibri" charset="0"/>
-                        <a:ea typeface="Calibri" charset="0"/>
-                        <a:cs typeface="Calibri" charset="0"/>
-                      </a:endParaRPr>
-                    </a:p>
-                  </a:txBody>
-                  <a:tcPr marL="91440" marR="91440" marT="45720" marB="45720" anchor="ctr">
-                    <a:lnL w="6350" cap="flat" cmpd="sng" algn="ctr">
-                      <a:solidFill>
-                        <a:srgbClr val="E3E8E9"/>
-                      </a:solidFill>
-                      <a:prstDash val="solid"/>
-                      <a:round/>
-                      <a:headEnd type="none" w="med" len="med"/>
-                      <a:tailEnd type="none" w="med" len="med"/>
-                    </a:lnL>
-                    <a:lnR w="6350" cap="flat" cmpd="sng" algn="ctr">
-                      <a:solidFill>
-                        <a:srgbClr val="E3E8E9"/>
-                      </a:solidFill>
-                      <a:prstDash val="solid"/>
-                      <a:round/>
-                      <a:headEnd type="none" w="med" len="med"/>
-                      <a:tailEnd type="none" w="med" len="med"/>
-                    </a:lnR>
-                    <a:lnT w="6350" cap="flat" cmpd="sng" algn="ctr">
-                      <a:solidFill>
-                        <a:srgbClr val="E3E8E9"/>
-                      </a:solidFill>
-                      <a:prstDash val="solid"/>
-                      <a:round/>
-                      <a:headEnd type="none" w="med" len="med"/>
-                      <a:tailEnd type="none" w="med" len="med"/>
-                    </a:lnT>
-                    <a:lnB w="6350" cap="flat" cmpd="sng" algn="ctr">
-                      <a:solidFill>
-                        <a:srgbClr val="E3E8E9"/>
-                      </a:solidFill>
-                      <a:prstDash val="solid"/>
-                      <a:round/>
-                      <a:headEnd type="none" w="med" len="med"/>
-                      <a:tailEnd type="none" w="med" len="med"/>
-                    </a:lnB>
-                    <a:solidFill>
-                      <a:srgbClr val="FFFFFF"/>
-                    </a:solidFill>
-                  </a:tcPr>
-                </a:tc>
-              </a:tr>
-              <a:tr h="374904">
-                <a:tc>
-                  <a:txBody>
-                    <a:bodyPr/>
-                    <a:lstStyle/>
-                    <a:p>
-                      <a:pPr algn="ctr" indent="0" marL="0">
-                        <a:buNone/>
-                      </a:pPr>
-                      <a:r>
-                        <a:rPr lang="en-US" sz="1000" dirty="0">
-                          <a:solidFill>
-                            <a:srgbClr val="5B6B73"/>
-                          </a:solidFill>
-                          <a:latin typeface="Calibri" pitchFamily="34" charset="0"/>
-                          <a:ea typeface="Calibri" pitchFamily="34" charset="-122"/>
-                          <a:cs typeface="Calibri" pitchFamily="34" charset="-120"/>
-                        </a:rPr>
-                        <a:t>8</a:t>
-                      </a:r>
-                      <a:endParaRPr lang="en-US" sz="1000" dirty="0">
-                        <a:latin typeface="Calibri" charset="0"/>
-                        <a:ea typeface="Calibri" charset="0"/>
-                        <a:cs typeface="Calibri" charset="0"/>
-                      </a:endParaRPr>
-                    </a:p>
-                  </a:txBody>
-                  <a:tcPr marL="91440" marR="91440" marT="45720" marB="45720" anchor="ctr">
-                    <a:lnL w="6350" cap="flat" cmpd="sng" algn="ctr">
-                      <a:solidFill>
-                        <a:srgbClr val="E3E8E9"/>
-                      </a:solidFill>
-                      <a:prstDash val="solid"/>
-                      <a:round/>
-                      <a:headEnd type="none" w="med" len="med"/>
-                      <a:tailEnd type="none" w="med" len="med"/>
-                    </a:lnL>
-                    <a:lnR w="6350" cap="flat" cmpd="sng" algn="ctr">
-                      <a:solidFill>
-                        <a:srgbClr val="E3E8E9"/>
-                      </a:solidFill>
-                      <a:prstDash val="solid"/>
-                      <a:round/>
-                      <a:headEnd type="none" w="med" len="med"/>
-                      <a:tailEnd type="none" w="med" len="med"/>
-                    </a:lnR>
-                    <a:lnT w="6350" cap="flat" cmpd="sng" algn="ctr">
-                      <a:solidFill>
-                        <a:srgbClr val="E3E8E9"/>
-                      </a:solidFill>
-                      <a:prstDash val="solid"/>
-                      <a:round/>
-                      <a:headEnd type="none" w="med" len="med"/>
-                      <a:tailEnd type="none" w="med" len="med"/>
-                    </a:lnT>
-                    <a:lnB w="6350" cap="flat" cmpd="sng" algn="ctr">
-                      <a:solidFill>
-                        <a:srgbClr val="E3E8E9"/>
-                      </a:solidFill>
-                      <a:prstDash val="solid"/>
-                      <a:round/>
-                      <a:headEnd type="none" w="med" len="med"/>
-                      <a:tailEnd type="none" w="med" len="med"/>
-                    </a:lnB>
-                    <a:solidFill>
-                      <a:srgbClr val="F0F4F5"/>
-                    </a:solidFill>
-                  </a:tcPr>
-                </a:tc>
-                <a:tc>
-                  <a:txBody>
-                    <a:bodyPr/>
-                    <a:lstStyle/>
-                    <a:p>
-                      <a:pPr indent="0" marL="0">
-                        <a:buNone/>
-                      </a:pPr>
-                      <a:r>
-                        <a:rPr lang="en-US" sz="1050" dirty="0">
-                          <a:solidFill>
-                            <a:srgbClr val="1C2B33"/>
-                          </a:solidFill>
-                          <a:latin typeface="Calibri" pitchFamily="34" charset="0"/>
-                          <a:ea typeface="Calibri" pitchFamily="34" charset="-122"/>
-                          <a:cs typeface="Calibri" pitchFamily="34" charset="-120"/>
-                        </a:rPr>
-                        <a:t>Saúde e Segurança Ocupacional</a:t>
-                      </a:r>
-                      <a:endParaRPr lang="en-US" sz="1050" dirty="0">
-                        <a:latin typeface="Calibri" charset="0"/>
-                        <a:ea typeface="Calibri" charset="0"/>
-                        <a:cs typeface="Calibri" charset="0"/>
-                      </a:endParaRPr>
-                    </a:p>
-                  </a:txBody>
-                  <a:tcPr marL="91440" marR="91440" marT="45720" marB="45720" anchor="ctr">
-                    <a:lnL w="6350" cap="flat" cmpd="sng" algn="ctr">
-                      <a:solidFill>
-                        <a:srgbClr val="E3E8E9"/>
-                      </a:solidFill>
-                      <a:prstDash val="solid"/>
-                      <a:round/>
-                      <a:headEnd type="none" w="med" len="med"/>
-                      <a:tailEnd type="none" w="med" len="med"/>
-                    </a:lnL>
-                    <a:lnR w="6350" cap="flat" cmpd="sng" algn="ctr">
-                      <a:solidFill>
-                        <a:srgbClr val="E3E8E9"/>
-                      </a:solidFill>
-                      <a:prstDash val="solid"/>
-                      <a:round/>
-                      <a:headEnd type="none" w="med" len="med"/>
-                      <a:tailEnd type="none" w="med" len="med"/>
-                    </a:lnR>
-                    <a:lnT w="6350" cap="flat" cmpd="sng" algn="ctr">
-                      <a:solidFill>
-                        <a:srgbClr val="E3E8E9"/>
-                      </a:solidFill>
-                      <a:prstDash val="solid"/>
-                      <a:round/>
-                      <a:headEnd type="none" w="med" len="med"/>
-                      <a:tailEnd type="none" w="med" len="med"/>
-                    </a:lnT>
-                    <a:lnB w="6350" cap="flat" cmpd="sng" algn="ctr">
-                      <a:solidFill>
-                        <a:srgbClr val="E3E8E9"/>
-                      </a:solidFill>
-                      <a:prstDash val="solid"/>
-                      <a:round/>
-                      <a:headEnd type="none" w="med" len="med"/>
-                      <a:tailEnd type="none" w="med" len="med"/>
-                    </a:lnB>
-                    <a:solidFill>
-                      <a:srgbClr val="F0F4F5"/>
-                    </a:solidFill>
-                  </a:tcPr>
-                </a:tc>
-                <a:tc>
-                  <a:txBody>
-                    <a:bodyPr/>
-                    <a:lstStyle/>
-                    <a:p>
-                      <a:pPr algn="r" indent="0" marL="0">
-                        <a:buNone/>
-                      </a:pPr>
-                      <a:r>
-                        <a:rPr lang="en-US" sz="1050" b="1" dirty="0">
-                          <a:solidFill>
-                            <a:srgbClr val="0B2A3D"/>
-                          </a:solidFill>
-                          <a:latin typeface="Calibri" pitchFamily="34" charset="0"/>
-                          <a:ea typeface="Calibri" pitchFamily="34" charset="-122"/>
-                          <a:cs typeface="Calibri" pitchFamily="34" charset="-120"/>
-                        </a:rPr>
-                        <a:t>US$ 3,0 mi</a:t>
-                      </a:r>
-                      <a:endParaRPr lang="en-US" sz="1050" dirty="0">
-                        <a:latin typeface="Calibri" charset="0"/>
-                        <a:ea typeface="Calibri" charset="0"/>
-                        <a:cs typeface="Calibri" charset="0"/>
-                      </a:endParaRPr>
-                    </a:p>
-                  </a:txBody>
-                  <a:tcPr marL="91440" marR="91440" marT="45720" marB="45720" anchor="ctr">
-                    <a:lnL w="6350" cap="flat" cmpd="sng" algn="ctr">
-                      <a:solidFill>
-                        <a:srgbClr val="E3E8E9"/>
-                      </a:solidFill>
-                      <a:prstDash val="solid"/>
-                      <a:round/>
-                      <a:headEnd type="none" w="med" len="med"/>
-                      <a:tailEnd type="none" w="med" len="med"/>
-                    </a:lnL>
-                    <a:lnR w="6350" cap="flat" cmpd="sng" algn="ctr">
-                      <a:solidFill>
-                        <a:srgbClr val="E3E8E9"/>
-                      </a:solidFill>
-                      <a:prstDash val="solid"/>
-                      <a:round/>
-                      <a:headEnd type="none" w="med" len="med"/>
-                      <a:tailEnd type="none" w="med" len="med"/>
-                    </a:lnR>
-                    <a:lnT w="6350" cap="flat" cmpd="sng" algn="ctr">
-                      <a:solidFill>
-                        <a:srgbClr val="E3E8E9"/>
-                      </a:solidFill>
-                      <a:prstDash val="solid"/>
-                      <a:round/>
-                      <a:headEnd type="none" w="med" len="med"/>
-                      <a:tailEnd type="none" w="med" len="med"/>
-                    </a:lnT>
-                    <a:lnB w="6350" cap="flat" cmpd="sng" algn="ctr">
-                      <a:solidFill>
-                        <a:srgbClr val="E3E8E9"/>
-                      </a:solidFill>
-                      <a:prstDash val="solid"/>
-                      <a:round/>
-                      <a:headEnd type="none" w="med" len="med"/>
-                      <a:tailEnd type="none" w="med" len="med"/>
-                    </a:lnB>
-                    <a:solidFill>
-                      <a:srgbClr val="F0F4F5"/>
-                    </a:solidFill>
-                  </a:tcPr>
-                </a:tc>
-                <a:tc>
-                  <a:txBody>
-                    <a:bodyPr/>
-                    <a:lstStyle/>
-                    <a:p>
-                      <a:pPr algn="r" indent="0" marL="0">
-                        <a:buNone/>
-                      </a:pPr>
-                      <a:r>
-                        <a:rPr lang="en-US" sz="1000" dirty="0">
-                          <a:solidFill>
-                            <a:srgbClr val="5B6B73"/>
-                          </a:solidFill>
-                          <a:latin typeface="Calibri" pitchFamily="34" charset="0"/>
-                          <a:ea typeface="Calibri" pitchFamily="34" charset="-122"/>
-                          <a:cs typeface="Calibri" pitchFamily="34" charset="-120"/>
-                        </a:rPr>
-                        <a:t>2,3%</a:t>
-                      </a:r>
-                      <a:endParaRPr lang="en-US" sz="1000" dirty="0">
-                        <a:latin typeface="Calibri" charset="0"/>
-                        <a:ea typeface="Calibri" charset="0"/>
-                        <a:cs typeface="Calibri" charset="0"/>
-                      </a:endParaRPr>
-                    </a:p>
-                  </a:txBody>
-                  <a:tcPr marL="91440" marR="91440" marT="45720" marB="45720" anchor="ctr">
-                    <a:lnL w="6350" cap="flat" cmpd="sng" algn="ctr">
-                      <a:solidFill>
-                        <a:srgbClr val="E3E8E9"/>
-                      </a:solidFill>
-                      <a:prstDash val="solid"/>
-                      <a:round/>
-                      <a:headEnd type="none" w="med" len="med"/>
-                      <a:tailEnd type="none" w="med" len="med"/>
-                    </a:lnL>
-                    <a:lnR w="6350" cap="flat" cmpd="sng" algn="ctr">
-                      <a:solidFill>
-                        <a:srgbClr val="E3E8E9"/>
-                      </a:solidFill>
-                      <a:prstDash val="solid"/>
-                      <a:round/>
-                      <a:headEnd type="none" w="med" len="med"/>
-                      <a:tailEnd type="none" w="med" len="med"/>
-                    </a:lnR>
-                    <a:lnT w="6350" cap="flat" cmpd="sng" algn="ctr">
-                      <a:solidFill>
-                        <a:srgbClr val="E3E8E9"/>
-                      </a:solidFill>
-                      <a:prstDash val="solid"/>
-                      <a:round/>
-                      <a:headEnd type="none" w="med" len="med"/>
-                      <a:tailEnd type="none" w="med" len="med"/>
-                    </a:lnT>
-                    <a:lnB w="6350" cap="flat" cmpd="sng" algn="ctr">
-                      <a:solidFill>
-                        <a:srgbClr val="E3E8E9"/>
-                      </a:solidFill>
-                      <a:prstDash val="solid"/>
-                      <a:round/>
-                      <a:headEnd type="none" w="med" len="med"/>
-                      <a:tailEnd type="none" w="med" len="med"/>
-                    </a:lnB>
-                    <a:solidFill>
-                      <a:srgbClr val="F0F4F5"/>
-                    </a:solidFill>
-                  </a:tcPr>
-                </a:tc>
-              </a:tr>
-              <a:tr h="374904">
-                <a:tc>
-                  <a:txBody>
-                    <a:bodyPr/>
-                    <a:lstStyle/>
-                    <a:p>
-                      <a:pPr algn="ctr" indent="0" marL="0">
-                        <a:buNone/>
-                      </a:pPr>
-                      <a:r>
-                        <a:rPr lang="en-US" sz="1000" dirty="0">
-                          <a:solidFill>
-                            <a:srgbClr val="5B6B73"/>
-                          </a:solidFill>
-                          <a:latin typeface="Calibri" pitchFamily="34" charset="0"/>
-                          <a:ea typeface="Calibri" pitchFamily="34" charset="-122"/>
-                          <a:cs typeface="Calibri" pitchFamily="34" charset="-120"/>
-                        </a:rPr>
-                        <a:t>9</a:t>
-                      </a:r>
-                      <a:endParaRPr lang="en-US" sz="1000" dirty="0">
-                        <a:latin typeface="Calibri" charset="0"/>
-                        <a:ea typeface="Calibri" charset="0"/>
-                        <a:cs typeface="Calibri" charset="0"/>
-                      </a:endParaRPr>
-                    </a:p>
-                  </a:txBody>
-                  <a:tcPr marL="91440" marR="91440" marT="45720" marB="45720" anchor="ctr">
-                    <a:lnL w="6350" cap="flat" cmpd="sng" algn="ctr">
-                      <a:solidFill>
-                        <a:srgbClr val="E3E8E9"/>
-                      </a:solidFill>
-                      <a:prstDash val="solid"/>
-                      <a:round/>
-                      <a:headEnd type="none" w="med" len="med"/>
-                      <a:tailEnd type="none" w="med" len="med"/>
-                    </a:lnL>
-                    <a:lnR w="6350" cap="flat" cmpd="sng" algn="ctr">
-                      <a:solidFill>
-                        <a:srgbClr val="E3E8E9"/>
-                      </a:solidFill>
-                      <a:prstDash val="solid"/>
-                      <a:round/>
-                      <a:headEnd type="none" w="med" len="med"/>
-                      <a:tailEnd type="none" w="med" len="med"/>
-                    </a:lnR>
-                    <a:lnT w="6350" cap="flat" cmpd="sng" algn="ctr">
-                      <a:solidFill>
-                        <a:srgbClr val="E3E8E9"/>
-                      </a:solidFill>
-                      <a:prstDash val="solid"/>
-                      <a:round/>
-                      <a:headEnd type="none" w="med" len="med"/>
-                      <a:tailEnd type="none" w="med" len="med"/>
-                    </a:lnT>
-                    <a:lnB w="6350" cap="flat" cmpd="sng" algn="ctr">
-                      <a:solidFill>
-                        <a:srgbClr val="E3E8E9"/>
-                      </a:solidFill>
-                      <a:prstDash val="solid"/>
-                      <a:round/>
-                      <a:headEnd type="none" w="med" len="med"/>
-                      <a:tailEnd type="none" w="med" len="med"/>
-                    </a:lnB>
-                    <a:solidFill>
-                      <a:srgbClr val="FFFFFF"/>
-                    </a:solidFill>
-                  </a:tcPr>
-                </a:tc>
-                <a:tc>
-                  <a:txBody>
-                    <a:bodyPr/>
-                    <a:lstStyle/>
-                    <a:p>
-                      <a:pPr indent="0" marL="0">
-                        <a:buNone/>
-                      </a:pPr>
-                      <a:r>
-                        <a:rPr lang="en-US" sz="1050" dirty="0">
-                          <a:solidFill>
-                            <a:srgbClr val="1C2B33"/>
-                          </a:solidFill>
-                          <a:latin typeface="Calibri" pitchFamily="34" charset="0"/>
-                          <a:ea typeface="Calibri" pitchFamily="34" charset="-122"/>
-                          <a:cs typeface="Calibri" pitchFamily="34" charset="-120"/>
-                        </a:rPr>
-                        <a:t>ADM - Administrativo</a:t>
-                      </a:r>
-                      <a:endParaRPr lang="en-US" sz="1050" dirty="0">
-                        <a:latin typeface="Calibri" charset="0"/>
-                        <a:ea typeface="Calibri" charset="0"/>
-                        <a:cs typeface="Calibri" charset="0"/>
-                      </a:endParaRPr>
-                    </a:p>
-                  </a:txBody>
-                  <a:tcPr marL="91440" marR="91440" marT="45720" marB="45720" anchor="ctr">
-                    <a:lnL w="6350" cap="flat" cmpd="sng" algn="ctr">
-                      <a:solidFill>
-                        <a:srgbClr val="E3E8E9"/>
-                      </a:solidFill>
-                      <a:prstDash val="solid"/>
-                      <a:round/>
-                      <a:headEnd type="none" w="med" len="med"/>
-                      <a:tailEnd type="none" w="med" len="med"/>
-                    </a:lnL>
-                    <a:lnR w="6350" cap="flat" cmpd="sng" algn="ctr">
-                      <a:solidFill>
-                        <a:srgbClr val="E3E8E9"/>
-                      </a:solidFill>
-                      <a:prstDash val="solid"/>
-                      <a:round/>
-                      <a:headEnd type="none" w="med" len="med"/>
-                      <a:tailEnd type="none" w="med" len="med"/>
-                    </a:lnR>
-                    <a:lnT w="6350" cap="flat" cmpd="sng" algn="ctr">
-                      <a:solidFill>
-                        <a:srgbClr val="E3E8E9"/>
-                      </a:solidFill>
-                      <a:prstDash val="solid"/>
-                      <a:round/>
-                      <a:headEnd type="none" w="med" len="med"/>
-                      <a:tailEnd type="none" w="med" len="med"/>
-                    </a:lnT>
-                    <a:lnB w="6350" cap="flat" cmpd="sng" algn="ctr">
-                      <a:solidFill>
-                        <a:srgbClr val="E3E8E9"/>
-                      </a:solidFill>
-                      <a:prstDash val="solid"/>
-                      <a:round/>
-                      <a:headEnd type="none" w="med" len="med"/>
-                      <a:tailEnd type="none" w="med" len="med"/>
-                    </a:lnB>
-                    <a:solidFill>
-                      <a:srgbClr val="FFFFFF"/>
-                    </a:solidFill>
-                  </a:tcPr>
-                </a:tc>
-                <a:tc>
-                  <a:txBody>
-                    <a:bodyPr/>
-                    <a:lstStyle/>
-                    <a:p>
-                      <a:pPr algn="r" indent="0" marL="0">
-                        <a:buNone/>
-                      </a:pPr>
-                      <a:r>
-                        <a:rPr lang="en-US" sz="1050" b="1" dirty="0">
-                          <a:solidFill>
-                            <a:srgbClr val="0B2A3D"/>
-                          </a:solidFill>
-                          <a:latin typeface="Calibri" pitchFamily="34" charset="0"/>
-                          <a:ea typeface="Calibri" pitchFamily="34" charset="-122"/>
-                          <a:cs typeface="Calibri" pitchFamily="34" charset="-120"/>
-                        </a:rPr>
-                        <a:t>US$ 2,4 mi</a:t>
-                      </a:r>
-                      <a:endParaRPr lang="en-US" sz="1050" dirty="0">
-                        <a:latin typeface="Calibri" charset="0"/>
-                        <a:ea typeface="Calibri" charset="0"/>
-                        <a:cs typeface="Calibri" charset="0"/>
-                      </a:endParaRPr>
-                    </a:p>
-                  </a:txBody>
-                  <a:tcPr marL="91440" marR="91440" marT="45720" marB="45720" anchor="ctr">
-                    <a:lnL w="6350" cap="flat" cmpd="sng" algn="ctr">
-                      <a:solidFill>
-                        <a:srgbClr val="E3E8E9"/>
-                      </a:solidFill>
-                      <a:prstDash val="solid"/>
-                      <a:round/>
-                      <a:headEnd type="none" w="med" len="med"/>
-                      <a:tailEnd type="none" w="med" len="med"/>
-                    </a:lnL>
-                    <a:lnR w="6350" cap="flat" cmpd="sng" algn="ctr">
-                      <a:solidFill>
-                        <a:srgbClr val="E3E8E9"/>
-                      </a:solidFill>
-                      <a:prstDash val="solid"/>
-                      <a:round/>
-                      <a:headEnd type="none" w="med" len="med"/>
-                      <a:tailEnd type="none" w="med" len="med"/>
-                    </a:lnR>
-                    <a:lnT w="6350" cap="flat" cmpd="sng" algn="ctr">
-                      <a:solidFill>
-                        <a:srgbClr val="E3E8E9"/>
-                      </a:solidFill>
-                      <a:prstDash val="solid"/>
-                      <a:round/>
-                      <a:headEnd type="none" w="med" len="med"/>
-                      <a:tailEnd type="none" w="med" len="med"/>
-                    </a:lnT>
-                    <a:lnB w="6350" cap="flat" cmpd="sng" algn="ctr">
-                      <a:solidFill>
-                        <a:srgbClr val="E3E8E9"/>
-                      </a:solidFill>
-                      <a:prstDash val="solid"/>
-                      <a:round/>
-                      <a:headEnd type="none" w="med" len="med"/>
-                      <a:tailEnd type="none" w="med" len="med"/>
-                    </a:lnB>
-                    <a:solidFill>
-                      <a:srgbClr val="FFFFFF"/>
-                    </a:solidFill>
-                  </a:tcPr>
-                </a:tc>
-                <a:tc>
-                  <a:txBody>
-                    <a:bodyPr/>
-                    <a:lstStyle/>
-                    <a:p>
-                      <a:pPr algn="r" indent="0" marL="0">
-                        <a:buNone/>
-                      </a:pPr>
-                      <a:r>
-                        <a:rPr lang="en-US" sz="1000" dirty="0">
-                          <a:solidFill>
-                            <a:srgbClr val="5B6B73"/>
-                          </a:solidFill>
-                          <a:latin typeface="Calibri" pitchFamily="34" charset="0"/>
-                          <a:ea typeface="Calibri" pitchFamily="34" charset="-122"/>
-                          <a:cs typeface="Calibri" pitchFamily="34" charset="-120"/>
-                        </a:rPr>
-                        <a:t>1,8%</a:t>
-                      </a:r>
-                      <a:endParaRPr lang="en-US" sz="1000" dirty="0">
-                        <a:latin typeface="Calibri" charset="0"/>
-                        <a:ea typeface="Calibri" charset="0"/>
-                        <a:cs typeface="Calibri" charset="0"/>
-                      </a:endParaRPr>
-                    </a:p>
-                  </a:txBody>
-                  <a:tcPr marL="91440" marR="91440" marT="45720" marB="45720" anchor="ctr">
-                    <a:lnL w="6350" cap="flat" cmpd="sng" algn="ctr">
-                      <a:solidFill>
-                        <a:srgbClr val="E3E8E9"/>
-                      </a:solidFill>
-                      <a:prstDash val="solid"/>
-                      <a:round/>
-                      <a:headEnd type="none" w="med" len="med"/>
-                      <a:tailEnd type="none" w="med" len="med"/>
-                    </a:lnL>
-                    <a:lnR w="6350" cap="flat" cmpd="sng" algn="ctr">
-                      <a:solidFill>
-                        <a:srgbClr val="E3E8E9"/>
-                      </a:solidFill>
-                      <a:prstDash val="solid"/>
-                      <a:round/>
-                      <a:headEnd type="none" w="med" len="med"/>
-                      <a:tailEnd type="none" w="med" len="med"/>
-                    </a:lnR>
-                    <a:lnT w="6350" cap="flat" cmpd="sng" algn="ctr">
-                      <a:solidFill>
-                        <a:srgbClr val="E3E8E9"/>
-                      </a:solidFill>
-                      <a:prstDash val="solid"/>
-                      <a:round/>
-                      <a:headEnd type="none" w="med" len="med"/>
-                      <a:tailEnd type="none" w="med" len="med"/>
-                    </a:lnT>
-                    <a:lnB w="6350" cap="flat" cmpd="sng" algn="ctr">
-                      <a:solidFill>
-                        <a:srgbClr val="E3E8E9"/>
-                      </a:solidFill>
-                      <a:prstDash val="solid"/>
-                      <a:round/>
-                      <a:headEnd type="none" w="med" len="med"/>
-                      <a:tailEnd type="none" w="med" len="med"/>
-                    </a:lnB>
-                    <a:solidFill>
-                      <a:srgbClr val="FFFFFF"/>
-                    </a:solidFill>
-                  </a:tcPr>
-                </a:tc>
-              </a:tr>
-              <a:tr h="374904">
-                <a:tc>
-                  <a:txBody>
-                    <a:bodyPr/>
-                    <a:lstStyle/>
-                    <a:p>
-                      <a:pPr algn="ctr" indent="0" marL="0">
-                        <a:buNone/>
-                      </a:pPr>
-                      <a:r>
-                        <a:rPr lang="en-US" sz="1000" dirty="0">
-                          <a:solidFill>
-                            <a:srgbClr val="5B6B73"/>
-                          </a:solidFill>
-                          <a:latin typeface="Calibri" pitchFamily="34" charset="0"/>
-                          <a:ea typeface="Calibri" pitchFamily="34" charset="-122"/>
-                          <a:cs typeface="Calibri" pitchFamily="34" charset="-120"/>
-                        </a:rPr>
-                        <a:t>10</a:t>
-                      </a:r>
-                      <a:endParaRPr lang="en-US" sz="1000" dirty="0">
-                        <a:latin typeface="Calibri" charset="0"/>
-                        <a:ea typeface="Calibri" charset="0"/>
-                        <a:cs typeface="Calibri" charset="0"/>
-                      </a:endParaRPr>
-                    </a:p>
-                  </a:txBody>
-                  <a:tcPr marL="91440" marR="91440" marT="45720" marB="45720" anchor="ctr">
-                    <a:lnL w="6350" cap="flat" cmpd="sng" algn="ctr">
-                      <a:solidFill>
-                        <a:srgbClr val="E3E8E9"/>
-                      </a:solidFill>
-                      <a:prstDash val="solid"/>
-                      <a:round/>
-                      <a:headEnd type="none" w="med" len="med"/>
-                      <a:tailEnd type="none" w="med" len="med"/>
-                    </a:lnL>
-                    <a:lnR w="6350" cap="flat" cmpd="sng" algn="ctr">
-                      <a:solidFill>
-                        <a:srgbClr val="E3E8E9"/>
-                      </a:solidFill>
-                      <a:prstDash val="solid"/>
-                      <a:round/>
-                      <a:headEnd type="none" w="med" len="med"/>
-                      <a:tailEnd type="none" w="med" len="med"/>
-                    </a:lnR>
-                    <a:lnT w="6350" cap="flat" cmpd="sng" algn="ctr">
-                      <a:solidFill>
-                        <a:srgbClr val="E3E8E9"/>
-                      </a:solidFill>
-                      <a:prstDash val="solid"/>
-                      <a:round/>
-                      <a:headEnd type="none" w="med" len="med"/>
-                      <a:tailEnd type="none" w="med" len="med"/>
-                    </a:lnT>
-                    <a:lnB w="6350" cap="flat" cmpd="sng" algn="ctr">
-                      <a:solidFill>
-                        <a:srgbClr val="E3E8E9"/>
-                      </a:solidFill>
-                      <a:prstDash val="solid"/>
-                      <a:round/>
-                      <a:headEnd type="none" w="med" len="med"/>
-                      <a:tailEnd type="none" w="med" len="med"/>
-                    </a:lnB>
-                    <a:solidFill>
-                      <a:srgbClr val="F0F4F5"/>
-                    </a:solidFill>
-                  </a:tcPr>
-                </a:tc>
-                <a:tc>
-                  <a:txBody>
-                    <a:bodyPr/>
-                    <a:lstStyle/>
-                    <a:p>
-                      <a:pPr indent="0" marL="0">
-                        <a:buNone/>
-                      </a:pPr>
-                      <a:r>
-                        <a:rPr lang="en-US" sz="1050" dirty="0">
-                          <a:solidFill>
-                            <a:srgbClr val="1C2B33"/>
-                          </a:solidFill>
-                          <a:latin typeface="Calibri" pitchFamily="34" charset="0"/>
-                          <a:ea typeface="Calibri" pitchFamily="34" charset="-122"/>
-                          <a:cs typeface="Calibri" pitchFamily="34" charset="-120"/>
-                        </a:rPr>
-                        <a:t>MET – Medição</a:t>
-                      </a:r>
-                      <a:endParaRPr lang="en-US" sz="1050" dirty="0">
-                        <a:latin typeface="Calibri" charset="0"/>
-                        <a:ea typeface="Calibri" charset="0"/>
-                        <a:cs typeface="Calibri" charset="0"/>
-                      </a:endParaRPr>
-                    </a:p>
-                  </a:txBody>
-                  <a:tcPr marL="91440" marR="91440" marT="45720" marB="45720" anchor="ctr">
-                    <a:lnL w="6350" cap="flat" cmpd="sng" algn="ctr">
-                      <a:solidFill>
-                        <a:srgbClr val="E3E8E9"/>
-                      </a:solidFill>
-                      <a:prstDash val="solid"/>
-                      <a:round/>
-                      <a:headEnd type="none" w="med" len="med"/>
-                      <a:tailEnd type="none" w="med" len="med"/>
-                    </a:lnL>
-                    <a:lnR w="6350" cap="flat" cmpd="sng" algn="ctr">
-                      <a:solidFill>
-                        <a:srgbClr val="E3E8E9"/>
-                      </a:solidFill>
-                      <a:prstDash val="solid"/>
-                      <a:round/>
-                      <a:headEnd type="none" w="med" len="med"/>
-                      <a:tailEnd type="none" w="med" len="med"/>
-                    </a:lnR>
-                    <a:lnT w="6350" cap="flat" cmpd="sng" algn="ctr">
-                      <a:solidFill>
-                        <a:srgbClr val="E3E8E9"/>
-                      </a:solidFill>
-                      <a:prstDash val="solid"/>
-                      <a:round/>
-                      <a:headEnd type="none" w="med" len="med"/>
-                      <a:tailEnd type="none" w="med" len="med"/>
-                    </a:lnT>
-                    <a:lnB w="6350" cap="flat" cmpd="sng" algn="ctr">
-                      <a:solidFill>
-                        <a:srgbClr val="E3E8E9"/>
-                      </a:solidFill>
-                      <a:prstDash val="solid"/>
-                      <a:round/>
-                      <a:headEnd type="none" w="med" len="med"/>
-                      <a:tailEnd type="none" w="med" len="med"/>
-                    </a:lnB>
-                    <a:solidFill>
-                      <a:srgbClr val="F0F4F5"/>
-                    </a:solidFill>
-                  </a:tcPr>
-                </a:tc>
-                <a:tc>
-                  <a:txBody>
-                    <a:bodyPr/>
-                    <a:lstStyle/>
-                    <a:p>
-                      <a:pPr algn="r" indent="0" marL="0">
-                        <a:buNone/>
-                      </a:pPr>
-                      <a:r>
-                        <a:rPr lang="en-US" sz="1050" b="1" dirty="0">
-                          <a:solidFill>
-                            <a:srgbClr val="0B2A3D"/>
-                          </a:solidFill>
-                          <a:latin typeface="Calibri" pitchFamily="34" charset="0"/>
-                          <a:ea typeface="Calibri" pitchFamily="34" charset="-122"/>
-                          <a:cs typeface="Calibri" pitchFamily="34" charset="-120"/>
-                        </a:rPr>
-                        <a:t>US$ 1,9 mi</a:t>
-                      </a:r>
-                      <a:endParaRPr lang="en-US" sz="1050" dirty="0">
-                        <a:latin typeface="Calibri" charset="0"/>
-                        <a:ea typeface="Calibri" charset="0"/>
-                        <a:cs typeface="Calibri" charset="0"/>
-                      </a:endParaRPr>
-                    </a:p>
-                  </a:txBody>
-                  <a:tcPr marL="91440" marR="91440" marT="45720" marB="45720" anchor="ctr">
-                    <a:lnL w="6350" cap="flat" cmpd="sng" algn="ctr">
-                      <a:solidFill>
-                        <a:srgbClr val="E3E8E9"/>
-                      </a:solidFill>
-                      <a:prstDash val="solid"/>
-                      <a:round/>
-                      <a:headEnd type="none" w="med" len="med"/>
-                      <a:tailEnd type="none" w="med" len="med"/>
-                    </a:lnL>
-                    <a:lnR w="6350" cap="flat" cmpd="sng" algn="ctr">
-                      <a:solidFill>
-                        <a:srgbClr val="E3E8E9"/>
-                      </a:solidFill>
-                      <a:prstDash val="solid"/>
-                      <a:round/>
-                      <a:headEnd type="none" w="med" len="med"/>
-                      <a:tailEnd type="none" w="med" len="med"/>
-                    </a:lnR>
-                    <a:lnT w="6350" cap="flat" cmpd="sng" algn="ctr">
-                      <a:solidFill>
-                        <a:srgbClr val="E3E8E9"/>
-                      </a:solidFill>
-                      <a:prstDash val="solid"/>
-                      <a:round/>
-                      <a:headEnd type="none" w="med" len="med"/>
-                      <a:tailEnd type="none" w="med" len="med"/>
-                    </a:lnT>
-                    <a:lnB w="6350" cap="flat" cmpd="sng" algn="ctr">
-                      <a:solidFill>
-                        <a:srgbClr val="E3E8E9"/>
-                      </a:solidFill>
-                      <a:prstDash val="solid"/>
-                      <a:round/>
-                      <a:headEnd type="none" w="med" len="med"/>
-                      <a:tailEnd type="none" w="med" len="med"/>
-                    </a:lnB>
-                    <a:solidFill>
-                      <a:srgbClr val="F0F4F5"/>
-                    </a:solidFill>
-                  </a:tcPr>
-                </a:tc>
-                <a:tc>
-                  <a:txBody>
-                    <a:bodyPr/>
-                    <a:lstStyle/>
-                    <a:p>
-                      <a:pPr algn="r" indent="0" marL="0">
-                        <a:buNone/>
-                      </a:pPr>
-                      <a:r>
-                        <a:rPr lang="en-US" sz="1000" dirty="0">
-                          <a:solidFill>
-                            <a:srgbClr val="5B6B73"/>
-                          </a:solidFill>
-                          <a:latin typeface="Calibri" pitchFamily="34" charset="0"/>
-                          <a:ea typeface="Calibri" pitchFamily="34" charset="-122"/>
-                          <a:cs typeface="Calibri" pitchFamily="34" charset="-120"/>
-                        </a:rPr>
-                        <a:t>1,5%</a:t>
-                      </a:r>
-                      <a:endParaRPr lang="en-US" sz="1000" dirty="0">
-                        <a:latin typeface="Calibri" charset="0"/>
-                        <a:ea typeface="Calibri" charset="0"/>
-                        <a:cs typeface="Calibri" charset="0"/>
-                      </a:endParaRPr>
-                    </a:p>
-                  </a:txBody>
-                  <a:tcPr marL="91440" marR="91440" marT="45720" marB="45720" anchor="ctr">
-                    <a:lnL w="6350" cap="flat" cmpd="sng" algn="ctr">
-                      <a:solidFill>
-                        <a:srgbClr val="E3E8E9"/>
-                      </a:solidFill>
-                      <a:prstDash val="solid"/>
-                      <a:round/>
-                      <a:headEnd type="none" w="med" len="med"/>
-                      <a:tailEnd type="none" w="med" len="med"/>
-                    </a:lnL>
-                    <a:lnR w="6350" cap="flat" cmpd="sng" algn="ctr">
-                      <a:solidFill>
-                        <a:srgbClr val="E3E8E9"/>
-                      </a:solidFill>
-                      <a:prstDash val="solid"/>
-                      <a:round/>
-                      <a:headEnd type="none" w="med" len="med"/>
-                      <a:tailEnd type="none" w="med" len="med"/>
-                    </a:lnR>
-                    <a:lnT w="6350" cap="flat" cmpd="sng" algn="ctr">
-                      <a:solidFill>
-                        <a:srgbClr val="E3E8E9"/>
-                      </a:solidFill>
-                      <a:prstDash val="solid"/>
-                      <a:round/>
-                      <a:headEnd type="none" w="med" len="med"/>
-                      <a:tailEnd type="none" w="med" len="med"/>
-                    </a:lnT>
-                    <a:lnB w="6350" cap="flat" cmpd="sng" algn="ctr">
-                      <a:solidFill>
-                        <a:srgbClr val="E3E8E9"/>
-                      </a:solidFill>
-                      <a:prstDash val="solid"/>
-                      <a:round/>
-                      <a:headEnd type="none" w="med" len="med"/>
-                      <a:tailEnd type="none" w="med" len="med"/>
-                    </a:lnB>
-                    <a:solidFill>
-                      <a:srgbClr val="F0F4F5"/>
-                    </a:solidFill>
-                  </a:tcPr>
-                </a:tc>
-              </a:tr>
-              <a:tr h="374904">
-                <a:tc>
-                  <a:txBody>
-                    <a:bodyPr/>
-                    <a:lstStyle/>
-                    <a:p>
-                      <a:pPr indent="0" marL="0">
-                        <a:buNone/>
-                      </a:pPr>
-                      <a:endParaRPr lang="en-US" sz="1200" dirty="0">
-                        <a:latin typeface="Calibri" charset="0"/>
-                        <a:ea typeface="Calibri" charset="0"/>
-                        <a:cs typeface="Calibri" charset="0"/>
-                      </a:endParaRPr>
-                    </a:p>
-                  </a:txBody>
-                  <a:tcPr marL="91440" marR="91440" marT="45720" marB="45720" anchor="ctr">
-                    <a:lnL w="6350" cap="flat" cmpd="sng" algn="ctr">
-                      <a:solidFill>
-                        <a:srgbClr val="E3E8E9"/>
-                      </a:solidFill>
-                      <a:prstDash val="solid"/>
-                      <a:round/>
-                      <a:headEnd type="none" w="med" len="med"/>
-                      <a:tailEnd type="none" w="med" len="med"/>
-                    </a:lnL>
-                    <a:lnR w="6350" cap="flat" cmpd="sng" algn="ctr">
-                      <a:solidFill>
-                        <a:srgbClr val="E3E8E9"/>
-                      </a:solidFill>
-                      <a:prstDash val="solid"/>
-                      <a:round/>
-                      <a:headEnd type="none" w="med" len="med"/>
-                      <a:tailEnd type="none" w="med" len="med"/>
-                    </a:lnR>
-                    <a:lnT w="6350" cap="flat" cmpd="sng" algn="ctr">
-                      <a:solidFill>
-                        <a:srgbClr val="E3E8E9"/>
-                      </a:solidFill>
-                      <a:prstDash val="solid"/>
-                      <a:round/>
-                      <a:headEnd type="none" w="med" len="med"/>
-                      <a:tailEnd type="none" w="med" len="med"/>
-                    </a:lnT>
-                    <a:lnB w="6350" cap="flat" cmpd="sng" algn="ctr">
-                      <a:solidFill>
-                        <a:srgbClr val="E3E8E9"/>
-                      </a:solidFill>
-                      <a:prstDash val="solid"/>
-                      <a:round/>
-                      <a:headEnd type="none" w="med" len="med"/>
-                      <a:tailEnd type="none" w="med" len="med"/>
-                    </a:lnB>
-                    <a:solidFill>
-                      <a:srgbClr val="DCE8E2"/>
-                    </a:solidFill>
-                  </a:tcPr>
-                </a:tc>
-                <a:tc>
-                  <a:txBody>
-                    <a:bodyPr/>
-                    <a:lstStyle/>
-                    <a:p>
-                      <a:pPr indent="0" marL="0">
-                        <a:buNone/>
-                      </a:pPr>
-                      <a:r>
-                        <a:rPr lang="en-US" sz="950" i="1" dirty="0">
-                          <a:solidFill>
-                            <a:srgbClr val="145C68"/>
-                          </a:solidFill>
-                          <a:latin typeface="Calibri" pitchFamily="34" charset="0"/>
-                          <a:ea typeface="Calibri" pitchFamily="34" charset="-122"/>
-                          <a:cs typeface="Calibri" pitchFamily="34" charset="-120"/>
-                        </a:rPr>
-                        <a:t>Outras 5 áreas (menor valor individual)</a:t>
-                      </a:r>
-                      <a:endParaRPr lang="en-US" sz="950" dirty="0">
-                        <a:latin typeface="Calibri" charset="0"/>
-                        <a:ea typeface="Calibri" charset="0"/>
-                        <a:cs typeface="Calibri" charset="0"/>
-                      </a:endParaRPr>
-                    </a:p>
-                  </a:txBody>
-                  <a:tcPr marL="91440" marR="91440" marT="45720" marB="45720" anchor="ctr">
-                    <a:lnL w="6350" cap="flat" cmpd="sng" algn="ctr">
-                      <a:solidFill>
-                        <a:srgbClr val="E3E8E9"/>
-                      </a:solidFill>
-                      <a:prstDash val="solid"/>
-                      <a:round/>
-                      <a:headEnd type="none" w="med" len="med"/>
-                      <a:tailEnd type="none" w="med" len="med"/>
-                    </a:lnL>
-                    <a:lnR w="6350" cap="flat" cmpd="sng" algn="ctr">
-                      <a:solidFill>
-                        <a:srgbClr val="E3E8E9"/>
-                      </a:solidFill>
-                      <a:prstDash val="solid"/>
-                      <a:round/>
-                      <a:headEnd type="none" w="med" len="med"/>
-                      <a:tailEnd type="none" w="med" len="med"/>
-                    </a:lnR>
-                    <a:lnT w="6350" cap="flat" cmpd="sng" algn="ctr">
-                      <a:solidFill>
-                        <a:srgbClr val="E3E8E9"/>
-                      </a:solidFill>
-                      <a:prstDash val="solid"/>
-                      <a:round/>
-                      <a:headEnd type="none" w="med" len="med"/>
-                      <a:tailEnd type="none" w="med" len="med"/>
-                    </a:lnT>
-                    <a:lnB w="6350" cap="flat" cmpd="sng" algn="ctr">
-                      <a:solidFill>
-                        <a:srgbClr val="E3E8E9"/>
-                      </a:solidFill>
-                      <a:prstDash val="solid"/>
-                      <a:round/>
-                      <a:headEnd type="none" w="med" len="med"/>
-                      <a:tailEnd type="none" w="med" len="med"/>
-                    </a:lnB>
-                    <a:solidFill>
-                      <a:srgbClr val="DCE8E2"/>
-                    </a:solidFill>
-                  </a:tcPr>
-                </a:tc>
-                <a:tc>
-                  <a:txBody>
-                    <a:bodyPr/>
-                    <a:lstStyle/>
-                    <a:p>
-                      <a:pPr algn="r" indent="0" marL="0">
-                        <a:buNone/>
-                      </a:pPr>
-                      <a:r>
-                        <a:rPr lang="en-US" sz="1050" b="1" i="1" dirty="0">
-                          <a:solidFill>
-                            <a:srgbClr val="0B2A3D"/>
-                          </a:solidFill>
-                          <a:latin typeface="Calibri" pitchFamily="34" charset="0"/>
-                          <a:ea typeface="Calibri" pitchFamily="34" charset="-122"/>
-                          <a:cs typeface="Calibri" pitchFamily="34" charset="-120"/>
-                        </a:rPr>
-                        <a:t>US$ 5,1 mi</a:t>
-                      </a:r>
-                      <a:endParaRPr lang="en-US" sz="1050" dirty="0">
-                        <a:latin typeface="Calibri" charset="0"/>
-                        <a:ea typeface="Calibri" charset="0"/>
-                        <a:cs typeface="Calibri" charset="0"/>
-                      </a:endParaRPr>
-                    </a:p>
-                  </a:txBody>
-                  <a:tcPr marL="91440" marR="91440" marT="45720" marB="45720" anchor="ctr">
-                    <a:lnL w="6350" cap="flat" cmpd="sng" algn="ctr">
-                      <a:solidFill>
-                        <a:srgbClr val="E3E8E9"/>
-                      </a:solidFill>
-                      <a:prstDash val="solid"/>
-                      <a:round/>
-                      <a:headEnd type="none" w="med" len="med"/>
-                      <a:tailEnd type="none" w="med" len="med"/>
-                    </a:lnL>
-                    <a:lnR w="6350" cap="flat" cmpd="sng" algn="ctr">
-                      <a:solidFill>
-                        <a:srgbClr val="E3E8E9"/>
-                      </a:solidFill>
-                      <a:prstDash val="solid"/>
-                      <a:round/>
-                      <a:headEnd type="none" w="med" len="med"/>
-                      <a:tailEnd type="none" w="med" len="med"/>
-                    </a:lnR>
-                    <a:lnT w="6350" cap="flat" cmpd="sng" algn="ctr">
-                      <a:solidFill>
-                        <a:srgbClr val="E3E8E9"/>
-                      </a:solidFill>
-                      <a:prstDash val="solid"/>
-                      <a:round/>
-                      <a:headEnd type="none" w="med" len="med"/>
-                      <a:tailEnd type="none" w="med" len="med"/>
-                    </a:lnT>
-                    <a:lnB w="6350" cap="flat" cmpd="sng" algn="ctr">
-                      <a:solidFill>
-                        <a:srgbClr val="E3E8E9"/>
-                      </a:solidFill>
-                      <a:prstDash val="solid"/>
-                      <a:round/>
-                      <a:headEnd type="none" w="med" len="med"/>
-                      <a:tailEnd type="none" w="med" len="med"/>
-                    </a:lnB>
-                    <a:solidFill>
-                      <a:srgbClr val="DCE8E2"/>
-                    </a:solidFill>
-                  </a:tcPr>
-                </a:tc>
-                <a:tc>
-                  <a:txBody>
-                    <a:bodyPr/>
-                    <a:lstStyle/>
-                    <a:p>
-                      <a:pPr algn="r" indent="0" marL="0">
-                        <a:buNone/>
-                      </a:pPr>
-                      <a:r>
-                        <a:rPr lang="en-US" sz="950" i="1" dirty="0">
-                          <a:solidFill>
-                            <a:srgbClr val="145C68"/>
-                          </a:solidFill>
-                          <a:latin typeface="Calibri" pitchFamily="34" charset="0"/>
-                          <a:ea typeface="Calibri" pitchFamily="34" charset="-122"/>
-                          <a:cs typeface="Calibri" pitchFamily="34" charset="-120"/>
-                        </a:rPr>
-                        <a:t>4,0%</a:t>
-                      </a:r>
-                      <a:endParaRPr lang="en-US" sz="950" dirty="0">
-                        <a:latin typeface="Calibri" charset="0"/>
-                        <a:ea typeface="Calibri" charset="0"/>
-                        <a:cs typeface="Calibri" charset="0"/>
-                      </a:endParaRPr>
-                    </a:p>
-                  </a:txBody>
-                  <a:tcPr marL="91440" marR="91440" marT="45720" marB="45720" anchor="ctr">
-                    <a:lnL w="6350" cap="flat" cmpd="sng" algn="ctr">
-                      <a:solidFill>
-                        <a:srgbClr val="E3E8E9"/>
-                      </a:solidFill>
-                      <a:prstDash val="solid"/>
-                      <a:round/>
-                      <a:headEnd type="none" w="med" len="med"/>
-                      <a:tailEnd type="none" w="med" len="med"/>
-                    </a:lnL>
-                    <a:lnR w="6350" cap="flat" cmpd="sng" algn="ctr">
-                      <a:solidFill>
-                        <a:srgbClr val="E3E8E9"/>
-                      </a:solidFill>
-                      <a:prstDash val="solid"/>
-                      <a:round/>
-                      <a:headEnd type="none" w="med" len="med"/>
-                      <a:tailEnd type="none" w="med" len="med"/>
-                    </a:lnR>
-                    <a:lnT w="6350" cap="flat" cmpd="sng" algn="ctr">
-                      <a:solidFill>
-                        <a:srgbClr val="E3E8E9"/>
-                      </a:solidFill>
-                      <a:prstDash val="solid"/>
-                      <a:round/>
-                      <a:headEnd type="none" w="med" len="med"/>
-                      <a:tailEnd type="none" w="med" len="med"/>
-                    </a:lnT>
-                    <a:lnB w="6350" cap="flat" cmpd="sng" algn="ctr">
-                      <a:solidFill>
-                        <a:srgbClr val="E3E8E9"/>
-                      </a:solidFill>
-                      <a:prstDash val="solid"/>
-                      <a:round/>
-                      <a:headEnd type="none" w="med" len="med"/>
-                      <a:tailEnd type="none" w="med" len="med"/>
-                    </a:lnB>
-                    <a:solidFill>
-                      <a:srgbClr val="DCE8E2"/>
                     </a:solidFill>
                   </a:tcPr>
                 </a:tc>
@@ -7346,7 +8581,7 @@
                 <a:ea typeface="Calibri" pitchFamily="34" charset="-122"/>
                 <a:cs typeface="Calibri" pitchFamily="34" charset="-120"/>
               </a:rPr>
-              <a:t>Metodologia: soma de Serviço + Material (Jan–Dez) para CAPEX com status 'Contar'/'TA', agrupado por Área em todos os 7 ativos. Total: US$ 127,7 mi.</a:t>
+              <a:t>Metodologia: Cost Allocation = CAPEX, status 'Contar'/'TA', agrupado por escopo em cada ativo. Soma do top 10: US$ 50,2 mi (39,3% do CAPEX total).</a:t>
             </a:r>
             <a:endParaRPr lang="en-US" sz="850" dirty="0"/>
           </a:p>

--- a/PRIO_Top_CAPEX_OPEX_Despriorizados_2027.pptx
+++ b/PRIO_Top_CAPEX_OPEX_Despriorizados_2027.pptx
@@ -8782,7 +8782,7 @@
                 <a:ea typeface="Cambria" pitchFamily="34" charset="-122"/>
                 <a:cs typeface="Cambria" pitchFamily="34" charset="-120"/>
               </a:rPr>
-              <a:t>Top 5 OPEX</a:t>
+              <a:t>Top 10 OPEX</a:t>
             </a:r>
             <a:endParaRPr lang="en-US" sz="2400" dirty="0"/>
           </a:p>
@@ -8821,7 +8821,7 @@
                 <a:ea typeface="Calibri" pitchFamily="34" charset="-122"/>
                 <a:cs typeface="Calibri" pitchFamily="34" charset="-120"/>
               </a:rPr>
-              <a:t>Ano 2027 · maiores escopos individuais de OPEX (status 'Contar' + 'TA'), por ativo</a:t>
+              <a:t>Ano 2027 · maiores escopos de OPEX (status 'Contar' + 'TA') nas áreas priorizadas: Manutenção, Suporte Técnico, Confiabilidade, Integridade, Naval, Construção e Projetos</a:t>
             </a:r>
             <a:endParaRPr lang="en-US" sz="1250" dirty="0"/>
           </a:p>
@@ -8850,13 +8850,82 @@
             <a:tbl>
               <a:tblPr/>
               <a:tblGrid>
-                <a:gridCol w="3599078"/>
-                <a:gridCol w="1912010"/>
-                <a:gridCol w="2249424"/>
+                <a:gridCol w="562356"/>
+                <a:gridCol w="3374136"/>
+                <a:gridCol w="1687068"/>
+                <a:gridCol w="2136953"/>
                 <a:gridCol w="1912010"/>
                 <a:gridCol w="1574597"/>
               </a:tblGrid>
-              <a:tr h="502920">
+              <a:tr h="457200">
+                <a:tc>
+                  <a:txBody>
+                    <a:bodyPr/>
+                    <a:lstStyle/>
+                    <a:p>
+                      <a:pPr algn="ctr" indent="0" marL="0">
+                        <a:buNone/>
+                      </a:pPr>
+                      <a:r>
+                        <a:rPr lang="en-US" sz="1000" b="1" dirty="0">
+                          <a:solidFill>
+                            <a:srgbClr val="FFFFFF"/>
+                          </a:solidFill>
+                          <a:latin typeface="Calibri" pitchFamily="34" charset="0"/>
+                          <a:ea typeface="Calibri" pitchFamily="34" charset="-122"/>
+                          <a:cs typeface="Calibri" pitchFamily="34" charset="-120"/>
+                        </a:rPr>
+                        <a:t>#</a:t>
+                      </a:r>
+                      <a:endParaRPr lang="en-US" sz="1000" dirty="0">
+                        <a:latin typeface="Calibri" charset="0"/>
+                        <a:ea typeface="Calibri" charset="0"/>
+                        <a:cs typeface="Calibri" charset="0"/>
+                      </a:endParaRPr>
+                    </a:p>
+                  </a:txBody>
+                  <a:tcPr marL="91440" marR="91440" marT="45720" marB="45720" anchor="ctr">
+                    <a:lnL w="6350" cap="flat" cmpd="sng" algn="ctr">
+                      <a:solidFill>
+                        <a:srgbClr val="E3E8E9"/>
+                      </a:solidFill>
+                      <a:prstDash val="solid"/>
+                      <a:round/>
+                      <a:headEnd type="none" w="med" len="med"/>
+                      <a:tailEnd type="none" w="med" len="med"/>
+                    </a:lnL>
+                    <a:lnR w="6350" cap="flat" cmpd="sng" algn="ctr">
+                      <a:solidFill>
+                        <a:srgbClr val="E3E8E9"/>
+                      </a:solidFill>
+                      <a:prstDash val="solid"/>
+                      <a:round/>
+                      <a:headEnd type="none" w="med" len="med"/>
+                      <a:tailEnd type="none" w="med" len="med"/>
+                    </a:lnR>
+                    <a:lnT w="6350" cap="flat" cmpd="sng" algn="ctr">
+                      <a:solidFill>
+                        <a:srgbClr val="E3E8E9"/>
+                      </a:solidFill>
+                      <a:prstDash val="solid"/>
+                      <a:round/>
+                      <a:headEnd type="none" w="med" len="med"/>
+                      <a:tailEnd type="none" w="med" len="med"/>
+                    </a:lnT>
+                    <a:lnB w="6350" cap="flat" cmpd="sng" algn="ctr">
+                      <a:solidFill>
+                        <a:srgbClr val="E3E8E9"/>
+                      </a:solidFill>
+                      <a:prstDash val="solid"/>
+                      <a:round/>
+                      <a:headEnd type="none" w="med" len="med"/>
+                      <a:tailEnd type="none" w="med" len="med"/>
+                    </a:lnB>
+                    <a:solidFill>
+                      <a:srgbClr val="145C68"/>
+                    </a:solidFill>
+                  </a:tcPr>
+                </a:tc>
                 <a:tc>
                   <a:txBody>
                     <a:bodyPr/>
@@ -8934,6 +9003,210 @@
                         <a:buNone/>
                       </a:pPr>
                       <a:r>
+                        <a:rPr lang="en-US" sz="950" b="1" dirty="0">
+                          <a:solidFill>
+                            <a:srgbClr val="FFFFFF"/>
+                          </a:solidFill>
+                          <a:latin typeface="Calibri" pitchFamily="34" charset="0"/>
+                          <a:ea typeface="Calibri" pitchFamily="34" charset="-122"/>
+                          <a:cs typeface="Calibri" pitchFamily="34" charset="-120"/>
+                        </a:rPr>
+                        <a:t>ATIVO</a:t>
+                      </a:r>
+                      <a:endParaRPr lang="en-US" sz="950" dirty="0">
+                        <a:latin typeface="Calibri" charset="0"/>
+                        <a:ea typeface="Calibri" charset="0"/>
+                        <a:cs typeface="Calibri" charset="0"/>
+                      </a:endParaRPr>
+                    </a:p>
+                  </a:txBody>
+                  <a:tcPr marL="91440" marR="91440" marT="45720" marB="45720" anchor="ctr">
+                    <a:lnL w="6350" cap="flat" cmpd="sng" algn="ctr">
+                      <a:solidFill>
+                        <a:srgbClr val="E3E8E9"/>
+                      </a:solidFill>
+                      <a:prstDash val="solid"/>
+                      <a:round/>
+                      <a:headEnd type="none" w="med" len="med"/>
+                      <a:tailEnd type="none" w="med" len="med"/>
+                    </a:lnL>
+                    <a:lnR w="6350" cap="flat" cmpd="sng" algn="ctr">
+                      <a:solidFill>
+                        <a:srgbClr val="E3E8E9"/>
+                      </a:solidFill>
+                      <a:prstDash val="solid"/>
+                      <a:round/>
+                      <a:headEnd type="none" w="med" len="med"/>
+                      <a:tailEnd type="none" w="med" len="med"/>
+                    </a:lnR>
+                    <a:lnT w="6350" cap="flat" cmpd="sng" algn="ctr">
+                      <a:solidFill>
+                        <a:srgbClr val="E3E8E9"/>
+                      </a:solidFill>
+                      <a:prstDash val="solid"/>
+                      <a:round/>
+                      <a:headEnd type="none" w="med" len="med"/>
+                      <a:tailEnd type="none" w="med" len="med"/>
+                    </a:lnT>
+                    <a:lnB w="6350" cap="flat" cmpd="sng" algn="ctr">
+                      <a:solidFill>
+                        <a:srgbClr val="E3E8E9"/>
+                      </a:solidFill>
+                      <a:prstDash val="solid"/>
+                      <a:round/>
+                      <a:headEnd type="none" w="med" len="med"/>
+                      <a:tailEnd type="none" w="med" len="med"/>
+                    </a:lnB>
+                    <a:solidFill>
+                      <a:srgbClr val="145C68"/>
+                    </a:solidFill>
+                  </a:tcPr>
+                </a:tc>
+                <a:tc>
+                  <a:txBody>
+                    <a:bodyPr/>
+                    <a:lstStyle/>
+                    <a:p>
+                      <a:pPr indent="0" marL="0">
+                        <a:buNone/>
+                      </a:pPr>
+                      <a:r>
+                        <a:rPr lang="en-US" sz="950" b="1" dirty="0">
+                          <a:solidFill>
+                            <a:srgbClr val="FFFFFF"/>
+                          </a:solidFill>
+                          <a:latin typeface="Calibri" pitchFamily="34" charset="0"/>
+                          <a:ea typeface="Calibri" pitchFamily="34" charset="-122"/>
+                          <a:cs typeface="Calibri" pitchFamily="34" charset="-120"/>
+                        </a:rPr>
+                        <a:t>ÁREA REQUISITANTE</a:t>
+                      </a:r>
+                      <a:endParaRPr lang="en-US" sz="950" dirty="0">
+                        <a:latin typeface="Calibri" charset="0"/>
+                        <a:ea typeface="Calibri" charset="0"/>
+                        <a:cs typeface="Calibri" charset="0"/>
+                      </a:endParaRPr>
+                    </a:p>
+                  </a:txBody>
+                  <a:tcPr marL="91440" marR="91440" marT="45720" marB="45720" anchor="ctr">
+                    <a:lnL w="6350" cap="flat" cmpd="sng" algn="ctr">
+                      <a:solidFill>
+                        <a:srgbClr val="E3E8E9"/>
+                      </a:solidFill>
+                      <a:prstDash val="solid"/>
+                      <a:round/>
+                      <a:headEnd type="none" w="med" len="med"/>
+                      <a:tailEnd type="none" w="med" len="med"/>
+                    </a:lnL>
+                    <a:lnR w="6350" cap="flat" cmpd="sng" algn="ctr">
+                      <a:solidFill>
+                        <a:srgbClr val="E3E8E9"/>
+                      </a:solidFill>
+                      <a:prstDash val="solid"/>
+                      <a:round/>
+                      <a:headEnd type="none" w="med" len="med"/>
+                      <a:tailEnd type="none" w="med" len="med"/>
+                    </a:lnR>
+                    <a:lnT w="6350" cap="flat" cmpd="sng" algn="ctr">
+                      <a:solidFill>
+                        <a:srgbClr val="E3E8E9"/>
+                      </a:solidFill>
+                      <a:prstDash val="solid"/>
+                      <a:round/>
+                      <a:headEnd type="none" w="med" len="med"/>
+                      <a:tailEnd type="none" w="med" len="med"/>
+                    </a:lnT>
+                    <a:lnB w="6350" cap="flat" cmpd="sng" algn="ctr">
+                      <a:solidFill>
+                        <a:srgbClr val="E3E8E9"/>
+                      </a:solidFill>
+                      <a:prstDash val="solid"/>
+                      <a:round/>
+                      <a:headEnd type="none" w="med" len="med"/>
+                      <a:tailEnd type="none" w="med" len="med"/>
+                    </a:lnB>
+                    <a:solidFill>
+                      <a:srgbClr val="145C68"/>
+                    </a:solidFill>
+                  </a:tcPr>
+                </a:tc>
+                <a:tc>
+                  <a:txBody>
+                    <a:bodyPr/>
+                    <a:lstStyle/>
+                    <a:p>
+                      <a:pPr indent="0" marL="0">
+                        <a:buNone/>
+                      </a:pPr>
+                      <a:r>
+                        <a:rPr lang="en-US" sz="900" b="1" dirty="0">
+                          <a:solidFill>
+                            <a:srgbClr val="FFFFFF"/>
+                          </a:solidFill>
+                          <a:latin typeface="Calibri" pitchFamily="34" charset="0"/>
+                          <a:ea typeface="Calibri" pitchFamily="34" charset="-122"/>
+                          <a:cs typeface="Calibri" pitchFamily="34" charset="-120"/>
+                        </a:rPr>
+                        <a:t>CATEGORIA</a:t>
+                      </a:r>
+                      <a:endParaRPr lang="en-US" sz="900" dirty="0">
+                        <a:latin typeface="Calibri" charset="0"/>
+                        <a:ea typeface="Calibri" charset="0"/>
+                        <a:cs typeface="Calibri" charset="0"/>
+                      </a:endParaRPr>
+                    </a:p>
+                  </a:txBody>
+                  <a:tcPr marL="91440" marR="91440" marT="45720" marB="45720" anchor="ctr">
+                    <a:lnL w="6350" cap="flat" cmpd="sng" algn="ctr">
+                      <a:solidFill>
+                        <a:srgbClr val="E3E8E9"/>
+                      </a:solidFill>
+                      <a:prstDash val="solid"/>
+                      <a:round/>
+                      <a:headEnd type="none" w="med" len="med"/>
+                      <a:tailEnd type="none" w="med" len="med"/>
+                    </a:lnL>
+                    <a:lnR w="6350" cap="flat" cmpd="sng" algn="ctr">
+                      <a:solidFill>
+                        <a:srgbClr val="E3E8E9"/>
+                      </a:solidFill>
+                      <a:prstDash val="solid"/>
+                      <a:round/>
+                      <a:headEnd type="none" w="med" len="med"/>
+                      <a:tailEnd type="none" w="med" len="med"/>
+                    </a:lnR>
+                    <a:lnT w="6350" cap="flat" cmpd="sng" algn="ctr">
+                      <a:solidFill>
+                        <a:srgbClr val="E3E8E9"/>
+                      </a:solidFill>
+                      <a:prstDash val="solid"/>
+                      <a:round/>
+                      <a:headEnd type="none" w="med" len="med"/>
+                      <a:tailEnd type="none" w="med" len="med"/>
+                    </a:lnT>
+                    <a:lnB w="6350" cap="flat" cmpd="sng" algn="ctr">
+                      <a:solidFill>
+                        <a:srgbClr val="E3E8E9"/>
+                      </a:solidFill>
+                      <a:prstDash val="solid"/>
+                      <a:round/>
+                      <a:headEnd type="none" w="med" len="med"/>
+                      <a:tailEnd type="none" w="med" len="med"/>
+                    </a:lnB>
+                    <a:solidFill>
+                      <a:srgbClr val="145C68"/>
+                    </a:solidFill>
+                  </a:tcPr>
+                </a:tc>
+                <a:tc>
+                  <a:txBody>
+                    <a:bodyPr/>
+                    <a:lstStyle/>
+                    <a:p>
+                      <a:pPr algn="r" indent="0" marL="0">
+                        <a:buNone/>
+                      </a:pPr>
+                      <a:r>
                         <a:rPr lang="en-US" sz="1000" b="1" dirty="0">
                           <a:solidFill>
                             <a:srgbClr val="FFFFFF"/>
@@ -8942,7 +9215,7 @@
                           <a:ea typeface="Calibri" pitchFamily="34" charset="-122"/>
                           <a:cs typeface="Calibri" pitchFamily="34" charset="-120"/>
                         </a:rPr>
-                        <a:t>ATIVO</a:t>
+                        <a:t>VALOR TOTAL</a:t>
                       </a:r>
                       <a:endParaRPr lang="en-US" sz="1000" dirty="0">
                         <a:latin typeface="Calibri" charset="0"/>
@@ -8993,6 +9266,76 @@
                     </a:solidFill>
                   </a:tcPr>
                 </a:tc>
+              </a:tr>
+              <a:tr h="457200">
+                <a:tc>
+                  <a:txBody>
+                    <a:bodyPr/>
+                    <a:lstStyle/>
+                    <a:p>
+                      <a:pPr algn="ctr" indent="0" marL="0">
+                        <a:buNone/>
+                      </a:pPr>
+                      <a:r>
+                        <a:rPr lang="en-US" sz="950" dirty="0">
+                          <a:solidFill>
+                            <a:srgbClr val="5B6B73"/>
+                          </a:solidFill>
+                          <a:latin typeface="Calibri" pitchFamily="34" charset="0"/>
+                          <a:ea typeface="Calibri" pitchFamily="34" charset="-122"/>
+                          <a:cs typeface="Calibri" pitchFamily="34" charset="-120"/>
+                        </a:rPr>
+                        <a:t>1</a:t>
+                      </a:r>
+                      <a:endParaRPr lang="en-US" sz="950" dirty="0">
+                        <a:latin typeface="Calibri" charset="0"/>
+                        <a:ea typeface="Calibri" charset="0"/>
+                        <a:cs typeface="Calibri" charset="0"/>
+                      </a:endParaRPr>
+                    </a:p>
+                  </a:txBody>
+                  <a:tcPr marL="91440" marR="91440" marT="45720" marB="45720" anchor="ctr">
+                    <a:lnL w="6350" cap="flat" cmpd="sng" algn="ctr">
+                      <a:solidFill>
+                        <a:srgbClr val="E3E8E9"/>
+                      </a:solidFill>
+                      <a:prstDash val="solid"/>
+                      <a:round/>
+                      <a:headEnd type="none" w="med" len="med"/>
+                      <a:tailEnd type="none" w="med" len="med"/>
+                    </a:lnL>
+                    <a:lnR w="6350" cap="flat" cmpd="sng" algn="ctr">
+                      <a:solidFill>
+                        <a:srgbClr val="E3E8E9"/>
+                      </a:solidFill>
+                      <a:prstDash val="solid"/>
+                      <a:round/>
+                      <a:headEnd type="none" w="med" len="med"/>
+                      <a:tailEnd type="none" w="med" len="med"/>
+                    </a:lnR>
+                    <a:lnT w="6350" cap="flat" cmpd="sng" algn="ctr">
+                      <a:solidFill>
+                        <a:srgbClr val="E3E8E9"/>
+                      </a:solidFill>
+                      <a:prstDash val="solid"/>
+                      <a:round/>
+                      <a:headEnd type="none" w="med" len="med"/>
+                      <a:tailEnd type="none" w="med" len="med"/>
+                    </a:lnT>
+                    <a:lnB w="6350" cap="flat" cmpd="sng" algn="ctr">
+                      <a:solidFill>
+                        <a:srgbClr val="E3E8E9"/>
+                      </a:solidFill>
+                      <a:prstDash val="solid"/>
+                      <a:round/>
+                      <a:headEnd type="none" w="med" len="med"/>
+                      <a:tailEnd type="none" w="med" len="med"/>
+                    </a:lnB>
+                    <a:solidFill>
+                      <a:srgbClr val="FFFFFF"/>
+                    </a:solidFill>
+                  </a:tcPr>
+                </a:tc>
                 <a:tc>
                   <a:txBody>
                     <a:bodyPr/>
@@ -9002,62 +9345,62 @@
                         <a:buNone/>
                       </a:pPr>
                       <a:r>
-                        <a:rPr lang="en-US" sz="1000" b="1" dirty="0">
-                          <a:solidFill>
-                            <a:srgbClr val="FFFFFF"/>
-                          </a:solidFill>
-                          <a:latin typeface="Calibri" pitchFamily="34" charset="0"/>
-                          <a:ea typeface="Calibri" pitchFamily="34" charset="-122"/>
-                          <a:cs typeface="Calibri" pitchFamily="34" charset="-120"/>
-                        </a:rPr>
-                        <a:t>ÁREA REQUISITANTE</a:t>
-                      </a:r>
-                      <a:endParaRPr lang="en-US" sz="1000" dirty="0">
-                        <a:latin typeface="Calibri" charset="0"/>
-                        <a:ea typeface="Calibri" charset="0"/>
-                        <a:cs typeface="Calibri" charset="0"/>
-                      </a:endParaRPr>
-                    </a:p>
-                  </a:txBody>
-                  <a:tcPr marL="91440" marR="91440" marT="45720" marB="45720" anchor="ctr">
-                    <a:lnL w="6350" cap="flat" cmpd="sng" algn="ctr">
-                      <a:solidFill>
-                        <a:srgbClr val="E3E8E9"/>
-                      </a:solidFill>
-                      <a:prstDash val="solid"/>
-                      <a:round/>
-                      <a:headEnd type="none" w="med" len="med"/>
-                      <a:tailEnd type="none" w="med" len="med"/>
-                    </a:lnL>
-                    <a:lnR w="6350" cap="flat" cmpd="sng" algn="ctr">
-                      <a:solidFill>
-                        <a:srgbClr val="E3E8E9"/>
-                      </a:solidFill>
-                      <a:prstDash val="solid"/>
-                      <a:round/>
-                      <a:headEnd type="none" w="med" len="med"/>
-                      <a:tailEnd type="none" w="med" len="med"/>
-                    </a:lnR>
-                    <a:lnT w="6350" cap="flat" cmpd="sng" algn="ctr">
-                      <a:solidFill>
-                        <a:srgbClr val="E3E8E9"/>
-                      </a:solidFill>
-                      <a:prstDash val="solid"/>
-                      <a:round/>
-                      <a:headEnd type="none" w="med" len="med"/>
-                      <a:tailEnd type="none" w="med" len="med"/>
-                    </a:lnT>
-                    <a:lnB w="6350" cap="flat" cmpd="sng" algn="ctr">
-                      <a:solidFill>
-                        <a:srgbClr val="E3E8E9"/>
-                      </a:solidFill>
-                      <a:prstDash val="solid"/>
-                      <a:round/>
-                      <a:headEnd type="none" w="med" len="med"/>
-                      <a:tailEnd type="none" w="med" len="med"/>
-                    </a:lnB>
-                    <a:solidFill>
-                      <a:srgbClr val="145C68"/>
+                        <a:rPr lang="en-US" sz="970" dirty="0">
+                          <a:solidFill>
+                            <a:srgbClr val="1C2B33"/>
+                          </a:solidFill>
+                          <a:latin typeface="Calibri" pitchFamily="34" charset="0"/>
+                          <a:ea typeface="Calibri" pitchFamily="34" charset="-122"/>
+                          <a:cs typeface="Calibri" pitchFamily="34" charset="-120"/>
+                        </a:rPr>
+                        <a:t>Time de Construção - Pintura</a:t>
+                      </a:r>
+                      <a:endParaRPr lang="en-US" sz="970" dirty="0">
+                        <a:latin typeface="Calibri" charset="0"/>
+                        <a:ea typeface="Calibri" charset="0"/>
+                        <a:cs typeface="Calibri" charset="0"/>
+                      </a:endParaRPr>
+                    </a:p>
+                  </a:txBody>
+                  <a:tcPr marL="91440" marR="91440" marT="45720" marB="45720" anchor="ctr">
+                    <a:lnL w="6350" cap="flat" cmpd="sng" algn="ctr">
+                      <a:solidFill>
+                        <a:srgbClr val="E3E8E9"/>
+                      </a:solidFill>
+                      <a:prstDash val="solid"/>
+                      <a:round/>
+                      <a:headEnd type="none" w="med" len="med"/>
+                      <a:tailEnd type="none" w="med" len="med"/>
+                    </a:lnL>
+                    <a:lnR w="6350" cap="flat" cmpd="sng" algn="ctr">
+                      <a:solidFill>
+                        <a:srgbClr val="E3E8E9"/>
+                      </a:solidFill>
+                      <a:prstDash val="solid"/>
+                      <a:round/>
+                      <a:headEnd type="none" w="med" len="med"/>
+                      <a:tailEnd type="none" w="med" len="med"/>
+                    </a:lnR>
+                    <a:lnT w="6350" cap="flat" cmpd="sng" algn="ctr">
+                      <a:solidFill>
+                        <a:srgbClr val="E3E8E9"/>
+                      </a:solidFill>
+                      <a:prstDash val="solid"/>
+                      <a:round/>
+                      <a:headEnd type="none" w="med" len="med"/>
+                      <a:tailEnd type="none" w="med" len="med"/>
+                    </a:lnT>
+                    <a:lnB w="6350" cap="flat" cmpd="sng" algn="ctr">
+                      <a:solidFill>
+                        <a:srgbClr val="E3E8E9"/>
+                      </a:solidFill>
+                      <a:prstDash val="solid"/>
+                      <a:round/>
+                      <a:headEnd type="none" w="med" len="med"/>
+                      <a:tailEnd type="none" w="med" len="med"/>
+                    </a:lnB>
+                    <a:solidFill>
+                      <a:srgbClr val="FFFFFF"/>
                     </a:solidFill>
                   </a:tcPr>
                 </a:tc>
@@ -9070,62 +9413,198 @@
                         <a:buNone/>
                       </a:pPr>
                       <a:r>
-                        <a:rPr lang="en-US" sz="1000" b="1" dirty="0">
-                          <a:solidFill>
-                            <a:srgbClr val="FFFFFF"/>
-                          </a:solidFill>
-                          <a:latin typeface="Calibri" pitchFamily="34" charset="0"/>
-                          <a:ea typeface="Calibri" pitchFamily="34" charset="-122"/>
-                          <a:cs typeface="Calibri" pitchFamily="34" charset="-120"/>
-                        </a:rPr>
-                        <a:t>CATEGORIA</a:t>
-                      </a:r>
-                      <a:endParaRPr lang="en-US" sz="1000" dirty="0">
-                        <a:latin typeface="Calibri" charset="0"/>
-                        <a:ea typeface="Calibri" charset="0"/>
-                        <a:cs typeface="Calibri" charset="0"/>
-                      </a:endParaRPr>
-                    </a:p>
-                  </a:txBody>
-                  <a:tcPr marL="91440" marR="91440" marT="45720" marB="45720" anchor="ctr">
-                    <a:lnL w="6350" cap="flat" cmpd="sng" algn="ctr">
-                      <a:solidFill>
-                        <a:srgbClr val="E3E8E9"/>
-                      </a:solidFill>
-                      <a:prstDash val="solid"/>
-                      <a:round/>
-                      <a:headEnd type="none" w="med" len="med"/>
-                      <a:tailEnd type="none" w="med" len="med"/>
-                    </a:lnL>
-                    <a:lnR w="6350" cap="flat" cmpd="sng" algn="ctr">
-                      <a:solidFill>
-                        <a:srgbClr val="E3E8E9"/>
-                      </a:solidFill>
-                      <a:prstDash val="solid"/>
-                      <a:round/>
-                      <a:headEnd type="none" w="med" len="med"/>
-                      <a:tailEnd type="none" w="med" len="med"/>
-                    </a:lnR>
-                    <a:lnT w="6350" cap="flat" cmpd="sng" algn="ctr">
-                      <a:solidFill>
-                        <a:srgbClr val="E3E8E9"/>
-                      </a:solidFill>
-                      <a:prstDash val="solid"/>
-                      <a:round/>
-                      <a:headEnd type="none" w="med" len="med"/>
-                      <a:tailEnd type="none" w="med" len="med"/>
-                    </a:lnT>
-                    <a:lnB w="6350" cap="flat" cmpd="sng" algn="ctr">
-                      <a:solidFill>
-                        <a:srgbClr val="E3E8E9"/>
-                      </a:solidFill>
-                      <a:prstDash val="solid"/>
-                      <a:round/>
-                      <a:headEnd type="none" w="med" len="med"/>
-                      <a:tailEnd type="none" w="med" len="med"/>
-                    </a:lnB>
-                    <a:solidFill>
-                      <a:srgbClr val="145C68"/>
+                        <a:rPr lang="en-US" sz="930" dirty="0">
+                          <a:solidFill>
+                            <a:srgbClr val="5B6B73"/>
+                          </a:solidFill>
+                          <a:latin typeface="Calibri" pitchFamily="34" charset="0"/>
+                          <a:ea typeface="Calibri" pitchFamily="34" charset="-122"/>
+                          <a:cs typeface="Calibri" pitchFamily="34" charset="-120"/>
+                        </a:rPr>
+                        <a:t>FPSO Peregrino</a:t>
+                      </a:r>
+                      <a:endParaRPr lang="en-US" sz="930" dirty="0">
+                        <a:latin typeface="Calibri" charset="0"/>
+                        <a:ea typeface="Calibri" charset="0"/>
+                        <a:cs typeface="Calibri" charset="0"/>
+                      </a:endParaRPr>
+                    </a:p>
+                  </a:txBody>
+                  <a:tcPr marL="91440" marR="91440" marT="45720" marB="45720" anchor="ctr">
+                    <a:lnL w="6350" cap="flat" cmpd="sng" algn="ctr">
+                      <a:solidFill>
+                        <a:srgbClr val="E3E8E9"/>
+                      </a:solidFill>
+                      <a:prstDash val="solid"/>
+                      <a:round/>
+                      <a:headEnd type="none" w="med" len="med"/>
+                      <a:tailEnd type="none" w="med" len="med"/>
+                    </a:lnL>
+                    <a:lnR w="6350" cap="flat" cmpd="sng" algn="ctr">
+                      <a:solidFill>
+                        <a:srgbClr val="E3E8E9"/>
+                      </a:solidFill>
+                      <a:prstDash val="solid"/>
+                      <a:round/>
+                      <a:headEnd type="none" w="med" len="med"/>
+                      <a:tailEnd type="none" w="med" len="med"/>
+                    </a:lnR>
+                    <a:lnT w="6350" cap="flat" cmpd="sng" algn="ctr">
+                      <a:solidFill>
+                        <a:srgbClr val="E3E8E9"/>
+                      </a:solidFill>
+                      <a:prstDash val="solid"/>
+                      <a:round/>
+                      <a:headEnd type="none" w="med" len="med"/>
+                      <a:tailEnd type="none" w="med" len="med"/>
+                    </a:lnT>
+                    <a:lnB w="6350" cap="flat" cmpd="sng" algn="ctr">
+                      <a:solidFill>
+                        <a:srgbClr val="E3E8E9"/>
+                      </a:solidFill>
+                      <a:prstDash val="solid"/>
+                      <a:round/>
+                      <a:headEnd type="none" w="med" len="med"/>
+                      <a:tailEnd type="none" w="med" len="med"/>
+                    </a:lnB>
+                    <a:solidFill>
+                      <a:srgbClr val="FFFFFF"/>
+                    </a:solidFill>
+                  </a:tcPr>
+                </a:tc>
+                <a:tc>
+                  <a:txBody>
+                    <a:bodyPr/>
+                    <a:lstStyle/>
+                    <a:p>
+                      <a:pPr indent="0" marL="0">
+                        <a:buNone/>
+                      </a:pPr>
+                      <a:r>
+                        <a:rPr lang="en-US" sz="900" dirty="0">
+                          <a:solidFill>
+                            <a:srgbClr val="5B6B73"/>
+                          </a:solidFill>
+                          <a:latin typeface="Calibri" pitchFamily="34" charset="0"/>
+                          <a:ea typeface="Calibri" pitchFamily="34" charset="-122"/>
+                          <a:cs typeface="Calibri" pitchFamily="34" charset="-120"/>
+                        </a:rPr>
+                        <a:t>CON - Construção</a:t>
+                      </a:r>
+                      <a:endParaRPr lang="en-US" sz="900" dirty="0">
+                        <a:latin typeface="Calibri" charset="0"/>
+                        <a:ea typeface="Calibri" charset="0"/>
+                        <a:cs typeface="Calibri" charset="0"/>
+                      </a:endParaRPr>
+                    </a:p>
+                  </a:txBody>
+                  <a:tcPr marL="91440" marR="91440" marT="45720" marB="45720" anchor="ctr">
+                    <a:lnL w="6350" cap="flat" cmpd="sng" algn="ctr">
+                      <a:solidFill>
+                        <a:srgbClr val="E3E8E9"/>
+                      </a:solidFill>
+                      <a:prstDash val="solid"/>
+                      <a:round/>
+                      <a:headEnd type="none" w="med" len="med"/>
+                      <a:tailEnd type="none" w="med" len="med"/>
+                    </a:lnL>
+                    <a:lnR w="6350" cap="flat" cmpd="sng" algn="ctr">
+                      <a:solidFill>
+                        <a:srgbClr val="E3E8E9"/>
+                      </a:solidFill>
+                      <a:prstDash val="solid"/>
+                      <a:round/>
+                      <a:headEnd type="none" w="med" len="med"/>
+                      <a:tailEnd type="none" w="med" len="med"/>
+                    </a:lnR>
+                    <a:lnT w="6350" cap="flat" cmpd="sng" algn="ctr">
+                      <a:solidFill>
+                        <a:srgbClr val="E3E8E9"/>
+                      </a:solidFill>
+                      <a:prstDash val="solid"/>
+                      <a:round/>
+                      <a:headEnd type="none" w="med" len="med"/>
+                      <a:tailEnd type="none" w="med" len="med"/>
+                    </a:lnT>
+                    <a:lnB w="6350" cap="flat" cmpd="sng" algn="ctr">
+                      <a:solidFill>
+                        <a:srgbClr val="E3E8E9"/>
+                      </a:solidFill>
+                      <a:prstDash val="solid"/>
+                      <a:round/>
+                      <a:headEnd type="none" w="med" len="med"/>
+                      <a:tailEnd type="none" w="med" len="med"/>
+                    </a:lnB>
+                    <a:solidFill>
+                      <a:srgbClr val="FFFFFF"/>
+                    </a:solidFill>
+                  </a:tcPr>
+                </a:tc>
+                <a:tc>
+                  <a:txBody>
+                    <a:bodyPr/>
+                    <a:lstStyle/>
+                    <a:p>
+                      <a:pPr indent="0" marL="0">
+                        <a:buNone/>
+                      </a:pPr>
+                      <a:r>
+                        <a:rPr lang="en-US" sz="900" dirty="0">
+                          <a:solidFill>
+                            <a:srgbClr val="5B6B73"/>
+                          </a:solidFill>
+                          <a:latin typeface="Calibri" pitchFamily="34" charset="0"/>
+                          <a:ea typeface="Calibri" pitchFamily="34" charset="-122"/>
+                          <a:cs typeface="Calibri" pitchFamily="34" charset="-120"/>
+                        </a:rPr>
+                        <a:t>Integridade e Regulatório</a:t>
+                      </a:r>
+                      <a:endParaRPr lang="en-US" sz="900" dirty="0">
+                        <a:latin typeface="Calibri" charset="0"/>
+                        <a:ea typeface="Calibri" charset="0"/>
+                        <a:cs typeface="Calibri" charset="0"/>
+                      </a:endParaRPr>
+                    </a:p>
+                  </a:txBody>
+                  <a:tcPr marL="91440" marR="91440" marT="45720" marB="45720" anchor="ctr">
+                    <a:lnL w="6350" cap="flat" cmpd="sng" algn="ctr">
+                      <a:solidFill>
+                        <a:srgbClr val="E3E8E9"/>
+                      </a:solidFill>
+                      <a:prstDash val="solid"/>
+                      <a:round/>
+                      <a:headEnd type="none" w="med" len="med"/>
+                      <a:tailEnd type="none" w="med" len="med"/>
+                    </a:lnL>
+                    <a:lnR w="6350" cap="flat" cmpd="sng" algn="ctr">
+                      <a:solidFill>
+                        <a:srgbClr val="E3E8E9"/>
+                      </a:solidFill>
+                      <a:prstDash val="solid"/>
+                      <a:round/>
+                      <a:headEnd type="none" w="med" len="med"/>
+                      <a:tailEnd type="none" w="med" len="med"/>
+                    </a:lnR>
+                    <a:lnT w="6350" cap="flat" cmpd="sng" algn="ctr">
+                      <a:solidFill>
+                        <a:srgbClr val="E3E8E9"/>
+                      </a:solidFill>
+                      <a:prstDash val="solid"/>
+                      <a:round/>
+                      <a:headEnd type="none" w="med" len="med"/>
+                      <a:tailEnd type="none" w="med" len="med"/>
+                    </a:lnT>
+                    <a:lnB w="6350" cap="flat" cmpd="sng" algn="ctr">
+                      <a:solidFill>
+                        <a:srgbClr val="E3E8E9"/>
+                      </a:solidFill>
+                      <a:prstDash val="solid"/>
+                      <a:round/>
+                      <a:headEnd type="none" w="med" len="med"/>
+                      <a:tailEnd type="none" w="med" len="med"/>
+                    </a:lnB>
+                    <a:solidFill>
+                      <a:srgbClr val="FFFFFF"/>
                     </a:solidFill>
                   </a:tcPr>
                 </a:tc>
@@ -9138,67 +9617,135 @@
                         <a:buNone/>
                       </a:pPr>
                       <a:r>
-                        <a:rPr lang="en-US" sz="1000" b="1" dirty="0">
-                          <a:solidFill>
-                            <a:srgbClr val="FFFFFF"/>
-                          </a:solidFill>
-                          <a:latin typeface="Calibri" pitchFamily="34" charset="0"/>
-                          <a:ea typeface="Calibri" pitchFamily="34" charset="-122"/>
-                          <a:cs typeface="Calibri" pitchFamily="34" charset="-120"/>
-                        </a:rPr>
-                        <a:t>VALOR TOTAL</a:t>
-                      </a:r>
-                      <a:endParaRPr lang="en-US" sz="1000" dirty="0">
-                        <a:latin typeface="Calibri" charset="0"/>
-                        <a:ea typeface="Calibri" charset="0"/>
-                        <a:cs typeface="Calibri" charset="0"/>
-                      </a:endParaRPr>
-                    </a:p>
-                  </a:txBody>
-                  <a:tcPr marL="91440" marR="91440" marT="45720" marB="45720" anchor="ctr">
-                    <a:lnL w="6350" cap="flat" cmpd="sng" algn="ctr">
-                      <a:solidFill>
-                        <a:srgbClr val="E3E8E9"/>
-                      </a:solidFill>
-                      <a:prstDash val="solid"/>
-                      <a:round/>
-                      <a:headEnd type="none" w="med" len="med"/>
-                      <a:tailEnd type="none" w="med" len="med"/>
-                    </a:lnL>
-                    <a:lnR w="6350" cap="flat" cmpd="sng" algn="ctr">
-                      <a:solidFill>
-                        <a:srgbClr val="E3E8E9"/>
-                      </a:solidFill>
-                      <a:prstDash val="solid"/>
-                      <a:round/>
-                      <a:headEnd type="none" w="med" len="med"/>
-                      <a:tailEnd type="none" w="med" len="med"/>
-                    </a:lnR>
-                    <a:lnT w="6350" cap="flat" cmpd="sng" algn="ctr">
-                      <a:solidFill>
-                        <a:srgbClr val="E3E8E9"/>
-                      </a:solidFill>
-                      <a:prstDash val="solid"/>
-                      <a:round/>
-                      <a:headEnd type="none" w="med" len="med"/>
-                      <a:tailEnd type="none" w="med" len="med"/>
-                    </a:lnT>
-                    <a:lnB w="6350" cap="flat" cmpd="sng" algn="ctr">
-                      <a:solidFill>
-                        <a:srgbClr val="E3E8E9"/>
-                      </a:solidFill>
-                      <a:prstDash val="solid"/>
-                      <a:round/>
-                      <a:headEnd type="none" w="med" len="med"/>
-                      <a:tailEnd type="none" w="med" len="med"/>
-                    </a:lnB>
-                    <a:solidFill>
-                      <a:srgbClr val="145C68"/>
+                        <a:rPr lang="en-US" sz="970" b="1" dirty="0">
+                          <a:solidFill>
+                            <a:srgbClr val="0B2A3D"/>
+                          </a:solidFill>
+                          <a:latin typeface="Calibri" pitchFamily="34" charset="0"/>
+                          <a:ea typeface="Calibri" pitchFamily="34" charset="-122"/>
+                          <a:cs typeface="Calibri" pitchFamily="34" charset="-120"/>
+                        </a:rPr>
+                        <a:t>US$ 6,5 mi</a:t>
+                      </a:r>
+                      <a:endParaRPr lang="en-US" sz="970" dirty="0">
+                        <a:latin typeface="Calibri" charset="0"/>
+                        <a:ea typeface="Calibri" charset="0"/>
+                        <a:cs typeface="Calibri" charset="0"/>
+                      </a:endParaRPr>
+                    </a:p>
+                  </a:txBody>
+                  <a:tcPr marL="91440" marR="91440" marT="45720" marB="45720" anchor="ctr">
+                    <a:lnL w="6350" cap="flat" cmpd="sng" algn="ctr">
+                      <a:solidFill>
+                        <a:srgbClr val="E3E8E9"/>
+                      </a:solidFill>
+                      <a:prstDash val="solid"/>
+                      <a:round/>
+                      <a:headEnd type="none" w="med" len="med"/>
+                      <a:tailEnd type="none" w="med" len="med"/>
+                    </a:lnL>
+                    <a:lnR w="6350" cap="flat" cmpd="sng" algn="ctr">
+                      <a:solidFill>
+                        <a:srgbClr val="E3E8E9"/>
+                      </a:solidFill>
+                      <a:prstDash val="solid"/>
+                      <a:round/>
+                      <a:headEnd type="none" w="med" len="med"/>
+                      <a:tailEnd type="none" w="med" len="med"/>
+                    </a:lnR>
+                    <a:lnT w="6350" cap="flat" cmpd="sng" algn="ctr">
+                      <a:solidFill>
+                        <a:srgbClr val="E3E8E9"/>
+                      </a:solidFill>
+                      <a:prstDash val="solid"/>
+                      <a:round/>
+                      <a:headEnd type="none" w="med" len="med"/>
+                      <a:tailEnd type="none" w="med" len="med"/>
+                    </a:lnT>
+                    <a:lnB w="6350" cap="flat" cmpd="sng" algn="ctr">
+                      <a:solidFill>
+                        <a:srgbClr val="E3E8E9"/>
+                      </a:solidFill>
+                      <a:prstDash val="solid"/>
+                      <a:round/>
+                      <a:headEnd type="none" w="med" len="med"/>
+                      <a:tailEnd type="none" w="med" len="med"/>
+                    </a:lnB>
+                    <a:solidFill>
+                      <a:srgbClr val="FFFFFF"/>
                     </a:solidFill>
                   </a:tcPr>
                 </a:tc>
               </a:tr>
-              <a:tr h="502920">
+              <a:tr h="457200">
+                <a:tc>
+                  <a:txBody>
+                    <a:bodyPr/>
+                    <a:lstStyle/>
+                    <a:p>
+                      <a:pPr algn="ctr" indent="0" marL="0">
+                        <a:buNone/>
+                      </a:pPr>
+                      <a:r>
+                        <a:rPr lang="en-US" sz="950" dirty="0">
+                          <a:solidFill>
+                            <a:srgbClr val="5B6B73"/>
+                          </a:solidFill>
+                          <a:latin typeface="Calibri" pitchFamily="34" charset="0"/>
+                          <a:ea typeface="Calibri" pitchFamily="34" charset="-122"/>
+                          <a:cs typeface="Calibri" pitchFamily="34" charset="-120"/>
+                        </a:rPr>
+                        <a:t>2</a:t>
+                      </a:r>
+                      <a:endParaRPr lang="en-US" sz="950" dirty="0">
+                        <a:latin typeface="Calibri" charset="0"/>
+                        <a:ea typeface="Calibri" charset="0"/>
+                        <a:cs typeface="Calibri" charset="0"/>
+                      </a:endParaRPr>
+                    </a:p>
+                  </a:txBody>
+                  <a:tcPr marL="91440" marR="91440" marT="45720" marB="45720" anchor="ctr">
+                    <a:lnL w="6350" cap="flat" cmpd="sng" algn="ctr">
+                      <a:solidFill>
+                        <a:srgbClr val="E3E8E9"/>
+                      </a:solidFill>
+                      <a:prstDash val="solid"/>
+                      <a:round/>
+                      <a:headEnd type="none" w="med" len="med"/>
+                      <a:tailEnd type="none" w="med" len="med"/>
+                    </a:lnL>
+                    <a:lnR w="6350" cap="flat" cmpd="sng" algn="ctr">
+                      <a:solidFill>
+                        <a:srgbClr val="E3E8E9"/>
+                      </a:solidFill>
+                      <a:prstDash val="solid"/>
+                      <a:round/>
+                      <a:headEnd type="none" w="med" len="med"/>
+                      <a:tailEnd type="none" w="med" len="med"/>
+                    </a:lnR>
+                    <a:lnT w="6350" cap="flat" cmpd="sng" algn="ctr">
+                      <a:solidFill>
+                        <a:srgbClr val="E3E8E9"/>
+                      </a:solidFill>
+                      <a:prstDash val="solid"/>
+                      <a:round/>
+                      <a:headEnd type="none" w="med" len="med"/>
+                      <a:tailEnd type="none" w="med" len="med"/>
+                    </a:lnT>
+                    <a:lnB w="6350" cap="flat" cmpd="sng" algn="ctr">
+                      <a:solidFill>
+                        <a:srgbClr val="E3E8E9"/>
+                      </a:solidFill>
+                      <a:prstDash val="solid"/>
+                      <a:round/>
+                      <a:headEnd type="none" w="med" len="med"/>
+                      <a:tailEnd type="none" w="med" len="med"/>
+                    </a:lnB>
+                    <a:solidFill>
+                      <a:srgbClr val="F0F4F5"/>
+                    </a:solidFill>
+                  </a:tcPr>
+                </a:tc>
                 <a:tc>
                   <a:txBody>
                     <a:bodyPr/>
@@ -9208,7 +9755,7 @@
                         <a:buNone/>
                       </a:pPr>
                       <a:r>
-                        <a:rPr lang="en-US" sz="1100" dirty="0">
+                        <a:rPr lang="en-US" sz="970" dirty="0">
                           <a:solidFill>
                             <a:srgbClr val="1C2B33"/>
                           </a:solidFill>
@@ -9216,9 +9763,351 @@
                           <a:ea typeface="Calibri" pitchFamily="34" charset="-122"/>
                           <a:cs typeface="Calibri" pitchFamily="34" charset="-120"/>
                         </a:rPr>
-                        <a:t>Fixo - PRIO + OSM</a:t>
-                      </a:r>
-                      <a:endParaRPr lang="en-US" sz="1100" dirty="0">
+                        <a:t>Time de Construção - Instalações (Fabric, Constr e Mont.)</a:t>
+                      </a:r>
+                      <a:endParaRPr lang="en-US" sz="970" dirty="0">
+                        <a:latin typeface="Calibri" charset="0"/>
+                        <a:ea typeface="Calibri" charset="0"/>
+                        <a:cs typeface="Calibri" charset="0"/>
+                      </a:endParaRPr>
+                    </a:p>
+                  </a:txBody>
+                  <a:tcPr marL="91440" marR="91440" marT="45720" marB="45720" anchor="ctr">
+                    <a:lnL w="6350" cap="flat" cmpd="sng" algn="ctr">
+                      <a:solidFill>
+                        <a:srgbClr val="E3E8E9"/>
+                      </a:solidFill>
+                      <a:prstDash val="solid"/>
+                      <a:round/>
+                      <a:headEnd type="none" w="med" len="med"/>
+                      <a:tailEnd type="none" w="med" len="med"/>
+                    </a:lnL>
+                    <a:lnR w="6350" cap="flat" cmpd="sng" algn="ctr">
+                      <a:solidFill>
+                        <a:srgbClr val="E3E8E9"/>
+                      </a:solidFill>
+                      <a:prstDash val="solid"/>
+                      <a:round/>
+                      <a:headEnd type="none" w="med" len="med"/>
+                      <a:tailEnd type="none" w="med" len="med"/>
+                    </a:lnR>
+                    <a:lnT w="6350" cap="flat" cmpd="sng" algn="ctr">
+                      <a:solidFill>
+                        <a:srgbClr val="E3E8E9"/>
+                      </a:solidFill>
+                      <a:prstDash val="solid"/>
+                      <a:round/>
+                      <a:headEnd type="none" w="med" len="med"/>
+                      <a:tailEnd type="none" w="med" len="med"/>
+                    </a:lnT>
+                    <a:lnB w="6350" cap="flat" cmpd="sng" algn="ctr">
+                      <a:solidFill>
+                        <a:srgbClr val="E3E8E9"/>
+                      </a:solidFill>
+                      <a:prstDash val="solid"/>
+                      <a:round/>
+                      <a:headEnd type="none" w="med" len="med"/>
+                      <a:tailEnd type="none" w="med" len="med"/>
+                    </a:lnB>
+                    <a:solidFill>
+                      <a:srgbClr val="F0F4F5"/>
+                    </a:solidFill>
+                  </a:tcPr>
+                </a:tc>
+                <a:tc>
+                  <a:txBody>
+                    <a:bodyPr/>
+                    <a:lstStyle/>
+                    <a:p>
+                      <a:pPr indent="0" marL="0">
+                        <a:buNone/>
+                      </a:pPr>
+                      <a:r>
+                        <a:rPr lang="en-US" sz="930" dirty="0">
+                          <a:solidFill>
+                            <a:srgbClr val="5B6B73"/>
+                          </a:solidFill>
+                          <a:latin typeface="Calibri" pitchFamily="34" charset="0"/>
+                          <a:ea typeface="Calibri" pitchFamily="34" charset="-122"/>
+                          <a:cs typeface="Calibri" pitchFamily="34" charset="-120"/>
+                        </a:rPr>
+                        <a:t>PLAT C</a:t>
+                      </a:r>
+                      <a:endParaRPr lang="en-US" sz="930" dirty="0">
+                        <a:latin typeface="Calibri" charset="0"/>
+                        <a:ea typeface="Calibri" charset="0"/>
+                        <a:cs typeface="Calibri" charset="0"/>
+                      </a:endParaRPr>
+                    </a:p>
+                  </a:txBody>
+                  <a:tcPr marL="91440" marR="91440" marT="45720" marB="45720" anchor="ctr">
+                    <a:lnL w="6350" cap="flat" cmpd="sng" algn="ctr">
+                      <a:solidFill>
+                        <a:srgbClr val="E3E8E9"/>
+                      </a:solidFill>
+                      <a:prstDash val="solid"/>
+                      <a:round/>
+                      <a:headEnd type="none" w="med" len="med"/>
+                      <a:tailEnd type="none" w="med" len="med"/>
+                    </a:lnL>
+                    <a:lnR w="6350" cap="flat" cmpd="sng" algn="ctr">
+                      <a:solidFill>
+                        <a:srgbClr val="E3E8E9"/>
+                      </a:solidFill>
+                      <a:prstDash val="solid"/>
+                      <a:round/>
+                      <a:headEnd type="none" w="med" len="med"/>
+                      <a:tailEnd type="none" w="med" len="med"/>
+                    </a:lnR>
+                    <a:lnT w="6350" cap="flat" cmpd="sng" algn="ctr">
+                      <a:solidFill>
+                        <a:srgbClr val="E3E8E9"/>
+                      </a:solidFill>
+                      <a:prstDash val="solid"/>
+                      <a:round/>
+                      <a:headEnd type="none" w="med" len="med"/>
+                      <a:tailEnd type="none" w="med" len="med"/>
+                    </a:lnT>
+                    <a:lnB w="6350" cap="flat" cmpd="sng" algn="ctr">
+                      <a:solidFill>
+                        <a:srgbClr val="E3E8E9"/>
+                      </a:solidFill>
+                      <a:prstDash val="solid"/>
+                      <a:round/>
+                      <a:headEnd type="none" w="med" len="med"/>
+                      <a:tailEnd type="none" w="med" len="med"/>
+                    </a:lnB>
+                    <a:solidFill>
+                      <a:srgbClr val="F0F4F5"/>
+                    </a:solidFill>
+                  </a:tcPr>
+                </a:tc>
+                <a:tc>
+                  <a:txBody>
+                    <a:bodyPr/>
+                    <a:lstStyle/>
+                    <a:p>
+                      <a:pPr indent="0" marL="0">
+                        <a:buNone/>
+                      </a:pPr>
+                      <a:r>
+                        <a:rPr lang="en-US" sz="900" dirty="0">
+                          <a:solidFill>
+                            <a:srgbClr val="5B6B73"/>
+                          </a:solidFill>
+                          <a:latin typeface="Calibri" pitchFamily="34" charset="0"/>
+                          <a:ea typeface="Calibri" pitchFamily="34" charset="-122"/>
+                          <a:cs typeface="Calibri" pitchFamily="34" charset="-120"/>
+                        </a:rPr>
+                        <a:t>CON - Construção</a:t>
+                      </a:r>
+                      <a:endParaRPr lang="en-US" sz="900" dirty="0">
+                        <a:latin typeface="Calibri" charset="0"/>
+                        <a:ea typeface="Calibri" charset="0"/>
+                        <a:cs typeface="Calibri" charset="0"/>
+                      </a:endParaRPr>
+                    </a:p>
+                  </a:txBody>
+                  <a:tcPr marL="91440" marR="91440" marT="45720" marB="45720" anchor="ctr">
+                    <a:lnL w="6350" cap="flat" cmpd="sng" algn="ctr">
+                      <a:solidFill>
+                        <a:srgbClr val="E3E8E9"/>
+                      </a:solidFill>
+                      <a:prstDash val="solid"/>
+                      <a:round/>
+                      <a:headEnd type="none" w="med" len="med"/>
+                      <a:tailEnd type="none" w="med" len="med"/>
+                    </a:lnL>
+                    <a:lnR w="6350" cap="flat" cmpd="sng" algn="ctr">
+                      <a:solidFill>
+                        <a:srgbClr val="E3E8E9"/>
+                      </a:solidFill>
+                      <a:prstDash val="solid"/>
+                      <a:round/>
+                      <a:headEnd type="none" w="med" len="med"/>
+                      <a:tailEnd type="none" w="med" len="med"/>
+                    </a:lnR>
+                    <a:lnT w="6350" cap="flat" cmpd="sng" algn="ctr">
+                      <a:solidFill>
+                        <a:srgbClr val="E3E8E9"/>
+                      </a:solidFill>
+                      <a:prstDash val="solid"/>
+                      <a:round/>
+                      <a:headEnd type="none" w="med" len="med"/>
+                      <a:tailEnd type="none" w="med" len="med"/>
+                    </a:lnT>
+                    <a:lnB w="6350" cap="flat" cmpd="sng" algn="ctr">
+                      <a:solidFill>
+                        <a:srgbClr val="E3E8E9"/>
+                      </a:solidFill>
+                      <a:prstDash val="solid"/>
+                      <a:round/>
+                      <a:headEnd type="none" w="med" len="med"/>
+                      <a:tailEnd type="none" w="med" len="med"/>
+                    </a:lnB>
+                    <a:solidFill>
+                      <a:srgbClr val="F0F4F5"/>
+                    </a:solidFill>
+                  </a:tcPr>
+                </a:tc>
+                <a:tc>
+                  <a:txBody>
+                    <a:bodyPr/>
+                    <a:lstStyle/>
+                    <a:p>
+                      <a:pPr indent="0" marL="0">
+                        <a:buNone/>
+                      </a:pPr>
+                      <a:r>
+                        <a:rPr lang="en-US" sz="900" dirty="0">
+                          <a:solidFill>
+                            <a:srgbClr val="5B6B73"/>
+                          </a:solidFill>
+                          <a:latin typeface="Calibri" pitchFamily="34" charset="0"/>
+                          <a:ea typeface="Calibri" pitchFamily="34" charset="-122"/>
+                          <a:cs typeface="Calibri" pitchFamily="34" charset="-120"/>
+                        </a:rPr>
+                        <a:t>Integridade e Regulatório</a:t>
+                      </a:r>
+                      <a:endParaRPr lang="en-US" sz="900" dirty="0">
+                        <a:latin typeface="Calibri" charset="0"/>
+                        <a:ea typeface="Calibri" charset="0"/>
+                        <a:cs typeface="Calibri" charset="0"/>
+                      </a:endParaRPr>
+                    </a:p>
+                  </a:txBody>
+                  <a:tcPr marL="91440" marR="91440" marT="45720" marB="45720" anchor="ctr">
+                    <a:lnL w="6350" cap="flat" cmpd="sng" algn="ctr">
+                      <a:solidFill>
+                        <a:srgbClr val="E3E8E9"/>
+                      </a:solidFill>
+                      <a:prstDash val="solid"/>
+                      <a:round/>
+                      <a:headEnd type="none" w="med" len="med"/>
+                      <a:tailEnd type="none" w="med" len="med"/>
+                    </a:lnL>
+                    <a:lnR w="6350" cap="flat" cmpd="sng" algn="ctr">
+                      <a:solidFill>
+                        <a:srgbClr val="E3E8E9"/>
+                      </a:solidFill>
+                      <a:prstDash val="solid"/>
+                      <a:round/>
+                      <a:headEnd type="none" w="med" len="med"/>
+                      <a:tailEnd type="none" w="med" len="med"/>
+                    </a:lnR>
+                    <a:lnT w="6350" cap="flat" cmpd="sng" algn="ctr">
+                      <a:solidFill>
+                        <a:srgbClr val="E3E8E9"/>
+                      </a:solidFill>
+                      <a:prstDash val="solid"/>
+                      <a:round/>
+                      <a:headEnd type="none" w="med" len="med"/>
+                      <a:tailEnd type="none" w="med" len="med"/>
+                    </a:lnT>
+                    <a:lnB w="6350" cap="flat" cmpd="sng" algn="ctr">
+                      <a:solidFill>
+                        <a:srgbClr val="E3E8E9"/>
+                      </a:solidFill>
+                      <a:prstDash val="solid"/>
+                      <a:round/>
+                      <a:headEnd type="none" w="med" len="med"/>
+                      <a:tailEnd type="none" w="med" len="med"/>
+                    </a:lnB>
+                    <a:solidFill>
+                      <a:srgbClr val="F0F4F5"/>
+                    </a:solidFill>
+                  </a:tcPr>
+                </a:tc>
+                <a:tc>
+                  <a:txBody>
+                    <a:bodyPr/>
+                    <a:lstStyle/>
+                    <a:p>
+                      <a:pPr algn="r" indent="0" marL="0">
+                        <a:buNone/>
+                      </a:pPr>
+                      <a:r>
+                        <a:rPr lang="en-US" sz="970" b="1" dirty="0">
+                          <a:solidFill>
+                            <a:srgbClr val="0B2A3D"/>
+                          </a:solidFill>
+                          <a:latin typeface="Calibri" pitchFamily="34" charset="0"/>
+                          <a:ea typeface="Calibri" pitchFamily="34" charset="-122"/>
+                          <a:cs typeface="Calibri" pitchFamily="34" charset="-120"/>
+                        </a:rPr>
+                        <a:t>US$ 3,3 mi</a:t>
+                      </a:r>
+                      <a:endParaRPr lang="en-US" sz="970" dirty="0">
+                        <a:latin typeface="Calibri" charset="0"/>
+                        <a:ea typeface="Calibri" charset="0"/>
+                        <a:cs typeface="Calibri" charset="0"/>
+                      </a:endParaRPr>
+                    </a:p>
+                  </a:txBody>
+                  <a:tcPr marL="91440" marR="91440" marT="45720" marB="45720" anchor="ctr">
+                    <a:lnL w="6350" cap="flat" cmpd="sng" algn="ctr">
+                      <a:solidFill>
+                        <a:srgbClr val="E3E8E9"/>
+                      </a:solidFill>
+                      <a:prstDash val="solid"/>
+                      <a:round/>
+                      <a:headEnd type="none" w="med" len="med"/>
+                      <a:tailEnd type="none" w="med" len="med"/>
+                    </a:lnL>
+                    <a:lnR w="6350" cap="flat" cmpd="sng" algn="ctr">
+                      <a:solidFill>
+                        <a:srgbClr val="E3E8E9"/>
+                      </a:solidFill>
+                      <a:prstDash val="solid"/>
+                      <a:round/>
+                      <a:headEnd type="none" w="med" len="med"/>
+                      <a:tailEnd type="none" w="med" len="med"/>
+                    </a:lnR>
+                    <a:lnT w="6350" cap="flat" cmpd="sng" algn="ctr">
+                      <a:solidFill>
+                        <a:srgbClr val="E3E8E9"/>
+                      </a:solidFill>
+                      <a:prstDash val="solid"/>
+                      <a:round/>
+                      <a:headEnd type="none" w="med" len="med"/>
+                      <a:tailEnd type="none" w="med" len="med"/>
+                    </a:lnT>
+                    <a:lnB w="6350" cap="flat" cmpd="sng" algn="ctr">
+                      <a:solidFill>
+                        <a:srgbClr val="E3E8E9"/>
+                      </a:solidFill>
+                      <a:prstDash val="solid"/>
+                      <a:round/>
+                      <a:headEnd type="none" w="med" len="med"/>
+                      <a:tailEnd type="none" w="med" len="med"/>
+                    </a:lnB>
+                    <a:solidFill>
+                      <a:srgbClr val="F0F4F5"/>
+                    </a:solidFill>
+                  </a:tcPr>
+                </a:tc>
+              </a:tr>
+              <a:tr h="457200">
+                <a:tc>
+                  <a:txBody>
+                    <a:bodyPr/>
+                    <a:lstStyle/>
+                    <a:p>
+                      <a:pPr algn="ctr" indent="0" marL="0">
+                        <a:buNone/>
+                      </a:pPr>
+                      <a:r>
+                        <a:rPr lang="en-US" sz="950" dirty="0">
+                          <a:solidFill>
+                            <a:srgbClr val="5B6B73"/>
+                          </a:solidFill>
+                          <a:latin typeface="Calibri" pitchFamily="34" charset="0"/>
+                          <a:ea typeface="Calibri" pitchFamily="34" charset="-122"/>
+                          <a:cs typeface="Calibri" pitchFamily="34" charset="-120"/>
+                        </a:rPr>
+                        <a:t>3</a:t>
+                      </a:r>
+                      <a:endParaRPr lang="en-US" sz="950" dirty="0">
                         <a:latin typeface="Calibri" charset="0"/>
                         <a:ea typeface="Calibri" charset="0"/>
                         <a:cs typeface="Calibri" charset="0"/>
@@ -9276,7 +10165,75 @@
                         <a:buNone/>
                       </a:pPr>
                       <a:r>
-                        <a:rPr lang="en-US" sz="1000" dirty="0">
+                        <a:rPr lang="en-US" sz="970" dirty="0">
+                          <a:solidFill>
+                            <a:srgbClr val="1C2B33"/>
+                          </a:solidFill>
+                          <a:latin typeface="Calibri" pitchFamily="34" charset="0"/>
+                          <a:ea typeface="Calibri" pitchFamily="34" charset="-122"/>
+                          <a:cs typeface="Calibri" pitchFamily="34" charset="-120"/>
+                        </a:rPr>
+                        <a:t>Campanha de RTI M5</a:t>
+                      </a:r>
+                      <a:endParaRPr lang="en-US" sz="970" dirty="0">
+                        <a:latin typeface="Calibri" charset="0"/>
+                        <a:ea typeface="Calibri" charset="0"/>
+                        <a:cs typeface="Calibri" charset="0"/>
+                      </a:endParaRPr>
+                    </a:p>
+                  </a:txBody>
+                  <a:tcPr marL="91440" marR="91440" marT="45720" marB="45720" anchor="ctr">
+                    <a:lnL w="6350" cap="flat" cmpd="sng" algn="ctr">
+                      <a:solidFill>
+                        <a:srgbClr val="E3E8E9"/>
+                      </a:solidFill>
+                      <a:prstDash val="solid"/>
+                      <a:round/>
+                      <a:headEnd type="none" w="med" len="med"/>
+                      <a:tailEnd type="none" w="med" len="med"/>
+                    </a:lnL>
+                    <a:lnR w="6350" cap="flat" cmpd="sng" algn="ctr">
+                      <a:solidFill>
+                        <a:srgbClr val="E3E8E9"/>
+                      </a:solidFill>
+                      <a:prstDash val="solid"/>
+                      <a:round/>
+                      <a:headEnd type="none" w="med" len="med"/>
+                      <a:tailEnd type="none" w="med" len="med"/>
+                    </a:lnR>
+                    <a:lnT w="6350" cap="flat" cmpd="sng" algn="ctr">
+                      <a:solidFill>
+                        <a:srgbClr val="E3E8E9"/>
+                      </a:solidFill>
+                      <a:prstDash val="solid"/>
+                      <a:round/>
+                      <a:headEnd type="none" w="med" len="med"/>
+                      <a:tailEnd type="none" w="med" len="med"/>
+                    </a:lnT>
+                    <a:lnB w="6350" cap="flat" cmpd="sng" algn="ctr">
+                      <a:solidFill>
+                        <a:srgbClr val="E3E8E9"/>
+                      </a:solidFill>
+                      <a:prstDash val="solid"/>
+                      <a:round/>
+                      <a:headEnd type="none" w="med" len="med"/>
+                      <a:tailEnd type="none" w="med" len="med"/>
+                    </a:lnB>
+                    <a:solidFill>
+                      <a:srgbClr val="FFFFFF"/>
+                    </a:solidFill>
+                  </a:tcPr>
+                </a:tc>
+                <a:tc>
+                  <a:txBody>
+                    <a:bodyPr/>
+                    <a:lstStyle/>
+                    <a:p>
+                      <a:pPr indent="0" marL="0">
+                        <a:buNone/>
+                      </a:pPr>
+                      <a:r>
+                        <a:rPr lang="en-US" sz="930" dirty="0">
                           <a:solidFill>
                             <a:srgbClr val="5B6B73"/>
                           </a:solidFill>
@@ -9284,9 +10241,1513 @@
                           <a:ea typeface="Calibri" pitchFamily="34" charset="-122"/>
                           <a:cs typeface="Calibri" pitchFamily="34" charset="-120"/>
                         </a:rPr>
+                        <a:t>FPSO Frade</a:t>
+                      </a:r>
+                      <a:endParaRPr lang="en-US" sz="930" dirty="0">
+                        <a:latin typeface="Calibri" charset="0"/>
+                        <a:ea typeface="Calibri" charset="0"/>
+                        <a:cs typeface="Calibri" charset="0"/>
+                      </a:endParaRPr>
+                    </a:p>
+                  </a:txBody>
+                  <a:tcPr marL="91440" marR="91440" marT="45720" marB="45720" anchor="ctr">
+                    <a:lnL w="6350" cap="flat" cmpd="sng" algn="ctr">
+                      <a:solidFill>
+                        <a:srgbClr val="E3E8E9"/>
+                      </a:solidFill>
+                      <a:prstDash val="solid"/>
+                      <a:round/>
+                      <a:headEnd type="none" w="med" len="med"/>
+                      <a:tailEnd type="none" w="med" len="med"/>
+                    </a:lnL>
+                    <a:lnR w="6350" cap="flat" cmpd="sng" algn="ctr">
+                      <a:solidFill>
+                        <a:srgbClr val="E3E8E9"/>
+                      </a:solidFill>
+                      <a:prstDash val="solid"/>
+                      <a:round/>
+                      <a:headEnd type="none" w="med" len="med"/>
+                      <a:tailEnd type="none" w="med" len="med"/>
+                    </a:lnR>
+                    <a:lnT w="6350" cap="flat" cmpd="sng" algn="ctr">
+                      <a:solidFill>
+                        <a:srgbClr val="E3E8E9"/>
+                      </a:solidFill>
+                      <a:prstDash val="solid"/>
+                      <a:round/>
+                      <a:headEnd type="none" w="med" len="med"/>
+                      <a:tailEnd type="none" w="med" len="med"/>
+                    </a:lnT>
+                    <a:lnB w="6350" cap="flat" cmpd="sng" algn="ctr">
+                      <a:solidFill>
+                        <a:srgbClr val="E3E8E9"/>
+                      </a:solidFill>
+                      <a:prstDash val="solid"/>
+                      <a:round/>
+                      <a:headEnd type="none" w="med" len="med"/>
+                      <a:tailEnd type="none" w="med" len="med"/>
+                    </a:lnB>
+                    <a:solidFill>
+                      <a:srgbClr val="FFFFFF"/>
+                    </a:solidFill>
+                  </a:tcPr>
+                </a:tc>
+                <a:tc>
+                  <a:txBody>
+                    <a:bodyPr/>
+                    <a:lstStyle/>
+                    <a:p>
+                      <a:pPr indent="0" marL="0">
+                        <a:buNone/>
+                      </a:pPr>
+                      <a:r>
+                        <a:rPr lang="en-US" sz="900" dirty="0">
+                          <a:solidFill>
+                            <a:srgbClr val="5B6B73"/>
+                          </a:solidFill>
+                          <a:latin typeface="Calibri" pitchFamily="34" charset="0"/>
+                          <a:ea typeface="Calibri" pitchFamily="34" charset="-122"/>
+                          <a:cs typeface="Calibri" pitchFamily="34" charset="-120"/>
+                        </a:rPr>
+                        <a:t>CON - Construção</a:t>
+                      </a:r>
+                      <a:endParaRPr lang="en-US" sz="900" dirty="0">
+                        <a:latin typeface="Calibri" charset="0"/>
+                        <a:ea typeface="Calibri" charset="0"/>
+                        <a:cs typeface="Calibri" charset="0"/>
+                      </a:endParaRPr>
+                    </a:p>
+                  </a:txBody>
+                  <a:tcPr marL="91440" marR="91440" marT="45720" marB="45720" anchor="ctr">
+                    <a:lnL w="6350" cap="flat" cmpd="sng" algn="ctr">
+                      <a:solidFill>
+                        <a:srgbClr val="E3E8E9"/>
+                      </a:solidFill>
+                      <a:prstDash val="solid"/>
+                      <a:round/>
+                      <a:headEnd type="none" w="med" len="med"/>
+                      <a:tailEnd type="none" w="med" len="med"/>
+                    </a:lnL>
+                    <a:lnR w="6350" cap="flat" cmpd="sng" algn="ctr">
+                      <a:solidFill>
+                        <a:srgbClr val="E3E8E9"/>
+                      </a:solidFill>
+                      <a:prstDash val="solid"/>
+                      <a:round/>
+                      <a:headEnd type="none" w="med" len="med"/>
+                      <a:tailEnd type="none" w="med" len="med"/>
+                    </a:lnR>
+                    <a:lnT w="6350" cap="flat" cmpd="sng" algn="ctr">
+                      <a:solidFill>
+                        <a:srgbClr val="E3E8E9"/>
+                      </a:solidFill>
+                      <a:prstDash val="solid"/>
+                      <a:round/>
+                      <a:headEnd type="none" w="med" len="med"/>
+                      <a:tailEnd type="none" w="med" len="med"/>
+                    </a:lnT>
+                    <a:lnB w="6350" cap="flat" cmpd="sng" algn="ctr">
+                      <a:solidFill>
+                        <a:srgbClr val="E3E8E9"/>
+                      </a:solidFill>
+                      <a:prstDash val="solid"/>
+                      <a:round/>
+                      <a:headEnd type="none" w="med" len="med"/>
+                      <a:tailEnd type="none" w="med" len="med"/>
+                    </a:lnB>
+                    <a:solidFill>
+                      <a:srgbClr val="FFFFFF"/>
+                    </a:solidFill>
+                  </a:tcPr>
+                </a:tc>
+                <a:tc>
+                  <a:txBody>
+                    <a:bodyPr/>
+                    <a:lstStyle/>
+                    <a:p>
+                      <a:pPr indent="0" marL="0">
+                        <a:buNone/>
+                      </a:pPr>
+                      <a:r>
+                        <a:rPr lang="en-US" sz="900" dirty="0">
+                          <a:solidFill>
+                            <a:srgbClr val="5B6B73"/>
+                          </a:solidFill>
+                          <a:latin typeface="Calibri" pitchFamily="34" charset="0"/>
+                          <a:ea typeface="Calibri" pitchFamily="34" charset="-122"/>
+                          <a:cs typeface="Calibri" pitchFamily="34" charset="-120"/>
+                        </a:rPr>
+                        <a:t>Integridade e Regulatório</a:t>
+                      </a:r>
+                      <a:endParaRPr lang="en-US" sz="900" dirty="0">
+                        <a:latin typeface="Calibri" charset="0"/>
+                        <a:ea typeface="Calibri" charset="0"/>
+                        <a:cs typeface="Calibri" charset="0"/>
+                      </a:endParaRPr>
+                    </a:p>
+                  </a:txBody>
+                  <a:tcPr marL="91440" marR="91440" marT="45720" marB="45720" anchor="ctr">
+                    <a:lnL w="6350" cap="flat" cmpd="sng" algn="ctr">
+                      <a:solidFill>
+                        <a:srgbClr val="E3E8E9"/>
+                      </a:solidFill>
+                      <a:prstDash val="solid"/>
+                      <a:round/>
+                      <a:headEnd type="none" w="med" len="med"/>
+                      <a:tailEnd type="none" w="med" len="med"/>
+                    </a:lnL>
+                    <a:lnR w="6350" cap="flat" cmpd="sng" algn="ctr">
+                      <a:solidFill>
+                        <a:srgbClr val="E3E8E9"/>
+                      </a:solidFill>
+                      <a:prstDash val="solid"/>
+                      <a:round/>
+                      <a:headEnd type="none" w="med" len="med"/>
+                      <a:tailEnd type="none" w="med" len="med"/>
+                    </a:lnR>
+                    <a:lnT w="6350" cap="flat" cmpd="sng" algn="ctr">
+                      <a:solidFill>
+                        <a:srgbClr val="E3E8E9"/>
+                      </a:solidFill>
+                      <a:prstDash val="solid"/>
+                      <a:round/>
+                      <a:headEnd type="none" w="med" len="med"/>
+                      <a:tailEnd type="none" w="med" len="med"/>
+                    </a:lnT>
+                    <a:lnB w="6350" cap="flat" cmpd="sng" algn="ctr">
+                      <a:solidFill>
+                        <a:srgbClr val="E3E8E9"/>
+                      </a:solidFill>
+                      <a:prstDash val="solid"/>
+                      <a:round/>
+                      <a:headEnd type="none" w="med" len="med"/>
+                      <a:tailEnd type="none" w="med" len="med"/>
+                    </a:lnB>
+                    <a:solidFill>
+                      <a:srgbClr val="FFFFFF"/>
+                    </a:solidFill>
+                  </a:tcPr>
+                </a:tc>
+                <a:tc>
+                  <a:txBody>
+                    <a:bodyPr/>
+                    <a:lstStyle/>
+                    <a:p>
+                      <a:pPr algn="r" indent="0" marL="0">
+                        <a:buNone/>
+                      </a:pPr>
+                      <a:r>
+                        <a:rPr lang="en-US" sz="970" b="1" dirty="0">
+                          <a:solidFill>
+                            <a:srgbClr val="0B2A3D"/>
+                          </a:solidFill>
+                          <a:latin typeface="Calibri" pitchFamily="34" charset="0"/>
+                          <a:ea typeface="Calibri" pitchFamily="34" charset="-122"/>
+                          <a:cs typeface="Calibri" pitchFamily="34" charset="-120"/>
+                        </a:rPr>
+                        <a:t>US$ 2,2 mi</a:t>
+                      </a:r>
+                      <a:endParaRPr lang="en-US" sz="970" dirty="0">
+                        <a:latin typeface="Calibri" charset="0"/>
+                        <a:ea typeface="Calibri" charset="0"/>
+                        <a:cs typeface="Calibri" charset="0"/>
+                      </a:endParaRPr>
+                    </a:p>
+                  </a:txBody>
+                  <a:tcPr marL="91440" marR="91440" marT="45720" marB="45720" anchor="ctr">
+                    <a:lnL w="6350" cap="flat" cmpd="sng" algn="ctr">
+                      <a:solidFill>
+                        <a:srgbClr val="E3E8E9"/>
+                      </a:solidFill>
+                      <a:prstDash val="solid"/>
+                      <a:round/>
+                      <a:headEnd type="none" w="med" len="med"/>
+                      <a:tailEnd type="none" w="med" len="med"/>
+                    </a:lnL>
+                    <a:lnR w="6350" cap="flat" cmpd="sng" algn="ctr">
+                      <a:solidFill>
+                        <a:srgbClr val="E3E8E9"/>
+                      </a:solidFill>
+                      <a:prstDash val="solid"/>
+                      <a:round/>
+                      <a:headEnd type="none" w="med" len="med"/>
+                      <a:tailEnd type="none" w="med" len="med"/>
+                    </a:lnR>
+                    <a:lnT w="6350" cap="flat" cmpd="sng" algn="ctr">
+                      <a:solidFill>
+                        <a:srgbClr val="E3E8E9"/>
+                      </a:solidFill>
+                      <a:prstDash val="solid"/>
+                      <a:round/>
+                      <a:headEnd type="none" w="med" len="med"/>
+                      <a:tailEnd type="none" w="med" len="med"/>
+                    </a:lnT>
+                    <a:lnB w="6350" cap="flat" cmpd="sng" algn="ctr">
+                      <a:solidFill>
+                        <a:srgbClr val="E3E8E9"/>
+                      </a:solidFill>
+                      <a:prstDash val="solid"/>
+                      <a:round/>
+                      <a:headEnd type="none" w="med" len="med"/>
+                      <a:tailEnd type="none" w="med" len="med"/>
+                    </a:lnB>
+                    <a:solidFill>
+                      <a:srgbClr val="FFFFFF"/>
+                    </a:solidFill>
+                  </a:tcPr>
+                </a:tc>
+              </a:tr>
+              <a:tr h="457200">
+                <a:tc>
+                  <a:txBody>
+                    <a:bodyPr/>
+                    <a:lstStyle/>
+                    <a:p>
+                      <a:pPr algn="ctr" indent="0" marL="0">
+                        <a:buNone/>
+                      </a:pPr>
+                      <a:r>
+                        <a:rPr lang="en-US" sz="950" dirty="0">
+                          <a:solidFill>
+                            <a:srgbClr val="5B6B73"/>
+                          </a:solidFill>
+                          <a:latin typeface="Calibri" pitchFamily="34" charset="0"/>
+                          <a:ea typeface="Calibri" pitchFamily="34" charset="-122"/>
+                          <a:cs typeface="Calibri" pitchFamily="34" charset="-120"/>
+                        </a:rPr>
+                        <a:t>4</a:t>
+                      </a:r>
+                      <a:endParaRPr lang="en-US" sz="950" dirty="0">
+                        <a:latin typeface="Calibri" charset="0"/>
+                        <a:ea typeface="Calibri" charset="0"/>
+                        <a:cs typeface="Calibri" charset="0"/>
+                      </a:endParaRPr>
+                    </a:p>
+                  </a:txBody>
+                  <a:tcPr marL="91440" marR="91440" marT="45720" marB="45720" anchor="ctr">
+                    <a:lnL w="6350" cap="flat" cmpd="sng" algn="ctr">
+                      <a:solidFill>
+                        <a:srgbClr val="E3E8E9"/>
+                      </a:solidFill>
+                      <a:prstDash val="solid"/>
+                      <a:round/>
+                      <a:headEnd type="none" w="med" len="med"/>
+                      <a:tailEnd type="none" w="med" len="med"/>
+                    </a:lnL>
+                    <a:lnR w="6350" cap="flat" cmpd="sng" algn="ctr">
+                      <a:solidFill>
+                        <a:srgbClr val="E3E8E9"/>
+                      </a:solidFill>
+                      <a:prstDash val="solid"/>
+                      <a:round/>
+                      <a:headEnd type="none" w="med" len="med"/>
+                      <a:tailEnd type="none" w="med" len="med"/>
+                    </a:lnR>
+                    <a:lnT w="6350" cap="flat" cmpd="sng" algn="ctr">
+                      <a:solidFill>
+                        <a:srgbClr val="E3E8E9"/>
+                      </a:solidFill>
+                      <a:prstDash val="solid"/>
+                      <a:round/>
+                      <a:headEnd type="none" w="med" len="med"/>
+                      <a:tailEnd type="none" w="med" len="med"/>
+                    </a:lnT>
+                    <a:lnB w="6350" cap="flat" cmpd="sng" algn="ctr">
+                      <a:solidFill>
+                        <a:srgbClr val="E3E8E9"/>
+                      </a:solidFill>
+                      <a:prstDash val="solid"/>
+                      <a:round/>
+                      <a:headEnd type="none" w="med" len="med"/>
+                      <a:tailEnd type="none" w="med" len="med"/>
+                    </a:lnB>
+                    <a:solidFill>
+                      <a:srgbClr val="F0F4F5"/>
+                    </a:solidFill>
+                  </a:tcPr>
+                </a:tc>
+                <a:tc>
+                  <a:txBody>
+                    <a:bodyPr/>
+                    <a:lstStyle/>
+                    <a:p>
+                      <a:pPr indent="0" marL="0">
+                        <a:buNone/>
+                      </a:pPr>
+                      <a:r>
+                        <a:rPr lang="en-US" sz="970" dirty="0">
+                          <a:solidFill>
+                            <a:srgbClr val="1C2B33"/>
+                          </a:solidFill>
+                          <a:latin typeface="Calibri" pitchFamily="34" charset="0"/>
+                          <a:ea typeface="Calibri" pitchFamily="34" charset="-122"/>
+                          <a:cs typeface="Calibri" pitchFamily="34" charset="-120"/>
+                        </a:rPr>
+                        <a:t>Time de Construção - Instalações (Fabric, Constr, Mont e RTI.)</a:t>
+                      </a:r>
+                      <a:endParaRPr lang="en-US" sz="970" dirty="0">
+                        <a:latin typeface="Calibri" charset="0"/>
+                        <a:ea typeface="Calibri" charset="0"/>
+                        <a:cs typeface="Calibri" charset="0"/>
+                      </a:endParaRPr>
+                    </a:p>
+                  </a:txBody>
+                  <a:tcPr marL="91440" marR="91440" marT="45720" marB="45720" anchor="ctr">
+                    <a:lnL w="6350" cap="flat" cmpd="sng" algn="ctr">
+                      <a:solidFill>
+                        <a:srgbClr val="E3E8E9"/>
+                      </a:solidFill>
+                      <a:prstDash val="solid"/>
+                      <a:round/>
+                      <a:headEnd type="none" w="med" len="med"/>
+                      <a:tailEnd type="none" w="med" len="med"/>
+                    </a:lnL>
+                    <a:lnR w="6350" cap="flat" cmpd="sng" algn="ctr">
+                      <a:solidFill>
+                        <a:srgbClr val="E3E8E9"/>
+                      </a:solidFill>
+                      <a:prstDash val="solid"/>
+                      <a:round/>
+                      <a:headEnd type="none" w="med" len="med"/>
+                      <a:tailEnd type="none" w="med" len="med"/>
+                    </a:lnR>
+                    <a:lnT w="6350" cap="flat" cmpd="sng" algn="ctr">
+                      <a:solidFill>
+                        <a:srgbClr val="E3E8E9"/>
+                      </a:solidFill>
+                      <a:prstDash val="solid"/>
+                      <a:round/>
+                      <a:headEnd type="none" w="med" len="med"/>
+                      <a:tailEnd type="none" w="med" len="med"/>
+                    </a:lnT>
+                    <a:lnB w="6350" cap="flat" cmpd="sng" algn="ctr">
+                      <a:solidFill>
+                        <a:srgbClr val="E3E8E9"/>
+                      </a:solidFill>
+                      <a:prstDash val="solid"/>
+                      <a:round/>
+                      <a:headEnd type="none" w="med" len="med"/>
+                      <a:tailEnd type="none" w="med" len="med"/>
+                    </a:lnB>
+                    <a:solidFill>
+                      <a:srgbClr val="F0F4F5"/>
+                    </a:solidFill>
+                  </a:tcPr>
+                </a:tc>
+                <a:tc>
+                  <a:txBody>
+                    <a:bodyPr/>
+                    <a:lstStyle/>
+                    <a:p>
+                      <a:pPr indent="0" marL="0">
+                        <a:buNone/>
+                      </a:pPr>
+                      <a:r>
+                        <a:rPr lang="en-US" sz="930" dirty="0">
+                          <a:solidFill>
+                            <a:srgbClr val="5B6B73"/>
+                          </a:solidFill>
+                          <a:latin typeface="Calibri" pitchFamily="34" charset="0"/>
+                          <a:ea typeface="Calibri" pitchFamily="34" charset="-122"/>
+                          <a:cs typeface="Calibri" pitchFamily="34" charset="-120"/>
+                        </a:rPr>
+                        <a:t>PLAT B</a:t>
+                      </a:r>
+                      <a:endParaRPr lang="en-US" sz="930" dirty="0">
+                        <a:latin typeface="Calibri" charset="0"/>
+                        <a:ea typeface="Calibri" charset="0"/>
+                        <a:cs typeface="Calibri" charset="0"/>
+                      </a:endParaRPr>
+                    </a:p>
+                  </a:txBody>
+                  <a:tcPr marL="91440" marR="91440" marT="45720" marB="45720" anchor="ctr">
+                    <a:lnL w="6350" cap="flat" cmpd="sng" algn="ctr">
+                      <a:solidFill>
+                        <a:srgbClr val="E3E8E9"/>
+                      </a:solidFill>
+                      <a:prstDash val="solid"/>
+                      <a:round/>
+                      <a:headEnd type="none" w="med" len="med"/>
+                      <a:tailEnd type="none" w="med" len="med"/>
+                    </a:lnL>
+                    <a:lnR w="6350" cap="flat" cmpd="sng" algn="ctr">
+                      <a:solidFill>
+                        <a:srgbClr val="E3E8E9"/>
+                      </a:solidFill>
+                      <a:prstDash val="solid"/>
+                      <a:round/>
+                      <a:headEnd type="none" w="med" len="med"/>
+                      <a:tailEnd type="none" w="med" len="med"/>
+                    </a:lnR>
+                    <a:lnT w="6350" cap="flat" cmpd="sng" algn="ctr">
+                      <a:solidFill>
+                        <a:srgbClr val="E3E8E9"/>
+                      </a:solidFill>
+                      <a:prstDash val="solid"/>
+                      <a:round/>
+                      <a:headEnd type="none" w="med" len="med"/>
+                      <a:tailEnd type="none" w="med" len="med"/>
+                    </a:lnT>
+                    <a:lnB w="6350" cap="flat" cmpd="sng" algn="ctr">
+                      <a:solidFill>
+                        <a:srgbClr val="E3E8E9"/>
+                      </a:solidFill>
+                      <a:prstDash val="solid"/>
+                      <a:round/>
+                      <a:headEnd type="none" w="med" len="med"/>
+                      <a:tailEnd type="none" w="med" len="med"/>
+                    </a:lnB>
+                    <a:solidFill>
+                      <a:srgbClr val="F0F4F5"/>
+                    </a:solidFill>
+                  </a:tcPr>
+                </a:tc>
+                <a:tc>
+                  <a:txBody>
+                    <a:bodyPr/>
+                    <a:lstStyle/>
+                    <a:p>
+                      <a:pPr indent="0" marL="0">
+                        <a:buNone/>
+                      </a:pPr>
+                      <a:r>
+                        <a:rPr lang="en-US" sz="900" dirty="0">
+                          <a:solidFill>
+                            <a:srgbClr val="5B6B73"/>
+                          </a:solidFill>
+                          <a:latin typeface="Calibri" pitchFamily="34" charset="0"/>
+                          <a:ea typeface="Calibri" pitchFamily="34" charset="-122"/>
+                          <a:cs typeface="Calibri" pitchFamily="34" charset="-120"/>
+                        </a:rPr>
+                        <a:t>CON - Construção</a:t>
+                      </a:r>
+                      <a:endParaRPr lang="en-US" sz="900" dirty="0">
+                        <a:latin typeface="Calibri" charset="0"/>
+                        <a:ea typeface="Calibri" charset="0"/>
+                        <a:cs typeface="Calibri" charset="0"/>
+                      </a:endParaRPr>
+                    </a:p>
+                  </a:txBody>
+                  <a:tcPr marL="91440" marR="91440" marT="45720" marB="45720" anchor="ctr">
+                    <a:lnL w="6350" cap="flat" cmpd="sng" algn="ctr">
+                      <a:solidFill>
+                        <a:srgbClr val="E3E8E9"/>
+                      </a:solidFill>
+                      <a:prstDash val="solid"/>
+                      <a:round/>
+                      <a:headEnd type="none" w="med" len="med"/>
+                      <a:tailEnd type="none" w="med" len="med"/>
+                    </a:lnL>
+                    <a:lnR w="6350" cap="flat" cmpd="sng" algn="ctr">
+                      <a:solidFill>
+                        <a:srgbClr val="E3E8E9"/>
+                      </a:solidFill>
+                      <a:prstDash val="solid"/>
+                      <a:round/>
+                      <a:headEnd type="none" w="med" len="med"/>
+                      <a:tailEnd type="none" w="med" len="med"/>
+                    </a:lnR>
+                    <a:lnT w="6350" cap="flat" cmpd="sng" algn="ctr">
+                      <a:solidFill>
+                        <a:srgbClr val="E3E8E9"/>
+                      </a:solidFill>
+                      <a:prstDash val="solid"/>
+                      <a:round/>
+                      <a:headEnd type="none" w="med" len="med"/>
+                      <a:tailEnd type="none" w="med" len="med"/>
+                    </a:lnT>
+                    <a:lnB w="6350" cap="flat" cmpd="sng" algn="ctr">
+                      <a:solidFill>
+                        <a:srgbClr val="E3E8E9"/>
+                      </a:solidFill>
+                      <a:prstDash val="solid"/>
+                      <a:round/>
+                      <a:headEnd type="none" w="med" len="med"/>
+                      <a:tailEnd type="none" w="med" len="med"/>
+                    </a:lnB>
+                    <a:solidFill>
+                      <a:srgbClr val="F0F4F5"/>
+                    </a:solidFill>
+                  </a:tcPr>
+                </a:tc>
+                <a:tc>
+                  <a:txBody>
+                    <a:bodyPr/>
+                    <a:lstStyle/>
+                    <a:p>
+                      <a:pPr indent="0" marL="0">
+                        <a:buNone/>
+                      </a:pPr>
+                      <a:r>
+                        <a:rPr lang="en-US" sz="900" dirty="0">
+                          <a:solidFill>
+                            <a:srgbClr val="5B6B73"/>
+                          </a:solidFill>
+                          <a:latin typeface="Calibri" pitchFamily="34" charset="0"/>
+                          <a:ea typeface="Calibri" pitchFamily="34" charset="-122"/>
+                          <a:cs typeface="Calibri" pitchFamily="34" charset="-120"/>
+                        </a:rPr>
+                        <a:t>Integridade e Regulatório</a:t>
+                      </a:r>
+                      <a:endParaRPr lang="en-US" sz="900" dirty="0">
+                        <a:latin typeface="Calibri" charset="0"/>
+                        <a:ea typeface="Calibri" charset="0"/>
+                        <a:cs typeface="Calibri" charset="0"/>
+                      </a:endParaRPr>
+                    </a:p>
+                  </a:txBody>
+                  <a:tcPr marL="91440" marR="91440" marT="45720" marB="45720" anchor="ctr">
+                    <a:lnL w="6350" cap="flat" cmpd="sng" algn="ctr">
+                      <a:solidFill>
+                        <a:srgbClr val="E3E8E9"/>
+                      </a:solidFill>
+                      <a:prstDash val="solid"/>
+                      <a:round/>
+                      <a:headEnd type="none" w="med" len="med"/>
+                      <a:tailEnd type="none" w="med" len="med"/>
+                    </a:lnL>
+                    <a:lnR w="6350" cap="flat" cmpd="sng" algn="ctr">
+                      <a:solidFill>
+                        <a:srgbClr val="E3E8E9"/>
+                      </a:solidFill>
+                      <a:prstDash val="solid"/>
+                      <a:round/>
+                      <a:headEnd type="none" w="med" len="med"/>
+                      <a:tailEnd type="none" w="med" len="med"/>
+                    </a:lnR>
+                    <a:lnT w="6350" cap="flat" cmpd="sng" algn="ctr">
+                      <a:solidFill>
+                        <a:srgbClr val="E3E8E9"/>
+                      </a:solidFill>
+                      <a:prstDash val="solid"/>
+                      <a:round/>
+                      <a:headEnd type="none" w="med" len="med"/>
+                      <a:tailEnd type="none" w="med" len="med"/>
+                    </a:lnT>
+                    <a:lnB w="6350" cap="flat" cmpd="sng" algn="ctr">
+                      <a:solidFill>
+                        <a:srgbClr val="E3E8E9"/>
+                      </a:solidFill>
+                      <a:prstDash val="solid"/>
+                      <a:round/>
+                      <a:headEnd type="none" w="med" len="med"/>
+                      <a:tailEnd type="none" w="med" len="med"/>
+                    </a:lnB>
+                    <a:solidFill>
+                      <a:srgbClr val="F0F4F5"/>
+                    </a:solidFill>
+                  </a:tcPr>
+                </a:tc>
+                <a:tc>
+                  <a:txBody>
+                    <a:bodyPr/>
+                    <a:lstStyle/>
+                    <a:p>
+                      <a:pPr algn="r" indent="0" marL="0">
+                        <a:buNone/>
+                      </a:pPr>
+                      <a:r>
+                        <a:rPr lang="en-US" sz="970" b="1" dirty="0">
+                          <a:solidFill>
+                            <a:srgbClr val="0B2A3D"/>
+                          </a:solidFill>
+                          <a:latin typeface="Calibri" pitchFamily="34" charset="0"/>
+                          <a:ea typeface="Calibri" pitchFamily="34" charset="-122"/>
+                          <a:cs typeface="Calibri" pitchFamily="34" charset="-120"/>
+                        </a:rPr>
+                        <a:t>US$ 2,1 mi</a:t>
+                      </a:r>
+                      <a:endParaRPr lang="en-US" sz="970" dirty="0">
+                        <a:latin typeface="Calibri" charset="0"/>
+                        <a:ea typeface="Calibri" charset="0"/>
+                        <a:cs typeface="Calibri" charset="0"/>
+                      </a:endParaRPr>
+                    </a:p>
+                  </a:txBody>
+                  <a:tcPr marL="91440" marR="91440" marT="45720" marB="45720" anchor="ctr">
+                    <a:lnL w="6350" cap="flat" cmpd="sng" algn="ctr">
+                      <a:solidFill>
+                        <a:srgbClr val="E3E8E9"/>
+                      </a:solidFill>
+                      <a:prstDash val="solid"/>
+                      <a:round/>
+                      <a:headEnd type="none" w="med" len="med"/>
+                      <a:tailEnd type="none" w="med" len="med"/>
+                    </a:lnL>
+                    <a:lnR w="6350" cap="flat" cmpd="sng" algn="ctr">
+                      <a:solidFill>
+                        <a:srgbClr val="E3E8E9"/>
+                      </a:solidFill>
+                      <a:prstDash val="solid"/>
+                      <a:round/>
+                      <a:headEnd type="none" w="med" len="med"/>
+                      <a:tailEnd type="none" w="med" len="med"/>
+                    </a:lnR>
+                    <a:lnT w="6350" cap="flat" cmpd="sng" algn="ctr">
+                      <a:solidFill>
+                        <a:srgbClr val="E3E8E9"/>
+                      </a:solidFill>
+                      <a:prstDash val="solid"/>
+                      <a:round/>
+                      <a:headEnd type="none" w="med" len="med"/>
+                      <a:tailEnd type="none" w="med" len="med"/>
+                    </a:lnT>
+                    <a:lnB w="6350" cap="flat" cmpd="sng" algn="ctr">
+                      <a:solidFill>
+                        <a:srgbClr val="E3E8E9"/>
+                      </a:solidFill>
+                      <a:prstDash val="solid"/>
+                      <a:round/>
+                      <a:headEnd type="none" w="med" len="med"/>
+                      <a:tailEnd type="none" w="med" len="med"/>
+                    </a:lnB>
+                    <a:solidFill>
+                      <a:srgbClr val="F0F4F5"/>
+                    </a:solidFill>
+                  </a:tcPr>
+                </a:tc>
+              </a:tr>
+              <a:tr h="457200">
+                <a:tc>
+                  <a:txBody>
+                    <a:bodyPr/>
+                    <a:lstStyle/>
+                    <a:p>
+                      <a:pPr algn="ctr" indent="0" marL="0">
+                        <a:buNone/>
+                      </a:pPr>
+                      <a:r>
+                        <a:rPr lang="en-US" sz="950" dirty="0">
+                          <a:solidFill>
+                            <a:srgbClr val="5B6B73"/>
+                          </a:solidFill>
+                          <a:latin typeface="Calibri" pitchFamily="34" charset="0"/>
+                          <a:ea typeface="Calibri" pitchFamily="34" charset="-122"/>
+                          <a:cs typeface="Calibri" pitchFamily="34" charset="-120"/>
+                        </a:rPr>
+                        <a:t>5</a:t>
+                      </a:r>
+                      <a:endParaRPr lang="en-US" sz="950" dirty="0">
+                        <a:latin typeface="Calibri" charset="0"/>
+                        <a:ea typeface="Calibri" charset="0"/>
+                        <a:cs typeface="Calibri" charset="0"/>
+                      </a:endParaRPr>
+                    </a:p>
+                  </a:txBody>
+                  <a:tcPr marL="91440" marR="91440" marT="45720" marB="45720" anchor="ctr">
+                    <a:lnL w="6350" cap="flat" cmpd="sng" algn="ctr">
+                      <a:solidFill>
+                        <a:srgbClr val="E3E8E9"/>
+                      </a:solidFill>
+                      <a:prstDash val="solid"/>
+                      <a:round/>
+                      <a:headEnd type="none" w="med" len="med"/>
+                      <a:tailEnd type="none" w="med" len="med"/>
+                    </a:lnL>
+                    <a:lnR w="6350" cap="flat" cmpd="sng" algn="ctr">
+                      <a:solidFill>
+                        <a:srgbClr val="E3E8E9"/>
+                      </a:solidFill>
+                      <a:prstDash val="solid"/>
+                      <a:round/>
+                      <a:headEnd type="none" w="med" len="med"/>
+                      <a:tailEnd type="none" w="med" len="med"/>
+                    </a:lnR>
+                    <a:lnT w="6350" cap="flat" cmpd="sng" algn="ctr">
+                      <a:solidFill>
+                        <a:srgbClr val="E3E8E9"/>
+                      </a:solidFill>
+                      <a:prstDash val="solid"/>
+                      <a:round/>
+                      <a:headEnd type="none" w="med" len="med"/>
+                      <a:tailEnd type="none" w="med" len="med"/>
+                    </a:lnT>
+                    <a:lnB w="6350" cap="flat" cmpd="sng" algn="ctr">
+                      <a:solidFill>
+                        <a:srgbClr val="E3E8E9"/>
+                      </a:solidFill>
+                      <a:prstDash val="solid"/>
+                      <a:round/>
+                      <a:headEnd type="none" w="med" len="med"/>
+                      <a:tailEnd type="none" w="med" len="med"/>
+                    </a:lnB>
+                    <a:solidFill>
+                      <a:srgbClr val="FFFFFF"/>
+                    </a:solidFill>
+                  </a:tcPr>
+                </a:tc>
+                <a:tc>
+                  <a:txBody>
+                    <a:bodyPr/>
+                    <a:lstStyle/>
+                    <a:p>
+                      <a:pPr indent="0" marL="0">
+                        <a:buNone/>
+                      </a:pPr>
+                      <a:r>
+                        <a:rPr lang="en-US" sz="970" dirty="0">
+                          <a:solidFill>
+                            <a:srgbClr val="1C2B33"/>
+                          </a:solidFill>
+                          <a:latin typeface="Calibri" pitchFamily="34" charset="0"/>
+                          <a:ea typeface="Calibri" pitchFamily="34" charset="-122"/>
+                          <a:cs typeface="Calibri" pitchFamily="34" charset="-120"/>
+                        </a:rPr>
+                        <a:t>OPERAÇÃO USINA AGGREKO</a:t>
+                      </a:r>
+                      <a:endParaRPr lang="en-US" sz="970" dirty="0">
+                        <a:latin typeface="Calibri" charset="0"/>
+                        <a:ea typeface="Calibri" charset="0"/>
+                        <a:cs typeface="Calibri" charset="0"/>
+                      </a:endParaRPr>
+                    </a:p>
+                  </a:txBody>
+                  <a:tcPr marL="91440" marR="91440" marT="45720" marB="45720" anchor="ctr">
+                    <a:lnL w="6350" cap="flat" cmpd="sng" algn="ctr">
+                      <a:solidFill>
+                        <a:srgbClr val="E3E8E9"/>
+                      </a:solidFill>
+                      <a:prstDash val="solid"/>
+                      <a:round/>
+                      <a:headEnd type="none" w="med" len="med"/>
+                      <a:tailEnd type="none" w="med" len="med"/>
+                    </a:lnL>
+                    <a:lnR w="6350" cap="flat" cmpd="sng" algn="ctr">
+                      <a:solidFill>
+                        <a:srgbClr val="E3E8E9"/>
+                      </a:solidFill>
+                      <a:prstDash val="solid"/>
+                      <a:round/>
+                      <a:headEnd type="none" w="med" len="med"/>
+                      <a:tailEnd type="none" w="med" len="med"/>
+                    </a:lnR>
+                    <a:lnT w="6350" cap="flat" cmpd="sng" algn="ctr">
+                      <a:solidFill>
+                        <a:srgbClr val="E3E8E9"/>
+                      </a:solidFill>
+                      <a:prstDash val="solid"/>
+                      <a:round/>
+                      <a:headEnd type="none" w="med" len="med"/>
+                      <a:tailEnd type="none" w="med" len="med"/>
+                    </a:lnT>
+                    <a:lnB w="6350" cap="flat" cmpd="sng" algn="ctr">
+                      <a:solidFill>
+                        <a:srgbClr val="E3E8E9"/>
+                      </a:solidFill>
+                      <a:prstDash val="solid"/>
+                      <a:round/>
+                      <a:headEnd type="none" w="med" len="med"/>
+                      <a:tailEnd type="none" w="med" len="med"/>
+                    </a:lnB>
+                    <a:solidFill>
+                      <a:srgbClr val="FFFFFF"/>
+                    </a:solidFill>
+                  </a:tcPr>
+                </a:tc>
+                <a:tc>
+                  <a:txBody>
+                    <a:bodyPr/>
+                    <a:lstStyle/>
+                    <a:p>
+                      <a:pPr indent="0" marL="0">
+                        <a:buNone/>
+                      </a:pPr>
+                      <a:r>
+                        <a:rPr lang="en-US" sz="930" dirty="0">
+                          <a:solidFill>
+                            <a:srgbClr val="5B6B73"/>
+                          </a:solidFill>
+                          <a:latin typeface="Calibri" pitchFamily="34" charset="0"/>
+                          <a:ea typeface="Calibri" pitchFamily="34" charset="-122"/>
+                          <a:cs typeface="Calibri" pitchFamily="34" charset="-120"/>
+                        </a:rPr>
+                        <a:t>FPSO Bravo</a:t>
+                      </a:r>
+                      <a:endParaRPr lang="en-US" sz="930" dirty="0">
+                        <a:latin typeface="Calibri" charset="0"/>
+                        <a:ea typeface="Calibri" charset="0"/>
+                        <a:cs typeface="Calibri" charset="0"/>
+                      </a:endParaRPr>
+                    </a:p>
+                  </a:txBody>
+                  <a:tcPr marL="91440" marR="91440" marT="45720" marB="45720" anchor="ctr">
+                    <a:lnL w="6350" cap="flat" cmpd="sng" algn="ctr">
+                      <a:solidFill>
+                        <a:srgbClr val="E3E8E9"/>
+                      </a:solidFill>
+                      <a:prstDash val="solid"/>
+                      <a:round/>
+                      <a:headEnd type="none" w="med" len="med"/>
+                      <a:tailEnd type="none" w="med" len="med"/>
+                    </a:lnL>
+                    <a:lnR w="6350" cap="flat" cmpd="sng" algn="ctr">
+                      <a:solidFill>
+                        <a:srgbClr val="E3E8E9"/>
+                      </a:solidFill>
+                      <a:prstDash val="solid"/>
+                      <a:round/>
+                      <a:headEnd type="none" w="med" len="med"/>
+                      <a:tailEnd type="none" w="med" len="med"/>
+                    </a:lnR>
+                    <a:lnT w="6350" cap="flat" cmpd="sng" algn="ctr">
+                      <a:solidFill>
+                        <a:srgbClr val="E3E8E9"/>
+                      </a:solidFill>
+                      <a:prstDash val="solid"/>
+                      <a:round/>
+                      <a:headEnd type="none" w="med" len="med"/>
+                      <a:tailEnd type="none" w="med" len="med"/>
+                    </a:lnT>
+                    <a:lnB w="6350" cap="flat" cmpd="sng" algn="ctr">
+                      <a:solidFill>
+                        <a:srgbClr val="E3E8E9"/>
+                      </a:solidFill>
+                      <a:prstDash val="solid"/>
+                      <a:round/>
+                      <a:headEnd type="none" w="med" len="med"/>
+                      <a:tailEnd type="none" w="med" len="med"/>
+                    </a:lnB>
+                    <a:solidFill>
+                      <a:srgbClr val="FFFFFF"/>
+                    </a:solidFill>
+                  </a:tcPr>
+                </a:tc>
+                <a:tc>
+                  <a:txBody>
+                    <a:bodyPr/>
+                    <a:lstStyle/>
+                    <a:p>
+                      <a:pPr indent="0" marL="0">
+                        <a:buNone/>
+                      </a:pPr>
+                      <a:r>
+                        <a:rPr lang="en-US" sz="900" dirty="0">
+                          <a:solidFill>
+                            <a:srgbClr val="5B6B73"/>
+                          </a:solidFill>
+                          <a:latin typeface="Calibri" pitchFamily="34" charset="0"/>
+                          <a:ea typeface="Calibri" pitchFamily="34" charset="-122"/>
+                          <a:cs typeface="Calibri" pitchFamily="34" charset="-120"/>
+                        </a:rPr>
+                        <a:t>EIM - Manutenção &amp; Integridade</a:t>
+                      </a:r>
+                      <a:endParaRPr lang="en-US" sz="900" dirty="0">
+                        <a:latin typeface="Calibri" charset="0"/>
+                        <a:ea typeface="Calibri" charset="0"/>
+                        <a:cs typeface="Calibri" charset="0"/>
+                      </a:endParaRPr>
+                    </a:p>
+                  </a:txBody>
+                  <a:tcPr marL="91440" marR="91440" marT="45720" marB="45720" anchor="ctr">
+                    <a:lnL w="6350" cap="flat" cmpd="sng" algn="ctr">
+                      <a:solidFill>
+                        <a:srgbClr val="E3E8E9"/>
+                      </a:solidFill>
+                      <a:prstDash val="solid"/>
+                      <a:round/>
+                      <a:headEnd type="none" w="med" len="med"/>
+                      <a:tailEnd type="none" w="med" len="med"/>
+                    </a:lnL>
+                    <a:lnR w="6350" cap="flat" cmpd="sng" algn="ctr">
+                      <a:solidFill>
+                        <a:srgbClr val="E3E8E9"/>
+                      </a:solidFill>
+                      <a:prstDash val="solid"/>
+                      <a:round/>
+                      <a:headEnd type="none" w="med" len="med"/>
+                      <a:tailEnd type="none" w="med" len="med"/>
+                    </a:lnR>
+                    <a:lnT w="6350" cap="flat" cmpd="sng" algn="ctr">
+                      <a:solidFill>
+                        <a:srgbClr val="E3E8E9"/>
+                      </a:solidFill>
+                      <a:prstDash val="solid"/>
+                      <a:round/>
+                      <a:headEnd type="none" w="med" len="med"/>
+                      <a:tailEnd type="none" w="med" len="med"/>
+                    </a:lnT>
+                    <a:lnB w="6350" cap="flat" cmpd="sng" algn="ctr">
+                      <a:solidFill>
+                        <a:srgbClr val="E3E8E9"/>
+                      </a:solidFill>
+                      <a:prstDash val="solid"/>
+                      <a:round/>
+                      <a:headEnd type="none" w="med" len="med"/>
+                      <a:tailEnd type="none" w="med" len="med"/>
+                    </a:lnB>
+                    <a:solidFill>
+                      <a:srgbClr val="FFFFFF"/>
+                    </a:solidFill>
+                  </a:tcPr>
+                </a:tc>
+                <a:tc>
+                  <a:txBody>
+                    <a:bodyPr/>
+                    <a:lstStyle/>
+                    <a:p>
+                      <a:pPr indent="0" marL="0">
+                        <a:buNone/>
+                      </a:pPr>
+                      <a:r>
+                        <a:rPr lang="en-US" sz="900" dirty="0">
+                          <a:solidFill>
+                            <a:srgbClr val="5B6B73"/>
+                          </a:solidFill>
+                          <a:latin typeface="Calibri" pitchFamily="34" charset="0"/>
+                          <a:ea typeface="Calibri" pitchFamily="34" charset="-122"/>
+                          <a:cs typeface="Calibri" pitchFamily="34" charset="-120"/>
+                        </a:rPr>
+                        <a:t>Rotina Operacional</a:t>
+                      </a:r>
+                      <a:endParaRPr lang="en-US" sz="900" dirty="0">
+                        <a:latin typeface="Calibri" charset="0"/>
+                        <a:ea typeface="Calibri" charset="0"/>
+                        <a:cs typeface="Calibri" charset="0"/>
+                      </a:endParaRPr>
+                    </a:p>
+                  </a:txBody>
+                  <a:tcPr marL="91440" marR="91440" marT="45720" marB="45720" anchor="ctr">
+                    <a:lnL w="6350" cap="flat" cmpd="sng" algn="ctr">
+                      <a:solidFill>
+                        <a:srgbClr val="E3E8E9"/>
+                      </a:solidFill>
+                      <a:prstDash val="solid"/>
+                      <a:round/>
+                      <a:headEnd type="none" w="med" len="med"/>
+                      <a:tailEnd type="none" w="med" len="med"/>
+                    </a:lnL>
+                    <a:lnR w="6350" cap="flat" cmpd="sng" algn="ctr">
+                      <a:solidFill>
+                        <a:srgbClr val="E3E8E9"/>
+                      </a:solidFill>
+                      <a:prstDash val="solid"/>
+                      <a:round/>
+                      <a:headEnd type="none" w="med" len="med"/>
+                      <a:tailEnd type="none" w="med" len="med"/>
+                    </a:lnR>
+                    <a:lnT w="6350" cap="flat" cmpd="sng" algn="ctr">
+                      <a:solidFill>
+                        <a:srgbClr val="E3E8E9"/>
+                      </a:solidFill>
+                      <a:prstDash val="solid"/>
+                      <a:round/>
+                      <a:headEnd type="none" w="med" len="med"/>
+                      <a:tailEnd type="none" w="med" len="med"/>
+                    </a:lnT>
+                    <a:lnB w="6350" cap="flat" cmpd="sng" algn="ctr">
+                      <a:solidFill>
+                        <a:srgbClr val="E3E8E9"/>
+                      </a:solidFill>
+                      <a:prstDash val="solid"/>
+                      <a:round/>
+                      <a:headEnd type="none" w="med" len="med"/>
+                      <a:tailEnd type="none" w="med" len="med"/>
+                    </a:lnB>
+                    <a:solidFill>
+                      <a:srgbClr val="FFFFFF"/>
+                    </a:solidFill>
+                  </a:tcPr>
+                </a:tc>
+                <a:tc>
+                  <a:txBody>
+                    <a:bodyPr/>
+                    <a:lstStyle/>
+                    <a:p>
+                      <a:pPr algn="r" indent="0" marL="0">
+                        <a:buNone/>
+                      </a:pPr>
+                      <a:r>
+                        <a:rPr lang="en-US" sz="970" b="1" dirty="0">
+                          <a:solidFill>
+                            <a:srgbClr val="0B2A3D"/>
+                          </a:solidFill>
+                          <a:latin typeface="Calibri" pitchFamily="34" charset="0"/>
+                          <a:ea typeface="Calibri" pitchFamily="34" charset="-122"/>
+                          <a:cs typeface="Calibri" pitchFamily="34" charset="-120"/>
+                        </a:rPr>
+                        <a:t>US$ 2,0 mi</a:t>
+                      </a:r>
+                      <a:endParaRPr lang="en-US" sz="970" dirty="0">
+                        <a:latin typeface="Calibri" charset="0"/>
+                        <a:ea typeface="Calibri" charset="0"/>
+                        <a:cs typeface="Calibri" charset="0"/>
+                      </a:endParaRPr>
+                    </a:p>
+                  </a:txBody>
+                  <a:tcPr marL="91440" marR="91440" marT="45720" marB="45720" anchor="ctr">
+                    <a:lnL w="6350" cap="flat" cmpd="sng" algn="ctr">
+                      <a:solidFill>
+                        <a:srgbClr val="E3E8E9"/>
+                      </a:solidFill>
+                      <a:prstDash val="solid"/>
+                      <a:round/>
+                      <a:headEnd type="none" w="med" len="med"/>
+                      <a:tailEnd type="none" w="med" len="med"/>
+                    </a:lnL>
+                    <a:lnR w="6350" cap="flat" cmpd="sng" algn="ctr">
+                      <a:solidFill>
+                        <a:srgbClr val="E3E8E9"/>
+                      </a:solidFill>
+                      <a:prstDash val="solid"/>
+                      <a:round/>
+                      <a:headEnd type="none" w="med" len="med"/>
+                      <a:tailEnd type="none" w="med" len="med"/>
+                    </a:lnR>
+                    <a:lnT w="6350" cap="flat" cmpd="sng" algn="ctr">
+                      <a:solidFill>
+                        <a:srgbClr val="E3E8E9"/>
+                      </a:solidFill>
+                      <a:prstDash val="solid"/>
+                      <a:round/>
+                      <a:headEnd type="none" w="med" len="med"/>
+                      <a:tailEnd type="none" w="med" len="med"/>
+                    </a:lnT>
+                    <a:lnB w="6350" cap="flat" cmpd="sng" algn="ctr">
+                      <a:solidFill>
+                        <a:srgbClr val="E3E8E9"/>
+                      </a:solidFill>
+                      <a:prstDash val="solid"/>
+                      <a:round/>
+                      <a:headEnd type="none" w="med" len="med"/>
+                      <a:tailEnd type="none" w="med" len="med"/>
+                    </a:lnB>
+                    <a:solidFill>
+                      <a:srgbClr val="FFFFFF"/>
+                    </a:solidFill>
+                  </a:tcPr>
+                </a:tc>
+              </a:tr>
+              <a:tr h="457200">
+                <a:tc>
+                  <a:txBody>
+                    <a:bodyPr/>
+                    <a:lstStyle/>
+                    <a:p>
+                      <a:pPr algn="ctr" indent="0" marL="0">
+                        <a:buNone/>
+                      </a:pPr>
+                      <a:r>
+                        <a:rPr lang="en-US" sz="950" dirty="0">
+                          <a:solidFill>
+                            <a:srgbClr val="5B6B73"/>
+                          </a:solidFill>
+                          <a:latin typeface="Calibri" pitchFamily="34" charset="0"/>
+                          <a:ea typeface="Calibri" pitchFamily="34" charset="-122"/>
+                          <a:cs typeface="Calibri" pitchFamily="34" charset="-120"/>
+                        </a:rPr>
+                        <a:t>6</a:t>
+                      </a:r>
+                      <a:endParaRPr lang="en-US" sz="950" dirty="0">
+                        <a:latin typeface="Calibri" charset="0"/>
+                        <a:ea typeface="Calibri" charset="0"/>
+                        <a:cs typeface="Calibri" charset="0"/>
+                      </a:endParaRPr>
+                    </a:p>
+                  </a:txBody>
+                  <a:tcPr marL="91440" marR="91440" marT="45720" marB="45720" anchor="ctr">
+                    <a:lnL w="6350" cap="flat" cmpd="sng" algn="ctr">
+                      <a:solidFill>
+                        <a:srgbClr val="E3E8E9"/>
+                      </a:solidFill>
+                      <a:prstDash val="solid"/>
+                      <a:round/>
+                      <a:headEnd type="none" w="med" len="med"/>
+                      <a:tailEnd type="none" w="med" len="med"/>
+                    </a:lnL>
+                    <a:lnR w="6350" cap="flat" cmpd="sng" algn="ctr">
+                      <a:solidFill>
+                        <a:srgbClr val="E3E8E9"/>
+                      </a:solidFill>
+                      <a:prstDash val="solid"/>
+                      <a:round/>
+                      <a:headEnd type="none" w="med" len="med"/>
+                      <a:tailEnd type="none" w="med" len="med"/>
+                    </a:lnR>
+                    <a:lnT w="6350" cap="flat" cmpd="sng" algn="ctr">
+                      <a:solidFill>
+                        <a:srgbClr val="E3E8E9"/>
+                      </a:solidFill>
+                      <a:prstDash val="solid"/>
+                      <a:round/>
+                      <a:headEnd type="none" w="med" len="med"/>
+                      <a:tailEnd type="none" w="med" len="med"/>
+                    </a:lnT>
+                    <a:lnB w="6350" cap="flat" cmpd="sng" algn="ctr">
+                      <a:solidFill>
+                        <a:srgbClr val="E3E8E9"/>
+                      </a:solidFill>
+                      <a:prstDash val="solid"/>
+                      <a:round/>
+                      <a:headEnd type="none" w="med" len="med"/>
+                      <a:tailEnd type="none" w="med" len="med"/>
+                    </a:lnB>
+                    <a:solidFill>
+                      <a:srgbClr val="F0F4F5"/>
+                    </a:solidFill>
+                  </a:tcPr>
+                </a:tc>
+                <a:tc>
+                  <a:txBody>
+                    <a:bodyPr/>
+                    <a:lstStyle/>
+                    <a:p>
+                      <a:pPr indent="0" marL="0">
+                        <a:buNone/>
+                      </a:pPr>
+                      <a:r>
+                        <a:rPr lang="en-US" sz="970" dirty="0">
+                          <a:solidFill>
+                            <a:srgbClr val="1C2B33"/>
+                          </a:solidFill>
+                          <a:latin typeface="Calibri" pitchFamily="34" charset="0"/>
+                          <a:ea typeface="Calibri" pitchFamily="34" charset="-122"/>
+                          <a:cs typeface="Calibri" pitchFamily="34" charset="-120"/>
+                        </a:rPr>
+                        <a:t>Time de Construção - Instalações (Fabric, Constr e Mont.)</a:t>
+                      </a:r>
+                      <a:endParaRPr lang="en-US" sz="970" dirty="0">
+                        <a:latin typeface="Calibri" charset="0"/>
+                        <a:ea typeface="Calibri" charset="0"/>
+                        <a:cs typeface="Calibri" charset="0"/>
+                      </a:endParaRPr>
+                    </a:p>
+                  </a:txBody>
+                  <a:tcPr marL="91440" marR="91440" marT="45720" marB="45720" anchor="ctr">
+                    <a:lnL w="6350" cap="flat" cmpd="sng" algn="ctr">
+                      <a:solidFill>
+                        <a:srgbClr val="E3E8E9"/>
+                      </a:solidFill>
+                      <a:prstDash val="solid"/>
+                      <a:round/>
+                      <a:headEnd type="none" w="med" len="med"/>
+                      <a:tailEnd type="none" w="med" len="med"/>
+                    </a:lnL>
+                    <a:lnR w="6350" cap="flat" cmpd="sng" algn="ctr">
+                      <a:solidFill>
+                        <a:srgbClr val="E3E8E9"/>
+                      </a:solidFill>
+                      <a:prstDash val="solid"/>
+                      <a:round/>
+                      <a:headEnd type="none" w="med" len="med"/>
+                      <a:tailEnd type="none" w="med" len="med"/>
+                    </a:lnR>
+                    <a:lnT w="6350" cap="flat" cmpd="sng" algn="ctr">
+                      <a:solidFill>
+                        <a:srgbClr val="E3E8E9"/>
+                      </a:solidFill>
+                      <a:prstDash val="solid"/>
+                      <a:round/>
+                      <a:headEnd type="none" w="med" len="med"/>
+                      <a:tailEnd type="none" w="med" len="med"/>
+                    </a:lnT>
+                    <a:lnB w="6350" cap="flat" cmpd="sng" algn="ctr">
+                      <a:solidFill>
+                        <a:srgbClr val="E3E8E9"/>
+                      </a:solidFill>
+                      <a:prstDash val="solid"/>
+                      <a:round/>
+                      <a:headEnd type="none" w="med" len="med"/>
+                      <a:tailEnd type="none" w="med" len="med"/>
+                    </a:lnB>
+                    <a:solidFill>
+                      <a:srgbClr val="F0F4F5"/>
+                    </a:solidFill>
+                  </a:tcPr>
+                </a:tc>
+                <a:tc>
+                  <a:txBody>
+                    <a:bodyPr/>
+                    <a:lstStyle/>
+                    <a:p>
+                      <a:pPr indent="0" marL="0">
+                        <a:buNone/>
+                      </a:pPr>
+                      <a:r>
+                        <a:rPr lang="en-US" sz="930" dirty="0">
+                          <a:solidFill>
+                            <a:srgbClr val="5B6B73"/>
+                          </a:solidFill>
+                          <a:latin typeface="Calibri" pitchFamily="34" charset="0"/>
+                          <a:ea typeface="Calibri" pitchFamily="34" charset="-122"/>
+                          <a:cs typeface="Calibri" pitchFamily="34" charset="-120"/>
+                        </a:rPr>
                         <a:t>FPSO Peregrino</a:t>
                       </a:r>
-                      <a:endParaRPr lang="en-US" sz="1000" dirty="0">
+                      <a:endParaRPr lang="en-US" sz="930" dirty="0">
+                        <a:latin typeface="Calibri" charset="0"/>
+                        <a:ea typeface="Calibri" charset="0"/>
+                        <a:cs typeface="Calibri" charset="0"/>
+                      </a:endParaRPr>
+                    </a:p>
+                  </a:txBody>
+                  <a:tcPr marL="91440" marR="91440" marT="45720" marB="45720" anchor="ctr">
+                    <a:lnL w="6350" cap="flat" cmpd="sng" algn="ctr">
+                      <a:solidFill>
+                        <a:srgbClr val="E3E8E9"/>
+                      </a:solidFill>
+                      <a:prstDash val="solid"/>
+                      <a:round/>
+                      <a:headEnd type="none" w="med" len="med"/>
+                      <a:tailEnd type="none" w="med" len="med"/>
+                    </a:lnL>
+                    <a:lnR w="6350" cap="flat" cmpd="sng" algn="ctr">
+                      <a:solidFill>
+                        <a:srgbClr val="E3E8E9"/>
+                      </a:solidFill>
+                      <a:prstDash val="solid"/>
+                      <a:round/>
+                      <a:headEnd type="none" w="med" len="med"/>
+                      <a:tailEnd type="none" w="med" len="med"/>
+                    </a:lnR>
+                    <a:lnT w="6350" cap="flat" cmpd="sng" algn="ctr">
+                      <a:solidFill>
+                        <a:srgbClr val="E3E8E9"/>
+                      </a:solidFill>
+                      <a:prstDash val="solid"/>
+                      <a:round/>
+                      <a:headEnd type="none" w="med" len="med"/>
+                      <a:tailEnd type="none" w="med" len="med"/>
+                    </a:lnT>
+                    <a:lnB w="6350" cap="flat" cmpd="sng" algn="ctr">
+                      <a:solidFill>
+                        <a:srgbClr val="E3E8E9"/>
+                      </a:solidFill>
+                      <a:prstDash val="solid"/>
+                      <a:round/>
+                      <a:headEnd type="none" w="med" len="med"/>
+                      <a:tailEnd type="none" w="med" len="med"/>
+                    </a:lnB>
+                    <a:solidFill>
+                      <a:srgbClr val="F0F4F5"/>
+                    </a:solidFill>
+                  </a:tcPr>
+                </a:tc>
+                <a:tc>
+                  <a:txBody>
+                    <a:bodyPr/>
+                    <a:lstStyle/>
+                    <a:p>
+                      <a:pPr indent="0" marL="0">
+                        <a:buNone/>
+                      </a:pPr>
+                      <a:r>
+                        <a:rPr lang="en-US" sz="900" dirty="0">
+                          <a:solidFill>
+                            <a:srgbClr val="5B6B73"/>
+                          </a:solidFill>
+                          <a:latin typeface="Calibri" pitchFamily="34" charset="0"/>
+                          <a:ea typeface="Calibri" pitchFamily="34" charset="-122"/>
+                          <a:cs typeface="Calibri" pitchFamily="34" charset="-120"/>
+                        </a:rPr>
+                        <a:t>CON - Construção</a:t>
+                      </a:r>
+                      <a:endParaRPr lang="en-US" sz="900" dirty="0">
+                        <a:latin typeface="Calibri" charset="0"/>
+                        <a:ea typeface="Calibri" charset="0"/>
+                        <a:cs typeface="Calibri" charset="0"/>
+                      </a:endParaRPr>
+                    </a:p>
+                  </a:txBody>
+                  <a:tcPr marL="91440" marR="91440" marT="45720" marB="45720" anchor="ctr">
+                    <a:lnL w="6350" cap="flat" cmpd="sng" algn="ctr">
+                      <a:solidFill>
+                        <a:srgbClr val="E3E8E9"/>
+                      </a:solidFill>
+                      <a:prstDash val="solid"/>
+                      <a:round/>
+                      <a:headEnd type="none" w="med" len="med"/>
+                      <a:tailEnd type="none" w="med" len="med"/>
+                    </a:lnL>
+                    <a:lnR w="6350" cap="flat" cmpd="sng" algn="ctr">
+                      <a:solidFill>
+                        <a:srgbClr val="E3E8E9"/>
+                      </a:solidFill>
+                      <a:prstDash val="solid"/>
+                      <a:round/>
+                      <a:headEnd type="none" w="med" len="med"/>
+                      <a:tailEnd type="none" w="med" len="med"/>
+                    </a:lnR>
+                    <a:lnT w="6350" cap="flat" cmpd="sng" algn="ctr">
+                      <a:solidFill>
+                        <a:srgbClr val="E3E8E9"/>
+                      </a:solidFill>
+                      <a:prstDash val="solid"/>
+                      <a:round/>
+                      <a:headEnd type="none" w="med" len="med"/>
+                      <a:tailEnd type="none" w="med" len="med"/>
+                    </a:lnT>
+                    <a:lnB w="6350" cap="flat" cmpd="sng" algn="ctr">
+                      <a:solidFill>
+                        <a:srgbClr val="E3E8E9"/>
+                      </a:solidFill>
+                      <a:prstDash val="solid"/>
+                      <a:round/>
+                      <a:headEnd type="none" w="med" len="med"/>
+                      <a:tailEnd type="none" w="med" len="med"/>
+                    </a:lnB>
+                    <a:solidFill>
+                      <a:srgbClr val="F0F4F5"/>
+                    </a:solidFill>
+                  </a:tcPr>
+                </a:tc>
+                <a:tc>
+                  <a:txBody>
+                    <a:bodyPr/>
+                    <a:lstStyle/>
+                    <a:p>
+                      <a:pPr indent="0" marL="0">
+                        <a:buNone/>
+                      </a:pPr>
+                      <a:r>
+                        <a:rPr lang="en-US" sz="900" dirty="0">
+                          <a:solidFill>
+                            <a:srgbClr val="5B6B73"/>
+                          </a:solidFill>
+                          <a:latin typeface="Calibri" pitchFamily="34" charset="0"/>
+                          <a:ea typeface="Calibri" pitchFamily="34" charset="-122"/>
+                          <a:cs typeface="Calibri" pitchFamily="34" charset="-120"/>
+                        </a:rPr>
+                        <a:t>Integridade e Regulatório</a:t>
+                      </a:r>
+                      <a:endParaRPr lang="en-US" sz="900" dirty="0">
+                        <a:latin typeface="Calibri" charset="0"/>
+                        <a:ea typeface="Calibri" charset="0"/>
+                        <a:cs typeface="Calibri" charset="0"/>
+                      </a:endParaRPr>
+                    </a:p>
+                  </a:txBody>
+                  <a:tcPr marL="91440" marR="91440" marT="45720" marB="45720" anchor="ctr">
+                    <a:lnL w="6350" cap="flat" cmpd="sng" algn="ctr">
+                      <a:solidFill>
+                        <a:srgbClr val="E3E8E9"/>
+                      </a:solidFill>
+                      <a:prstDash val="solid"/>
+                      <a:round/>
+                      <a:headEnd type="none" w="med" len="med"/>
+                      <a:tailEnd type="none" w="med" len="med"/>
+                    </a:lnL>
+                    <a:lnR w="6350" cap="flat" cmpd="sng" algn="ctr">
+                      <a:solidFill>
+                        <a:srgbClr val="E3E8E9"/>
+                      </a:solidFill>
+                      <a:prstDash val="solid"/>
+                      <a:round/>
+                      <a:headEnd type="none" w="med" len="med"/>
+                      <a:tailEnd type="none" w="med" len="med"/>
+                    </a:lnR>
+                    <a:lnT w="6350" cap="flat" cmpd="sng" algn="ctr">
+                      <a:solidFill>
+                        <a:srgbClr val="E3E8E9"/>
+                      </a:solidFill>
+                      <a:prstDash val="solid"/>
+                      <a:round/>
+                      <a:headEnd type="none" w="med" len="med"/>
+                      <a:tailEnd type="none" w="med" len="med"/>
+                    </a:lnT>
+                    <a:lnB w="6350" cap="flat" cmpd="sng" algn="ctr">
+                      <a:solidFill>
+                        <a:srgbClr val="E3E8E9"/>
+                      </a:solidFill>
+                      <a:prstDash val="solid"/>
+                      <a:round/>
+                      <a:headEnd type="none" w="med" len="med"/>
+                      <a:tailEnd type="none" w="med" len="med"/>
+                    </a:lnB>
+                    <a:solidFill>
+                      <a:srgbClr val="F0F4F5"/>
+                    </a:solidFill>
+                  </a:tcPr>
+                </a:tc>
+                <a:tc>
+                  <a:txBody>
+                    <a:bodyPr/>
+                    <a:lstStyle/>
+                    <a:p>
+                      <a:pPr algn="r" indent="0" marL="0">
+                        <a:buNone/>
+                      </a:pPr>
+                      <a:r>
+                        <a:rPr lang="en-US" sz="970" b="1" dirty="0">
+                          <a:solidFill>
+                            <a:srgbClr val="0B2A3D"/>
+                          </a:solidFill>
+                          <a:latin typeface="Calibri" pitchFamily="34" charset="0"/>
+                          <a:ea typeface="Calibri" pitchFamily="34" charset="-122"/>
+                          <a:cs typeface="Calibri" pitchFamily="34" charset="-120"/>
+                        </a:rPr>
+                        <a:t>US$ 2,0 mi</a:t>
+                      </a:r>
+                      <a:endParaRPr lang="en-US" sz="970" dirty="0">
+                        <a:latin typeface="Calibri" charset="0"/>
+                        <a:ea typeface="Calibri" charset="0"/>
+                        <a:cs typeface="Calibri" charset="0"/>
+                      </a:endParaRPr>
+                    </a:p>
+                  </a:txBody>
+                  <a:tcPr marL="91440" marR="91440" marT="45720" marB="45720" anchor="ctr">
+                    <a:lnL w="6350" cap="flat" cmpd="sng" algn="ctr">
+                      <a:solidFill>
+                        <a:srgbClr val="E3E8E9"/>
+                      </a:solidFill>
+                      <a:prstDash val="solid"/>
+                      <a:round/>
+                      <a:headEnd type="none" w="med" len="med"/>
+                      <a:tailEnd type="none" w="med" len="med"/>
+                    </a:lnL>
+                    <a:lnR w="6350" cap="flat" cmpd="sng" algn="ctr">
+                      <a:solidFill>
+                        <a:srgbClr val="E3E8E9"/>
+                      </a:solidFill>
+                      <a:prstDash val="solid"/>
+                      <a:round/>
+                      <a:headEnd type="none" w="med" len="med"/>
+                      <a:tailEnd type="none" w="med" len="med"/>
+                    </a:lnR>
+                    <a:lnT w="6350" cap="flat" cmpd="sng" algn="ctr">
+                      <a:solidFill>
+                        <a:srgbClr val="E3E8E9"/>
+                      </a:solidFill>
+                      <a:prstDash val="solid"/>
+                      <a:round/>
+                      <a:headEnd type="none" w="med" len="med"/>
+                      <a:tailEnd type="none" w="med" len="med"/>
+                    </a:lnT>
+                    <a:lnB w="6350" cap="flat" cmpd="sng" algn="ctr">
+                      <a:solidFill>
+                        <a:srgbClr val="E3E8E9"/>
+                      </a:solidFill>
+                      <a:prstDash val="solid"/>
+                      <a:round/>
+                      <a:headEnd type="none" w="med" len="med"/>
+                      <a:tailEnd type="none" w="med" len="med"/>
+                    </a:lnB>
+                    <a:solidFill>
+                      <a:srgbClr val="F0F4F5"/>
+                    </a:solidFill>
+                  </a:tcPr>
+                </a:tc>
+              </a:tr>
+              <a:tr h="457200">
+                <a:tc>
+                  <a:txBody>
+                    <a:bodyPr/>
+                    <a:lstStyle/>
+                    <a:p>
+                      <a:pPr algn="ctr" indent="0" marL="0">
+                        <a:buNone/>
+                      </a:pPr>
+                      <a:r>
+                        <a:rPr lang="en-US" sz="950" dirty="0">
+                          <a:solidFill>
+                            <a:srgbClr val="5B6B73"/>
+                          </a:solidFill>
+                          <a:latin typeface="Calibri" pitchFamily="34" charset="0"/>
+                          <a:ea typeface="Calibri" pitchFamily="34" charset="-122"/>
+                          <a:cs typeface="Calibri" pitchFamily="34" charset="-120"/>
+                        </a:rPr>
+                        <a:t>7</a:t>
+                      </a:r>
+                      <a:endParaRPr lang="en-US" sz="950" dirty="0">
                         <a:latin typeface="Calibri" charset="0"/>
                         <a:ea typeface="Calibri" charset="0"/>
                         <a:cs typeface="Calibri" charset="0"/>
@@ -9344,7 +11805,75 @@
                         <a:buNone/>
                       </a:pPr>
                       <a:r>
-                        <a:rPr lang="en-US" sz="1000" dirty="0">
+                        <a:rPr lang="en-US" sz="970" dirty="0">
+                          <a:solidFill>
+                            <a:srgbClr val="1C2B33"/>
+                          </a:solidFill>
+                          <a:latin typeface="Calibri" pitchFamily="34" charset="0"/>
+                          <a:ea typeface="Calibri" pitchFamily="34" charset="-122"/>
+                          <a:cs typeface="Calibri" pitchFamily="34" charset="-120"/>
+                        </a:rPr>
+                        <a:t>Time de Construção - Instalações (Fabric, Constr e Mont.)</a:t>
+                      </a:r>
+                      <a:endParaRPr lang="en-US" sz="970" dirty="0">
+                        <a:latin typeface="Calibri" charset="0"/>
+                        <a:ea typeface="Calibri" charset="0"/>
+                        <a:cs typeface="Calibri" charset="0"/>
+                      </a:endParaRPr>
+                    </a:p>
+                  </a:txBody>
+                  <a:tcPr marL="91440" marR="91440" marT="45720" marB="45720" anchor="ctr">
+                    <a:lnL w="6350" cap="flat" cmpd="sng" algn="ctr">
+                      <a:solidFill>
+                        <a:srgbClr val="E3E8E9"/>
+                      </a:solidFill>
+                      <a:prstDash val="solid"/>
+                      <a:round/>
+                      <a:headEnd type="none" w="med" len="med"/>
+                      <a:tailEnd type="none" w="med" len="med"/>
+                    </a:lnL>
+                    <a:lnR w="6350" cap="flat" cmpd="sng" algn="ctr">
+                      <a:solidFill>
+                        <a:srgbClr val="E3E8E9"/>
+                      </a:solidFill>
+                      <a:prstDash val="solid"/>
+                      <a:round/>
+                      <a:headEnd type="none" w="med" len="med"/>
+                      <a:tailEnd type="none" w="med" len="med"/>
+                    </a:lnR>
+                    <a:lnT w="6350" cap="flat" cmpd="sng" algn="ctr">
+                      <a:solidFill>
+                        <a:srgbClr val="E3E8E9"/>
+                      </a:solidFill>
+                      <a:prstDash val="solid"/>
+                      <a:round/>
+                      <a:headEnd type="none" w="med" len="med"/>
+                      <a:tailEnd type="none" w="med" len="med"/>
+                    </a:lnT>
+                    <a:lnB w="6350" cap="flat" cmpd="sng" algn="ctr">
+                      <a:solidFill>
+                        <a:srgbClr val="E3E8E9"/>
+                      </a:solidFill>
+                      <a:prstDash val="solid"/>
+                      <a:round/>
+                      <a:headEnd type="none" w="med" len="med"/>
+                      <a:tailEnd type="none" w="med" len="med"/>
+                    </a:lnB>
+                    <a:solidFill>
+                      <a:srgbClr val="FFFFFF"/>
+                    </a:solidFill>
+                  </a:tcPr>
+                </a:tc>
+                <a:tc>
+                  <a:txBody>
+                    <a:bodyPr/>
+                    <a:lstStyle/>
+                    <a:p>
+                      <a:pPr indent="0" marL="0">
+                        <a:buNone/>
+                      </a:pPr>
+                      <a:r>
+                        <a:rPr lang="en-US" sz="930" dirty="0">
                           <a:solidFill>
                             <a:srgbClr val="5B6B73"/>
                           </a:solidFill>
@@ -9352,9 +11881,9 @@
                           <a:ea typeface="Calibri" pitchFamily="34" charset="-122"/>
                           <a:cs typeface="Calibri" pitchFamily="34" charset="-120"/>
                         </a:rPr>
-                        <a:t>PLN - Planejamento</a:t>
-                      </a:r>
-                      <a:endParaRPr lang="en-US" sz="1000" dirty="0">
+                        <a:t>PLAT A</a:t>
+                      </a:r>
+                      <a:endParaRPr lang="en-US" sz="930" dirty="0">
                         <a:latin typeface="Calibri" charset="0"/>
                         <a:ea typeface="Calibri" charset="0"/>
                         <a:cs typeface="Calibri" charset="0"/>
@@ -9412,7 +11941,7 @@
                         <a:buNone/>
                       </a:pPr>
                       <a:r>
-                        <a:rPr lang="en-US" sz="1000" dirty="0">
+                        <a:rPr lang="en-US" sz="900" dirty="0">
                           <a:solidFill>
                             <a:srgbClr val="5B6B73"/>
                           </a:solidFill>
@@ -9420,9 +11949,897 @@
                           <a:ea typeface="Calibri" pitchFamily="34" charset="-122"/>
                           <a:cs typeface="Calibri" pitchFamily="34" charset="-120"/>
                         </a:rPr>
+                        <a:t>CON - Construção</a:t>
+                      </a:r>
+                      <a:endParaRPr lang="en-US" sz="900" dirty="0">
+                        <a:latin typeface="Calibri" charset="0"/>
+                        <a:ea typeface="Calibri" charset="0"/>
+                        <a:cs typeface="Calibri" charset="0"/>
+                      </a:endParaRPr>
+                    </a:p>
+                  </a:txBody>
+                  <a:tcPr marL="91440" marR="91440" marT="45720" marB="45720" anchor="ctr">
+                    <a:lnL w="6350" cap="flat" cmpd="sng" algn="ctr">
+                      <a:solidFill>
+                        <a:srgbClr val="E3E8E9"/>
+                      </a:solidFill>
+                      <a:prstDash val="solid"/>
+                      <a:round/>
+                      <a:headEnd type="none" w="med" len="med"/>
+                      <a:tailEnd type="none" w="med" len="med"/>
+                    </a:lnL>
+                    <a:lnR w="6350" cap="flat" cmpd="sng" algn="ctr">
+                      <a:solidFill>
+                        <a:srgbClr val="E3E8E9"/>
+                      </a:solidFill>
+                      <a:prstDash val="solid"/>
+                      <a:round/>
+                      <a:headEnd type="none" w="med" len="med"/>
+                      <a:tailEnd type="none" w="med" len="med"/>
+                    </a:lnR>
+                    <a:lnT w="6350" cap="flat" cmpd="sng" algn="ctr">
+                      <a:solidFill>
+                        <a:srgbClr val="E3E8E9"/>
+                      </a:solidFill>
+                      <a:prstDash val="solid"/>
+                      <a:round/>
+                      <a:headEnd type="none" w="med" len="med"/>
+                      <a:tailEnd type="none" w="med" len="med"/>
+                    </a:lnT>
+                    <a:lnB w="6350" cap="flat" cmpd="sng" algn="ctr">
+                      <a:solidFill>
+                        <a:srgbClr val="E3E8E9"/>
+                      </a:solidFill>
+                      <a:prstDash val="solid"/>
+                      <a:round/>
+                      <a:headEnd type="none" w="med" len="med"/>
+                      <a:tailEnd type="none" w="med" len="med"/>
+                    </a:lnB>
+                    <a:solidFill>
+                      <a:srgbClr val="FFFFFF"/>
+                    </a:solidFill>
+                  </a:tcPr>
+                </a:tc>
+                <a:tc>
+                  <a:txBody>
+                    <a:bodyPr/>
+                    <a:lstStyle/>
+                    <a:p>
+                      <a:pPr indent="0" marL="0">
+                        <a:buNone/>
+                      </a:pPr>
+                      <a:r>
+                        <a:rPr lang="en-US" sz="900" dirty="0">
+                          <a:solidFill>
+                            <a:srgbClr val="5B6B73"/>
+                          </a:solidFill>
+                          <a:latin typeface="Calibri" pitchFamily="34" charset="0"/>
+                          <a:ea typeface="Calibri" pitchFamily="34" charset="-122"/>
+                          <a:cs typeface="Calibri" pitchFamily="34" charset="-120"/>
+                        </a:rPr>
+                        <a:t>Integridade e Regulatório</a:t>
+                      </a:r>
+                      <a:endParaRPr lang="en-US" sz="900" dirty="0">
+                        <a:latin typeface="Calibri" charset="0"/>
+                        <a:ea typeface="Calibri" charset="0"/>
+                        <a:cs typeface="Calibri" charset="0"/>
+                      </a:endParaRPr>
+                    </a:p>
+                  </a:txBody>
+                  <a:tcPr marL="91440" marR="91440" marT="45720" marB="45720" anchor="ctr">
+                    <a:lnL w="6350" cap="flat" cmpd="sng" algn="ctr">
+                      <a:solidFill>
+                        <a:srgbClr val="E3E8E9"/>
+                      </a:solidFill>
+                      <a:prstDash val="solid"/>
+                      <a:round/>
+                      <a:headEnd type="none" w="med" len="med"/>
+                      <a:tailEnd type="none" w="med" len="med"/>
+                    </a:lnL>
+                    <a:lnR w="6350" cap="flat" cmpd="sng" algn="ctr">
+                      <a:solidFill>
+                        <a:srgbClr val="E3E8E9"/>
+                      </a:solidFill>
+                      <a:prstDash val="solid"/>
+                      <a:round/>
+                      <a:headEnd type="none" w="med" len="med"/>
+                      <a:tailEnd type="none" w="med" len="med"/>
+                    </a:lnR>
+                    <a:lnT w="6350" cap="flat" cmpd="sng" algn="ctr">
+                      <a:solidFill>
+                        <a:srgbClr val="E3E8E9"/>
+                      </a:solidFill>
+                      <a:prstDash val="solid"/>
+                      <a:round/>
+                      <a:headEnd type="none" w="med" len="med"/>
+                      <a:tailEnd type="none" w="med" len="med"/>
+                    </a:lnT>
+                    <a:lnB w="6350" cap="flat" cmpd="sng" algn="ctr">
+                      <a:solidFill>
+                        <a:srgbClr val="E3E8E9"/>
+                      </a:solidFill>
+                      <a:prstDash val="solid"/>
+                      <a:round/>
+                      <a:headEnd type="none" w="med" len="med"/>
+                      <a:tailEnd type="none" w="med" len="med"/>
+                    </a:lnB>
+                    <a:solidFill>
+                      <a:srgbClr val="FFFFFF"/>
+                    </a:solidFill>
+                  </a:tcPr>
+                </a:tc>
+                <a:tc>
+                  <a:txBody>
+                    <a:bodyPr/>
+                    <a:lstStyle/>
+                    <a:p>
+                      <a:pPr algn="r" indent="0" marL="0">
+                        <a:buNone/>
+                      </a:pPr>
+                      <a:r>
+                        <a:rPr lang="en-US" sz="970" b="1" dirty="0">
+                          <a:solidFill>
+                            <a:srgbClr val="0B2A3D"/>
+                          </a:solidFill>
+                          <a:latin typeface="Calibri" pitchFamily="34" charset="0"/>
+                          <a:ea typeface="Calibri" pitchFamily="34" charset="-122"/>
+                          <a:cs typeface="Calibri" pitchFamily="34" charset="-120"/>
+                        </a:rPr>
+                        <a:t>US$ 1,5 mi</a:t>
+                      </a:r>
+                      <a:endParaRPr lang="en-US" sz="970" dirty="0">
+                        <a:latin typeface="Calibri" charset="0"/>
+                        <a:ea typeface="Calibri" charset="0"/>
+                        <a:cs typeface="Calibri" charset="0"/>
+                      </a:endParaRPr>
+                    </a:p>
+                  </a:txBody>
+                  <a:tcPr marL="91440" marR="91440" marT="45720" marB="45720" anchor="ctr">
+                    <a:lnL w="6350" cap="flat" cmpd="sng" algn="ctr">
+                      <a:solidFill>
+                        <a:srgbClr val="E3E8E9"/>
+                      </a:solidFill>
+                      <a:prstDash val="solid"/>
+                      <a:round/>
+                      <a:headEnd type="none" w="med" len="med"/>
+                      <a:tailEnd type="none" w="med" len="med"/>
+                    </a:lnL>
+                    <a:lnR w="6350" cap="flat" cmpd="sng" algn="ctr">
+                      <a:solidFill>
+                        <a:srgbClr val="E3E8E9"/>
+                      </a:solidFill>
+                      <a:prstDash val="solid"/>
+                      <a:round/>
+                      <a:headEnd type="none" w="med" len="med"/>
+                      <a:tailEnd type="none" w="med" len="med"/>
+                    </a:lnR>
+                    <a:lnT w="6350" cap="flat" cmpd="sng" algn="ctr">
+                      <a:solidFill>
+                        <a:srgbClr val="E3E8E9"/>
+                      </a:solidFill>
+                      <a:prstDash val="solid"/>
+                      <a:round/>
+                      <a:headEnd type="none" w="med" len="med"/>
+                      <a:tailEnd type="none" w="med" len="med"/>
+                    </a:lnT>
+                    <a:lnB w="6350" cap="flat" cmpd="sng" algn="ctr">
+                      <a:solidFill>
+                        <a:srgbClr val="E3E8E9"/>
+                      </a:solidFill>
+                      <a:prstDash val="solid"/>
+                      <a:round/>
+                      <a:headEnd type="none" w="med" len="med"/>
+                      <a:tailEnd type="none" w="med" len="med"/>
+                    </a:lnB>
+                    <a:solidFill>
+                      <a:srgbClr val="FFFFFF"/>
+                    </a:solidFill>
+                  </a:tcPr>
+                </a:tc>
+              </a:tr>
+              <a:tr h="457200">
+                <a:tc>
+                  <a:txBody>
+                    <a:bodyPr/>
+                    <a:lstStyle/>
+                    <a:p>
+                      <a:pPr algn="ctr" indent="0" marL="0">
+                        <a:buNone/>
+                      </a:pPr>
+                      <a:r>
+                        <a:rPr lang="en-US" sz="950" dirty="0">
+                          <a:solidFill>
+                            <a:srgbClr val="5B6B73"/>
+                          </a:solidFill>
+                          <a:latin typeface="Calibri" pitchFamily="34" charset="0"/>
+                          <a:ea typeface="Calibri" pitchFamily="34" charset="-122"/>
+                          <a:cs typeface="Calibri" pitchFamily="34" charset="-120"/>
+                        </a:rPr>
+                        <a:t>8</a:t>
+                      </a:r>
+                      <a:endParaRPr lang="en-US" sz="950" dirty="0">
+                        <a:latin typeface="Calibri" charset="0"/>
+                        <a:ea typeface="Calibri" charset="0"/>
+                        <a:cs typeface="Calibri" charset="0"/>
+                      </a:endParaRPr>
+                    </a:p>
+                  </a:txBody>
+                  <a:tcPr marL="91440" marR="91440" marT="45720" marB="45720" anchor="ctr">
+                    <a:lnL w="6350" cap="flat" cmpd="sng" algn="ctr">
+                      <a:solidFill>
+                        <a:srgbClr val="E3E8E9"/>
+                      </a:solidFill>
+                      <a:prstDash val="solid"/>
+                      <a:round/>
+                      <a:headEnd type="none" w="med" len="med"/>
+                      <a:tailEnd type="none" w="med" len="med"/>
+                    </a:lnL>
+                    <a:lnR w="6350" cap="flat" cmpd="sng" algn="ctr">
+                      <a:solidFill>
+                        <a:srgbClr val="E3E8E9"/>
+                      </a:solidFill>
+                      <a:prstDash val="solid"/>
+                      <a:round/>
+                      <a:headEnd type="none" w="med" len="med"/>
+                      <a:tailEnd type="none" w="med" len="med"/>
+                    </a:lnR>
+                    <a:lnT w="6350" cap="flat" cmpd="sng" algn="ctr">
+                      <a:solidFill>
+                        <a:srgbClr val="E3E8E9"/>
+                      </a:solidFill>
+                      <a:prstDash val="solid"/>
+                      <a:round/>
+                      <a:headEnd type="none" w="med" len="med"/>
+                      <a:tailEnd type="none" w="med" len="med"/>
+                    </a:lnT>
+                    <a:lnB w="6350" cap="flat" cmpd="sng" algn="ctr">
+                      <a:solidFill>
+                        <a:srgbClr val="E3E8E9"/>
+                      </a:solidFill>
+                      <a:prstDash val="solid"/>
+                      <a:round/>
+                      <a:headEnd type="none" w="med" len="med"/>
+                      <a:tailEnd type="none" w="med" len="med"/>
+                    </a:lnB>
+                    <a:solidFill>
+                      <a:srgbClr val="F0F4F5"/>
+                    </a:solidFill>
+                  </a:tcPr>
+                </a:tc>
+                <a:tc>
+                  <a:txBody>
+                    <a:bodyPr/>
+                    <a:lstStyle/>
+                    <a:p>
+                      <a:pPr indent="0" marL="0">
+                        <a:buNone/>
+                      </a:pPr>
+                      <a:r>
+                        <a:rPr lang="en-US" sz="970" dirty="0">
+                          <a:solidFill>
+                            <a:srgbClr val="1C2B33"/>
+                          </a:solidFill>
+                          <a:latin typeface="Calibri" pitchFamily="34" charset="0"/>
+                          <a:ea typeface="Calibri" pitchFamily="34" charset="-122"/>
+                          <a:cs typeface="Calibri" pitchFamily="34" charset="-120"/>
+                        </a:rPr>
+                        <a:t>Campanha de Preservação - Pintura</a:t>
+                      </a:r>
+                      <a:endParaRPr lang="en-US" sz="970" dirty="0">
+                        <a:latin typeface="Calibri" charset="0"/>
+                        <a:ea typeface="Calibri" charset="0"/>
+                        <a:cs typeface="Calibri" charset="0"/>
+                      </a:endParaRPr>
+                    </a:p>
+                  </a:txBody>
+                  <a:tcPr marL="91440" marR="91440" marT="45720" marB="45720" anchor="ctr">
+                    <a:lnL w="6350" cap="flat" cmpd="sng" algn="ctr">
+                      <a:solidFill>
+                        <a:srgbClr val="E3E8E9"/>
+                      </a:solidFill>
+                      <a:prstDash val="solid"/>
+                      <a:round/>
+                      <a:headEnd type="none" w="med" len="med"/>
+                      <a:tailEnd type="none" w="med" len="med"/>
+                    </a:lnL>
+                    <a:lnR w="6350" cap="flat" cmpd="sng" algn="ctr">
+                      <a:solidFill>
+                        <a:srgbClr val="E3E8E9"/>
+                      </a:solidFill>
+                      <a:prstDash val="solid"/>
+                      <a:round/>
+                      <a:headEnd type="none" w="med" len="med"/>
+                      <a:tailEnd type="none" w="med" len="med"/>
+                    </a:lnR>
+                    <a:lnT w="6350" cap="flat" cmpd="sng" algn="ctr">
+                      <a:solidFill>
+                        <a:srgbClr val="E3E8E9"/>
+                      </a:solidFill>
+                      <a:prstDash val="solid"/>
+                      <a:round/>
+                      <a:headEnd type="none" w="med" len="med"/>
+                      <a:tailEnd type="none" w="med" len="med"/>
+                    </a:lnT>
+                    <a:lnB w="6350" cap="flat" cmpd="sng" algn="ctr">
+                      <a:solidFill>
+                        <a:srgbClr val="E3E8E9"/>
+                      </a:solidFill>
+                      <a:prstDash val="solid"/>
+                      <a:round/>
+                      <a:headEnd type="none" w="med" len="med"/>
+                      <a:tailEnd type="none" w="med" len="med"/>
+                    </a:lnB>
+                    <a:solidFill>
+                      <a:srgbClr val="F0F4F5"/>
+                    </a:solidFill>
+                  </a:tcPr>
+                </a:tc>
+                <a:tc>
+                  <a:txBody>
+                    <a:bodyPr/>
+                    <a:lstStyle/>
+                    <a:p>
+                      <a:pPr indent="0" marL="0">
+                        <a:buNone/>
+                      </a:pPr>
+                      <a:r>
+                        <a:rPr lang="en-US" sz="930" dirty="0">
+                          <a:solidFill>
+                            <a:srgbClr val="5B6B73"/>
+                          </a:solidFill>
+                          <a:latin typeface="Calibri" pitchFamily="34" charset="0"/>
+                          <a:ea typeface="Calibri" pitchFamily="34" charset="-122"/>
+                          <a:cs typeface="Calibri" pitchFamily="34" charset="-120"/>
+                        </a:rPr>
+                        <a:t>FPSO Frade</a:t>
+                      </a:r>
+                      <a:endParaRPr lang="en-US" sz="930" dirty="0">
+                        <a:latin typeface="Calibri" charset="0"/>
+                        <a:ea typeface="Calibri" charset="0"/>
+                        <a:cs typeface="Calibri" charset="0"/>
+                      </a:endParaRPr>
+                    </a:p>
+                  </a:txBody>
+                  <a:tcPr marL="91440" marR="91440" marT="45720" marB="45720" anchor="ctr">
+                    <a:lnL w="6350" cap="flat" cmpd="sng" algn="ctr">
+                      <a:solidFill>
+                        <a:srgbClr val="E3E8E9"/>
+                      </a:solidFill>
+                      <a:prstDash val="solid"/>
+                      <a:round/>
+                      <a:headEnd type="none" w="med" len="med"/>
+                      <a:tailEnd type="none" w="med" len="med"/>
+                    </a:lnL>
+                    <a:lnR w="6350" cap="flat" cmpd="sng" algn="ctr">
+                      <a:solidFill>
+                        <a:srgbClr val="E3E8E9"/>
+                      </a:solidFill>
+                      <a:prstDash val="solid"/>
+                      <a:round/>
+                      <a:headEnd type="none" w="med" len="med"/>
+                      <a:tailEnd type="none" w="med" len="med"/>
+                    </a:lnR>
+                    <a:lnT w="6350" cap="flat" cmpd="sng" algn="ctr">
+                      <a:solidFill>
+                        <a:srgbClr val="E3E8E9"/>
+                      </a:solidFill>
+                      <a:prstDash val="solid"/>
+                      <a:round/>
+                      <a:headEnd type="none" w="med" len="med"/>
+                      <a:tailEnd type="none" w="med" len="med"/>
+                    </a:lnT>
+                    <a:lnB w="6350" cap="flat" cmpd="sng" algn="ctr">
+                      <a:solidFill>
+                        <a:srgbClr val="E3E8E9"/>
+                      </a:solidFill>
+                      <a:prstDash val="solid"/>
+                      <a:round/>
+                      <a:headEnd type="none" w="med" len="med"/>
+                      <a:tailEnd type="none" w="med" len="med"/>
+                    </a:lnB>
+                    <a:solidFill>
+                      <a:srgbClr val="F0F4F5"/>
+                    </a:solidFill>
+                  </a:tcPr>
+                </a:tc>
+                <a:tc>
+                  <a:txBody>
+                    <a:bodyPr/>
+                    <a:lstStyle/>
+                    <a:p>
+                      <a:pPr indent="0" marL="0">
+                        <a:buNone/>
+                      </a:pPr>
+                      <a:r>
+                        <a:rPr lang="en-US" sz="900" dirty="0">
+                          <a:solidFill>
+                            <a:srgbClr val="5B6B73"/>
+                          </a:solidFill>
+                          <a:latin typeface="Calibri" pitchFamily="34" charset="0"/>
+                          <a:ea typeface="Calibri" pitchFamily="34" charset="-122"/>
+                          <a:cs typeface="Calibri" pitchFamily="34" charset="-120"/>
+                        </a:rPr>
+                        <a:t>CON - Construção</a:t>
+                      </a:r>
+                      <a:endParaRPr lang="en-US" sz="900" dirty="0">
+                        <a:latin typeface="Calibri" charset="0"/>
+                        <a:ea typeface="Calibri" charset="0"/>
+                        <a:cs typeface="Calibri" charset="0"/>
+                      </a:endParaRPr>
+                    </a:p>
+                  </a:txBody>
+                  <a:tcPr marL="91440" marR="91440" marT="45720" marB="45720" anchor="ctr">
+                    <a:lnL w="6350" cap="flat" cmpd="sng" algn="ctr">
+                      <a:solidFill>
+                        <a:srgbClr val="E3E8E9"/>
+                      </a:solidFill>
+                      <a:prstDash val="solid"/>
+                      <a:round/>
+                      <a:headEnd type="none" w="med" len="med"/>
+                      <a:tailEnd type="none" w="med" len="med"/>
+                    </a:lnL>
+                    <a:lnR w="6350" cap="flat" cmpd="sng" algn="ctr">
+                      <a:solidFill>
+                        <a:srgbClr val="E3E8E9"/>
+                      </a:solidFill>
+                      <a:prstDash val="solid"/>
+                      <a:round/>
+                      <a:headEnd type="none" w="med" len="med"/>
+                      <a:tailEnd type="none" w="med" len="med"/>
+                    </a:lnR>
+                    <a:lnT w="6350" cap="flat" cmpd="sng" algn="ctr">
+                      <a:solidFill>
+                        <a:srgbClr val="E3E8E9"/>
+                      </a:solidFill>
+                      <a:prstDash val="solid"/>
+                      <a:round/>
+                      <a:headEnd type="none" w="med" len="med"/>
+                      <a:tailEnd type="none" w="med" len="med"/>
+                    </a:lnT>
+                    <a:lnB w="6350" cap="flat" cmpd="sng" algn="ctr">
+                      <a:solidFill>
+                        <a:srgbClr val="E3E8E9"/>
+                      </a:solidFill>
+                      <a:prstDash val="solid"/>
+                      <a:round/>
+                      <a:headEnd type="none" w="med" len="med"/>
+                      <a:tailEnd type="none" w="med" len="med"/>
+                    </a:lnB>
+                    <a:solidFill>
+                      <a:srgbClr val="F0F4F5"/>
+                    </a:solidFill>
+                  </a:tcPr>
+                </a:tc>
+                <a:tc>
+                  <a:txBody>
+                    <a:bodyPr/>
+                    <a:lstStyle/>
+                    <a:p>
+                      <a:pPr indent="0" marL="0">
+                        <a:buNone/>
+                      </a:pPr>
+                      <a:r>
+                        <a:rPr lang="en-US" sz="900" dirty="0">
+                          <a:solidFill>
+                            <a:srgbClr val="5B6B73"/>
+                          </a:solidFill>
+                          <a:latin typeface="Calibri" pitchFamily="34" charset="0"/>
+                          <a:ea typeface="Calibri" pitchFamily="34" charset="-122"/>
+                          <a:cs typeface="Calibri" pitchFamily="34" charset="-120"/>
+                        </a:rPr>
+                        <a:t>Integridade e Regulatório</a:t>
+                      </a:r>
+                      <a:endParaRPr lang="en-US" sz="900" dirty="0">
+                        <a:latin typeface="Calibri" charset="0"/>
+                        <a:ea typeface="Calibri" charset="0"/>
+                        <a:cs typeface="Calibri" charset="0"/>
+                      </a:endParaRPr>
+                    </a:p>
+                  </a:txBody>
+                  <a:tcPr marL="91440" marR="91440" marT="45720" marB="45720" anchor="ctr">
+                    <a:lnL w="6350" cap="flat" cmpd="sng" algn="ctr">
+                      <a:solidFill>
+                        <a:srgbClr val="E3E8E9"/>
+                      </a:solidFill>
+                      <a:prstDash val="solid"/>
+                      <a:round/>
+                      <a:headEnd type="none" w="med" len="med"/>
+                      <a:tailEnd type="none" w="med" len="med"/>
+                    </a:lnL>
+                    <a:lnR w="6350" cap="flat" cmpd="sng" algn="ctr">
+                      <a:solidFill>
+                        <a:srgbClr val="E3E8E9"/>
+                      </a:solidFill>
+                      <a:prstDash val="solid"/>
+                      <a:round/>
+                      <a:headEnd type="none" w="med" len="med"/>
+                      <a:tailEnd type="none" w="med" len="med"/>
+                    </a:lnR>
+                    <a:lnT w="6350" cap="flat" cmpd="sng" algn="ctr">
+                      <a:solidFill>
+                        <a:srgbClr val="E3E8E9"/>
+                      </a:solidFill>
+                      <a:prstDash val="solid"/>
+                      <a:round/>
+                      <a:headEnd type="none" w="med" len="med"/>
+                      <a:tailEnd type="none" w="med" len="med"/>
+                    </a:lnT>
+                    <a:lnB w="6350" cap="flat" cmpd="sng" algn="ctr">
+                      <a:solidFill>
+                        <a:srgbClr val="E3E8E9"/>
+                      </a:solidFill>
+                      <a:prstDash val="solid"/>
+                      <a:round/>
+                      <a:headEnd type="none" w="med" len="med"/>
+                      <a:tailEnd type="none" w="med" len="med"/>
+                    </a:lnB>
+                    <a:solidFill>
+                      <a:srgbClr val="F0F4F5"/>
+                    </a:solidFill>
+                  </a:tcPr>
+                </a:tc>
+                <a:tc>
+                  <a:txBody>
+                    <a:bodyPr/>
+                    <a:lstStyle/>
+                    <a:p>
+                      <a:pPr algn="r" indent="0" marL="0">
+                        <a:buNone/>
+                      </a:pPr>
+                      <a:r>
+                        <a:rPr lang="en-US" sz="970" b="1" dirty="0">
+                          <a:solidFill>
+                            <a:srgbClr val="0B2A3D"/>
+                          </a:solidFill>
+                          <a:latin typeface="Calibri" pitchFamily="34" charset="0"/>
+                          <a:ea typeface="Calibri" pitchFamily="34" charset="-122"/>
+                          <a:cs typeface="Calibri" pitchFamily="34" charset="-120"/>
+                        </a:rPr>
+                        <a:t>US$ 1,4 mi</a:t>
+                      </a:r>
+                      <a:endParaRPr lang="en-US" sz="970" dirty="0">
+                        <a:latin typeface="Calibri" charset="0"/>
+                        <a:ea typeface="Calibri" charset="0"/>
+                        <a:cs typeface="Calibri" charset="0"/>
+                      </a:endParaRPr>
+                    </a:p>
+                  </a:txBody>
+                  <a:tcPr marL="91440" marR="91440" marT="45720" marB="45720" anchor="ctr">
+                    <a:lnL w="6350" cap="flat" cmpd="sng" algn="ctr">
+                      <a:solidFill>
+                        <a:srgbClr val="E3E8E9"/>
+                      </a:solidFill>
+                      <a:prstDash val="solid"/>
+                      <a:round/>
+                      <a:headEnd type="none" w="med" len="med"/>
+                      <a:tailEnd type="none" w="med" len="med"/>
+                    </a:lnL>
+                    <a:lnR w="6350" cap="flat" cmpd="sng" algn="ctr">
+                      <a:solidFill>
+                        <a:srgbClr val="E3E8E9"/>
+                      </a:solidFill>
+                      <a:prstDash val="solid"/>
+                      <a:round/>
+                      <a:headEnd type="none" w="med" len="med"/>
+                      <a:tailEnd type="none" w="med" len="med"/>
+                    </a:lnR>
+                    <a:lnT w="6350" cap="flat" cmpd="sng" algn="ctr">
+                      <a:solidFill>
+                        <a:srgbClr val="E3E8E9"/>
+                      </a:solidFill>
+                      <a:prstDash val="solid"/>
+                      <a:round/>
+                      <a:headEnd type="none" w="med" len="med"/>
+                      <a:tailEnd type="none" w="med" len="med"/>
+                    </a:lnT>
+                    <a:lnB w="6350" cap="flat" cmpd="sng" algn="ctr">
+                      <a:solidFill>
+                        <a:srgbClr val="E3E8E9"/>
+                      </a:solidFill>
+                      <a:prstDash val="solid"/>
+                      <a:round/>
+                      <a:headEnd type="none" w="med" len="med"/>
+                      <a:tailEnd type="none" w="med" len="med"/>
+                    </a:lnB>
+                    <a:solidFill>
+                      <a:srgbClr val="F0F4F5"/>
+                    </a:solidFill>
+                  </a:tcPr>
+                </a:tc>
+              </a:tr>
+              <a:tr h="457200">
+                <a:tc>
+                  <a:txBody>
+                    <a:bodyPr/>
+                    <a:lstStyle/>
+                    <a:p>
+                      <a:pPr algn="ctr" indent="0" marL="0">
+                        <a:buNone/>
+                      </a:pPr>
+                      <a:r>
+                        <a:rPr lang="en-US" sz="950" dirty="0">
+                          <a:solidFill>
+                            <a:srgbClr val="5B6B73"/>
+                          </a:solidFill>
+                          <a:latin typeface="Calibri" pitchFamily="34" charset="0"/>
+                          <a:ea typeface="Calibri" pitchFamily="34" charset="-122"/>
+                          <a:cs typeface="Calibri" pitchFamily="34" charset="-120"/>
+                        </a:rPr>
+                        <a:t>9</a:t>
+                      </a:r>
+                      <a:endParaRPr lang="en-US" sz="950" dirty="0">
+                        <a:latin typeface="Calibri" charset="0"/>
+                        <a:ea typeface="Calibri" charset="0"/>
+                        <a:cs typeface="Calibri" charset="0"/>
+                      </a:endParaRPr>
+                    </a:p>
+                  </a:txBody>
+                  <a:tcPr marL="91440" marR="91440" marT="45720" marB="45720" anchor="ctr">
+                    <a:lnL w="6350" cap="flat" cmpd="sng" algn="ctr">
+                      <a:solidFill>
+                        <a:srgbClr val="E3E8E9"/>
+                      </a:solidFill>
+                      <a:prstDash val="solid"/>
+                      <a:round/>
+                      <a:headEnd type="none" w="med" len="med"/>
+                      <a:tailEnd type="none" w="med" len="med"/>
+                    </a:lnL>
+                    <a:lnR w="6350" cap="flat" cmpd="sng" algn="ctr">
+                      <a:solidFill>
+                        <a:srgbClr val="E3E8E9"/>
+                      </a:solidFill>
+                      <a:prstDash val="solid"/>
+                      <a:round/>
+                      <a:headEnd type="none" w="med" len="med"/>
+                      <a:tailEnd type="none" w="med" len="med"/>
+                    </a:lnR>
+                    <a:lnT w="6350" cap="flat" cmpd="sng" algn="ctr">
+                      <a:solidFill>
+                        <a:srgbClr val="E3E8E9"/>
+                      </a:solidFill>
+                      <a:prstDash val="solid"/>
+                      <a:round/>
+                      <a:headEnd type="none" w="med" len="med"/>
+                      <a:tailEnd type="none" w="med" len="med"/>
+                    </a:lnT>
+                    <a:lnB w="6350" cap="flat" cmpd="sng" algn="ctr">
+                      <a:solidFill>
+                        <a:srgbClr val="E3E8E9"/>
+                      </a:solidFill>
+                      <a:prstDash val="solid"/>
+                      <a:round/>
+                      <a:headEnd type="none" w="med" len="med"/>
+                      <a:tailEnd type="none" w="med" len="med"/>
+                    </a:lnB>
+                    <a:solidFill>
+                      <a:srgbClr val="FFFFFF"/>
+                    </a:solidFill>
+                  </a:tcPr>
+                </a:tc>
+                <a:tc>
+                  <a:txBody>
+                    <a:bodyPr/>
+                    <a:lstStyle/>
+                    <a:p>
+                      <a:pPr indent="0" marL="0">
+                        <a:buNone/>
+                      </a:pPr>
+                      <a:r>
+                        <a:rPr lang="en-US" sz="970" dirty="0">
+                          <a:solidFill>
+                            <a:srgbClr val="1C2B33"/>
+                          </a:solidFill>
+                          <a:latin typeface="Calibri" pitchFamily="34" charset="0"/>
+                          <a:ea typeface="Calibri" pitchFamily="34" charset="-122"/>
+                          <a:cs typeface="Calibri" pitchFamily="34" charset="-120"/>
+                        </a:rPr>
+                        <a:t>Baixa de Material Mecânico</a:t>
+                      </a:r>
+                      <a:endParaRPr lang="en-US" sz="970" dirty="0">
+                        <a:latin typeface="Calibri" charset="0"/>
+                        <a:ea typeface="Calibri" charset="0"/>
+                        <a:cs typeface="Calibri" charset="0"/>
+                      </a:endParaRPr>
+                    </a:p>
+                  </a:txBody>
+                  <a:tcPr marL="91440" marR="91440" marT="45720" marB="45720" anchor="ctr">
+                    <a:lnL w="6350" cap="flat" cmpd="sng" algn="ctr">
+                      <a:solidFill>
+                        <a:srgbClr val="E3E8E9"/>
+                      </a:solidFill>
+                      <a:prstDash val="solid"/>
+                      <a:round/>
+                      <a:headEnd type="none" w="med" len="med"/>
+                      <a:tailEnd type="none" w="med" len="med"/>
+                    </a:lnL>
+                    <a:lnR w="6350" cap="flat" cmpd="sng" algn="ctr">
+                      <a:solidFill>
+                        <a:srgbClr val="E3E8E9"/>
+                      </a:solidFill>
+                      <a:prstDash val="solid"/>
+                      <a:round/>
+                      <a:headEnd type="none" w="med" len="med"/>
+                      <a:tailEnd type="none" w="med" len="med"/>
+                    </a:lnR>
+                    <a:lnT w="6350" cap="flat" cmpd="sng" algn="ctr">
+                      <a:solidFill>
+                        <a:srgbClr val="E3E8E9"/>
+                      </a:solidFill>
+                      <a:prstDash val="solid"/>
+                      <a:round/>
+                      <a:headEnd type="none" w="med" len="med"/>
+                      <a:tailEnd type="none" w="med" len="med"/>
+                    </a:lnT>
+                    <a:lnB w="6350" cap="flat" cmpd="sng" algn="ctr">
+                      <a:solidFill>
+                        <a:srgbClr val="E3E8E9"/>
+                      </a:solidFill>
+                      <a:prstDash val="solid"/>
+                      <a:round/>
+                      <a:headEnd type="none" w="med" len="med"/>
+                      <a:tailEnd type="none" w="med" len="med"/>
+                    </a:lnB>
+                    <a:solidFill>
+                      <a:srgbClr val="FFFFFF"/>
+                    </a:solidFill>
+                  </a:tcPr>
+                </a:tc>
+                <a:tc>
+                  <a:txBody>
+                    <a:bodyPr/>
+                    <a:lstStyle/>
+                    <a:p>
+                      <a:pPr indent="0" marL="0">
+                        <a:buNone/>
+                      </a:pPr>
+                      <a:r>
+                        <a:rPr lang="en-US" sz="930" dirty="0">
+                          <a:solidFill>
+                            <a:srgbClr val="5B6B73"/>
+                          </a:solidFill>
+                          <a:latin typeface="Calibri" pitchFamily="34" charset="0"/>
+                          <a:ea typeface="Calibri" pitchFamily="34" charset="-122"/>
+                          <a:cs typeface="Calibri" pitchFamily="34" charset="-120"/>
+                        </a:rPr>
+                        <a:t>FPSO Bravo</a:t>
+                      </a:r>
+                      <a:endParaRPr lang="en-US" sz="930" dirty="0">
+                        <a:latin typeface="Calibri" charset="0"/>
+                        <a:ea typeface="Calibri" charset="0"/>
+                        <a:cs typeface="Calibri" charset="0"/>
+                      </a:endParaRPr>
+                    </a:p>
+                  </a:txBody>
+                  <a:tcPr marL="91440" marR="91440" marT="45720" marB="45720" anchor="ctr">
+                    <a:lnL w="6350" cap="flat" cmpd="sng" algn="ctr">
+                      <a:solidFill>
+                        <a:srgbClr val="E3E8E9"/>
+                      </a:solidFill>
+                      <a:prstDash val="solid"/>
+                      <a:round/>
+                      <a:headEnd type="none" w="med" len="med"/>
+                      <a:tailEnd type="none" w="med" len="med"/>
+                    </a:lnL>
+                    <a:lnR w="6350" cap="flat" cmpd="sng" algn="ctr">
+                      <a:solidFill>
+                        <a:srgbClr val="E3E8E9"/>
+                      </a:solidFill>
+                      <a:prstDash val="solid"/>
+                      <a:round/>
+                      <a:headEnd type="none" w="med" len="med"/>
+                      <a:tailEnd type="none" w="med" len="med"/>
+                    </a:lnR>
+                    <a:lnT w="6350" cap="flat" cmpd="sng" algn="ctr">
+                      <a:solidFill>
+                        <a:srgbClr val="E3E8E9"/>
+                      </a:solidFill>
+                      <a:prstDash val="solid"/>
+                      <a:round/>
+                      <a:headEnd type="none" w="med" len="med"/>
+                      <a:tailEnd type="none" w="med" len="med"/>
+                    </a:lnT>
+                    <a:lnB w="6350" cap="flat" cmpd="sng" algn="ctr">
+                      <a:solidFill>
+                        <a:srgbClr val="E3E8E9"/>
+                      </a:solidFill>
+                      <a:prstDash val="solid"/>
+                      <a:round/>
+                      <a:headEnd type="none" w="med" len="med"/>
+                      <a:tailEnd type="none" w="med" len="med"/>
+                    </a:lnB>
+                    <a:solidFill>
+                      <a:srgbClr val="FFFFFF"/>
+                    </a:solidFill>
+                  </a:tcPr>
+                </a:tc>
+                <a:tc>
+                  <a:txBody>
+                    <a:bodyPr/>
+                    <a:lstStyle/>
+                    <a:p>
+                      <a:pPr indent="0" marL="0">
+                        <a:buNone/>
+                      </a:pPr>
+                      <a:r>
+                        <a:rPr lang="en-US" sz="900" dirty="0">
+                          <a:solidFill>
+                            <a:srgbClr val="5B6B73"/>
+                          </a:solidFill>
+                          <a:latin typeface="Calibri" pitchFamily="34" charset="0"/>
+                          <a:ea typeface="Calibri" pitchFamily="34" charset="-122"/>
+                          <a:cs typeface="Calibri" pitchFamily="34" charset="-120"/>
+                        </a:rPr>
+                        <a:t>EIM - Manutenção &amp; Integridade</a:t>
+                      </a:r>
+                      <a:endParaRPr lang="en-US" sz="900" dirty="0">
+                        <a:latin typeface="Calibri" charset="0"/>
+                        <a:ea typeface="Calibri" charset="0"/>
+                        <a:cs typeface="Calibri" charset="0"/>
+                      </a:endParaRPr>
+                    </a:p>
+                  </a:txBody>
+                  <a:tcPr marL="91440" marR="91440" marT="45720" marB="45720" anchor="ctr">
+                    <a:lnL w="6350" cap="flat" cmpd="sng" algn="ctr">
+                      <a:solidFill>
+                        <a:srgbClr val="E3E8E9"/>
+                      </a:solidFill>
+                      <a:prstDash val="solid"/>
+                      <a:round/>
+                      <a:headEnd type="none" w="med" len="med"/>
+                      <a:tailEnd type="none" w="med" len="med"/>
+                    </a:lnL>
+                    <a:lnR w="6350" cap="flat" cmpd="sng" algn="ctr">
+                      <a:solidFill>
+                        <a:srgbClr val="E3E8E9"/>
+                      </a:solidFill>
+                      <a:prstDash val="solid"/>
+                      <a:round/>
+                      <a:headEnd type="none" w="med" len="med"/>
+                      <a:tailEnd type="none" w="med" len="med"/>
+                    </a:lnR>
+                    <a:lnT w="6350" cap="flat" cmpd="sng" algn="ctr">
+                      <a:solidFill>
+                        <a:srgbClr val="E3E8E9"/>
+                      </a:solidFill>
+                      <a:prstDash val="solid"/>
+                      <a:round/>
+                      <a:headEnd type="none" w="med" len="med"/>
+                      <a:tailEnd type="none" w="med" len="med"/>
+                    </a:lnT>
+                    <a:lnB w="6350" cap="flat" cmpd="sng" algn="ctr">
+                      <a:solidFill>
+                        <a:srgbClr val="E3E8E9"/>
+                      </a:solidFill>
+                      <a:prstDash val="solid"/>
+                      <a:round/>
+                      <a:headEnd type="none" w="med" len="med"/>
+                      <a:tailEnd type="none" w="med" len="med"/>
+                    </a:lnB>
+                    <a:solidFill>
+                      <a:srgbClr val="FFFFFF"/>
+                    </a:solidFill>
+                  </a:tcPr>
+                </a:tc>
+                <a:tc>
+                  <a:txBody>
+                    <a:bodyPr/>
+                    <a:lstStyle/>
+                    <a:p>
+                      <a:pPr indent="0" marL="0">
+                        <a:buNone/>
+                      </a:pPr>
+                      <a:r>
+                        <a:rPr lang="en-US" sz="900" dirty="0">
+                          <a:solidFill>
+                            <a:srgbClr val="5B6B73"/>
+                          </a:solidFill>
+                          <a:latin typeface="Calibri" pitchFamily="34" charset="0"/>
+                          <a:ea typeface="Calibri" pitchFamily="34" charset="-122"/>
+                          <a:cs typeface="Calibri" pitchFamily="34" charset="-120"/>
+                        </a:rPr>
                         <a:t>Rotina Operacional</a:t>
                       </a:r>
-                      <a:endParaRPr lang="en-US" sz="1000" dirty="0">
+                      <a:endParaRPr lang="en-US" sz="900" dirty="0">
                         <a:latin typeface="Calibri" charset="0"/>
                         <a:ea typeface="Calibri" charset="0"/>
                         <a:cs typeface="Calibri" charset="0"/>
@@ -9480,7 +12897,7 @@
                         <a:buNone/>
                       </a:pPr>
                       <a:r>
-                        <a:rPr lang="en-US" sz="1100" b="1" dirty="0">
+                        <a:rPr lang="en-US" sz="970" b="1" dirty="0">
                           <a:solidFill>
                             <a:srgbClr val="0B2A3D"/>
                           </a:solidFill>
@@ -9488,9 +12905,9 @@
                           <a:ea typeface="Calibri" pitchFamily="34" charset="-122"/>
                           <a:cs typeface="Calibri" pitchFamily="34" charset="-120"/>
                         </a:rPr>
-                        <a:t>US$ 19,6 mi</a:t>
-                      </a:r>
-                      <a:endParaRPr lang="en-US" sz="1100" dirty="0">
+                        <a:t>US$ 1,3 mi</a:t>
+                      </a:r>
+                      <a:endParaRPr lang="en-US" sz="970" dirty="0">
                         <a:latin typeface="Calibri" charset="0"/>
                         <a:ea typeface="Calibri" charset="0"/>
                         <a:cs typeface="Calibri" charset="0"/>
@@ -9540,7 +12957,75 @@
                   </a:tcPr>
                 </a:tc>
               </a:tr>
-              <a:tr h="502920">
+              <a:tr h="457200">
+                <a:tc>
+                  <a:txBody>
+                    <a:bodyPr/>
+                    <a:lstStyle/>
+                    <a:p>
+                      <a:pPr algn="ctr" indent="0" marL="0">
+                        <a:buNone/>
+                      </a:pPr>
+                      <a:r>
+                        <a:rPr lang="en-US" sz="950" dirty="0">
+                          <a:solidFill>
+                            <a:srgbClr val="5B6B73"/>
+                          </a:solidFill>
+                          <a:latin typeface="Calibri" pitchFamily="34" charset="0"/>
+                          <a:ea typeface="Calibri" pitchFamily="34" charset="-122"/>
+                          <a:cs typeface="Calibri" pitchFamily="34" charset="-120"/>
+                        </a:rPr>
+                        <a:t>10</a:t>
+                      </a:r>
+                      <a:endParaRPr lang="en-US" sz="950" dirty="0">
+                        <a:latin typeface="Calibri" charset="0"/>
+                        <a:ea typeface="Calibri" charset="0"/>
+                        <a:cs typeface="Calibri" charset="0"/>
+                      </a:endParaRPr>
+                    </a:p>
+                  </a:txBody>
+                  <a:tcPr marL="91440" marR="91440" marT="45720" marB="45720" anchor="ctr">
+                    <a:lnL w="6350" cap="flat" cmpd="sng" algn="ctr">
+                      <a:solidFill>
+                        <a:srgbClr val="E3E8E9"/>
+                      </a:solidFill>
+                      <a:prstDash val="solid"/>
+                      <a:round/>
+                      <a:headEnd type="none" w="med" len="med"/>
+                      <a:tailEnd type="none" w="med" len="med"/>
+                    </a:lnL>
+                    <a:lnR w="6350" cap="flat" cmpd="sng" algn="ctr">
+                      <a:solidFill>
+                        <a:srgbClr val="E3E8E9"/>
+                      </a:solidFill>
+                      <a:prstDash val="solid"/>
+                      <a:round/>
+                      <a:headEnd type="none" w="med" len="med"/>
+                      <a:tailEnd type="none" w="med" len="med"/>
+                    </a:lnR>
+                    <a:lnT w="6350" cap="flat" cmpd="sng" algn="ctr">
+                      <a:solidFill>
+                        <a:srgbClr val="E3E8E9"/>
+                      </a:solidFill>
+                      <a:prstDash val="solid"/>
+                      <a:round/>
+                      <a:headEnd type="none" w="med" len="med"/>
+                      <a:tailEnd type="none" w="med" len="med"/>
+                    </a:lnT>
+                    <a:lnB w="6350" cap="flat" cmpd="sng" algn="ctr">
+                      <a:solidFill>
+                        <a:srgbClr val="E3E8E9"/>
+                      </a:solidFill>
+                      <a:prstDash val="solid"/>
+                      <a:round/>
+                      <a:headEnd type="none" w="med" len="med"/>
+                      <a:tailEnd type="none" w="med" len="med"/>
+                    </a:lnB>
+                    <a:solidFill>
+                      <a:srgbClr val="F0F4F5"/>
+                    </a:solidFill>
+                  </a:tcPr>
+                </a:tc>
                 <a:tc>
                   <a:txBody>
                     <a:bodyPr/>
@@ -9550,7 +13035,7 @@
                         <a:buNone/>
                       </a:pPr>
                       <a:r>
-                        <a:rPr lang="en-US" sz="1100" dirty="0">
+                        <a:rPr lang="en-US" sz="970" dirty="0">
                           <a:solidFill>
                             <a:srgbClr val="1C2B33"/>
                           </a:solidFill>
@@ -9558,9 +13043,9 @@
                           <a:ea typeface="Calibri" pitchFamily="34" charset="-122"/>
                           <a:cs typeface="Calibri" pitchFamily="34" charset="-120"/>
                         </a:rPr>
-                        <a:t>Fixo - PRIO + OSM</a:t>
-                      </a:r>
-                      <a:endParaRPr lang="en-US" sz="1100" dirty="0">
+                        <a:t>Plano de Gerenciamento de Corrosão</a:t>
+                      </a:r>
+                      <a:endParaRPr lang="en-US" sz="970" dirty="0">
                         <a:latin typeface="Calibri" charset="0"/>
                         <a:ea typeface="Calibri" charset="0"/>
                         <a:cs typeface="Calibri" charset="0"/>
@@ -9618,7 +13103,7 @@
                         <a:buNone/>
                       </a:pPr>
                       <a:r>
-                        <a:rPr lang="en-US" sz="1000" dirty="0">
+                        <a:rPr lang="en-US" sz="930" dirty="0">
                           <a:solidFill>
                             <a:srgbClr val="5B6B73"/>
                           </a:solidFill>
@@ -9626,9 +13111,9 @@
                           <a:ea typeface="Calibri" pitchFamily="34" charset="-122"/>
                           <a:cs typeface="Calibri" pitchFamily="34" charset="-120"/>
                         </a:rPr>
-                        <a:t>PLAT A</a:t>
-                      </a:r>
-                      <a:endParaRPr lang="en-US" sz="1000" dirty="0">
+                        <a:t>PLAT B</a:t>
+                      </a:r>
+                      <a:endParaRPr lang="en-US" sz="930" dirty="0">
                         <a:latin typeface="Calibri" charset="0"/>
                         <a:ea typeface="Calibri" charset="0"/>
                         <a:cs typeface="Calibri" charset="0"/>
@@ -9686,7 +13171,7 @@
                         <a:buNone/>
                       </a:pPr>
                       <a:r>
-                        <a:rPr lang="en-US" sz="1000" dirty="0">
+                        <a:rPr lang="en-US" sz="900" dirty="0">
                           <a:solidFill>
                             <a:srgbClr val="5B6B73"/>
                           </a:solidFill>
@@ -9694,9 +13179,9 @@
                           <a:ea typeface="Calibri" pitchFamily="34" charset="-122"/>
                           <a:cs typeface="Calibri" pitchFamily="34" charset="-120"/>
                         </a:rPr>
-                        <a:t>PLN - Planejamento</a:t>
-                      </a:r>
-                      <a:endParaRPr lang="en-US" sz="1000" dirty="0">
+                        <a:t>CON - Construção</a:t>
+                      </a:r>
+                      <a:endParaRPr lang="en-US" sz="900" dirty="0">
                         <a:latin typeface="Calibri" charset="0"/>
                         <a:ea typeface="Calibri" charset="0"/>
                         <a:cs typeface="Calibri" charset="0"/>
@@ -9754,7 +13239,7 @@
                         <a:buNone/>
                       </a:pPr>
                       <a:r>
-                        <a:rPr lang="en-US" sz="1000" dirty="0">
+                        <a:rPr lang="en-US" sz="900" dirty="0">
                           <a:solidFill>
                             <a:srgbClr val="5B6B73"/>
                           </a:solidFill>
@@ -9762,9 +13247,9 @@
                           <a:ea typeface="Calibri" pitchFamily="34" charset="-122"/>
                           <a:cs typeface="Calibri" pitchFamily="34" charset="-120"/>
                         </a:rPr>
-                        <a:t>Rotina Operacional</a:t>
-                      </a:r>
-                      <a:endParaRPr lang="en-US" sz="1000" dirty="0">
+                        <a:t>Integridade e Regulatório</a:t>
+                      </a:r>
+                      <a:endParaRPr lang="en-US" sz="900" dirty="0">
                         <a:latin typeface="Calibri" charset="0"/>
                         <a:ea typeface="Calibri" charset="0"/>
                         <a:cs typeface="Calibri" charset="0"/>
@@ -9822,7 +13307,7 @@
                         <a:buNone/>
                       </a:pPr>
                       <a:r>
-                        <a:rPr lang="en-US" sz="1100" b="1" dirty="0">
+                        <a:rPr lang="en-US" sz="970" b="1" dirty="0">
                           <a:solidFill>
                             <a:srgbClr val="0B2A3D"/>
                           </a:solidFill>
@@ -9830,9 +13315,9 @@
                           <a:ea typeface="Calibri" pitchFamily="34" charset="-122"/>
                           <a:cs typeface="Calibri" pitchFamily="34" charset="-120"/>
                         </a:rPr>
-                        <a:t>US$ 6,7 mi</a:t>
-                      </a:r>
-                      <a:endParaRPr lang="en-US" sz="1100" dirty="0">
+                        <a:t>US$ 1,3 mi</a:t>
+                      </a:r>
+                      <a:endParaRPr lang="en-US" sz="970" dirty="0">
                         <a:latin typeface="Calibri" charset="0"/>
                         <a:ea typeface="Calibri" charset="0"/>
                         <a:cs typeface="Calibri" charset="0"/>
@@ -9878,1032 +13363,6 @@
                     </a:lnB>
                     <a:solidFill>
                       <a:srgbClr val="F0F4F5"/>
-                    </a:solidFill>
-                  </a:tcPr>
-                </a:tc>
-              </a:tr>
-              <a:tr h="502920">
-                <a:tc>
-                  <a:txBody>
-                    <a:bodyPr/>
-                    <a:lstStyle/>
-                    <a:p>
-                      <a:pPr indent="0" marL="0">
-                        <a:buNone/>
-                      </a:pPr>
-                      <a:r>
-                        <a:rPr lang="en-US" sz="1100" dirty="0">
-                          <a:solidFill>
-                            <a:srgbClr val="1C2B33"/>
-                          </a:solidFill>
-                          <a:latin typeface="Calibri" pitchFamily="34" charset="0"/>
-                          <a:ea typeface="Calibri" pitchFamily="34" charset="-122"/>
-                          <a:cs typeface="Calibri" pitchFamily="34" charset="-120"/>
-                        </a:rPr>
-                        <a:t>Time de Construção - Pintura</a:t>
-                      </a:r>
-                      <a:endParaRPr lang="en-US" sz="1100" dirty="0">
-                        <a:latin typeface="Calibri" charset="0"/>
-                        <a:ea typeface="Calibri" charset="0"/>
-                        <a:cs typeface="Calibri" charset="0"/>
-                      </a:endParaRPr>
-                    </a:p>
-                  </a:txBody>
-                  <a:tcPr marL="91440" marR="91440" marT="45720" marB="45720" anchor="ctr">
-                    <a:lnL w="6350" cap="flat" cmpd="sng" algn="ctr">
-                      <a:solidFill>
-                        <a:srgbClr val="E3E8E9"/>
-                      </a:solidFill>
-                      <a:prstDash val="solid"/>
-                      <a:round/>
-                      <a:headEnd type="none" w="med" len="med"/>
-                      <a:tailEnd type="none" w="med" len="med"/>
-                    </a:lnL>
-                    <a:lnR w="6350" cap="flat" cmpd="sng" algn="ctr">
-                      <a:solidFill>
-                        <a:srgbClr val="E3E8E9"/>
-                      </a:solidFill>
-                      <a:prstDash val="solid"/>
-                      <a:round/>
-                      <a:headEnd type="none" w="med" len="med"/>
-                      <a:tailEnd type="none" w="med" len="med"/>
-                    </a:lnR>
-                    <a:lnT w="6350" cap="flat" cmpd="sng" algn="ctr">
-                      <a:solidFill>
-                        <a:srgbClr val="E3E8E9"/>
-                      </a:solidFill>
-                      <a:prstDash val="solid"/>
-                      <a:round/>
-                      <a:headEnd type="none" w="med" len="med"/>
-                      <a:tailEnd type="none" w="med" len="med"/>
-                    </a:lnT>
-                    <a:lnB w="6350" cap="flat" cmpd="sng" algn="ctr">
-                      <a:solidFill>
-                        <a:srgbClr val="E3E8E9"/>
-                      </a:solidFill>
-                      <a:prstDash val="solid"/>
-                      <a:round/>
-                      <a:headEnd type="none" w="med" len="med"/>
-                      <a:tailEnd type="none" w="med" len="med"/>
-                    </a:lnB>
-                    <a:solidFill>
-                      <a:srgbClr val="FFFFFF"/>
-                    </a:solidFill>
-                  </a:tcPr>
-                </a:tc>
-                <a:tc>
-                  <a:txBody>
-                    <a:bodyPr/>
-                    <a:lstStyle/>
-                    <a:p>
-                      <a:pPr indent="0" marL="0">
-                        <a:buNone/>
-                      </a:pPr>
-                      <a:r>
-                        <a:rPr lang="en-US" sz="1000" dirty="0">
-                          <a:solidFill>
-                            <a:srgbClr val="5B6B73"/>
-                          </a:solidFill>
-                          <a:latin typeface="Calibri" pitchFamily="34" charset="0"/>
-                          <a:ea typeface="Calibri" pitchFamily="34" charset="-122"/>
-                          <a:cs typeface="Calibri" pitchFamily="34" charset="-120"/>
-                        </a:rPr>
-                        <a:t>FPSO Peregrino</a:t>
-                      </a:r>
-                      <a:endParaRPr lang="en-US" sz="1000" dirty="0">
-                        <a:latin typeface="Calibri" charset="0"/>
-                        <a:ea typeface="Calibri" charset="0"/>
-                        <a:cs typeface="Calibri" charset="0"/>
-                      </a:endParaRPr>
-                    </a:p>
-                  </a:txBody>
-                  <a:tcPr marL="91440" marR="91440" marT="45720" marB="45720" anchor="ctr">
-                    <a:lnL w="6350" cap="flat" cmpd="sng" algn="ctr">
-                      <a:solidFill>
-                        <a:srgbClr val="E3E8E9"/>
-                      </a:solidFill>
-                      <a:prstDash val="solid"/>
-                      <a:round/>
-                      <a:headEnd type="none" w="med" len="med"/>
-                      <a:tailEnd type="none" w="med" len="med"/>
-                    </a:lnL>
-                    <a:lnR w="6350" cap="flat" cmpd="sng" algn="ctr">
-                      <a:solidFill>
-                        <a:srgbClr val="E3E8E9"/>
-                      </a:solidFill>
-                      <a:prstDash val="solid"/>
-                      <a:round/>
-                      <a:headEnd type="none" w="med" len="med"/>
-                      <a:tailEnd type="none" w="med" len="med"/>
-                    </a:lnR>
-                    <a:lnT w="6350" cap="flat" cmpd="sng" algn="ctr">
-                      <a:solidFill>
-                        <a:srgbClr val="E3E8E9"/>
-                      </a:solidFill>
-                      <a:prstDash val="solid"/>
-                      <a:round/>
-                      <a:headEnd type="none" w="med" len="med"/>
-                      <a:tailEnd type="none" w="med" len="med"/>
-                    </a:lnT>
-                    <a:lnB w="6350" cap="flat" cmpd="sng" algn="ctr">
-                      <a:solidFill>
-                        <a:srgbClr val="E3E8E9"/>
-                      </a:solidFill>
-                      <a:prstDash val="solid"/>
-                      <a:round/>
-                      <a:headEnd type="none" w="med" len="med"/>
-                      <a:tailEnd type="none" w="med" len="med"/>
-                    </a:lnB>
-                    <a:solidFill>
-                      <a:srgbClr val="FFFFFF"/>
-                    </a:solidFill>
-                  </a:tcPr>
-                </a:tc>
-                <a:tc>
-                  <a:txBody>
-                    <a:bodyPr/>
-                    <a:lstStyle/>
-                    <a:p>
-                      <a:pPr indent="0" marL="0">
-                        <a:buNone/>
-                      </a:pPr>
-                      <a:r>
-                        <a:rPr lang="en-US" sz="1000" dirty="0">
-                          <a:solidFill>
-                            <a:srgbClr val="5B6B73"/>
-                          </a:solidFill>
-                          <a:latin typeface="Calibri" pitchFamily="34" charset="0"/>
-                          <a:ea typeface="Calibri" pitchFamily="34" charset="-122"/>
-                          <a:cs typeface="Calibri" pitchFamily="34" charset="-120"/>
-                        </a:rPr>
-                        <a:t>CON - Construção</a:t>
-                      </a:r>
-                      <a:endParaRPr lang="en-US" sz="1000" dirty="0">
-                        <a:latin typeface="Calibri" charset="0"/>
-                        <a:ea typeface="Calibri" charset="0"/>
-                        <a:cs typeface="Calibri" charset="0"/>
-                      </a:endParaRPr>
-                    </a:p>
-                  </a:txBody>
-                  <a:tcPr marL="91440" marR="91440" marT="45720" marB="45720" anchor="ctr">
-                    <a:lnL w="6350" cap="flat" cmpd="sng" algn="ctr">
-                      <a:solidFill>
-                        <a:srgbClr val="E3E8E9"/>
-                      </a:solidFill>
-                      <a:prstDash val="solid"/>
-                      <a:round/>
-                      <a:headEnd type="none" w="med" len="med"/>
-                      <a:tailEnd type="none" w="med" len="med"/>
-                    </a:lnL>
-                    <a:lnR w="6350" cap="flat" cmpd="sng" algn="ctr">
-                      <a:solidFill>
-                        <a:srgbClr val="E3E8E9"/>
-                      </a:solidFill>
-                      <a:prstDash val="solid"/>
-                      <a:round/>
-                      <a:headEnd type="none" w="med" len="med"/>
-                      <a:tailEnd type="none" w="med" len="med"/>
-                    </a:lnR>
-                    <a:lnT w="6350" cap="flat" cmpd="sng" algn="ctr">
-                      <a:solidFill>
-                        <a:srgbClr val="E3E8E9"/>
-                      </a:solidFill>
-                      <a:prstDash val="solid"/>
-                      <a:round/>
-                      <a:headEnd type="none" w="med" len="med"/>
-                      <a:tailEnd type="none" w="med" len="med"/>
-                    </a:lnT>
-                    <a:lnB w="6350" cap="flat" cmpd="sng" algn="ctr">
-                      <a:solidFill>
-                        <a:srgbClr val="E3E8E9"/>
-                      </a:solidFill>
-                      <a:prstDash val="solid"/>
-                      <a:round/>
-                      <a:headEnd type="none" w="med" len="med"/>
-                      <a:tailEnd type="none" w="med" len="med"/>
-                    </a:lnB>
-                    <a:solidFill>
-                      <a:srgbClr val="FFFFFF"/>
-                    </a:solidFill>
-                  </a:tcPr>
-                </a:tc>
-                <a:tc>
-                  <a:txBody>
-                    <a:bodyPr/>
-                    <a:lstStyle/>
-                    <a:p>
-                      <a:pPr indent="0" marL="0">
-                        <a:buNone/>
-                      </a:pPr>
-                      <a:r>
-                        <a:rPr lang="en-US" sz="1000" dirty="0">
-                          <a:solidFill>
-                            <a:srgbClr val="5B6B73"/>
-                          </a:solidFill>
-                          <a:latin typeface="Calibri" pitchFamily="34" charset="0"/>
-                          <a:ea typeface="Calibri" pitchFamily="34" charset="-122"/>
-                          <a:cs typeface="Calibri" pitchFamily="34" charset="-120"/>
-                        </a:rPr>
-                        <a:t>Integridade e Regulatório</a:t>
-                      </a:r>
-                      <a:endParaRPr lang="en-US" sz="1000" dirty="0">
-                        <a:latin typeface="Calibri" charset="0"/>
-                        <a:ea typeface="Calibri" charset="0"/>
-                        <a:cs typeface="Calibri" charset="0"/>
-                      </a:endParaRPr>
-                    </a:p>
-                  </a:txBody>
-                  <a:tcPr marL="91440" marR="91440" marT="45720" marB="45720" anchor="ctr">
-                    <a:lnL w="6350" cap="flat" cmpd="sng" algn="ctr">
-                      <a:solidFill>
-                        <a:srgbClr val="E3E8E9"/>
-                      </a:solidFill>
-                      <a:prstDash val="solid"/>
-                      <a:round/>
-                      <a:headEnd type="none" w="med" len="med"/>
-                      <a:tailEnd type="none" w="med" len="med"/>
-                    </a:lnL>
-                    <a:lnR w="6350" cap="flat" cmpd="sng" algn="ctr">
-                      <a:solidFill>
-                        <a:srgbClr val="E3E8E9"/>
-                      </a:solidFill>
-                      <a:prstDash val="solid"/>
-                      <a:round/>
-                      <a:headEnd type="none" w="med" len="med"/>
-                      <a:tailEnd type="none" w="med" len="med"/>
-                    </a:lnR>
-                    <a:lnT w="6350" cap="flat" cmpd="sng" algn="ctr">
-                      <a:solidFill>
-                        <a:srgbClr val="E3E8E9"/>
-                      </a:solidFill>
-                      <a:prstDash val="solid"/>
-                      <a:round/>
-                      <a:headEnd type="none" w="med" len="med"/>
-                      <a:tailEnd type="none" w="med" len="med"/>
-                    </a:lnT>
-                    <a:lnB w="6350" cap="flat" cmpd="sng" algn="ctr">
-                      <a:solidFill>
-                        <a:srgbClr val="E3E8E9"/>
-                      </a:solidFill>
-                      <a:prstDash val="solid"/>
-                      <a:round/>
-                      <a:headEnd type="none" w="med" len="med"/>
-                      <a:tailEnd type="none" w="med" len="med"/>
-                    </a:lnB>
-                    <a:solidFill>
-                      <a:srgbClr val="FFFFFF"/>
-                    </a:solidFill>
-                  </a:tcPr>
-                </a:tc>
-                <a:tc>
-                  <a:txBody>
-                    <a:bodyPr/>
-                    <a:lstStyle/>
-                    <a:p>
-                      <a:pPr algn="r" indent="0" marL="0">
-                        <a:buNone/>
-                      </a:pPr>
-                      <a:r>
-                        <a:rPr lang="en-US" sz="1100" b="1" dirty="0">
-                          <a:solidFill>
-                            <a:srgbClr val="0B2A3D"/>
-                          </a:solidFill>
-                          <a:latin typeface="Calibri" pitchFamily="34" charset="0"/>
-                          <a:ea typeface="Calibri" pitchFamily="34" charset="-122"/>
-                          <a:cs typeface="Calibri" pitchFamily="34" charset="-120"/>
-                        </a:rPr>
-                        <a:t>US$ 6,5 mi</a:t>
-                      </a:r>
-                      <a:endParaRPr lang="en-US" sz="1100" dirty="0">
-                        <a:latin typeface="Calibri" charset="0"/>
-                        <a:ea typeface="Calibri" charset="0"/>
-                        <a:cs typeface="Calibri" charset="0"/>
-                      </a:endParaRPr>
-                    </a:p>
-                  </a:txBody>
-                  <a:tcPr marL="91440" marR="91440" marT="45720" marB="45720" anchor="ctr">
-                    <a:lnL w="6350" cap="flat" cmpd="sng" algn="ctr">
-                      <a:solidFill>
-                        <a:srgbClr val="E3E8E9"/>
-                      </a:solidFill>
-                      <a:prstDash val="solid"/>
-                      <a:round/>
-                      <a:headEnd type="none" w="med" len="med"/>
-                      <a:tailEnd type="none" w="med" len="med"/>
-                    </a:lnL>
-                    <a:lnR w="6350" cap="flat" cmpd="sng" algn="ctr">
-                      <a:solidFill>
-                        <a:srgbClr val="E3E8E9"/>
-                      </a:solidFill>
-                      <a:prstDash val="solid"/>
-                      <a:round/>
-                      <a:headEnd type="none" w="med" len="med"/>
-                      <a:tailEnd type="none" w="med" len="med"/>
-                    </a:lnR>
-                    <a:lnT w="6350" cap="flat" cmpd="sng" algn="ctr">
-                      <a:solidFill>
-                        <a:srgbClr val="E3E8E9"/>
-                      </a:solidFill>
-                      <a:prstDash val="solid"/>
-                      <a:round/>
-                      <a:headEnd type="none" w="med" len="med"/>
-                      <a:tailEnd type="none" w="med" len="med"/>
-                    </a:lnT>
-                    <a:lnB w="6350" cap="flat" cmpd="sng" algn="ctr">
-                      <a:solidFill>
-                        <a:srgbClr val="E3E8E9"/>
-                      </a:solidFill>
-                      <a:prstDash val="solid"/>
-                      <a:round/>
-                      <a:headEnd type="none" w="med" len="med"/>
-                      <a:tailEnd type="none" w="med" len="med"/>
-                    </a:lnB>
-                    <a:solidFill>
-                      <a:srgbClr val="FFFFFF"/>
-                    </a:solidFill>
-                  </a:tcPr>
-                </a:tc>
-              </a:tr>
-              <a:tr h="502920">
-                <a:tc>
-                  <a:txBody>
-                    <a:bodyPr/>
-                    <a:lstStyle/>
-                    <a:p>
-                      <a:pPr indent="0" marL="0">
-                        <a:buNone/>
-                      </a:pPr>
-                      <a:r>
-                        <a:rPr lang="en-US" sz="1100" dirty="0">
-                          <a:solidFill>
-                            <a:srgbClr val="1C2B33"/>
-                          </a:solidFill>
-                          <a:latin typeface="Calibri" pitchFamily="34" charset="0"/>
-                          <a:ea typeface="Calibri" pitchFamily="34" charset="-122"/>
-                          <a:cs typeface="Calibri" pitchFamily="34" charset="-120"/>
-                        </a:rPr>
-                        <a:t>TIME FIXO PRIO</a:t>
-                      </a:r>
-                      <a:endParaRPr lang="en-US" sz="1100" dirty="0">
-                        <a:latin typeface="Calibri" charset="0"/>
-                        <a:ea typeface="Calibri" charset="0"/>
-                        <a:cs typeface="Calibri" charset="0"/>
-                      </a:endParaRPr>
-                    </a:p>
-                  </a:txBody>
-                  <a:tcPr marL="91440" marR="91440" marT="45720" marB="45720" anchor="ctr">
-                    <a:lnL w="6350" cap="flat" cmpd="sng" algn="ctr">
-                      <a:solidFill>
-                        <a:srgbClr val="E3E8E9"/>
-                      </a:solidFill>
-                      <a:prstDash val="solid"/>
-                      <a:round/>
-                      <a:headEnd type="none" w="med" len="med"/>
-                      <a:tailEnd type="none" w="med" len="med"/>
-                    </a:lnL>
-                    <a:lnR w="6350" cap="flat" cmpd="sng" algn="ctr">
-                      <a:solidFill>
-                        <a:srgbClr val="E3E8E9"/>
-                      </a:solidFill>
-                      <a:prstDash val="solid"/>
-                      <a:round/>
-                      <a:headEnd type="none" w="med" len="med"/>
-                      <a:tailEnd type="none" w="med" len="med"/>
-                    </a:lnR>
-                    <a:lnT w="6350" cap="flat" cmpd="sng" algn="ctr">
-                      <a:solidFill>
-                        <a:srgbClr val="E3E8E9"/>
-                      </a:solidFill>
-                      <a:prstDash val="solid"/>
-                      <a:round/>
-                      <a:headEnd type="none" w="med" len="med"/>
-                      <a:tailEnd type="none" w="med" len="med"/>
-                    </a:lnT>
-                    <a:lnB w="6350" cap="flat" cmpd="sng" algn="ctr">
-                      <a:solidFill>
-                        <a:srgbClr val="E3E8E9"/>
-                      </a:solidFill>
-                      <a:prstDash val="solid"/>
-                      <a:round/>
-                      <a:headEnd type="none" w="med" len="med"/>
-                      <a:tailEnd type="none" w="med" len="med"/>
-                    </a:lnB>
-                    <a:solidFill>
-                      <a:srgbClr val="F0F4F5"/>
-                    </a:solidFill>
-                  </a:tcPr>
-                </a:tc>
-                <a:tc>
-                  <a:txBody>
-                    <a:bodyPr/>
-                    <a:lstStyle/>
-                    <a:p>
-                      <a:pPr indent="0" marL="0">
-                        <a:buNone/>
-                      </a:pPr>
-                      <a:r>
-                        <a:rPr lang="en-US" sz="1000" dirty="0">
-                          <a:solidFill>
-                            <a:srgbClr val="5B6B73"/>
-                          </a:solidFill>
-                          <a:latin typeface="Calibri" pitchFamily="34" charset="0"/>
-                          <a:ea typeface="Calibri" pitchFamily="34" charset="-122"/>
-                          <a:cs typeface="Calibri" pitchFamily="34" charset="-120"/>
-                        </a:rPr>
-                        <a:t>PLAT C</a:t>
-                      </a:r>
-                      <a:endParaRPr lang="en-US" sz="1000" dirty="0">
-                        <a:latin typeface="Calibri" charset="0"/>
-                        <a:ea typeface="Calibri" charset="0"/>
-                        <a:cs typeface="Calibri" charset="0"/>
-                      </a:endParaRPr>
-                    </a:p>
-                  </a:txBody>
-                  <a:tcPr marL="91440" marR="91440" marT="45720" marB="45720" anchor="ctr">
-                    <a:lnL w="6350" cap="flat" cmpd="sng" algn="ctr">
-                      <a:solidFill>
-                        <a:srgbClr val="E3E8E9"/>
-                      </a:solidFill>
-                      <a:prstDash val="solid"/>
-                      <a:round/>
-                      <a:headEnd type="none" w="med" len="med"/>
-                      <a:tailEnd type="none" w="med" len="med"/>
-                    </a:lnL>
-                    <a:lnR w="6350" cap="flat" cmpd="sng" algn="ctr">
-                      <a:solidFill>
-                        <a:srgbClr val="E3E8E9"/>
-                      </a:solidFill>
-                      <a:prstDash val="solid"/>
-                      <a:round/>
-                      <a:headEnd type="none" w="med" len="med"/>
-                      <a:tailEnd type="none" w="med" len="med"/>
-                    </a:lnR>
-                    <a:lnT w="6350" cap="flat" cmpd="sng" algn="ctr">
-                      <a:solidFill>
-                        <a:srgbClr val="E3E8E9"/>
-                      </a:solidFill>
-                      <a:prstDash val="solid"/>
-                      <a:round/>
-                      <a:headEnd type="none" w="med" len="med"/>
-                      <a:tailEnd type="none" w="med" len="med"/>
-                    </a:lnT>
-                    <a:lnB w="6350" cap="flat" cmpd="sng" algn="ctr">
-                      <a:solidFill>
-                        <a:srgbClr val="E3E8E9"/>
-                      </a:solidFill>
-                      <a:prstDash val="solid"/>
-                      <a:round/>
-                      <a:headEnd type="none" w="med" len="med"/>
-                      <a:tailEnd type="none" w="med" len="med"/>
-                    </a:lnB>
-                    <a:solidFill>
-                      <a:srgbClr val="F0F4F5"/>
-                    </a:solidFill>
-                  </a:tcPr>
-                </a:tc>
-                <a:tc>
-                  <a:txBody>
-                    <a:bodyPr/>
-                    <a:lstStyle/>
-                    <a:p>
-                      <a:pPr indent="0" marL="0">
-                        <a:buNone/>
-                      </a:pPr>
-                      <a:r>
-                        <a:rPr lang="en-US" sz="1000" dirty="0">
-                          <a:solidFill>
-                            <a:srgbClr val="5B6B73"/>
-                          </a:solidFill>
-                          <a:latin typeface="Calibri" pitchFamily="34" charset="0"/>
-                          <a:ea typeface="Calibri" pitchFamily="34" charset="-122"/>
-                          <a:cs typeface="Calibri" pitchFamily="34" charset="-120"/>
-                        </a:rPr>
-                        <a:t>ADM - Administrativo</a:t>
-                      </a:r>
-                      <a:endParaRPr lang="en-US" sz="1000" dirty="0">
-                        <a:latin typeface="Calibri" charset="0"/>
-                        <a:ea typeface="Calibri" charset="0"/>
-                        <a:cs typeface="Calibri" charset="0"/>
-                      </a:endParaRPr>
-                    </a:p>
-                  </a:txBody>
-                  <a:tcPr marL="91440" marR="91440" marT="45720" marB="45720" anchor="ctr">
-                    <a:lnL w="6350" cap="flat" cmpd="sng" algn="ctr">
-                      <a:solidFill>
-                        <a:srgbClr val="E3E8E9"/>
-                      </a:solidFill>
-                      <a:prstDash val="solid"/>
-                      <a:round/>
-                      <a:headEnd type="none" w="med" len="med"/>
-                      <a:tailEnd type="none" w="med" len="med"/>
-                    </a:lnL>
-                    <a:lnR w="6350" cap="flat" cmpd="sng" algn="ctr">
-                      <a:solidFill>
-                        <a:srgbClr val="E3E8E9"/>
-                      </a:solidFill>
-                      <a:prstDash val="solid"/>
-                      <a:round/>
-                      <a:headEnd type="none" w="med" len="med"/>
-                      <a:tailEnd type="none" w="med" len="med"/>
-                    </a:lnR>
-                    <a:lnT w="6350" cap="flat" cmpd="sng" algn="ctr">
-                      <a:solidFill>
-                        <a:srgbClr val="E3E8E9"/>
-                      </a:solidFill>
-                      <a:prstDash val="solid"/>
-                      <a:round/>
-                      <a:headEnd type="none" w="med" len="med"/>
-                      <a:tailEnd type="none" w="med" len="med"/>
-                    </a:lnT>
-                    <a:lnB w="6350" cap="flat" cmpd="sng" algn="ctr">
-                      <a:solidFill>
-                        <a:srgbClr val="E3E8E9"/>
-                      </a:solidFill>
-                      <a:prstDash val="solid"/>
-                      <a:round/>
-                      <a:headEnd type="none" w="med" len="med"/>
-                      <a:tailEnd type="none" w="med" len="med"/>
-                    </a:lnB>
-                    <a:solidFill>
-                      <a:srgbClr val="F0F4F5"/>
-                    </a:solidFill>
-                  </a:tcPr>
-                </a:tc>
-                <a:tc>
-                  <a:txBody>
-                    <a:bodyPr/>
-                    <a:lstStyle/>
-                    <a:p>
-                      <a:pPr indent="0" marL="0">
-                        <a:buNone/>
-                      </a:pPr>
-                      <a:r>
-                        <a:rPr lang="en-US" sz="1000" dirty="0">
-                          <a:solidFill>
-                            <a:srgbClr val="5B6B73"/>
-                          </a:solidFill>
-                          <a:latin typeface="Calibri" pitchFamily="34" charset="0"/>
-                          <a:ea typeface="Calibri" pitchFamily="34" charset="-122"/>
-                          <a:cs typeface="Calibri" pitchFamily="34" charset="-120"/>
-                        </a:rPr>
-                        <a:t>Rotina Operacional</a:t>
-                      </a:r>
-                      <a:endParaRPr lang="en-US" sz="1000" dirty="0">
-                        <a:latin typeface="Calibri" charset="0"/>
-                        <a:ea typeface="Calibri" charset="0"/>
-                        <a:cs typeface="Calibri" charset="0"/>
-                      </a:endParaRPr>
-                    </a:p>
-                  </a:txBody>
-                  <a:tcPr marL="91440" marR="91440" marT="45720" marB="45720" anchor="ctr">
-                    <a:lnL w="6350" cap="flat" cmpd="sng" algn="ctr">
-                      <a:solidFill>
-                        <a:srgbClr val="E3E8E9"/>
-                      </a:solidFill>
-                      <a:prstDash val="solid"/>
-                      <a:round/>
-                      <a:headEnd type="none" w="med" len="med"/>
-                      <a:tailEnd type="none" w="med" len="med"/>
-                    </a:lnL>
-                    <a:lnR w="6350" cap="flat" cmpd="sng" algn="ctr">
-                      <a:solidFill>
-                        <a:srgbClr val="E3E8E9"/>
-                      </a:solidFill>
-                      <a:prstDash val="solid"/>
-                      <a:round/>
-                      <a:headEnd type="none" w="med" len="med"/>
-                      <a:tailEnd type="none" w="med" len="med"/>
-                    </a:lnR>
-                    <a:lnT w="6350" cap="flat" cmpd="sng" algn="ctr">
-                      <a:solidFill>
-                        <a:srgbClr val="E3E8E9"/>
-                      </a:solidFill>
-                      <a:prstDash val="solid"/>
-                      <a:round/>
-                      <a:headEnd type="none" w="med" len="med"/>
-                      <a:tailEnd type="none" w="med" len="med"/>
-                    </a:lnT>
-                    <a:lnB w="6350" cap="flat" cmpd="sng" algn="ctr">
-                      <a:solidFill>
-                        <a:srgbClr val="E3E8E9"/>
-                      </a:solidFill>
-                      <a:prstDash val="solid"/>
-                      <a:round/>
-                      <a:headEnd type="none" w="med" len="med"/>
-                      <a:tailEnd type="none" w="med" len="med"/>
-                    </a:lnB>
-                    <a:solidFill>
-                      <a:srgbClr val="F0F4F5"/>
-                    </a:solidFill>
-                  </a:tcPr>
-                </a:tc>
-                <a:tc>
-                  <a:txBody>
-                    <a:bodyPr/>
-                    <a:lstStyle/>
-                    <a:p>
-                      <a:pPr algn="r" indent="0" marL="0">
-                        <a:buNone/>
-                      </a:pPr>
-                      <a:r>
-                        <a:rPr lang="en-US" sz="1100" b="1" dirty="0">
-                          <a:solidFill>
-                            <a:srgbClr val="0B2A3D"/>
-                          </a:solidFill>
-                          <a:latin typeface="Calibri" pitchFamily="34" charset="0"/>
-                          <a:ea typeface="Calibri" pitchFamily="34" charset="-122"/>
-                          <a:cs typeface="Calibri" pitchFamily="34" charset="-120"/>
-                        </a:rPr>
-                        <a:t>US$ 5,6 mi</a:t>
-                      </a:r>
-                      <a:endParaRPr lang="en-US" sz="1100" dirty="0">
-                        <a:latin typeface="Calibri" charset="0"/>
-                        <a:ea typeface="Calibri" charset="0"/>
-                        <a:cs typeface="Calibri" charset="0"/>
-                      </a:endParaRPr>
-                    </a:p>
-                  </a:txBody>
-                  <a:tcPr marL="91440" marR="91440" marT="45720" marB="45720" anchor="ctr">
-                    <a:lnL w="6350" cap="flat" cmpd="sng" algn="ctr">
-                      <a:solidFill>
-                        <a:srgbClr val="E3E8E9"/>
-                      </a:solidFill>
-                      <a:prstDash val="solid"/>
-                      <a:round/>
-                      <a:headEnd type="none" w="med" len="med"/>
-                      <a:tailEnd type="none" w="med" len="med"/>
-                    </a:lnL>
-                    <a:lnR w="6350" cap="flat" cmpd="sng" algn="ctr">
-                      <a:solidFill>
-                        <a:srgbClr val="E3E8E9"/>
-                      </a:solidFill>
-                      <a:prstDash val="solid"/>
-                      <a:round/>
-                      <a:headEnd type="none" w="med" len="med"/>
-                      <a:tailEnd type="none" w="med" len="med"/>
-                    </a:lnR>
-                    <a:lnT w="6350" cap="flat" cmpd="sng" algn="ctr">
-                      <a:solidFill>
-                        <a:srgbClr val="E3E8E9"/>
-                      </a:solidFill>
-                      <a:prstDash val="solid"/>
-                      <a:round/>
-                      <a:headEnd type="none" w="med" len="med"/>
-                      <a:tailEnd type="none" w="med" len="med"/>
-                    </a:lnT>
-                    <a:lnB w="6350" cap="flat" cmpd="sng" algn="ctr">
-                      <a:solidFill>
-                        <a:srgbClr val="E3E8E9"/>
-                      </a:solidFill>
-                      <a:prstDash val="solid"/>
-                      <a:round/>
-                      <a:headEnd type="none" w="med" len="med"/>
-                      <a:tailEnd type="none" w="med" len="med"/>
-                    </a:lnB>
-                    <a:solidFill>
-                      <a:srgbClr val="F0F4F5"/>
-                    </a:solidFill>
-                  </a:tcPr>
-                </a:tc>
-              </a:tr>
-              <a:tr h="502920">
-                <a:tc>
-                  <a:txBody>
-                    <a:bodyPr/>
-                    <a:lstStyle/>
-                    <a:p>
-                      <a:pPr indent="0" marL="0">
-                        <a:buNone/>
-                      </a:pPr>
-                      <a:r>
-                        <a:rPr lang="en-US" sz="1100" dirty="0">
-                          <a:solidFill>
-                            <a:srgbClr val="1C2B33"/>
-                          </a:solidFill>
-                          <a:latin typeface="Calibri" pitchFamily="34" charset="0"/>
-                          <a:ea typeface="Calibri" pitchFamily="34" charset="-122"/>
-                          <a:cs typeface="Calibri" pitchFamily="34" charset="-120"/>
-                        </a:rPr>
-                        <a:t>TIME FIXO PRIO</a:t>
-                      </a:r>
-                      <a:endParaRPr lang="en-US" sz="1100" dirty="0">
-                        <a:latin typeface="Calibri" charset="0"/>
-                        <a:ea typeface="Calibri" charset="0"/>
-                        <a:cs typeface="Calibri" charset="0"/>
-                      </a:endParaRPr>
-                    </a:p>
-                  </a:txBody>
-                  <a:tcPr marL="91440" marR="91440" marT="45720" marB="45720" anchor="ctr">
-                    <a:lnL w="6350" cap="flat" cmpd="sng" algn="ctr">
-                      <a:solidFill>
-                        <a:srgbClr val="E3E8E9"/>
-                      </a:solidFill>
-                      <a:prstDash val="solid"/>
-                      <a:round/>
-                      <a:headEnd type="none" w="med" len="med"/>
-                      <a:tailEnd type="none" w="med" len="med"/>
-                    </a:lnL>
-                    <a:lnR w="6350" cap="flat" cmpd="sng" algn="ctr">
-                      <a:solidFill>
-                        <a:srgbClr val="E3E8E9"/>
-                      </a:solidFill>
-                      <a:prstDash val="solid"/>
-                      <a:round/>
-                      <a:headEnd type="none" w="med" len="med"/>
-                      <a:tailEnd type="none" w="med" len="med"/>
-                    </a:lnR>
-                    <a:lnT w="6350" cap="flat" cmpd="sng" algn="ctr">
-                      <a:solidFill>
-                        <a:srgbClr val="E3E8E9"/>
-                      </a:solidFill>
-                      <a:prstDash val="solid"/>
-                      <a:round/>
-                      <a:headEnd type="none" w="med" len="med"/>
-                      <a:tailEnd type="none" w="med" len="med"/>
-                    </a:lnT>
-                    <a:lnB w="6350" cap="flat" cmpd="sng" algn="ctr">
-                      <a:solidFill>
-                        <a:srgbClr val="E3E8E9"/>
-                      </a:solidFill>
-                      <a:prstDash val="solid"/>
-                      <a:round/>
-                      <a:headEnd type="none" w="med" len="med"/>
-                      <a:tailEnd type="none" w="med" len="med"/>
-                    </a:lnB>
-                    <a:solidFill>
-                      <a:srgbClr val="FFFFFF"/>
-                    </a:solidFill>
-                  </a:tcPr>
-                </a:tc>
-                <a:tc>
-                  <a:txBody>
-                    <a:bodyPr/>
-                    <a:lstStyle/>
-                    <a:p>
-                      <a:pPr indent="0" marL="0">
-                        <a:buNone/>
-                      </a:pPr>
-                      <a:r>
-                        <a:rPr lang="en-US" sz="1000" dirty="0">
-                          <a:solidFill>
-                            <a:srgbClr val="5B6B73"/>
-                          </a:solidFill>
-                          <a:latin typeface="Calibri" pitchFamily="34" charset="0"/>
-                          <a:ea typeface="Calibri" pitchFamily="34" charset="-122"/>
-                          <a:cs typeface="Calibri" pitchFamily="34" charset="-120"/>
-                        </a:rPr>
-                        <a:t>PLAT B</a:t>
-                      </a:r>
-                      <a:endParaRPr lang="en-US" sz="1000" dirty="0">
-                        <a:latin typeface="Calibri" charset="0"/>
-                        <a:ea typeface="Calibri" charset="0"/>
-                        <a:cs typeface="Calibri" charset="0"/>
-                      </a:endParaRPr>
-                    </a:p>
-                  </a:txBody>
-                  <a:tcPr marL="91440" marR="91440" marT="45720" marB="45720" anchor="ctr">
-                    <a:lnL w="6350" cap="flat" cmpd="sng" algn="ctr">
-                      <a:solidFill>
-                        <a:srgbClr val="E3E8E9"/>
-                      </a:solidFill>
-                      <a:prstDash val="solid"/>
-                      <a:round/>
-                      <a:headEnd type="none" w="med" len="med"/>
-                      <a:tailEnd type="none" w="med" len="med"/>
-                    </a:lnL>
-                    <a:lnR w="6350" cap="flat" cmpd="sng" algn="ctr">
-                      <a:solidFill>
-                        <a:srgbClr val="E3E8E9"/>
-                      </a:solidFill>
-                      <a:prstDash val="solid"/>
-                      <a:round/>
-                      <a:headEnd type="none" w="med" len="med"/>
-                      <a:tailEnd type="none" w="med" len="med"/>
-                    </a:lnR>
-                    <a:lnT w="6350" cap="flat" cmpd="sng" algn="ctr">
-                      <a:solidFill>
-                        <a:srgbClr val="E3E8E9"/>
-                      </a:solidFill>
-                      <a:prstDash val="solid"/>
-                      <a:round/>
-                      <a:headEnd type="none" w="med" len="med"/>
-                      <a:tailEnd type="none" w="med" len="med"/>
-                    </a:lnT>
-                    <a:lnB w="6350" cap="flat" cmpd="sng" algn="ctr">
-                      <a:solidFill>
-                        <a:srgbClr val="E3E8E9"/>
-                      </a:solidFill>
-                      <a:prstDash val="solid"/>
-                      <a:round/>
-                      <a:headEnd type="none" w="med" len="med"/>
-                      <a:tailEnd type="none" w="med" len="med"/>
-                    </a:lnB>
-                    <a:solidFill>
-                      <a:srgbClr val="FFFFFF"/>
-                    </a:solidFill>
-                  </a:tcPr>
-                </a:tc>
-                <a:tc>
-                  <a:txBody>
-                    <a:bodyPr/>
-                    <a:lstStyle/>
-                    <a:p>
-                      <a:pPr indent="0" marL="0">
-                        <a:buNone/>
-                      </a:pPr>
-                      <a:r>
-                        <a:rPr lang="en-US" sz="1000" dirty="0">
-                          <a:solidFill>
-                            <a:srgbClr val="5B6B73"/>
-                          </a:solidFill>
-                          <a:latin typeface="Calibri" pitchFamily="34" charset="0"/>
-                          <a:ea typeface="Calibri" pitchFamily="34" charset="-122"/>
-                          <a:cs typeface="Calibri" pitchFamily="34" charset="-120"/>
-                        </a:rPr>
-                        <a:t>Catering</a:t>
-                      </a:r>
-                      <a:endParaRPr lang="en-US" sz="1000" dirty="0">
-                        <a:latin typeface="Calibri" charset="0"/>
-                        <a:ea typeface="Calibri" charset="0"/>
-                        <a:cs typeface="Calibri" charset="0"/>
-                      </a:endParaRPr>
-                    </a:p>
-                  </a:txBody>
-                  <a:tcPr marL="91440" marR="91440" marT="45720" marB="45720" anchor="ctr">
-                    <a:lnL w="6350" cap="flat" cmpd="sng" algn="ctr">
-                      <a:solidFill>
-                        <a:srgbClr val="E3E8E9"/>
-                      </a:solidFill>
-                      <a:prstDash val="solid"/>
-                      <a:round/>
-                      <a:headEnd type="none" w="med" len="med"/>
-                      <a:tailEnd type="none" w="med" len="med"/>
-                    </a:lnL>
-                    <a:lnR w="6350" cap="flat" cmpd="sng" algn="ctr">
-                      <a:solidFill>
-                        <a:srgbClr val="E3E8E9"/>
-                      </a:solidFill>
-                      <a:prstDash val="solid"/>
-                      <a:round/>
-                      <a:headEnd type="none" w="med" len="med"/>
-                      <a:tailEnd type="none" w="med" len="med"/>
-                    </a:lnR>
-                    <a:lnT w="6350" cap="flat" cmpd="sng" algn="ctr">
-                      <a:solidFill>
-                        <a:srgbClr val="E3E8E9"/>
-                      </a:solidFill>
-                      <a:prstDash val="solid"/>
-                      <a:round/>
-                      <a:headEnd type="none" w="med" len="med"/>
-                      <a:tailEnd type="none" w="med" len="med"/>
-                    </a:lnT>
-                    <a:lnB w="6350" cap="flat" cmpd="sng" algn="ctr">
-                      <a:solidFill>
-                        <a:srgbClr val="E3E8E9"/>
-                      </a:solidFill>
-                      <a:prstDash val="solid"/>
-                      <a:round/>
-                      <a:headEnd type="none" w="med" len="med"/>
-                      <a:tailEnd type="none" w="med" len="med"/>
-                    </a:lnB>
-                    <a:solidFill>
-                      <a:srgbClr val="FFFFFF"/>
-                    </a:solidFill>
-                  </a:tcPr>
-                </a:tc>
-                <a:tc>
-                  <a:txBody>
-                    <a:bodyPr/>
-                    <a:lstStyle/>
-                    <a:p>
-                      <a:pPr indent="0" marL="0">
-                        <a:buNone/>
-                      </a:pPr>
-                      <a:r>
-                        <a:rPr lang="en-US" sz="1000" dirty="0">
-                          <a:solidFill>
-                            <a:srgbClr val="5B6B73"/>
-                          </a:solidFill>
-                          <a:latin typeface="Calibri" pitchFamily="34" charset="0"/>
-                          <a:ea typeface="Calibri" pitchFamily="34" charset="-122"/>
-                          <a:cs typeface="Calibri" pitchFamily="34" charset="-120"/>
-                        </a:rPr>
-                        <a:t>Rotina Operacional</a:t>
-                      </a:r>
-                      <a:endParaRPr lang="en-US" sz="1000" dirty="0">
-                        <a:latin typeface="Calibri" charset="0"/>
-                        <a:ea typeface="Calibri" charset="0"/>
-                        <a:cs typeface="Calibri" charset="0"/>
-                      </a:endParaRPr>
-                    </a:p>
-                  </a:txBody>
-                  <a:tcPr marL="91440" marR="91440" marT="45720" marB="45720" anchor="ctr">
-                    <a:lnL w="6350" cap="flat" cmpd="sng" algn="ctr">
-                      <a:solidFill>
-                        <a:srgbClr val="E3E8E9"/>
-                      </a:solidFill>
-                      <a:prstDash val="solid"/>
-                      <a:round/>
-                      <a:headEnd type="none" w="med" len="med"/>
-                      <a:tailEnd type="none" w="med" len="med"/>
-                    </a:lnL>
-                    <a:lnR w="6350" cap="flat" cmpd="sng" algn="ctr">
-                      <a:solidFill>
-                        <a:srgbClr val="E3E8E9"/>
-                      </a:solidFill>
-                      <a:prstDash val="solid"/>
-                      <a:round/>
-                      <a:headEnd type="none" w="med" len="med"/>
-                      <a:tailEnd type="none" w="med" len="med"/>
-                    </a:lnR>
-                    <a:lnT w="6350" cap="flat" cmpd="sng" algn="ctr">
-                      <a:solidFill>
-                        <a:srgbClr val="E3E8E9"/>
-                      </a:solidFill>
-                      <a:prstDash val="solid"/>
-                      <a:round/>
-                      <a:headEnd type="none" w="med" len="med"/>
-                      <a:tailEnd type="none" w="med" len="med"/>
-                    </a:lnT>
-                    <a:lnB w="6350" cap="flat" cmpd="sng" algn="ctr">
-                      <a:solidFill>
-                        <a:srgbClr val="E3E8E9"/>
-                      </a:solidFill>
-                      <a:prstDash val="solid"/>
-                      <a:round/>
-                      <a:headEnd type="none" w="med" len="med"/>
-                      <a:tailEnd type="none" w="med" len="med"/>
-                    </a:lnB>
-                    <a:solidFill>
-                      <a:srgbClr val="FFFFFF"/>
-                    </a:solidFill>
-                  </a:tcPr>
-                </a:tc>
-                <a:tc>
-                  <a:txBody>
-                    <a:bodyPr/>
-                    <a:lstStyle/>
-                    <a:p>
-                      <a:pPr algn="r" indent="0" marL="0">
-                        <a:buNone/>
-                      </a:pPr>
-                      <a:r>
-                        <a:rPr lang="en-US" sz="1100" b="1" dirty="0">
-                          <a:solidFill>
-                            <a:srgbClr val="0B2A3D"/>
-                          </a:solidFill>
-                          <a:latin typeface="Calibri" pitchFamily="34" charset="0"/>
-                          <a:ea typeface="Calibri" pitchFamily="34" charset="-122"/>
-                          <a:cs typeface="Calibri" pitchFamily="34" charset="-120"/>
-                        </a:rPr>
-                        <a:t>US$ 4,8 mi</a:t>
-                      </a:r>
-                      <a:endParaRPr lang="en-US" sz="1100" dirty="0">
-                        <a:latin typeface="Calibri" charset="0"/>
-                        <a:ea typeface="Calibri" charset="0"/>
-                        <a:cs typeface="Calibri" charset="0"/>
-                      </a:endParaRPr>
-                    </a:p>
-                  </a:txBody>
-                  <a:tcPr marL="91440" marR="91440" marT="45720" marB="45720" anchor="ctr">
-                    <a:lnL w="6350" cap="flat" cmpd="sng" algn="ctr">
-                      <a:solidFill>
-                        <a:srgbClr val="E3E8E9"/>
-                      </a:solidFill>
-                      <a:prstDash val="solid"/>
-                      <a:round/>
-                      <a:headEnd type="none" w="med" len="med"/>
-                      <a:tailEnd type="none" w="med" len="med"/>
-                    </a:lnL>
-                    <a:lnR w="6350" cap="flat" cmpd="sng" algn="ctr">
-                      <a:solidFill>
-                        <a:srgbClr val="E3E8E9"/>
-                      </a:solidFill>
-                      <a:prstDash val="solid"/>
-                      <a:round/>
-                      <a:headEnd type="none" w="med" len="med"/>
-                      <a:tailEnd type="none" w="med" len="med"/>
-                    </a:lnR>
-                    <a:lnT w="6350" cap="flat" cmpd="sng" algn="ctr">
-                      <a:solidFill>
-                        <a:srgbClr val="E3E8E9"/>
-                      </a:solidFill>
-                      <a:prstDash val="solid"/>
-                      <a:round/>
-                      <a:headEnd type="none" w="med" len="med"/>
-                      <a:tailEnd type="none" w="med" len="med"/>
-                    </a:lnT>
-                    <a:lnB w="6350" cap="flat" cmpd="sng" algn="ctr">
-                      <a:solidFill>
-                        <a:srgbClr val="E3E8E9"/>
-                      </a:solidFill>
-                      <a:prstDash val="solid"/>
-                      <a:round/>
-                      <a:headEnd type="none" w="med" len="med"/>
-                      <a:tailEnd type="none" w="med" len="med"/>
-                    </a:lnB>
-                    <a:solidFill>
-                      <a:srgbClr val="FFFFFF"/>
                     </a:solidFill>
                   </a:tcPr>
                 </a:tc>
@@ -10945,7 +13404,7 @@
                 <a:ea typeface="Calibri" pitchFamily="34" charset="-122"/>
                 <a:cs typeface="Calibri" pitchFamily="34" charset="-120"/>
               </a:rPr>
-              <a:t>Fonte: 'Geral - Em análise' · Cost Allocation = OPEX, status 'Contar'/'TA', agrupado por escopo em cada ativo. OPEX total consolidado: US$ 155,9 mi.</a:t>
+              <a:t>Fonte: 'Geral - Em análise' · OPEX, status 'Contar'/'TA', restrito às áreas priorizadas acima. Soma do top 10: US$ 23,5 mi.</a:t>
             </a:r>
             <a:endParaRPr lang="en-US" sz="850" dirty="0"/>
           </a:p>

--- a/PRIO_Top_CAPEX_OPEX_Despriorizados_2027.pptx
+++ b/PRIO_Top_CAPEX_OPEX_Despriorizados_2027.pptx
@@ -10,9 +10,10 @@
     <p:sldId id="258" r:id="rId4"/>
     <p:sldId id="259" r:id="rId5"/>
     <p:sldId id="260" r:id="rId6"/>
+    <p:sldId id="261" r:id="rId7"/>
   </p:sldIdLst>
   <p:notesMasterIdLst>
-    <p:notesMasterId r:id="rId7"/>
+    <p:notesMasterId r:id="rId8"/>
   </p:notesMasterIdLst>
   <p:sldSz cx="12192000" cy="6858000"/>
   <p:notesSz cx="6858000" cy="12192000"/>
@@ -1164,6 +1165,94 @@
 </p:notes>
 </file>
 
+<file path=ppt/notesSlides/notesSlide6.xml><?xml version="1.0" encoding="utf-8"?>
+<p:notes xmlns:a="http://schemas.openxmlformats.org/drawingml/2006/main" xmlns:r="http://schemas.openxmlformats.org/officeDocument/2006/relationships" xmlns:p="http://schemas.openxmlformats.org/presentationml/2006/main">
+  <p:cSld>
+    <p:spTree>
+      <p:nvGrpSpPr>
+        <p:cNvPr id="1" name=""/>
+        <p:cNvGrpSpPr/>
+        <p:nvPr/>
+      </p:nvGrpSpPr>
+      <p:grpSpPr>
+        <a:xfrm>
+          <a:off x="0" y="0"/>
+          <a:ext cx="0" cy="0"/>
+          <a:chOff x="0" y="0"/>
+          <a:chExt cx="0" cy="0"/>
+        </a:xfrm>
+      </p:grpSpPr>
+      <p:sp>
+        <p:nvSpPr>
+          <p:cNvPr id="2" name="Slide Image Placeholder 1"/>
+          <p:cNvSpPr>
+            <a:spLocks noGrp="1" noRot="1" noChangeAspect="1"/>
+          </p:cNvSpPr>
+          <p:nvPr>
+            <p:ph type="sldImg"/>
+          </p:nvPr>
+        </p:nvSpPr>
+        <p:spPr/>
+      </p:sp>
+      <p:sp>
+        <p:nvSpPr>
+          <p:cNvPr id="3" name="Notes Placeholder 2"/>
+          <p:cNvSpPr>
+            <a:spLocks noGrp="1"/>
+          </p:cNvSpPr>
+          <p:nvPr>
+            <p:ph type="body" idx="1"/>
+          </p:nvPr>
+        </p:nvSpPr>
+        <p:spPr/>
+        <p:txBody>
+          <a:bodyPr/>
+          <a:lstStyle/>
+          <a:p>
+            <a:r>
+              <a:rPr lang="en-US" dirty="0"/>
+              <a:t/>
+            </a:r>
+            <a:endParaRPr lang="en-US" dirty="0"/>
+          </a:p>
+        </p:txBody>
+      </p:sp>
+      <p:sp>
+        <p:nvSpPr>
+          <p:cNvPr id="4" name="Slide Number Placeholder 3"/>
+          <p:cNvSpPr>
+            <a:spLocks noGrp="1"/>
+          </p:cNvSpPr>
+          <p:nvPr>
+            <p:ph type="sldNum" sz="quarter" idx="10"/>
+          </p:nvPr>
+        </p:nvSpPr>
+        <p:spPr/>
+        <p:txBody>
+          <a:bodyPr/>
+          <a:lstStyle/>
+          <a:p>
+            <a:fld id="{F7021451-1387-4CA6-816F-3879F97B5CBC}" type="slidenum">
+              <a:rPr lang="en-US"/>
+              <a:t>6</a:t>
+            </a:fld>
+            <a:endParaRPr lang="en-US"/>
+          </a:p>
+        </p:txBody>
+      </p:sp>
+    </p:spTree>
+    <p:extLst>
+      <p:ext uri="{BB962C8B-B14F-4D97-AF65-F5344CB8AC3E}">
+        <p14:creationId xmlns:p14="http://schemas.microsoft.com/office/powerpoint/2010/main" val="1024086991"/>
+      </p:ext>
+    </p:extLst>
+  </p:cSld>
+  <p:clrMapOvr>
+    <a:masterClrMapping/>
+  </p:clrMapOvr>
+</p:notes>
+</file>
+
 <file path=ppt/slideLayouts/slideLayout1.xml><?xml version="1.0" encoding="utf-8"?>
 <p:sldLayout xmlns:a="http://schemas.openxmlformats.org/drawingml/2006/main" xmlns:r="http://schemas.openxmlformats.org/officeDocument/2006/relationships" xmlns:p="http://schemas.openxmlformats.org/presentationml/2006/main" preserve="1">
   <p:cSld name="DEFAULT">
@@ -19427,6 +19516,5937 @@
 </p:sld>
 </file>
 
+<file path=ppt/slides/slide6.xml><?xml version="1.0" encoding="utf-8"?>
+<p:sld xmlns:a="http://schemas.openxmlformats.org/drawingml/2006/main" xmlns:r="http://schemas.openxmlformats.org/officeDocument/2006/relationships" xmlns:p="http://schemas.openxmlformats.org/presentationml/2006/main">
+  <p:cSld name="Slide 6">
+    <p:spTree>
+      <p:nvGrpSpPr>
+        <p:cNvPr id="1" name=""/>
+        <p:cNvGrpSpPr/>
+        <p:nvPr/>
+      </p:nvGrpSpPr>
+      <p:grpSpPr>
+        <a:xfrm>
+          <a:off x="0" y="0"/>
+          <a:ext cx="0" cy="0"/>
+          <a:chOff x="0" y="0"/>
+          <a:chExt cx="0" cy="0"/>
+        </a:xfrm>
+      </p:grpSpPr>
+      <p:sp>
+        <p:nvSpPr>
+          <p:cNvPr id="2" name="Shape 0"/>
+          <p:cNvSpPr/>
+          <p:nvPr/>
+        </p:nvSpPr>
+        <p:spPr>
+          <a:xfrm>
+            <a:off x="457200" y="384048"/>
+            <a:ext cx="566928" cy="566928"/>
+          </a:xfrm>
+          <a:prstGeom prst="ellipse">
+            <a:avLst/>
+          </a:prstGeom>
+          <a:solidFill>
+            <a:srgbClr val="7A2E2E"/>
+          </a:solidFill>
+          <a:ln/>
+        </p:spPr>
+      </p:sp>
+      <p:sp>
+        <p:nvSpPr>
+          <p:cNvPr id="3" name="Text 1"/>
+          <p:cNvSpPr txBox="1"/>
+          <p:nvPr/>
+        </p:nvSpPr>
+        <p:spPr>
+          <a:xfrm>
+            <a:off x="457200" y="384048"/>
+            <a:ext cx="566928" cy="566928"/>
+          </a:xfrm>
+          <a:prstGeom prst="rect">
+            <a:avLst/>
+          </a:prstGeom>
+          <a:noFill/>
+          <a:ln/>
+        </p:spPr>
+        <p:txBody>
+          <a:bodyPr wrap="square" lIns="0" tIns="0" rIns="0" bIns="0" rtlCol="0" anchor="ctr"/>
+          <a:lstStyle/>
+          <a:p>
+            <a:pPr algn="ctr" indent="0" marL="0">
+              <a:buNone/>
+            </a:pPr>
+            <a:r>
+              <a:rPr lang="en-US" sz="1500" b="1" dirty="0">
+                <a:solidFill>
+                  <a:srgbClr val="FFFFFF"/>
+                </a:solidFill>
+                <a:latin typeface="Calibri" pitchFamily="34" charset="0"/>
+                <a:ea typeface="Calibri" pitchFamily="34" charset="-122"/>
+                <a:cs typeface="Calibri" pitchFamily="34" charset="-120"/>
+              </a:rPr>
+              <a:t>!</a:t>
+            </a:r>
+            <a:endParaRPr lang="en-US" sz="1500" dirty="0"/>
+          </a:p>
+        </p:txBody>
+      </p:sp>
+      <p:sp>
+        <p:nvSpPr>
+          <p:cNvPr id="4" name="Text 2"/>
+          <p:cNvSpPr txBox="1"/>
+          <p:nvPr/>
+        </p:nvSpPr>
+        <p:spPr>
+          <a:xfrm>
+            <a:off x="1170432" y="329184"/>
+            <a:ext cx="10515600" cy="411480"/>
+          </a:xfrm>
+          <a:prstGeom prst="rect">
+            <a:avLst/>
+          </a:prstGeom>
+          <a:noFill/>
+          <a:ln/>
+        </p:spPr>
+        <p:txBody>
+          <a:bodyPr wrap="square" lIns="0" tIns="0" rIns="0" bIns="0" rtlCol="0" anchor="ctr"/>
+          <a:lstStyle/>
+          <a:p>
+            <a:pPr indent="0" marL="0">
+              <a:buNone/>
+            </a:pPr>
+            <a:r>
+              <a:rPr lang="en-US" sz="2400" b="1" dirty="0">
+                <a:solidFill>
+                  <a:srgbClr val="0B2A3D"/>
+                </a:solidFill>
+                <a:latin typeface="Cambria" pitchFamily="34" charset="0"/>
+                <a:ea typeface="Cambria" pitchFamily="34" charset="-122"/>
+                <a:cs typeface="Cambria" pitchFamily="34" charset="-120"/>
+              </a:rPr>
+              <a:t>Escopos Despriorizados</a:t>
+            </a:r>
+            <a:endParaRPr lang="en-US" sz="2400" dirty="0"/>
+          </a:p>
+        </p:txBody>
+      </p:sp>
+      <p:sp>
+        <p:nvSpPr>
+          <p:cNvPr id="5" name="Text 3"/>
+          <p:cNvSpPr txBox="1"/>
+          <p:nvPr/>
+        </p:nvSpPr>
+        <p:spPr>
+          <a:xfrm>
+            <a:off x="1170432" y="731520"/>
+            <a:ext cx="10515600" cy="274320"/>
+          </a:xfrm>
+          <a:prstGeom prst="rect">
+            <a:avLst/>
+          </a:prstGeom>
+          <a:noFill/>
+          <a:ln/>
+        </p:spPr>
+        <p:txBody>
+          <a:bodyPr wrap="square" lIns="0" tIns="0" rIns="0" bIns="0" rtlCol="0" anchor="ctr"/>
+          <a:lstStyle/>
+          <a:p>
+            <a:pPr indent="0" marL="0">
+              <a:buNone/>
+            </a:pPr>
+            <a:r>
+              <a:rPr lang="en-US" sz="1250" dirty="0">
+                <a:solidFill>
+                  <a:srgbClr val="5B6B73"/>
+                </a:solidFill>
+                <a:latin typeface="Calibri" pitchFamily="34" charset="0"/>
+                <a:ea typeface="Calibri" pitchFamily="34" charset="-122"/>
+                <a:cs typeface="Calibri" pitchFamily="34" charset="-120"/>
+              </a:rPr>
+              <a:t>Continuação · próximos escopos por valor (parte 2)</a:t>
+            </a:r>
+            <a:endParaRPr lang="en-US" sz="1250" dirty="0"/>
+          </a:p>
+        </p:txBody>
+      </p:sp>
+      <p:graphicFrame>
+        <p:nvGraphicFramePr>
+          <p:cNvPr id="7" name="Table 0"/>
+          <p:cNvGraphicFramePr>
+            <a:graphicFrameLocks noGrp="1"/>
+          </p:cNvGraphicFramePr>
+          <p:nvPr>
+            <p:extLst>
+              <p:ext uri="{D42A27DB-BD31-4B8C-83A1-F6EECF244321}">
+                <p14:modId xmlns:p14="http://schemas.microsoft.com/office/powerpoint/2010/main" val="1579011935"/>
+              </p:ext>
+            </p:extLst>
+          </p:nvPr>
+        </p:nvGraphicFramePr>
+        <p:xfrm>
+          <a:off x="457200" y="1188720"/>
+          <a:ext cx="11247120" cy="914400"/>
+        </p:xfrm>
+        <a:graphic>
+          <a:graphicData uri="http://schemas.openxmlformats.org/drawingml/2006/table">
+            <a:tbl>
+              <a:tblPr/>
+              <a:tblGrid>
+                <a:gridCol w="4723790"/>
+                <a:gridCol w="1799539"/>
+                <a:gridCol w="2249424"/>
+                <a:gridCol w="899770"/>
+                <a:gridCol w="1574597"/>
+              </a:tblGrid>
+              <a:tr h="288036">
+                <a:tc>
+                  <a:txBody>
+                    <a:bodyPr/>
+                    <a:lstStyle/>
+                    <a:p>
+                      <a:pPr indent="0" marL="0">
+                        <a:buNone/>
+                      </a:pPr>
+                      <a:r>
+                        <a:rPr lang="en-US" sz="1000" b="1" dirty="0">
+                          <a:solidFill>
+                            <a:srgbClr val="FFFFFF"/>
+                          </a:solidFill>
+                          <a:latin typeface="Calibri" pitchFamily="34" charset="0"/>
+                          <a:ea typeface="Calibri" pitchFamily="34" charset="-122"/>
+                          <a:cs typeface="Calibri" pitchFamily="34" charset="-120"/>
+                        </a:rPr>
+                        <a:t>DESCRIÇÃO DO ESCOPO</a:t>
+                      </a:r>
+                      <a:endParaRPr lang="en-US" sz="1000" dirty="0">
+                        <a:latin typeface="Calibri" charset="0"/>
+                        <a:ea typeface="Calibri" charset="0"/>
+                        <a:cs typeface="Calibri" charset="0"/>
+                      </a:endParaRPr>
+                    </a:p>
+                  </a:txBody>
+                  <a:tcPr marL="91440" marR="91440" marT="45720" marB="45720" anchor="ctr">
+                    <a:lnL w="6350" cap="flat" cmpd="sng" algn="ctr">
+                      <a:solidFill>
+                        <a:srgbClr val="E3E8E9"/>
+                      </a:solidFill>
+                      <a:prstDash val="solid"/>
+                      <a:round/>
+                      <a:headEnd type="none" w="med" len="med"/>
+                      <a:tailEnd type="none" w="med" len="med"/>
+                    </a:lnL>
+                    <a:lnR w="6350" cap="flat" cmpd="sng" algn="ctr">
+                      <a:solidFill>
+                        <a:srgbClr val="E3E8E9"/>
+                      </a:solidFill>
+                      <a:prstDash val="solid"/>
+                      <a:round/>
+                      <a:headEnd type="none" w="med" len="med"/>
+                      <a:tailEnd type="none" w="med" len="med"/>
+                    </a:lnR>
+                    <a:lnT w="6350" cap="flat" cmpd="sng" algn="ctr">
+                      <a:solidFill>
+                        <a:srgbClr val="E3E8E9"/>
+                      </a:solidFill>
+                      <a:prstDash val="solid"/>
+                      <a:round/>
+                      <a:headEnd type="none" w="med" len="med"/>
+                      <a:tailEnd type="none" w="med" len="med"/>
+                    </a:lnT>
+                    <a:lnB w="6350" cap="flat" cmpd="sng" algn="ctr">
+                      <a:solidFill>
+                        <a:srgbClr val="E3E8E9"/>
+                      </a:solidFill>
+                      <a:prstDash val="solid"/>
+                      <a:round/>
+                      <a:headEnd type="none" w="med" len="med"/>
+                      <a:tailEnd type="none" w="med" len="med"/>
+                    </a:lnB>
+                    <a:solidFill>
+                      <a:srgbClr val="7A2E2E"/>
+                    </a:solidFill>
+                  </a:tcPr>
+                </a:tc>
+                <a:tc>
+                  <a:txBody>
+                    <a:bodyPr/>
+                    <a:lstStyle/>
+                    <a:p>
+                      <a:pPr indent="0" marL="0">
+                        <a:buNone/>
+                      </a:pPr>
+                      <a:r>
+                        <a:rPr lang="en-US" sz="1000" b="1" dirty="0">
+                          <a:solidFill>
+                            <a:srgbClr val="FFFFFF"/>
+                          </a:solidFill>
+                          <a:latin typeface="Calibri" pitchFamily="34" charset="0"/>
+                          <a:ea typeface="Calibri" pitchFamily="34" charset="-122"/>
+                          <a:cs typeface="Calibri" pitchFamily="34" charset="-120"/>
+                        </a:rPr>
+                        <a:t>ATIVO</a:t>
+                      </a:r>
+                      <a:endParaRPr lang="en-US" sz="1000" dirty="0">
+                        <a:latin typeface="Calibri" charset="0"/>
+                        <a:ea typeface="Calibri" charset="0"/>
+                        <a:cs typeface="Calibri" charset="0"/>
+                      </a:endParaRPr>
+                    </a:p>
+                  </a:txBody>
+                  <a:tcPr marL="91440" marR="91440" marT="45720" marB="45720" anchor="ctr">
+                    <a:lnL w="6350" cap="flat" cmpd="sng" algn="ctr">
+                      <a:solidFill>
+                        <a:srgbClr val="E3E8E9"/>
+                      </a:solidFill>
+                      <a:prstDash val="solid"/>
+                      <a:round/>
+                      <a:headEnd type="none" w="med" len="med"/>
+                      <a:tailEnd type="none" w="med" len="med"/>
+                    </a:lnL>
+                    <a:lnR w="6350" cap="flat" cmpd="sng" algn="ctr">
+                      <a:solidFill>
+                        <a:srgbClr val="E3E8E9"/>
+                      </a:solidFill>
+                      <a:prstDash val="solid"/>
+                      <a:round/>
+                      <a:headEnd type="none" w="med" len="med"/>
+                      <a:tailEnd type="none" w="med" len="med"/>
+                    </a:lnR>
+                    <a:lnT w="6350" cap="flat" cmpd="sng" algn="ctr">
+                      <a:solidFill>
+                        <a:srgbClr val="E3E8E9"/>
+                      </a:solidFill>
+                      <a:prstDash val="solid"/>
+                      <a:round/>
+                      <a:headEnd type="none" w="med" len="med"/>
+                      <a:tailEnd type="none" w="med" len="med"/>
+                    </a:lnT>
+                    <a:lnB w="6350" cap="flat" cmpd="sng" algn="ctr">
+                      <a:solidFill>
+                        <a:srgbClr val="E3E8E9"/>
+                      </a:solidFill>
+                      <a:prstDash val="solid"/>
+                      <a:round/>
+                      <a:headEnd type="none" w="med" len="med"/>
+                      <a:tailEnd type="none" w="med" len="med"/>
+                    </a:lnB>
+                    <a:solidFill>
+                      <a:srgbClr val="7A2E2E"/>
+                    </a:solidFill>
+                  </a:tcPr>
+                </a:tc>
+                <a:tc>
+                  <a:txBody>
+                    <a:bodyPr/>
+                    <a:lstStyle/>
+                    <a:p>
+                      <a:pPr indent="0" marL="0">
+                        <a:buNone/>
+                      </a:pPr>
+                      <a:r>
+                        <a:rPr lang="en-US" sz="950" b="1" dirty="0">
+                          <a:solidFill>
+                            <a:srgbClr val="FFFFFF"/>
+                          </a:solidFill>
+                          <a:latin typeface="Calibri" pitchFamily="34" charset="0"/>
+                          <a:ea typeface="Calibri" pitchFamily="34" charset="-122"/>
+                          <a:cs typeface="Calibri" pitchFamily="34" charset="-120"/>
+                        </a:rPr>
+                        <a:t>CATEGORIA</a:t>
+                      </a:r>
+                      <a:endParaRPr lang="en-US" sz="950" dirty="0">
+                        <a:latin typeface="Calibri" charset="0"/>
+                        <a:ea typeface="Calibri" charset="0"/>
+                        <a:cs typeface="Calibri" charset="0"/>
+                      </a:endParaRPr>
+                    </a:p>
+                  </a:txBody>
+                  <a:tcPr marL="91440" marR="91440" marT="45720" marB="45720" anchor="ctr">
+                    <a:lnL w="6350" cap="flat" cmpd="sng" algn="ctr">
+                      <a:solidFill>
+                        <a:srgbClr val="E3E8E9"/>
+                      </a:solidFill>
+                      <a:prstDash val="solid"/>
+                      <a:round/>
+                      <a:headEnd type="none" w="med" len="med"/>
+                      <a:tailEnd type="none" w="med" len="med"/>
+                    </a:lnL>
+                    <a:lnR w="6350" cap="flat" cmpd="sng" algn="ctr">
+                      <a:solidFill>
+                        <a:srgbClr val="E3E8E9"/>
+                      </a:solidFill>
+                      <a:prstDash val="solid"/>
+                      <a:round/>
+                      <a:headEnd type="none" w="med" len="med"/>
+                      <a:tailEnd type="none" w="med" len="med"/>
+                    </a:lnR>
+                    <a:lnT w="6350" cap="flat" cmpd="sng" algn="ctr">
+                      <a:solidFill>
+                        <a:srgbClr val="E3E8E9"/>
+                      </a:solidFill>
+                      <a:prstDash val="solid"/>
+                      <a:round/>
+                      <a:headEnd type="none" w="med" len="med"/>
+                      <a:tailEnd type="none" w="med" len="med"/>
+                    </a:lnT>
+                    <a:lnB w="6350" cap="flat" cmpd="sng" algn="ctr">
+                      <a:solidFill>
+                        <a:srgbClr val="E3E8E9"/>
+                      </a:solidFill>
+                      <a:prstDash val="solid"/>
+                      <a:round/>
+                      <a:headEnd type="none" w="med" len="med"/>
+                      <a:tailEnd type="none" w="med" len="med"/>
+                    </a:lnB>
+                    <a:solidFill>
+                      <a:srgbClr val="7A2E2E"/>
+                    </a:solidFill>
+                  </a:tcPr>
+                </a:tc>
+                <a:tc>
+                  <a:txBody>
+                    <a:bodyPr/>
+                    <a:lstStyle/>
+                    <a:p>
+                      <a:pPr algn="ctr" indent="0" marL="0">
+                        <a:buNone/>
+                      </a:pPr>
+                      <a:r>
+                        <a:rPr lang="en-US" sz="950" b="1" dirty="0">
+                          <a:solidFill>
+                            <a:srgbClr val="FFFFFF"/>
+                          </a:solidFill>
+                          <a:latin typeface="Calibri" pitchFamily="34" charset="0"/>
+                          <a:ea typeface="Calibri" pitchFamily="34" charset="-122"/>
+                          <a:cs typeface="Calibri" pitchFamily="34" charset="-120"/>
+                        </a:rPr>
+                        <a:t>ALOC.</a:t>
+                      </a:r>
+                      <a:endParaRPr lang="en-US" sz="950" dirty="0">
+                        <a:latin typeface="Calibri" charset="0"/>
+                        <a:ea typeface="Calibri" charset="0"/>
+                        <a:cs typeface="Calibri" charset="0"/>
+                      </a:endParaRPr>
+                    </a:p>
+                  </a:txBody>
+                  <a:tcPr marL="91440" marR="91440" marT="45720" marB="45720" anchor="ctr">
+                    <a:lnL w="6350" cap="flat" cmpd="sng" algn="ctr">
+                      <a:solidFill>
+                        <a:srgbClr val="E3E8E9"/>
+                      </a:solidFill>
+                      <a:prstDash val="solid"/>
+                      <a:round/>
+                      <a:headEnd type="none" w="med" len="med"/>
+                      <a:tailEnd type="none" w="med" len="med"/>
+                    </a:lnL>
+                    <a:lnR w="6350" cap="flat" cmpd="sng" algn="ctr">
+                      <a:solidFill>
+                        <a:srgbClr val="E3E8E9"/>
+                      </a:solidFill>
+                      <a:prstDash val="solid"/>
+                      <a:round/>
+                      <a:headEnd type="none" w="med" len="med"/>
+                      <a:tailEnd type="none" w="med" len="med"/>
+                    </a:lnR>
+                    <a:lnT w="6350" cap="flat" cmpd="sng" algn="ctr">
+                      <a:solidFill>
+                        <a:srgbClr val="E3E8E9"/>
+                      </a:solidFill>
+                      <a:prstDash val="solid"/>
+                      <a:round/>
+                      <a:headEnd type="none" w="med" len="med"/>
+                      <a:tailEnd type="none" w="med" len="med"/>
+                    </a:lnT>
+                    <a:lnB w="6350" cap="flat" cmpd="sng" algn="ctr">
+                      <a:solidFill>
+                        <a:srgbClr val="E3E8E9"/>
+                      </a:solidFill>
+                      <a:prstDash val="solid"/>
+                      <a:round/>
+                      <a:headEnd type="none" w="med" len="med"/>
+                      <a:tailEnd type="none" w="med" len="med"/>
+                    </a:lnB>
+                    <a:solidFill>
+                      <a:srgbClr val="7A2E2E"/>
+                    </a:solidFill>
+                  </a:tcPr>
+                </a:tc>
+                <a:tc>
+                  <a:txBody>
+                    <a:bodyPr/>
+                    <a:lstStyle/>
+                    <a:p>
+                      <a:pPr algn="r" indent="0" marL="0">
+                        <a:buNone/>
+                      </a:pPr>
+                      <a:r>
+                        <a:rPr lang="en-US" sz="1000" b="1" dirty="0">
+                          <a:solidFill>
+                            <a:srgbClr val="FFFFFF"/>
+                          </a:solidFill>
+                          <a:latin typeface="Calibri" pitchFamily="34" charset="0"/>
+                          <a:ea typeface="Calibri" pitchFamily="34" charset="-122"/>
+                          <a:cs typeface="Calibri" pitchFamily="34" charset="-120"/>
+                        </a:rPr>
+                        <a:t>VALOR TOTAL</a:t>
+                      </a:r>
+                      <a:endParaRPr lang="en-US" sz="1000" dirty="0">
+                        <a:latin typeface="Calibri" charset="0"/>
+                        <a:ea typeface="Calibri" charset="0"/>
+                        <a:cs typeface="Calibri" charset="0"/>
+                      </a:endParaRPr>
+                    </a:p>
+                  </a:txBody>
+                  <a:tcPr marL="91440" marR="91440" marT="45720" marB="45720" anchor="ctr">
+                    <a:lnL w="6350" cap="flat" cmpd="sng" algn="ctr">
+                      <a:solidFill>
+                        <a:srgbClr val="E3E8E9"/>
+                      </a:solidFill>
+                      <a:prstDash val="solid"/>
+                      <a:round/>
+                      <a:headEnd type="none" w="med" len="med"/>
+                      <a:tailEnd type="none" w="med" len="med"/>
+                    </a:lnL>
+                    <a:lnR w="6350" cap="flat" cmpd="sng" algn="ctr">
+                      <a:solidFill>
+                        <a:srgbClr val="E3E8E9"/>
+                      </a:solidFill>
+                      <a:prstDash val="solid"/>
+                      <a:round/>
+                      <a:headEnd type="none" w="med" len="med"/>
+                      <a:tailEnd type="none" w="med" len="med"/>
+                    </a:lnR>
+                    <a:lnT w="6350" cap="flat" cmpd="sng" algn="ctr">
+                      <a:solidFill>
+                        <a:srgbClr val="E3E8E9"/>
+                      </a:solidFill>
+                      <a:prstDash val="solid"/>
+                      <a:round/>
+                      <a:headEnd type="none" w="med" len="med"/>
+                      <a:tailEnd type="none" w="med" len="med"/>
+                    </a:lnT>
+                    <a:lnB w="6350" cap="flat" cmpd="sng" algn="ctr">
+                      <a:solidFill>
+                        <a:srgbClr val="E3E8E9"/>
+                      </a:solidFill>
+                      <a:prstDash val="solid"/>
+                      <a:round/>
+                      <a:headEnd type="none" w="med" len="med"/>
+                      <a:tailEnd type="none" w="med" len="med"/>
+                    </a:lnB>
+                    <a:solidFill>
+                      <a:srgbClr val="7A2E2E"/>
+                    </a:solidFill>
+                  </a:tcPr>
+                </a:tc>
+              </a:tr>
+              <a:tr h="288036">
+                <a:tc>
+                  <a:txBody>
+                    <a:bodyPr/>
+                    <a:lstStyle/>
+                    <a:p>
+                      <a:pPr indent="0" marL="0">
+                        <a:buNone/>
+                      </a:pPr>
+                      <a:r>
+                        <a:rPr lang="en-US" sz="970" dirty="0">
+                          <a:solidFill>
+                            <a:srgbClr val="1C2B33"/>
+                          </a:solidFill>
+                          <a:latin typeface="Calibri" pitchFamily="34" charset="0"/>
+                          <a:ea typeface="Calibri" pitchFamily="34" charset="-122"/>
+                          <a:cs typeface="Calibri" pitchFamily="34" charset="-120"/>
+                        </a:rPr>
+                        <a:t>ATIVIDADE DE MERGULHO</a:t>
+                      </a:r>
+                      <a:endParaRPr lang="en-US" sz="970" dirty="0">
+                        <a:latin typeface="Calibri" charset="0"/>
+                        <a:ea typeface="Calibri" charset="0"/>
+                        <a:cs typeface="Calibri" charset="0"/>
+                      </a:endParaRPr>
+                    </a:p>
+                  </a:txBody>
+                  <a:tcPr marL="91440" marR="91440" marT="45720" marB="45720" anchor="ctr">
+                    <a:lnL w="6350" cap="flat" cmpd="sng" algn="ctr">
+                      <a:solidFill>
+                        <a:srgbClr val="E3E8E9"/>
+                      </a:solidFill>
+                      <a:prstDash val="solid"/>
+                      <a:round/>
+                      <a:headEnd type="none" w="med" len="med"/>
+                      <a:tailEnd type="none" w="med" len="med"/>
+                    </a:lnL>
+                    <a:lnR w="6350" cap="flat" cmpd="sng" algn="ctr">
+                      <a:solidFill>
+                        <a:srgbClr val="E3E8E9"/>
+                      </a:solidFill>
+                      <a:prstDash val="solid"/>
+                      <a:round/>
+                      <a:headEnd type="none" w="med" len="med"/>
+                      <a:tailEnd type="none" w="med" len="med"/>
+                    </a:lnR>
+                    <a:lnT w="6350" cap="flat" cmpd="sng" algn="ctr">
+                      <a:solidFill>
+                        <a:srgbClr val="E3E8E9"/>
+                      </a:solidFill>
+                      <a:prstDash val="solid"/>
+                      <a:round/>
+                      <a:headEnd type="none" w="med" len="med"/>
+                      <a:tailEnd type="none" w="med" len="med"/>
+                    </a:lnT>
+                    <a:lnB w="6350" cap="flat" cmpd="sng" algn="ctr">
+                      <a:solidFill>
+                        <a:srgbClr val="E3E8E9"/>
+                      </a:solidFill>
+                      <a:prstDash val="solid"/>
+                      <a:round/>
+                      <a:headEnd type="none" w="med" len="med"/>
+                      <a:tailEnd type="none" w="med" len="med"/>
+                    </a:lnB>
+                    <a:solidFill>
+                      <a:srgbClr val="FFFFFF"/>
+                    </a:solidFill>
+                  </a:tcPr>
+                </a:tc>
+                <a:tc>
+                  <a:txBody>
+                    <a:bodyPr/>
+                    <a:lstStyle/>
+                    <a:p>
+                      <a:pPr indent="0" marL="0">
+                        <a:buNone/>
+                      </a:pPr>
+                      <a:r>
+                        <a:rPr lang="en-US" sz="930" dirty="0">
+                          <a:solidFill>
+                            <a:srgbClr val="5B6B73"/>
+                          </a:solidFill>
+                          <a:latin typeface="Calibri" pitchFamily="34" charset="0"/>
+                          <a:ea typeface="Calibri" pitchFamily="34" charset="-122"/>
+                          <a:cs typeface="Calibri" pitchFamily="34" charset="-120"/>
+                        </a:rPr>
+                        <a:t>FPSO Frade</a:t>
+                      </a:r>
+                      <a:endParaRPr lang="en-US" sz="930" dirty="0">
+                        <a:latin typeface="Calibri" charset="0"/>
+                        <a:ea typeface="Calibri" charset="0"/>
+                        <a:cs typeface="Calibri" charset="0"/>
+                      </a:endParaRPr>
+                    </a:p>
+                  </a:txBody>
+                  <a:tcPr marL="91440" marR="91440" marT="45720" marB="45720" anchor="ctr">
+                    <a:lnL w="6350" cap="flat" cmpd="sng" algn="ctr">
+                      <a:solidFill>
+                        <a:srgbClr val="E3E8E9"/>
+                      </a:solidFill>
+                      <a:prstDash val="solid"/>
+                      <a:round/>
+                      <a:headEnd type="none" w="med" len="med"/>
+                      <a:tailEnd type="none" w="med" len="med"/>
+                    </a:lnL>
+                    <a:lnR w="6350" cap="flat" cmpd="sng" algn="ctr">
+                      <a:solidFill>
+                        <a:srgbClr val="E3E8E9"/>
+                      </a:solidFill>
+                      <a:prstDash val="solid"/>
+                      <a:round/>
+                      <a:headEnd type="none" w="med" len="med"/>
+                      <a:tailEnd type="none" w="med" len="med"/>
+                    </a:lnR>
+                    <a:lnT w="6350" cap="flat" cmpd="sng" algn="ctr">
+                      <a:solidFill>
+                        <a:srgbClr val="E3E8E9"/>
+                      </a:solidFill>
+                      <a:prstDash val="solid"/>
+                      <a:round/>
+                      <a:headEnd type="none" w="med" len="med"/>
+                      <a:tailEnd type="none" w="med" len="med"/>
+                    </a:lnT>
+                    <a:lnB w="6350" cap="flat" cmpd="sng" algn="ctr">
+                      <a:solidFill>
+                        <a:srgbClr val="E3E8E9"/>
+                      </a:solidFill>
+                      <a:prstDash val="solid"/>
+                      <a:round/>
+                      <a:headEnd type="none" w="med" len="med"/>
+                      <a:tailEnd type="none" w="med" len="med"/>
+                    </a:lnB>
+                    <a:solidFill>
+                      <a:srgbClr val="FFFFFF"/>
+                    </a:solidFill>
+                  </a:tcPr>
+                </a:tc>
+                <a:tc>
+                  <a:txBody>
+                    <a:bodyPr/>
+                    <a:lstStyle/>
+                    <a:p>
+                      <a:pPr indent="0" marL="0">
+                        <a:buNone/>
+                      </a:pPr>
+                      <a:r>
+                        <a:rPr lang="en-US" sz="900" dirty="0">
+                          <a:solidFill>
+                            <a:srgbClr val="5B6B73"/>
+                          </a:solidFill>
+                          <a:latin typeface="Calibri" pitchFamily="34" charset="0"/>
+                          <a:ea typeface="Calibri" pitchFamily="34" charset="-122"/>
+                          <a:cs typeface="Calibri" pitchFamily="34" charset="-120"/>
+                        </a:rPr>
+                        <a:t>Rotina Operacional</a:t>
+                      </a:r>
+                      <a:endParaRPr lang="en-US" sz="900" dirty="0">
+                        <a:latin typeface="Calibri" charset="0"/>
+                        <a:ea typeface="Calibri" charset="0"/>
+                        <a:cs typeface="Calibri" charset="0"/>
+                      </a:endParaRPr>
+                    </a:p>
+                  </a:txBody>
+                  <a:tcPr marL="91440" marR="91440" marT="45720" marB="45720" anchor="ctr">
+                    <a:lnL w="6350" cap="flat" cmpd="sng" algn="ctr">
+                      <a:solidFill>
+                        <a:srgbClr val="E3E8E9"/>
+                      </a:solidFill>
+                      <a:prstDash val="solid"/>
+                      <a:round/>
+                      <a:headEnd type="none" w="med" len="med"/>
+                      <a:tailEnd type="none" w="med" len="med"/>
+                    </a:lnL>
+                    <a:lnR w="6350" cap="flat" cmpd="sng" algn="ctr">
+                      <a:solidFill>
+                        <a:srgbClr val="E3E8E9"/>
+                      </a:solidFill>
+                      <a:prstDash val="solid"/>
+                      <a:round/>
+                      <a:headEnd type="none" w="med" len="med"/>
+                      <a:tailEnd type="none" w="med" len="med"/>
+                    </a:lnR>
+                    <a:lnT w="6350" cap="flat" cmpd="sng" algn="ctr">
+                      <a:solidFill>
+                        <a:srgbClr val="E3E8E9"/>
+                      </a:solidFill>
+                      <a:prstDash val="solid"/>
+                      <a:round/>
+                      <a:headEnd type="none" w="med" len="med"/>
+                      <a:tailEnd type="none" w="med" len="med"/>
+                    </a:lnT>
+                    <a:lnB w="6350" cap="flat" cmpd="sng" algn="ctr">
+                      <a:solidFill>
+                        <a:srgbClr val="E3E8E9"/>
+                      </a:solidFill>
+                      <a:prstDash val="solid"/>
+                      <a:round/>
+                      <a:headEnd type="none" w="med" len="med"/>
+                      <a:tailEnd type="none" w="med" len="med"/>
+                    </a:lnB>
+                    <a:solidFill>
+                      <a:srgbClr val="FFFFFF"/>
+                    </a:solidFill>
+                  </a:tcPr>
+                </a:tc>
+                <a:tc>
+                  <a:txBody>
+                    <a:bodyPr/>
+                    <a:lstStyle/>
+                    <a:p>
+                      <a:pPr algn="ctr" indent="0" marL="0">
+                        <a:buNone/>
+                      </a:pPr>
+                      <a:r>
+                        <a:rPr lang="en-US" sz="900" dirty="0">
+                          <a:solidFill>
+                            <a:srgbClr val="5B6B73"/>
+                          </a:solidFill>
+                          <a:latin typeface="Calibri" pitchFamily="34" charset="0"/>
+                          <a:ea typeface="Calibri" pitchFamily="34" charset="-122"/>
+                          <a:cs typeface="Calibri" pitchFamily="34" charset="-120"/>
+                        </a:rPr>
+                        <a:t>OPEX</a:t>
+                      </a:r>
+                      <a:endParaRPr lang="en-US" sz="900" dirty="0">
+                        <a:latin typeface="Calibri" charset="0"/>
+                        <a:ea typeface="Calibri" charset="0"/>
+                        <a:cs typeface="Calibri" charset="0"/>
+                      </a:endParaRPr>
+                    </a:p>
+                  </a:txBody>
+                  <a:tcPr marL="91440" marR="91440" marT="45720" marB="45720" anchor="ctr">
+                    <a:lnL w="6350" cap="flat" cmpd="sng" algn="ctr">
+                      <a:solidFill>
+                        <a:srgbClr val="E3E8E9"/>
+                      </a:solidFill>
+                      <a:prstDash val="solid"/>
+                      <a:round/>
+                      <a:headEnd type="none" w="med" len="med"/>
+                      <a:tailEnd type="none" w="med" len="med"/>
+                    </a:lnL>
+                    <a:lnR w="6350" cap="flat" cmpd="sng" algn="ctr">
+                      <a:solidFill>
+                        <a:srgbClr val="E3E8E9"/>
+                      </a:solidFill>
+                      <a:prstDash val="solid"/>
+                      <a:round/>
+                      <a:headEnd type="none" w="med" len="med"/>
+                      <a:tailEnd type="none" w="med" len="med"/>
+                    </a:lnR>
+                    <a:lnT w="6350" cap="flat" cmpd="sng" algn="ctr">
+                      <a:solidFill>
+                        <a:srgbClr val="E3E8E9"/>
+                      </a:solidFill>
+                      <a:prstDash val="solid"/>
+                      <a:round/>
+                      <a:headEnd type="none" w="med" len="med"/>
+                      <a:tailEnd type="none" w="med" len="med"/>
+                    </a:lnT>
+                    <a:lnB w="6350" cap="flat" cmpd="sng" algn="ctr">
+                      <a:solidFill>
+                        <a:srgbClr val="E3E8E9"/>
+                      </a:solidFill>
+                      <a:prstDash val="solid"/>
+                      <a:round/>
+                      <a:headEnd type="none" w="med" len="med"/>
+                      <a:tailEnd type="none" w="med" len="med"/>
+                    </a:lnB>
+                    <a:solidFill>
+                      <a:srgbClr val="FFFFFF"/>
+                    </a:solidFill>
+                  </a:tcPr>
+                </a:tc>
+                <a:tc>
+                  <a:txBody>
+                    <a:bodyPr/>
+                    <a:lstStyle/>
+                    <a:p>
+                      <a:pPr algn="r" indent="0" marL="0">
+                        <a:buNone/>
+                      </a:pPr>
+                      <a:r>
+                        <a:rPr lang="en-US" sz="970" b="1" dirty="0">
+                          <a:solidFill>
+                            <a:srgbClr val="0B2A3D"/>
+                          </a:solidFill>
+                          <a:latin typeface="Calibri" pitchFamily="34" charset="0"/>
+                          <a:ea typeface="Calibri" pitchFamily="34" charset="-122"/>
+                          <a:cs typeface="Calibri" pitchFamily="34" charset="-120"/>
+                        </a:rPr>
+                        <a:t>US$ 448,1 mil</a:t>
+                      </a:r>
+                      <a:endParaRPr lang="en-US" sz="970" dirty="0">
+                        <a:latin typeface="Calibri" charset="0"/>
+                        <a:ea typeface="Calibri" charset="0"/>
+                        <a:cs typeface="Calibri" charset="0"/>
+                      </a:endParaRPr>
+                    </a:p>
+                  </a:txBody>
+                  <a:tcPr marL="91440" marR="91440" marT="45720" marB="45720" anchor="ctr">
+                    <a:lnL w="6350" cap="flat" cmpd="sng" algn="ctr">
+                      <a:solidFill>
+                        <a:srgbClr val="E3E8E9"/>
+                      </a:solidFill>
+                      <a:prstDash val="solid"/>
+                      <a:round/>
+                      <a:headEnd type="none" w="med" len="med"/>
+                      <a:tailEnd type="none" w="med" len="med"/>
+                    </a:lnL>
+                    <a:lnR w="6350" cap="flat" cmpd="sng" algn="ctr">
+                      <a:solidFill>
+                        <a:srgbClr val="E3E8E9"/>
+                      </a:solidFill>
+                      <a:prstDash val="solid"/>
+                      <a:round/>
+                      <a:headEnd type="none" w="med" len="med"/>
+                      <a:tailEnd type="none" w="med" len="med"/>
+                    </a:lnR>
+                    <a:lnT w="6350" cap="flat" cmpd="sng" algn="ctr">
+                      <a:solidFill>
+                        <a:srgbClr val="E3E8E9"/>
+                      </a:solidFill>
+                      <a:prstDash val="solid"/>
+                      <a:round/>
+                      <a:headEnd type="none" w="med" len="med"/>
+                      <a:tailEnd type="none" w="med" len="med"/>
+                    </a:lnT>
+                    <a:lnB w="6350" cap="flat" cmpd="sng" algn="ctr">
+                      <a:solidFill>
+                        <a:srgbClr val="E3E8E9"/>
+                      </a:solidFill>
+                      <a:prstDash val="solid"/>
+                      <a:round/>
+                      <a:headEnd type="none" w="med" len="med"/>
+                      <a:tailEnd type="none" w="med" len="med"/>
+                    </a:lnB>
+                    <a:solidFill>
+                      <a:srgbClr val="FFFFFF"/>
+                    </a:solidFill>
+                  </a:tcPr>
+                </a:tc>
+              </a:tr>
+              <a:tr h="288036">
+                <a:tc>
+                  <a:txBody>
+                    <a:bodyPr/>
+                    <a:lstStyle/>
+                    <a:p>
+                      <a:pPr indent="0" marL="0">
+                        <a:buNone/>
+                      </a:pPr>
+                      <a:r>
+                        <a:rPr lang="en-US" sz="970" dirty="0">
+                          <a:solidFill>
+                            <a:srgbClr val="1C2B33"/>
+                          </a:solidFill>
+                          <a:latin typeface="Calibri" pitchFamily="34" charset="0"/>
+                          <a:ea typeface="Calibri" pitchFamily="34" charset="-122"/>
+                          <a:cs typeface="Calibri" pitchFamily="34" charset="-120"/>
+                        </a:rPr>
+                        <a:t>Fiação de Sinais entre Mark VI e PMS ABB</a:t>
+                      </a:r>
+                      <a:endParaRPr lang="en-US" sz="970" dirty="0">
+                        <a:latin typeface="Calibri" charset="0"/>
+                        <a:ea typeface="Calibri" charset="0"/>
+                        <a:cs typeface="Calibri" charset="0"/>
+                      </a:endParaRPr>
+                    </a:p>
+                  </a:txBody>
+                  <a:tcPr marL="91440" marR="91440" marT="45720" marB="45720" anchor="ctr">
+                    <a:lnL w="6350" cap="flat" cmpd="sng" algn="ctr">
+                      <a:solidFill>
+                        <a:srgbClr val="E3E8E9"/>
+                      </a:solidFill>
+                      <a:prstDash val="solid"/>
+                      <a:round/>
+                      <a:headEnd type="none" w="med" len="med"/>
+                      <a:tailEnd type="none" w="med" len="med"/>
+                    </a:lnL>
+                    <a:lnR w="6350" cap="flat" cmpd="sng" algn="ctr">
+                      <a:solidFill>
+                        <a:srgbClr val="E3E8E9"/>
+                      </a:solidFill>
+                      <a:prstDash val="solid"/>
+                      <a:round/>
+                      <a:headEnd type="none" w="med" len="med"/>
+                      <a:tailEnd type="none" w="med" len="med"/>
+                    </a:lnR>
+                    <a:lnT w="6350" cap="flat" cmpd="sng" algn="ctr">
+                      <a:solidFill>
+                        <a:srgbClr val="E3E8E9"/>
+                      </a:solidFill>
+                      <a:prstDash val="solid"/>
+                      <a:round/>
+                      <a:headEnd type="none" w="med" len="med"/>
+                      <a:tailEnd type="none" w="med" len="med"/>
+                    </a:lnT>
+                    <a:lnB w="6350" cap="flat" cmpd="sng" algn="ctr">
+                      <a:solidFill>
+                        <a:srgbClr val="E3E8E9"/>
+                      </a:solidFill>
+                      <a:prstDash val="solid"/>
+                      <a:round/>
+                      <a:headEnd type="none" w="med" len="med"/>
+                      <a:tailEnd type="none" w="med" len="med"/>
+                    </a:lnB>
+                    <a:solidFill>
+                      <a:srgbClr val="F0F4F5"/>
+                    </a:solidFill>
+                  </a:tcPr>
+                </a:tc>
+                <a:tc>
+                  <a:txBody>
+                    <a:bodyPr/>
+                    <a:lstStyle/>
+                    <a:p>
+                      <a:pPr indent="0" marL="0">
+                        <a:buNone/>
+                      </a:pPr>
+                      <a:r>
+                        <a:rPr lang="en-US" sz="930" dirty="0">
+                          <a:solidFill>
+                            <a:srgbClr val="5B6B73"/>
+                          </a:solidFill>
+                          <a:latin typeface="Calibri" pitchFamily="34" charset="0"/>
+                          <a:ea typeface="Calibri" pitchFamily="34" charset="-122"/>
+                          <a:cs typeface="Calibri" pitchFamily="34" charset="-120"/>
+                        </a:rPr>
+                        <a:t>PLAT C</a:t>
+                      </a:r>
+                      <a:endParaRPr lang="en-US" sz="930" dirty="0">
+                        <a:latin typeface="Calibri" charset="0"/>
+                        <a:ea typeface="Calibri" charset="0"/>
+                        <a:cs typeface="Calibri" charset="0"/>
+                      </a:endParaRPr>
+                    </a:p>
+                  </a:txBody>
+                  <a:tcPr marL="91440" marR="91440" marT="45720" marB="45720" anchor="ctr">
+                    <a:lnL w="6350" cap="flat" cmpd="sng" algn="ctr">
+                      <a:solidFill>
+                        <a:srgbClr val="E3E8E9"/>
+                      </a:solidFill>
+                      <a:prstDash val="solid"/>
+                      <a:round/>
+                      <a:headEnd type="none" w="med" len="med"/>
+                      <a:tailEnd type="none" w="med" len="med"/>
+                    </a:lnL>
+                    <a:lnR w="6350" cap="flat" cmpd="sng" algn="ctr">
+                      <a:solidFill>
+                        <a:srgbClr val="E3E8E9"/>
+                      </a:solidFill>
+                      <a:prstDash val="solid"/>
+                      <a:round/>
+                      <a:headEnd type="none" w="med" len="med"/>
+                      <a:tailEnd type="none" w="med" len="med"/>
+                    </a:lnR>
+                    <a:lnT w="6350" cap="flat" cmpd="sng" algn="ctr">
+                      <a:solidFill>
+                        <a:srgbClr val="E3E8E9"/>
+                      </a:solidFill>
+                      <a:prstDash val="solid"/>
+                      <a:round/>
+                      <a:headEnd type="none" w="med" len="med"/>
+                      <a:tailEnd type="none" w="med" len="med"/>
+                    </a:lnT>
+                    <a:lnB w="6350" cap="flat" cmpd="sng" algn="ctr">
+                      <a:solidFill>
+                        <a:srgbClr val="E3E8E9"/>
+                      </a:solidFill>
+                      <a:prstDash val="solid"/>
+                      <a:round/>
+                      <a:headEnd type="none" w="med" len="med"/>
+                      <a:tailEnd type="none" w="med" len="med"/>
+                    </a:lnB>
+                    <a:solidFill>
+                      <a:srgbClr val="F0F4F5"/>
+                    </a:solidFill>
+                  </a:tcPr>
+                </a:tc>
+                <a:tc>
+                  <a:txBody>
+                    <a:bodyPr/>
+                    <a:lstStyle/>
+                    <a:p>
+                      <a:pPr indent="0" marL="0">
+                        <a:buNone/>
+                      </a:pPr>
+                      <a:r>
+                        <a:rPr lang="en-US" sz="900" dirty="0">
+                          <a:solidFill>
+                            <a:srgbClr val="5B6B73"/>
+                          </a:solidFill>
+                          <a:latin typeface="Calibri" pitchFamily="34" charset="0"/>
+                          <a:ea typeface="Calibri" pitchFamily="34" charset="-122"/>
+                          <a:cs typeface="Calibri" pitchFamily="34" charset="-120"/>
+                        </a:rPr>
+                        <a:t>Eficiência de Produção</a:t>
+                      </a:r>
+                      <a:endParaRPr lang="en-US" sz="900" dirty="0">
+                        <a:latin typeface="Calibri" charset="0"/>
+                        <a:ea typeface="Calibri" charset="0"/>
+                        <a:cs typeface="Calibri" charset="0"/>
+                      </a:endParaRPr>
+                    </a:p>
+                  </a:txBody>
+                  <a:tcPr marL="91440" marR="91440" marT="45720" marB="45720" anchor="ctr">
+                    <a:lnL w="6350" cap="flat" cmpd="sng" algn="ctr">
+                      <a:solidFill>
+                        <a:srgbClr val="E3E8E9"/>
+                      </a:solidFill>
+                      <a:prstDash val="solid"/>
+                      <a:round/>
+                      <a:headEnd type="none" w="med" len="med"/>
+                      <a:tailEnd type="none" w="med" len="med"/>
+                    </a:lnL>
+                    <a:lnR w="6350" cap="flat" cmpd="sng" algn="ctr">
+                      <a:solidFill>
+                        <a:srgbClr val="E3E8E9"/>
+                      </a:solidFill>
+                      <a:prstDash val="solid"/>
+                      <a:round/>
+                      <a:headEnd type="none" w="med" len="med"/>
+                      <a:tailEnd type="none" w="med" len="med"/>
+                    </a:lnR>
+                    <a:lnT w="6350" cap="flat" cmpd="sng" algn="ctr">
+                      <a:solidFill>
+                        <a:srgbClr val="E3E8E9"/>
+                      </a:solidFill>
+                      <a:prstDash val="solid"/>
+                      <a:round/>
+                      <a:headEnd type="none" w="med" len="med"/>
+                      <a:tailEnd type="none" w="med" len="med"/>
+                    </a:lnT>
+                    <a:lnB w="6350" cap="flat" cmpd="sng" algn="ctr">
+                      <a:solidFill>
+                        <a:srgbClr val="E3E8E9"/>
+                      </a:solidFill>
+                      <a:prstDash val="solid"/>
+                      <a:round/>
+                      <a:headEnd type="none" w="med" len="med"/>
+                      <a:tailEnd type="none" w="med" len="med"/>
+                    </a:lnB>
+                    <a:solidFill>
+                      <a:srgbClr val="F0F4F5"/>
+                    </a:solidFill>
+                  </a:tcPr>
+                </a:tc>
+                <a:tc>
+                  <a:txBody>
+                    <a:bodyPr/>
+                    <a:lstStyle/>
+                    <a:p>
+                      <a:pPr algn="ctr" indent="0" marL="0">
+                        <a:buNone/>
+                      </a:pPr>
+                      <a:r>
+                        <a:rPr lang="en-US" sz="900" dirty="0">
+                          <a:solidFill>
+                            <a:srgbClr val="5B6B73"/>
+                          </a:solidFill>
+                          <a:latin typeface="Calibri" pitchFamily="34" charset="0"/>
+                          <a:ea typeface="Calibri" pitchFamily="34" charset="-122"/>
+                          <a:cs typeface="Calibri" pitchFamily="34" charset="-120"/>
+                        </a:rPr>
+                        <a:t>CAPEX</a:t>
+                      </a:r>
+                      <a:endParaRPr lang="en-US" sz="900" dirty="0">
+                        <a:latin typeface="Calibri" charset="0"/>
+                        <a:ea typeface="Calibri" charset="0"/>
+                        <a:cs typeface="Calibri" charset="0"/>
+                      </a:endParaRPr>
+                    </a:p>
+                  </a:txBody>
+                  <a:tcPr marL="91440" marR="91440" marT="45720" marB="45720" anchor="ctr">
+                    <a:lnL w="6350" cap="flat" cmpd="sng" algn="ctr">
+                      <a:solidFill>
+                        <a:srgbClr val="E3E8E9"/>
+                      </a:solidFill>
+                      <a:prstDash val="solid"/>
+                      <a:round/>
+                      <a:headEnd type="none" w="med" len="med"/>
+                      <a:tailEnd type="none" w="med" len="med"/>
+                    </a:lnL>
+                    <a:lnR w="6350" cap="flat" cmpd="sng" algn="ctr">
+                      <a:solidFill>
+                        <a:srgbClr val="E3E8E9"/>
+                      </a:solidFill>
+                      <a:prstDash val="solid"/>
+                      <a:round/>
+                      <a:headEnd type="none" w="med" len="med"/>
+                      <a:tailEnd type="none" w="med" len="med"/>
+                    </a:lnR>
+                    <a:lnT w="6350" cap="flat" cmpd="sng" algn="ctr">
+                      <a:solidFill>
+                        <a:srgbClr val="E3E8E9"/>
+                      </a:solidFill>
+                      <a:prstDash val="solid"/>
+                      <a:round/>
+                      <a:headEnd type="none" w="med" len="med"/>
+                      <a:tailEnd type="none" w="med" len="med"/>
+                    </a:lnT>
+                    <a:lnB w="6350" cap="flat" cmpd="sng" algn="ctr">
+                      <a:solidFill>
+                        <a:srgbClr val="E3E8E9"/>
+                      </a:solidFill>
+                      <a:prstDash val="solid"/>
+                      <a:round/>
+                      <a:headEnd type="none" w="med" len="med"/>
+                      <a:tailEnd type="none" w="med" len="med"/>
+                    </a:lnB>
+                    <a:solidFill>
+                      <a:srgbClr val="F0F4F5"/>
+                    </a:solidFill>
+                  </a:tcPr>
+                </a:tc>
+                <a:tc>
+                  <a:txBody>
+                    <a:bodyPr/>
+                    <a:lstStyle/>
+                    <a:p>
+                      <a:pPr algn="r" indent="0" marL="0">
+                        <a:buNone/>
+                      </a:pPr>
+                      <a:r>
+                        <a:rPr lang="en-US" sz="970" b="1" dirty="0">
+                          <a:solidFill>
+                            <a:srgbClr val="0B2A3D"/>
+                          </a:solidFill>
+                          <a:latin typeface="Calibri" pitchFamily="34" charset="0"/>
+                          <a:ea typeface="Calibri" pitchFamily="34" charset="-122"/>
+                          <a:cs typeface="Calibri" pitchFamily="34" charset="-120"/>
+                        </a:rPr>
+                        <a:t>US$ 404,7 mil</a:t>
+                      </a:r>
+                      <a:endParaRPr lang="en-US" sz="970" dirty="0">
+                        <a:latin typeface="Calibri" charset="0"/>
+                        <a:ea typeface="Calibri" charset="0"/>
+                        <a:cs typeface="Calibri" charset="0"/>
+                      </a:endParaRPr>
+                    </a:p>
+                  </a:txBody>
+                  <a:tcPr marL="91440" marR="91440" marT="45720" marB="45720" anchor="ctr">
+                    <a:lnL w="6350" cap="flat" cmpd="sng" algn="ctr">
+                      <a:solidFill>
+                        <a:srgbClr val="E3E8E9"/>
+                      </a:solidFill>
+                      <a:prstDash val="solid"/>
+                      <a:round/>
+                      <a:headEnd type="none" w="med" len="med"/>
+                      <a:tailEnd type="none" w="med" len="med"/>
+                    </a:lnL>
+                    <a:lnR w="6350" cap="flat" cmpd="sng" algn="ctr">
+                      <a:solidFill>
+                        <a:srgbClr val="E3E8E9"/>
+                      </a:solidFill>
+                      <a:prstDash val="solid"/>
+                      <a:round/>
+                      <a:headEnd type="none" w="med" len="med"/>
+                      <a:tailEnd type="none" w="med" len="med"/>
+                    </a:lnR>
+                    <a:lnT w="6350" cap="flat" cmpd="sng" algn="ctr">
+                      <a:solidFill>
+                        <a:srgbClr val="E3E8E9"/>
+                      </a:solidFill>
+                      <a:prstDash val="solid"/>
+                      <a:round/>
+                      <a:headEnd type="none" w="med" len="med"/>
+                      <a:tailEnd type="none" w="med" len="med"/>
+                    </a:lnT>
+                    <a:lnB w="6350" cap="flat" cmpd="sng" algn="ctr">
+                      <a:solidFill>
+                        <a:srgbClr val="E3E8E9"/>
+                      </a:solidFill>
+                      <a:prstDash val="solid"/>
+                      <a:round/>
+                      <a:headEnd type="none" w="med" len="med"/>
+                      <a:tailEnd type="none" w="med" len="med"/>
+                    </a:lnB>
+                    <a:solidFill>
+                      <a:srgbClr val="F0F4F5"/>
+                    </a:solidFill>
+                  </a:tcPr>
+                </a:tc>
+              </a:tr>
+              <a:tr h="288036">
+                <a:tc>
+                  <a:txBody>
+                    <a:bodyPr/>
+                    <a:lstStyle/>
+                    <a:p>
+                      <a:pPr indent="0" marL="0">
+                        <a:buNone/>
+                      </a:pPr>
+                      <a:r>
+                        <a:rPr lang="en-US" sz="970" dirty="0">
+                          <a:solidFill>
+                            <a:srgbClr val="1C2B33"/>
+                          </a:solidFill>
+                          <a:latin typeface="Calibri" pitchFamily="34" charset="0"/>
+                          <a:ea typeface="Calibri" pitchFamily="34" charset="-122"/>
+                          <a:cs typeface="Calibri" pitchFamily="34" charset="-120"/>
+                        </a:rPr>
+                        <a:t>IGG Fuel Gas</a:t>
+                      </a:r>
+                      <a:endParaRPr lang="en-US" sz="970" dirty="0">
+                        <a:latin typeface="Calibri" charset="0"/>
+                        <a:ea typeface="Calibri" charset="0"/>
+                        <a:cs typeface="Calibri" charset="0"/>
+                      </a:endParaRPr>
+                    </a:p>
+                  </a:txBody>
+                  <a:tcPr marL="91440" marR="91440" marT="45720" marB="45720" anchor="ctr">
+                    <a:lnL w="6350" cap="flat" cmpd="sng" algn="ctr">
+                      <a:solidFill>
+                        <a:srgbClr val="E3E8E9"/>
+                      </a:solidFill>
+                      <a:prstDash val="solid"/>
+                      <a:round/>
+                      <a:headEnd type="none" w="med" len="med"/>
+                      <a:tailEnd type="none" w="med" len="med"/>
+                    </a:lnL>
+                    <a:lnR w="6350" cap="flat" cmpd="sng" algn="ctr">
+                      <a:solidFill>
+                        <a:srgbClr val="E3E8E9"/>
+                      </a:solidFill>
+                      <a:prstDash val="solid"/>
+                      <a:round/>
+                      <a:headEnd type="none" w="med" len="med"/>
+                      <a:tailEnd type="none" w="med" len="med"/>
+                    </a:lnR>
+                    <a:lnT w="6350" cap="flat" cmpd="sng" algn="ctr">
+                      <a:solidFill>
+                        <a:srgbClr val="E3E8E9"/>
+                      </a:solidFill>
+                      <a:prstDash val="solid"/>
+                      <a:round/>
+                      <a:headEnd type="none" w="med" len="med"/>
+                      <a:tailEnd type="none" w="med" len="med"/>
+                    </a:lnT>
+                    <a:lnB w="6350" cap="flat" cmpd="sng" algn="ctr">
+                      <a:solidFill>
+                        <a:srgbClr val="E3E8E9"/>
+                      </a:solidFill>
+                      <a:prstDash val="solid"/>
+                      <a:round/>
+                      <a:headEnd type="none" w="med" len="med"/>
+                      <a:tailEnd type="none" w="med" len="med"/>
+                    </a:lnB>
+                    <a:solidFill>
+                      <a:srgbClr val="FFFFFF"/>
+                    </a:solidFill>
+                  </a:tcPr>
+                </a:tc>
+                <a:tc>
+                  <a:txBody>
+                    <a:bodyPr/>
+                    <a:lstStyle/>
+                    <a:p>
+                      <a:pPr indent="0" marL="0">
+                        <a:buNone/>
+                      </a:pPr>
+                      <a:r>
+                        <a:rPr lang="en-US" sz="930" dirty="0">
+                          <a:solidFill>
+                            <a:srgbClr val="5B6B73"/>
+                          </a:solidFill>
+                          <a:latin typeface="Calibri" pitchFamily="34" charset="0"/>
+                          <a:ea typeface="Calibri" pitchFamily="34" charset="-122"/>
+                          <a:cs typeface="Calibri" pitchFamily="34" charset="-120"/>
+                        </a:rPr>
+                        <a:t>FPSO Frade</a:t>
+                      </a:r>
+                      <a:endParaRPr lang="en-US" sz="930" dirty="0">
+                        <a:latin typeface="Calibri" charset="0"/>
+                        <a:ea typeface="Calibri" charset="0"/>
+                        <a:cs typeface="Calibri" charset="0"/>
+                      </a:endParaRPr>
+                    </a:p>
+                  </a:txBody>
+                  <a:tcPr marL="91440" marR="91440" marT="45720" marB="45720" anchor="ctr">
+                    <a:lnL w="6350" cap="flat" cmpd="sng" algn="ctr">
+                      <a:solidFill>
+                        <a:srgbClr val="E3E8E9"/>
+                      </a:solidFill>
+                      <a:prstDash val="solid"/>
+                      <a:round/>
+                      <a:headEnd type="none" w="med" len="med"/>
+                      <a:tailEnd type="none" w="med" len="med"/>
+                    </a:lnL>
+                    <a:lnR w="6350" cap="flat" cmpd="sng" algn="ctr">
+                      <a:solidFill>
+                        <a:srgbClr val="E3E8E9"/>
+                      </a:solidFill>
+                      <a:prstDash val="solid"/>
+                      <a:round/>
+                      <a:headEnd type="none" w="med" len="med"/>
+                      <a:tailEnd type="none" w="med" len="med"/>
+                    </a:lnR>
+                    <a:lnT w="6350" cap="flat" cmpd="sng" algn="ctr">
+                      <a:solidFill>
+                        <a:srgbClr val="E3E8E9"/>
+                      </a:solidFill>
+                      <a:prstDash val="solid"/>
+                      <a:round/>
+                      <a:headEnd type="none" w="med" len="med"/>
+                      <a:tailEnd type="none" w="med" len="med"/>
+                    </a:lnT>
+                    <a:lnB w="6350" cap="flat" cmpd="sng" algn="ctr">
+                      <a:solidFill>
+                        <a:srgbClr val="E3E8E9"/>
+                      </a:solidFill>
+                      <a:prstDash val="solid"/>
+                      <a:round/>
+                      <a:headEnd type="none" w="med" len="med"/>
+                      <a:tailEnd type="none" w="med" len="med"/>
+                    </a:lnB>
+                    <a:solidFill>
+                      <a:srgbClr val="FFFFFF"/>
+                    </a:solidFill>
+                  </a:tcPr>
+                </a:tc>
+                <a:tc>
+                  <a:txBody>
+                    <a:bodyPr/>
+                    <a:lstStyle/>
+                    <a:p>
+                      <a:pPr indent="0" marL="0">
+                        <a:buNone/>
+                      </a:pPr>
+                      <a:r>
+                        <a:rPr lang="en-US" sz="900" dirty="0">
+                          <a:solidFill>
+                            <a:srgbClr val="5B6B73"/>
+                          </a:solidFill>
+                          <a:latin typeface="Calibri" pitchFamily="34" charset="0"/>
+                          <a:ea typeface="Calibri" pitchFamily="34" charset="-122"/>
+                          <a:cs typeface="Calibri" pitchFamily="34" charset="-120"/>
+                        </a:rPr>
+                        <a:t>Eficiência de Produção</a:t>
+                      </a:r>
+                      <a:endParaRPr lang="en-US" sz="900" dirty="0">
+                        <a:latin typeface="Calibri" charset="0"/>
+                        <a:ea typeface="Calibri" charset="0"/>
+                        <a:cs typeface="Calibri" charset="0"/>
+                      </a:endParaRPr>
+                    </a:p>
+                  </a:txBody>
+                  <a:tcPr marL="91440" marR="91440" marT="45720" marB="45720" anchor="ctr">
+                    <a:lnL w="6350" cap="flat" cmpd="sng" algn="ctr">
+                      <a:solidFill>
+                        <a:srgbClr val="E3E8E9"/>
+                      </a:solidFill>
+                      <a:prstDash val="solid"/>
+                      <a:round/>
+                      <a:headEnd type="none" w="med" len="med"/>
+                      <a:tailEnd type="none" w="med" len="med"/>
+                    </a:lnL>
+                    <a:lnR w="6350" cap="flat" cmpd="sng" algn="ctr">
+                      <a:solidFill>
+                        <a:srgbClr val="E3E8E9"/>
+                      </a:solidFill>
+                      <a:prstDash val="solid"/>
+                      <a:round/>
+                      <a:headEnd type="none" w="med" len="med"/>
+                      <a:tailEnd type="none" w="med" len="med"/>
+                    </a:lnR>
+                    <a:lnT w="6350" cap="flat" cmpd="sng" algn="ctr">
+                      <a:solidFill>
+                        <a:srgbClr val="E3E8E9"/>
+                      </a:solidFill>
+                      <a:prstDash val="solid"/>
+                      <a:round/>
+                      <a:headEnd type="none" w="med" len="med"/>
+                      <a:tailEnd type="none" w="med" len="med"/>
+                    </a:lnT>
+                    <a:lnB w="6350" cap="flat" cmpd="sng" algn="ctr">
+                      <a:solidFill>
+                        <a:srgbClr val="E3E8E9"/>
+                      </a:solidFill>
+                      <a:prstDash val="solid"/>
+                      <a:round/>
+                      <a:headEnd type="none" w="med" len="med"/>
+                      <a:tailEnd type="none" w="med" len="med"/>
+                    </a:lnB>
+                    <a:solidFill>
+                      <a:srgbClr val="FFFFFF"/>
+                    </a:solidFill>
+                  </a:tcPr>
+                </a:tc>
+                <a:tc>
+                  <a:txBody>
+                    <a:bodyPr/>
+                    <a:lstStyle/>
+                    <a:p>
+                      <a:pPr algn="ctr" indent="0" marL="0">
+                        <a:buNone/>
+                      </a:pPr>
+                      <a:r>
+                        <a:rPr lang="en-US" sz="900" dirty="0">
+                          <a:solidFill>
+                            <a:srgbClr val="5B6B73"/>
+                          </a:solidFill>
+                          <a:latin typeface="Calibri" pitchFamily="34" charset="0"/>
+                          <a:ea typeface="Calibri" pitchFamily="34" charset="-122"/>
+                          <a:cs typeface="Calibri" pitchFamily="34" charset="-120"/>
+                        </a:rPr>
+                        <a:t>CAPEX</a:t>
+                      </a:r>
+                      <a:endParaRPr lang="en-US" sz="900" dirty="0">
+                        <a:latin typeface="Calibri" charset="0"/>
+                        <a:ea typeface="Calibri" charset="0"/>
+                        <a:cs typeface="Calibri" charset="0"/>
+                      </a:endParaRPr>
+                    </a:p>
+                  </a:txBody>
+                  <a:tcPr marL="91440" marR="91440" marT="45720" marB="45720" anchor="ctr">
+                    <a:lnL w="6350" cap="flat" cmpd="sng" algn="ctr">
+                      <a:solidFill>
+                        <a:srgbClr val="E3E8E9"/>
+                      </a:solidFill>
+                      <a:prstDash val="solid"/>
+                      <a:round/>
+                      <a:headEnd type="none" w="med" len="med"/>
+                      <a:tailEnd type="none" w="med" len="med"/>
+                    </a:lnL>
+                    <a:lnR w="6350" cap="flat" cmpd="sng" algn="ctr">
+                      <a:solidFill>
+                        <a:srgbClr val="E3E8E9"/>
+                      </a:solidFill>
+                      <a:prstDash val="solid"/>
+                      <a:round/>
+                      <a:headEnd type="none" w="med" len="med"/>
+                      <a:tailEnd type="none" w="med" len="med"/>
+                    </a:lnR>
+                    <a:lnT w="6350" cap="flat" cmpd="sng" algn="ctr">
+                      <a:solidFill>
+                        <a:srgbClr val="E3E8E9"/>
+                      </a:solidFill>
+                      <a:prstDash val="solid"/>
+                      <a:round/>
+                      <a:headEnd type="none" w="med" len="med"/>
+                      <a:tailEnd type="none" w="med" len="med"/>
+                    </a:lnT>
+                    <a:lnB w="6350" cap="flat" cmpd="sng" algn="ctr">
+                      <a:solidFill>
+                        <a:srgbClr val="E3E8E9"/>
+                      </a:solidFill>
+                      <a:prstDash val="solid"/>
+                      <a:round/>
+                      <a:headEnd type="none" w="med" len="med"/>
+                      <a:tailEnd type="none" w="med" len="med"/>
+                    </a:lnB>
+                    <a:solidFill>
+                      <a:srgbClr val="FFFFFF"/>
+                    </a:solidFill>
+                  </a:tcPr>
+                </a:tc>
+                <a:tc>
+                  <a:txBody>
+                    <a:bodyPr/>
+                    <a:lstStyle/>
+                    <a:p>
+                      <a:pPr algn="r" indent="0" marL="0">
+                        <a:buNone/>
+                      </a:pPr>
+                      <a:r>
+                        <a:rPr lang="en-US" sz="970" b="1" dirty="0">
+                          <a:solidFill>
+                            <a:srgbClr val="0B2A3D"/>
+                          </a:solidFill>
+                          <a:latin typeface="Calibri" pitchFamily="34" charset="0"/>
+                          <a:ea typeface="Calibri" pitchFamily="34" charset="-122"/>
+                          <a:cs typeface="Calibri" pitchFamily="34" charset="-120"/>
+                        </a:rPr>
+                        <a:t>US$ 376,6 mil</a:t>
+                      </a:r>
+                      <a:endParaRPr lang="en-US" sz="970" dirty="0">
+                        <a:latin typeface="Calibri" charset="0"/>
+                        <a:ea typeface="Calibri" charset="0"/>
+                        <a:cs typeface="Calibri" charset="0"/>
+                      </a:endParaRPr>
+                    </a:p>
+                  </a:txBody>
+                  <a:tcPr marL="91440" marR="91440" marT="45720" marB="45720" anchor="ctr">
+                    <a:lnL w="6350" cap="flat" cmpd="sng" algn="ctr">
+                      <a:solidFill>
+                        <a:srgbClr val="E3E8E9"/>
+                      </a:solidFill>
+                      <a:prstDash val="solid"/>
+                      <a:round/>
+                      <a:headEnd type="none" w="med" len="med"/>
+                      <a:tailEnd type="none" w="med" len="med"/>
+                    </a:lnL>
+                    <a:lnR w="6350" cap="flat" cmpd="sng" algn="ctr">
+                      <a:solidFill>
+                        <a:srgbClr val="E3E8E9"/>
+                      </a:solidFill>
+                      <a:prstDash val="solid"/>
+                      <a:round/>
+                      <a:headEnd type="none" w="med" len="med"/>
+                      <a:tailEnd type="none" w="med" len="med"/>
+                    </a:lnR>
+                    <a:lnT w="6350" cap="flat" cmpd="sng" algn="ctr">
+                      <a:solidFill>
+                        <a:srgbClr val="E3E8E9"/>
+                      </a:solidFill>
+                      <a:prstDash val="solid"/>
+                      <a:round/>
+                      <a:headEnd type="none" w="med" len="med"/>
+                      <a:tailEnd type="none" w="med" len="med"/>
+                    </a:lnT>
+                    <a:lnB w="6350" cap="flat" cmpd="sng" algn="ctr">
+                      <a:solidFill>
+                        <a:srgbClr val="E3E8E9"/>
+                      </a:solidFill>
+                      <a:prstDash val="solid"/>
+                      <a:round/>
+                      <a:headEnd type="none" w="med" len="med"/>
+                      <a:tailEnd type="none" w="med" len="med"/>
+                    </a:lnB>
+                    <a:solidFill>
+                      <a:srgbClr val="FFFFFF"/>
+                    </a:solidFill>
+                  </a:tcPr>
+                </a:tc>
+              </a:tr>
+              <a:tr h="288036">
+                <a:tc>
+                  <a:txBody>
+                    <a:bodyPr/>
+                    <a:lstStyle/>
+                    <a:p>
+                      <a:pPr indent="0" marL="0">
+                        <a:buNone/>
+                      </a:pPr>
+                      <a:r>
+                        <a:rPr lang="en-US" sz="970" dirty="0">
+                          <a:solidFill>
+                            <a:srgbClr val="1C2B33"/>
+                          </a:solidFill>
+                          <a:latin typeface="Calibri" pitchFamily="34" charset="0"/>
+                          <a:ea typeface="Calibri" pitchFamily="34" charset="-122"/>
+                          <a:cs typeface="Calibri" pitchFamily="34" charset="-120"/>
+                        </a:rPr>
+                        <a:t>Troca de bomba nacionalização das bombas críticas da praça de máquinas (Main cooling sea water, bomba de condensado e GS pump)</a:t>
+                      </a:r>
+                      <a:endParaRPr lang="en-US" sz="970" dirty="0">
+                        <a:latin typeface="Calibri" charset="0"/>
+                        <a:ea typeface="Calibri" charset="0"/>
+                        <a:cs typeface="Calibri" charset="0"/>
+                      </a:endParaRPr>
+                    </a:p>
+                  </a:txBody>
+                  <a:tcPr marL="91440" marR="91440" marT="45720" marB="45720" anchor="ctr">
+                    <a:lnL w="6350" cap="flat" cmpd="sng" algn="ctr">
+                      <a:solidFill>
+                        <a:srgbClr val="E3E8E9"/>
+                      </a:solidFill>
+                      <a:prstDash val="solid"/>
+                      <a:round/>
+                      <a:headEnd type="none" w="med" len="med"/>
+                      <a:tailEnd type="none" w="med" len="med"/>
+                    </a:lnL>
+                    <a:lnR w="6350" cap="flat" cmpd="sng" algn="ctr">
+                      <a:solidFill>
+                        <a:srgbClr val="E3E8E9"/>
+                      </a:solidFill>
+                      <a:prstDash val="solid"/>
+                      <a:round/>
+                      <a:headEnd type="none" w="med" len="med"/>
+                      <a:tailEnd type="none" w="med" len="med"/>
+                    </a:lnR>
+                    <a:lnT w="6350" cap="flat" cmpd="sng" algn="ctr">
+                      <a:solidFill>
+                        <a:srgbClr val="E3E8E9"/>
+                      </a:solidFill>
+                      <a:prstDash val="solid"/>
+                      <a:round/>
+                      <a:headEnd type="none" w="med" len="med"/>
+                      <a:tailEnd type="none" w="med" len="med"/>
+                    </a:lnT>
+                    <a:lnB w="6350" cap="flat" cmpd="sng" algn="ctr">
+                      <a:solidFill>
+                        <a:srgbClr val="E3E8E9"/>
+                      </a:solidFill>
+                      <a:prstDash val="solid"/>
+                      <a:round/>
+                      <a:headEnd type="none" w="med" len="med"/>
+                      <a:tailEnd type="none" w="med" len="med"/>
+                    </a:lnB>
+                    <a:solidFill>
+                      <a:srgbClr val="F0F4F5"/>
+                    </a:solidFill>
+                  </a:tcPr>
+                </a:tc>
+                <a:tc>
+                  <a:txBody>
+                    <a:bodyPr/>
+                    <a:lstStyle/>
+                    <a:p>
+                      <a:pPr indent="0" marL="0">
+                        <a:buNone/>
+                      </a:pPr>
+                      <a:r>
+                        <a:rPr lang="en-US" sz="930" dirty="0">
+                          <a:solidFill>
+                            <a:srgbClr val="5B6B73"/>
+                          </a:solidFill>
+                          <a:latin typeface="Calibri" pitchFamily="34" charset="0"/>
+                          <a:ea typeface="Calibri" pitchFamily="34" charset="-122"/>
+                          <a:cs typeface="Calibri" pitchFamily="34" charset="-120"/>
+                        </a:rPr>
+                        <a:t>FPSO Bravo</a:t>
+                      </a:r>
+                      <a:endParaRPr lang="en-US" sz="930" dirty="0">
+                        <a:latin typeface="Calibri" charset="0"/>
+                        <a:ea typeface="Calibri" charset="0"/>
+                        <a:cs typeface="Calibri" charset="0"/>
+                      </a:endParaRPr>
+                    </a:p>
+                  </a:txBody>
+                  <a:tcPr marL="91440" marR="91440" marT="45720" marB="45720" anchor="ctr">
+                    <a:lnL w="6350" cap="flat" cmpd="sng" algn="ctr">
+                      <a:solidFill>
+                        <a:srgbClr val="E3E8E9"/>
+                      </a:solidFill>
+                      <a:prstDash val="solid"/>
+                      <a:round/>
+                      <a:headEnd type="none" w="med" len="med"/>
+                      <a:tailEnd type="none" w="med" len="med"/>
+                    </a:lnL>
+                    <a:lnR w="6350" cap="flat" cmpd="sng" algn="ctr">
+                      <a:solidFill>
+                        <a:srgbClr val="E3E8E9"/>
+                      </a:solidFill>
+                      <a:prstDash val="solid"/>
+                      <a:round/>
+                      <a:headEnd type="none" w="med" len="med"/>
+                      <a:tailEnd type="none" w="med" len="med"/>
+                    </a:lnR>
+                    <a:lnT w="6350" cap="flat" cmpd="sng" algn="ctr">
+                      <a:solidFill>
+                        <a:srgbClr val="E3E8E9"/>
+                      </a:solidFill>
+                      <a:prstDash val="solid"/>
+                      <a:round/>
+                      <a:headEnd type="none" w="med" len="med"/>
+                      <a:tailEnd type="none" w="med" len="med"/>
+                    </a:lnT>
+                    <a:lnB w="6350" cap="flat" cmpd="sng" algn="ctr">
+                      <a:solidFill>
+                        <a:srgbClr val="E3E8E9"/>
+                      </a:solidFill>
+                      <a:prstDash val="solid"/>
+                      <a:round/>
+                      <a:headEnd type="none" w="med" len="med"/>
+                      <a:tailEnd type="none" w="med" len="med"/>
+                    </a:lnB>
+                    <a:solidFill>
+                      <a:srgbClr val="F0F4F5"/>
+                    </a:solidFill>
+                  </a:tcPr>
+                </a:tc>
+                <a:tc>
+                  <a:txBody>
+                    <a:bodyPr/>
+                    <a:lstStyle/>
+                    <a:p>
+                      <a:pPr indent="0" marL="0">
+                        <a:buNone/>
+                      </a:pPr>
+                      <a:r>
+                        <a:rPr lang="en-US" sz="900" dirty="0">
+                          <a:solidFill>
+                            <a:srgbClr val="5B6B73"/>
+                          </a:solidFill>
+                          <a:latin typeface="Calibri" pitchFamily="34" charset="0"/>
+                          <a:ea typeface="Calibri" pitchFamily="34" charset="-122"/>
+                          <a:cs typeface="Calibri" pitchFamily="34" charset="-120"/>
+                        </a:rPr>
+                        <a:t>Rotina Operacional</a:t>
+                      </a:r>
+                      <a:endParaRPr lang="en-US" sz="900" dirty="0">
+                        <a:latin typeface="Calibri" charset="0"/>
+                        <a:ea typeface="Calibri" charset="0"/>
+                        <a:cs typeface="Calibri" charset="0"/>
+                      </a:endParaRPr>
+                    </a:p>
+                  </a:txBody>
+                  <a:tcPr marL="91440" marR="91440" marT="45720" marB="45720" anchor="ctr">
+                    <a:lnL w="6350" cap="flat" cmpd="sng" algn="ctr">
+                      <a:solidFill>
+                        <a:srgbClr val="E3E8E9"/>
+                      </a:solidFill>
+                      <a:prstDash val="solid"/>
+                      <a:round/>
+                      <a:headEnd type="none" w="med" len="med"/>
+                      <a:tailEnd type="none" w="med" len="med"/>
+                    </a:lnL>
+                    <a:lnR w="6350" cap="flat" cmpd="sng" algn="ctr">
+                      <a:solidFill>
+                        <a:srgbClr val="E3E8E9"/>
+                      </a:solidFill>
+                      <a:prstDash val="solid"/>
+                      <a:round/>
+                      <a:headEnd type="none" w="med" len="med"/>
+                      <a:tailEnd type="none" w="med" len="med"/>
+                    </a:lnR>
+                    <a:lnT w="6350" cap="flat" cmpd="sng" algn="ctr">
+                      <a:solidFill>
+                        <a:srgbClr val="E3E8E9"/>
+                      </a:solidFill>
+                      <a:prstDash val="solid"/>
+                      <a:round/>
+                      <a:headEnd type="none" w="med" len="med"/>
+                      <a:tailEnd type="none" w="med" len="med"/>
+                    </a:lnT>
+                    <a:lnB w="6350" cap="flat" cmpd="sng" algn="ctr">
+                      <a:solidFill>
+                        <a:srgbClr val="E3E8E9"/>
+                      </a:solidFill>
+                      <a:prstDash val="solid"/>
+                      <a:round/>
+                      <a:headEnd type="none" w="med" len="med"/>
+                      <a:tailEnd type="none" w="med" len="med"/>
+                    </a:lnB>
+                    <a:solidFill>
+                      <a:srgbClr val="F0F4F5"/>
+                    </a:solidFill>
+                  </a:tcPr>
+                </a:tc>
+                <a:tc>
+                  <a:txBody>
+                    <a:bodyPr/>
+                    <a:lstStyle/>
+                    <a:p>
+                      <a:pPr algn="ctr" indent="0" marL="0">
+                        <a:buNone/>
+                      </a:pPr>
+                      <a:r>
+                        <a:rPr lang="en-US" sz="900" dirty="0">
+                          <a:solidFill>
+                            <a:srgbClr val="5B6B73"/>
+                          </a:solidFill>
+                          <a:latin typeface="Calibri" pitchFamily="34" charset="0"/>
+                          <a:ea typeface="Calibri" pitchFamily="34" charset="-122"/>
+                          <a:cs typeface="Calibri" pitchFamily="34" charset="-120"/>
+                        </a:rPr>
+                        <a:t>CAPEX</a:t>
+                      </a:r>
+                      <a:endParaRPr lang="en-US" sz="900" dirty="0">
+                        <a:latin typeface="Calibri" charset="0"/>
+                        <a:ea typeface="Calibri" charset="0"/>
+                        <a:cs typeface="Calibri" charset="0"/>
+                      </a:endParaRPr>
+                    </a:p>
+                  </a:txBody>
+                  <a:tcPr marL="91440" marR="91440" marT="45720" marB="45720" anchor="ctr">
+                    <a:lnL w="6350" cap="flat" cmpd="sng" algn="ctr">
+                      <a:solidFill>
+                        <a:srgbClr val="E3E8E9"/>
+                      </a:solidFill>
+                      <a:prstDash val="solid"/>
+                      <a:round/>
+                      <a:headEnd type="none" w="med" len="med"/>
+                      <a:tailEnd type="none" w="med" len="med"/>
+                    </a:lnL>
+                    <a:lnR w="6350" cap="flat" cmpd="sng" algn="ctr">
+                      <a:solidFill>
+                        <a:srgbClr val="E3E8E9"/>
+                      </a:solidFill>
+                      <a:prstDash val="solid"/>
+                      <a:round/>
+                      <a:headEnd type="none" w="med" len="med"/>
+                      <a:tailEnd type="none" w="med" len="med"/>
+                    </a:lnR>
+                    <a:lnT w="6350" cap="flat" cmpd="sng" algn="ctr">
+                      <a:solidFill>
+                        <a:srgbClr val="E3E8E9"/>
+                      </a:solidFill>
+                      <a:prstDash val="solid"/>
+                      <a:round/>
+                      <a:headEnd type="none" w="med" len="med"/>
+                      <a:tailEnd type="none" w="med" len="med"/>
+                    </a:lnT>
+                    <a:lnB w="6350" cap="flat" cmpd="sng" algn="ctr">
+                      <a:solidFill>
+                        <a:srgbClr val="E3E8E9"/>
+                      </a:solidFill>
+                      <a:prstDash val="solid"/>
+                      <a:round/>
+                      <a:headEnd type="none" w="med" len="med"/>
+                      <a:tailEnd type="none" w="med" len="med"/>
+                    </a:lnB>
+                    <a:solidFill>
+                      <a:srgbClr val="F0F4F5"/>
+                    </a:solidFill>
+                  </a:tcPr>
+                </a:tc>
+                <a:tc>
+                  <a:txBody>
+                    <a:bodyPr/>
+                    <a:lstStyle/>
+                    <a:p>
+                      <a:pPr algn="r" indent="0" marL="0">
+                        <a:buNone/>
+                      </a:pPr>
+                      <a:r>
+                        <a:rPr lang="en-US" sz="970" b="1" dirty="0">
+                          <a:solidFill>
+                            <a:srgbClr val="0B2A3D"/>
+                          </a:solidFill>
+                          <a:latin typeface="Calibri" pitchFamily="34" charset="0"/>
+                          <a:ea typeface="Calibri" pitchFamily="34" charset="-122"/>
+                          <a:cs typeface="Calibri" pitchFamily="34" charset="-120"/>
+                        </a:rPr>
+                        <a:t>US$ 326,9 mil</a:t>
+                      </a:r>
+                      <a:endParaRPr lang="en-US" sz="970" dirty="0">
+                        <a:latin typeface="Calibri" charset="0"/>
+                        <a:ea typeface="Calibri" charset="0"/>
+                        <a:cs typeface="Calibri" charset="0"/>
+                      </a:endParaRPr>
+                    </a:p>
+                  </a:txBody>
+                  <a:tcPr marL="91440" marR="91440" marT="45720" marB="45720" anchor="ctr">
+                    <a:lnL w="6350" cap="flat" cmpd="sng" algn="ctr">
+                      <a:solidFill>
+                        <a:srgbClr val="E3E8E9"/>
+                      </a:solidFill>
+                      <a:prstDash val="solid"/>
+                      <a:round/>
+                      <a:headEnd type="none" w="med" len="med"/>
+                      <a:tailEnd type="none" w="med" len="med"/>
+                    </a:lnL>
+                    <a:lnR w="6350" cap="flat" cmpd="sng" algn="ctr">
+                      <a:solidFill>
+                        <a:srgbClr val="E3E8E9"/>
+                      </a:solidFill>
+                      <a:prstDash val="solid"/>
+                      <a:round/>
+                      <a:headEnd type="none" w="med" len="med"/>
+                      <a:tailEnd type="none" w="med" len="med"/>
+                    </a:lnR>
+                    <a:lnT w="6350" cap="flat" cmpd="sng" algn="ctr">
+                      <a:solidFill>
+                        <a:srgbClr val="E3E8E9"/>
+                      </a:solidFill>
+                      <a:prstDash val="solid"/>
+                      <a:round/>
+                      <a:headEnd type="none" w="med" len="med"/>
+                      <a:tailEnd type="none" w="med" len="med"/>
+                    </a:lnT>
+                    <a:lnB w="6350" cap="flat" cmpd="sng" algn="ctr">
+                      <a:solidFill>
+                        <a:srgbClr val="E3E8E9"/>
+                      </a:solidFill>
+                      <a:prstDash val="solid"/>
+                      <a:round/>
+                      <a:headEnd type="none" w="med" len="med"/>
+                      <a:tailEnd type="none" w="med" len="med"/>
+                    </a:lnB>
+                    <a:solidFill>
+                      <a:srgbClr val="F0F4F5"/>
+                    </a:solidFill>
+                  </a:tcPr>
+                </a:tc>
+              </a:tr>
+              <a:tr h="288036">
+                <a:tc>
+                  <a:txBody>
+                    <a:bodyPr/>
+                    <a:lstStyle/>
+                    <a:p>
+                      <a:pPr indent="0" marL="0">
+                        <a:buNone/>
+                      </a:pPr>
+                      <a:r>
+                        <a:rPr lang="en-US" sz="970" dirty="0">
+                          <a:solidFill>
+                            <a:srgbClr val="1C2B33"/>
+                          </a:solidFill>
+                          <a:latin typeface="Calibri" pitchFamily="34" charset="0"/>
+                          <a:ea typeface="Calibri" pitchFamily="34" charset="-122"/>
+                          <a:cs typeface="Calibri" pitchFamily="34" charset="-120"/>
+                        </a:rPr>
+                        <a:t>TAR: Intervenção Fuel Gas Heater</a:t>
+                      </a:r>
+                      <a:endParaRPr lang="en-US" sz="970" dirty="0">
+                        <a:latin typeface="Calibri" charset="0"/>
+                        <a:ea typeface="Calibri" charset="0"/>
+                        <a:cs typeface="Calibri" charset="0"/>
+                      </a:endParaRPr>
+                    </a:p>
+                  </a:txBody>
+                  <a:tcPr marL="91440" marR="91440" marT="45720" marB="45720" anchor="ctr">
+                    <a:lnL w="6350" cap="flat" cmpd="sng" algn="ctr">
+                      <a:solidFill>
+                        <a:srgbClr val="E3E8E9"/>
+                      </a:solidFill>
+                      <a:prstDash val="solid"/>
+                      <a:round/>
+                      <a:headEnd type="none" w="med" len="med"/>
+                      <a:tailEnd type="none" w="med" len="med"/>
+                    </a:lnL>
+                    <a:lnR w="6350" cap="flat" cmpd="sng" algn="ctr">
+                      <a:solidFill>
+                        <a:srgbClr val="E3E8E9"/>
+                      </a:solidFill>
+                      <a:prstDash val="solid"/>
+                      <a:round/>
+                      <a:headEnd type="none" w="med" len="med"/>
+                      <a:tailEnd type="none" w="med" len="med"/>
+                    </a:lnR>
+                    <a:lnT w="6350" cap="flat" cmpd="sng" algn="ctr">
+                      <a:solidFill>
+                        <a:srgbClr val="E3E8E9"/>
+                      </a:solidFill>
+                      <a:prstDash val="solid"/>
+                      <a:round/>
+                      <a:headEnd type="none" w="med" len="med"/>
+                      <a:tailEnd type="none" w="med" len="med"/>
+                    </a:lnT>
+                    <a:lnB w="6350" cap="flat" cmpd="sng" algn="ctr">
+                      <a:solidFill>
+                        <a:srgbClr val="E3E8E9"/>
+                      </a:solidFill>
+                      <a:prstDash val="solid"/>
+                      <a:round/>
+                      <a:headEnd type="none" w="med" len="med"/>
+                      <a:tailEnd type="none" w="med" len="med"/>
+                    </a:lnB>
+                    <a:solidFill>
+                      <a:srgbClr val="FFFFFF"/>
+                    </a:solidFill>
+                  </a:tcPr>
+                </a:tc>
+                <a:tc>
+                  <a:txBody>
+                    <a:bodyPr/>
+                    <a:lstStyle/>
+                    <a:p>
+                      <a:pPr indent="0" marL="0">
+                        <a:buNone/>
+                      </a:pPr>
+                      <a:r>
+                        <a:rPr lang="en-US" sz="930" dirty="0">
+                          <a:solidFill>
+                            <a:srgbClr val="5B6B73"/>
+                          </a:solidFill>
+                          <a:latin typeface="Calibri" pitchFamily="34" charset="0"/>
+                          <a:ea typeface="Calibri" pitchFamily="34" charset="-122"/>
+                          <a:cs typeface="Calibri" pitchFamily="34" charset="-120"/>
+                        </a:rPr>
+                        <a:t>FPSO Peregrino</a:t>
+                      </a:r>
+                      <a:endParaRPr lang="en-US" sz="930" dirty="0">
+                        <a:latin typeface="Calibri" charset="0"/>
+                        <a:ea typeface="Calibri" charset="0"/>
+                        <a:cs typeface="Calibri" charset="0"/>
+                      </a:endParaRPr>
+                    </a:p>
+                  </a:txBody>
+                  <a:tcPr marL="91440" marR="91440" marT="45720" marB="45720" anchor="ctr">
+                    <a:lnL w="6350" cap="flat" cmpd="sng" algn="ctr">
+                      <a:solidFill>
+                        <a:srgbClr val="E3E8E9"/>
+                      </a:solidFill>
+                      <a:prstDash val="solid"/>
+                      <a:round/>
+                      <a:headEnd type="none" w="med" len="med"/>
+                      <a:tailEnd type="none" w="med" len="med"/>
+                    </a:lnL>
+                    <a:lnR w="6350" cap="flat" cmpd="sng" algn="ctr">
+                      <a:solidFill>
+                        <a:srgbClr val="E3E8E9"/>
+                      </a:solidFill>
+                      <a:prstDash val="solid"/>
+                      <a:round/>
+                      <a:headEnd type="none" w="med" len="med"/>
+                      <a:tailEnd type="none" w="med" len="med"/>
+                    </a:lnR>
+                    <a:lnT w="6350" cap="flat" cmpd="sng" algn="ctr">
+                      <a:solidFill>
+                        <a:srgbClr val="E3E8E9"/>
+                      </a:solidFill>
+                      <a:prstDash val="solid"/>
+                      <a:round/>
+                      <a:headEnd type="none" w="med" len="med"/>
+                      <a:tailEnd type="none" w="med" len="med"/>
+                    </a:lnT>
+                    <a:lnB w="6350" cap="flat" cmpd="sng" algn="ctr">
+                      <a:solidFill>
+                        <a:srgbClr val="E3E8E9"/>
+                      </a:solidFill>
+                      <a:prstDash val="solid"/>
+                      <a:round/>
+                      <a:headEnd type="none" w="med" len="med"/>
+                      <a:tailEnd type="none" w="med" len="med"/>
+                    </a:lnB>
+                    <a:solidFill>
+                      <a:srgbClr val="FFFFFF"/>
+                    </a:solidFill>
+                  </a:tcPr>
+                </a:tc>
+                <a:tc>
+                  <a:txBody>
+                    <a:bodyPr/>
+                    <a:lstStyle/>
+                    <a:p>
+                      <a:pPr indent="0" marL="0">
+                        <a:buNone/>
+                      </a:pPr>
+                      <a:r>
+                        <a:rPr lang="en-US" sz="900" dirty="0">
+                          <a:solidFill>
+                            <a:srgbClr val="5B6B73"/>
+                          </a:solidFill>
+                          <a:latin typeface="Calibri" pitchFamily="34" charset="0"/>
+                          <a:ea typeface="Calibri" pitchFamily="34" charset="-122"/>
+                          <a:cs typeface="Calibri" pitchFamily="34" charset="-120"/>
+                        </a:rPr>
+                        <a:t>Desenvolvimento de Produção</a:t>
+                      </a:r>
+                      <a:endParaRPr lang="en-US" sz="900" dirty="0">
+                        <a:latin typeface="Calibri" charset="0"/>
+                        <a:ea typeface="Calibri" charset="0"/>
+                        <a:cs typeface="Calibri" charset="0"/>
+                      </a:endParaRPr>
+                    </a:p>
+                  </a:txBody>
+                  <a:tcPr marL="91440" marR="91440" marT="45720" marB="45720" anchor="ctr">
+                    <a:lnL w="6350" cap="flat" cmpd="sng" algn="ctr">
+                      <a:solidFill>
+                        <a:srgbClr val="E3E8E9"/>
+                      </a:solidFill>
+                      <a:prstDash val="solid"/>
+                      <a:round/>
+                      <a:headEnd type="none" w="med" len="med"/>
+                      <a:tailEnd type="none" w="med" len="med"/>
+                    </a:lnL>
+                    <a:lnR w="6350" cap="flat" cmpd="sng" algn="ctr">
+                      <a:solidFill>
+                        <a:srgbClr val="E3E8E9"/>
+                      </a:solidFill>
+                      <a:prstDash val="solid"/>
+                      <a:round/>
+                      <a:headEnd type="none" w="med" len="med"/>
+                      <a:tailEnd type="none" w="med" len="med"/>
+                    </a:lnR>
+                    <a:lnT w="6350" cap="flat" cmpd="sng" algn="ctr">
+                      <a:solidFill>
+                        <a:srgbClr val="E3E8E9"/>
+                      </a:solidFill>
+                      <a:prstDash val="solid"/>
+                      <a:round/>
+                      <a:headEnd type="none" w="med" len="med"/>
+                      <a:tailEnd type="none" w="med" len="med"/>
+                    </a:lnT>
+                    <a:lnB w="6350" cap="flat" cmpd="sng" algn="ctr">
+                      <a:solidFill>
+                        <a:srgbClr val="E3E8E9"/>
+                      </a:solidFill>
+                      <a:prstDash val="solid"/>
+                      <a:round/>
+                      <a:headEnd type="none" w="med" len="med"/>
+                      <a:tailEnd type="none" w="med" len="med"/>
+                    </a:lnB>
+                    <a:solidFill>
+                      <a:srgbClr val="FFFFFF"/>
+                    </a:solidFill>
+                  </a:tcPr>
+                </a:tc>
+                <a:tc>
+                  <a:txBody>
+                    <a:bodyPr/>
+                    <a:lstStyle/>
+                    <a:p>
+                      <a:pPr algn="ctr" indent="0" marL="0">
+                        <a:buNone/>
+                      </a:pPr>
+                      <a:r>
+                        <a:rPr lang="en-US" sz="900" dirty="0">
+                          <a:solidFill>
+                            <a:srgbClr val="5B6B73"/>
+                          </a:solidFill>
+                          <a:latin typeface="Calibri" pitchFamily="34" charset="0"/>
+                          <a:ea typeface="Calibri" pitchFamily="34" charset="-122"/>
+                          <a:cs typeface="Calibri" pitchFamily="34" charset="-120"/>
+                        </a:rPr>
+                        <a:t>CAPEX</a:t>
+                      </a:r>
+                      <a:endParaRPr lang="en-US" sz="900" dirty="0">
+                        <a:latin typeface="Calibri" charset="0"/>
+                        <a:ea typeface="Calibri" charset="0"/>
+                        <a:cs typeface="Calibri" charset="0"/>
+                      </a:endParaRPr>
+                    </a:p>
+                  </a:txBody>
+                  <a:tcPr marL="91440" marR="91440" marT="45720" marB="45720" anchor="ctr">
+                    <a:lnL w="6350" cap="flat" cmpd="sng" algn="ctr">
+                      <a:solidFill>
+                        <a:srgbClr val="E3E8E9"/>
+                      </a:solidFill>
+                      <a:prstDash val="solid"/>
+                      <a:round/>
+                      <a:headEnd type="none" w="med" len="med"/>
+                      <a:tailEnd type="none" w="med" len="med"/>
+                    </a:lnL>
+                    <a:lnR w="6350" cap="flat" cmpd="sng" algn="ctr">
+                      <a:solidFill>
+                        <a:srgbClr val="E3E8E9"/>
+                      </a:solidFill>
+                      <a:prstDash val="solid"/>
+                      <a:round/>
+                      <a:headEnd type="none" w="med" len="med"/>
+                      <a:tailEnd type="none" w="med" len="med"/>
+                    </a:lnR>
+                    <a:lnT w="6350" cap="flat" cmpd="sng" algn="ctr">
+                      <a:solidFill>
+                        <a:srgbClr val="E3E8E9"/>
+                      </a:solidFill>
+                      <a:prstDash val="solid"/>
+                      <a:round/>
+                      <a:headEnd type="none" w="med" len="med"/>
+                      <a:tailEnd type="none" w="med" len="med"/>
+                    </a:lnT>
+                    <a:lnB w="6350" cap="flat" cmpd="sng" algn="ctr">
+                      <a:solidFill>
+                        <a:srgbClr val="E3E8E9"/>
+                      </a:solidFill>
+                      <a:prstDash val="solid"/>
+                      <a:round/>
+                      <a:headEnd type="none" w="med" len="med"/>
+                      <a:tailEnd type="none" w="med" len="med"/>
+                    </a:lnB>
+                    <a:solidFill>
+                      <a:srgbClr val="FFFFFF"/>
+                    </a:solidFill>
+                  </a:tcPr>
+                </a:tc>
+                <a:tc>
+                  <a:txBody>
+                    <a:bodyPr/>
+                    <a:lstStyle/>
+                    <a:p>
+                      <a:pPr algn="r" indent="0" marL="0">
+                        <a:buNone/>
+                      </a:pPr>
+                      <a:r>
+                        <a:rPr lang="en-US" sz="970" b="1" dirty="0">
+                          <a:solidFill>
+                            <a:srgbClr val="0B2A3D"/>
+                          </a:solidFill>
+                          <a:latin typeface="Calibri" pitchFamily="34" charset="0"/>
+                          <a:ea typeface="Calibri" pitchFamily="34" charset="-122"/>
+                          <a:cs typeface="Calibri" pitchFamily="34" charset="-120"/>
+                        </a:rPr>
+                        <a:t>US$ 311,6 mil</a:t>
+                      </a:r>
+                      <a:endParaRPr lang="en-US" sz="970" dirty="0">
+                        <a:latin typeface="Calibri" charset="0"/>
+                        <a:ea typeface="Calibri" charset="0"/>
+                        <a:cs typeface="Calibri" charset="0"/>
+                      </a:endParaRPr>
+                    </a:p>
+                  </a:txBody>
+                  <a:tcPr marL="91440" marR="91440" marT="45720" marB="45720" anchor="ctr">
+                    <a:lnL w="6350" cap="flat" cmpd="sng" algn="ctr">
+                      <a:solidFill>
+                        <a:srgbClr val="E3E8E9"/>
+                      </a:solidFill>
+                      <a:prstDash val="solid"/>
+                      <a:round/>
+                      <a:headEnd type="none" w="med" len="med"/>
+                      <a:tailEnd type="none" w="med" len="med"/>
+                    </a:lnL>
+                    <a:lnR w="6350" cap="flat" cmpd="sng" algn="ctr">
+                      <a:solidFill>
+                        <a:srgbClr val="E3E8E9"/>
+                      </a:solidFill>
+                      <a:prstDash val="solid"/>
+                      <a:round/>
+                      <a:headEnd type="none" w="med" len="med"/>
+                      <a:tailEnd type="none" w="med" len="med"/>
+                    </a:lnR>
+                    <a:lnT w="6350" cap="flat" cmpd="sng" algn="ctr">
+                      <a:solidFill>
+                        <a:srgbClr val="E3E8E9"/>
+                      </a:solidFill>
+                      <a:prstDash val="solid"/>
+                      <a:round/>
+                      <a:headEnd type="none" w="med" len="med"/>
+                      <a:tailEnd type="none" w="med" len="med"/>
+                    </a:lnT>
+                    <a:lnB w="6350" cap="flat" cmpd="sng" algn="ctr">
+                      <a:solidFill>
+                        <a:srgbClr val="E3E8E9"/>
+                      </a:solidFill>
+                      <a:prstDash val="solid"/>
+                      <a:round/>
+                      <a:headEnd type="none" w="med" len="med"/>
+                      <a:tailEnd type="none" w="med" len="med"/>
+                    </a:lnB>
+                    <a:solidFill>
+                      <a:srgbClr val="FFFFFF"/>
+                    </a:solidFill>
+                  </a:tcPr>
+                </a:tc>
+              </a:tr>
+              <a:tr h="288036">
+                <a:tc>
+                  <a:txBody>
+                    <a:bodyPr/>
+                    <a:lstStyle/>
+                    <a:p>
+                      <a:pPr indent="0" marL="0">
+                        <a:buNone/>
+                      </a:pPr>
+                      <a:r>
+                        <a:rPr lang="en-US" sz="970" dirty="0">
+                          <a:solidFill>
+                            <a:srgbClr val="1C2B33"/>
+                          </a:solidFill>
+                          <a:latin typeface="Calibri" pitchFamily="34" charset="0"/>
+                          <a:ea typeface="Calibri" pitchFamily="34" charset="-122"/>
+                          <a:cs typeface="Calibri" pitchFamily="34" charset="-120"/>
+                        </a:rPr>
+                        <a:t>Novo Laboratório</a:t>
+                      </a:r>
+                      <a:endParaRPr lang="en-US" sz="970" dirty="0">
+                        <a:latin typeface="Calibri" charset="0"/>
+                        <a:ea typeface="Calibri" charset="0"/>
+                        <a:cs typeface="Calibri" charset="0"/>
+                      </a:endParaRPr>
+                    </a:p>
+                  </a:txBody>
+                  <a:tcPr marL="91440" marR="91440" marT="45720" marB="45720" anchor="ctr">
+                    <a:lnL w="6350" cap="flat" cmpd="sng" algn="ctr">
+                      <a:solidFill>
+                        <a:srgbClr val="E3E8E9"/>
+                      </a:solidFill>
+                      <a:prstDash val="solid"/>
+                      <a:round/>
+                      <a:headEnd type="none" w="med" len="med"/>
+                      <a:tailEnd type="none" w="med" len="med"/>
+                    </a:lnL>
+                    <a:lnR w="6350" cap="flat" cmpd="sng" algn="ctr">
+                      <a:solidFill>
+                        <a:srgbClr val="E3E8E9"/>
+                      </a:solidFill>
+                      <a:prstDash val="solid"/>
+                      <a:round/>
+                      <a:headEnd type="none" w="med" len="med"/>
+                      <a:tailEnd type="none" w="med" len="med"/>
+                    </a:lnR>
+                    <a:lnT w="6350" cap="flat" cmpd="sng" algn="ctr">
+                      <a:solidFill>
+                        <a:srgbClr val="E3E8E9"/>
+                      </a:solidFill>
+                      <a:prstDash val="solid"/>
+                      <a:round/>
+                      <a:headEnd type="none" w="med" len="med"/>
+                      <a:tailEnd type="none" w="med" len="med"/>
+                    </a:lnT>
+                    <a:lnB w="6350" cap="flat" cmpd="sng" algn="ctr">
+                      <a:solidFill>
+                        <a:srgbClr val="E3E8E9"/>
+                      </a:solidFill>
+                      <a:prstDash val="solid"/>
+                      <a:round/>
+                      <a:headEnd type="none" w="med" len="med"/>
+                      <a:tailEnd type="none" w="med" len="med"/>
+                    </a:lnB>
+                    <a:solidFill>
+                      <a:srgbClr val="F0F4F5"/>
+                    </a:solidFill>
+                  </a:tcPr>
+                </a:tc>
+                <a:tc>
+                  <a:txBody>
+                    <a:bodyPr/>
+                    <a:lstStyle/>
+                    <a:p>
+                      <a:pPr indent="0" marL="0">
+                        <a:buNone/>
+                      </a:pPr>
+                      <a:r>
+                        <a:rPr lang="en-US" sz="930" dirty="0">
+                          <a:solidFill>
+                            <a:srgbClr val="5B6B73"/>
+                          </a:solidFill>
+                          <a:latin typeface="Calibri" pitchFamily="34" charset="0"/>
+                          <a:ea typeface="Calibri" pitchFamily="34" charset="-122"/>
+                          <a:cs typeface="Calibri" pitchFamily="34" charset="-120"/>
+                        </a:rPr>
+                        <a:t>FPSO Frade</a:t>
+                      </a:r>
+                      <a:endParaRPr lang="en-US" sz="930" dirty="0">
+                        <a:latin typeface="Calibri" charset="0"/>
+                        <a:ea typeface="Calibri" charset="0"/>
+                        <a:cs typeface="Calibri" charset="0"/>
+                      </a:endParaRPr>
+                    </a:p>
+                  </a:txBody>
+                  <a:tcPr marL="91440" marR="91440" marT="45720" marB="45720" anchor="ctr">
+                    <a:lnL w="6350" cap="flat" cmpd="sng" algn="ctr">
+                      <a:solidFill>
+                        <a:srgbClr val="E3E8E9"/>
+                      </a:solidFill>
+                      <a:prstDash val="solid"/>
+                      <a:round/>
+                      <a:headEnd type="none" w="med" len="med"/>
+                      <a:tailEnd type="none" w="med" len="med"/>
+                    </a:lnL>
+                    <a:lnR w="6350" cap="flat" cmpd="sng" algn="ctr">
+                      <a:solidFill>
+                        <a:srgbClr val="E3E8E9"/>
+                      </a:solidFill>
+                      <a:prstDash val="solid"/>
+                      <a:round/>
+                      <a:headEnd type="none" w="med" len="med"/>
+                      <a:tailEnd type="none" w="med" len="med"/>
+                    </a:lnR>
+                    <a:lnT w="6350" cap="flat" cmpd="sng" algn="ctr">
+                      <a:solidFill>
+                        <a:srgbClr val="E3E8E9"/>
+                      </a:solidFill>
+                      <a:prstDash val="solid"/>
+                      <a:round/>
+                      <a:headEnd type="none" w="med" len="med"/>
+                      <a:tailEnd type="none" w="med" len="med"/>
+                    </a:lnT>
+                    <a:lnB w="6350" cap="flat" cmpd="sng" algn="ctr">
+                      <a:solidFill>
+                        <a:srgbClr val="E3E8E9"/>
+                      </a:solidFill>
+                      <a:prstDash val="solid"/>
+                      <a:round/>
+                      <a:headEnd type="none" w="med" len="med"/>
+                      <a:tailEnd type="none" w="med" len="med"/>
+                    </a:lnB>
+                    <a:solidFill>
+                      <a:srgbClr val="F0F4F5"/>
+                    </a:solidFill>
+                  </a:tcPr>
+                </a:tc>
+                <a:tc>
+                  <a:txBody>
+                    <a:bodyPr/>
+                    <a:lstStyle/>
+                    <a:p>
+                      <a:pPr indent="0" marL="0">
+                        <a:buNone/>
+                      </a:pPr>
+                      <a:r>
+                        <a:rPr lang="en-US" sz="900" dirty="0">
+                          <a:solidFill>
+                            <a:srgbClr val="5B6B73"/>
+                          </a:solidFill>
+                          <a:latin typeface="Calibri" pitchFamily="34" charset="0"/>
+                          <a:ea typeface="Calibri" pitchFamily="34" charset="-122"/>
+                          <a:cs typeface="Calibri" pitchFamily="34" charset="-120"/>
+                        </a:rPr>
+                        <a:t>Rotina Operacional</a:t>
+                      </a:r>
+                      <a:endParaRPr lang="en-US" sz="900" dirty="0">
+                        <a:latin typeface="Calibri" charset="0"/>
+                        <a:ea typeface="Calibri" charset="0"/>
+                        <a:cs typeface="Calibri" charset="0"/>
+                      </a:endParaRPr>
+                    </a:p>
+                  </a:txBody>
+                  <a:tcPr marL="91440" marR="91440" marT="45720" marB="45720" anchor="ctr">
+                    <a:lnL w="6350" cap="flat" cmpd="sng" algn="ctr">
+                      <a:solidFill>
+                        <a:srgbClr val="E3E8E9"/>
+                      </a:solidFill>
+                      <a:prstDash val="solid"/>
+                      <a:round/>
+                      <a:headEnd type="none" w="med" len="med"/>
+                      <a:tailEnd type="none" w="med" len="med"/>
+                    </a:lnL>
+                    <a:lnR w="6350" cap="flat" cmpd="sng" algn="ctr">
+                      <a:solidFill>
+                        <a:srgbClr val="E3E8E9"/>
+                      </a:solidFill>
+                      <a:prstDash val="solid"/>
+                      <a:round/>
+                      <a:headEnd type="none" w="med" len="med"/>
+                      <a:tailEnd type="none" w="med" len="med"/>
+                    </a:lnR>
+                    <a:lnT w="6350" cap="flat" cmpd="sng" algn="ctr">
+                      <a:solidFill>
+                        <a:srgbClr val="E3E8E9"/>
+                      </a:solidFill>
+                      <a:prstDash val="solid"/>
+                      <a:round/>
+                      <a:headEnd type="none" w="med" len="med"/>
+                      <a:tailEnd type="none" w="med" len="med"/>
+                    </a:lnT>
+                    <a:lnB w="6350" cap="flat" cmpd="sng" algn="ctr">
+                      <a:solidFill>
+                        <a:srgbClr val="E3E8E9"/>
+                      </a:solidFill>
+                      <a:prstDash val="solid"/>
+                      <a:round/>
+                      <a:headEnd type="none" w="med" len="med"/>
+                      <a:tailEnd type="none" w="med" len="med"/>
+                    </a:lnB>
+                    <a:solidFill>
+                      <a:srgbClr val="F0F4F5"/>
+                    </a:solidFill>
+                  </a:tcPr>
+                </a:tc>
+                <a:tc>
+                  <a:txBody>
+                    <a:bodyPr/>
+                    <a:lstStyle/>
+                    <a:p>
+                      <a:pPr algn="ctr" indent="0" marL="0">
+                        <a:buNone/>
+                      </a:pPr>
+                      <a:r>
+                        <a:rPr lang="en-US" sz="900" dirty="0">
+                          <a:solidFill>
+                            <a:srgbClr val="5B6B73"/>
+                          </a:solidFill>
+                          <a:latin typeface="Calibri" pitchFamily="34" charset="0"/>
+                          <a:ea typeface="Calibri" pitchFamily="34" charset="-122"/>
+                          <a:cs typeface="Calibri" pitchFamily="34" charset="-120"/>
+                        </a:rPr>
+                        <a:t>CAPEX</a:t>
+                      </a:r>
+                      <a:endParaRPr lang="en-US" sz="900" dirty="0">
+                        <a:latin typeface="Calibri" charset="0"/>
+                        <a:ea typeface="Calibri" charset="0"/>
+                        <a:cs typeface="Calibri" charset="0"/>
+                      </a:endParaRPr>
+                    </a:p>
+                  </a:txBody>
+                  <a:tcPr marL="91440" marR="91440" marT="45720" marB="45720" anchor="ctr">
+                    <a:lnL w="6350" cap="flat" cmpd="sng" algn="ctr">
+                      <a:solidFill>
+                        <a:srgbClr val="E3E8E9"/>
+                      </a:solidFill>
+                      <a:prstDash val="solid"/>
+                      <a:round/>
+                      <a:headEnd type="none" w="med" len="med"/>
+                      <a:tailEnd type="none" w="med" len="med"/>
+                    </a:lnL>
+                    <a:lnR w="6350" cap="flat" cmpd="sng" algn="ctr">
+                      <a:solidFill>
+                        <a:srgbClr val="E3E8E9"/>
+                      </a:solidFill>
+                      <a:prstDash val="solid"/>
+                      <a:round/>
+                      <a:headEnd type="none" w="med" len="med"/>
+                      <a:tailEnd type="none" w="med" len="med"/>
+                    </a:lnR>
+                    <a:lnT w="6350" cap="flat" cmpd="sng" algn="ctr">
+                      <a:solidFill>
+                        <a:srgbClr val="E3E8E9"/>
+                      </a:solidFill>
+                      <a:prstDash val="solid"/>
+                      <a:round/>
+                      <a:headEnd type="none" w="med" len="med"/>
+                      <a:tailEnd type="none" w="med" len="med"/>
+                    </a:lnT>
+                    <a:lnB w="6350" cap="flat" cmpd="sng" algn="ctr">
+                      <a:solidFill>
+                        <a:srgbClr val="E3E8E9"/>
+                      </a:solidFill>
+                      <a:prstDash val="solid"/>
+                      <a:round/>
+                      <a:headEnd type="none" w="med" len="med"/>
+                      <a:tailEnd type="none" w="med" len="med"/>
+                    </a:lnB>
+                    <a:solidFill>
+                      <a:srgbClr val="F0F4F5"/>
+                    </a:solidFill>
+                  </a:tcPr>
+                </a:tc>
+                <a:tc>
+                  <a:txBody>
+                    <a:bodyPr/>
+                    <a:lstStyle/>
+                    <a:p>
+                      <a:pPr algn="r" indent="0" marL="0">
+                        <a:buNone/>
+                      </a:pPr>
+                      <a:r>
+                        <a:rPr lang="en-US" sz="970" b="1" dirty="0">
+                          <a:solidFill>
+                            <a:srgbClr val="0B2A3D"/>
+                          </a:solidFill>
+                          <a:latin typeface="Calibri" pitchFamily="34" charset="0"/>
+                          <a:ea typeface="Calibri" pitchFamily="34" charset="-122"/>
+                          <a:cs typeface="Calibri" pitchFamily="34" charset="-120"/>
+                        </a:rPr>
+                        <a:t>US$ 309,4 mil</a:t>
+                      </a:r>
+                      <a:endParaRPr lang="en-US" sz="970" dirty="0">
+                        <a:latin typeface="Calibri" charset="0"/>
+                        <a:ea typeface="Calibri" charset="0"/>
+                        <a:cs typeface="Calibri" charset="0"/>
+                      </a:endParaRPr>
+                    </a:p>
+                  </a:txBody>
+                  <a:tcPr marL="91440" marR="91440" marT="45720" marB="45720" anchor="ctr">
+                    <a:lnL w="6350" cap="flat" cmpd="sng" algn="ctr">
+                      <a:solidFill>
+                        <a:srgbClr val="E3E8E9"/>
+                      </a:solidFill>
+                      <a:prstDash val="solid"/>
+                      <a:round/>
+                      <a:headEnd type="none" w="med" len="med"/>
+                      <a:tailEnd type="none" w="med" len="med"/>
+                    </a:lnL>
+                    <a:lnR w="6350" cap="flat" cmpd="sng" algn="ctr">
+                      <a:solidFill>
+                        <a:srgbClr val="E3E8E9"/>
+                      </a:solidFill>
+                      <a:prstDash val="solid"/>
+                      <a:round/>
+                      <a:headEnd type="none" w="med" len="med"/>
+                      <a:tailEnd type="none" w="med" len="med"/>
+                    </a:lnR>
+                    <a:lnT w="6350" cap="flat" cmpd="sng" algn="ctr">
+                      <a:solidFill>
+                        <a:srgbClr val="E3E8E9"/>
+                      </a:solidFill>
+                      <a:prstDash val="solid"/>
+                      <a:round/>
+                      <a:headEnd type="none" w="med" len="med"/>
+                      <a:tailEnd type="none" w="med" len="med"/>
+                    </a:lnT>
+                    <a:lnB w="6350" cap="flat" cmpd="sng" algn="ctr">
+                      <a:solidFill>
+                        <a:srgbClr val="E3E8E9"/>
+                      </a:solidFill>
+                      <a:prstDash val="solid"/>
+                      <a:round/>
+                      <a:headEnd type="none" w="med" len="med"/>
+                      <a:tailEnd type="none" w="med" len="med"/>
+                    </a:lnB>
+                    <a:solidFill>
+                      <a:srgbClr val="F0F4F5"/>
+                    </a:solidFill>
+                  </a:tcPr>
+                </a:tc>
+              </a:tr>
+              <a:tr h="288036">
+                <a:tc>
+                  <a:txBody>
+                    <a:bodyPr/>
+                    <a:lstStyle/>
+                    <a:p>
+                      <a:pPr indent="0" marL="0">
+                        <a:buNone/>
+                      </a:pPr>
+                      <a:r>
+                        <a:rPr lang="en-US" sz="970" dirty="0">
+                          <a:solidFill>
+                            <a:srgbClr val="1C2B33"/>
+                          </a:solidFill>
+                          <a:latin typeface="Calibri" pitchFamily="34" charset="0"/>
+                          <a:ea typeface="Calibri" pitchFamily="34" charset="-122"/>
+                          <a:cs typeface="Calibri" pitchFamily="34" charset="-120"/>
+                        </a:rPr>
+                        <a:t>Técnico de Medição Offshore</a:t>
+                      </a:r>
+                      <a:endParaRPr lang="en-US" sz="970" dirty="0">
+                        <a:latin typeface="Calibri" charset="0"/>
+                        <a:ea typeface="Calibri" charset="0"/>
+                        <a:cs typeface="Calibri" charset="0"/>
+                      </a:endParaRPr>
+                    </a:p>
+                  </a:txBody>
+                  <a:tcPr marL="91440" marR="91440" marT="45720" marB="45720" anchor="ctr">
+                    <a:lnL w="6350" cap="flat" cmpd="sng" algn="ctr">
+                      <a:solidFill>
+                        <a:srgbClr val="E3E8E9"/>
+                      </a:solidFill>
+                      <a:prstDash val="solid"/>
+                      <a:round/>
+                      <a:headEnd type="none" w="med" len="med"/>
+                      <a:tailEnd type="none" w="med" len="med"/>
+                    </a:lnL>
+                    <a:lnR w="6350" cap="flat" cmpd="sng" algn="ctr">
+                      <a:solidFill>
+                        <a:srgbClr val="E3E8E9"/>
+                      </a:solidFill>
+                      <a:prstDash val="solid"/>
+                      <a:round/>
+                      <a:headEnd type="none" w="med" len="med"/>
+                      <a:tailEnd type="none" w="med" len="med"/>
+                    </a:lnR>
+                    <a:lnT w="6350" cap="flat" cmpd="sng" algn="ctr">
+                      <a:solidFill>
+                        <a:srgbClr val="E3E8E9"/>
+                      </a:solidFill>
+                      <a:prstDash val="solid"/>
+                      <a:round/>
+                      <a:headEnd type="none" w="med" len="med"/>
+                      <a:tailEnd type="none" w="med" len="med"/>
+                    </a:lnT>
+                    <a:lnB w="6350" cap="flat" cmpd="sng" algn="ctr">
+                      <a:solidFill>
+                        <a:srgbClr val="E3E8E9"/>
+                      </a:solidFill>
+                      <a:prstDash val="solid"/>
+                      <a:round/>
+                      <a:headEnd type="none" w="med" len="med"/>
+                      <a:tailEnd type="none" w="med" len="med"/>
+                    </a:lnB>
+                    <a:solidFill>
+                      <a:srgbClr val="FFFFFF"/>
+                    </a:solidFill>
+                  </a:tcPr>
+                </a:tc>
+                <a:tc>
+                  <a:txBody>
+                    <a:bodyPr/>
+                    <a:lstStyle/>
+                    <a:p>
+                      <a:pPr indent="0" marL="0">
+                        <a:buNone/>
+                      </a:pPr>
+                      <a:r>
+                        <a:rPr lang="en-US" sz="930" dirty="0">
+                          <a:solidFill>
+                            <a:srgbClr val="5B6B73"/>
+                          </a:solidFill>
+                          <a:latin typeface="Calibri" pitchFamily="34" charset="0"/>
+                          <a:ea typeface="Calibri" pitchFamily="34" charset="-122"/>
+                          <a:cs typeface="Calibri" pitchFamily="34" charset="-120"/>
+                        </a:rPr>
+                        <a:t>FPSO Peregrino</a:t>
+                      </a:r>
+                      <a:endParaRPr lang="en-US" sz="930" dirty="0">
+                        <a:latin typeface="Calibri" charset="0"/>
+                        <a:ea typeface="Calibri" charset="0"/>
+                        <a:cs typeface="Calibri" charset="0"/>
+                      </a:endParaRPr>
+                    </a:p>
+                  </a:txBody>
+                  <a:tcPr marL="91440" marR="91440" marT="45720" marB="45720" anchor="ctr">
+                    <a:lnL w="6350" cap="flat" cmpd="sng" algn="ctr">
+                      <a:solidFill>
+                        <a:srgbClr val="E3E8E9"/>
+                      </a:solidFill>
+                      <a:prstDash val="solid"/>
+                      <a:round/>
+                      <a:headEnd type="none" w="med" len="med"/>
+                      <a:tailEnd type="none" w="med" len="med"/>
+                    </a:lnL>
+                    <a:lnR w="6350" cap="flat" cmpd="sng" algn="ctr">
+                      <a:solidFill>
+                        <a:srgbClr val="E3E8E9"/>
+                      </a:solidFill>
+                      <a:prstDash val="solid"/>
+                      <a:round/>
+                      <a:headEnd type="none" w="med" len="med"/>
+                      <a:tailEnd type="none" w="med" len="med"/>
+                    </a:lnR>
+                    <a:lnT w="6350" cap="flat" cmpd="sng" algn="ctr">
+                      <a:solidFill>
+                        <a:srgbClr val="E3E8E9"/>
+                      </a:solidFill>
+                      <a:prstDash val="solid"/>
+                      <a:round/>
+                      <a:headEnd type="none" w="med" len="med"/>
+                      <a:tailEnd type="none" w="med" len="med"/>
+                    </a:lnT>
+                    <a:lnB w="6350" cap="flat" cmpd="sng" algn="ctr">
+                      <a:solidFill>
+                        <a:srgbClr val="E3E8E9"/>
+                      </a:solidFill>
+                      <a:prstDash val="solid"/>
+                      <a:round/>
+                      <a:headEnd type="none" w="med" len="med"/>
+                      <a:tailEnd type="none" w="med" len="med"/>
+                    </a:lnB>
+                    <a:solidFill>
+                      <a:srgbClr val="FFFFFF"/>
+                    </a:solidFill>
+                  </a:tcPr>
+                </a:tc>
+                <a:tc>
+                  <a:txBody>
+                    <a:bodyPr/>
+                    <a:lstStyle/>
+                    <a:p>
+                      <a:pPr indent="0" marL="0">
+                        <a:buNone/>
+                      </a:pPr>
+                      <a:r>
+                        <a:rPr lang="en-US" sz="900" dirty="0">
+                          <a:solidFill>
+                            <a:srgbClr val="5B6B73"/>
+                          </a:solidFill>
+                          <a:latin typeface="Calibri" pitchFamily="34" charset="0"/>
+                          <a:ea typeface="Calibri" pitchFamily="34" charset="-122"/>
+                          <a:cs typeface="Calibri" pitchFamily="34" charset="-120"/>
+                        </a:rPr>
+                        <a:t>Integridade e Regulatório</a:t>
+                      </a:r>
+                      <a:endParaRPr lang="en-US" sz="900" dirty="0">
+                        <a:latin typeface="Calibri" charset="0"/>
+                        <a:ea typeface="Calibri" charset="0"/>
+                        <a:cs typeface="Calibri" charset="0"/>
+                      </a:endParaRPr>
+                    </a:p>
+                  </a:txBody>
+                  <a:tcPr marL="91440" marR="91440" marT="45720" marB="45720" anchor="ctr">
+                    <a:lnL w="6350" cap="flat" cmpd="sng" algn="ctr">
+                      <a:solidFill>
+                        <a:srgbClr val="E3E8E9"/>
+                      </a:solidFill>
+                      <a:prstDash val="solid"/>
+                      <a:round/>
+                      <a:headEnd type="none" w="med" len="med"/>
+                      <a:tailEnd type="none" w="med" len="med"/>
+                    </a:lnL>
+                    <a:lnR w="6350" cap="flat" cmpd="sng" algn="ctr">
+                      <a:solidFill>
+                        <a:srgbClr val="E3E8E9"/>
+                      </a:solidFill>
+                      <a:prstDash val="solid"/>
+                      <a:round/>
+                      <a:headEnd type="none" w="med" len="med"/>
+                      <a:tailEnd type="none" w="med" len="med"/>
+                    </a:lnR>
+                    <a:lnT w="6350" cap="flat" cmpd="sng" algn="ctr">
+                      <a:solidFill>
+                        <a:srgbClr val="E3E8E9"/>
+                      </a:solidFill>
+                      <a:prstDash val="solid"/>
+                      <a:round/>
+                      <a:headEnd type="none" w="med" len="med"/>
+                      <a:tailEnd type="none" w="med" len="med"/>
+                    </a:lnT>
+                    <a:lnB w="6350" cap="flat" cmpd="sng" algn="ctr">
+                      <a:solidFill>
+                        <a:srgbClr val="E3E8E9"/>
+                      </a:solidFill>
+                      <a:prstDash val="solid"/>
+                      <a:round/>
+                      <a:headEnd type="none" w="med" len="med"/>
+                      <a:tailEnd type="none" w="med" len="med"/>
+                    </a:lnB>
+                    <a:solidFill>
+                      <a:srgbClr val="FFFFFF"/>
+                    </a:solidFill>
+                  </a:tcPr>
+                </a:tc>
+                <a:tc>
+                  <a:txBody>
+                    <a:bodyPr/>
+                    <a:lstStyle/>
+                    <a:p>
+                      <a:pPr algn="ctr" indent="0" marL="0">
+                        <a:buNone/>
+                      </a:pPr>
+                      <a:r>
+                        <a:rPr lang="en-US" sz="900" dirty="0">
+                          <a:solidFill>
+                            <a:srgbClr val="5B6B73"/>
+                          </a:solidFill>
+                          <a:latin typeface="Calibri" pitchFamily="34" charset="0"/>
+                          <a:ea typeface="Calibri" pitchFamily="34" charset="-122"/>
+                          <a:cs typeface="Calibri" pitchFamily="34" charset="-120"/>
+                        </a:rPr>
+                        <a:t>OPEX</a:t>
+                      </a:r>
+                      <a:endParaRPr lang="en-US" sz="900" dirty="0">
+                        <a:latin typeface="Calibri" charset="0"/>
+                        <a:ea typeface="Calibri" charset="0"/>
+                        <a:cs typeface="Calibri" charset="0"/>
+                      </a:endParaRPr>
+                    </a:p>
+                  </a:txBody>
+                  <a:tcPr marL="91440" marR="91440" marT="45720" marB="45720" anchor="ctr">
+                    <a:lnL w="6350" cap="flat" cmpd="sng" algn="ctr">
+                      <a:solidFill>
+                        <a:srgbClr val="E3E8E9"/>
+                      </a:solidFill>
+                      <a:prstDash val="solid"/>
+                      <a:round/>
+                      <a:headEnd type="none" w="med" len="med"/>
+                      <a:tailEnd type="none" w="med" len="med"/>
+                    </a:lnL>
+                    <a:lnR w="6350" cap="flat" cmpd="sng" algn="ctr">
+                      <a:solidFill>
+                        <a:srgbClr val="E3E8E9"/>
+                      </a:solidFill>
+                      <a:prstDash val="solid"/>
+                      <a:round/>
+                      <a:headEnd type="none" w="med" len="med"/>
+                      <a:tailEnd type="none" w="med" len="med"/>
+                    </a:lnR>
+                    <a:lnT w="6350" cap="flat" cmpd="sng" algn="ctr">
+                      <a:solidFill>
+                        <a:srgbClr val="E3E8E9"/>
+                      </a:solidFill>
+                      <a:prstDash val="solid"/>
+                      <a:round/>
+                      <a:headEnd type="none" w="med" len="med"/>
+                      <a:tailEnd type="none" w="med" len="med"/>
+                    </a:lnT>
+                    <a:lnB w="6350" cap="flat" cmpd="sng" algn="ctr">
+                      <a:solidFill>
+                        <a:srgbClr val="E3E8E9"/>
+                      </a:solidFill>
+                      <a:prstDash val="solid"/>
+                      <a:round/>
+                      <a:headEnd type="none" w="med" len="med"/>
+                      <a:tailEnd type="none" w="med" len="med"/>
+                    </a:lnB>
+                    <a:solidFill>
+                      <a:srgbClr val="FFFFFF"/>
+                    </a:solidFill>
+                  </a:tcPr>
+                </a:tc>
+                <a:tc>
+                  <a:txBody>
+                    <a:bodyPr/>
+                    <a:lstStyle/>
+                    <a:p>
+                      <a:pPr algn="r" indent="0" marL="0">
+                        <a:buNone/>
+                      </a:pPr>
+                      <a:r>
+                        <a:rPr lang="en-US" sz="970" b="1" dirty="0">
+                          <a:solidFill>
+                            <a:srgbClr val="0B2A3D"/>
+                          </a:solidFill>
+                          <a:latin typeface="Calibri" pitchFamily="34" charset="0"/>
+                          <a:ea typeface="Calibri" pitchFamily="34" charset="-122"/>
+                          <a:cs typeface="Calibri" pitchFamily="34" charset="-120"/>
+                        </a:rPr>
+                        <a:t>US$ 297,7 mil</a:t>
+                      </a:r>
+                      <a:endParaRPr lang="en-US" sz="970" dirty="0">
+                        <a:latin typeface="Calibri" charset="0"/>
+                        <a:ea typeface="Calibri" charset="0"/>
+                        <a:cs typeface="Calibri" charset="0"/>
+                      </a:endParaRPr>
+                    </a:p>
+                  </a:txBody>
+                  <a:tcPr marL="91440" marR="91440" marT="45720" marB="45720" anchor="ctr">
+                    <a:lnL w="6350" cap="flat" cmpd="sng" algn="ctr">
+                      <a:solidFill>
+                        <a:srgbClr val="E3E8E9"/>
+                      </a:solidFill>
+                      <a:prstDash val="solid"/>
+                      <a:round/>
+                      <a:headEnd type="none" w="med" len="med"/>
+                      <a:tailEnd type="none" w="med" len="med"/>
+                    </a:lnL>
+                    <a:lnR w="6350" cap="flat" cmpd="sng" algn="ctr">
+                      <a:solidFill>
+                        <a:srgbClr val="E3E8E9"/>
+                      </a:solidFill>
+                      <a:prstDash val="solid"/>
+                      <a:round/>
+                      <a:headEnd type="none" w="med" len="med"/>
+                      <a:tailEnd type="none" w="med" len="med"/>
+                    </a:lnR>
+                    <a:lnT w="6350" cap="flat" cmpd="sng" algn="ctr">
+                      <a:solidFill>
+                        <a:srgbClr val="E3E8E9"/>
+                      </a:solidFill>
+                      <a:prstDash val="solid"/>
+                      <a:round/>
+                      <a:headEnd type="none" w="med" len="med"/>
+                      <a:tailEnd type="none" w="med" len="med"/>
+                    </a:lnT>
+                    <a:lnB w="6350" cap="flat" cmpd="sng" algn="ctr">
+                      <a:solidFill>
+                        <a:srgbClr val="E3E8E9"/>
+                      </a:solidFill>
+                      <a:prstDash val="solid"/>
+                      <a:round/>
+                      <a:headEnd type="none" w="med" len="med"/>
+                      <a:tailEnd type="none" w="med" len="med"/>
+                    </a:lnB>
+                    <a:solidFill>
+                      <a:srgbClr val="FFFFFF"/>
+                    </a:solidFill>
+                  </a:tcPr>
+                </a:tc>
+              </a:tr>
+              <a:tr h="288036">
+                <a:tc>
+                  <a:txBody>
+                    <a:bodyPr/>
+                    <a:lstStyle/>
+                    <a:p>
+                      <a:pPr indent="0" marL="0">
+                        <a:buNone/>
+                      </a:pPr>
+                      <a:r>
+                        <a:rPr lang="en-US" sz="970" dirty="0">
+                          <a:solidFill>
+                            <a:srgbClr val="1C2B33"/>
+                          </a:solidFill>
+                          <a:latin typeface="Calibri" pitchFamily="34" charset="0"/>
+                          <a:ea typeface="Calibri" pitchFamily="34" charset="-122"/>
+                          <a:cs typeface="Calibri" pitchFamily="34" charset="-120"/>
+                        </a:rPr>
+                        <a:t>Campanha de Preservação Main Deck - Pintura</a:t>
+                      </a:r>
+                      <a:endParaRPr lang="en-US" sz="970" dirty="0">
+                        <a:latin typeface="Calibri" charset="0"/>
+                        <a:ea typeface="Calibri" charset="0"/>
+                        <a:cs typeface="Calibri" charset="0"/>
+                      </a:endParaRPr>
+                    </a:p>
+                  </a:txBody>
+                  <a:tcPr marL="91440" marR="91440" marT="45720" marB="45720" anchor="ctr">
+                    <a:lnL w="6350" cap="flat" cmpd="sng" algn="ctr">
+                      <a:solidFill>
+                        <a:srgbClr val="E3E8E9"/>
+                      </a:solidFill>
+                      <a:prstDash val="solid"/>
+                      <a:round/>
+                      <a:headEnd type="none" w="med" len="med"/>
+                      <a:tailEnd type="none" w="med" len="med"/>
+                    </a:lnL>
+                    <a:lnR w="6350" cap="flat" cmpd="sng" algn="ctr">
+                      <a:solidFill>
+                        <a:srgbClr val="E3E8E9"/>
+                      </a:solidFill>
+                      <a:prstDash val="solid"/>
+                      <a:round/>
+                      <a:headEnd type="none" w="med" len="med"/>
+                      <a:tailEnd type="none" w="med" len="med"/>
+                    </a:lnR>
+                    <a:lnT w="6350" cap="flat" cmpd="sng" algn="ctr">
+                      <a:solidFill>
+                        <a:srgbClr val="E3E8E9"/>
+                      </a:solidFill>
+                      <a:prstDash val="solid"/>
+                      <a:round/>
+                      <a:headEnd type="none" w="med" len="med"/>
+                      <a:tailEnd type="none" w="med" len="med"/>
+                    </a:lnT>
+                    <a:lnB w="6350" cap="flat" cmpd="sng" algn="ctr">
+                      <a:solidFill>
+                        <a:srgbClr val="E3E8E9"/>
+                      </a:solidFill>
+                      <a:prstDash val="solid"/>
+                      <a:round/>
+                      <a:headEnd type="none" w="med" len="med"/>
+                      <a:tailEnd type="none" w="med" len="med"/>
+                    </a:lnB>
+                    <a:solidFill>
+                      <a:srgbClr val="F0F4F5"/>
+                    </a:solidFill>
+                  </a:tcPr>
+                </a:tc>
+                <a:tc>
+                  <a:txBody>
+                    <a:bodyPr/>
+                    <a:lstStyle/>
+                    <a:p>
+                      <a:pPr indent="0" marL="0">
+                        <a:buNone/>
+                      </a:pPr>
+                      <a:r>
+                        <a:rPr lang="en-US" sz="930" dirty="0">
+                          <a:solidFill>
+                            <a:srgbClr val="5B6B73"/>
+                          </a:solidFill>
+                          <a:latin typeface="Calibri" pitchFamily="34" charset="0"/>
+                          <a:ea typeface="Calibri" pitchFamily="34" charset="-122"/>
+                          <a:cs typeface="Calibri" pitchFamily="34" charset="-120"/>
+                        </a:rPr>
+                        <a:t>FPSO Frade</a:t>
+                      </a:r>
+                      <a:endParaRPr lang="en-US" sz="930" dirty="0">
+                        <a:latin typeface="Calibri" charset="0"/>
+                        <a:ea typeface="Calibri" charset="0"/>
+                        <a:cs typeface="Calibri" charset="0"/>
+                      </a:endParaRPr>
+                    </a:p>
+                  </a:txBody>
+                  <a:tcPr marL="91440" marR="91440" marT="45720" marB="45720" anchor="ctr">
+                    <a:lnL w="6350" cap="flat" cmpd="sng" algn="ctr">
+                      <a:solidFill>
+                        <a:srgbClr val="E3E8E9"/>
+                      </a:solidFill>
+                      <a:prstDash val="solid"/>
+                      <a:round/>
+                      <a:headEnd type="none" w="med" len="med"/>
+                      <a:tailEnd type="none" w="med" len="med"/>
+                    </a:lnL>
+                    <a:lnR w="6350" cap="flat" cmpd="sng" algn="ctr">
+                      <a:solidFill>
+                        <a:srgbClr val="E3E8E9"/>
+                      </a:solidFill>
+                      <a:prstDash val="solid"/>
+                      <a:round/>
+                      <a:headEnd type="none" w="med" len="med"/>
+                      <a:tailEnd type="none" w="med" len="med"/>
+                    </a:lnR>
+                    <a:lnT w="6350" cap="flat" cmpd="sng" algn="ctr">
+                      <a:solidFill>
+                        <a:srgbClr val="E3E8E9"/>
+                      </a:solidFill>
+                      <a:prstDash val="solid"/>
+                      <a:round/>
+                      <a:headEnd type="none" w="med" len="med"/>
+                      <a:tailEnd type="none" w="med" len="med"/>
+                    </a:lnT>
+                    <a:lnB w="6350" cap="flat" cmpd="sng" algn="ctr">
+                      <a:solidFill>
+                        <a:srgbClr val="E3E8E9"/>
+                      </a:solidFill>
+                      <a:prstDash val="solid"/>
+                      <a:round/>
+                      <a:headEnd type="none" w="med" len="med"/>
+                      <a:tailEnd type="none" w="med" len="med"/>
+                    </a:lnB>
+                    <a:solidFill>
+                      <a:srgbClr val="F0F4F5"/>
+                    </a:solidFill>
+                  </a:tcPr>
+                </a:tc>
+                <a:tc>
+                  <a:txBody>
+                    <a:bodyPr/>
+                    <a:lstStyle/>
+                    <a:p>
+                      <a:pPr indent="0" marL="0">
+                        <a:buNone/>
+                      </a:pPr>
+                      <a:r>
+                        <a:rPr lang="en-US" sz="900" dirty="0">
+                          <a:solidFill>
+                            <a:srgbClr val="5B6B73"/>
+                          </a:solidFill>
+                          <a:latin typeface="Calibri" pitchFamily="34" charset="0"/>
+                          <a:ea typeface="Calibri" pitchFamily="34" charset="-122"/>
+                          <a:cs typeface="Calibri" pitchFamily="34" charset="-120"/>
+                        </a:rPr>
+                        <a:t>Integridade e Regulatório</a:t>
+                      </a:r>
+                      <a:endParaRPr lang="en-US" sz="900" dirty="0">
+                        <a:latin typeface="Calibri" charset="0"/>
+                        <a:ea typeface="Calibri" charset="0"/>
+                        <a:cs typeface="Calibri" charset="0"/>
+                      </a:endParaRPr>
+                    </a:p>
+                  </a:txBody>
+                  <a:tcPr marL="91440" marR="91440" marT="45720" marB="45720" anchor="ctr">
+                    <a:lnL w="6350" cap="flat" cmpd="sng" algn="ctr">
+                      <a:solidFill>
+                        <a:srgbClr val="E3E8E9"/>
+                      </a:solidFill>
+                      <a:prstDash val="solid"/>
+                      <a:round/>
+                      <a:headEnd type="none" w="med" len="med"/>
+                      <a:tailEnd type="none" w="med" len="med"/>
+                    </a:lnL>
+                    <a:lnR w="6350" cap="flat" cmpd="sng" algn="ctr">
+                      <a:solidFill>
+                        <a:srgbClr val="E3E8E9"/>
+                      </a:solidFill>
+                      <a:prstDash val="solid"/>
+                      <a:round/>
+                      <a:headEnd type="none" w="med" len="med"/>
+                      <a:tailEnd type="none" w="med" len="med"/>
+                    </a:lnR>
+                    <a:lnT w="6350" cap="flat" cmpd="sng" algn="ctr">
+                      <a:solidFill>
+                        <a:srgbClr val="E3E8E9"/>
+                      </a:solidFill>
+                      <a:prstDash val="solid"/>
+                      <a:round/>
+                      <a:headEnd type="none" w="med" len="med"/>
+                      <a:tailEnd type="none" w="med" len="med"/>
+                    </a:lnT>
+                    <a:lnB w="6350" cap="flat" cmpd="sng" algn="ctr">
+                      <a:solidFill>
+                        <a:srgbClr val="E3E8E9"/>
+                      </a:solidFill>
+                      <a:prstDash val="solid"/>
+                      <a:round/>
+                      <a:headEnd type="none" w="med" len="med"/>
+                      <a:tailEnd type="none" w="med" len="med"/>
+                    </a:lnB>
+                    <a:solidFill>
+                      <a:srgbClr val="F0F4F5"/>
+                    </a:solidFill>
+                  </a:tcPr>
+                </a:tc>
+                <a:tc>
+                  <a:txBody>
+                    <a:bodyPr/>
+                    <a:lstStyle/>
+                    <a:p>
+                      <a:pPr algn="ctr" indent="0" marL="0">
+                        <a:buNone/>
+                      </a:pPr>
+                      <a:r>
+                        <a:rPr lang="en-US" sz="900" dirty="0">
+                          <a:solidFill>
+                            <a:srgbClr val="5B6B73"/>
+                          </a:solidFill>
+                          <a:latin typeface="Calibri" pitchFamily="34" charset="0"/>
+                          <a:ea typeface="Calibri" pitchFamily="34" charset="-122"/>
+                          <a:cs typeface="Calibri" pitchFamily="34" charset="-120"/>
+                        </a:rPr>
+                        <a:t>OPEX</a:t>
+                      </a:r>
+                      <a:endParaRPr lang="en-US" sz="900" dirty="0">
+                        <a:latin typeface="Calibri" charset="0"/>
+                        <a:ea typeface="Calibri" charset="0"/>
+                        <a:cs typeface="Calibri" charset="0"/>
+                      </a:endParaRPr>
+                    </a:p>
+                  </a:txBody>
+                  <a:tcPr marL="91440" marR="91440" marT="45720" marB="45720" anchor="ctr">
+                    <a:lnL w="6350" cap="flat" cmpd="sng" algn="ctr">
+                      <a:solidFill>
+                        <a:srgbClr val="E3E8E9"/>
+                      </a:solidFill>
+                      <a:prstDash val="solid"/>
+                      <a:round/>
+                      <a:headEnd type="none" w="med" len="med"/>
+                      <a:tailEnd type="none" w="med" len="med"/>
+                    </a:lnL>
+                    <a:lnR w="6350" cap="flat" cmpd="sng" algn="ctr">
+                      <a:solidFill>
+                        <a:srgbClr val="E3E8E9"/>
+                      </a:solidFill>
+                      <a:prstDash val="solid"/>
+                      <a:round/>
+                      <a:headEnd type="none" w="med" len="med"/>
+                      <a:tailEnd type="none" w="med" len="med"/>
+                    </a:lnR>
+                    <a:lnT w="6350" cap="flat" cmpd="sng" algn="ctr">
+                      <a:solidFill>
+                        <a:srgbClr val="E3E8E9"/>
+                      </a:solidFill>
+                      <a:prstDash val="solid"/>
+                      <a:round/>
+                      <a:headEnd type="none" w="med" len="med"/>
+                      <a:tailEnd type="none" w="med" len="med"/>
+                    </a:lnT>
+                    <a:lnB w="6350" cap="flat" cmpd="sng" algn="ctr">
+                      <a:solidFill>
+                        <a:srgbClr val="E3E8E9"/>
+                      </a:solidFill>
+                      <a:prstDash val="solid"/>
+                      <a:round/>
+                      <a:headEnd type="none" w="med" len="med"/>
+                      <a:tailEnd type="none" w="med" len="med"/>
+                    </a:lnB>
+                    <a:solidFill>
+                      <a:srgbClr val="F0F4F5"/>
+                    </a:solidFill>
+                  </a:tcPr>
+                </a:tc>
+                <a:tc>
+                  <a:txBody>
+                    <a:bodyPr/>
+                    <a:lstStyle/>
+                    <a:p>
+                      <a:pPr algn="r" indent="0" marL="0">
+                        <a:buNone/>
+                      </a:pPr>
+                      <a:r>
+                        <a:rPr lang="en-US" sz="970" b="1" dirty="0">
+                          <a:solidFill>
+                            <a:srgbClr val="0B2A3D"/>
+                          </a:solidFill>
+                          <a:latin typeface="Calibri" pitchFamily="34" charset="0"/>
+                          <a:ea typeface="Calibri" pitchFamily="34" charset="-122"/>
+                          <a:cs typeface="Calibri" pitchFamily="34" charset="-120"/>
+                        </a:rPr>
+                        <a:t>US$ 271,5 mil</a:t>
+                      </a:r>
+                      <a:endParaRPr lang="en-US" sz="970" dirty="0">
+                        <a:latin typeface="Calibri" charset="0"/>
+                        <a:ea typeface="Calibri" charset="0"/>
+                        <a:cs typeface="Calibri" charset="0"/>
+                      </a:endParaRPr>
+                    </a:p>
+                  </a:txBody>
+                  <a:tcPr marL="91440" marR="91440" marT="45720" marB="45720" anchor="ctr">
+                    <a:lnL w="6350" cap="flat" cmpd="sng" algn="ctr">
+                      <a:solidFill>
+                        <a:srgbClr val="E3E8E9"/>
+                      </a:solidFill>
+                      <a:prstDash val="solid"/>
+                      <a:round/>
+                      <a:headEnd type="none" w="med" len="med"/>
+                      <a:tailEnd type="none" w="med" len="med"/>
+                    </a:lnL>
+                    <a:lnR w="6350" cap="flat" cmpd="sng" algn="ctr">
+                      <a:solidFill>
+                        <a:srgbClr val="E3E8E9"/>
+                      </a:solidFill>
+                      <a:prstDash val="solid"/>
+                      <a:round/>
+                      <a:headEnd type="none" w="med" len="med"/>
+                      <a:tailEnd type="none" w="med" len="med"/>
+                    </a:lnR>
+                    <a:lnT w="6350" cap="flat" cmpd="sng" algn="ctr">
+                      <a:solidFill>
+                        <a:srgbClr val="E3E8E9"/>
+                      </a:solidFill>
+                      <a:prstDash val="solid"/>
+                      <a:round/>
+                      <a:headEnd type="none" w="med" len="med"/>
+                      <a:tailEnd type="none" w="med" len="med"/>
+                    </a:lnT>
+                    <a:lnB w="6350" cap="flat" cmpd="sng" algn="ctr">
+                      <a:solidFill>
+                        <a:srgbClr val="E3E8E9"/>
+                      </a:solidFill>
+                      <a:prstDash val="solid"/>
+                      <a:round/>
+                      <a:headEnd type="none" w="med" len="med"/>
+                      <a:tailEnd type="none" w="med" len="med"/>
+                    </a:lnB>
+                    <a:solidFill>
+                      <a:srgbClr val="F0F4F5"/>
+                    </a:solidFill>
+                  </a:tcPr>
+                </a:tc>
+              </a:tr>
+              <a:tr h="288036">
+                <a:tc>
+                  <a:txBody>
+                    <a:bodyPr/>
+                    <a:lstStyle/>
+                    <a:p>
+                      <a:pPr indent="0" marL="0">
+                        <a:buNone/>
+                      </a:pPr>
+                      <a:r>
+                        <a:rPr lang="en-US" sz="970" dirty="0">
+                          <a:solidFill>
+                            <a:srgbClr val="1C2B33"/>
+                          </a:solidFill>
+                          <a:latin typeface="Calibri" pitchFamily="34" charset="0"/>
+                          <a:ea typeface="Calibri" pitchFamily="34" charset="-122"/>
+                          <a:cs typeface="Calibri" pitchFamily="34" charset="-120"/>
+                        </a:rPr>
+                        <a:t>Projeto Tubulação Tanque 5C Cot</a:t>
+                      </a:r>
+                      <a:endParaRPr lang="en-US" sz="970" dirty="0">
+                        <a:latin typeface="Calibri" charset="0"/>
+                        <a:ea typeface="Calibri" charset="0"/>
+                        <a:cs typeface="Calibri" charset="0"/>
+                      </a:endParaRPr>
+                    </a:p>
+                  </a:txBody>
+                  <a:tcPr marL="91440" marR="91440" marT="45720" marB="45720" anchor="ctr">
+                    <a:lnL w="6350" cap="flat" cmpd="sng" algn="ctr">
+                      <a:solidFill>
+                        <a:srgbClr val="E3E8E9"/>
+                      </a:solidFill>
+                      <a:prstDash val="solid"/>
+                      <a:round/>
+                      <a:headEnd type="none" w="med" len="med"/>
+                      <a:tailEnd type="none" w="med" len="med"/>
+                    </a:lnL>
+                    <a:lnR w="6350" cap="flat" cmpd="sng" algn="ctr">
+                      <a:solidFill>
+                        <a:srgbClr val="E3E8E9"/>
+                      </a:solidFill>
+                      <a:prstDash val="solid"/>
+                      <a:round/>
+                      <a:headEnd type="none" w="med" len="med"/>
+                      <a:tailEnd type="none" w="med" len="med"/>
+                    </a:lnR>
+                    <a:lnT w="6350" cap="flat" cmpd="sng" algn="ctr">
+                      <a:solidFill>
+                        <a:srgbClr val="E3E8E9"/>
+                      </a:solidFill>
+                      <a:prstDash val="solid"/>
+                      <a:round/>
+                      <a:headEnd type="none" w="med" len="med"/>
+                      <a:tailEnd type="none" w="med" len="med"/>
+                    </a:lnT>
+                    <a:lnB w="6350" cap="flat" cmpd="sng" algn="ctr">
+                      <a:solidFill>
+                        <a:srgbClr val="E3E8E9"/>
+                      </a:solidFill>
+                      <a:prstDash val="solid"/>
+                      <a:round/>
+                      <a:headEnd type="none" w="med" len="med"/>
+                      <a:tailEnd type="none" w="med" len="med"/>
+                    </a:lnB>
+                    <a:solidFill>
+                      <a:srgbClr val="FFFFFF"/>
+                    </a:solidFill>
+                  </a:tcPr>
+                </a:tc>
+                <a:tc>
+                  <a:txBody>
+                    <a:bodyPr/>
+                    <a:lstStyle/>
+                    <a:p>
+                      <a:pPr indent="0" marL="0">
+                        <a:buNone/>
+                      </a:pPr>
+                      <a:r>
+                        <a:rPr lang="en-US" sz="930" dirty="0">
+                          <a:solidFill>
+                            <a:srgbClr val="5B6B73"/>
+                          </a:solidFill>
+                          <a:latin typeface="Calibri" pitchFamily="34" charset="0"/>
+                          <a:ea typeface="Calibri" pitchFamily="34" charset="-122"/>
+                          <a:cs typeface="Calibri" pitchFamily="34" charset="-120"/>
+                        </a:rPr>
+                        <a:t>FPSO Peregrino</a:t>
+                      </a:r>
+                      <a:endParaRPr lang="en-US" sz="930" dirty="0">
+                        <a:latin typeface="Calibri" charset="0"/>
+                        <a:ea typeface="Calibri" charset="0"/>
+                        <a:cs typeface="Calibri" charset="0"/>
+                      </a:endParaRPr>
+                    </a:p>
+                  </a:txBody>
+                  <a:tcPr marL="91440" marR="91440" marT="45720" marB="45720" anchor="ctr">
+                    <a:lnL w="6350" cap="flat" cmpd="sng" algn="ctr">
+                      <a:solidFill>
+                        <a:srgbClr val="E3E8E9"/>
+                      </a:solidFill>
+                      <a:prstDash val="solid"/>
+                      <a:round/>
+                      <a:headEnd type="none" w="med" len="med"/>
+                      <a:tailEnd type="none" w="med" len="med"/>
+                    </a:lnL>
+                    <a:lnR w="6350" cap="flat" cmpd="sng" algn="ctr">
+                      <a:solidFill>
+                        <a:srgbClr val="E3E8E9"/>
+                      </a:solidFill>
+                      <a:prstDash val="solid"/>
+                      <a:round/>
+                      <a:headEnd type="none" w="med" len="med"/>
+                      <a:tailEnd type="none" w="med" len="med"/>
+                    </a:lnR>
+                    <a:lnT w="6350" cap="flat" cmpd="sng" algn="ctr">
+                      <a:solidFill>
+                        <a:srgbClr val="E3E8E9"/>
+                      </a:solidFill>
+                      <a:prstDash val="solid"/>
+                      <a:round/>
+                      <a:headEnd type="none" w="med" len="med"/>
+                      <a:tailEnd type="none" w="med" len="med"/>
+                    </a:lnT>
+                    <a:lnB w="6350" cap="flat" cmpd="sng" algn="ctr">
+                      <a:solidFill>
+                        <a:srgbClr val="E3E8E9"/>
+                      </a:solidFill>
+                      <a:prstDash val="solid"/>
+                      <a:round/>
+                      <a:headEnd type="none" w="med" len="med"/>
+                      <a:tailEnd type="none" w="med" len="med"/>
+                    </a:lnB>
+                    <a:solidFill>
+                      <a:srgbClr val="FFFFFF"/>
+                    </a:solidFill>
+                  </a:tcPr>
+                </a:tc>
+                <a:tc>
+                  <a:txBody>
+                    <a:bodyPr/>
+                    <a:lstStyle/>
+                    <a:p>
+                      <a:pPr indent="0" marL="0">
+                        <a:buNone/>
+                      </a:pPr>
+                      <a:r>
+                        <a:rPr lang="en-US" sz="900" dirty="0">
+                          <a:solidFill>
+                            <a:srgbClr val="5B6B73"/>
+                          </a:solidFill>
+                          <a:latin typeface="Calibri" pitchFamily="34" charset="0"/>
+                          <a:ea typeface="Calibri" pitchFamily="34" charset="-122"/>
+                          <a:cs typeface="Calibri" pitchFamily="34" charset="-120"/>
+                        </a:rPr>
+                        <a:t>Eficiência de Produção</a:t>
+                      </a:r>
+                      <a:endParaRPr lang="en-US" sz="900" dirty="0">
+                        <a:latin typeface="Calibri" charset="0"/>
+                        <a:ea typeface="Calibri" charset="0"/>
+                        <a:cs typeface="Calibri" charset="0"/>
+                      </a:endParaRPr>
+                    </a:p>
+                  </a:txBody>
+                  <a:tcPr marL="91440" marR="91440" marT="45720" marB="45720" anchor="ctr">
+                    <a:lnL w="6350" cap="flat" cmpd="sng" algn="ctr">
+                      <a:solidFill>
+                        <a:srgbClr val="E3E8E9"/>
+                      </a:solidFill>
+                      <a:prstDash val="solid"/>
+                      <a:round/>
+                      <a:headEnd type="none" w="med" len="med"/>
+                      <a:tailEnd type="none" w="med" len="med"/>
+                    </a:lnL>
+                    <a:lnR w="6350" cap="flat" cmpd="sng" algn="ctr">
+                      <a:solidFill>
+                        <a:srgbClr val="E3E8E9"/>
+                      </a:solidFill>
+                      <a:prstDash val="solid"/>
+                      <a:round/>
+                      <a:headEnd type="none" w="med" len="med"/>
+                      <a:tailEnd type="none" w="med" len="med"/>
+                    </a:lnR>
+                    <a:lnT w="6350" cap="flat" cmpd="sng" algn="ctr">
+                      <a:solidFill>
+                        <a:srgbClr val="E3E8E9"/>
+                      </a:solidFill>
+                      <a:prstDash val="solid"/>
+                      <a:round/>
+                      <a:headEnd type="none" w="med" len="med"/>
+                      <a:tailEnd type="none" w="med" len="med"/>
+                    </a:lnT>
+                    <a:lnB w="6350" cap="flat" cmpd="sng" algn="ctr">
+                      <a:solidFill>
+                        <a:srgbClr val="E3E8E9"/>
+                      </a:solidFill>
+                      <a:prstDash val="solid"/>
+                      <a:round/>
+                      <a:headEnd type="none" w="med" len="med"/>
+                      <a:tailEnd type="none" w="med" len="med"/>
+                    </a:lnB>
+                    <a:solidFill>
+                      <a:srgbClr val="FFFFFF"/>
+                    </a:solidFill>
+                  </a:tcPr>
+                </a:tc>
+                <a:tc>
+                  <a:txBody>
+                    <a:bodyPr/>
+                    <a:lstStyle/>
+                    <a:p>
+                      <a:pPr algn="ctr" indent="0" marL="0">
+                        <a:buNone/>
+                      </a:pPr>
+                      <a:r>
+                        <a:rPr lang="en-US" sz="900" dirty="0">
+                          <a:solidFill>
+                            <a:srgbClr val="5B6B73"/>
+                          </a:solidFill>
+                          <a:latin typeface="Calibri" pitchFamily="34" charset="0"/>
+                          <a:ea typeface="Calibri" pitchFamily="34" charset="-122"/>
+                          <a:cs typeface="Calibri" pitchFamily="34" charset="-120"/>
+                        </a:rPr>
+                        <a:t>CAPEX</a:t>
+                      </a:r>
+                      <a:endParaRPr lang="en-US" sz="900" dirty="0">
+                        <a:latin typeface="Calibri" charset="0"/>
+                        <a:ea typeface="Calibri" charset="0"/>
+                        <a:cs typeface="Calibri" charset="0"/>
+                      </a:endParaRPr>
+                    </a:p>
+                  </a:txBody>
+                  <a:tcPr marL="91440" marR="91440" marT="45720" marB="45720" anchor="ctr">
+                    <a:lnL w="6350" cap="flat" cmpd="sng" algn="ctr">
+                      <a:solidFill>
+                        <a:srgbClr val="E3E8E9"/>
+                      </a:solidFill>
+                      <a:prstDash val="solid"/>
+                      <a:round/>
+                      <a:headEnd type="none" w="med" len="med"/>
+                      <a:tailEnd type="none" w="med" len="med"/>
+                    </a:lnL>
+                    <a:lnR w="6350" cap="flat" cmpd="sng" algn="ctr">
+                      <a:solidFill>
+                        <a:srgbClr val="E3E8E9"/>
+                      </a:solidFill>
+                      <a:prstDash val="solid"/>
+                      <a:round/>
+                      <a:headEnd type="none" w="med" len="med"/>
+                      <a:tailEnd type="none" w="med" len="med"/>
+                    </a:lnR>
+                    <a:lnT w="6350" cap="flat" cmpd="sng" algn="ctr">
+                      <a:solidFill>
+                        <a:srgbClr val="E3E8E9"/>
+                      </a:solidFill>
+                      <a:prstDash val="solid"/>
+                      <a:round/>
+                      <a:headEnd type="none" w="med" len="med"/>
+                      <a:tailEnd type="none" w="med" len="med"/>
+                    </a:lnT>
+                    <a:lnB w="6350" cap="flat" cmpd="sng" algn="ctr">
+                      <a:solidFill>
+                        <a:srgbClr val="E3E8E9"/>
+                      </a:solidFill>
+                      <a:prstDash val="solid"/>
+                      <a:round/>
+                      <a:headEnd type="none" w="med" len="med"/>
+                      <a:tailEnd type="none" w="med" len="med"/>
+                    </a:lnB>
+                    <a:solidFill>
+                      <a:srgbClr val="FFFFFF"/>
+                    </a:solidFill>
+                  </a:tcPr>
+                </a:tc>
+                <a:tc>
+                  <a:txBody>
+                    <a:bodyPr/>
+                    <a:lstStyle/>
+                    <a:p>
+                      <a:pPr algn="r" indent="0" marL="0">
+                        <a:buNone/>
+                      </a:pPr>
+                      <a:r>
+                        <a:rPr lang="en-US" sz="970" b="1" dirty="0">
+                          <a:solidFill>
+                            <a:srgbClr val="0B2A3D"/>
+                          </a:solidFill>
+                          <a:latin typeface="Calibri" pitchFamily="34" charset="0"/>
+                          <a:ea typeface="Calibri" pitchFamily="34" charset="-122"/>
+                          <a:cs typeface="Calibri" pitchFamily="34" charset="-120"/>
+                        </a:rPr>
+                        <a:t>US$ 267,8 mil</a:t>
+                      </a:r>
+                      <a:endParaRPr lang="en-US" sz="970" dirty="0">
+                        <a:latin typeface="Calibri" charset="0"/>
+                        <a:ea typeface="Calibri" charset="0"/>
+                        <a:cs typeface="Calibri" charset="0"/>
+                      </a:endParaRPr>
+                    </a:p>
+                  </a:txBody>
+                  <a:tcPr marL="91440" marR="91440" marT="45720" marB="45720" anchor="ctr">
+                    <a:lnL w="6350" cap="flat" cmpd="sng" algn="ctr">
+                      <a:solidFill>
+                        <a:srgbClr val="E3E8E9"/>
+                      </a:solidFill>
+                      <a:prstDash val="solid"/>
+                      <a:round/>
+                      <a:headEnd type="none" w="med" len="med"/>
+                      <a:tailEnd type="none" w="med" len="med"/>
+                    </a:lnL>
+                    <a:lnR w="6350" cap="flat" cmpd="sng" algn="ctr">
+                      <a:solidFill>
+                        <a:srgbClr val="E3E8E9"/>
+                      </a:solidFill>
+                      <a:prstDash val="solid"/>
+                      <a:round/>
+                      <a:headEnd type="none" w="med" len="med"/>
+                      <a:tailEnd type="none" w="med" len="med"/>
+                    </a:lnR>
+                    <a:lnT w="6350" cap="flat" cmpd="sng" algn="ctr">
+                      <a:solidFill>
+                        <a:srgbClr val="E3E8E9"/>
+                      </a:solidFill>
+                      <a:prstDash val="solid"/>
+                      <a:round/>
+                      <a:headEnd type="none" w="med" len="med"/>
+                      <a:tailEnd type="none" w="med" len="med"/>
+                    </a:lnT>
+                    <a:lnB w="6350" cap="flat" cmpd="sng" algn="ctr">
+                      <a:solidFill>
+                        <a:srgbClr val="E3E8E9"/>
+                      </a:solidFill>
+                      <a:prstDash val="solid"/>
+                      <a:round/>
+                      <a:headEnd type="none" w="med" len="med"/>
+                      <a:tailEnd type="none" w="med" len="med"/>
+                    </a:lnB>
+                    <a:solidFill>
+                      <a:srgbClr val="FFFFFF"/>
+                    </a:solidFill>
+                  </a:tcPr>
+                </a:tc>
+              </a:tr>
+              <a:tr h="288036">
+                <a:tc>
+                  <a:txBody>
+                    <a:bodyPr/>
+                    <a:lstStyle/>
+                    <a:p>
+                      <a:pPr indent="0" marL="0">
+                        <a:buNone/>
+                      </a:pPr>
+                      <a:r>
+                        <a:rPr lang="en-US" sz="970" dirty="0">
+                          <a:solidFill>
+                            <a:srgbClr val="1C2B33"/>
+                          </a:solidFill>
+                          <a:latin typeface="Calibri" pitchFamily="34" charset="0"/>
+                          <a:ea typeface="Calibri" pitchFamily="34" charset="-122"/>
+                          <a:cs typeface="Calibri" pitchFamily="34" charset="-120"/>
+                        </a:rPr>
+                        <a:t>RO</a:t>
+                      </a:r>
+                      <a:endParaRPr lang="en-US" sz="970" dirty="0">
+                        <a:latin typeface="Calibri" charset="0"/>
+                        <a:ea typeface="Calibri" charset="0"/>
+                        <a:cs typeface="Calibri" charset="0"/>
+                      </a:endParaRPr>
+                    </a:p>
+                  </a:txBody>
+                  <a:tcPr marL="91440" marR="91440" marT="45720" marB="45720" anchor="ctr">
+                    <a:lnL w="6350" cap="flat" cmpd="sng" algn="ctr">
+                      <a:solidFill>
+                        <a:srgbClr val="E3E8E9"/>
+                      </a:solidFill>
+                      <a:prstDash val="solid"/>
+                      <a:round/>
+                      <a:headEnd type="none" w="med" len="med"/>
+                      <a:tailEnd type="none" w="med" len="med"/>
+                    </a:lnL>
+                    <a:lnR w="6350" cap="flat" cmpd="sng" algn="ctr">
+                      <a:solidFill>
+                        <a:srgbClr val="E3E8E9"/>
+                      </a:solidFill>
+                      <a:prstDash val="solid"/>
+                      <a:round/>
+                      <a:headEnd type="none" w="med" len="med"/>
+                      <a:tailEnd type="none" w="med" len="med"/>
+                    </a:lnR>
+                    <a:lnT w="6350" cap="flat" cmpd="sng" algn="ctr">
+                      <a:solidFill>
+                        <a:srgbClr val="E3E8E9"/>
+                      </a:solidFill>
+                      <a:prstDash val="solid"/>
+                      <a:round/>
+                      <a:headEnd type="none" w="med" len="med"/>
+                      <a:tailEnd type="none" w="med" len="med"/>
+                    </a:lnT>
+                    <a:lnB w="6350" cap="flat" cmpd="sng" algn="ctr">
+                      <a:solidFill>
+                        <a:srgbClr val="E3E8E9"/>
+                      </a:solidFill>
+                      <a:prstDash val="solid"/>
+                      <a:round/>
+                      <a:headEnd type="none" w="med" len="med"/>
+                      <a:tailEnd type="none" w="med" len="med"/>
+                    </a:lnB>
+                    <a:solidFill>
+                      <a:srgbClr val="F0F4F5"/>
+                    </a:solidFill>
+                  </a:tcPr>
+                </a:tc>
+                <a:tc>
+                  <a:txBody>
+                    <a:bodyPr/>
+                    <a:lstStyle/>
+                    <a:p>
+                      <a:pPr indent="0" marL="0">
+                        <a:buNone/>
+                      </a:pPr>
+                      <a:r>
+                        <a:rPr lang="en-US" sz="930" dirty="0">
+                          <a:solidFill>
+                            <a:srgbClr val="5B6B73"/>
+                          </a:solidFill>
+                          <a:latin typeface="Calibri" pitchFamily="34" charset="0"/>
+                          <a:ea typeface="Calibri" pitchFamily="34" charset="-122"/>
+                          <a:cs typeface="Calibri" pitchFamily="34" charset="-120"/>
+                        </a:rPr>
+                        <a:t>FPSO Frade</a:t>
+                      </a:r>
+                      <a:endParaRPr lang="en-US" sz="930" dirty="0">
+                        <a:latin typeface="Calibri" charset="0"/>
+                        <a:ea typeface="Calibri" charset="0"/>
+                        <a:cs typeface="Calibri" charset="0"/>
+                      </a:endParaRPr>
+                    </a:p>
+                  </a:txBody>
+                  <a:tcPr marL="91440" marR="91440" marT="45720" marB="45720" anchor="ctr">
+                    <a:lnL w="6350" cap="flat" cmpd="sng" algn="ctr">
+                      <a:solidFill>
+                        <a:srgbClr val="E3E8E9"/>
+                      </a:solidFill>
+                      <a:prstDash val="solid"/>
+                      <a:round/>
+                      <a:headEnd type="none" w="med" len="med"/>
+                      <a:tailEnd type="none" w="med" len="med"/>
+                    </a:lnL>
+                    <a:lnR w="6350" cap="flat" cmpd="sng" algn="ctr">
+                      <a:solidFill>
+                        <a:srgbClr val="E3E8E9"/>
+                      </a:solidFill>
+                      <a:prstDash val="solid"/>
+                      <a:round/>
+                      <a:headEnd type="none" w="med" len="med"/>
+                      <a:tailEnd type="none" w="med" len="med"/>
+                    </a:lnR>
+                    <a:lnT w="6350" cap="flat" cmpd="sng" algn="ctr">
+                      <a:solidFill>
+                        <a:srgbClr val="E3E8E9"/>
+                      </a:solidFill>
+                      <a:prstDash val="solid"/>
+                      <a:round/>
+                      <a:headEnd type="none" w="med" len="med"/>
+                      <a:tailEnd type="none" w="med" len="med"/>
+                    </a:lnT>
+                    <a:lnB w="6350" cap="flat" cmpd="sng" algn="ctr">
+                      <a:solidFill>
+                        <a:srgbClr val="E3E8E9"/>
+                      </a:solidFill>
+                      <a:prstDash val="solid"/>
+                      <a:round/>
+                      <a:headEnd type="none" w="med" len="med"/>
+                      <a:tailEnd type="none" w="med" len="med"/>
+                    </a:lnB>
+                    <a:solidFill>
+                      <a:srgbClr val="F0F4F5"/>
+                    </a:solidFill>
+                  </a:tcPr>
+                </a:tc>
+                <a:tc>
+                  <a:txBody>
+                    <a:bodyPr/>
+                    <a:lstStyle/>
+                    <a:p>
+                      <a:pPr indent="0" marL="0">
+                        <a:buNone/>
+                      </a:pPr>
+                      <a:r>
+                        <a:rPr lang="en-US" sz="900" dirty="0">
+                          <a:solidFill>
+                            <a:srgbClr val="5B6B73"/>
+                          </a:solidFill>
+                          <a:latin typeface="Calibri" pitchFamily="34" charset="0"/>
+                          <a:ea typeface="Calibri" pitchFamily="34" charset="-122"/>
+                          <a:cs typeface="Calibri" pitchFamily="34" charset="-120"/>
+                        </a:rPr>
+                        <a:t>Bem Estar/Segurança</a:t>
+                      </a:r>
+                      <a:endParaRPr lang="en-US" sz="900" dirty="0">
+                        <a:latin typeface="Calibri" charset="0"/>
+                        <a:ea typeface="Calibri" charset="0"/>
+                        <a:cs typeface="Calibri" charset="0"/>
+                      </a:endParaRPr>
+                    </a:p>
+                  </a:txBody>
+                  <a:tcPr marL="91440" marR="91440" marT="45720" marB="45720" anchor="ctr">
+                    <a:lnL w="6350" cap="flat" cmpd="sng" algn="ctr">
+                      <a:solidFill>
+                        <a:srgbClr val="E3E8E9"/>
+                      </a:solidFill>
+                      <a:prstDash val="solid"/>
+                      <a:round/>
+                      <a:headEnd type="none" w="med" len="med"/>
+                      <a:tailEnd type="none" w="med" len="med"/>
+                    </a:lnL>
+                    <a:lnR w="6350" cap="flat" cmpd="sng" algn="ctr">
+                      <a:solidFill>
+                        <a:srgbClr val="E3E8E9"/>
+                      </a:solidFill>
+                      <a:prstDash val="solid"/>
+                      <a:round/>
+                      <a:headEnd type="none" w="med" len="med"/>
+                      <a:tailEnd type="none" w="med" len="med"/>
+                    </a:lnR>
+                    <a:lnT w="6350" cap="flat" cmpd="sng" algn="ctr">
+                      <a:solidFill>
+                        <a:srgbClr val="E3E8E9"/>
+                      </a:solidFill>
+                      <a:prstDash val="solid"/>
+                      <a:round/>
+                      <a:headEnd type="none" w="med" len="med"/>
+                      <a:tailEnd type="none" w="med" len="med"/>
+                    </a:lnT>
+                    <a:lnB w="6350" cap="flat" cmpd="sng" algn="ctr">
+                      <a:solidFill>
+                        <a:srgbClr val="E3E8E9"/>
+                      </a:solidFill>
+                      <a:prstDash val="solid"/>
+                      <a:round/>
+                      <a:headEnd type="none" w="med" len="med"/>
+                      <a:tailEnd type="none" w="med" len="med"/>
+                    </a:lnB>
+                    <a:solidFill>
+                      <a:srgbClr val="F0F4F5"/>
+                    </a:solidFill>
+                  </a:tcPr>
+                </a:tc>
+                <a:tc>
+                  <a:txBody>
+                    <a:bodyPr/>
+                    <a:lstStyle/>
+                    <a:p>
+                      <a:pPr algn="ctr" indent="0" marL="0">
+                        <a:buNone/>
+                      </a:pPr>
+                      <a:r>
+                        <a:rPr lang="en-US" sz="900" dirty="0">
+                          <a:solidFill>
+                            <a:srgbClr val="5B6B73"/>
+                          </a:solidFill>
+                          <a:latin typeface="Calibri" pitchFamily="34" charset="0"/>
+                          <a:ea typeface="Calibri" pitchFamily="34" charset="-122"/>
+                          <a:cs typeface="Calibri" pitchFamily="34" charset="-120"/>
+                        </a:rPr>
+                        <a:t>CAPEX</a:t>
+                      </a:r>
+                      <a:endParaRPr lang="en-US" sz="900" dirty="0">
+                        <a:latin typeface="Calibri" charset="0"/>
+                        <a:ea typeface="Calibri" charset="0"/>
+                        <a:cs typeface="Calibri" charset="0"/>
+                      </a:endParaRPr>
+                    </a:p>
+                  </a:txBody>
+                  <a:tcPr marL="91440" marR="91440" marT="45720" marB="45720" anchor="ctr">
+                    <a:lnL w="6350" cap="flat" cmpd="sng" algn="ctr">
+                      <a:solidFill>
+                        <a:srgbClr val="E3E8E9"/>
+                      </a:solidFill>
+                      <a:prstDash val="solid"/>
+                      <a:round/>
+                      <a:headEnd type="none" w="med" len="med"/>
+                      <a:tailEnd type="none" w="med" len="med"/>
+                    </a:lnL>
+                    <a:lnR w="6350" cap="flat" cmpd="sng" algn="ctr">
+                      <a:solidFill>
+                        <a:srgbClr val="E3E8E9"/>
+                      </a:solidFill>
+                      <a:prstDash val="solid"/>
+                      <a:round/>
+                      <a:headEnd type="none" w="med" len="med"/>
+                      <a:tailEnd type="none" w="med" len="med"/>
+                    </a:lnR>
+                    <a:lnT w="6350" cap="flat" cmpd="sng" algn="ctr">
+                      <a:solidFill>
+                        <a:srgbClr val="E3E8E9"/>
+                      </a:solidFill>
+                      <a:prstDash val="solid"/>
+                      <a:round/>
+                      <a:headEnd type="none" w="med" len="med"/>
+                      <a:tailEnd type="none" w="med" len="med"/>
+                    </a:lnT>
+                    <a:lnB w="6350" cap="flat" cmpd="sng" algn="ctr">
+                      <a:solidFill>
+                        <a:srgbClr val="E3E8E9"/>
+                      </a:solidFill>
+                      <a:prstDash val="solid"/>
+                      <a:round/>
+                      <a:headEnd type="none" w="med" len="med"/>
+                      <a:tailEnd type="none" w="med" len="med"/>
+                    </a:lnB>
+                    <a:solidFill>
+                      <a:srgbClr val="F0F4F5"/>
+                    </a:solidFill>
+                  </a:tcPr>
+                </a:tc>
+                <a:tc>
+                  <a:txBody>
+                    <a:bodyPr/>
+                    <a:lstStyle/>
+                    <a:p>
+                      <a:pPr algn="r" indent="0" marL="0">
+                        <a:buNone/>
+                      </a:pPr>
+                      <a:r>
+                        <a:rPr lang="en-US" sz="970" b="1" dirty="0">
+                          <a:solidFill>
+                            <a:srgbClr val="0B2A3D"/>
+                          </a:solidFill>
+                          <a:latin typeface="Calibri" pitchFamily="34" charset="0"/>
+                          <a:ea typeface="Calibri" pitchFamily="34" charset="-122"/>
+                          <a:cs typeface="Calibri" pitchFamily="34" charset="-120"/>
+                        </a:rPr>
+                        <a:t>US$ 267,0 mil</a:t>
+                      </a:r>
+                      <a:endParaRPr lang="en-US" sz="970" dirty="0">
+                        <a:latin typeface="Calibri" charset="0"/>
+                        <a:ea typeface="Calibri" charset="0"/>
+                        <a:cs typeface="Calibri" charset="0"/>
+                      </a:endParaRPr>
+                    </a:p>
+                  </a:txBody>
+                  <a:tcPr marL="91440" marR="91440" marT="45720" marB="45720" anchor="ctr">
+                    <a:lnL w="6350" cap="flat" cmpd="sng" algn="ctr">
+                      <a:solidFill>
+                        <a:srgbClr val="E3E8E9"/>
+                      </a:solidFill>
+                      <a:prstDash val="solid"/>
+                      <a:round/>
+                      <a:headEnd type="none" w="med" len="med"/>
+                      <a:tailEnd type="none" w="med" len="med"/>
+                    </a:lnL>
+                    <a:lnR w="6350" cap="flat" cmpd="sng" algn="ctr">
+                      <a:solidFill>
+                        <a:srgbClr val="E3E8E9"/>
+                      </a:solidFill>
+                      <a:prstDash val="solid"/>
+                      <a:round/>
+                      <a:headEnd type="none" w="med" len="med"/>
+                      <a:tailEnd type="none" w="med" len="med"/>
+                    </a:lnR>
+                    <a:lnT w="6350" cap="flat" cmpd="sng" algn="ctr">
+                      <a:solidFill>
+                        <a:srgbClr val="E3E8E9"/>
+                      </a:solidFill>
+                      <a:prstDash val="solid"/>
+                      <a:round/>
+                      <a:headEnd type="none" w="med" len="med"/>
+                      <a:tailEnd type="none" w="med" len="med"/>
+                    </a:lnT>
+                    <a:lnB w="6350" cap="flat" cmpd="sng" algn="ctr">
+                      <a:solidFill>
+                        <a:srgbClr val="E3E8E9"/>
+                      </a:solidFill>
+                      <a:prstDash val="solid"/>
+                      <a:round/>
+                      <a:headEnd type="none" w="med" len="med"/>
+                      <a:tailEnd type="none" w="med" len="med"/>
+                    </a:lnB>
+                    <a:solidFill>
+                      <a:srgbClr val="F0F4F5"/>
+                    </a:solidFill>
+                  </a:tcPr>
+                </a:tc>
+              </a:tr>
+              <a:tr h="288036">
+                <a:tc>
+                  <a:txBody>
+                    <a:bodyPr/>
+                    <a:lstStyle/>
+                    <a:p>
+                      <a:pPr indent="0" marL="0">
+                        <a:buNone/>
+                      </a:pPr>
+                      <a:r>
+                        <a:rPr lang="en-US" sz="970" dirty="0">
+                          <a:solidFill>
+                            <a:srgbClr val="1C2B33"/>
+                          </a:solidFill>
+                          <a:latin typeface="Calibri" pitchFamily="34" charset="0"/>
+                          <a:ea typeface="Calibri" pitchFamily="34" charset="-122"/>
+                          <a:cs typeface="Calibri" pitchFamily="34" charset="-120"/>
+                        </a:rPr>
+                        <a:t>Flowline Wahoo</a:t>
+                      </a:r>
+                      <a:endParaRPr lang="en-US" sz="970" dirty="0">
+                        <a:latin typeface="Calibri" charset="0"/>
+                        <a:ea typeface="Calibri" charset="0"/>
+                        <a:cs typeface="Calibri" charset="0"/>
+                      </a:endParaRPr>
+                    </a:p>
+                  </a:txBody>
+                  <a:tcPr marL="91440" marR="91440" marT="45720" marB="45720" anchor="ctr">
+                    <a:lnL w="6350" cap="flat" cmpd="sng" algn="ctr">
+                      <a:solidFill>
+                        <a:srgbClr val="E3E8E9"/>
+                      </a:solidFill>
+                      <a:prstDash val="solid"/>
+                      <a:round/>
+                      <a:headEnd type="none" w="med" len="med"/>
+                      <a:tailEnd type="none" w="med" len="med"/>
+                    </a:lnL>
+                    <a:lnR w="6350" cap="flat" cmpd="sng" algn="ctr">
+                      <a:solidFill>
+                        <a:srgbClr val="E3E8E9"/>
+                      </a:solidFill>
+                      <a:prstDash val="solid"/>
+                      <a:round/>
+                      <a:headEnd type="none" w="med" len="med"/>
+                      <a:tailEnd type="none" w="med" len="med"/>
+                    </a:lnR>
+                    <a:lnT w="6350" cap="flat" cmpd="sng" algn="ctr">
+                      <a:solidFill>
+                        <a:srgbClr val="E3E8E9"/>
+                      </a:solidFill>
+                      <a:prstDash val="solid"/>
+                      <a:round/>
+                      <a:headEnd type="none" w="med" len="med"/>
+                      <a:tailEnd type="none" w="med" len="med"/>
+                    </a:lnT>
+                    <a:lnB w="6350" cap="flat" cmpd="sng" algn="ctr">
+                      <a:solidFill>
+                        <a:srgbClr val="E3E8E9"/>
+                      </a:solidFill>
+                      <a:prstDash val="solid"/>
+                      <a:round/>
+                      <a:headEnd type="none" w="med" len="med"/>
+                      <a:tailEnd type="none" w="med" len="med"/>
+                    </a:lnB>
+                    <a:solidFill>
+                      <a:srgbClr val="FFFFFF"/>
+                    </a:solidFill>
+                  </a:tcPr>
+                </a:tc>
+                <a:tc>
+                  <a:txBody>
+                    <a:bodyPr/>
+                    <a:lstStyle/>
+                    <a:p>
+                      <a:pPr indent="0" marL="0">
+                        <a:buNone/>
+                      </a:pPr>
+                      <a:r>
+                        <a:rPr lang="en-US" sz="930" dirty="0">
+                          <a:solidFill>
+                            <a:srgbClr val="5B6B73"/>
+                          </a:solidFill>
+                          <a:latin typeface="Calibri" pitchFamily="34" charset="0"/>
+                          <a:ea typeface="Calibri" pitchFamily="34" charset="-122"/>
+                          <a:cs typeface="Calibri" pitchFamily="34" charset="-120"/>
+                        </a:rPr>
+                        <a:t>FPSO Frade</a:t>
+                      </a:r>
+                      <a:endParaRPr lang="en-US" sz="930" dirty="0">
+                        <a:latin typeface="Calibri" charset="0"/>
+                        <a:ea typeface="Calibri" charset="0"/>
+                        <a:cs typeface="Calibri" charset="0"/>
+                      </a:endParaRPr>
+                    </a:p>
+                  </a:txBody>
+                  <a:tcPr marL="91440" marR="91440" marT="45720" marB="45720" anchor="ctr">
+                    <a:lnL w="6350" cap="flat" cmpd="sng" algn="ctr">
+                      <a:solidFill>
+                        <a:srgbClr val="E3E8E9"/>
+                      </a:solidFill>
+                      <a:prstDash val="solid"/>
+                      <a:round/>
+                      <a:headEnd type="none" w="med" len="med"/>
+                      <a:tailEnd type="none" w="med" len="med"/>
+                    </a:lnL>
+                    <a:lnR w="6350" cap="flat" cmpd="sng" algn="ctr">
+                      <a:solidFill>
+                        <a:srgbClr val="E3E8E9"/>
+                      </a:solidFill>
+                      <a:prstDash val="solid"/>
+                      <a:round/>
+                      <a:headEnd type="none" w="med" len="med"/>
+                      <a:tailEnd type="none" w="med" len="med"/>
+                    </a:lnR>
+                    <a:lnT w="6350" cap="flat" cmpd="sng" algn="ctr">
+                      <a:solidFill>
+                        <a:srgbClr val="E3E8E9"/>
+                      </a:solidFill>
+                      <a:prstDash val="solid"/>
+                      <a:round/>
+                      <a:headEnd type="none" w="med" len="med"/>
+                      <a:tailEnd type="none" w="med" len="med"/>
+                    </a:lnT>
+                    <a:lnB w="6350" cap="flat" cmpd="sng" algn="ctr">
+                      <a:solidFill>
+                        <a:srgbClr val="E3E8E9"/>
+                      </a:solidFill>
+                      <a:prstDash val="solid"/>
+                      <a:round/>
+                      <a:headEnd type="none" w="med" len="med"/>
+                      <a:tailEnd type="none" w="med" len="med"/>
+                    </a:lnB>
+                    <a:solidFill>
+                      <a:srgbClr val="FFFFFF"/>
+                    </a:solidFill>
+                  </a:tcPr>
+                </a:tc>
+                <a:tc>
+                  <a:txBody>
+                    <a:bodyPr/>
+                    <a:lstStyle/>
+                    <a:p>
+                      <a:pPr indent="0" marL="0">
+                        <a:buNone/>
+                      </a:pPr>
+                      <a:r>
+                        <a:rPr lang="en-US" sz="900" dirty="0">
+                          <a:solidFill>
+                            <a:srgbClr val="5B6B73"/>
+                          </a:solidFill>
+                          <a:latin typeface="Calibri" pitchFamily="34" charset="0"/>
+                          <a:ea typeface="Calibri" pitchFamily="34" charset="-122"/>
+                          <a:cs typeface="Calibri" pitchFamily="34" charset="-120"/>
+                        </a:rPr>
+                        <a:t>Bem Estar/Segurança</a:t>
+                      </a:r>
+                      <a:endParaRPr lang="en-US" sz="900" dirty="0">
+                        <a:latin typeface="Calibri" charset="0"/>
+                        <a:ea typeface="Calibri" charset="0"/>
+                        <a:cs typeface="Calibri" charset="0"/>
+                      </a:endParaRPr>
+                    </a:p>
+                  </a:txBody>
+                  <a:tcPr marL="91440" marR="91440" marT="45720" marB="45720" anchor="ctr">
+                    <a:lnL w="6350" cap="flat" cmpd="sng" algn="ctr">
+                      <a:solidFill>
+                        <a:srgbClr val="E3E8E9"/>
+                      </a:solidFill>
+                      <a:prstDash val="solid"/>
+                      <a:round/>
+                      <a:headEnd type="none" w="med" len="med"/>
+                      <a:tailEnd type="none" w="med" len="med"/>
+                    </a:lnL>
+                    <a:lnR w="6350" cap="flat" cmpd="sng" algn="ctr">
+                      <a:solidFill>
+                        <a:srgbClr val="E3E8E9"/>
+                      </a:solidFill>
+                      <a:prstDash val="solid"/>
+                      <a:round/>
+                      <a:headEnd type="none" w="med" len="med"/>
+                      <a:tailEnd type="none" w="med" len="med"/>
+                    </a:lnR>
+                    <a:lnT w="6350" cap="flat" cmpd="sng" algn="ctr">
+                      <a:solidFill>
+                        <a:srgbClr val="E3E8E9"/>
+                      </a:solidFill>
+                      <a:prstDash val="solid"/>
+                      <a:round/>
+                      <a:headEnd type="none" w="med" len="med"/>
+                      <a:tailEnd type="none" w="med" len="med"/>
+                    </a:lnT>
+                    <a:lnB w="6350" cap="flat" cmpd="sng" algn="ctr">
+                      <a:solidFill>
+                        <a:srgbClr val="E3E8E9"/>
+                      </a:solidFill>
+                      <a:prstDash val="solid"/>
+                      <a:round/>
+                      <a:headEnd type="none" w="med" len="med"/>
+                      <a:tailEnd type="none" w="med" len="med"/>
+                    </a:lnB>
+                    <a:solidFill>
+                      <a:srgbClr val="FFFFFF"/>
+                    </a:solidFill>
+                  </a:tcPr>
+                </a:tc>
+                <a:tc>
+                  <a:txBody>
+                    <a:bodyPr/>
+                    <a:lstStyle/>
+                    <a:p>
+                      <a:pPr algn="ctr" indent="0" marL="0">
+                        <a:buNone/>
+                      </a:pPr>
+                      <a:r>
+                        <a:rPr lang="en-US" sz="900" dirty="0">
+                          <a:solidFill>
+                            <a:srgbClr val="5B6B73"/>
+                          </a:solidFill>
+                          <a:latin typeface="Calibri" pitchFamily="34" charset="0"/>
+                          <a:ea typeface="Calibri" pitchFamily="34" charset="-122"/>
+                          <a:cs typeface="Calibri" pitchFamily="34" charset="-120"/>
+                        </a:rPr>
+                        <a:t>CAPEX</a:t>
+                      </a:r>
+                      <a:endParaRPr lang="en-US" sz="900" dirty="0">
+                        <a:latin typeface="Calibri" charset="0"/>
+                        <a:ea typeface="Calibri" charset="0"/>
+                        <a:cs typeface="Calibri" charset="0"/>
+                      </a:endParaRPr>
+                    </a:p>
+                  </a:txBody>
+                  <a:tcPr marL="91440" marR="91440" marT="45720" marB="45720" anchor="ctr">
+                    <a:lnL w="6350" cap="flat" cmpd="sng" algn="ctr">
+                      <a:solidFill>
+                        <a:srgbClr val="E3E8E9"/>
+                      </a:solidFill>
+                      <a:prstDash val="solid"/>
+                      <a:round/>
+                      <a:headEnd type="none" w="med" len="med"/>
+                      <a:tailEnd type="none" w="med" len="med"/>
+                    </a:lnL>
+                    <a:lnR w="6350" cap="flat" cmpd="sng" algn="ctr">
+                      <a:solidFill>
+                        <a:srgbClr val="E3E8E9"/>
+                      </a:solidFill>
+                      <a:prstDash val="solid"/>
+                      <a:round/>
+                      <a:headEnd type="none" w="med" len="med"/>
+                      <a:tailEnd type="none" w="med" len="med"/>
+                    </a:lnR>
+                    <a:lnT w="6350" cap="flat" cmpd="sng" algn="ctr">
+                      <a:solidFill>
+                        <a:srgbClr val="E3E8E9"/>
+                      </a:solidFill>
+                      <a:prstDash val="solid"/>
+                      <a:round/>
+                      <a:headEnd type="none" w="med" len="med"/>
+                      <a:tailEnd type="none" w="med" len="med"/>
+                    </a:lnT>
+                    <a:lnB w="6350" cap="flat" cmpd="sng" algn="ctr">
+                      <a:solidFill>
+                        <a:srgbClr val="E3E8E9"/>
+                      </a:solidFill>
+                      <a:prstDash val="solid"/>
+                      <a:round/>
+                      <a:headEnd type="none" w="med" len="med"/>
+                      <a:tailEnd type="none" w="med" len="med"/>
+                    </a:lnB>
+                    <a:solidFill>
+                      <a:srgbClr val="FFFFFF"/>
+                    </a:solidFill>
+                  </a:tcPr>
+                </a:tc>
+                <a:tc>
+                  <a:txBody>
+                    <a:bodyPr/>
+                    <a:lstStyle/>
+                    <a:p>
+                      <a:pPr algn="r" indent="0" marL="0">
+                        <a:buNone/>
+                      </a:pPr>
+                      <a:r>
+                        <a:rPr lang="en-US" sz="970" b="1" dirty="0">
+                          <a:solidFill>
+                            <a:srgbClr val="0B2A3D"/>
+                          </a:solidFill>
+                          <a:latin typeface="Calibri" pitchFamily="34" charset="0"/>
+                          <a:ea typeface="Calibri" pitchFamily="34" charset="-122"/>
+                          <a:cs typeface="Calibri" pitchFamily="34" charset="-120"/>
+                        </a:rPr>
+                        <a:t>US$ 262,0 mil</a:t>
+                      </a:r>
+                      <a:endParaRPr lang="en-US" sz="970" dirty="0">
+                        <a:latin typeface="Calibri" charset="0"/>
+                        <a:ea typeface="Calibri" charset="0"/>
+                        <a:cs typeface="Calibri" charset="0"/>
+                      </a:endParaRPr>
+                    </a:p>
+                  </a:txBody>
+                  <a:tcPr marL="91440" marR="91440" marT="45720" marB="45720" anchor="ctr">
+                    <a:lnL w="6350" cap="flat" cmpd="sng" algn="ctr">
+                      <a:solidFill>
+                        <a:srgbClr val="E3E8E9"/>
+                      </a:solidFill>
+                      <a:prstDash val="solid"/>
+                      <a:round/>
+                      <a:headEnd type="none" w="med" len="med"/>
+                      <a:tailEnd type="none" w="med" len="med"/>
+                    </a:lnL>
+                    <a:lnR w="6350" cap="flat" cmpd="sng" algn="ctr">
+                      <a:solidFill>
+                        <a:srgbClr val="E3E8E9"/>
+                      </a:solidFill>
+                      <a:prstDash val="solid"/>
+                      <a:round/>
+                      <a:headEnd type="none" w="med" len="med"/>
+                      <a:tailEnd type="none" w="med" len="med"/>
+                    </a:lnR>
+                    <a:lnT w="6350" cap="flat" cmpd="sng" algn="ctr">
+                      <a:solidFill>
+                        <a:srgbClr val="E3E8E9"/>
+                      </a:solidFill>
+                      <a:prstDash val="solid"/>
+                      <a:round/>
+                      <a:headEnd type="none" w="med" len="med"/>
+                      <a:tailEnd type="none" w="med" len="med"/>
+                    </a:lnT>
+                    <a:lnB w="6350" cap="flat" cmpd="sng" algn="ctr">
+                      <a:solidFill>
+                        <a:srgbClr val="E3E8E9"/>
+                      </a:solidFill>
+                      <a:prstDash val="solid"/>
+                      <a:round/>
+                      <a:headEnd type="none" w="med" len="med"/>
+                      <a:tailEnd type="none" w="med" len="med"/>
+                    </a:lnB>
+                    <a:solidFill>
+                      <a:srgbClr val="FFFFFF"/>
+                    </a:solidFill>
+                  </a:tcPr>
+                </a:tc>
+              </a:tr>
+              <a:tr h="288036">
+                <a:tc>
+                  <a:txBody>
+                    <a:bodyPr/>
+                    <a:lstStyle/>
+                    <a:p>
+                      <a:pPr indent="0" marL="0">
+                        <a:buNone/>
+                      </a:pPr>
+                      <a:r>
+                        <a:rPr lang="en-US" sz="970" dirty="0">
+                          <a:solidFill>
+                            <a:srgbClr val="1C2B33"/>
+                          </a:solidFill>
+                          <a:latin typeface="Calibri" pitchFamily="34" charset="0"/>
+                          <a:ea typeface="Calibri" pitchFamily="34" charset="-122"/>
+                          <a:cs typeface="Calibri" pitchFamily="34" charset="-120"/>
+                        </a:rPr>
+                        <a:t>[CONSTRUÇÕES] Suporte a abertura de vasos NR-13 (2027)</a:t>
+                      </a:r>
+                      <a:endParaRPr lang="en-US" sz="970" dirty="0">
+                        <a:latin typeface="Calibri" charset="0"/>
+                        <a:ea typeface="Calibri" charset="0"/>
+                        <a:cs typeface="Calibri" charset="0"/>
+                      </a:endParaRPr>
+                    </a:p>
+                  </a:txBody>
+                  <a:tcPr marL="91440" marR="91440" marT="45720" marB="45720" anchor="ctr">
+                    <a:lnL w="6350" cap="flat" cmpd="sng" algn="ctr">
+                      <a:solidFill>
+                        <a:srgbClr val="E3E8E9"/>
+                      </a:solidFill>
+                      <a:prstDash val="solid"/>
+                      <a:round/>
+                      <a:headEnd type="none" w="med" len="med"/>
+                      <a:tailEnd type="none" w="med" len="med"/>
+                    </a:lnL>
+                    <a:lnR w="6350" cap="flat" cmpd="sng" algn="ctr">
+                      <a:solidFill>
+                        <a:srgbClr val="E3E8E9"/>
+                      </a:solidFill>
+                      <a:prstDash val="solid"/>
+                      <a:round/>
+                      <a:headEnd type="none" w="med" len="med"/>
+                      <a:tailEnd type="none" w="med" len="med"/>
+                    </a:lnR>
+                    <a:lnT w="6350" cap="flat" cmpd="sng" algn="ctr">
+                      <a:solidFill>
+                        <a:srgbClr val="E3E8E9"/>
+                      </a:solidFill>
+                      <a:prstDash val="solid"/>
+                      <a:round/>
+                      <a:headEnd type="none" w="med" len="med"/>
+                      <a:tailEnd type="none" w="med" len="med"/>
+                    </a:lnT>
+                    <a:lnB w="6350" cap="flat" cmpd="sng" algn="ctr">
+                      <a:solidFill>
+                        <a:srgbClr val="E3E8E9"/>
+                      </a:solidFill>
+                      <a:prstDash val="solid"/>
+                      <a:round/>
+                      <a:headEnd type="none" w="med" len="med"/>
+                      <a:tailEnd type="none" w="med" len="med"/>
+                    </a:lnB>
+                    <a:solidFill>
+                      <a:srgbClr val="F0F4F5"/>
+                    </a:solidFill>
+                  </a:tcPr>
+                </a:tc>
+                <a:tc>
+                  <a:txBody>
+                    <a:bodyPr/>
+                    <a:lstStyle/>
+                    <a:p>
+                      <a:pPr indent="0" marL="0">
+                        <a:buNone/>
+                      </a:pPr>
+                      <a:r>
+                        <a:rPr lang="en-US" sz="930" dirty="0">
+                          <a:solidFill>
+                            <a:srgbClr val="5B6B73"/>
+                          </a:solidFill>
+                          <a:latin typeface="Calibri" pitchFamily="34" charset="0"/>
+                          <a:ea typeface="Calibri" pitchFamily="34" charset="-122"/>
+                          <a:cs typeface="Calibri" pitchFamily="34" charset="-120"/>
+                        </a:rPr>
+                        <a:t>FPSO Frade</a:t>
+                      </a:r>
+                      <a:endParaRPr lang="en-US" sz="930" dirty="0">
+                        <a:latin typeface="Calibri" charset="0"/>
+                        <a:ea typeface="Calibri" charset="0"/>
+                        <a:cs typeface="Calibri" charset="0"/>
+                      </a:endParaRPr>
+                    </a:p>
+                  </a:txBody>
+                  <a:tcPr marL="91440" marR="91440" marT="45720" marB="45720" anchor="ctr">
+                    <a:lnL w="6350" cap="flat" cmpd="sng" algn="ctr">
+                      <a:solidFill>
+                        <a:srgbClr val="E3E8E9"/>
+                      </a:solidFill>
+                      <a:prstDash val="solid"/>
+                      <a:round/>
+                      <a:headEnd type="none" w="med" len="med"/>
+                      <a:tailEnd type="none" w="med" len="med"/>
+                    </a:lnL>
+                    <a:lnR w="6350" cap="flat" cmpd="sng" algn="ctr">
+                      <a:solidFill>
+                        <a:srgbClr val="E3E8E9"/>
+                      </a:solidFill>
+                      <a:prstDash val="solid"/>
+                      <a:round/>
+                      <a:headEnd type="none" w="med" len="med"/>
+                      <a:tailEnd type="none" w="med" len="med"/>
+                    </a:lnR>
+                    <a:lnT w="6350" cap="flat" cmpd="sng" algn="ctr">
+                      <a:solidFill>
+                        <a:srgbClr val="E3E8E9"/>
+                      </a:solidFill>
+                      <a:prstDash val="solid"/>
+                      <a:round/>
+                      <a:headEnd type="none" w="med" len="med"/>
+                      <a:tailEnd type="none" w="med" len="med"/>
+                    </a:lnT>
+                    <a:lnB w="6350" cap="flat" cmpd="sng" algn="ctr">
+                      <a:solidFill>
+                        <a:srgbClr val="E3E8E9"/>
+                      </a:solidFill>
+                      <a:prstDash val="solid"/>
+                      <a:round/>
+                      <a:headEnd type="none" w="med" len="med"/>
+                      <a:tailEnd type="none" w="med" len="med"/>
+                    </a:lnB>
+                    <a:solidFill>
+                      <a:srgbClr val="F0F4F5"/>
+                    </a:solidFill>
+                  </a:tcPr>
+                </a:tc>
+                <a:tc>
+                  <a:txBody>
+                    <a:bodyPr/>
+                    <a:lstStyle/>
+                    <a:p>
+                      <a:pPr indent="0" marL="0">
+                        <a:buNone/>
+                      </a:pPr>
+                      <a:r>
+                        <a:rPr lang="en-US" sz="900" dirty="0">
+                          <a:solidFill>
+                            <a:srgbClr val="5B6B73"/>
+                          </a:solidFill>
+                          <a:latin typeface="Calibri" pitchFamily="34" charset="0"/>
+                          <a:ea typeface="Calibri" pitchFamily="34" charset="-122"/>
+                          <a:cs typeface="Calibri" pitchFamily="34" charset="-120"/>
+                        </a:rPr>
+                        <a:t>Integridade e Regulatório</a:t>
+                      </a:r>
+                      <a:endParaRPr lang="en-US" sz="900" dirty="0">
+                        <a:latin typeface="Calibri" charset="0"/>
+                        <a:ea typeface="Calibri" charset="0"/>
+                        <a:cs typeface="Calibri" charset="0"/>
+                      </a:endParaRPr>
+                    </a:p>
+                  </a:txBody>
+                  <a:tcPr marL="91440" marR="91440" marT="45720" marB="45720" anchor="ctr">
+                    <a:lnL w="6350" cap="flat" cmpd="sng" algn="ctr">
+                      <a:solidFill>
+                        <a:srgbClr val="E3E8E9"/>
+                      </a:solidFill>
+                      <a:prstDash val="solid"/>
+                      <a:round/>
+                      <a:headEnd type="none" w="med" len="med"/>
+                      <a:tailEnd type="none" w="med" len="med"/>
+                    </a:lnL>
+                    <a:lnR w="6350" cap="flat" cmpd="sng" algn="ctr">
+                      <a:solidFill>
+                        <a:srgbClr val="E3E8E9"/>
+                      </a:solidFill>
+                      <a:prstDash val="solid"/>
+                      <a:round/>
+                      <a:headEnd type="none" w="med" len="med"/>
+                      <a:tailEnd type="none" w="med" len="med"/>
+                    </a:lnR>
+                    <a:lnT w="6350" cap="flat" cmpd="sng" algn="ctr">
+                      <a:solidFill>
+                        <a:srgbClr val="E3E8E9"/>
+                      </a:solidFill>
+                      <a:prstDash val="solid"/>
+                      <a:round/>
+                      <a:headEnd type="none" w="med" len="med"/>
+                      <a:tailEnd type="none" w="med" len="med"/>
+                    </a:lnT>
+                    <a:lnB w="6350" cap="flat" cmpd="sng" algn="ctr">
+                      <a:solidFill>
+                        <a:srgbClr val="E3E8E9"/>
+                      </a:solidFill>
+                      <a:prstDash val="solid"/>
+                      <a:round/>
+                      <a:headEnd type="none" w="med" len="med"/>
+                      <a:tailEnd type="none" w="med" len="med"/>
+                    </a:lnB>
+                    <a:solidFill>
+                      <a:srgbClr val="F0F4F5"/>
+                    </a:solidFill>
+                  </a:tcPr>
+                </a:tc>
+                <a:tc>
+                  <a:txBody>
+                    <a:bodyPr/>
+                    <a:lstStyle/>
+                    <a:p>
+                      <a:pPr algn="ctr" indent="0" marL="0">
+                        <a:buNone/>
+                      </a:pPr>
+                      <a:r>
+                        <a:rPr lang="en-US" sz="900" dirty="0">
+                          <a:solidFill>
+                            <a:srgbClr val="5B6B73"/>
+                          </a:solidFill>
+                          <a:latin typeface="Calibri" pitchFamily="34" charset="0"/>
+                          <a:ea typeface="Calibri" pitchFamily="34" charset="-122"/>
+                          <a:cs typeface="Calibri" pitchFamily="34" charset="-120"/>
+                        </a:rPr>
+                        <a:t>OPEX</a:t>
+                      </a:r>
+                      <a:endParaRPr lang="en-US" sz="900" dirty="0">
+                        <a:latin typeface="Calibri" charset="0"/>
+                        <a:ea typeface="Calibri" charset="0"/>
+                        <a:cs typeface="Calibri" charset="0"/>
+                      </a:endParaRPr>
+                    </a:p>
+                  </a:txBody>
+                  <a:tcPr marL="91440" marR="91440" marT="45720" marB="45720" anchor="ctr">
+                    <a:lnL w="6350" cap="flat" cmpd="sng" algn="ctr">
+                      <a:solidFill>
+                        <a:srgbClr val="E3E8E9"/>
+                      </a:solidFill>
+                      <a:prstDash val="solid"/>
+                      <a:round/>
+                      <a:headEnd type="none" w="med" len="med"/>
+                      <a:tailEnd type="none" w="med" len="med"/>
+                    </a:lnL>
+                    <a:lnR w="6350" cap="flat" cmpd="sng" algn="ctr">
+                      <a:solidFill>
+                        <a:srgbClr val="E3E8E9"/>
+                      </a:solidFill>
+                      <a:prstDash val="solid"/>
+                      <a:round/>
+                      <a:headEnd type="none" w="med" len="med"/>
+                      <a:tailEnd type="none" w="med" len="med"/>
+                    </a:lnR>
+                    <a:lnT w="6350" cap="flat" cmpd="sng" algn="ctr">
+                      <a:solidFill>
+                        <a:srgbClr val="E3E8E9"/>
+                      </a:solidFill>
+                      <a:prstDash val="solid"/>
+                      <a:round/>
+                      <a:headEnd type="none" w="med" len="med"/>
+                      <a:tailEnd type="none" w="med" len="med"/>
+                    </a:lnT>
+                    <a:lnB w="6350" cap="flat" cmpd="sng" algn="ctr">
+                      <a:solidFill>
+                        <a:srgbClr val="E3E8E9"/>
+                      </a:solidFill>
+                      <a:prstDash val="solid"/>
+                      <a:round/>
+                      <a:headEnd type="none" w="med" len="med"/>
+                      <a:tailEnd type="none" w="med" len="med"/>
+                    </a:lnB>
+                    <a:solidFill>
+                      <a:srgbClr val="F0F4F5"/>
+                    </a:solidFill>
+                  </a:tcPr>
+                </a:tc>
+                <a:tc>
+                  <a:txBody>
+                    <a:bodyPr/>
+                    <a:lstStyle/>
+                    <a:p>
+                      <a:pPr algn="r" indent="0" marL="0">
+                        <a:buNone/>
+                      </a:pPr>
+                      <a:r>
+                        <a:rPr lang="en-US" sz="970" b="1" dirty="0">
+                          <a:solidFill>
+                            <a:srgbClr val="0B2A3D"/>
+                          </a:solidFill>
+                          <a:latin typeface="Calibri" pitchFamily="34" charset="0"/>
+                          <a:ea typeface="Calibri" pitchFamily="34" charset="-122"/>
+                          <a:cs typeface="Calibri" pitchFamily="34" charset="-120"/>
+                        </a:rPr>
+                        <a:t>US$ 256,0 mil</a:t>
+                      </a:r>
+                      <a:endParaRPr lang="en-US" sz="970" dirty="0">
+                        <a:latin typeface="Calibri" charset="0"/>
+                        <a:ea typeface="Calibri" charset="0"/>
+                        <a:cs typeface="Calibri" charset="0"/>
+                      </a:endParaRPr>
+                    </a:p>
+                  </a:txBody>
+                  <a:tcPr marL="91440" marR="91440" marT="45720" marB="45720" anchor="ctr">
+                    <a:lnL w="6350" cap="flat" cmpd="sng" algn="ctr">
+                      <a:solidFill>
+                        <a:srgbClr val="E3E8E9"/>
+                      </a:solidFill>
+                      <a:prstDash val="solid"/>
+                      <a:round/>
+                      <a:headEnd type="none" w="med" len="med"/>
+                      <a:tailEnd type="none" w="med" len="med"/>
+                    </a:lnL>
+                    <a:lnR w="6350" cap="flat" cmpd="sng" algn="ctr">
+                      <a:solidFill>
+                        <a:srgbClr val="E3E8E9"/>
+                      </a:solidFill>
+                      <a:prstDash val="solid"/>
+                      <a:round/>
+                      <a:headEnd type="none" w="med" len="med"/>
+                      <a:tailEnd type="none" w="med" len="med"/>
+                    </a:lnR>
+                    <a:lnT w="6350" cap="flat" cmpd="sng" algn="ctr">
+                      <a:solidFill>
+                        <a:srgbClr val="E3E8E9"/>
+                      </a:solidFill>
+                      <a:prstDash val="solid"/>
+                      <a:round/>
+                      <a:headEnd type="none" w="med" len="med"/>
+                      <a:tailEnd type="none" w="med" len="med"/>
+                    </a:lnT>
+                    <a:lnB w="6350" cap="flat" cmpd="sng" algn="ctr">
+                      <a:solidFill>
+                        <a:srgbClr val="E3E8E9"/>
+                      </a:solidFill>
+                      <a:prstDash val="solid"/>
+                      <a:round/>
+                      <a:headEnd type="none" w="med" len="med"/>
+                      <a:tailEnd type="none" w="med" len="med"/>
+                    </a:lnB>
+                    <a:solidFill>
+                      <a:srgbClr val="F0F4F5"/>
+                    </a:solidFill>
+                  </a:tcPr>
+                </a:tc>
+              </a:tr>
+              <a:tr h="288036">
+                <a:tc>
+                  <a:txBody>
+                    <a:bodyPr/>
+                    <a:lstStyle/>
+                    <a:p>
+                      <a:pPr indent="0" marL="0">
+                        <a:buNone/>
+                      </a:pPr>
+                      <a:r>
+                        <a:rPr lang="en-US" sz="970" dirty="0">
+                          <a:solidFill>
+                            <a:srgbClr val="1C2B33"/>
+                          </a:solidFill>
+                          <a:latin typeface="Calibri" pitchFamily="34" charset="0"/>
+                          <a:ea typeface="Calibri" pitchFamily="34" charset="-122"/>
+                          <a:cs typeface="Calibri" pitchFamily="34" charset="-120"/>
+                        </a:rPr>
+                        <a:t>Combate a Incêndio - Compra e Instalação de Cabines de Dilúvio</a:t>
+                      </a:r>
+                      <a:endParaRPr lang="en-US" sz="970" dirty="0">
+                        <a:latin typeface="Calibri" charset="0"/>
+                        <a:ea typeface="Calibri" charset="0"/>
+                        <a:cs typeface="Calibri" charset="0"/>
+                      </a:endParaRPr>
+                    </a:p>
+                  </a:txBody>
+                  <a:tcPr marL="91440" marR="91440" marT="45720" marB="45720" anchor="ctr">
+                    <a:lnL w="6350" cap="flat" cmpd="sng" algn="ctr">
+                      <a:solidFill>
+                        <a:srgbClr val="E3E8E9"/>
+                      </a:solidFill>
+                      <a:prstDash val="solid"/>
+                      <a:round/>
+                      <a:headEnd type="none" w="med" len="med"/>
+                      <a:tailEnd type="none" w="med" len="med"/>
+                    </a:lnL>
+                    <a:lnR w="6350" cap="flat" cmpd="sng" algn="ctr">
+                      <a:solidFill>
+                        <a:srgbClr val="E3E8E9"/>
+                      </a:solidFill>
+                      <a:prstDash val="solid"/>
+                      <a:round/>
+                      <a:headEnd type="none" w="med" len="med"/>
+                      <a:tailEnd type="none" w="med" len="med"/>
+                    </a:lnR>
+                    <a:lnT w="6350" cap="flat" cmpd="sng" algn="ctr">
+                      <a:solidFill>
+                        <a:srgbClr val="E3E8E9"/>
+                      </a:solidFill>
+                      <a:prstDash val="solid"/>
+                      <a:round/>
+                      <a:headEnd type="none" w="med" len="med"/>
+                      <a:tailEnd type="none" w="med" len="med"/>
+                    </a:lnT>
+                    <a:lnB w="6350" cap="flat" cmpd="sng" algn="ctr">
+                      <a:solidFill>
+                        <a:srgbClr val="E3E8E9"/>
+                      </a:solidFill>
+                      <a:prstDash val="solid"/>
+                      <a:round/>
+                      <a:headEnd type="none" w="med" len="med"/>
+                      <a:tailEnd type="none" w="med" len="med"/>
+                    </a:lnB>
+                    <a:solidFill>
+                      <a:srgbClr val="FFFFFF"/>
+                    </a:solidFill>
+                  </a:tcPr>
+                </a:tc>
+                <a:tc>
+                  <a:txBody>
+                    <a:bodyPr/>
+                    <a:lstStyle/>
+                    <a:p>
+                      <a:pPr indent="0" marL="0">
+                        <a:buNone/>
+                      </a:pPr>
+                      <a:r>
+                        <a:rPr lang="en-US" sz="930" dirty="0">
+                          <a:solidFill>
+                            <a:srgbClr val="5B6B73"/>
+                          </a:solidFill>
+                          <a:latin typeface="Calibri" pitchFamily="34" charset="0"/>
+                          <a:ea typeface="Calibri" pitchFamily="34" charset="-122"/>
+                          <a:cs typeface="Calibri" pitchFamily="34" charset="-120"/>
+                        </a:rPr>
+                        <a:t>FPSO Frade</a:t>
+                      </a:r>
+                      <a:endParaRPr lang="en-US" sz="930" dirty="0">
+                        <a:latin typeface="Calibri" charset="0"/>
+                        <a:ea typeface="Calibri" charset="0"/>
+                        <a:cs typeface="Calibri" charset="0"/>
+                      </a:endParaRPr>
+                    </a:p>
+                  </a:txBody>
+                  <a:tcPr marL="91440" marR="91440" marT="45720" marB="45720" anchor="ctr">
+                    <a:lnL w="6350" cap="flat" cmpd="sng" algn="ctr">
+                      <a:solidFill>
+                        <a:srgbClr val="E3E8E9"/>
+                      </a:solidFill>
+                      <a:prstDash val="solid"/>
+                      <a:round/>
+                      <a:headEnd type="none" w="med" len="med"/>
+                      <a:tailEnd type="none" w="med" len="med"/>
+                    </a:lnL>
+                    <a:lnR w="6350" cap="flat" cmpd="sng" algn="ctr">
+                      <a:solidFill>
+                        <a:srgbClr val="E3E8E9"/>
+                      </a:solidFill>
+                      <a:prstDash val="solid"/>
+                      <a:round/>
+                      <a:headEnd type="none" w="med" len="med"/>
+                      <a:tailEnd type="none" w="med" len="med"/>
+                    </a:lnR>
+                    <a:lnT w="6350" cap="flat" cmpd="sng" algn="ctr">
+                      <a:solidFill>
+                        <a:srgbClr val="E3E8E9"/>
+                      </a:solidFill>
+                      <a:prstDash val="solid"/>
+                      <a:round/>
+                      <a:headEnd type="none" w="med" len="med"/>
+                      <a:tailEnd type="none" w="med" len="med"/>
+                    </a:lnT>
+                    <a:lnB w="6350" cap="flat" cmpd="sng" algn="ctr">
+                      <a:solidFill>
+                        <a:srgbClr val="E3E8E9"/>
+                      </a:solidFill>
+                      <a:prstDash val="solid"/>
+                      <a:round/>
+                      <a:headEnd type="none" w="med" len="med"/>
+                      <a:tailEnd type="none" w="med" len="med"/>
+                    </a:lnB>
+                    <a:solidFill>
+                      <a:srgbClr val="FFFFFF"/>
+                    </a:solidFill>
+                  </a:tcPr>
+                </a:tc>
+                <a:tc>
+                  <a:txBody>
+                    <a:bodyPr/>
+                    <a:lstStyle/>
+                    <a:p>
+                      <a:pPr indent="0" marL="0">
+                        <a:buNone/>
+                      </a:pPr>
+                      <a:r>
+                        <a:rPr lang="en-US" sz="900" dirty="0">
+                          <a:solidFill>
+                            <a:srgbClr val="5B6B73"/>
+                          </a:solidFill>
+                          <a:latin typeface="Calibri" pitchFamily="34" charset="0"/>
+                          <a:ea typeface="Calibri" pitchFamily="34" charset="-122"/>
+                          <a:cs typeface="Calibri" pitchFamily="34" charset="-120"/>
+                        </a:rPr>
+                        <a:t>Bem Estar/Segurança</a:t>
+                      </a:r>
+                      <a:endParaRPr lang="en-US" sz="900" dirty="0">
+                        <a:latin typeface="Calibri" charset="0"/>
+                        <a:ea typeface="Calibri" charset="0"/>
+                        <a:cs typeface="Calibri" charset="0"/>
+                      </a:endParaRPr>
+                    </a:p>
+                  </a:txBody>
+                  <a:tcPr marL="91440" marR="91440" marT="45720" marB="45720" anchor="ctr">
+                    <a:lnL w="6350" cap="flat" cmpd="sng" algn="ctr">
+                      <a:solidFill>
+                        <a:srgbClr val="E3E8E9"/>
+                      </a:solidFill>
+                      <a:prstDash val="solid"/>
+                      <a:round/>
+                      <a:headEnd type="none" w="med" len="med"/>
+                      <a:tailEnd type="none" w="med" len="med"/>
+                    </a:lnL>
+                    <a:lnR w="6350" cap="flat" cmpd="sng" algn="ctr">
+                      <a:solidFill>
+                        <a:srgbClr val="E3E8E9"/>
+                      </a:solidFill>
+                      <a:prstDash val="solid"/>
+                      <a:round/>
+                      <a:headEnd type="none" w="med" len="med"/>
+                      <a:tailEnd type="none" w="med" len="med"/>
+                    </a:lnR>
+                    <a:lnT w="6350" cap="flat" cmpd="sng" algn="ctr">
+                      <a:solidFill>
+                        <a:srgbClr val="E3E8E9"/>
+                      </a:solidFill>
+                      <a:prstDash val="solid"/>
+                      <a:round/>
+                      <a:headEnd type="none" w="med" len="med"/>
+                      <a:tailEnd type="none" w="med" len="med"/>
+                    </a:lnT>
+                    <a:lnB w="6350" cap="flat" cmpd="sng" algn="ctr">
+                      <a:solidFill>
+                        <a:srgbClr val="E3E8E9"/>
+                      </a:solidFill>
+                      <a:prstDash val="solid"/>
+                      <a:round/>
+                      <a:headEnd type="none" w="med" len="med"/>
+                      <a:tailEnd type="none" w="med" len="med"/>
+                    </a:lnB>
+                    <a:solidFill>
+                      <a:srgbClr val="FFFFFF"/>
+                    </a:solidFill>
+                  </a:tcPr>
+                </a:tc>
+                <a:tc>
+                  <a:txBody>
+                    <a:bodyPr/>
+                    <a:lstStyle/>
+                    <a:p>
+                      <a:pPr algn="ctr" indent="0" marL="0">
+                        <a:buNone/>
+                      </a:pPr>
+                      <a:r>
+                        <a:rPr lang="en-US" sz="900" dirty="0">
+                          <a:solidFill>
+                            <a:srgbClr val="5B6B73"/>
+                          </a:solidFill>
+                          <a:latin typeface="Calibri" pitchFamily="34" charset="0"/>
+                          <a:ea typeface="Calibri" pitchFamily="34" charset="-122"/>
+                          <a:cs typeface="Calibri" pitchFamily="34" charset="-120"/>
+                        </a:rPr>
+                        <a:t>CAPEX</a:t>
+                      </a:r>
+                      <a:endParaRPr lang="en-US" sz="900" dirty="0">
+                        <a:latin typeface="Calibri" charset="0"/>
+                        <a:ea typeface="Calibri" charset="0"/>
+                        <a:cs typeface="Calibri" charset="0"/>
+                      </a:endParaRPr>
+                    </a:p>
+                  </a:txBody>
+                  <a:tcPr marL="91440" marR="91440" marT="45720" marB="45720" anchor="ctr">
+                    <a:lnL w="6350" cap="flat" cmpd="sng" algn="ctr">
+                      <a:solidFill>
+                        <a:srgbClr val="E3E8E9"/>
+                      </a:solidFill>
+                      <a:prstDash val="solid"/>
+                      <a:round/>
+                      <a:headEnd type="none" w="med" len="med"/>
+                      <a:tailEnd type="none" w="med" len="med"/>
+                    </a:lnL>
+                    <a:lnR w="6350" cap="flat" cmpd="sng" algn="ctr">
+                      <a:solidFill>
+                        <a:srgbClr val="E3E8E9"/>
+                      </a:solidFill>
+                      <a:prstDash val="solid"/>
+                      <a:round/>
+                      <a:headEnd type="none" w="med" len="med"/>
+                      <a:tailEnd type="none" w="med" len="med"/>
+                    </a:lnR>
+                    <a:lnT w="6350" cap="flat" cmpd="sng" algn="ctr">
+                      <a:solidFill>
+                        <a:srgbClr val="E3E8E9"/>
+                      </a:solidFill>
+                      <a:prstDash val="solid"/>
+                      <a:round/>
+                      <a:headEnd type="none" w="med" len="med"/>
+                      <a:tailEnd type="none" w="med" len="med"/>
+                    </a:lnT>
+                    <a:lnB w="6350" cap="flat" cmpd="sng" algn="ctr">
+                      <a:solidFill>
+                        <a:srgbClr val="E3E8E9"/>
+                      </a:solidFill>
+                      <a:prstDash val="solid"/>
+                      <a:round/>
+                      <a:headEnd type="none" w="med" len="med"/>
+                      <a:tailEnd type="none" w="med" len="med"/>
+                    </a:lnB>
+                    <a:solidFill>
+                      <a:srgbClr val="FFFFFF"/>
+                    </a:solidFill>
+                  </a:tcPr>
+                </a:tc>
+                <a:tc>
+                  <a:txBody>
+                    <a:bodyPr/>
+                    <a:lstStyle/>
+                    <a:p>
+                      <a:pPr algn="r" indent="0" marL="0">
+                        <a:buNone/>
+                      </a:pPr>
+                      <a:r>
+                        <a:rPr lang="en-US" sz="970" b="1" dirty="0">
+                          <a:solidFill>
+                            <a:srgbClr val="0B2A3D"/>
+                          </a:solidFill>
+                          <a:latin typeface="Calibri" pitchFamily="34" charset="0"/>
+                          <a:ea typeface="Calibri" pitchFamily="34" charset="-122"/>
+                          <a:cs typeface="Calibri" pitchFamily="34" charset="-120"/>
+                        </a:rPr>
+                        <a:t>US$ 250,0 mil</a:t>
+                      </a:r>
+                      <a:endParaRPr lang="en-US" sz="970" dirty="0">
+                        <a:latin typeface="Calibri" charset="0"/>
+                        <a:ea typeface="Calibri" charset="0"/>
+                        <a:cs typeface="Calibri" charset="0"/>
+                      </a:endParaRPr>
+                    </a:p>
+                  </a:txBody>
+                  <a:tcPr marL="91440" marR="91440" marT="45720" marB="45720" anchor="ctr">
+                    <a:lnL w="6350" cap="flat" cmpd="sng" algn="ctr">
+                      <a:solidFill>
+                        <a:srgbClr val="E3E8E9"/>
+                      </a:solidFill>
+                      <a:prstDash val="solid"/>
+                      <a:round/>
+                      <a:headEnd type="none" w="med" len="med"/>
+                      <a:tailEnd type="none" w="med" len="med"/>
+                    </a:lnL>
+                    <a:lnR w="6350" cap="flat" cmpd="sng" algn="ctr">
+                      <a:solidFill>
+                        <a:srgbClr val="E3E8E9"/>
+                      </a:solidFill>
+                      <a:prstDash val="solid"/>
+                      <a:round/>
+                      <a:headEnd type="none" w="med" len="med"/>
+                      <a:tailEnd type="none" w="med" len="med"/>
+                    </a:lnR>
+                    <a:lnT w="6350" cap="flat" cmpd="sng" algn="ctr">
+                      <a:solidFill>
+                        <a:srgbClr val="E3E8E9"/>
+                      </a:solidFill>
+                      <a:prstDash val="solid"/>
+                      <a:round/>
+                      <a:headEnd type="none" w="med" len="med"/>
+                      <a:tailEnd type="none" w="med" len="med"/>
+                    </a:lnT>
+                    <a:lnB w="6350" cap="flat" cmpd="sng" algn="ctr">
+                      <a:solidFill>
+                        <a:srgbClr val="E3E8E9"/>
+                      </a:solidFill>
+                      <a:prstDash val="solid"/>
+                      <a:round/>
+                      <a:headEnd type="none" w="med" len="med"/>
+                      <a:tailEnd type="none" w="med" len="med"/>
+                    </a:lnB>
+                    <a:solidFill>
+                      <a:srgbClr val="FFFFFF"/>
+                    </a:solidFill>
+                  </a:tcPr>
+                </a:tc>
+              </a:tr>
+              <a:tr h="288036">
+                <a:tc>
+                  <a:txBody>
+                    <a:bodyPr/>
+                    <a:lstStyle/>
+                    <a:p>
+                      <a:pPr indent="0" marL="0">
+                        <a:buNone/>
+                      </a:pPr>
+                      <a:r>
+                        <a:rPr lang="en-US" sz="970" dirty="0">
+                          <a:solidFill>
+                            <a:srgbClr val="1C2B33"/>
+                          </a:solidFill>
+                          <a:latin typeface="Calibri" pitchFamily="34" charset="0"/>
+                          <a:ea typeface="Calibri" pitchFamily="34" charset="-122"/>
+                          <a:cs typeface="Calibri" pitchFamily="34" charset="-120"/>
+                        </a:rPr>
+                        <a:t>Combate a Incêndio - Revamp das cabines de water mist</a:t>
+                      </a:r>
+                      <a:endParaRPr lang="en-US" sz="970" dirty="0">
+                        <a:latin typeface="Calibri" charset="0"/>
+                        <a:ea typeface="Calibri" charset="0"/>
+                        <a:cs typeface="Calibri" charset="0"/>
+                      </a:endParaRPr>
+                    </a:p>
+                  </a:txBody>
+                  <a:tcPr marL="91440" marR="91440" marT="45720" marB="45720" anchor="ctr">
+                    <a:lnL w="6350" cap="flat" cmpd="sng" algn="ctr">
+                      <a:solidFill>
+                        <a:srgbClr val="E3E8E9"/>
+                      </a:solidFill>
+                      <a:prstDash val="solid"/>
+                      <a:round/>
+                      <a:headEnd type="none" w="med" len="med"/>
+                      <a:tailEnd type="none" w="med" len="med"/>
+                    </a:lnL>
+                    <a:lnR w="6350" cap="flat" cmpd="sng" algn="ctr">
+                      <a:solidFill>
+                        <a:srgbClr val="E3E8E9"/>
+                      </a:solidFill>
+                      <a:prstDash val="solid"/>
+                      <a:round/>
+                      <a:headEnd type="none" w="med" len="med"/>
+                      <a:tailEnd type="none" w="med" len="med"/>
+                    </a:lnR>
+                    <a:lnT w="6350" cap="flat" cmpd="sng" algn="ctr">
+                      <a:solidFill>
+                        <a:srgbClr val="E3E8E9"/>
+                      </a:solidFill>
+                      <a:prstDash val="solid"/>
+                      <a:round/>
+                      <a:headEnd type="none" w="med" len="med"/>
+                      <a:tailEnd type="none" w="med" len="med"/>
+                    </a:lnT>
+                    <a:lnB w="6350" cap="flat" cmpd="sng" algn="ctr">
+                      <a:solidFill>
+                        <a:srgbClr val="E3E8E9"/>
+                      </a:solidFill>
+                      <a:prstDash val="solid"/>
+                      <a:round/>
+                      <a:headEnd type="none" w="med" len="med"/>
+                      <a:tailEnd type="none" w="med" len="med"/>
+                    </a:lnB>
+                    <a:solidFill>
+                      <a:srgbClr val="F0F4F5"/>
+                    </a:solidFill>
+                  </a:tcPr>
+                </a:tc>
+                <a:tc>
+                  <a:txBody>
+                    <a:bodyPr/>
+                    <a:lstStyle/>
+                    <a:p>
+                      <a:pPr indent="0" marL="0">
+                        <a:buNone/>
+                      </a:pPr>
+                      <a:r>
+                        <a:rPr lang="en-US" sz="930" dirty="0">
+                          <a:solidFill>
+                            <a:srgbClr val="5B6B73"/>
+                          </a:solidFill>
+                          <a:latin typeface="Calibri" pitchFamily="34" charset="0"/>
+                          <a:ea typeface="Calibri" pitchFamily="34" charset="-122"/>
+                          <a:cs typeface="Calibri" pitchFamily="34" charset="-120"/>
+                        </a:rPr>
+                        <a:t>FPSO Frade</a:t>
+                      </a:r>
+                      <a:endParaRPr lang="en-US" sz="930" dirty="0">
+                        <a:latin typeface="Calibri" charset="0"/>
+                        <a:ea typeface="Calibri" charset="0"/>
+                        <a:cs typeface="Calibri" charset="0"/>
+                      </a:endParaRPr>
+                    </a:p>
+                  </a:txBody>
+                  <a:tcPr marL="91440" marR="91440" marT="45720" marB="45720" anchor="ctr">
+                    <a:lnL w="6350" cap="flat" cmpd="sng" algn="ctr">
+                      <a:solidFill>
+                        <a:srgbClr val="E3E8E9"/>
+                      </a:solidFill>
+                      <a:prstDash val="solid"/>
+                      <a:round/>
+                      <a:headEnd type="none" w="med" len="med"/>
+                      <a:tailEnd type="none" w="med" len="med"/>
+                    </a:lnL>
+                    <a:lnR w="6350" cap="flat" cmpd="sng" algn="ctr">
+                      <a:solidFill>
+                        <a:srgbClr val="E3E8E9"/>
+                      </a:solidFill>
+                      <a:prstDash val="solid"/>
+                      <a:round/>
+                      <a:headEnd type="none" w="med" len="med"/>
+                      <a:tailEnd type="none" w="med" len="med"/>
+                    </a:lnR>
+                    <a:lnT w="6350" cap="flat" cmpd="sng" algn="ctr">
+                      <a:solidFill>
+                        <a:srgbClr val="E3E8E9"/>
+                      </a:solidFill>
+                      <a:prstDash val="solid"/>
+                      <a:round/>
+                      <a:headEnd type="none" w="med" len="med"/>
+                      <a:tailEnd type="none" w="med" len="med"/>
+                    </a:lnT>
+                    <a:lnB w="6350" cap="flat" cmpd="sng" algn="ctr">
+                      <a:solidFill>
+                        <a:srgbClr val="E3E8E9"/>
+                      </a:solidFill>
+                      <a:prstDash val="solid"/>
+                      <a:round/>
+                      <a:headEnd type="none" w="med" len="med"/>
+                      <a:tailEnd type="none" w="med" len="med"/>
+                    </a:lnB>
+                    <a:solidFill>
+                      <a:srgbClr val="F0F4F5"/>
+                    </a:solidFill>
+                  </a:tcPr>
+                </a:tc>
+                <a:tc>
+                  <a:txBody>
+                    <a:bodyPr/>
+                    <a:lstStyle/>
+                    <a:p>
+                      <a:pPr indent="0" marL="0">
+                        <a:buNone/>
+                      </a:pPr>
+                      <a:r>
+                        <a:rPr lang="en-US" sz="900" dirty="0">
+                          <a:solidFill>
+                            <a:srgbClr val="5B6B73"/>
+                          </a:solidFill>
+                          <a:latin typeface="Calibri" pitchFamily="34" charset="0"/>
+                          <a:ea typeface="Calibri" pitchFamily="34" charset="-122"/>
+                          <a:cs typeface="Calibri" pitchFamily="34" charset="-120"/>
+                        </a:rPr>
+                        <a:t>Bem Estar/Segurança</a:t>
+                      </a:r>
+                      <a:endParaRPr lang="en-US" sz="900" dirty="0">
+                        <a:latin typeface="Calibri" charset="0"/>
+                        <a:ea typeface="Calibri" charset="0"/>
+                        <a:cs typeface="Calibri" charset="0"/>
+                      </a:endParaRPr>
+                    </a:p>
+                  </a:txBody>
+                  <a:tcPr marL="91440" marR="91440" marT="45720" marB="45720" anchor="ctr">
+                    <a:lnL w="6350" cap="flat" cmpd="sng" algn="ctr">
+                      <a:solidFill>
+                        <a:srgbClr val="E3E8E9"/>
+                      </a:solidFill>
+                      <a:prstDash val="solid"/>
+                      <a:round/>
+                      <a:headEnd type="none" w="med" len="med"/>
+                      <a:tailEnd type="none" w="med" len="med"/>
+                    </a:lnL>
+                    <a:lnR w="6350" cap="flat" cmpd="sng" algn="ctr">
+                      <a:solidFill>
+                        <a:srgbClr val="E3E8E9"/>
+                      </a:solidFill>
+                      <a:prstDash val="solid"/>
+                      <a:round/>
+                      <a:headEnd type="none" w="med" len="med"/>
+                      <a:tailEnd type="none" w="med" len="med"/>
+                    </a:lnR>
+                    <a:lnT w="6350" cap="flat" cmpd="sng" algn="ctr">
+                      <a:solidFill>
+                        <a:srgbClr val="E3E8E9"/>
+                      </a:solidFill>
+                      <a:prstDash val="solid"/>
+                      <a:round/>
+                      <a:headEnd type="none" w="med" len="med"/>
+                      <a:tailEnd type="none" w="med" len="med"/>
+                    </a:lnT>
+                    <a:lnB w="6350" cap="flat" cmpd="sng" algn="ctr">
+                      <a:solidFill>
+                        <a:srgbClr val="E3E8E9"/>
+                      </a:solidFill>
+                      <a:prstDash val="solid"/>
+                      <a:round/>
+                      <a:headEnd type="none" w="med" len="med"/>
+                      <a:tailEnd type="none" w="med" len="med"/>
+                    </a:lnB>
+                    <a:solidFill>
+                      <a:srgbClr val="F0F4F5"/>
+                    </a:solidFill>
+                  </a:tcPr>
+                </a:tc>
+                <a:tc>
+                  <a:txBody>
+                    <a:bodyPr/>
+                    <a:lstStyle/>
+                    <a:p>
+                      <a:pPr algn="ctr" indent="0" marL="0">
+                        <a:buNone/>
+                      </a:pPr>
+                      <a:r>
+                        <a:rPr lang="en-US" sz="900" dirty="0">
+                          <a:solidFill>
+                            <a:srgbClr val="5B6B73"/>
+                          </a:solidFill>
+                          <a:latin typeface="Calibri" pitchFamily="34" charset="0"/>
+                          <a:ea typeface="Calibri" pitchFamily="34" charset="-122"/>
+                          <a:cs typeface="Calibri" pitchFamily="34" charset="-120"/>
+                        </a:rPr>
+                        <a:t>CAPEX</a:t>
+                      </a:r>
+                      <a:endParaRPr lang="en-US" sz="900" dirty="0">
+                        <a:latin typeface="Calibri" charset="0"/>
+                        <a:ea typeface="Calibri" charset="0"/>
+                        <a:cs typeface="Calibri" charset="0"/>
+                      </a:endParaRPr>
+                    </a:p>
+                  </a:txBody>
+                  <a:tcPr marL="91440" marR="91440" marT="45720" marB="45720" anchor="ctr">
+                    <a:lnL w="6350" cap="flat" cmpd="sng" algn="ctr">
+                      <a:solidFill>
+                        <a:srgbClr val="E3E8E9"/>
+                      </a:solidFill>
+                      <a:prstDash val="solid"/>
+                      <a:round/>
+                      <a:headEnd type="none" w="med" len="med"/>
+                      <a:tailEnd type="none" w="med" len="med"/>
+                    </a:lnL>
+                    <a:lnR w="6350" cap="flat" cmpd="sng" algn="ctr">
+                      <a:solidFill>
+                        <a:srgbClr val="E3E8E9"/>
+                      </a:solidFill>
+                      <a:prstDash val="solid"/>
+                      <a:round/>
+                      <a:headEnd type="none" w="med" len="med"/>
+                      <a:tailEnd type="none" w="med" len="med"/>
+                    </a:lnR>
+                    <a:lnT w="6350" cap="flat" cmpd="sng" algn="ctr">
+                      <a:solidFill>
+                        <a:srgbClr val="E3E8E9"/>
+                      </a:solidFill>
+                      <a:prstDash val="solid"/>
+                      <a:round/>
+                      <a:headEnd type="none" w="med" len="med"/>
+                      <a:tailEnd type="none" w="med" len="med"/>
+                    </a:lnT>
+                    <a:lnB w="6350" cap="flat" cmpd="sng" algn="ctr">
+                      <a:solidFill>
+                        <a:srgbClr val="E3E8E9"/>
+                      </a:solidFill>
+                      <a:prstDash val="solid"/>
+                      <a:round/>
+                      <a:headEnd type="none" w="med" len="med"/>
+                      <a:tailEnd type="none" w="med" len="med"/>
+                    </a:lnB>
+                    <a:solidFill>
+                      <a:srgbClr val="F0F4F5"/>
+                    </a:solidFill>
+                  </a:tcPr>
+                </a:tc>
+                <a:tc>
+                  <a:txBody>
+                    <a:bodyPr/>
+                    <a:lstStyle/>
+                    <a:p>
+                      <a:pPr algn="r" indent="0" marL="0">
+                        <a:buNone/>
+                      </a:pPr>
+                      <a:r>
+                        <a:rPr lang="en-US" sz="970" b="1" dirty="0">
+                          <a:solidFill>
+                            <a:srgbClr val="0B2A3D"/>
+                          </a:solidFill>
+                          <a:latin typeface="Calibri" pitchFamily="34" charset="0"/>
+                          <a:ea typeface="Calibri" pitchFamily="34" charset="-122"/>
+                          <a:cs typeface="Calibri" pitchFamily="34" charset="-120"/>
+                        </a:rPr>
+                        <a:t>US$ 250,0 mil</a:t>
+                      </a:r>
+                      <a:endParaRPr lang="en-US" sz="970" dirty="0">
+                        <a:latin typeface="Calibri" charset="0"/>
+                        <a:ea typeface="Calibri" charset="0"/>
+                        <a:cs typeface="Calibri" charset="0"/>
+                      </a:endParaRPr>
+                    </a:p>
+                  </a:txBody>
+                  <a:tcPr marL="91440" marR="91440" marT="45720" marB="45720" anchor="ctr">
+                    <a:lnL w="6350" cap="flat" cmpd="sng" algn="ctr">
+                      <a:solidFill>
+                        <a:srgbClr val="E3E8E9"/>
+                      </a:solidFill>
+                      <a:prstDash val="solid"/>
+                      <a:round/>
+                      <a:headEnd type="none" w="med" len="med"/>
+                      <a:tailEnd type="none" w="med" len="med"/>
+                    </a:lnL>
+                    <a:lnR w="6350" cap="flat" cmpd="sng" algn="ctr">
+                      <a:solidFill>
+                        <a:srgbClr val="E3E8E9"/>
+                      </a:solidFill>
+                      <a:prstDash val="solid"/>
+                      <a:round/>
+                      <a:headEnd type="none" w="med" len="med"/>
+                      <a:tailEnd type="none" w="med" len="med"/>
+                    </a:lnR>
+                    <a:lnT w="6350" cap="flat" cmpd="sng" algn="ctr">
+                      <a:solidFill>
+                        <a:srgbClr val="E3E8E9"/>
+                      </a:solidFill>
+                      <a:prstDash val="solid"/>
+                      <a:round/>
+                      <a:headEnd type="none" w="med" len="med"/>
+                      <a:tailEnd type="none" w="med" len="med"/>
+                    </a:lnT>
+                    <a:lnB w="6350" cap="flat" cmpd="sng" algn="ctr">
+                      <a:solidFill>
+                        <a:srgbClr val="E3E8E9"/>
+                      </a:solidFill>
+                      <a:prstDash val="solid"/>
+                      <a:round/>
+                      <a:headEnd type="none" w="med" len="med"/>
+                      <a:tailEnd type="none" w="med" len="med"/>
+                    </a:lnB>
+                    <a:solidFill>
+                      <a:srgbClr val="F0F4F5"/>
+                    </a:solidFill>
+                  </a:tcPr>
+                </a:tc>
+              </a:tr>
+              <a:tr h="288036">
+                <a:tc>
+                  <a:txBody>
+                    <a:bodyPr/>
+                    <a:lstStyle/>
+                    <a:p>
+                      <a:pPr indent="0" marL="0">
+                        <a:buNone/>
+                      </a:pPr>
+                      <a:r>
+                        <a:rPr lang="en-US" sz="970" dirty="0">
+                          <a:solidFill>
+                            <a:srgbClr val="1C2B33"/>
+                          </a:solidFill>
+                          <a:latin typeface="Calibri" pitchFamily="34" charset="0"/>
+                          <a:ea typeface="Calibri" pitchFamily="34" charset="-122"/>
+                          <a:cs typeface="Calibri" pitchFamily="34" charset="-120"/>
+                        </a:rPr>
+                        <a:t>Filtros na Entrada da Água do Mar do Vacuum Condenser - instalação de novos filtros</a:t>
+                      </a:r>
+                      <a:endParaRPr lang="en-US" sz="970" dirty="0">
+                        <a:latin typeface="Calibri" charset="0"/>
+                        <a:ea typeface="Calibri" charset="0"/>
+                        <a:cs typeface="Calibri" charset="0"/>
+                      </a:endParaRPr>
+                    </a:p>
+                  </a:txBody>
+                  <a:tcPr marL="91440" marR="91440" marT="45720" marB="45720" anchor="ctr">
+                    <a:lnL w="6350" cap="flat" cmpd="sng" algn="ctr">
+                      <a:solidFill>
+                        <a:srgbClr val="E3E8E9"/>
+                      </a:solidFill>
+                      <a:prstDash val="solid"/>
+                      <a:round/>
+                      <a:headEnd type="none" w="med" len="med"/>
+                      <a:tailEnd type="none" w="med" len="med"/>
+                    </a:lnL>
+                    <a:lnR w="6350" cap="flat" cmpd="sng" algn="ctr">
+                      <a:solidFill>
+                        <a:srgbClr val="E3E8E9"/>
+                      </a:solidFill>
+                      <a:prstDash val="solid"/>
+                      <a:round/>
+                      <a:headEnd type="none" w="med" len="med"/>
+                      <a:tailEnd type="none" w="med" len="med"/>
+                    </a:lnR>
+                    <a:lnT w="6350" cap="flat" cmpd="sng" algn="ctr">
+                      <a:solidFill>
+                        <a:srgbClr val="E3E8E9"/>
+                      </a:solidFill>
+                      <a:prstDash val="solid"/>
+                      <a:round/>
+                      <a:headEnd type="none" w="med" len="med"/>
+                      <a:tailEnd type="none" w="med" len="med"/>
+                    </a:lnT>
+                    <a:lnB w="6350" cap="flat" cmpd="sng" algn="ctr">
+                      <a:solidFill>
+                        <a:srgbClr val="E3E8E9"/>
+                      </a:solidFill>
+                      <a:prstDash val="solid"/>
+                      <a:round/>
+                      <a:headEnd type="none" w="med" len="med"/>
+                      <a:tailEnd type="none" w="med" len="med"/>
+                    </a:lnB>
+                    <a:solidFill>
+                      <a:srgbClr val="FFFFFF"/>
+                    </a:solidFill>
+                  </a:tcPr>
+                </a:tc>
+                <a:tc>
+                  <a:txBody>
+                    <a:bodyPr/>
+                    <a:lstStyle/>
+                    <a:p>
+                      <a:pPr indent="0" marL="0">
+                        <a:buNone/>
+                      </a:pPr>
+                      <a:r>
+                        <a:rPr lang="en-US" sz="930" dirty="0">
+                          <a:solidFill>
+                            <a:srgbClr val="5B6B73"/>
+                          </a:solidFill>
+                          <a:latin typeface="Calibri" pitchFamily="34" charset="0"/>
+                          <a:ea typeface="Calibri" pitchFamily="34" charset="-122"/>
+                          <a:cs typeface="Calibri" pitchFamily="34" charset="-120"/>
+                        </a:rPr>
+                        <a:t>FPSO Bravo</a:t>
+                      </a:r>
+                      <a:endParaRPr lang="en-US" sz="930" dirty="0">
+                        <a:latin typeface="Calibri" charset="0"/>
+                        <a:ea typeface="Calibri" charset="0"/>
+                        <a:cs typeface="Calibri" charset="0"/>
+                      </a:endParaRPr>
+                    </a:p>
+                  </a:txBody>
+                  <a:tcPr marL="91440" marR="91440" marT="45720" marB="45720" anchor="ctr">
+                    <a:lnL w="6350" cap="flat" cmpd="sng" algn="ctr">
+                      <a:solidFill>
+                        <a:srgbClr val="E3E8E9"/>
+                      </a:solidFill>
+                      <a:prstDash val="solid"/>
+                      <a:round/>
+                      <a:headEnd type="none" w="med" len="med"/>
+                      <a:tailEnd type="none" w="med" len="med"/>
+                    </a:lnL>
+                    <a:lnR w="6350" cap="flat" cmpd="sng" algn="ctr">
+                      <a:solidFill>
+                        <a:srgbClr val="E3E8E9"/>
+                      </a:solidFill>
+                      <a:prstDash val="solid"/>
+                      <a:round/>
+                      <a:headEnd type="none" w="med" len="med"/>
+                      <a:tailEnd type="none" w="med" len="med"/>
+                    </a:lnR>
+                    <a:lnT w="6350" cap="flat" cmpd="sng" algn="ctr">
+                      <a:solidFill>
+                        <a:srgbClr val="E3E8E9"/>
+                      </a:solidFill>
+                      <a:prstDash val="solid"/>
+                      <a:round/>
+                      <a:headEnd type="none" w="med" len="med"/>
+                      <a:tailEnd type="none" w="med" len="med"/>
+                    </a:lnT>
+                    <a:lnB w="6350" cap="flat" cmpd="sng" algn="ctr">
+                      <a:solidFill>
+                        <a:srgbClr val="E3E8E9"/>
+                      </a:solidFill>
+                      <a:prstDash val="solid"/>
+                      <a:round/>
+                      <a:headEnd type="none" w="med" len="med"/>
+                      <a:tailEnd type="none" w="med" len="med"/>
+                    </a:lnB>
+                    <a:solidFill>
+                      <a:srgbClr val="FFFFFF"/>
+                    </a:solidFill>
+                  </a:tcPr>
+                </a:tc>
+                <a:tc>
+                  <a:txBody>
+                    <a:bodyPr/>
+                    <a:lstStyle/>
+                    <a:p>
+                      <a:pPr indent="0" marL="0">
+                        <a:buNone/>
+                      </a:pPr>
+                      <a:r>
+                        <a:rPr lang="en-US" sz="900" dirty="0">
+                          <a:solidFill>
+                            <a:srgbClr val="5B6B73"/>
+                          </a:solidFill>
+                          <a:latin typeface="Calibri" pitchFamily="34" charset="0"/>
+                          <a:ea typeface="Calibri" pitchFamily="34" charset="-122"/>
+                          <a:cs typeface="Calibri" pitchFamily="34" charset="-120"/>
+                        </a:rPr>
+                        <a:t>Eficiência de Produção</a:t>
+                      </a:r>
+                      <a:endParaRPr lang="en-US" sz="900" dirty="0">
+                        <a:latin typeface="Calibri" charset="0"/>
+                        <a:ea typeface="Calibri" charset="0"/>
+                        <a:cs typeface="Calibri" charset="0"/>
+                      </a:endParaRPr>
+                    </a:p>
+                  </a:txBody>
+                  <a:tcPr marL="91440" marR="91440" marT="45720" marB="45720" anchor="ctr">
+                    <a:lnL w="6350" cap="flat" cmpd="sng" algn="ctr">
+                      <a:solidFill>
+                        <a:srgbClr val="E3E8E9"/>
+                      </a:solidFill>
+                      <a:prstDash val="solid"/>
+                      <a:round/>
+                      <a:headEnd type="none" w="med" len="med"/>
+                      <a:tailEnd type="none" w="med" len="med"/>
+                    </a:lnL>
+                    <a:lnR w="6350" cap="flat" cmpd="sng" algn="ctr">
+                      <a:solidFill>
+                        <a:srgbClr val="E3E8E9"/>
+                      </a:solidFill>
+                      <a:prstDash val="solid"/>
+                      <a:round/>
+                      <a:headEnd type="none" w="med" len="med"/>
+                      <a:tailEnd type="none" w="med" len="med"/>
+                    </a:lnR>
+                    <a:lnT w="6350" cap="flat" cmpd="sng" algn="ctr">
+                      <a:solidFill>
+                        <a:srgbClr val="E3E8E9"/>
+                      </a:solidFill>
+                      <a:prstDash val="solid"/>
+                      <a:round/>
+                      <a:headEnd type="none" w="med" len="med"/>
+                      <a:tailEnd type="none" w="med" len="med"/>
+                    </a:lnT>
+                    <a:lnB w="6350" cap="flat" cmpd="sng" algn="ctr">
+                      <a:solidFill>
+                        <a:srgbClr val="E3E8E9"/>
+                      </a:solidFill>
+                      <a:prstDash val="solid"/>
+                      <a:round/>
+                      <a:headEnd type="none" w="med" len="med"/>
+                      <a:tailEnd type="none" w="med" len="med"/>
+                    </a:lnB>
+                    <a:solidFill>
+                      <a:srgbClr val="FFFFFF"/>
+                    </a:solidFill>
+                  </a:tcPr>
+                </a:tc>
+                <a:tc>
+                  <a:txBody>
+                    <a:bodyPr/>
+                    <a:lstStyle/>
+                    <a:p>
+                      <a:pPr algn="ctr" indent="0" marL="0">
+                        <a:buNone/>
+                      </a:pPr>
+                      <a:r>
+                        <a:rPr lang="en-US" sz="900" dirty="0">
+                          <a:solidFill>
+                            <a:srgbClr val="5B6B73"/>
+                          </a:solidFill>
+                          <a:latin typeface="Calibri" pitchFamily="34" charset="0"/>
+                          <a:ea typeface="Calibri" pitchFamily="34" charset="-122"/>
+                          <a:cs typeface="Calibri" pitchFamily="34" charset="-120"/>
+                        </a:rPr>
+                        <a:t>CAPEX</a:t>
+                      </a:r>
+                      <a:endParaRPr lang="en-US" sz="900" dirty="0">
+                        <a:latin typeface="Calibri" charset="0"/>
+                        <a:ea typeface="Calibri" charset="0"/>
+                        <a:cs typeface="Calibri" charset="0"/>
+                      </a:endParaRPr>
+                    </a:p>
+                  </a:txBody>
+                  <a:tcPr marL="91440" marR="91440" marT="45720" marB="45720" anchor="ctr">
+                    <a:lnL w="6350" cap="flat" cmpd="sng" algn="ctr">
+                      <a:solidFill>
+                        <a:srgbClr val="E3E8E9"/>
+                      </a:solidFill>
+                      <a:prstDash val="solid"/>
+                      <a:round/>
+                      <a:headEnd type="none" w="med" len="med"/>
+                      <a:tailEnd type="none" w="med" len="med"/>
+                    </a:lnL>
+                    <a:lnR w="6350" cap="flat" cmpd="sng" algn="ctr">
+                      <a:solidFill>
+                        <a:srgbClr val="E3E8E9"/>
+                      </a:solidFill>
+                      <a:prstDash val="solid"/>
+                      <a:round/>
+                      <a:headEnd type="none" w="med" len="med"/>
+                      <a:tailEnd type="none" w="med" len="med"/>
+                    </a:lnR>
+                    <a:lnT w="6350" cap="flat" cmpd="sng" algn="ctr">
+                      <a:solidFill>
+                        <a:srgbClr val="E3E8E9"/>
+                      </a:solidFill>
+                      <a:prstDash val="solid"/>
+                      <a:round/>
+                      <a:headEnd type="none" w="med" len="med"/>
+                      <a:tailEnd type="none" w="med" len="med"/>
+                    </a:lnT>
+                    <a:lnB w="6350" cap="flat" cmpd="sng" algn="ctr">
+                      <a:solidFill>
+                        <a:srgbClr val="E3E8E9"/>
+                      </a:solidFill>
+                      <a:prstDash val="solid"/>
+                      <a:round/>
+                      <a:headEnd type="none" w="med" len="med"/>
+                      <a:tailEnd type="none" w="med" len="med"/>
+                    </a:lnB>
+                    <a:solidFill>
+                      <a:srgbClr val="FFFFFF"/>
+                    </a:solidFill>
+                  </a:tcPr>
+                </a:tc>
+                <a:tc>
+                  <a:txBody>
+                    <a:bodyPr/>
+                    <a:lstStyle/>
+                    <a:p>
+                      <a:pPr algn="r" indent="0" marL="0">
+                        <a:buNone/>
+                      </a:pPr>
+                      <a:r>
+                        <a:rPr lang="en-US" sz="970" b="1" dirty="0">
+                          <a:solidFill>
+                            <a:srgbClr val="0B2A3D"/>
+                          </a:solidFill>
+                          <a:latin typeface="Calibri" pitchFamily="34" charset="0"/>
+                          <a:ea typeface="Calibri" pitchFamily="34" charset="-122"/>
+                          <a:cs typeface="Calibri" pitchFamily="34" charset="-120"/>
+                        </a:rPr>
+                        <a:t>US$ 239,7 mil</a:t>
+                      </a:r>
+                      <a:endParaRPr lang="en-US" sz="970" dirty="0">
+                        <a:latin typeface="Calibri" charset="0"/>
+                        <a:ea typeface="Calibri" charset="0"/>
+                        <a:cs typeface="Calibri" charset="0"/>
+                      </a:endParaRPr>
+                    </a:p>
+                  </a:txBody>
+                  <a:tcPr marL="91440" marR="91440" marT="45720" marB="45720" anchor="ctr">
+                    <a:lnL w="6350" cap="flat" cmpd="sng" algn="ctr">
+                      <a:solidFill>
+                        <a:srgbClr val="E3E8E9"/>
+                      </a:solidFill>
+                      <a:prstDash val="solid"/>
+                      <a:round/>
+                      <a:headEnd type="none" w="med" len="med"/>
+                      <a:tailEnd type="none" w="med" len="med"/>
+                    </a:lnL>
+                    <a:lnR w="6350" cap="flat" cmpd="sng" algn="ctr">
+                      <a:solidFill>
+                        <a:srgbClr val="E3E8E9"/>
+                      </a:solidFill>
+                      <a:prstDash val="solid"/>
+                      <a:round/>
+                      <a:headEnd type="none" w="med" len="med"/>
+                      <a:tailEnd type="none" w="med" len="med"/>
+                    </a:lnR>
+                    <a:lnT w="6350" cap="flat" cmpd="sng" algn="ctr">
+                      <a:solidFill>
+                        <a:srgbClr val="E3E8E9"/>
+                      </a:solidFill>
+                      <a:prstDash val="solid"/>
+                      <a:round/>
+                      <a:headEnd type="none" w="med" len="med"/>
+                      <a:tailEnd type="none" w="med" len="med"/>
+                    </a:lnT>
+                    <a:lnB w="6350" cap="flat" cmpd="sng" algn="ctr">
+                      <a:solidFill>
+                        <a:srgbClr val="E3E8E9"/>
+                      </a:solidFill>
+                      <a:prstDash val="solid"/>
+                      <a:round/>
+                      <a:headEnd type="none" w="med" len="med"/>
+                      <a:tailEnd type="none" w="med" len="med"/>
+                    </a:lnB>
+                    <a:solidFill>
+                      <a:srgbClr val="FFFFFF"/>
+                    </a:solidFill>
+                  </a:tcPr>
+                </a:tc>
+              </a:tr>
+              <a:tr h="288036">
+                <a:tc gridSpan="4">
+                  <a:txBody>
+                    <a:bodyPr/>
+                    <a:lstStyle/>
+                    <a:p>
+                      <a:pPr indent="0" marL="0">
+                        <a:buNone/>
+                      </a:pPr>
+                      <a:r>
+                        <a:rPr lang="en-US" sz="950" i="1" dirty="0">
+                          <a:solidFill>
+                            <a:srgbClr val="7A2E2E"/>
+                          </a:solidFill>
+                          <a:latin typeface="Calibri" pitchFamily="34" charset="0"/>
+                          <a:ea typeface="Calibri" pitchFamily="34" charset="-122"/>
+                          <a:cs typeface="Calibri" pitchFamily="34" charset="-120"/>
+                        </a:rPr>
+                        <a:t>Outros 112 escopos despriorizados (itens de menor valor individual)</a:t>
+                      </a:r>
+                      <a:endParaRPr lang="en-US" sz="950" dirty="0">
+                        <a:latin typeface="Calibri" charset="0"/>
+                        <a:ea typeface="Calibri" charset="0"/>
+                        <a:cs typeface="Calibri" charset="0"/>
+                      </a:endParaRPr>
+                    </a:p>
+                  </a:txBody>
+                  <a:tcPr marL="91440" marR="91440" marT="45720" marB="45720" anchor="ctr">
+                    <a:lnL w="6350" cap="flat" cmpd="sng" algn="ctr">
+                      <a:solidFill>
+                        <a:srgbClr val="E3E8E9"/>
+                      </a:solidFill>
+                      <a:prstDash val="solid"/>
+                      <a:round/>
+                      <a:headEnd type="none" w="med" len="med"/>
+                      <a:tailEnd type="none" w="med" len="med"/>
+                    </a:lnL>
+                    <a:lnR w="6350" cap="flat" cmpd="sng" algn="ctr">
+                      <a:solidFill>
+                        <a:srgbClr val="E3E8E9"/>
+                      </a:solidFill>
+                      <a:prstDash val="solid"/>
+                      <a:round/>
+                      <a:headEnd type="none" w="med" len="med"/>
+                      <a:tailEnd type="none" w="med" len="med"/>
+                    </a:lnR>
+                    <a:lnT w="6350" cap="flat" cmpd="sng" algn="ctr">
+                      <a:solidFill>
+                        <a:srgbClr val="E3E8E9"/>
+                      </a:solidFill>
+                      <a:prstDash val="solid"/>
+                      <a:round/>
+                      <a:headEnd type="none" w="med" len="med"/>
+                      <a:tailEnd type="none" w="med" len="med"/>
+                    </a:lnT>
+                    <a:lnB w="6350" cap="flat" cmpd="sng" algn="ctr">
+                      <a:solidFill>
+                        <a:srgbClr val="E3E8E9"/>
+                      </a:solidFill>
+                      <a:prstDash val="solid"/>
+                      <a:round/>
+                      <a:headEnd type="none" w="med" len="med"/>
+                      <a:tailEnd type="none" w="med" len="med"/>
+                    </a:lnB>
+                    <a:solidFill>
+                      <a:srgbClr val="F2E2E2"/>
+                    </a:solidFill>
+                  </a:tcPr>
+                </a:tc>
+                <a:tc hMerge="1">
+                  <a:tcPr/>
+                </a:tc>
+                <a:tc hMerge="1">
+                  <a:tcPr/>
+                </a:tc>
+                <a:tc hMerge="1">
+                  <a:tcPr/>
+                </a:tc>
+                <a:tc>
+                  <a:txBody>
+                    <a:bodyPr/>
+                    <a:lstStyle/>
+                    <a:p>
+                      <a:pPr algn="r" indent="0" marL="0">
+                        <a:buNone/>
+                      </a:pPr>
+                      <a:r>
+                        <a:rPr lang="en-US" sz="1000" b="1" i="1" dirty="0">
+                          <a:solidFill>
+                            <a:srgbClr val="0B2A3D"/>
+                          </a:solidFill>
+                          <a:latin typeface="Calibri" pitchFamily="34" charset="0"/>
+                          <a:ea typeface="Calibri" pitchFamily="34" charset="-122"/>
+                          <a:cs typeface="Calibri" pitchFamily="34" charset="-120"/>
+                        </a:rPr>
+                        <a:t>US$ 6,6 mi</a:t>
+                      </a:r>
+                      <a:endParaRPr lang="en-US" sz="1000" dirty="0">
+                        <a:latin typeface="Calibri" charset="0"/>
+                        <a:ea typeface="Calibri" charset="0"/>
+                        <a:cs typeface="Calibri" charset="0"/>
+                      </a:endParaRPr>
+                    </a:p>
+                  </a:txBody>
+                  <a:tcPr marL="91440" marR="91440" marT="45720" marB="45720" anchor="ctr">
+                    <a:lnL w="6350" cap="flat" cmpd="sng" algn="ctr">
+                      <a:solidFill>
+                        <a:srgbClr val="E3E8E9"/>
+                      </a:solidFill>
+                      <a:prstDash val="solid"/>
+                      <a:round/>
+                      <a:headEnd type="none" w="med" len="med"/>
+                      <a:tailEnd type="none" w="med" len="med"/>
+                    </a:lnL>
+                    <a:lnR w="6350" cap="flat" cmpd="sng" algn="ctr">
+                      <a:solidFill>
+                        <a:srgbClr val="E3E8E9"/>
+                      </a:solidFill>
+                      <a:prstDash val="solid"/>
+                      <a:round/>
+                      <a:headEnd type="none" w="med" len="med"/>
+                      <a:tailEnd type="none" w="med" len="med"/>
+                    </a:lnR>
+                    <a:lnT w="6350" cap="flat" cmpd="sng" algn="ctr">
+                      <a:solidFill>
+                        <a:srgbClr val="E3E8E9"/>
+                      </a:solidFill>
+                      <a:prstDash val="solid"/>
+                      <a:round/>
+                      <a:headEnd type="none" w="med" len="med"/>
+                      <a:tailEnd type="none" w="med" len="med"/>
+                    </a:lnT>
+                    <a:lnB w="6350" cap="flat" cmpd="sng" algn="ctr">
+                      <a:solidFill>
+                        <a:srgbClr val="E3E8E9"/>
+                      </a:solidFill>
+                      <a:prstDash val="solid"/>
+                      <a:round/>
+                      <a:headEnd type="none" w="med" len="med"/>
+                      <a:tailEnd type="none" w="med" len="med"/>
+                    </a:lnB>
+                    <a:solidFill>
+                      <a:srgbClr val="F2E2E2"/>
+                    </a:solidFill>
+                  </a:tcPr>
+                </a:tc>
+              </a:tr>
+            </a:tbl>
+          </a:graphicData>
+        </a:graphic>
+      </p:graphicFrame>
+      <p:sp>
+        <p:nvSpPr>
+          <p:cNvPr id="7" name="Text 4"/>
+          <p:cNvSpPr txBox="1"/>
+          <p:nvPr/>
+        </p:nvSpPr>
+        <p:spPr>
+          <a:xfrm>
+            <a:off x="457200" y="6382512"/>
+            <a:ext cx="11247120" cy="274320"/>
+          </a:xfrm>
+          <a:prstGeom prst="rect">
+            <a:avLst/>
+          </a:prstGeom>
+          <a:noFill/>
+          <a:ln/>
+        </p:spPr>
+        <p:txBody>
+          <a:bodyPr wrap="square" lIns="0" tIns="0" rIns="0" bIns="0" rtlCol="0" anchor="ctr"/>
+          <a:lstStyle/>
+          <a:p>
+            <a:pPr indent="0" marL="0">
+              <a:buNone/>
+            </a:pPr>
+            <a:r>
+              <a:rPr lang="en-US" sz="850" i="1" dirty="0">
+                <a:solidFill>
+                  <a:srgbClr val="8A979D"/>
+                </a:solidFill>
+                <a:latin typeface="Calibri" pitchFamily="34" charset="0"/>
+                <a:ea typeface="Calibri" pitchFamily="34" charset="-122"/>
+                <a:cs typeface="Calibri" pitchFamily="34" charset="-120"/>
+              </a:rPr>
+              <a:t>Fonte: aba 'Recusadas' de cada arquivo · itens não aprovados para o plano 2027, agrupados por escopo. Total despriorizado (CAPEX+OPEX): US$ 37,4 mi. Não compõe o CAPEX/OPEX do plano.</a:t>
+            </a:r>
+            <a:endParaRPr lang="en-US" sz="850" dirty="0"/>
+          </a:p>
+        </p:txBody>
+      </p:sp>
+      <p:sp>
+        <p:nvSpPr>
+          <p:cNvPr id="8" name="Text 5"/>
+          <p:cNvSpPr txBox="1"/>
+          <p:nvPr/>
+        </p:nvSpPr>
+        <p:spPr>
+          <a:xfrm>
+            <a:off x="457200" y="6565392"/>
+            <a:ext cx="7315200" cy="228600"/>
+          </a:xfrm>
+          <a:prstGeom prst="rect">
+            <a:avLst/>
+          </a:prstGeom>
+          <a:noFill/>
+          <a:ln/>
+        </p:spPr>
+        <p:txBody>
+          <a:bodyPr wrap="square" lIns="0" tIns="0" rIns="0" bIns="0" rtlCol="0" anchor="ctr"/>
+          <a:lstStyle/>
+          <a:p>
+            <a:pPr indent="0" marL="0">
+              <a:buNone/>
+            </a:pPr>
+            <a:r>
+              <a:rPr lang="en-US" sz="800" spc="100" kern="0" dirty="0">
+                <a:solidFill>
+                  <a:srgbClr val="8A979D"/>
+                </a:solidFill>
+                <a:latin typeface="Calibri" pitchFamily="34" charset="0"/>
+                <a:ea typeface="Calibri" pitchFamily="34" charset="-122"/>
+                <a:cs typeface="Calibri" pitchFamily="34" charset="-120"/>
+              </a:rPr>
+              <a:t>PRIO · CAMPO PEREGRINO, CLUSTER SUL &amp; FPSO FRADE</a:t>
+            </a:r>
+            <a:endParaRPr lang="en-US" sz="800" dirty="0"/>
+          </a:p>
+        </p:txBody>
+      </p:sp>
+      <p:sp>
+        <p:nvSpPr>
+          <p:cNvPr id="9" name="Text 6"/>
+          <p:cNvSpPr txBox="1"/>
+          <p:nvPr/>
+        </p:nvSpPr>
+        <p:spPr>
+          <a:xfrm>
+            <a:off x="6248095" y="6565392"/>
+            <a:ext cx="5486400" cy="228600"/>
+          </a:xfrm>
+          <a:prstGeom prst="rect">
+            <a:avLst/>
+          </a:prstGeom>
+          <a:noFill/>
+          <a:ln/>
+        </p:spPr>
+        <p:txBody>
+          <a:bodyPr wrap="square" lIns="0" tIns="0" rIns="0" bIns="0" rtlCol="0" anchor="ctr"/>
+          <a:lstStyle/>
+          <a:p>
+            <a:pPr algn="r" indent="0" marL="0">
+              <a:buNone/>
+            </a:pPr>
+            <a:r>
+              <a:rPr lang="en-US" sz="800" dirty="0">
+                <a:solidFill>
+                  <a:srgbClr val="8A979D"/>
+                </a:solidFill>
+                <a:latin typeface="Calibri" pitchFamily="34" charset="0"/>
+                <a:ea typeface="Calibri" pitchFamily="34" charset="-122"/>
+                <a:cs typeface="Calibri" pitchFamily="34" charset="-120"/>
+              </a:rPr>
+              <a:t>Plano de Trabalho 2027 · Confidencial - Uso Interno</a:t>
+            </a:r>
+            <a:endParaRPr lang="en-US" sz="800" dirty="0"/>
+          </a:p>
+        </p:txBody>
+      </p:sp>
+    </p:spTree>
+  </p:cSld>
+  <p:clrMapOvr>
+    <a:masterClrMapping/>
+  </p:clrMapOvr>
+</p:sld>
+</file>
+
 <file path=ppt/theme/theme1.xml><?xml version="1.0" encoding="utf-8"?>
 <a:theme xmlns:a="http://schemas.openxmlformats.org/drawingml/2006/main" name="Office Theme">
   <a:themeElements>

--- a/PRIO_Top_CAPEX_OPEX_Despriorizados_2027.pptx
+++ b/PRIO_Top_CAPEX_OPEX_Despriorizados_2027.pptx
@@ -21178,7 +21178,7 @@
                 <a:ea typeface="Cambria" pitchFamily="34" charset="-122"/>
                 <a:cs typeface="Cambria" pitchFamily="34" charset="-120"/>
               </a:rPr>
-              <a:t>Top 5 CAPEX por Ativo · FPSO Frade</a:t>
+              <a:t>Top 5 OPEX por Ativo · FPSO Frade</a:t>
             </a:r>
             <a:endParaRPr lang="en-US" sz="2400" dirty="0"/>
           </a:p>
@@ -21217,7 +21217,7 @@
                 <a:ea typeface="Calibri" pitchFamily="34" charset="-122"/>
                 <a:cs typeface="Calibri" pitchFamily="34" charset="-120"/>
               </a:rPr>
-              <a:t>Ano 2027 · maiores escopos individuais de CAPEX, dentro de cada ativo do grupo</a:t>
+              <a:t>Ano 2027 · maiores escopos individuais de OPEX (status 'Contar' + 'TA'), dentro de cada ativo do grupo · OPEX total do grupo: US$ 26,9 mi</a:t>
             </a:r>
             <a:endParaRPr lang="en-US" sz="1250" dirty="0"/>
           </a:p>
@@ -21306,7 +21306,7 @@
                           <a:ea typeface="Calibri" pitchFamily="34" charset="-122"/>
                           <a:cs typeface="Calibri" pitchFamily="34" charset="-120"/>
                         </a:rPr>
-                        <a:t>SUBSTITUIÇÃO DOS BOOGIES DO TURRET</a:t>
+                        <a:t>Time de Hotelaria</a:t>
                       </a:r>
                       <a:endParaRPr lang="en-US" sz="1150" dirty="0">
                         <a:latin typeface="Calibri" charset="0"/>
@@ -21374,7 +21374,7 @@
                           <a:ea typeface="Calibri" pitchFamily="34" charset="-122"/>
                           <a:cs typeface="Calibri" pitchFamily="34" charset="-120"/>
                         </a:rPr>
-                        <a:t>US$ 11,4 mi</a:t>
+                        <a:t>US$ 2,3 mi</a:t>
                       </a:r>
                       <a:endParaRPr lang="en-US" sz="1150" dirty="0">
                         <a:latin typeface="Calibri" charset="0"/>
@@ -21444,7 +21444,7 @@
                           <a:ea typeface="Calibri" pitchFamily="34" charset="-122"/>
                           <a:cs typeface="Calibri" pitchFamily="34" charset="-120"/>
                         </a:rPr>
-                        <a:t>Guincho de Pull In + Reforma do Turret</a:t>
+                        <a:t>Campanha de RTI M5</a:t>
                       </a:r>
                       <a:endParaRPr lang="en-US" sz="1150" dirty="0">
                         <a:latin typeface="Calibri" charset="0"/>
@@ -21512,7 +21512,7 @@
                           <a:ea typeface="Calibri" pitchFamily="34" charset="-122"/>
                           <a:cs typeface="Calibri" pitchFamily="34" charset="-120"/>
                         </a:rPr>
-                        <a:t>US$ 8,7 mi</a:t>
+                        <a:t>US$ 2,2 mi</a:t>
                       </a:r>
                       <a:endParaRPr lang="en-US" sz="1150" dirty="0">
                         <a:latin typeface="Calibri" charset="0"/>
@@ -21582,7 +21582,7 @@
                           <a:ea typeface="Calibri" pitchFamily="34" charset="-122"/>
                           <a:cs typeface="Calibri" pitchFamily="34" charset="-120"/>
                         </a:rPr>
-                        <a:t>L3 - TURBINA</a:t>
+                        <a:t>Campanha de Preservação - Pintura</a:t>
                       </a:r>
                       <a:endParaRPr lang="en-US" sz="1150" dirty="0">
                         <a:latin typeface="Calibri" charset="0"/>
@@ -21650,7 +21650,7 @@
                           <a:ea typeface="Calibri" pitchFamily="34" charset="-122"/>
                           <a:cs typeface="Calibri" pitchFamily="34" charset="-120"/>
                         </a:rPr>
-                        <a:t>US$ 6,0 mi</a:t>
+                        <a:t>US$ 1,4 mi</a:t>
                       </a:r>
                       <a:endParaRPr lang="en-US" sz="1150" dirty="0">
                         <a:latin typeface="Calibri" charset="0"/>
@@ -21720,7 +21720,7 @@
                           <a:ea typeface="Calibri" pitchFamily="34" charset="-122"/>
                           <a:cs typeface="Calibri" pitchFamily="34" charset="-120"/>
                         </a:rPr>
-                        <a:t>Frade 100K (Fase 2)</a:t>
+                        <a:t>Reparos Definitivos - Compósito</a:t>
                       </a:r>
                       <a:endParaRPr lang="en-US" sz="1150" dirty="0">
                         <a:latin typeface="Calibri" charset="0"/>
@@ -21788,7 +21788,7 @@
                           <a:ea typeface="Calibri" pitchFamily="34" charset="-122"/>
                           <a:cs typeface="Calibri" pitchFamily="34" charset="-120"/>
                         </a:rPr>
-                        <a:t>US$ 5,4 mi</a:t>
+                        <a:t>US$ 1,3 mi</a:t>
                       </a:r>
                       <a:endParaRPr lang="en-US" sz="1150" dirty="0">
                         <a:latin typeface="Calibri" charset="0"/>
@@ -21858,7 +21858,7 @@
                           <a:ea typeface="Calibri" pitchFamily="34" charset="-122"/>
                           <a:cs typeface="Calibri" pitchFamily="34" charset="-120"/>
                         </a:rPr>
-                        <a:t>SPARE PARTS RECONDICIONAMENTO DOS BOOGIES</a:t>
+                        <a:t>Campanha de Preservação de Costado - Pintura</a:t>
                       </a:r>
                       <a:endParaRPr lang="en-US" sz="1150" dirty="0">
                         <a:latin typeface="Calibri" charset="0"/>
@@ -21926,7 +21926,7 @@
                           <a:ea typeface="Calibri" pitchFamily="34" charset="-122"/>
                           <a:cs typeface="Calibri" pitchFamily="34" charset="-120"/>
                         </a:rPr>
-                        <a:t>US$ 3,2 mi</a:t>
+                        <a:t>US$ 1,1 mi</a:t>
                       </a:r>
                       <a:endParaRPr lang="en-US" sz="1150" dirty="0">
                         <a:latin typeface="Calibri" charset="0"/>
@@ -22015,7 +22015,7 @@
                 <a:ea typeface="Calibri" pitchFamily="34" charset="-122"/>
                 <a:cs typeface="Calibri" pitchFamily="34" charset="-120"/>
               </a:rPr>
-              <a:t>Metodologia: Cost Allocation = CAPEX, status 'Contar'/'TA', agrupado por escopo dentro de cada ativo, excl. Desenvolvimento de Produção.</a:t>
+              <a:t>Metodologia: Cost Allocation = OPEX, status 'Contar'/'TA', agrupado por escopo dentro de cada ativo.</a:t>
             </a:r>
             <a:endParaRPr lang="en-US" sz="850" dirty="0"/>
           </a:p>
@@ -27039,7 +27039,7 @@
                 <a:ea typeface="Cambria" pitchFamily="34" charset="-122"/>
                 <a:cs typeface="Cambria" pitchFamily="34" charset="-120"/>
               </a:rPr>
-              <a:t>Top 5 CAPEX por Ativo · TBMT + Polvo</a:t>
+              <a:t>Top 5 OPEX por Ativo · TBMT + Polvo</a:t>
             </a:r>
             <a:endParaRPr lang="en-US" sz="2400" dirty="0"/>
           </a:p>
@@ -27078,7 +27078,7 @@
                 <a:ea typeface="Calibri" pitchFamily="34" charset="-122"/>
                 <a:cs typeface="Calibri" pitchFamily="34" charset="-120"/>
               </a:rPr>
-              <a:t>Ano 2027 · maiores escopos individuais de CAPEX, dentro de cada ativo do grupo</a:t>
+              <a:t>Ano 2027 · maiores escopos individuais de OPEX (status 'Contar' + 'TA'), dentro de cada ativo do grupo · OPEX total do grupo: US$ 32,3 mi</a:t>
             </a:r>
             <a:endParaRPr lang="en-US" sz="1250" dirty="0"/>
           </a:p>
@@ -27167,7 +27167,7 @@
                           <a:ea typeface="Calibri" pitchFamily="34" charset="-122"/>
                           <a:cs typeface="Calibri" pitchFamily="34" charset="-120"/>
                         </a:rPr>
-                        <a:t>L3 GTG B + MANUTENÇÃO GERADOR 25KH GTG B</a:t>
+                        <a:t>OPERAÇÃO USINA AGGREKO</a:t>
                       </a:r>
                       <a:endParaRPr lang="en-US" sz="1000" dirty="0">
                         <a:latin typeface="Calibri" charset="0"/>
@@ -27235,7 +27235,7 @@
                           <a:ea typeface="Calibri" pitchFamily="34" charset="-122"/>
                           <a:cs typeface="Calibri" pitchFamily="34" charset="-120"/>
                         </a:rPr>
-                        <a:t>US$ 4,8 mi</a:t>
+                        <a:t>US$ 2,0 mi</a:t>
                       </a:r>
                       <a:endParaRPr lang="en-US" sz="1000" dirty="0">
                         <a:latin typeface="Calibri" charset="0"/>
@@ -27305,7 +27305,7 @@
                           <a:ea typeface="Calibri" pitchFamily="34" charset="-122"/>
                           <a:cs typeface="Calibri" pitchFamily="34" charset="-120"/>
                         </a:rPr>
-                        <a:t>TA - Mecânica</a:t>
+                        <a:t>Baixa de Material Mecânico</a:t>
                       </a:r>
                       <a:endParaRPr lang="en-US" sz="1000" dirty="0">
                         <a:latin typeface="Calibri" charset="0"/>
@@ -27373,7 +27373,7 @@
                           <a:ea typeface="Calibri" pitchFamily="34" charset="-122"/>
                           <a:cs typeface="Calibri" pitchFamily="34" charset="-120"/>
                         </a:rPr>
-                        <a:t>US$ 1,5 mi</a:t>
+                        <a:t>US$ 1,3 mi</a:t>
                       </a:r>
                       <a:endParaRPr lang="en-US" sz="1000" dirty="0">
                         <a:latin typeface="Calibri" charset="0"/>
@@ -27443,7 +27443,7 @@
                           <a:ea typeface="Calibri" pitchFamily="34" charset="-122"/>
                           <a:cs typeface="Calibri" pitchFamily="34" charset="-120"/>
                         </a:rPr>
-                        <a:t>TA - Swivel - Pacote Hidráulico (OneSubsea)</a:t>
+                        <a:t>Mergulho - Tamponamento da caixa de mar</a:t>
                       </a:r>
                       <a:endParaRPr lang="en-US" sz="1000" dirty="0">
                         <a:latin typeface="Calibri" charset="0"/>
@@ -27511,7 +27511,7 @@
                           <a:ea typeface="Calibri" pitchFamily="34" charset="-122"/>
                           <a:cs typeface="Calibri" pitchFamily="34" charset="-120"/>
                         </a:rPr>
-                        <a:t>US$ 1,4 mi</a:t>
+                        <a:t>US$ 1,2 mi</a:t>
                       </a:r>
                       <a:endParaRPr lang="en-US" sz="1000" dirty="0">
                         <a:latin typeface="Calibri" charset="0"/>
@@ -27581,7 +27581,7 @@
                           <a:ea typeface="Calibri" pitchFamily="34" charset="-122"/>
                           <a:cs typeface="Calibri" pitchFamily="34" charset="-120"/>
                         </a:rPr>
-                        <a:t>TA - Elétrica</a:t>
+                        <a:t>M5 - Time de Construção - Instalações (Fabric, Constr e Mont.)</a:t>
                       </a:r>
                       <a:endParaRPr lang="en-US" sz="1000" dirty="0">
                         <a:latin typeface="Calibri" charset="0"/>
@@ -27649,7 +27649,7 @@
                           <a:ea typeface="Calibri" pitchFamily="34" charset="-122"/>
                           <a:cs typeface="Calibri" pitchFamily="34" charset="-120"/>
                         </a:rPr>
-                        <a:t>US$ 982,4 mil</a:t>
+                        <a:t>US$ 1,1 mi</a:t>
                       </a:r>
                       <a:endParaRPr lang="en-US" sz="1000" dirty="0">
                         <a:latin typeface="Calibri" charset="0"/>
@@ -27719,7 +27719,7 @@
                           <a:ea typeface="Calibri" pitchFamily="34" charset="-122"/>
                           <a:cs typeface="Calibri" pitchFamily="34" charset="-120"/>
                         </a:rPr>
-                        <a:t>TA - Caldeiraria</a:t>
+                        <a:t>Sistema de Dilúvio (FW e FF) - Troca de Tubulações</a:t>
                       </a:r>
                       <a:endParaRPr lang="en-US" sz="1000" dirty="0">
                         <a:latin typeface="Calibri" charset="0"/>
@@ -27787,7 +27787,7 @@
                           <a:ea typeface="Calibri" pitchFamily="34" charset="-122"/>
                           <a:cs typeface="Calibri" pitchFamily="34" charset="-120"/>
                         </a:rPr>
-                        <a:t>US$ 816,1 mil</a:t>
+                        <a:t>US$ 1,1 mi</a:t>
                       </a:r>
                       <a:endParaRPr lang="en-US" sz="1000" dirty="0">
                         <a:latin typeface="Calibri" charset="0"/>
@@ -27926,7 +27926,7 @@
                           <a:ea typeface="Calibri" pitchFamily="34" charset="-122"/>
                           <a:cs typeface="Calibri" pitchFamily="34" charset="-120"/>
                         </a:rPr>
-                        <a:t>Retrofit do Motor - Bomba de Incêndio</a:t>
+                        <a:t>Baixa de Material Mecânico</a:t>
                       </a:r>
                       <a:endParaRPr lang="en-US" sz="1000" dirty="0">
                         <a:latin typeface="Calibri" charset="0"/>
@@ -27994,7 +27994,7 @@
                           <a:ea typeface="Calibri" pitchFamily="34" charset="-122"/>
                           <a:cs typeface="Calibri" pitchFamily="34" charset="-120"/>
                         </a:rPr>
-                        <a:t>US$ 863,1 mil</a:t>
+                        <a:t>US$ 960,0 mil</a:t>
                       </a:r>
                       <a:endParaRPr lang="en-US" sz="1000" dirty="0">
                         <a:latin typeface="Calibri" charset="0"/>
@@ -28064,7 +28064,7 @@
                           <a:ea typeface="Calibri" pitchFamily="34" charset="-122"/>
                           <a:cs typeface="Calibri" pitchFamily="34" charset="-120"/>
                         </a:rPr>
-                        <a:t>Revitalização do compressor de Ar de Instrumento</a:t>
+                        <a:t>Baixa de material Automação</a:t>
                       </a:r>
                       <a:endParaRPr lang="en-US" sz="1000" dirty="0">
                         <a:latin typeface="Calibri" charset="0"/>
@@ -28132,7 +28132,7 @@
                           <a:ea typeface="Calibri" pitchFamily="34" charset="-122"/>
                           <a:cs typeface="Calibri" pitchFamily="34" charset="-120"/>
                         </a:rPr>
-                        <a:t>US$ 544,8 mil</a:t>
+                        <a:t>US$ 628,8 mil</a:t>
                       </a:r>
                       <a:endParaRPr lang="en-US" sz="1000" dirty="0">
                         <a:latin typeface="Calibri" charset="0"/>
@@ -28202,7 +28202,7 @@
                           <a:ea typeface="Calibri" pitchFamily="34" charset="-122"/>
                           <a:cs typeface="Calibri" pitchFamily="34" charset="-120"/>
                         </a:rPr>
-                        <a:t>TA - Compra de Placas de controle dos VFDs Rockwell</a:t>
+                        <a:t>M5 - Time de Construção - Instalações (Fabric, Constr e Mont.)</a:t>
                       </a:r>
                       <a:endParaRPr lang="en-US" sz="1000" dirty="0">
                         <a:latin typeface="Calibri" charset="0"/>
@@ -28270,7 +28270,7 @@
                           <a:ea typeface="Calibri" pitchFamily="34" charset="-122"/>
                           <a:cs typeface="Calibri" pitchFamily="34" charset="-120"/>
                         </a:rPr>
-                        <a:t>US$ 526,1 mil</a:t>
+                        <a:t>US$ 610,0 mil</a:t>
                       </a:r>
                       <a:endParaRPr lang="en-US" sz="1000" dirty="0">
                         <a:latin typeface="Calibri" charset="0"/>
@@ -28340,7 +28340,7 @@
                           <a:ea typeface="Calibri" pitchFamily="34" charset="-122"/>
                           <a:cs typeface="Calibri" pitchFamily="34" charset="-120"/>
                         </a:rPr>
-                        <a:t>MPP - Adequação do sistema de Selagem Multifásica</a:t>
+                        <a:t>Apoio à Manutenção - Time de Construção - Instalações</a:t>
                       </a:r>
                       <a:endParaRPr lang="en-US" sz="1000" dirty="0">
                         <a:latin typeface="Calibri" charset="0"/>
@@ -28408,7 +28408,7 @@
                           <a:ea typeface="Calibri" pitchFamily="34" charset="-122"/>
                           <a:cs typeface="Calibri" pitchFamily="34" charset="-120"/>
                         </a:rPr>
-                        <a:t>US$ 519,2 mil</a:t>
+                        <a:t>US$ 600,0 mil</a:t>
                       </a:r>
                       <a:endParaRPr lang="en-US" sz="1000" dirty="0">
                         <a:latin typeface="Calibri" charset="0"/>
@@ -28478,7 +28478,7 @@
                           <a:ea typeface="Calibri" pitchFamily="34" charset="-122"/>
                           <a:cs typeface="Calibri" pitchFamily="34" charset="-120"/>
                         </a:rPr>
-                        <a:t>TA - Caldeiraria</a:t>
+                        <a:t>Campanha de normatização de DTPs - WHP Polvo-A</a:t>
                       </a:r>
                       <a:endParaRPr lang="en-US" sz="1000" dirty="0">
                         <a:latin typeface="Calibri" charset="0"/>
@@ -28546,7 +28546,7 @@
                           <a:ea typeface="Calibri" pitchFamily="34" charset="-122"/>
                           <a:cs typeface="Calibri" pitchFamily="34" charset="-120"/>
                         </a:rPr>
-                        <a:t>US$ 484,9 mil</a:t>
+                        <a:t>US$ 419,8 mil</a:t>
                       </a:r>
                       <a:endParaRPr lang="en-US" sz="1000" dirty="0">
                         <a:latin typeface="Calibri" charset="0"/>
@@ -28635,7 +28635,7 @@
                 <a:ea typeface="Calibri" pitchFamily="34" charset="-122"/>
                 <a:cs typeface="Calibri" pitchFamily="34" charset="-120"/>
               </a:rPr>
-              <a:t>Metodologia: Cost Allocation = CAPEX, status 'Contar'/'TA', agrupado por escopo dentro de cada ativo, excl. Desenvolvimento de Produção.</a:t>
+              <a:t>Metodologia: Cost Allocation = OPEX, status 'Contar'/'TA', agrupado por escopo dentro de cada ativo.</a:t>
             </a:r>
             <a:endParaRPr lang="en-US" sz="850" dirty="0"/>
           </a:p>
@@ -33659,7 +33659,7 @@
                 <a:ea typeface="Cambria" pitchFamily="34" charset="-122"/>
                 <a:cs typeface="Cambria" pitchFamily="34" charset="-120"/>
               </a:rPr>
-              <a:t>Top 5 CAPEX por Ativo · Peregrino</a:t>
+              <a:t>Top 5 OPEX por Ativo · Peregrino</a:t>
             </a:r>
             <a:endParaRPr lang="en-US" sz="2400" dirty="0"/>
           </a:p>
@@ -33698,7 +33698,7 @@
                 <a:ea typeface="Calibri" pitchFamily="34" charset="-122"/>
                 <a:cs typeface="Calibri" pitchFamily="34" charset="-120"/>
               </a:rPr>
-              <a:t>Ano 2027 · maiores escopos individuais de CAPEX, dentro de cada ativo do grupo</a:t>
+              <a:t>Ano 2027 · maiores escopos individuais de OPEX (status 'Contar' + 'TA'), dentro de cada ativo do grupo · OPEX total do grupo: US$ 96,7 mi</a:t>
             </a:r>
             <a:endParaRPr lang="en-US" sz="1250" dirty="0"/>
           </a:p>
@@ -33787,7 +33787,7 @@
                           <a:ea typeface="Calibri" pitchFamily="34" charset="-122"/>
                           <a:cs typeface="Calibri" pitchFamily="34" charset="-120"/>
                         </a:rPr>
-                        <a:t>Atualização PLC das Turbinas</a:t>
+                        <a:t>Fixo - PRIO + OSM</a:t>
                       </a:r>
                       <a:endParaRPr lang="en-US" sz="1000" dirty="0">
                         <a:latin typeface="Calibri" charset="0"/>
@@ -33855,7 +33855,7 @@
                           <a:ea typeface="Calibri" pitchFamily="34" charset="-122"/>
                           <a:cs typeface="Calibri" pitchFamily="34" charset="-120"/>
                         </a:rPr>
-                        <a:t>US$ 3,1 mi</a:t>
+                        <a:t>US$ 19,6 mi</a:t>
                       </a:r>
                       <a:endParaRPr lang="en-US" sz="1000" dirty="0">
                         <a:latin typeface="Calibri" charset="0"/>
@@ -33925,7 +33925,7 @@
                           <a:ea typeface="Calibri" pitchFamily="34" charset="-122"/>
                           <a:cs typeface="Calibri" pitchFamily="34" charset="-120"/>
                         </a:rPr>
-                        <a:t>Substituição de Internos do Coalescer (TAR)</a:t>
+                        <a:t>Time de Construção - Pintura</a:t>
                       </a:r>
                       <a:endParaRPr lang="en-US" sz="1000" dirty="0">
                         <a:latin typeface="Calibri" charset="0"/>
@@ -33993,7 +33993,7 @@
                           <a:ea typeface="Calibri" pitchFamily="34" charset="-122"/>
                           <a:cs typeface="Calibri" pitchFamily="34" charset="-120"/>
                         </a:rPr>
-                        <a:t>US$ 2,0 mi</a:t>
+                        <a:t>US$ 6,5 mi</a:t>
                       </a:r>
                       <a:endParaRPr lang="en-US" sz="1000" dirty="0">
                         <a:latin typeface="Calibri" charset="0"/>
@@ -34063,7 +34063,7 @@
                           <a:ea typeface="Calibri" pitchFamily="34" charset="-122"/>
                           <a:cs typeface="Calibri" pitchFamily="34" charset="-120"/>
                         </a:rPr>
-                        <a:t>Troca da Membrana do Sistema de Geração de Nitrogênio Alpha e Bravo</a:t>
+                        <a:t>Time de Construção - Instalações (Fabric, Constr e Mont.)</a:t>
                       </a:r>
                       <a:endParaRPr lang="en-US" sz="1000" dirty="0">
                         <a:latin typeface="Calibri" charset="0"/>
@@ -34131,7 +34131,7 @@
                           <a:ea typeface="Calibri" pitchFamily="34" charset="-122"/>
                           <a:cs typeface="Calibri" pitchFamily="34" charset="-120"/>
                         </a:rPr>
-                        <a:t>US$ 1,3 mi</a:t>
+                        <a:t>US$ 2,0 mi</a:t>
                       </a:r>
                       <a:endParaRPr lang="en-US" sz="1000" dirty="0">
                         <a:latin typeface="Calibri" charset="0"/>
@@ -34201,7 +34201,7 @@
                           <a:ea typeface="Calibri" pitchFamily="34" charset="-122"/>
                           <a:cs typeface="Calibri" pitchFamily="34" charset="-120"/>
                         </a:rPr>
-                        <a:t>Overhaul da Bomba Framo (SWLP) - B</a:t>
+                        <a:t>Catering</a:t>
                       </a:r>
                       <a:endParaRPr lang="en-US" sz="1000" dirty="0">
                         <a:latin typeface="Calibri" charset="0"/>
@@ -34269,7 +34269,7 @@
                           <a:ea typeface="Calibri" pitchFamily="34" charset="-122"/>
                           <a:cs typeface="Calibri" pitchFamily="34" charset="-120"/>
                         </a:rPr>
-                        <a:t>US$ 1,3 mi</a:t>
+                        <a:t>US$ 1,9 mi</a:t>
                       </a:r>
                       <a:endParaRPr lang="en-US" sz="1000" dirty="0">
                         <a:latin typeface="Calibri" charset="0"/>
@@ -34339,7 +34339,7 @@
                           <a:ea typeface="Calibri" pitchFamily="34" charset="-122"/>
                           <a:cs typeface="Calibri" pitchFamily="34" charset="-120"/>
                         </a:rPr>
-                        <a:t>Desmobilização - TA</a:t>
+                        <a:t>Tratamento e Descarte de Água do Slop</a:t>
                       </a:r>
                       <a:endParaRPr lang="en-US" sz="1000" dirty="0">
                         <a:latin typeface="Calibri" charset="0"/>
@@ -34407,7 +34407,7 @@
                           <a:ea typeface="Calibri" pitchFamily="34" charset="-122"/>
                           <a:cs typeface="Calibri" pitchFamily="34" charset="-120"/>
                         </a:rPr>
-                        <a:t>US$ 1,0 mi</a:t>
+                        <a:t>US$ 1,7 mi</a:t>
                       </a:r>
                       <a:endParaRPr lang="en-US" sz="1000" dirty="0">
                         <a:latin typeface="Calibri" charset="0"/>
@@ -34546,7 +34546,7 @@
                           <a:ea typeface="Calibri" pitchFamily="34" charset="-122"/>
                           <a:cs typeface="Calibri" pitchFamily="34" charset="-120"/>
                         </a:rPr>
-                        <a:t>Troca da lança do Guindaste Oeste</a:t>
+                        <a:t>Fixo - PRIO + OSM</a:t>
                       </a:r>
                       <a:endParaRPr lang="en-US" sz="1000" dirty="0">
                         <a:latin typeface="Calibri" charset="0"/>
@@ -34614,7 +34614,7 @@
                           <a:ea typeface="Calibri" pitchFamily="34" charset="-122"/>
                           <a:cs typeface="Calibri" pitchFamily="34" charset="-120"/>
                         </a:rPr>
-                        <a:t>US$ 3,5 mi</a:t>
+                        <a:t>US$ 6,7 mi</a:t>
                       </a:r>
                       <a:endParaRPr lang="en-US" sz="1000" dirty="0">
                         <a:latin typeface="Calibri" charset="0"/>
@@ -34684,7 +34684,7 @@
                           <a:ea typeface="Calibri" pitchFamily="34" charset="-122"/>
                           <a:cs typeface="Calibri" pitchFamily="34" charset="-120"/>
                         </a:rPr>
-                        <a:t>Upgrade de obsolescência do INSUM</a:t>
+                        <a:t>Catering</a:t>
                       </a:r>
                       <a:endParaRPr lang="en-US" sz="1000" dirty="0">
                         <a:latin typeface="Calibri" charset="0"/>
@@ -34752,7 +34752,7 @@
                           <a:ea typeface="Calibri" pitchFamily="34" charset="-122"/>
                           <a:cs typeface="Calibri" pitchFamily="34" charset="-120"/>
                         </a:rPr>
-                        <a:t>US$ 2,0 mi</a:t>
+                        <a:t>US$ 1,6 mi</a:t>
                       </a:r>
                       <a:endParaRPr lang="en-US" sz="1000" dirty="0">
                         <a:latin typeface="Calibri" charset="0"/>
@@ -34822,7 +34822,7 @@
                           <a:ea typeface="Calibri" pitchFamily="34" charset="-122"/>
                           <a:cs typeface="Calibri" pitchFamily="34" charset="-120"/>
                         </a:rPr>
-                        <a:t>Desmobilização TA</a:t>
+                        <a:t>Time de Construção - Instalações (Fabric, Constr e Mont.)</a:t>
                       </a:r>
                       <a:endParaRPr lang="en-US" sz="1000" dirty="0">
                         <a:latin typeface="Calibri" charset="0"/>
@@ -34890,7 +34890,7 @@
                           <a:ea typeface="Calibri" pitchFamily="34" charset="-122"/>
                           <a:cs typeface="Calibri" pitchFamily="34" charset="-120"/>
                         </a:rPr>
-                        <a:t>US$ 684,3 mil</a:t>
+                        <a:t>US$ 1,5 mi</a:t>
                       </a:r>
                       <a:endParaRPr lang="en-US" sz="1000" dirty="0">
                         <a:latin typeface="Calibri" charset="0"/>
@@ -34960,7 +34960,7 @@
                           <a:ea typeface="Calibri" pitchFamily="34" charset="-122"/>
                           <a:cs typeface="Calibri" pitchFamily="34" charset="-120"/>
                         </a:rPr>
-                        <a:t>Mobilização TA</a:t>
+                        <a:t>Plano de Gerenciamento de Corrosão</a:t>
                       </a:r>
                       <a:endParaRPr lang="en-US" sz="1000" dirty="0">
                         <a:latin typeface="Calibri" charset="0"/>
@@ -35028,7 +35028,7 @@
                           <a:ea typeface="Calibri" pitchFamily="34" charset="-122"/>
                           <a:cs typeface="Calibri" pitchFamily="34" charset="-120"/>
                         </a:rPr>
-                        <a:t>US$ 684,3 mil</a:t>
+                        <a:t>US$ 976,2 mil</a:t>
                       </a:r>
                       <a:endParaRPr lang="en-US" sz="1000" dirty="0">
                         <a:latin typeface="Calibri" charset="0"/>
@@ -35098,7 +35098,7 @@
                           <a:ea typeface="Calibri" pitchFamily="34" charset="-122"/>
                           <a:cs typeface="Calibri" pitchFamily="34" charset="-120"/>
                         </a:rPr>
-                        <a:t>Instalação Detectores H2S</a:t>
+                        <a:t>Inspeção Jackets</a:t>
                       </a:r>
                       <a:endParaRPr lang="en-US" sz="1000" dirty="0">
                         <a:latin typeface="Calibri" charset="0"/>
@@ -35166,7 +35166,7 @@
                           <a:ea typeface="Calibri" pitchFamily="34" charset="-122"/>
                           <a:cs typeface="Calibri" pitchFamily="34" charset="-120"/>
                         </a:rPr>
-                        <a:t>US$ 603,5 mil</a:t>
+                        <a:t>US$ 400,0 mil</a:t>
                       </a:r>
                       <a:endParaRPr lang="en-US" sz="1000" dirty="0">
                         <a:latin typeface="Calibri" charset="0"/>
@@ -35305,7 +35305,7 @@
                           <a:ea typeface="Calibri" pitchFamily="34" charset="-122"/>
                           <a:cs typeface="Calibri" pitchFamily="34" charset="-120"/>
                         </a:rPr>
-                        <a:t>Upgrade de obsolescência do INSUM</a:t>
+                        <a:t>TIME FIXO PRIO</a:t>
                       </a:r>
                       <a:endParaRPr lang="en-US" sz="1000" dirty="0">
                         <a:latin typeface="Calibri" charset="0"/>
@@ -35373,7 +35373,7 @@
                           <a:ea typeface="Calibri" pitchFamily="34" charset="-122"/>
                           <a:cs typeface="Calibri" pitchFamily="34" charset="-120"/>
                         </a:rPr>
-                        <a:t>US$ 2,0 mi</a:t>
+                        <a:t>US$ 4,8 mi</a:t>
                       </a:r>
                       <a:endParaRPr lang="en-US" sz="1000" dirty="0">
                         <a:latin typeface="Calibri" charset="0"/>
@@ -35443,7 +35443,7 @@
                           <a:ea typeface="Calibri" pitchFamily="34" charset="-122"/>
                           <a:cs typeface="Calibri" pitchFamily="34" charset="-120"/>
                         </a:rPr>
-                        <a:t>Instalação detectores H2S</a:t>
+                        <a:t>Time de Construção - Instalações (Fabric, Constr, Mont e RTI.)</a:t>
                       </a:r>
                       <a:endParaRPr lang="en-US" sz="1000" dirty="0">
                         <a:latin typeface="Calibri" charset="0"/>
@@ -35511,7 +35511,7 @@
                           <a:ea typeface="Calibri" pitchFamily="34" charset="-122"/>
                           <a:cs typeface="Calibri" pitchFamily="34" charset="-120"/>
                         </a:rPr>
-                        <a:t>US$ 603,5 mil</a:t>
+                        <a:t>US$ 2,1 mi</a:t>
                       </a:r>
                       <a:endParaRPr lang="en-US" sz="1000" dirty="0">
                         <a:latin typeface="Calibri" charset="0"/>
@@ -35581,7 +35581,7 @@
                           <a:ea typeface="Calibri" pitchFamily="34" charset="-122"/>
                           <a:cs typeface="Calibri" pitchFamily="34" charset="-120"/>
                         </a:rPr>
-                        <a:t>Desmobilização TA</a:t>
+                        <a:t>TIME FIXO OSM</a:t>
                       </a:r>
                       <a:endParaRPr lang="en-US" sz="1000" dirty="0">
                         <a:latin typeface="Calibri" charset="0"/>
@@ -35649,7 +35649,7 @@
                           <a:ea typeface="Calibri" pitchFamily="34" charset="-122"/>
                           <a:cs typeface="Calibri" pitchFamily="34" charset="-120"/>
                         </a:rPr>
-                        <a:t>US$ 567,3 mil</a:t>
+                        <a:t>US$ 1,9 mi</a:t>
                       </a:r>
                       <a:endParaRPr lang="en-US" sz="1000" dirty="0">
                         <a:latin typeface="Calibri" charset="0"/>
@@ -35719,7 +35719,7 @@
                           <a:ea typeface="Calibri" pitchFamily="34" charset="-122"/>
                           <a:cs typeface="Calibri" pitchFamily="34" charset="-120"/>
                         </a:rPr>
-                        <a:t>Mobilização TA</a:t>
+                        <a:t>TIME FIXO SODEXO</a:t>
                       </a:r>
                       <a:endParaRPr lang="en-US" sz="1000" dirty="0">
                         <a:latin typeface="Calibri" charset="0"/>
@@ -35787,7 +35787,7 @@
                           <a:ea typeface="Calibri" pitchFamily="34" charset="-122"/>
                           <a:cs typeface="Calibri" pitchFamily="34" charset="-120"/>
                         </a:rPr>
-                        <a:t>US$ 567,3 mil</a:t>
+                        <a:t>US$ 1,6 mi</a:t>
                       </a:r>
                       <a:endParaRPr lang="en-US" sz="1000" dirty="0">
                         <a:latin typeface="Calibri" charset="0"/>
@@ -35857,7 +35857,7 @@
                           <a:ea typeface="Calibri" pitchFamily="34" charset="-122"/>
                           <a:cs typeface="Calibri" pitchFamily="34" charset="-120"/>
                         </a:rPr>
-                        <a:t>Instalação de nova unidade de Osmose Reversa</a:t>
+                        <a:t>Plano de Gerenciamento de Corrosão</a:t>
                       </a:r>
                       <a:endParaRPr lang="en-US" sz="1000" dirty="0">
                         <a:latin typeface="Calibri" charset="0"/>
@@ -35925,7 +35925,7 @@
                           <a:ea typeface="Calibri" pitchFamily="34" charset="-122"/>
                           <a:cs typeface="Calibri" pitchFamily="34" charset="-120"/>
                         </a:rPr>
-                        <a:t>US$ 509,4 mil</a:t>
+                        <a:t>US$ 1,3 mi</a:t>
                       </a:r>
                       <a:endParaRPr lang="en-US" sz="1000" dirty="0">
                         <a:latin typeface="Calibri" charset="0"/>
@@ -36064,7 +36064,7 @@
                           <a:ea typeface="Calibri" pitchFamily="34" charset="-122"/>
                           <a:cs typeface="Calibri" pitchFamily="34" charset="-120"/>
                         </a:rPr>
-                        <a:t>Isolamento Térmico e Heat Tracing — Linha de FG (WHP-C)</a:t>
+                        <a:t>TIME FIXO PRIO</a:t>
                       </a:r>
                       <a:endParaRPr lang="en-US" sz="1000" dirty="0">
                         <a:latin typeface="Calibri" charset="0"/>
@@ -36132,7 +36132,7 @@
                           <a:ea typeface="Calibri" pitchFamily="34" charset="-122"/>
                           <a:cs typeface="Calibri" pitchFamily="34" charset="-120"/>
                         </a:rPr>
-                        <a:t>US$ 707,6 mil</a:t>
+                        <a:t>US$ 5,6 mi</a:t>
                       </a:r>
                       <a:endParaRPr lang="en-US" sz="1000" dirty="0">
                         <a:latin typeface="Calibri" charset="0"/>
@@ -36202,7 +36202,7 @@
                           <a:ea typeface="Calibri" pitchFamily="34" charset="-122"/>
                           <a:cs typeface="Calibri" pitchFamily="34" charset="-120"/>
                         </a:rPr>
-                        <a:t>Instalação detectores H2S</a:t>
+                        <a:t>Time de Construção - Instalações (Fabric, Constr e Mont.)</a:t>
                       </a:r>
                       <a:endParaRPr lang="en-US" sz="1000" dirty="0">
                         <a:latin typeface="Calibri" charset="0"/>
@@ -36270,7 +36270,7 @@
                           <a:ea typeface="Calibri" pitchFamily="34" charset="-122"/>
                           <a:cs typeface="Calibri" pitchFamily="34" charset="-120"/>
                         </a:rPr>
-                        <a:t>US$ 603,5 mil</a:t>
+                        <a:t>US$ 3,3 mi</a:t>
                       </a:r>
                       <a:endParaRPr lang="en-US" sz="1000" dirty="0">
                         <a:latin typeface="Calibri" charset="0"/>
@@ -36340,7 +36340,7 @@
                           <a:ea typeface="Calibri" pitchFamily="34" charset="-122"/>
                           <a:cs typeface="Calibri" pitchFamily="34" charset="-120"/>
                         </a:rPr>
-                        <a:t>Desmobilização TA</a:t>
+                        <a:t>TIME FIXO OSM</a:t>
                       </a:r>
                       <a:endParaRPr lang="en-US" sz="1000" dirty="0">
                         <a:latin typeface="Calibri" charset="0"/>
@@ -36408,7 +36408,7 @@
                           <a:ea typeface="Calibri" pitchFamily="34" charset="-122"/>
                           <a:cs typeface="Calibri" pitchFamily="34" charset="-120"/>
                         </a:rPr>
-                        <a:t>US$ 562,5 mil</a:t>
+                        <a:t>US$ 2,2 mi</a:t>
                       </a:r>
                       <a:endParaRPr lang="en-US" sz="1000" dirty="0">
                         <a:latin typeface="Calibri" charset="0"/>
@@ -36478,7 +36478,7 @@
                           <a:ea typeface="Calibri" pitchFamily="34" charset="-122"/>
                           <a:cs typeface="Calibri" pitchFamily="34" charset="-120"/>
                         </a:rPr>
-                        <a:t>Mobilização TA</a:t>
+                        <a:t>TIME FIXO SODEXO</a:t>
                       </a:r>
                       <a:endParaRPr lang="en-US" sz="1000" dirty="0">
                         <a:latin typeface="Calibri" charset="0"/>
@@ -36546,7 +36546,7 @@
                           <a:ea typeface="Calibri" pitchFamily="34" charset="-122"/>
                           <a:cs typeface="Calibri" pitchFamily="34" charset="-120"/>
                         </a:rPr>
-                        <a:t>US$ 562,5 mil</a:t>
+                        <a:t>US$ 2,1 mi</a:t>
                       </a:r>
                       <a:endParaRPr lang="en-US" sz="1000" dirty="0">
                         <a:latin typeface="Calibri" charset="0"/>
@@ -36616,7 +36616,7 @@
                           <a:ea typeface="Calibri" pitchFamily="34" charset="-122"/>
                           <a:cs typeface="Calibri" pitchFamily="34" charset="-120"/>
                         </a:rPr>
-                        <a:t>Upgrade CCTV</a:t>
+                        <a:t>Manutenção Preventiva (L1) da GTG-A</a:t>
                       </a:r>
                       <a:endParaRPr lang="en-US" sz="1000" dirty="0">
                         <a:latin typeface="Calibri" charset="0"/>
@@ -36684,7 +36684,7 @@
                           <a:ea typeface="Calibri" pitchFamily="34" charset="-122"/>
                           <a:cs typeface="Calibri" pitchFamily="34" charset="-120"/>
                         </a:rPr>
-                        <a:t>US$ 465,4 mil</a:t>
+                        <a:t>US$ 708,5 mil</a:t>
                       </a:r>
                       <a:endParaRPr lang="en-US" sz="1000" dirty="0">
                         <a:latin typeface="Calibri" charset="0"/>
@@ -36773,7 +36773,7 @@
                 <a:ea typeface="Calibri" pitchFamily="34" charset="-122"/>
                 <a:cs typeface="Calibri" pitchFamily="34" charset="-120"/>
               </a:rPr>
-              <a:t>Metodologia: Cost Allocation = CAPEX, status 'Contar'/'TA', agrupado por escopo dentro de cada ativo, excl. Desenvolvimento de Produção.</a:t>
+              <a:t>Metodologia: Cost Allocation = OPEX, status 'Contar'/'TA', agrupado por escopo dentro de cada ativo.</a:t>
             </a:r>
             <a:endParaRPr lang="en-US" sz="850" dirty="0"/>
           </a:p>

--- a/PRIO_Top_CAPEX_OPEX_Despriorizados_2027.pptx
+++ b/PRIO_Top_CAPEX_OPEX_Despriorizados_2027.pptx
@@ -21217,7 +21217,7 @@
                 <a:ea typeface="Calibri" pitchFamily="34" charset="-122"/>
                 <a:cs typeface="Calibri" pitchFamily="34" charset="-120"/>
               </a:rPr>
-              <a:t>Ano 2027 · maiores escopos individuais de OPEX (status 'Contar' + 'TA'), dentro de cada ativo do grupo · OPEX total do grupo: US$ 26,9 mi</a:t>
+              <a:t>Ano 2027 · maiores escopos de OPEX nas áreas priorizadas (Manutenção, Suporte Técnico, Confiabilidade, Integridade, Naval, Construção, Projetos) · total nessas áreas: US$ 19,4 mi</a:t>
             </a:r>
             <a:endParaRPr lang="en-US" sz="1250" dirty="0"/>
           </a:p>
@@ -21306,7 +21306,7 @@
                           <a:ea typeface="Calibri" pitchFamily="34" charset="-122"/>
                           <a:cs typeface="Calibri" pitchFamily="34" charset="-120"/>
                         </a:rPr>
-                        <a:t>Time de Hotelaria</a:t>
+                        <a:t>Campanha de RTI M5</a:t>
                       </a:r>
                       <a:endParaRPr lang="en-US" sz="1150" dirty="0">
                         <a:latin typeface="Calibri" charset="0"/>
@@ -21374,7 +21374,7 @@
                           <a:ea typeface="Calibri" pitchFamily="34" charset="-122"/>
                           <a:cs typeface="Calibri" pitchFamily="34" charset="-120"/>
                         </a:rPr>
-                        <a:t>US$ 2,3 mi</a:t>
+                        <a:t>US$ 2,2 mi</a:t>
                       </a:r>
                       <a:endParaRPr lang="en-US" sz="1150" dirty="0">
                         <a:latin typeface="Calibri" charset="0"/>
@@ -21444,7 +21444,7 @@
                           <a:ea typeface="Calibri" pitchFamily="34" charset="-122"/>
                           <a:cs typeface="Calibri" pitchFamily="34" charset="-120"/>
                         </a:rPr>
-                        <a:t>Campanha de RTI M5</a:t>
+                        <a:t>Campanha de Preservação - Pintura</a:t>
                       </a:r>
                       <a:endParaRPr lang="en-US" sz="1150" dirty="0">
                         <a:latin typeface="Calibri" charset="0"/>
@@ -21512,7 +21512,7 @@
                           <a:ea typeface="Calibri" pitchFamily="34" charset="-122"/>
                           <a:cs typeface="Calibri" pitchFamily="34" charset="-120"/>
                         </a:rPr>
-                        <a:t>US$ 2,2 mi</a:t>
+                        <a:t>US$ 1,4 mi</a:t>
                       </a:r>
                       <a:endParaRPr lang="en-US" sz="1150" dirty="0">
                         <a:latin typeface="Calibri" charset="0"/>
@@ -21582,7 +21582,7 @@
                           <a:ea typeface="Calibri" pitchFamily="34" charset="-122"/>
                           <a:cs typeface="Calibri" pitchFamily="34" charset="-120"/>
                         </a:rPr>
-                        <a:t>Campanha de Preservação - Pintura</a:t>
+                        <a:t>Reparos Definitivos - Compósito</a:t>
                       </a:r>
                       <a:endParaRPr lang="en-US" sz="1150" dirty="0">
                         <a:latin typeface="Calibri" charset="0"/>
@@ -21650,7 +21650,7 @@
                           <a:ea typeface="Calibri" pitchFamily="34" charset="-122"/>
                           <a:cs typeface="Calibri" pitchFamily="34" charset="-120"/>
                         </a:rPr>
-                        <a:t>US$ 1,4 mi</a:t>
+                        <a:t>US$ 1,3 mi</a:t>
                       </a:r>
                       <a:endParaRPr lang="en-US" sz="1150" dirty="0">
                         <a:latin typeface="Calibri" charset="0"/>
@@ -21720,7 +21720,7 @@
                           <a:ea typeface="Calibri" pitchFamily="34" charset="-122"/>
                           <a:cs typeface="Calibri" pitchFamily="34" charset="-120"/>
                         </a:rPr>
-                        <a:t>Reparos Definitivos - Compósito</a:t>
+                        <a:t>Campanha de Preservação de Costado - Pintura</a:t>
                       </a:r>
                       <a:endParaRPr lang="en-US" sz="1150" dirty="0">
                         <a:latin typeface="Calibri" charset="0"/>
@@ -21788,7 +21788,7 @@
                           <a:ea typeface="Calibri" pitchFamily="34" charset="-122"/>
                           <a:cs typeface="Calibri" pitchFamily="34" charset="-120"/>
                         </a:rPr>
-                        <a:t>US$ 1,3 mi</a:t>
+                        <a:t>US$ 1,1 mi</a:t>
                       </a:r>
                       <a:endParaRPr lang="en-US" sz="1150" dirty="0">
                         <a:latin typeface="Calibri" charset="0"/>
@@ -21858,7 +21858,7 @@
                           <a:ea typeface="Calibri" pitchFamily="34" charset="-122"/>
                           <a:cs typeface="Calibri" pitchFamily="34" charset="-120"/>
                         </a:rPr>
-                        <a:t>Campanha de Preservação de Costado - Pintura</a:t>
+                        <a:t>OSs CORRETIVAS - 307 Oss COM PEDIDO E VALOR</a:t>
                       </a:r>
                       <a:endParaRPr lang="en-US" sz="1150" dirty="0">
                         <a:latin typeface="Calibri" charset="0"/>
@@ -21926,7 +21926,7 @@
                           <a:ea typeface="Calibri" pitchFamily="34" charset="-122"/>
                           <a:cs typeface="Calibri" pitchFamily="34" charset="-120"/>
                         </a:rPr>
-                        <a:t>US$ 1,1 mi</a:t>
+                        <a:t>US$ 848,4 mil</a:t>
                       </a:r>
                       <a:endParaRPr lang="en-US" sz="1150" dirty="0">
                         <a:latin typeface="Calibri" charset="0"/>
@@ -22015,7 +22015,7 @@
                 <a:ea typeface="Calibri" pitchFamily="34" charset="-122"/>
                 <a:cs typeface="Calibri" pitchFamily="34" charset="-120"/>
               </a:rPr>
-              <a:t>Metodologia: Cost Allocation = OPEX, status 'Contar'/'TA', agrupado por escopo dentro de cada ativo.</a:t>
+              <a:t>Metodologia: Cost Allocation = OPEX, status 'Contar'/'TA', restrito às áreas priorizadas acima, agrupado por escopo dentro de cada ativo.</a:t>
             </a:r>
             <a:endParaRPr lang="en-US" sz="850" dirty="0"/>
           </a:p>
@@ -27078,7 +27078,7 @@
                 <a:ea typeface="Calibri" pitchFamily="34" charset="-122"/>
                 <a:cs typeface="Calibri" pitchFamily="34" charset="-120"/>
               </a:rPr>
-              <a:t>Ano 2027 · maiores escopos individuais de OPEX (status 'Contar' + 'TA'), dentro de cada ativo do grupo · OPEX total do grupo: US$ 32,3 mi</a:t>
+              <a:t>Ano 2027 · maiores escopos de OPEX nas áreas priorizadas (Manutenção, Suporte Técnico, Confiabilidade, Integridade, Naval, Construção, Projetos) · total nessas áreas: US$ 28,4 mi</a:t>
             </a:r>
             <a:endParaRPr lang="en-US" sz="1250" dirty="0"/>
           </a:p>
@@ -28635,7 +28635,7 @@
                 <a:ea typeface="Calibri" pitchFamily="34" charset="-122"/>
                 <a:cs typeface="Calibri" pitchFamily="34" charset="-120"/>
               </a:rPr>
-              <a:t>Metodologia: Cost Allocation = OPEX, status 'Contar'/'TA', agrupado por escopo dentro de cada ativo.</a:t>
+              <a:t>Metodologia: Cost Allocation = OPEX, status 'Contar'/'TA', restrito às áreas priorizadas acima, agrupado por escopo dentro de cada ativo.</a:t>
             </a:r>
             <a:endParaRPr lang="en-US" sz="850" dirty="0"/>
           </a:p>
@@ -33698,7 +33698,7 @@
                 <a:ea typeface="Calibri" pitchFamily="34" charset="-122"/>
                 <a:cs typeface="Calibri" pitchFamily="34" charset="-120"/>
               </a:rPr>
-              <a:t>Ano 2027 · maiores escopos individuais de OPEX (status 'Contar' + 'TA'), dentro de cada ativo do grupo · OPEX total do grupo: US$ 96,7 mi</a:t>
+              <a:t>Ano 2027 · maiores escopos de OPEX nas áreas priorizadas (Manutenção, Suporte Técnico, Confiabilidade, Integridade, Naval, Construção, Projetos) · total nessas áreas: US$ 40,3 mi</a:t>
             </a:r>
             <a:endParaRPr lang="en-US" sz="1250" dirty="0"/>
           </a:p>
@@ -33787,7 +33787,7 @@
                           <a:ea typeface="Calibri" pitchFamily="34" charset="-122"/>
                           <a:cs typeface="Calibri" pitchFamily="34" charset="-120"/>
                         </a:rPr>
-                        <a:t>Fixo - PRIO + OSM</a:t>
+                        <a:t>Time de Construção - Pintura</a:t>
                       </a:r>
                       <a:endParaRPr lang="en-US" sz="1000" dirty="0">
                         <a:latin typeface="Calibri" charset="0"/>
@@ -33855,7 +33855,7 @@
                           <a:ea typeface="Calibri" pitchFamily="34" charset="-122"/>
                           <a:cs typeface="Calibri" pitchFamily="34" charset="-120"/>
                         </a:rPr>
-                        <a:t>US$ 19,6 mi</a:t>
+                        <a:t>US$ 6,5 mi</a:t>
                       </a:r>
                       <a:endParaRPr lang="en-US" sz="1000" dirty="0">
                         <a:latin typeface="Calibri" charset="0"/>
@@ -33925,7 +33925,7 @@
                           <a:ea typeface="Calibri" pitchFamily="34" charset="-122"/>
                           <a:cs typeface="Calibri" pitchFamily="34" charset="-120"/>
                         </a:rPr>
-                        <a:t>Time de Construção - Pintura</a:t>
+                        <a:t>Time de Construção - Instalações (Fabric, Constr e Mont.)</a:t>
                       </a:r>
                       <a:endParaRPr lang="en-US" sz="1000" dirty="0">
                         <a:latin typeface="Calibri" charset="0"/>
@@ -33993,7 +33993,7 @@
                           <a:ea typeface="Calibri" pitchFamily="34" charset="-122"/>
                           <a:cs typeface="Calibri" pitchFamily="34" charset="-120"/>
                         </a:rPr>
-                        <a:t>US$ 6,5 mi</a:t>
+                        <a:t>US$ 2,0 mi</a:t>
                       </a:r>
                       <a:endParaRPr lang="en-US" sz="1000" dirty="0">
                         <a:latin typeface="Calibri" charset="0"/>
@@ -34063,7 +34063,7 @@
                           <a:ea typeface="Calibri" pitchFamily="34" charset="-122"/>
                           <a:cs typeface="Calibri" pitchFamily="34" charset="-120"/>
                         </a:rPr>
-                        <a:t>Time de Construção - Instalações (Fabric, Constr e Mont.)</a:t>
+                        <a:t>Inspeção Interna NR-13 FPSO</a:t>
                       </a:r>
                       <a:endParaRPr lang="en-US" sz="1000" dirty="0">
                         <a:latin typeface="Calibri" charset="0"/>
@@ -34131,7 +34131,7 @@
                           <a:ea typeface="Calibri" pitchFamily="34" charset="-122"/>
                           <a:cs typeface="Calibri" pitchFamily="34" charset="-120"/>
                         </a:rPr>
-                        <a:t>US$ 2,0 mi</a:t>
+                        <a:t>US$ 1,2 mi</a:t>
                       </a:r>
                       <a:endParaRPr lang="en-US" sz="1000" dirty="0">
                         <a:latin typeface="Calibri" charset="0"/>
@@ -34201,7 +34201,7 @@
                           <a:ea typeface="Calibri" pitchFamily="34" charset="-122"/>
                           <a:cs typeface="Calibri" pitchFamily="34" charset="-120"/>
                         </a:rPr>
-                        <a:t>Catering</a:t>
+                        <a:t>Campanha de Tanques</a:t>
                       </a:r>
                       <a:endParaRPr lang="en-US" sz="1000" dirty="0">
                         <a:latin typeface="Calibri" charset="0"/>
@@ -34269,7 +34269,7 @@
                           <a:ea typeface="Calibri" pitchFamily="34" charset="-122"/>
                           <a:cs typeface="Calibri" pitchFamily="34" charset="-120"/>
                         </a:rPr>
-                        <a:t>US$ 1,9 mi</a:t>
+                        <a:t>US$ 1,2 mi</a:t>
                       </a:r>
                       <a:endParaRPr lang="en-US" sz="1000" dirty="0">
                         <a:latin typeface="Calibri" charset="0"/>
@@ -34339,7 +34339,7 @@
                           <a:ea typeface="Calibri" pitchFamily="34" charset="-122"/>
                           <a:cs typeface="Calibri" pitchFamily="34" charset="-120"/>
                         </a:rPr>
-                        <a:t>Tratamento e Descarte de Água do Slop</a:t>
+                        <a:t>Campanha normatização de reparos</a:t>
                       </a:r>
                       <a:endParaRPr lang="en-US" sz="1000" dirty="0">
                         <a:latin typeface="Calibri" charset="0"/>
@@ -34407,7 +34407,7 @@
                           <a:ea typeface="Calibri" pitchFamily="34" charset="-122"/>
                           <a:cs typeface="Calibri" pitchFamily="34" charset="-120"/>
                         </a:rPr>
-                        <a:t>US$ 1,7 mi</a:t>
+                        <a:t>US$ 1,1 mi</a:t>
                       </a:r>
                       <a:endParaRPr lang="en-US" sz="1000" dirty="0">
                         <a:latin typeface="Calibri" charset="0"/>
@@ -34546,7 +34546,7 @@
                           <a:ea typeface="Calibri" pitchFamily="34" charset="-122"/>
                           <a:cs typeface="Calibri" pitchFamily="34" charset="-120"/>
                         </a:rPr>
-                        <a:t>Fixo - PRIO + OSM</a:t>
+                        <a:t>Time de Construção - Instalações (Fabric, Constr e Mont.)</a:t>
                       </a:r>
                       <a:endParaRPr lang="en-US" sz="1000" dirty="0">
                         <a:latin typeface="Calibri" charset="0"/>
@@ -34614,7 +34614,7 @@
                           <a:ea typeface="Calibri" pitchFamily="34" charset="-122"/>
                           <a:cs typeface="Calibri" pitchFamily="34" charset="-120"/>
                         </a:rPr>
-                        <a:t>US$ 6,7 mi</a:t>
+                        <a:t>US$ 1,5 mi</a:t>
                       </a:r>
                       <a:endParaRPr lang="en-US" sz="1000" dirty="0">
                         <a:latin typeface="Calibri" charset="0"/>
@@ -34684,7 +34684,7 @@
                           <a:ea typeface="Calibri" pitchFamily="34" charset="-122"/>
                           <a:cs typeface="Calibri" pitchFamily="34" charset="-120"/>
                         </a:rPr>
-                        <a:t>Catering</a:t>
+                        <a:t>Plano de Gerenciamento de Corrosão</a:t>
                       </a:r>
                       <a:endParaRPr lang="en-US" sz="1000" dirty="0">
                         <a:latin typeface="Calibri" charset="0"/>
@@ -34752,7 +34752,7 @@
                           <a:ea typeface="Calibri" pitchFamily="34" charset="-122"/>
                           <a:cs typeface="Calibri" pitchFamily="34" charset="-120"/>
                         </a:rPr>
-                        <a:t>US$ 1,6 mi</a:t>
+                        <a:t>US$ 976,2 mil</a:t>
                       </a:r>
                       <a:endParaRPr lang="en-US" sz="1000" dirty="0">
                         <a:latin typeface="Calibri" charset="0"/>
@@ -34822,7 +34822,7 @@
                           <a:ea typeface="Calibri" pitchFamily="34" charset="-122"/>
                           <a:cs typeface="Calibri" pitchFamily="34" charset="-120"/>
                         </a:rPr>
-                        <a:t>Time de Construção - Instalações (Fabric, Constr e Mont.)</a:t>
+                        <a:t>Inspeção Jackets</a:t>
                       </a:r>
                       <a:endParaRPr lang="en-US" sz="1000" dirty="0">
                         <a:latin typeface="Calibri" charset="0"/>
@@ -34890,7 +34890,7 @@
                           <a:ea typeface="Calibri" pitchFamily="34" charset="-122"/>
                           <a:cs typeface="Calibri" pitchFamily="34" charset="-120"/>
                         </a:rPr>
-                        <a:t>US$ 1,5 mi</a:t>
+                        <a:t>US$ 400,0 mil</a:t>
                       </a:r>
                       <a:endParaRPr lang="en-US" sz="1000" dirty="0">
                         <a:latin typeface="Calibri" charset="0"/>
@@ -34960,7 +34960,7 @@
                           <a:ea typeface="Calibri" pitchFamily="34" charset="-122"/>
                           <a:cs typeface="Calibri" pitchFamily="34" charset="-120"/>
                         </a:rPr>
-                        <a:t>Plano de Gerenciamento de Corrosão</a:t>
+                        <a:t>Time de Construção - Andaime</a:t>
                       </a:r>
                       <a:endParaRPr lang="en-US" sz="1000" dirty="0">
                         <a:latin typeface="Calibri" charset="0"/>
@@ -35028,7 +35028,7 @@
                           <a:ea typeface="Calibri" pitchFamily="34" charset="-122"/>
                           <a:cs typeface="Calibri" pitchFamily="34" charset="-120"/>
                         </a:rPr>
-                        <a:t>US$ 976,2 mil</a:t>
+                        <a:t>US$ 312,0 mil</a:t>
                       </a:r>
                       <a:endParaRPr lang="en-US" sz="1000" dirty="0">
                         <a:latin typeface="Calibri" charset="0"/>
@@ -35098,7 +35098,7 @@
                           <a:ea typeface="Calibri" pitchFamily="34" charset="-122"/>
                           <a:cs typeface="Calibri" pitchFamily="34" charset="-120"/>
                         </a:rPr>
-                        <a:t>Inspeção Jackets</a:t>
+                        <a:t>Campanha de normatização de reparos</a:t>
                       </a:r>
                       <a:endParaRPr lang="en-US" sz="1000" dirty="0">
                         <a:latin typeface="Calibri" charset="0"/>
@@ -35166,7 +35166,7 @@
                           <a:ea typeface="Calibri" pitchFamily="34" charset="-122"/>
                           <a:cs typeface="Calibri" pitchFamily="34" charset="-120"/>
                         </a:rPr>
-                        <a:t>US$ 400,0 mil</a:t>
+                        <a:t>US$ 273,0 mil</a:t>
                       </a:r>
                       <a:endParaRPr lang="en-US" sz="1000" dirty="0">
                         <a:latin typeface="Calibri" charset="0"/>
@@ -35305,7 +35305,7 @@
                           <a:ea typeface="Calibri" pitchFamily="34" charset="-122"/>
                           <a:cs typeface="Calibri" pitchFamily="34" charset="-120"/>
                         </a:rPr>
-                        <a:t>TIME FIXO PRIO</a:t>
+                        <a:t>Time de Construção - Instalações (Fabric, Constr, Mont e RTI.)</a:t>
                       </a:r>
                       <a:endParaRPr lang="en-US" sz="1000" dirty="0">
                         <a:latin typeface="Calibri" charset="0"/>
@@ -35373,7 +35373,7 @@
                           <a:ea typeface="Calibri" pitchFamily="34" charset="-122"/>
                           <a:cs typeface="Calibri" pitchFamily="34" charset="-120"/>
                         </a:rPr>
-                        <a:t>US$ 4,8 mi</a:t>
+                        <a:t>US$ 2,1 mi</a:t>
                       </a:r>
                       <a:endParaRPr lang="en-US" sz="1000" dirty="0">
                         <a:latin typeface="Calibri" charset="0"/>
@@ -35443,7 +35443,7 @@
                           <a:ea typeface="Calibri" pitchFamily="34" charset="-122"/>
                           <a:cs typeface="Calibri" pitchFamily="34" charset="-120"/>
                         </a:rPr>
-                        <a:t>Time de Construção - Instalações (Fabric, Constr, Mont e RTI.)</a:t>
+                        <a:t>Plano de Gerenciamento de Corrosão</a:t>
                       </a:r>
                       <a:endParaRPr lang="en-US" sz="1000" dirty="0">
                         <a:latin typeface="Calibri" charset="0"/>
@@ -35511,7 +35511,7 @@
                           <a:ea typeface="Calibri" pitchFamily="34" charset="-122"/>
                           <a:cs typeface="Calibri" pitchFamily="34" charset="-120"/>
                         </a:rPr>
-                        <a:t>US$ 2,1 mi</a:t>
+                        <a:t>US$ 1,3 mi</a:t>
                       </a:r>
                       <a:endParaRPr lang="en-US" sz="1000" dirty="0">
                         <a:latin typeface="Calibri" charset="0"/>
@@ -35581,7 +35581,7 @@
                           <a:ea typeface="Calibri" pitchFamily="34" charset="-122"/>
                           <a:cs typeface="Calibri" pitchFamily="34" charset="-120"/>
                         </a:rPr>
-                        <a:t>TIME FIXO OSM</a:t>
+                        <a:t>Substituição/ Reparo dos Caissons - Abrangência</a:t>
                       </a:r>
                       <a:endParaRPr lang="en-US" sz="1000" dirty="0">
                         <a:latin typeface="Calibri" charset="0"/>
@@ -35649,7 +35649,7 @@
                           <a:ea typeface="Calibri" pitchFamily="34" charset="-122"/>
                           <a:cs typeface="Calibri" pitchFamily="34" charset="-120"/>
                         </a:rPr>
-                        <a:t>US$ 1,9 mi</a:t>
+                        <a:t>US$ 1,2 mi</a:t>
                       </a:r>
                       <a:endParaRPr lang="en-US" sz="1000" dirty="0">
                         <a:latin typeface="Calibri" charset="0"/>
@@ -35719,7 +35719,7 @@
                           <a:ea typeface="Calibri" pitchFamily="34" charset="-122"/>
                           <a:cs typeface="Calibri" pitchFamily="34" charset="-120"/>
                         </a:rPr>
-                        <a:t>TIME FIXO SODEXO</a:t>
+                        <a:t>Plano de Inspeção de sistemas de tubulação</a:t>
                       </a:r>
                       <a:endParaRPr lang="en-US" sz="1000" dirty="0">
                         <a:latin typeface="Calibri" charset="0"/>
@@ -35787,7 +35787,7 @@
                           <a:ea typeface="Calibri" pitchFamily="34" charset="-122"/>
                           <a:cs typeface="Calibri" pitchFamily="34" charset="-120"/>
                         </a:rPr>
-                        <a:t>US$ 1,6 mi</a:t>
+                        <a:t>US$ 567,0 mil</a:t>
                       </a:r>
                       <a:endParaRPr lang="en-US" sz="1000" dirty="0">
                         <a:latin typeface="Calibri" charset="0"/>
@@ -35857,7 +35857,7 @@
                           <a:ea typeface="Calibri" pitchFamily="34" charset="-122"/>
                           <a:cs typeface="Calibri" pitchFamily="34" charset="-120"/>
                         </a:rPr>
-                        <a:t>Plano de Gerenciamento de Corrosão</a:t>
+                        <a:t>Inspeção de Jackets</a:t>
                       </a:r>
                       <a:endParaRPr lang="en-US" sz="1000" dirty="0">
                         <a:latin typeface="Calibri" charset="0"/>
@@ -35925,7 +35925,7 @@
                           <a:ea typeface="Calibri" pitchFamily="34" charset="-122"/>
                           <a:cs typeface="Calibri" pitchFamily="34" charset="-120"/>
                         </a:rPr>
-                        <a:t>US$ 1,3 mi</a:t>
+                        <a:t>US$ 400,0 mil</a:t>
                       </a:r>
                       <a:endParaRPr lang="en-US" sz="1000" dirty="0">
                         <a:latin typeface="Calibri" charset="0"/>
@@ -36064,7 +36064,7 @@
                           <a:ea typeface="Calibri" pitchFamily="34" charset="-122"/>
                           <a:cs typeface="Calibri" pitchFamily="34" charset="-120"/>
                         </a:rPr>
-                        <a:t>TIME FIXO PRIO</a:t>
+                        <a:t>Time de Construção - Instalações (Fabric, Constr e Mont.)</a:t>
                       </a:r>
                       <a:endParaRPr lang="en-US" sz="1000" dirty="0">
                         <a:latin typeface="Calibri" charset="0"/>
@@ -36132,7 +36132,7 @@
                           <a:ea typeface="Calibri" pitchFamily="34" charset="-122"/>
                           <a:cs typeface="Calibri" pitchFamily="34" charset="-120"/>
                         </a:rPr>
-                        <a:t>US$ 5,6 mi</a:t>
+                        <a:t>US$ 3,3 mi</a:t>
                       </a:r>
                       <a:endParaRPr lang="en-US" sz="1000" dirty="0">
                         <a:latin typeface="Calibri" charset="0"/>
@@ -36202,7 +36202,7 @@
                           <a:ea typeface="Calibri" pitchFamily="34" charset="-122"/>
                           <a:cs typeface="Calibri" pitchFamily="34" charset="-120"/>
                         </a:rPr>
-                        <a:t>Time de Construção - Instalações (Fabric, Constr e Mont.)</a:t>
+                        <a:t>Manutenção Preventiva (L1) da GTG-A</a:t>
                       </a:r>
                       <a:endParaRPr lang="en-US" sz="1000" dirty="0">
                         <a:latin typeface="Calibri" charset="0"/>
@@ -36270,7 +36270,7 @@
                           <a:ea typeface="Calibri" pitchFamily="34" charset="-122"/>
                           <a:cs typeface="Calibri" pitchFamily="34" charset="-120"/>
                         </a:rPr>
-                        <a:t>US$ 3,3 mi</a:t>
+                        <a:t>US$ 708,5 mil</a:t>
                       </a:r>
                       <a:endParaRPr lang="en-US" sz="1000" dirty="0">
                         <a:latin typeface="Calibri" charset="0"/>
@@ -36340,7 +36340,7 @@
                           <a:ea typeface="Calibri" pitchFamily="34" charset="-122"/>
                           <a:cs typeface="Calibri" pitchFamily="34" charset="-120"/>
                         </a:rPr>
-                        <a:t>TIME FIXO OSM</a:t>
+                        <a:t>Manutenção Preventiva (L1) da GTG-B</a:t>
                       </a:r>
                       <a:endParaRPr lang="en-US" sz="1000" dirty="0">
                         <a:latin typeface="Calibri" charset="0"/>
@@ -36408,7 +36408,7 @@
                           <a:ea typeface="Calibri" pitchFamily="34" charset="-122"/>
                           <a:cs typeface="Calibri" pitchFamily="34" charset="-120"/>
                         </a:rPr>
-                        <a:t>US$ 2,2 mi</a:t>
+                        <a:t>US$ 708,5 mil</a:t>
                       </a:r>
                       <a:endParaRPr lang="en-US" sz="1000" dirty="0">
                         <a:latin typeface="Calibri" charset="0"/>
@@ -36478,7 +36478,7 @@
                           <a:ea typeface="Calibri" pitchFamily="34" charset="-122"/>
                           <a:cs typeface="Calibri" pitchFamily="34" charset="-120"/>
                         </a:rPr>
-                        <a:t>TIME FIXO SODEXO</a:t>
+                        <a:t>Plano de Inspeção de sistemas de tubulação</a:t>
                       </a:r>
                       <a:endParaRPr lang="en-US" sz="1000" dirty="0">
                         <a:latin typeface="Calibri" charset="0"/>
@@ -36546,7 +36546,7 @@
                           <a:ea typeface="Calibri" pitchFamily="34" charset="-122"/>
                           <a:cs typeface="Calibri" pitchFamily="34" charset="-120"/>
                         </a:rPr>
-                        <a:t>US$ 2,1 mi</a:t>
+                        <a:t>US$ 567,0 mil</a:t>
                       </a:r>
                       <a:endParaRPr lang="en-US" sz="1000" dirty="0">
                         <a:latin typeface="Calibri" charset="0"/>
@@ -36616,7 +36616,7 @@
                           <a:ea typeface="Calibri" pitchFamily="34" charset="-122"/>
                           <a:cs typeface="Calibri" pitchFamily="34" charset="-120"/>
                         </a:rPr>
-                        <a:t>Manutenção Preventiva (L1) da GTG-A</a:t>
+                        <a:t>Time de Construção - Pintura</a:t>
                       </a:r>
                       <a:endParaRPr lang="en-US" sz="1000" dirty="0">
                         <a:latin typeface="Calibri" charset="0"/>
@@ -36684,7 +36684,7 @@
                           <a:ea typeface="Calibri" pitchFamily="34" charset="-122"/>
                           <a:cs typeface="Calibri" pitchFamily="34" charset="-120"/>
                         </a:rPr>
-                        <a:t>US$ 708,5 mil</a:t>
+                        <a:t>US$ 564,0 mil</a:t>
                       </a:r>
                       <a:endParaRPr lang="en-US" sz="1000" dirty="0">
                         <a:latin typeface="Calibri" charset="0"/>
@@ -36773,7 +36773,7 @@
                 <a:ea typeface="Calibri" pitchFamily="34" charset="-122"/>
                 <a:cs typeface="Calibri" pitchFamily="34" charset="-120"/>
               </a:rPr>
-              <a:t>Metodologia: Cost Allocation = OPEX, status 'Contar'/'TA', agrupado por escopo dentro de cada ativo.</a:t>
+              <a:t>Metodologia: Cost Allocation = OPEX, status 'Contar'/'TA', restrito às áreas priorizadas acima, agrupado por escopo dentro de cada ativo.</a:t>
             </a:r>
             <a:endParaRPr lang="en-US" sz="850" dirty="0"/>
           </a:p>

--- a/PRIO_Top_CAPEX_OPEX_Despriorizados_2027.pptx
+++ b/PRIO_Top_CAPEX_OPEX_Despriorizados_2027.pptx
@@ -16394,7 +16394,7 @@
                 <a:ea typeface="Calibri" pitchFamily="34" charset="-122"/>
                 <a:cs typeface="Calibri" pitchFamily="34" charset="-120"/>
               </a:rPr>
-              <a:t>Ano 2027 · maiores escopos individuais de CAPEX (status 'Contar' + 'TA') · CAPEX total do grupo: US$ 58,7 mi</a:t>
+              <a:t>Ano 2027 · maiores escopos de CAPEX nas áreas priorizadas (Manutenção, Suporte Técnico, Confiabilidade, Integridade, Naval, Construção, Projetos) · total nessas áreas: US$ 50,8 mi</a:t>
             </a:r>
             <a:endParaRPr lang="en-US" sz="1250" dirty="0"/>
           </a:p>
@@ -18976,7 +18976,7 @@
                           <a:ea typeface="Calibri" pitchFamily="34" charset="-122"/>
                           <a:cs typeface="Calibri" pitchFamily="34" charset="-120"/>
                         </a:rPr>
-                        <a:t>Reforma do Casario - Acomodação</a:t>
+                        <a:t>REVAMP IGG</a:t>
                       </a:r>
                       <a:endParaRPr lang="en-US" sz="1000" dirty="0">
                         <a:latin typeface="Calibri" charset="0"/>
@@ -19112,7 +19112,7 @@
                           <a:ea typeface="Calibri" pitchFamily="34" charset="-122"/>
                           <a:cs typeface="Calibri" pitchFamily="34" charset="-120"/>
                         </a:rPr>
-                        <a:t>ADM - Administrativo</a:t>
+                        <a:t>MNT – Manutenção</a:t>
                       </a:r>
                       <a:endParaRPr lang="en-US" sz="900" dirty="0">
                         <a:latin typeface="Calibri" charset="0"/>
@@ -19180,7 +19180,7 @@
                           <a:ea typeface="Calibri" pitchFamily="34" charset="-122"/>
                           <a:cs typeface="Calibri" pitchFamily="34" charset="-120"/>
                         </a:rPr>
-                        <a:t>Bem Estar/Segurança</a:t>
+                        <a:t>Rotina Operacional</a:t>
                       </a:r>
                       <a:endParaRPr lang="en-US" sz="900" dirty="0">
                         <a:latin typeface="Calibri" charset="0"/>
@@ -19248,7 +19248,7 @@
                           <a:ea typeface="Calibri" pitchFamily="34" charset="-122"/>
                           <a:cs typeface="Calibri" pitchFamily="34" charset="-120"/>
                         </a:rPr>
-                        <a:t>US$ 2,1 mi</a:t>
+                        <a:t>US$ 1,6 mi</a:t>
                       </a:r>
                       <a:endParaRPr lang="en-US" sz="1000" dirty="0">
                         <a:latin typeface="Calibri" charset="0"/>
@@ -19386,7 +19386,7 @@
                           <a:ea typeface="Calibri" pitchFamily="34" charset="-122"/>
                           <a:cs typeface="Calibri" pitchFamily="34" charset="-120"/>
                         </a:rPr>
-                        <a:t>REVAMP IGG</a:t>
+                        <a:t>Substituição Gerador de Nitrogênio</a:t>
                       </a:r>
                       <a:endParaRPr lang="en-US" sz="1000" dirty="0">
                         <a:latin typeface="Calibri" charset="0"/>
@@ -19522,7 +19522,7 @@
                           <a:ea typeface="Calibri" pitchFamily="34" charset="-122"/>
                           <a:cs typeface="Calibri" pitchFamily="34" charset="-120"/>
                         </a:rPr>
-                        <a:t>MNT – Manutenção</a:t>
+                        <a:t>Projetos</a:t>
                       </a:r>
                       <a:endParaRPr lang="en-US" sz="900" dirty="0">
                         <a:latin typeface="Calibri" charset="0"/>
@@ -19590,7 +19590,7 @@
                           <a:ea typeface="Calibri" pitchFamily="34" charset="-122"/>
                           <a:cs typeface="Calibri" pitchFamily="34" charset="-120"/>
                         </a:rPr>
-                        <a:t>Rotina Operacional</a:t>
+                        <a:t>Eficiência de Produção</a:t>
                       </a:r>
                       <a:endParaRPr lang="en-US" sz="900" dirty="0">
                         <a:latin typeface="Calibri" charset="0"/>
@@ -19658,7 +19658,7 @@
                           <a:ea typeface="Calibri" pitchFamily="34" charset="-122"/>
                           <a:cs typeface="Calibri" pitchFamily="34" charset="-120"/>
                         </a:rPr>
-                        <a:t>US$ 1,6 mi</a:t>
+                        <a:t>US$ 1,4 mi</a:t>
                       </a:r>
                       <a:endParaRPr lang="en-US" sz="1000" dirty="0">
                         <a:latin typeface="Calibri" charset="0"/>
@@ -19796,7 +19796,7 @@
                           <a:ea typeface="Calibri" pitchFamily="34" charset="-122"/>
                           <a:cs typeface="Calibri" pitchFamily="34" charset="-120"/>
                         </a:rPr>
-                        <a:t>Substituição Gerador de Nitrogênio</a:t>
+                        <a:t>Skids de Dilúvio</a:t>
                       </a:r>
                       <a:endParaRPr lang="en-US" sz="1000" dirty="0">
                         <a:latin typeface="Calibri" charset="0"/>
@@ -20000,7 +20000,7 @@
                           <a:ea typeface="Calibri" pitchFamily="34" charset="-122"/>
                           <a:cs typeface="Calibri" pitchFamily="34" charset="-120"/>
                         </a:rPr>
-                        <a:t>Eficiência de Produção</a:t>
+                        <a:t>Bem Estar/Segurança</a:t>
                       </a:r>
                       <a:endParaRPr lang="en-US" sz="900" dirty="0">
                         <a:latin typeface="Calibri" charset="0"/>
@@ -20068,7 +20068,7 @@
                           <a:ea typeface="Calibri" pitchFamily="34" charset="-122"/>
                           <a:cs typeface="Calibri" pitchFamily="34" charset="-120"/>
                         </a:rPr>
-                        <a:t>US$ 1,4 mi</a:t>
+                        <a:t>US$ 1,3 mi</a:t>
                       </a:r>
                       <a:endParaRPr lang="en-US" sz="1000" dirty="0">
                         <a:latin typeface="Calibri" charset="0"/>
@@ -20206,7 +20206,7 @@
                           <a:ea typeface="Calibri" pitchFamily="34" charset="-122"/>
                           <a:cs typeface="Calibri" pitchFamily="34" charset="-120"/>
                         </a:rPr>
-                        <a:t>Skids de Dilúvio</a:t>
+                        <a:t>Sensores de H2S</a:t>
                       </a:r>
                       <a:endParaRPr lang="en-US" sz="1000" dirty="0">
                         <a:latin typeface="Calibri" charset="0"/>
@@ -20478,7 +20478,7 @@
                           <a:ea typeface="Calibri" pitchFamily="34" charset="-122"/>
                           <a:cs typeface="Calibri" pitchFamily="34" charset="-120"/>
                         </a:rPr>
-                        <a:t>US$ 1,3 mi</a:t>
+                        <a:t>US$ 1,2 mi</a:t>
                       </a:r>
                       <a:endParaRPr lang="en-US" sz="1000" dirty="0">
                         <a:latin typeface="Calibri" charset="0"/>
@@ -20616,7 +20616,7 @@
                           <a:ea typeface="Calibri" pitchFamily="34" charset="-122"/>
                           <a:cs typeface="Calibri" pitchFamily="34" charset="-120"/>
                         </a:rPr>
-                        <a:t>Sensores de H2S</a:t>
+                        <a:t>TROCADOR DE CALOR DO GERADOR - GT4</a:t>
                       </a:r>
                       <a:endParaRPr lang="en-US" sz="1000" dirty="0">
                         <a:latin typeface="Calibri" charset="0"/>
@@ -20752,7 +20752,7 @@
                           <a:ea typeface="Calibri" pitchFamily="34" charset="-122"/>
                           <a:cs typeface="Calibri" pitchFamily="34" charset="-120"/>
                         </a:rPr>
-                        <a:t>Projetos</a:t>
+                        <a:t>MNT – Manutenção</a:t>
                       </a:r>
                       <a:endParaRPr lang="en-US" sz="900" dirty="0">
                         <a:latin typeface="Calibri" charset="0"/>
@@ -20820,7 +20820,7 @@
                           <a:ea typeface="Calibri" pitchFamily="34" charset="-122"/>
                           <a:cs typeface="Calibri" pitchFamily="34" charset="-120"/>
                         </a:rPr>
-                        <a:t>Bem Estar/Segurança</a:t>
+                        <a:t>Rotina Operacional</a:t>
                       </a:r>
                       <a:endParaRPr lang="en-US" sz="900" dirty="0">
                         <a:latin typeface="Calibri" charset="0"/>
@@ -20888,7 +20888,7 @@
                           <a:ea typeface="Calibri" pitchFamily="34" charset="-122"/>
                           <a:cs typeface="Calibri" pitchFamily="34" charset="-120"/>
                         </a:rPr>
-                        <a:t>US$ 1,2 mi</a:t>
+                        <a:t>US$ 1,1 mi</a:t>
                       </a:r>
                       <a:endParaRPr lang="en-US" sz="1000" dirty="0">
                         <a:latin typeface="Calibri" charset="0"/>
@@ -20977,7 +20977,7 @@
                 <a:ea typeface="Calibri" pitchFamily="34" charset="-122"/>
                 <a:cs typeface="Calibri" pitchFamily="34" charset="-120"/>
               </a:rPr>
-              <a:t>Metodologia: Cost Allocation = CAPEX, status 'Contar'/'TA', excl. Desenvolvimento de Produção. Soma do top 10: US$ 42,3 mi (72,0% do CAPEX do grupo).</a:t>
+              <a:t>Metodologia: Cost Allocation = CAPEX, status 'Contar'/'TA', restrito às áreas priorizadas acima, excl. Desenvolvimento de Produção. Soma do top 10: US$ 41,4 mi (81,4% do CAPEX nessas áreas).</a:t>
             </a:r>
             <a:endParaRPr lang="en-US" sz="850" dirty="0"/>
           </a:p>
@@ -22255,7 +22255,7 @@
                 <a:ea typeface="Calibri" pitchFamily="34" charset="-122"/>
                 <a:cs typeface="Calibri" pitchFamily="34" charset="-120"/>
               </a:rPr>
-              <a:t>Ano 2027 · maiores escopos individuais de CAPEX (status 'Contar' + 'TA') · CAPEX total do grupo: US$ 21,9 mi</a:t>
+              <a:t>Ano 2027 · maiores escopos de CAPEX nas áreas priorizadas (Manutenção, Suporte Técnico, Confiabilidade, Integridade, Naval, Construção, Projetos) · total nessas áreas: US$ 10,9 mi</a:t>
             </a:r>
             <a:endParaRPr lang="en-US" sz="1250" dirty="0"/>
           </a:p>
@@ -23197,7 +23197,7 @@
                           <a:ea typeface="Calibri" pitchFamily="34" charset="-122"/>
                           <a:cs typeface="Calibri" pitchFamily="34" charset="-120"/>
                         </a:rPr>
-                        <a:t>TA - Mecânica</a:t>
+                        <a:t>Retrofit do Motor - Bomba de Incêndio</a:t>
                       </a:r>
                       <a:endParaRPr lang="en-US" sz="1000" dirty="0">
                         <a:latin typeface="Calibri" charset="0"/>
@@ -23265,7 +23265,7 @@
                           <a:ea typeface="Calibri" pitchFamily="34" charset="-122"/>
                           <a:cs typeface="Calibri" pitchFamily="34" charset="-120"/>
                         </a:rPr>
-                        <a:t>FPSO Bravo</a:t>
+                        <a:t>Polvo A</a:t>
                       </a:r>
                       <a:endParaRPr lang="en-US" sz="950" dirty="0">
                         <a:latin typeface="Calibri" charset="0"/>
@@ -23333,7 +23333,7 @@
                           <a:ea typeface="Calibri" pitchFamily="34" charset="-122"/>
                           <a:cs typeface="Calibri" pitchFamily="34" charset="-120"/>
                         </a:rPr>
-                        <a:t>TA - Parada Programada</a:t>
+                        <a:t>Projetos</a:t>
                       </a:r>
                       <a:endParaRPr lang="en-US" sz="900" dirty="0">
                         <a:latin typeface="Calibri" charset="0"/>
@@ -23401,7 +23401,7 @@
                           <a:ea typeface="Calibri" pitchFamily="34" charset="-122"/>
                           <a:cs typeface="Calibri" pitchFamily="34" charset="-120"/>
                         </a:rPr>
-                        <a:t>Eficiência de Produção</a:t>
+                        <a:t>Integridade e Regulatório</a:t>
                       </a:r>
                       <a:endParaRPr lang="en-US" sz="900" dirty="0">
                         <a:latin typeface="Calibri" charset="0"/>
@@ -23469,7 +23469,7 @@
                           <a:ea typeface="Calibri" pitchFamily="34" charset="-122"/>
                           <a:cs typeface="Calibri" pitchFamily="34" charset="-120"/>
                         </a:rPr>
-                        <a:t>US$ 1,5 mi</a:t>
+                        <a:t>US$ 863,1 mil</a:t>
                       </a:r>
                       <a:endParaRPr lang="en-US" sz="1000" dirty="0">
                         <a:latin typeface="Calibri" charset="0"/>
@@ -23607,7 +23607,7 @@
                           <a:ea typeface="Calibri" pitchFamily="34" charset="-122"/>
                           <a:cs typeface="Calibri" pitchFamily="34" charset="-120"/>
                         </a:rPr>
-                        <a:t>TA - Swivel - Pacote Hidráulico (OneSubsea)</a:t>
+                        <a:t>REVAMP CARGO PUMP - Nº 2</a:t>
                       </a:r>
                       <a:endParaRPr lang="en-US" sz="1000" dirty="0">
                         <a:latin typeface="Calibri" charset="0"/>
@@ -23743,7 +23743,7 @@
                           <a:ea typeface="Calibri" pitchFamily="34" charset="-122"/>
                           <a:cs typeface="Calibri" pitchFamily="34" charset="-120"/>
                         </a:rPr>
-                        <a:t>P&amp;Q - Processos</a:t>
+                        <a:t>EIM - Manutenção &amp; Integridade</a:t>
                       </a:r>
                       <a:endParaRPr lang="en-US" sz="900" dirty="0">
                         <a:latin typeface="Calibri" charset="0"/>
@@ -23811,7 +23811,7 @@
                           <a:ea typeface="Calibri" pitchFamily="34" charset="-122"/>
                           <a:cs typeface="Calibri" pitchFamily="34" charset="-120"/>
                         </a:rPr>
-                        <a:t>Integridade e Regulatório</a:t>
+                        <a:t>Rotina Operacional</a:t>
                       </a:r>
                       <a:endParaRPr lang="en-US" sz="900" dirty="0">
                         <a:latin typeface="Calibri" charset="0"/>
@@ -23879,7 +23879,7 @@
                           <a:ea typeface="Calibri" pitchFamily="34" charset="-122"/>
                           <a:cs typeface="Calibri" pitchFamily="34" charset="-120"/>
                         </a:rPr>
-                        <a:t>US$ 1,4 mi</a:t>
+                        <a:t>US$ 687,0 mil</a:t>
                       </a:r>
                       <a:endParaRPr lang="en-US" sz="1000" dirty="0">
                         <a:latin typeface="Calibri" charset="0"/>
@@ -24017,7 +24017,7 @@
                           <a:ea typeface="Calibri" pitchFamily="34" charset="-122"/>
                           <a:cs typeface="Calibri" pitchFamily="34" charset="-120"/>
                         </a:rPr>
-                        <a:t>TA - Elétrica</a:t>
+                        <a:t>Revitalização do compressor de Ar de Instrumento</a:t>
                       </a:r>
                       <a:endParaRPr lang="en-US" sz="1000" dirty="0">
                         <a:latin typeface="Calibri" charset="0"/>
@@ -24085,7 +24085,7 @@
                           <a:ea typeface="Calibri" pitchFamily="34" charset="-122"/>
                           <a:cs typeface="Calibri" pitchFamily="34" charset="-120"/>
                         </a:rPr>
-                        <a:t>FPSO Bravo</a:t>
+                        <a:t>Polvo A</a:t>
                       </a:r>
                       <a:endParaRPr lang="en-US" sz="950" dirty="0">
                         <a:latin typeface="Calibri" charset="0"/>
@@ -24153,7 +24153,7 @@
                           <a:ea typeface="Calibri" pitchFamily="34" charset="-122"/>
                           <a:cs typeface="Calibri" pitchFamily="34" charset="-120"/>
                         </a:rPr>
-                        <a:t>TA - Parada Programada</a:t>
+                        <a:t>Projetos</a:t>
                       </a:r>
                       <a:endParaRPr lang="en-US" sz="900" dirty="0">
                         <a:latin typeface="Calibri" charset="0"/>
@@ -24289,7 +24289,7 @@
                           <a:ea typeface="Calibri" pitchFamily="34" charset="-122"/>
                           <a:cs typeface="Calibri" pitchFamily="34" charset="-120"/>
                         </a:rPr>
-                        <a:t>US$ 982,4 mil</a:t>
+                        <a:t>US$ 544,8 mil</a:t>
                       </a:r>
                       <a:endParaRPr lang="en-US" sz="1000" dirty="0">
                         <a:latin typeface="Calibri" charset="0"/>
@@ -24427,7 +24427,7 @@
                           <a:ea typeface="Calibri" pitchFamily="34" charset="-122"/>
                           <a:cs typeface="Calibri" pitchFamily="34" charset="-120"/>
                         </a:rPr>
-                        <a:t>Retrofit do Motor - Bomba de Incêndio</a:t>
+                        <a:t>TA - Compra de Placas de controle dos VFDs Rockwell</a:t>
                       </a:r>
                       <a:endParaRPr lang="en-US" sz="1000" dirty="0">
                         <a:latin typeface="Calibri" charset="0"/>
@@ -24563,7 +24563,7 @@
                           <a:ea typeface="Calibri" pitchFamily="34" charset="-122"/>
                           <a:cs typeface="Calibri" pitchFamily="34" charset="-120"/>
                         </a:rPr>
-                        <a:t>Projetos</a:t>
+                        <a:t>EIM - Manutenção &amp; Integridade</a:t>
                       </a:r>
                       <a:endParaRPr lang="en-US" sz="900" dirty="0">
                         <a:latin typeface="Calibri" charset="0"/>
@@ -24631,7 +24631,7 @@
                           <a:ea typeface="Calibri" pitchFamily="34" charset="-122"/>
                           <a:cs typeface="Calibri" pitchFamily="34" charset="-120"/>
                         </a:rPr>
-                        <a:t>Integridade e Regulatório</a:t>
+                        <a:t>Rotina Operacional</a:t>
                       </a:r>
                       <a:endParaRPr lang="en-US" sz="900" dirty="0">
                         <a:latin typeface="Calibri" charset="0"/>
@@ -24699,7 +24699,7 @@
                           <a:ea typeface="Calibri" pitchFamily="34" charset="-122"/>
                           <a:cs typeface="Calibri" pitchFamily="34" charset="-120"/>
                         </a:rPr>
-                        <a:t>US$ 863,1 mil</a:t>
+                        <a:t>US$ 526,1 mil</a:t>
                       </a:r>
                       <a:endParaRPr lang="en-US" sz="1000" dirty="0">
                         <a:latin typeface="Calibri" charset="0"/>
@@ -24837,7 +24837,7 @@
                           <a:ea typeface="Calibri" pitchFamily="34" charset="-122"/>
                           <a:cs typeface="Calibri" pitchFamily="34" charset="-120"/>
                         </a:rPr>
-                        <a:t>TA - Caldeiraria</a:t>
+                        <a:t>MPP - Adequação do sistema de Selagem Multifásica</a:t>
                       </a:r>
                       <a:endParaRPr lang="en-US" sz="1000" dirty="0">
                         <a:latin typeface="Calibri" charset="0"/>
@@ -24905,7 +24905,7 @@
                           <a:ea typeface="Calibri" pitchFamily="34" charset="-122"/>
                           <a:cs typeface="Calibri" pitchFamily="34" charset="-120"/>
                         </a:rPr>
-                        <a:t>FPSO Bravo</a:t>
+                        <a:t>Polvo A</a:t>
                       </a:r>
                       <a:endParaRPr lang="en-US" sz="950" dirty="0">
                         <a:latin typeface="Calibri" charset="0"/>
@@ -24973,7 +24973,7 @@
                           <a:ea typeface="Calibri" pitchFamily="34" charset="-122"/>
                           <a:cs typeface="Calibri" pitchFamily="34" charset="-120"/>
                         </a:rPr>
-                        <a:t>TA - Parada Programada</a:t>
+                        <a:t>EIM - Manutenção &amp; Integridade</a:t>
                       </a:r>
                       <a:endParaRPr lang="en-US" sz="900" dirty="0">
                         <a:latin typeface="Calibri" charset="0"/>
@@ -25041,7 +25041,7 @@
                           <a:ea typeface="Calibri" pitchFamily="34" charset="-122"/>
                           <a:cs typeface="Calibri" pitchFamily="34" charset="-120"/>
                         </a:rPr>
-                        <a:t>Eficiência de Produção</a:t>
+                        <a:t>Rotina Operacional</a:t>
                       </a:r>
                       <a:endParaRPr lang="en-US" sz="900" dirty="0">
                         <a:latin typeface="Calibri" charset="0"/>
@@ -25109,7 +25109,7 @@
                           <a:ea typeface="Calibri" pitchFamily="34" charset="-122"/>
                           <a:cs typeface="Calibri" pitchFamily="34" charset="-120"/>
                         </a:rPr>
-                        <a:t>US$ 816,1 mil</a:t>
+                        <a:t>US$ 519,2 mil</a:t>
                       </a:r>
                       <a:endParaRPr lang="en-US" sz="1000" dirty="0">
                         <a:latin typeface="Calibri" charset="0"/>
@@ -25247,7 +25247,7 @@
                           <a:ea typeface="Calibri" pitchFamily="34" charset="-122"/>
                           <a:cs typeface="Calibri" pitchFamily="34" charset="-120"/>
                         </a:rPr>
-                        <a:t>REVAMP CARGO PUMP - Nº 2</a:t>
+                        <a:t>Instalação de novos Detectores de Gás</a:t>
                       </a:r>
                       <a:endParaRPr lang="en-US" sz="1000" dirty="0">
                         <a:latin typeface="Calibri" charset="0"/>
@@ -25315,7 +25315,7 @@
                           <a:ea typeface="Calibri" pitchFamily="34" charset="-122"/>
                           <a:cs typeface="Calibri" pitchFamily="34" charset="-120"/>
                         </a:rPr>
-                        <a:t>FPSO Bravo</a:t>
+                        <a:t>Polvo A</a:t>
                       </a:r>
                       <a:endParaRPr lang="en-US" sz="950" dirty="0">
                         <a:latin typeface="Calibri" charset="0"/>
@@ -25383,7 +25383,7 @@
                           <a:ea typeface="Calibri" pitchFamily="34" charset="-122"/>
                           <a:cs typeface="Calibri" pitchFamily="34" charset="-120"/>
                         </a:rPr>
-                        <a:t>EIM - Manutenção &amp; Integridade</a:t>
+                        <a:t>Projetos</a:t>
                       </a:r>
                       <a:endParaRPr lang="en-US" sz="900" dirty="0">
                         <a:latin typeface="Calibri" charset="0"/>
@@ -25451,7 +25451,7 @@
                           <a:ea typeface="Calibri" pitchFamily="34" charset="-122"/>
                           <a:cs typeface="Calibri" pitchFamily="34" charset="-120"/>
                         </a:rPr>
-                        <a:t>Rotina Operacional</a:t>
+                        <a:t>Integridade e Regulatório</a:t>
                       </a:r>
                       <a:endParaRPr lang="en-US" sz="900" dirty="0">
                         <a:latin typeface="Calibri" charset="0"/>
@@ -25519,7 +25519,7 @@
                           <a:ea typeface="Calibri" pitchFamily="34" charset="-122"/>
                           <a:cs typeface="Calibri" pitchFamily="34" charset="-120"/>
                         </a:rPr>
-                        <a:t>US$ 687,0 mil</a:t>
+                        <a:t>US$ 447,3 mil</a:t>
                       </a:r>
                       <a:endParaRPr lang="en-US" sz="1000" dirty="0">
                         <a:latin typeface="Calibri" charset="0"/>
@@ -25657,7 +25657,7 @@
                           <a:ea typeface="Calibri" pitchFamily="34" charset="-122"/>
                           <a:cs typeface="Calibri" pitchFamily="34" charset="-120"/>
                         </a:rPr>
-                        <a:t>TA - NR13</a:t>
+                        <a:t>TA - Manutenção no Swivel elétrico</a:t>
                       </a:r>
                       <a:endParaRPr lang="en-US" sz="1000" dirty="0">
                         <a:latin typeface="Calibri" charset="0"/>
@@ -25793,7 +25793,7 @@
                           <a:ea typeface="Calibri" pitchFamily="34" charset="-122"/>
                           <a:cs typeface="Calibri" pitchFamily="34" charset="-120"/>
                         </a:rPr>
-                        <a:t>TA - Parada Programada</a:t>
+                        <a:t>EIM - Manutenção &amp; Integridade</a:t>
                       </a:r>
                       <a:endParaRPr lang="en-US" sz="900" dirty="0">
                         <a:latin typeface="Calibri" charset="0"/>
@@ -25861,7 +25861,7 @@
                           <a:ea typeface="Calibri" pitchFamily="34" charset="-122"/>
                           <a:cs typeface="Calibri" pitchFamily="34" charset="-120"/>
                         </a:rPr>
-                        <a:t>Eficiência de Produção</a:t>
+                        <a:t>Rotina Operacional</a:t>
                       </a:r>
                       <a:endParaRPr lang="en-US" sz="900" dirty="0">
                         <a:latin typeface="Calibri" charset="0"/>
@@ -25929,7 +25929,7 @@
                           <a:ea typeface="Calibri" pitchFamily="34" charset="-122"/>
                           <a:cs typeface="Calibri" pitchFamily="34" charset="-120"/>
                         </a:rPr>
-                        <a:t>US$ 659,4 mil</a:t>
+                        <a:t>US$ 414,5 mil</a:t>
                       </a:r>
                       <a:endParaRPr lang="en-US" sz="1000" dirty="0">
                         <a:latin typeface="Calibri" charset="0"/>
@@ -26067,7 +26067,7 @@
                           <a:ea typeface="Calibri" pitchFamily="34" charset="-122"/>
                           <a:cs typeface="Calibri" pitchFamily="34" charset="-120"/>
                         </a:rPr>
-                        <a:t>Revitalização do compressor de Ar de Instrumento</a:t>
+                        <a:t>Novas Destiladoras</a:t>
                       </a:r>
                       <a:endParaRPr lang="en-US" sz="1000" dirty="0">
                         <a:latin typeface="Calibri" charset="0"/>
@@ -26135,7 +26135,7 @@
                           <a:ea typeface="Calibri" pitchFamily="34" charset="-122"/>
                           <a:cs typeface="Calibri" pitchFamily="34" charset="-120"/>
                         </a:rPr>
-                        <a:t>Polvo A</a:t>
+                        <a:t>FPSO Bravo</a:t>
                       </a:r>
                       <a:endParaRPr lang="en-US" sz="950" dirty="0">
                         <a:latin typeface="Calibri" charset="0"/>
@@ -26339,7 +26339,7 @@
                           <a:ea typeface="Calibri" pitchFamily="34" charset="-122"/>
                           <a:cs typeface="Calibri" pitchFamily="34" charset="-120"/>
                         </a:rPr>
-                        <a:t>US$ 544,8 mil</a:t>
+                        <a:t>US$ 411,9 mil</a:t>
                       </a:r>
                       <a:endParaRPr lang="en-US" sz="1000" dirty="0">
                         <a:latin typeface="Calibri" charset="0"/>
@@ -26477,7 +26477,7 @@
                           <a:ea typeface="Calibri" pitchFamily="34" charset="-122"/>
                           <a:cs typeface="Calibri" pitchFamily="34" charset="-120"/>
                         </a:rPr>
-                        <a:t>TA - Compra de Placas de controle dos VFDs Rockwell</a:t>
+                        <a:t>Instalação de Sensores de Hidrogênio nas Salas de Baterias</a:t>
                       </a:r>
                       <a:endParaRPr lang="en-US" sz="1000" dirty="0">
                         <a:latin typeface="Calibri" charset="0"/>
@@ -26545,7 +26545,7 @@
                           <a:ea typeface="Calibri" pitchFamily="34" charset="-122"/>
                           <a:cs typeface="Calibri" pitchFamily="34" charset="-120"/>
                         </a:rPr>
-                        <a:t>Polvo A</a:t>
+                        <a:t>FPSO Bravo</a:t>
                       </a:r>
                       <a:endParaRPr lang="en-US" sz="950" dirty="0">
                         <a:latin typeface="Calibri" charset="0"/>
@@ -26613,7 +26613,7 @@
                           <a:ea typeface="Calibri" pitchFamily="34" charset="-122"/>
                           <a:cs typeface="Calibri" pitchFamily="34" charset="-120"/>
                         </a:rPr>
-                        <a:t>EIM - Manutenção &amp; Integridade</a:t>
+                        <a:t>Projetos</a:t>
                       </a:r>
                       <a:endParaRPr lang="en-US" sz="900" dirty="0">
                         <a:latin typeface="Calibri" charset="0"/>
@@ -26681,7 +26681,7 @@
                           <a:ea typeface="Calibri" pitchFamily="34" charset="-122"/>
                           <a:cs typeface="Calibri" pitchFamily="34" charset="-120"/>
                         </a:rPr>
-                        <a:t>Rotina Operacional</a:t>
+                        <a:t>Integridade e Regulatório</a:t>
                       </a:r>
                       <a:endParaRPr lang="en-US" sz="900" dirty="0">
                         <a:latin typeface="Calibri" charset="0"/>
@@ -26749,7 +26749,7 @@
                           <a:ea typeface="Calibri" pitchFamily="34" charset="-122"/>
                           <a:cs typeface="Calibri" pitchFamily="34" charset="-120"/>
                         </a:rPr>
-                        <a:t>US$ 526,1 mil</a:t>
+                        <a:t>US$ 281,8 mil</a:t>
                       </a:r>
                       <a:endParaRPr lang="en-US" sz="1000" dirty="0">
                         <a:latin typeface="Calibri" charset="0"/>
@@ -26838,7 +26838,7 @@
                 <a:ea typeface="Calibri" pitchFamily="34" charset="-122"/>
                 <a:cs typeface="Calibri" pitchFamily="34" charset="-120"/>
               </a:rPr>
-              <a:t>Metodologia: Cost Allocation = CAPEX, status 'Contar'/'TA', excl. Desenvolvimento de Produção. Soma do top 10: US$ 12,8 mi (58,4% do CAPEX do grupo).</a:t>
+              <a:t>Metodologia: Cost Allocation = CAPEX, status 'Contar'/'TA', restrito às áreas priorizadas acima, excl. Desenvolvimento de Produção. Soma do top 10: US$ 9,5 mi (87,2% do CAPEX nessas áreas).</a:t>
             </a:r>
             <a:endParaRPr lang="en-US" sz="850" dirty="0"/>
           </a:p>
@@ -28875,7 +28875,7 @@
                 <a:ea typeface="Calibri" pitchFamily="34" charset="-122"/>
                 <a:cs typeface="Calibri" pitchFamily="34" charset="-120"/>
               </a:rPr>
-              <a:t>Ano 2027 · maiores escopos individuais de CAPEX (status 'Contar' + 'TA') · CAPEX total do grupo: US$ 47,0 mi</a:t>
+              <a:t>Ano 2027 · maiores escopos de CAPEX nas áreas priorizadas (Manutenção, Suporte Técnico, Confiabilidade, Integridade, Naval, Construção, Projetos) · total nessas áreas: US$ 27,6 mi</a:t>
             </a:r>
             <a:endParaRPr lang="en-US" sz="1250" dirty="0"/>
           </a:p>
@@ -30227,7 +30227,7 @@
                           <a:ea typeface="Calibri" pitchFamily="34" charset="-122"/>
                           <a:cs typeface="Calibri" pitchFamily="34" charset="-120"/>
                         </a:rPr>
-                        <a:t>Substituição de Internos do Coalescer (TAR)</a:t>
+                        <a:t>Upgrade de obsolescência do INSUM</a:t>
                       </a:r>
                       <a:endParaRPr lang="en-US" sz="1000" dirty="0">
                         <a:latin typeface="Calibri" charset="0"/>
@@ -30295,7 +30295,7 @@
                           <a:ea typeface="Calibri" pitchFamily="34" charset="-122"/>
                           <a:cs typeface="Calibri" pitchFamily="34" charset="-120"/>
                         </a:rPr>
-                        <a:t>FPSO Peregrino</a:t>
+                        <a:t>PLAT B</a:t>
                       </a:r>
                       <a:endParaRPr lang="en-US" sz="950" dirty="0">
                         <a:latin typeface="Calibri" charset="0"/>
@@ -30363,7 +30363,7 @@
                           <a:ea typeface="Calibri" pitchFamily="34" charset="-122"/>
                           <a:cs typeface="Calibri" pitchFamily="34" charset="-120"/>
                         </a:rPr>
-                        <a:t>P&amp;Q - Processos</a:t>
+                        <a:t>Suporte Técnico</a:t>
                       </a:r>
                       <a:endParaRPr lang="en-US" sz="900" dirty="0">
                         <a:latin typeface="Calibri" charset="0"/>
@@ -30431,7 +30431,7 @@
                           <a:ea typeface="Calibri" pitchFamily="34" charset="-122"/>
                           <a:cs typeface="Calibri" pitchFamily="34" charset="-120"/>
                         </a:rPr>
-                        <a:t>Eficiência de Produção</a:t>
+                        <a:t>Integridade e Regulatório</a:t>
                       </a:r>
                       <a:endParaRPr lang="en-US" sz="900" dirty="0">
                         <a:latin typeface="Calibri" charset="0"/>
@@ -30705,7 +30705,7 @@
                           <a:ea typeface="Calibri" pitchFamily="34" charset="-122"/>
                           <a:cs typeface="Calibri" pitchFamily="34" charset="-120"/>
                         </a:rPr>
-                        <a:t>PLAT B</a:t>
+                        <a:t>PLAT A</a:t>
                       </a:r>
                       <a:endParaRPr lang="en-US" sz="950" dirty="0">
                         <a:latin typeface="Calibri" charset="0"/>
@@ -31047,7 +31047,7 @@
                           <a:ea typeface="Calibri" pitchFamily="34" charset="-122"/>
                           <a:cs typeface="Calibri" pitchFamily="34" charset="-120"/>
                         </a:rPr>
-                        <a:t>Upgrade de obsolescência do INSUM</a:t>
+                        <a:t>Troca da Membrana do Sistema de Geração de Nitrogênio Alpha e Bravo</a:t>
                       </a:r>
                       <a:endParaRPr lang="en-US" sz="1000" dirty="0">
                         <a:latin typeface="Calibri" charset="0"/>
@@ -31115,7 +31115,7 @@
                           <a:ea typeface="Calibri" pitchFamily="34" charset="-122"/>
                           <a:cs typeface="Calibri" pitchFamily="34" charset="-120"/>
                         </a:rPr>
-                        <a:t>PLAT A</a:t>
+                        <a:t>FPSO Peregrino</a:t>
                       </a:r>
                       <a:endParaRPr lang="en-US" sz="950" dirty="0">
                         <a:latin typeface="Calibri" charset="0"/>
@@ -31183,7 +31183,7 @@
                           <a:ea typeface="Calibri" pitchFamily="34" charset="-122"/>
                           <a:cs typeface="Calibri" pitchFamily="34" charset="-120"/>
                         </a:rPr>
-                        <a:t>Suporte Técnico</a:t>
+                        <a:t>Grandes Manutenções</a:t>
                       </a:r>
                       <a:endParaRPr lang="en-US" sz="900" dirty="0">
                         <a:latin typeface="Calibri" charset="0"/>
@@ -31251,7 +31251,7 @@
                           <a:ea typeface="Calibri" pitchFamily="34" charset="-122"/>
                           <a:cs typeface="Calibri" pitchFamily="34" charset="-120"/>
                         </a:rPr>
-                        <a:t>Integridade e Regulatório</a:t>
+                        <a:t>Eficiência de Produção</a:t>
                       </a:r>
                       <a:endParaRPr lang="en-US" sz="900" dirty="0">
                         <a:latin typeface="Calibri" charset="0"/>
@@ -31319,7 +31319,7 @@
                           <a:ea typeface="Calibri" pitchFamily="34" charset="-122"/>
                           <a:cs typeface="Calibri" pitchFamily="34" charset="-120"/>
                         </a:rPr>
-                        <a:t>US$ 2,0 mi</a:t>
+                        <a:t>US$ 1,3 mi</a:t>
                       </a:r>
                       <a:endParaRPr lang="en-US" sz="1000" dirty="0">
                         <a:latin typeface="Calibri" charset="0"/>
@@ -31457,7 +31457,7 @@
                           <a:ea typeface="Calibri" pitchFamily="34" charset="-122"/>
                           <a:cs typeface="Calibri" pitchFamily="34" charset="-120"/>
                         </a:rPr>
-                        <a:t>Troca da Membrana do Sistema de Geração de Nitrogênio Alpha e Bravo</a:t>
+                        <a:t>Overhaul da Bomba Framo (SWLP) - B</a:t>
                       </a:r>
                       <a:endParaRPr lang="en-US" sz="1000" dirty="0">
                         <a:latin typeface="Calibri" charset="0"/>
@@ -31593,7 +31593,7 @@
                           <a:ea typeface="Calibri" pitchFamily="34" charset="-122"/>
                           <a:cs typeface="Calibri" pitchFamily="34" charset="-120"/>
                         </a:rPr>
-                        <a:t>Grandes Manutenções</a:t>
+                        <a:t>MNT – Manutenção</a:t>
                       </a:r>
                       <a:endParaRPr lang="en-US" sz="900" dirty="0">
                         <a:latin typeface="Calibri" charset="0"/>
@@ -31661,7 +31661,7 @@
                           <a:ea typeface="Calibri" pitchFamily="34" charset="-122"/>
                           <a:cs typeface="Calibri" pitchFamily="34" charset="-120"/>
                         </a:rPr>
-                        <a:t>Eficiência de Produção</a:t>
+                        <a:t>Rotina Operacional</a:t>
                       </a:r>
                       <a:endParaRPr lang="en-US" sz="900" dirty="0">
                         <a:latin typeface="Calibri" charset="0"/>
@@ -31867,7 +31867,7 @@
                           <a:ea typeface="Calibri" pitchFamily="34" charset="-122"/>
                           <a:cs typeface="Calibri" pitchFamily="34" charset="-120"/>
                         </a:rPr>
-                        <a:t>Overhaul da Bomba Framo (SWLP) - B</a:t>
+                        <a:t>Caldeira B</a:t>
                       </a:r>
                       <a:endParaRPr lang="en-US" sz="1000" dirty="0">
                         <a:latin typeface="Calibri" charset="0"/>
@@ -32003,7 +32003,7 @@
                           <a:ea typeface="Calibri" pitchFamily="34" charset="-122"/>
                           <a:cs typeface="Calibri" pitchFamily="34" charset="-120"/>
                         </a:rPr>
-                        <a:t>MNT – Manutenção</a:t>
+                        <a:t>CON - Construção</a:t>
                       </a:r>
                       <a:endParaRPr lang="en-US" sz="900" dirty="0">
                         <a:latin typeface="Calibri" charset="0"/>
@@ -32071,7 +32071,7 @@
                           <a:ea typeface="Calibri" pitchFamily="34" charset="-122"/>
                           <a:cs typeface="Calibri" pitchFamily="34" charset="-120"/>
                         </a:rPr>
-                        <a:t>Rotina Operacional</a:t>
+                        <a:t>Integridade e Regulatório</a:t>
                       </a:r>
                       <a:endParaRPr lang="en-US" sz="900" dirty="0">
                         <a:latin typeface="Calibri" charset="0"/>
@@ -32139,7 +32139,7 @@
                           <a:ea typeface="Calibri" pitchFamily="34" charset="-122"/>
                           <a:cs typeface="Calibri" pitchFamily="34" charset="-120"/>
                         </a:rPr>
-                        <a:t>US$ 1,3 mi</a:t>
+                        <a:t>US$ 1,0 mi</a:t>
                       </a:r>
                       <a:endParaRPr lang="en-US" sz="1000" dirty="0">
                         <a:latin typeface="Calibri" charset="0"/>
@@ -32277,7 +32277,7 @@
                           <a:ea typeface="Calibri" pitchFamily="34" charset="-122"/>
                           <a:cs typeface="Calibri" pitchFamily="34" charset="-120"/>
                         </a:rPr>
-                        <a:t>Desmobilização - TA</a:t>
+                        <a:t>Instalação Novo Header de Vapor</a:t>
                       </a:r>
                       <a:endParaRPr lang="en-US" sz="1000" dirty="0">
                         <a:latin typeface="Calibri" charset="0"/>
@@ -32413,7 +32413,7 @@
                           <a:ea typeface="Calibri" pitchFamily="34" charset="-122"/>
                           <a:cs typeface="Calibri" pitchFamily="34" charset="-120"/>
                         </a:rPr>
-                        <a:t>TA - Parada Programada</a:t>
+                        <a:t>Projetos</a:t>
                       </a:r>
                       <a:endParaRPr lang="en-US" sz="900" dirty="0">
                         <a:latin typeface="Calibri" charset="0"/>
@@ -32549,7 +32549,7 @@
                           <a:ea typeface="Calibri" pitchFamily="34" charset="-122"/>
                           <a:cs typeface="Calibri" pitchFamily="34" charset="-120"/>
                         </a:rPr>
-                        <a:t>US$ 1,0 mi</a:t>
+                        <a:t>US$ 882,9 mil</a:t>
                       </a:r>
                       <a:endParaRPr lang="en-US" sz="1000" dirty="0">
                         <a:latin typeface="Calibri" charset="0"/>
@@ -32687,7 +32687,7 @@
                           <a:ea typeface="Calibri" pitchFamily="34" charset="-122"/>
                           <a:cs typeface="Calibri" pitchFamily="34" charset="-120"/>
                         </a:rPr>
-                        <a:t>Mobilização - TA</a:t>
+                        <a:t>Overhaul da STG-B e Gerador Elétrico</a:t>
                       </a:r>
                       <a:endParaRPr lang="en-US" sz="1000" dirty="0">
                         <a:latin typeface="Calibri" charset="0"/>
@@ -32823,7 +32823,7 @@
                           <a:ea typeface="Calibri" pitchFamily="34" charset="-122"/>
                           <a:cs typeface="Calibri" pitchFamily="34" charset="-120"/>
                         </a:rPr>
-                        <a:t>TA - Parada Programada</a:t>
+                        <a:t>MNT – Manutenção</a:t>
                       </a:r>
                       <a:endParaRPr lang="en-US" sz="900" dirty="0">
                         <a:latin typeface="Calibri" charset="0"/>
@@ -32891,7 +32891,7 @@
                           <a:ea typeface="Calibri" pitchFamily="34" charset="-122"/>
                           <a:cs typeface="Calibri" pitchFamily="34" charset="-120"/>
                         </a:rPr>
-                        <a:t>Eficiência de Produção</a:t>
+                        <a:t>Rotina Operacional</a:t>
                       </a:r>
                       <a:endParaRPr lang="en-US" sz="900" dirty="0">
                         <a:latin typeface="Calibri" charset="0"/>
@@ -32959,7 +32959,7 @@
                           <a:ea typeface="Calibri" pitchFamily="34" charset="-122"/>
                           <a:cs typeface="Calibri" pitchFamily="34" charset="-120"/>
                         </a:rPr>
-                        <a:t>US$ 1,0 mi</a:t>
+                        <a:t>US$ 698,8 mil</a:t>
                       </a:r>
                       <a:endParaRPr lang="en-US" sz="1000" dirty="0">
                         <a:latin typeface="Calibri" charset="0"/>
@@ -33097,7 +33097,7 @@
                           <a:ea typeface="Calibri" pitchFamily="34" charset="-122"/>
                           <a:cs typeface="Calibri" pitchFamily="34" charset="-120"/>
                         </a:rPr>
-                        <a:t>Caldeira B</a:t>
+                        <a:t>Upgrade do Sistema Meteoceanográfico</a:t>
                       </a:r>
                       <a:endParaRPr lang="en-US" sz="1000" dirty="0">
                         <a:latin typeface="Calibri" charset="0"/>
@@ -33233,7 +33233,7 @@
                           <a:ea typeface="Calibri" pitchFamily="34" charset="-122"/>
                           <a:cs typeface="Calibri" pitchFamily="34" charset="-120"/>
                         </a:rPr>
-                        <a:t>CON - Construção</a:t>
+                        <a:t>Projetos</a:t>
                       </a:r>
                       <a:endParaRPr lang="en-US" sz="900" dirty="0">
                         <a:latin typeface="Calibri" charset="0"/>
@@ -33301,7 +33301,7 @@
                           <a:ea typeface="Calibri" pitchFamily="34" charset="-122"/>
                           <a:cs typeface="Calibri" pitchFamily="34" charset="-120"/>
                         </a:rPr>
-                        <a:t>Integridade e Regulatório</a:t>
+                        <a:t>Eficiência de Produção</a:t>
                       </a:r>
                       <a:endParaRPr lang="en-US" sz="900" dirty="0">
                         <a:latin typeface="Calibri" charset="0"/>
@@ -33369,7 +33369,7 @@
                           <a:ea typeface="Calibri" pitchFamily="34" charset="-122"/>
                           <a:cs typeface="Calibri" pitchFamily="34" charset="-120"/>
                         </a:rPr>
-                        <a:t>US$ 1,0 mi</a:t>
+                        <a:t>US$ 634,7 mil</a:t>
                       </a:r>
                       <a:endParaRPr lang="en-US" sz="1000" dirty="0">
                         <a:latin typeface="Calibri" charset="0"/>
@@ -33458,7 +33458,7 @@
                 <a:ea typeface="Calibri" pitchFamily="34" charset="-122"/>
                 <a:cs typeface="Calibri" pitchFamily="34" charset="-120"/>
               </a:rPr>
-              <a:t>Metodologia: Cost Allocation = CAPEX, status 'Contar'/'TA', excl. Desenvolvimento de Produção. Soma do top 10: US$ 18,3 mi (39,0% do CAPEX do grupo).</a:t>
+              <a:t>Metodologia: Cost Allocation = CAPEX, status 'Contar'/'TA', restrito às áreas priorizadas acima, excl. Desenvolvimento de Produção. Soma do top 10: US$ 16,5 mi (59,8% do CAPEX nessas áreas).</a:t>
             </a:r>
             <a:endParaRPr lang="en-US" sz="850" dirty="0"/>
           </a:p>

--- a/PRIO_Top_CAPEX_OPEX_Despriorizados_2027.pptx
+++ b/PRIO_Top_CAPEX_OPEX_Despriorizados_2027.pptx
@@ -27305,7 +27305,7 @@
                           <a:ea typeface="Calibri" pitchFamily="34" charset="-122"/>
                           <a:cs typeface="Calibri" pitchFamily="34" charset="-120"/>
                         </a:rPr>
-                        <a:t>Baixa de Material Mecânico</a:t>
+                        <a:t>Mergulho - Tamponamento da caixa de mar</a:t>
                       </a:r>
                       <a:endParaRPr lang="en-US" sz="1000" dirty="0">
                         <a:latin typeface="Calibri" charset="0"/>
@@ -27373,7 +27373,7 @@
                           <a:ea typeface="Calibri" pitchFamily="34" charset="-122"/>
                           <a:cs typeface="Calibri" pitchFamily="34" charset="-120"/>
                         </a:rPr>
-                        <a:t>US$ 1,3 mi</a:t>
+                        <a:t>US$ 1,2 mi</a:t>
                       </a:r>
                       <a:endParaRPr lang="en-US" sz="1000" dirty="0">
                         <a:latin typeface="Calibri" charset="0"/>
@@ -27443,7 +27443,7 @@
                           <a:ea typeface="Calibri" pitchFamily="34" charset="-122"/>
                           <a:cs typeface="Calibri" pitchFamily="34" charset="-120"/>
                         </a:rPr>
-                        <a:t>Mergulho - Tamponamento da caixa de mar</a:t>
+                        <a:t>M5 - Time de Construção - Instalações (Fabric, Constr e Mont.)</a:t>
                       </a:r>
                       <a:endParaRPr lang="en-US" sz="1000" dirty="0">
                         <a:latin typeface="Calibri" charset="0"/>
@@ -27511,7 +27511,7 @@
                           <a:ea typeface="Calibri" pitchFamily="34" charset="-122"/>
                           <a:cs typeface="Calibri" pitchFamily="34" charset="-120"/>
                         </a:rPr>
-                        <a:t>US$ 1,2 mi</a:t>
+                        <a:t>US$ 1,1 mi</a:t>
                       </a:r>
                       <a:endParaRPr lang="en-US" sz="1000" dirty="0">
                         <a:latin typeface="Calibri" charset="0"/>
@@ -27581,7 +27581,7 @@
                           <a:ea typeface="Calibri" pitchFamily="34" charset="-122"/>
                           <a:cs typeface="Calibri" pitchFamily="34" charset="-120"/>
                         </a:rPr>
-                        <a:t>M5 - Time de Construção - Instalações (Fabric, Constr e Mont.)</a:t>
+                        <a:t>Sistema de Dilúvio (FW e FF) - Troca de Tubulações</a:t>
                       </a:r>
                       <a:endParaRPr lang="en-US" sz="1000" dirty="0">
                         <a:latin typeface="Calibri" charset="0"/>
@@ -27719,7 +27719,7 @@
                           <a:ea typeface="Calibri" pitchFamily="34" charset="-122"/>
                           <a:cs typeface="Calibri" pitchFamily="34" charset="-120"/>
                         </a:rPr>
-                        <a:t>Sistema de Dilúvio (FW e FF) - Troca de Tubulações</a:t>
+                        <a:t>Inspeção de Sistema de Tubulação - 13 Sistemas</a:t>
                       </a:r>
                       <a:endParaRPr lang="en-US" sz="1000" dirty="0">
                         <a:latin typeface="Calibri" charset="0"/>
@@ -27787,7 +27787,7 @@
                           <a:ea typeface="Calibri" pitchFamily="34" charset="-122"/>
                           <a:cs typeface="Calibri" pitchFamily="34" charset="-120"/>
                         </a:rPr>
-                        <a:t>US$ 1,1 mi</a:t>
+                        <a:t>US$ 964,4 mil</a:t>
                       </a:r>
                       <a:endParaRPr lang="en-US" sz="1000" dirty="0">
                         <a:latin typeface="Calibri" charset="0"/>
@@ -27926,7 +27926,7 @@
                           <a:ea typeface="Calibri" pitchFamily="34" charset="-122"/>
                           <a:cs typeface="Calibri" pitchFamily="34" charset="-120"/>
                         </a:rPr>
-                        <a:t>Baixa de Material Mecânico</a:t>
+                        <a:t>Baixa de material Automação</a:t>
                       </a:r>
                       <a:endParaRPr lang="en-US" sz="1000" dirty="0">
                         <a:latin typeface="Calibri" charset="0"/>
@@ -27994,7 +27994,7 @@
                           <a:ea typeface="Calibri" pitchFamily="34" charset="-122"/>
                           <a:cs typeface="Calibri" pitchFamily="34" charset="-120"/>
                         </a:rPr>
-                        <a:t>US$ 960,0 mil</a:t>
+                        <a:t>US$ 628,8 mil</a:t>
                       </a:r>
                       <a:endParaRPr lang="en-US" sz="1000" dirty="0">
                         <a:latin typeface="Calibri" charset="0"/>
@@ -28064,7 +28064,7 @@
                           <a:ea typeface="Calibri" pitchFamily="34" charset="-122"/>
                           <a:cs typeface="Calibri" pitchFamily="34" charset="-120"/>
                         </a:rPr>
-                        <a:t>Baixa de material Automação</a:t>
+                        <a:t>M5 - Time de Construção - Instalações (Fabric, Constr e Mont.)</a:t>
                       </a:r>
                       <a:endParaRPr lang="en-US" sz="1000" dirty="0">
                         <a:latin typeface="Calibri" charset="0"/>
@@ -28132,7 +28132,7 @@
                           <a:ea typeface="Calibri" pitchFamily="34" charset="-122"/>
                           <a:cs typeface="Calibri" pitchFamily="34" charset="-120"/>
                         </a:rPr>
-                        <a:t>US$ 628,8 mil</a:t>
+                        <a:t>US$ 610,0 mil</a:t>
                       </a:r>
                       <a:endParaRPr lang="en-US" sz="1000" dirty="0">
                         <a:latin typeface="Calibri" charset="0"/>
@@ -28202,7 +28202,7 @@
                           <a:ea typeface="Calibri" pitchFamily="34" charset="-122"/>
                           <a:cs typeface="Calibri" pitchFamily="34" charset="-120"/>
                         </a:rPr>
-                        <a:t>M5 - Time de Construção - Instalações (Fabric, Constr e Mont.)</a:t>
+                        <a:t>Apoio à Manutenção - Time de Construção - Instalações</a:t>
                       </a:r>
                       <a:endParaRPr lang="en-US" sz="1000" dirty="0">
                         <a:latin typeface="Calibri" charset="0"/>
@@ -28270,7 +28270,7 @@
                           <a:ea typeface="Calibri" pitchFamily="34" charset="-122"/>
                           <a:cs typeface="Calibri" pitchFamily="34" charset="-120"/>
                         </a:rPr>
-                        <a:t>US$ 610,0 mil</a:t>
+                        <a:t>US$ 600,0 mil</a:t>
                       </a:r>
                       <a:endParaRPr lang="en-US" sz="1000" dirty="0">
                         <a:latin typeface="Calibri" charset="0"/>
@@ -28340,7 +28340,7 @@
                           <a:ea typeface="Calibri" pitchFamily="34" charset="-122"/>
                           <a:cs typeface="Calibri" pitchFamily="34" charset="-120"/>
                         </a:rPr>
-                        <a:t>Apoio à Manutenção - Time de Construção - Instalações</a:t>
+                        <a:t>Campanha de normatização de DTPs - WHP Polvo-A</a:t>
                       </a:r>
                       <a:endParaRPr lang="en-US" sz="1000" dirty="0">
                         <a:latin typeface="Calibri" charset="0"/>
@@ -28408,7 +28408,7 @@
                           <a:ea typeface="Calibri" pitchFamily="34" charset="-122"/>
                           <a:cs typeface="Calibri" pitchFamily="34" charset="-120"/>
                         </a:rPr>
-                        <a:t>US$ 600,0 mil</a:t>
+                        <a:t>US$ 419,8 mil</a:t>
                       </a:r>
                       <a:endParaRPr lang="en-US" sz="1000" dirty="0">
                         <a:latin typeface="Calibri" charset="0"/>
@@ -28478,7 +28478,7 @@
                           <a:ea typeface="Calibri" pitchFamily="34" charset="-122"/>
                           <a:cs typeface="Calibri" pitchFamily="34" charset="-120"/>
                         </a:rPr>
-                        <a:t>Campanha de normatização de DTPs - WHP Polvo-A</a:t>
+                        <a:t>INSPEÇÃO QUINQUENAL DE GUINDASTE NORTE</a:t>
                       </a:r>
                       <a:endParaRPr lang="en-US" sz="1000" dirty="0">
                         <a:latin typeface="Calibri" charset="0"/>
@@ -28546,7 +28546,7 @@
                           <a:ea typeface="Calibri" pitchFamily="34" charset="-122"/>
                           <a:cs typeface="Calibri" pitchFamily="34" charset="-120"/>
                         </a:rPr>
-                        <a:t>US$ 419,8 mil</a:t>
+                        <a:t>US$ 372,5 mil</a:t>
                       </a:r>
                       <a:endParaRPr lang="en-US" sz="1000" dirty="0">
                         <a:latin typeface="Calibri" charset="0"/>
